--- a/Sunumlar/Makale_Sunumu_Sigara_Birakma.pptx
+++ b/Sunumlar/Makale_Sunumu_Sigara_Birakma.pptx
@@ -134,7 +134,7 @@
   <p:extLst>
     <p:ext uri="{521415D9-36F7-43E2-AB2F-B90AF26B5E84}">
       <p14:sectionLst xmlns:p14="http://schemas.microsoft.com/office/powerpoint/2010/main">
-        <p14:section name="Giriş" id="{d1df8aac-a15c-e7d7-d4fd-0a1472f731d9}">
+        <p14:section name="Giriş" id="{cbd3b5d9-2f93-2580-60f6-41f54a367a1e}">
           <p14:sldIdLst>
             <p14:sldId id="256"/>
             <p14:sldId id="257"/>
@@ -145,7 +145,7 @@
             <p14:sldId id="262"/>
           </p14:sldIdLst>
         </p14:section>
-        <p14:section name="Gereç ve yöntem" id="{f6b166db-860e-76c0-5a5f-24a71efd9b21}">
+        <p14:section name="Gereç ve yöntem" id="{04071607-34fb-0e23-ad47-b8414c83e64f}">
           <p14:sldIdLst>
             <p14:sldId id="263"/>
             <p14:sldId id="264"/>
@@ -153,7 +153,7 @@
             <p14:sldId id="266"/>
           </p14:sldIdLst>
         </p14:section>
-        <p14:section name="Bulgular" id="{ab9d2cf2-0dcb-bc5d-c8f0-075801f5283b}">
+        <p14:section name="Bulgular" id="{68d7aa3f-a07b-6d95-8eb4-aff56fc4ece4}">
           <p14:sldIdLst>
             <p14:sldId id="267"/>
             <p14:sldId id="268"/>
@@ -163,21 +163,17 @@
             <p14:sldId id="272"/>
             <p14:sldId id="273"/>
             <p14:sldId id="274"/>
+            <p14:sldId id="275"/>
           </p14:sldIdLst>
         </p14:section>
-        <p14:section name="Tartışma" id="{6f319033-52aa-11cc-cf90-9f85887f2524}">
+        <p14:section name="Tartışma" id="{0b6da766-f717-08aa-80f2-d174bc057a12}">
           <p14:sldIdLst>
-            <p14:sldId id="275"/>
             <p14:sldId id="276"/>
-          </p14:sldIdLst>
-        </p14:section>
-        <p14:section name="Eleştirel değerlendirme" id="{f5ba0851-bc4b-d583-0f13-5a06525f3d6c}">
-          <p14:sldIdLst>
             <p14:sldId id="277"/>
             <p14:sldId id="278"/>
           </p14:sldIdLst>
         </p14:section>
-        <p14:section name="Sonuç" id="{4fb9c53c-7c28-b941-543f-4341cf7da950}">
+        <p14:section name="Sonuç" id="{d7d5b8d7-35cc-0bdf-fc0e-24c71fe0ebf6}">
           <p14:sldIdLst>
             <p14:sldId id="279"/>
             <p14:sldId id="280"/>
@@ -193,1175 +189,6 @@
     </p:ext>
   </p:extLst>
 </p:presentation>
-</file>
-
-<file path=ppt/charts/chart1.xml><?xml version="1.0" encoding="utf-8"?>
-<c:chartSpace xmlns:c="http://schemas.openxmlformats.org/drawingml/2006/chart" xmlns:a="http://schemas.openxmlformats.org/drawingml/2006/main" xmlns:r="http://schemas.openxmlformats.org/officeDocument/2006/relationships">
-  <c:date1904 val="0"/>
-  <c:roundedCorners val="1"/>
-  <c:chart>
-    <c:autoTitleDeleted val="1"/>
-    <c:plotArea>
-      <c:layout/>
-      <c:barChart>
-        <c:barDir val="col"/>
-        <c:grouping val="clustered"/>
-        <c:varyColors val="0"/>
-        <c:ser>
-          <c:idx val="0"/>
-          <c:order val="0"/>
-          <c:tx>
-            <c:strRef>
-              <c:f>Sheet1!$B$1</c:f>
-              <c:strCache>
-                <c:ptCount val="1"/>
-                <c:pt idx="0">
-                  <c:v>FNBT düzeyi</c:v>
-                </c:pt>
-              </c:strCache>
-            </c:strRef>
-          </c:tx>
-          <c:spPr>
-            <a:solidFill>
-              <a:srgbClr val="2A9D8F"/>
-            </a:solidFill>
-            <a:effectLst/>
-          </c:spPr>
-          <c:invertIfNegative val="0"/>
-          <c:dLbls>
-            <c:numFmt formatCode="&quot;%&quot;0.0" sourceLinked="0"/>
-            <c:txPr>
-              <a:bodyPr/>
-              <a:lstStyle/>
-              <a:p>
-                <a:pPr>
-                  <a:defRPr b="1" i="0" strike="noStrike" sz="1800" u="none">
-                    <a:solidFill>
-                      <a:srgbClr val="0F4C5C"/>
-                    </a:solidFill>
-                    <a:latin typeface="+mn-lt"/>
-                  </a:defRPr>
-                </a:pPr>
-              </a:p>
-            </c:txPr>
-            <c:showLegendKey val="0"/>
-            <c:showVal val="1"/>
-            <c:showCatName val="0"/>
-            <c:showSerName val="0"/>
-            <c:showPercent val="0"/>
-            <c:showBubbleSize val="0"/>
-            <c:showLeaderLines val="0"/>
-          </c:dLbls>
-          <c:cat>
-            <c:multiLvlStrRef>
-              <c:f>Sheet1!$A$2:$A$4</c:f>
-              <c:multiLvlStrCache>
-                <c:ptCount val="3"/>
-                <c:lvl>
-                  <c:pt idx="0">
-                    <c:v>Düşük (0–2)</c:v>
-                  </c:pt>
-                  <c:pt idx="1">
-                    <c:v>Orta (3–7)</c:v>
-                  </c:pt>
-                  <c:pt idx="2">
-                    <c:v>Yüksek (8–10)</c:v>
-                  </c:pt>
-                </c:lvl>
-              </c:multiLvlStrCache>
-            </c:multiLvlStrRef>
-          </c:cat>
-          <c:val>
-            <c:numRef>
-              <c:f>Sheet1!$B$2:$B$4</c:f>
-              <c:numCache>
-                <c:formatCode>General</c:formatCode>
-                <c:ptCount val="3"/>
-                <c:pt idx="0">
-                  <c:v>13.19</c:v>
-                </c:pt>
-                <c:pt idx="1">
-                  <c:v>61.34</c:v>
-                </c:pt>
-                <c:pt idx="2">
-                  <c:v>25.46</c:v>
-                </c:pt>
-              </c:numCache>
-            </c:numRef>
-          </c:val>
-        </c:ser>
-        <c:dLbls>
-          <c:numFmt formatCode="&quot;%&quot;0.0" sourceLinked="0"/>
-          <c:txPr>
-            <a:bodyPr/>
-            <a:lstStyle/>
-            <a:p>
-              <a:pPr>
-                <a:defRPr b="1" i="0" strike="noStrike" sz="1800" u="none">
-                  <a:solidFill>
-                    <a:srgbClr val="0F4C5C"/>
-                  </a:solidFill>
-                  <a:latin typeface="+mn-lt"/>
-                </a:defRPr>
-              </a:pPr>
-            </a:p>
-          </c:txPr>
-          <c:showLegendKey val="0"/>
-          <c:showVal val="1"/>
-          <c:showCatName val="0"/>
-          <c:showSerName val="0"/>
-          <c:showPercent val="0"/>
-          <c:showBubbleSize val="0"/>
-          <c:showLeaderLines val="0"/>
-        </c:dLbls>
-        <c:gapWidth val="55"/>
-        <c:overlap val="0"/>
-        <c:axId val="2094734554"/>
-        <c:axId val="2094734552"/>
-        <c:axId val="2094734556"/>
-      </c:barChart>
-      <c:catAx>
-        <c:axId val="2094734554"/>
-        <c:scaling>
-          <c:orientation val="minMax"/>
-        </c:scaling>
-        <c:delete val="0"/>
-        <c:axPos val="b"/>
-        <c:numFmt formatCode="General" sourceLinked="1"/>
-        <c:majorTickMark val="out"/>
-        <c:minorTickMark val="none"/>
-        <c:tickLblPos val="low"/>
-        <c:spPr>
-          <a:ln w="12700" cap="flat">
-            <a:noFill/>
-            <a:prstDash val="solid"/>
-            <a:round/>
-          </a:ln>
-        </c:spPr>
-        <c:txPr>
-          <a:bodyPr/>
-          <a:lstStyle/>
-          <a:p>
-            <a:pPr>
-              <a:defRPr sz="1800" b="0" i="0" u="none" strike="noStrike">
-                <a:solidFill>
-                  <a:srgbClr val="0F4C5C"/>
-                </a:solidFill>
-                <a:latin typeface="+mn-lt"/>
-              </a:defRPr>
-            </a:pPr>
-            <a:endParaRPr lang="en-US"/>
-          </a:p>
-        </c:txPr>
-        <c:crossAx val="2094734552"/>
-        <c:crosses val="autoZero"/>
-        <c:auto val="1"/>
-        <c:lblAlgn val="ctr"/>
-        <c:noMultiLvlLbl val="1"/>
-      </c:catAx>
-      <c:valAx>
-        <c:axId val="2094734552"/>
-        <c:scaling>
-          <c:orientation val="minMax"/>
-          <c:max val="75"/>
-          <c:min val="0"/>
-        </c:scaling>
-        <c:delete val="1"/>
-        <c:axPos val="l"/>
-        <c:numFmt formatCode="General" sourceLinked="0"/>
-        <c:majorTickMark val="out"/>
-        <c:minorTickMark val="none"/>
-        <c:tickLblPos val="nextTo"/>
-        <c:spPr>
-          <a:ln w="12700" cap="flat">
-            <a:solidFill>
-              <a:srgbClr val="888888"/>
-            </a:solidFill>
-            <a:prstDash val="solid"/>
-            <a:round/>
-          </a:ln>
-        </c:spPr>
-        <c:txPr>
-          <a:bodyPr/>
-          <a:lstStyle/>
-          <a:p>
-            <a:pPr>
-              <a:defRPr sz="1200" b="0" i="0" u="none" strike="noStrike">
-                <a:solidFill>
-                  <a:srgbClr val="000000"/>
-                </a:solidFill>
-                <a:latin typeface="Arial"/>
-              </a:defRPr>
-            </a:pPr>
-            <a:endParaRPr lang="en-US"/>
-          </a:p>
-        </c:txPr>
-        <c:crossAx val="2094734554"/>
-        <c:crosses val="autoZero"/>
-        <c:crossBetween val="between"/>
-      </c:valAx>
-      <c:spPr>
-        <a:noFill/>
-        <a:ln>
-          <a:noFill/>
-        </a:ln>
-        <a:effectLst/>
-      </c:spPr>
-    </c:plotArea>
-    <c:plotVisOnly val="1"/>
-    <c:dispBlanksAs val="span"/>
-  </c:chart>
-  <c:spPr>
-    <a:noFill/>
-    <a:ln>
-      <a:noFill/>
-    </a:ln>
-    <a:effectLst/>
-  </c:spPr>
-  <c:externalData r:id="rId1">
-    <c:autoUpdate val="0"/>
-  </c:externalData>
-</c:chartSpace>
-</file>
-
-<file path=ppt/charts/chart2.xml><?xml version="1.0" encoding="utf-8"?>
-<c:chartSpace xmlns:c="http://schemas.openxmlformats.org/drawingml/2006/chart" xmlns:a="http://schemas.openxmlformats.org/drawingml/2006/main" xmlns:r="http://schemas.openxmlformats.org/officeDocument/2006/relationships">
-  <c:date1904 val="0"/>
-  <c:roundedCorners val="1"/>
-  <c:chart>
-    <c:autoTitleDeleted val="1"/>
-    <c:plotArea>
-      <c:layout/>
-      <c:barChart>
-        <c:barDir val="col"/>
-        <c:grouping val="clustered"/>
-        <c:varyColors val="0"/>
-        <c:ser>
-          <c:idx val="0"/>
-          <c:order val="0"/>
-          <c:tx>
-            <c:strRef>
-              <c:f>Sheet1!$B$1</c:f>
-              <c:strCache>
-                <c:ptCount val="1"/>
-                <c:pt idx="0">
-                  <c:v>Bırakma oranı</c:v>
-                </c:pt>
-              </c:strCache>
-            </c:strRef>
-          </c:tx>
-          <c:spPr>
-            <a:solidFill>
-              <a:srgbClr val="0F4C5C"/>
-            </a:solidFill>
-            <a:effectLst/>
-          </c:spPr>
-          <c:invertIfNegative val="0"/>
-          <c:dLbls>
-            <c:numFmt formatCode="&quot;%&quot;0.0" sourceLinked="0"/>
-            <c:txPr>
-              <a:bodyPr/>
-              <a:lstStyle/>
-              <a:p>
-                <a:pPr>
-                  <a:defRPr b="1" i="0" strike="noStrike" sz="2400" u="none">
-                    <a:solidFill>
-                      <a:srgbClr val="0F4C5C"/>
-                    </a:solidFill>
-                    <a:latin typeface="+mn-lt"/>
-                  </a:defRPr>
-                </a:pPr>
-              </a:p>
-            </c:txPr>
-            <c:showLegendKey val="0"/>
-            <c:showVal val="1"/>
-            <c:showCatName val="0"/>
-            <c:showSerName val="0"/>
-            <c:showPercent val="0"/>
-            <c:showBubbleSize val="0"/>
-            <c:showLeaderLines val="0"/>
-          </c:dLbls>
-          <c:cat>
-            <c:multiLvlStrRef>
-              <c:f>Sheet1!$A$2:$A$3</c:f>
-              <c:multiLvlStrCache>
-                <c:ptCount val="2"/>
-                <c:lvl>
-                  <c:pt idx="0">
-                    <c:v>Hanede sigara içen yok</c:v>
-                  </c:pt>
-                  <c:pt idx="1">
-                    <c:v>Hanede sigara içen var</c:v>
-                  </c:pt>
-                </c:lvl>
-              </c:multiLvlStrCache>
-            </c:multiLvlStrRef>
-          </c:cat>
-          <c:val>
-            <c:numRef>
-              <c:f>Sheet1!$B$2:$B$3</c:f>
-              <c:numCache>
-                <c:formatCode>General</c:formatCode>
-                <c:ptCount val="2"/>
-                <c:pt idx="0">
-                  <c:v>39.84</c:v>
-                </c:pt>
-                <c:pt idx="1">
-                  <c:v>25.32</c:v>
-                </c:pt>
-              </c:numCache>
-            </c:numRef>
-          </c:val>
-        </c:ser>
-        <c:dLbls>
-          <c:numFmt formatCode="&quot;%&quot;0.0" sourceLinked="0"/>
-          <c:txPr>
-            <a:bodyPr/>
-            <a:lstStyle/>
-            <a:p>
-              <a:pPr>
-                <a:defRPr b="1" i="0" strike="noStrike" sz="2400" u="none">
-                  <a:solidFill>
-                    <a:srgbClr val="0F4C5C"/>
-                  </a:solidFill>
-                  <a:latin typeface="+mn-lt"/>
-                </a:defRPr>
-              </a:pPr>
-            </a:p>
-          </c:txPr>
-          <c:showLegendKey val="0"/>
-          <c:showVal val="1"/>
-          <c:showCatName val="0"/>
-          <c:showSerName val="0"/>
-          <c:showPercent val="0"/>
-          <c:showBubbleSize val="0"/>
-          <c:showLeaderLines val="0"/>
-        </c:dLbls>
-        <c:gapWidth val="55"/>
-        <c:overlap val="0"/>
-        <c:axId val="2094734554"/>
-        <c:axId val="2094734552"/>
-        <c:axId val="2094734556"/>
-      </c:barChart>
-      <c:catAx>
-        <c:axId val="2094734554"/>
-        <c:scaling>
-          <c:orientation val="minMax"/>
-        </c:scaling>
-        <c:delete val="0"/>
-        <c:axPos val="b"/>
-        <c:numFmt formatCode="General" sourceLinked="1"/>
-        <c:majorTickMark val="out"/>
-        <c:minorTickMark val="none"/>
-        <c:tickLblPos val="low"/>
-        <c:spPr>
-          <a:ln w="12700" cap="flat">
-            <a:noFill/>
-            <a:prstDash val="solid"/>
-            <a:round/>
-          </a:ln>
-        </c:spPr>
-        <c:txPr>
-          <a:bodyPr/>
-          <a:lstStyle/>
-          <a:p>
-            <a:pPr>
-              <a:defRPr sz="1800" b="0" i="0" u="none" strike="noStrike">
-                <a:solidFill>
-                  <a:srgbClr val="0F4C5C"/>
-                </a:solidFill>
-                <a:latin typeface="+mn-lt"/>
-              </a:defRPr>
-            </a:pPr>
-            <a:endParaRPr lang="en-US"/>
-          </a:p>
-        </c:txPr>
-        <c:crossAx val="2094734552"/>
-        <c:crosses val="autoZero"/>
-        <c:auto val="1"/>
-        <c:lblAlgn val="ctr"/>
-        <c:noMultiLvlLbl val="1"/>
-      </c:catAx>
-      <c:valAx>
-        <c:axId val="2094734552"/>
-        <c:scaling>
-          <c:orientation val="minMax"/>
-          <c:max val="50"/>
-          <c:min val="0"/>
-        </c:scaling>
-        <c:delete val="1"/>
-        <c:axPos val="l"/>
-        <c:numFmt formatCode="General" sourceLinked="0"/>
-        <c:majorTickMark val="out"/>
-        <c:minorTickMark val="none"/>
-        <c:tickLblPos val="nextTo"/>
-        <c:spPr>
-          <a:ln w="12700" cap="flat">
-            <a:solidFill>
-              <a:srgbClr val="888888"/>
-            </a:solidFill>
-            <a:prstDash val="solid"/>
-            <a:round/>
-          </a:ln>
-        </c:spPr>
-        <c:txPr>
-          <a:bodyPr/>
-          <a:lstStyle/>
-          <a:p>
-            <a:pPr>
-              <a:defRPr sz="1200" b="0" i="0" u="none" strike="noStrike">
-                <a:solidFill>
-                  <a:srgbClr val="000000"/>
-                </a:solidFill>
-                <a:latin typeface="Arial"/>
-              </a:defRPr>
-            </a:pPr>
-            <a:endParaRPr lang="en-US"/>
-          </a:p>
-        </c:txPr>
-        <c:crossAx val="2094734554"/>
-        <c:crosses val="autoZero"/>
-        <c:crossBetween val="between"/>
-      </c:valAx>
-      <c:spPr>
-        <a:noFill/>
-        <a:ln>
-          <a:noFill/>
-        </a:ln>
-        <a:effectLst/>
-      </c:spPr>
-    </c:plotArea>
-    <c:plotVisOnly val="1"/>
-    <c:dispBlanksAs val="span"/>
-  </c:chart>
-  <c:spPr>
-    <a:noFill/>
-    <a:ln>
-      <a:noFill/>
-    </a:ln>
-    <a:effectLst/>
-  </c:spPr>
-  <c:externalData r:id="rId1">
-    <c:autoUpdate val="0"/>
-  </c:externalData>
-</c:chartSpace>
-</file>
-
-<file path=ppt/charts/chart3.xml><?xml version="1.0" encoding="utf-8"?>
-<c:chartSpace xmlns:c="http://schemas.openxmlformats.org/drawingml/2006/chart" xmlns:a="http://schemas.openxmlformats.org/drawingml/2006/main" xmlns:r="http://schemas.openxmlformats.org/officeDocument/2006/relationships">
-  <c:date1904 val="0"/>
-  <c:roundedCorners val="1"/>
-  <c:chart>
-    <c:autoTitleDeleted val="1"/>
-    <c:plotArea>
-      <c:layout/>
-      <c:barChart>
-        <c:barDir val="bar"/>
-        <c:grouping val="clustered"/>
-        <c:varyColors val="0"/>
-        <c:ser>
-          <c:idx val="0"/>
-          <c:order val="0"/>
-          <c:tx>
-            <c:strRef>
-              <c:f>Sheet1!$B$1</c:f>
-              <c:strCache>
-                <c:ptCount val="1"/>
-                <c:pt idx="0">
-                  <c:v>Hasta sayısı</c:v>
-                </c:pt>
-              </c:strCache>
-            </c:strRef>
-          </c:tx>
-          <c:spPr>
-            <a:solidFill>
-              <a:srgbClr val="2A9D8F"/>
-            </a:solidFill>
-            <a:effectLst/>
-          </c:spPr>
-          <c:invertIfNegative val="0"/>
-          <c:dLbls>
-            <c:numFmt formatCode="0" sourceLinked="0"/>
-            <c:txPr>
-              <a:bodyPr/>
-              <a:lstStyle/>
-              <a:p>
-                <a:pPr>
-                  <a:defRPr b="1" i="0" strike="noStrike" sz="1800" u="none">
-                    <a:solidFill>
-                      <a:srgbClr val="0F4C5C"/>
-                    </a:solidFill>
-                    <a:latin typeface="+mn-lt"/>
-                  </a:defRPr>
-                </a:pPr>
-              </a:p>
-            </c:txPr>
-            <c:showLegendKey val="0"/>
-            <c:showVal val="1"/>
-            <c:showCatName val="0"/>
-            <c:showSerName val="0"/>
-            <c:showPercent val="0"/>
-            <c:showBubbleSize val="0"/>
-            <c:showLeaderLines val="0"/>
-          </c:dLbls>
-          <c:cat>
-            <c:multiLvlStrRef>
-              <c:f>Sheet1!$A$2:$A$7</c:f>
-              <c:multiLvlStrCache>
-                <c:ptCount val="6"/>
-                <c:lvl>
-                  <c:pt idx="0">
-                    <c:v>Kombine tedavi</c:v>
-                  </c:pt>
-                  <c:pt idx="1">
-                    <c:v>Bupropion</c:v>
-                  </c:pt>
-                  <c:pt idx="2">
-                    <c:v>NRT</c:v>
-                  </c:pt>
-                  <c:pt idx="3">
-                    <c:v>Sitizin</c:v>
-                  </c:pt>
-                  <c:pt idx="4">
-                    <c:v>Vareniklin</c:v>
-                  </c:pt>
-                  <c:pt idx="5">
-                    <c:v>İlaçsız (davranışsal)</c:v>
-                  </c:pt>
-                </c:lvl>
-              </c:multiLvlStrCache>
-            </c:multiLvlStrRef>
-          </c:cat>
-          <c:val>
-            <c:numRef>
-              <c:f>Sheet1!$B$2:$B$7</c:f>
-              <c:numCache>
-                <c:formatCode>General</c:formatCode>
-                <c:ptCount val="6"/>
-                <c:pt idx="0">
-                  <c:v>141</c:v>
-                </c:pt>
-                <c:pt idx="1">
-                  <c:v>109</c:v>
-                </c:pt>
-                <c:pt idx="2">
-                  <c:v>80</c:v>
-                </c:pt>
-                <c:pt idx="3">
-                  <c:v>34</c:v>
-                </c:pt>
-                <c:pt idx="4">
-                  <c:v>18</c:v>
-                </c:pt>
-                <c:pt idx="5">
-                  <c:v>17</c:v>
-                </c:pt>
-              </c:numCache>
-            </c:numRef>
-          </c:val>
-        </c:ser>
-        <c:dLbls>
-          <c:numFmt formatCode="0" sourceLinked="0"/>
-          <c:txPr>
-            <a:bodyPr/>
-            <a:lstStyle/>
-            <a:p>
-              <a:pPr>
-                <a:defRPr b="1" i="0" strike="noStrike" sz="1800" u="none">
-                  <a:solidFill>
-                    <a:srgbClr val="0F4C5C"/>
-                  </a:solidFill>
-                  <a:latin typeface="+mn-lt"/>
-                </a:defRPr>
-              </a:pPr>
-            </a:p>
-          </c:txPr>
-          <c:showLegendKey val="0"/>
-          <c:showVal val="1"/>
-          <c:showCatName val="0"/>
-          <c:showSerName val="0"/>
-          <c:showPercent val="0"/>
-          <c:showBubbleSize val="0"/>
-          <c:showLeaderLines val="0"/>
-        </c:dLbls>
-        <c:gapWidth val="55"/>
-        <c:overlap val="0"/>
-        <c:axId val="2094734554"/>
-        <c:axId val="2094734552"/>
-        <c:axId val="2094734556"/>
-      </c:barChart>
-      <c:catAx>
-        <c:axId val="2094734554"/>
-        <c:scaling>
-          <c:orientation val="maxMin"/>
-        </c:scaling>
-        <c:delete val="0"/>
-        <c:axPos val="l"/>
-        <c:numFmt formatCode="General" sourceLinked="1"/>
-        <c:majorTickMark val="out"/>
-        <c:minorTickMark val="none"/>
-        <c:tickLblPos val="nextTo"/>
-        <c:spPr>
-          <a:ln w="12700" cap="flat">
-            <a:noFill/>
-            <a:prstDash val="solid"/>
-            <a:round/>
-          </a:ln>
-        </c:spPr>
-        <c:txPr>
-          <a:bodyPr/>
-          <a:lstStyle/>
-          <a:p>
-            <a:pPr>
-              <a:defRPr sz="1800" b="0" i="0" u="none" strike="noStrike">
-                <a:solidFill>
-                  <a:srgbClr val="0F4C5C"/>
-                </a:solidFill>
-                <a:latin typeface="+mn-lt"/>
-              </a:defRPr>
-            </a:pPr>
-            <a:endParaRPr lang="en-US"/>
-          </a:p>
-        </c:txPr>
-        <c:crossAx val="2094734552"/>
-        <c:crosses val="autoZero"/>
-        <c:auto val="1"/>
-        <c:lblAlgn val="ctr"/>
-        <c:noMultiLvlLbl val="1"/>
-      </c:catAx>
-      <c:valAx>
-        <c:axId val="2094734552"/>
-        <c:scaling>
-          <c:orientation val="minMax"/>
-          <c:max val="165"/>
-          <c:min val="0"/>
-        </c:scaling>
-        <c:delete val="1"/>
-        <c:axPos val="b"/>
-        <c:numFmt formatCode="General" sourceLinked="0"/>
-        <c:majorTickMark val="out"/>
-        <c:minorTickMark val="none"/>
-        <c:tickLblPos val="low"/>
-        <c:spPr>
-          <a:ln w="12700" cap="flat">
-            <a:solidFill>
-              <a:srgbClr val="888888"/>
-            </a:solidFill>
-            <a:prstDash val="solid"/>
-            <a:round/>
-          </a:ln>
-        </c:spPr>
-        <c:txPr>
-          <a:bodyPr/>
-          <a:lstStyle/>
-          <a:p>
-            <a:pPr>
-              <a:defRPr sz="1200" b="0" i="0" u="none" strike="noStrike">
-                <a:solidFill>
-                  <a:srgbClr val="000000"/>
-                </a:solidFill>
-                <a:latin typeface="Arial"/>
-              </a:defRPr>
-            </a:pPr>
-            <a:endParaRPr lang="en-US"/>
-          </a:p>
-        </c:txPr>
-        <c:crossAx val="2094734554"/>
-        <c:crosses val="autoZero"/>
-        <c:crossBetween val="between"/>
-      </c:valAx>
-      <c:spPr>
-        <a:noFill/>
-        <a:ln>
-          <a:noFill/>
-        </a:ln>
-        <a:effectLst/>
-      </c:spPr>
-    </c:plotArea>
-    <c:plotVisOnly val="1"/>
-    <c:dispBlanksAs val="span"/>
-  </c:chart>
-  <c:spPr>
-    <a:noFill/>
-    <a:ln>
-      <a:noFill/>
-    </a:ln>
-    <a:effectLst/>
-  </c:spPr>
-  <c:externalData r:id="rId1">
-    <c:autoUpdate val="0"/>
-  </c:externalData>
-</c:chartSpace>
-</file>
-
-<file path=ppt/charts/chart4.xml><?xml version="1.0" encoding="utf-8"?>
-<c:chartSpace xmlns:c="http://schemas.openxmlformats.org/drawingml/2006/chart" xmlns:a="http://schemas.openxmlformats.org/drawingml/2006/main" xmlns:r="http://schemas.openxmlformats.org/officeDocument/2006/relationships">
-  <c:date1904 val="0"/>
-  <c:roundedCorners val="1"/>
-  <c:chart>
-    <c:autoTitleDeleted val="1"/>
-    <c:plotArea>
-      <c:layout/>
-      <c:barChart>
-        <c:barDir val="bar"/>
-        <c:grouping val="clustered"/>
-        <c:varyColors val="0"/>
-        <c:ser>
-          <c:idx val="0"/>
-          <c:order val="0"/>
-          <c:tx>
-            <c:strRef>
-              <c:f>Sheet1!$B$1</c:f>
-              <c:strCache>
-                <c:ptCount val="1"/>
-                <c:pt idx="0">
-                  <c:v>Bırakma oranı</c:v>
-                </c:pt>
-              </c:strCache>
-            </c:strRef>
-          </c:tx>
-          <c:spPr>
-            <a:solidFill>
-              <a:srgbClr val="0F4C5C"/>
-            </a:solidFill>
-            <a:effectLst/>
-          </c:spPr>
-          <c:invertIfNegative val="0"/>
-          <c:dLbls>
-            <c:numFmt formatCode="&quot;%&quot;0.0" sourceLinked="0"/>
-            <c:txPr>
-              <a:bodyPr/>
-              <a:lstStyle/>
-              <a:p>
-                <a:pPr>
-                  <a:defRPr b="1" i="0" strike="noStrike" sz="1800" u="none">
-                    <a:solidFill>
-                      <a:srgbClr val="0F4C5C"/>
-                    </a:solidFill>
-                    <a:latin typeface="+mn-lt"/>
-                  </a:defRPr>
-                </a:pPr>
-              </a:p>
-            </c:txPr>
-            <c:showLegendKey val="0"/>
-            <c:showVal val="1"/>
-            <c:showCatName val="0"/>
-            <c:showSerName val="0"/>
-            <c:showPercent val="0"/>
-            <c:showBubbleSize val="0"/>
-            <c:showLeaderLines val="0"/>
-          </c:dLbls>
-          <c:cat>
-            <c:multiLvlStrRef>
-              <c:f>Sheet1!$A$2:$A$7</c:f>
-              <c:multiLvlStrCache>
-                <c:ptCount val="6"/>
-                <c:lvl>
-                  <c:pt idx="0">
-                    <c:v>Vareniklin</c:v>
-                  </c:pt>
-                  <c:pt idx="1">
-                    <c:v>Kombine tedavi</c:v>
-                  </c:pt>
-                  <c:pt idx="2">
-                    <c:v>NRT</c:v>
-                  </c:pt>
-                  <c:pt idx="3">
-                    <c:v>Sitizin</c:v>
-                  </c:pt>
-                  <c:pt idx="4">
-                    <c:v>İlaçsız</c:v>
-                  </c:pt>
-                  <c:pt idx="5">
-                    <c:v>Bupropion</c:v>
-                  </c:pt>
-                </c:lvl>
-              </c:multiLvlStrCache>
-            </c:multiLvlStrRef>
-          </c:cat>
-          <c:val>
-            <c:numRef>
-              <c:f>Sheet1!$B$2:$B$7</c:f>
-              <c:numCache>
-                <c:formatCode>General</c:formatCode>
-                <c:ptCount val="6"/>
-                <c:pt idx="0">
-                  <c:v>44.45</c:v>
-                </c:pt>
-                <c:pt idx="1">
-                  <c:v>43.98</c:v>
-                </c:pt>
-                <c:pt idx="2">
-                  <c:v>37.5</c:v>
-                </c:pt>
-                <c:pt idx="3">
-                  <c:v>35.3</c:v>
-                </c:pt>
-                <c:pt idx="4">
-                  <c:v>35.3</c:v>
-                </c:pt>
-                <c:pt idx="5">
-                  <c:v>16.52</c:v>
-                </c:pt>
-              </c:numCache>
-            </c:numRef>
-          </c:val>
-        </c:ser>
-        <c:dLbls>
-          <c:numFmt formatCode="&quot;%&quot;0.0" sourceLinked="0"/>
-          <c:txPr>
-            <a:bodyPr/>
-            <a:lstStyle/>
-            <a:p>
-              <a:pPr>
-                <a:defRPr b="1" i="0" strike="noStrike" sz="1800" u="none">
-                  <a:solidFill>
-                    <a:srgbClr val="0F4C5C"/>
-                  </a:solidFill>
-                  <a:latin typeface="+mn-lt"/>
-                </a:defRPr>
-              </a:pPr>
-            </a:p>
-          </c:txPr>
-          <c:showLegendKey val="0"/>
-          <c:showVal val="1"/>
-          <c:showCatName val="0"/>
-          <c:showSerName val="0"/>
-          <c:showPercent val="0"/>
-          <c:showBubbleSize val="0"/>
-          <c:showLeaderLines val="0"/>
-        </c:dLbls>
-        <c:gapWidth val="55"/>
-        <c:overlap val="0"/>
-        <c:axId val="2094734554"/>
-        <c:axId val="2094734552"/>
-        <c:axId val="2094734556"/>
-      </c:barChart>
-      <c:catAx>
-        <c:axId val="2094734554"/>
-        <c:scaling>
-          <c:orientation val="maxMin"/>
-        </c:scaling>
-        <c:delete val="0"/>
-        <c:axPos val="l"/>
-        <c:numFmt formatCode="General" sourceLinked="1"/>
-        <c:majorTickMark val="out"/>
-        <c:minorTickMark val="none"/>
-        <c:tickLblPos val="nextTo"/>
-        <c:spPr>
-          <a:ln w="12700" cap="flat">
-            <a:noFill/>
-            <a:prstDash val="solid"/>
-            <a:round/>
-          </a:ln>
-        </c:spPr>
-        <c:txPr>
-          <a:bodyPr/>
-          <a:lstStyle/>
-          <a:p>
-            <a:pPr>
-              <a:defRPr sz="1800" b="0" i="0" u="none" strike="noStrike">
-                <a:solidFill>
-                  <a:srgbClr val="0F4C5C"/>
-                </a:solidFill>
-                <a:latin typeface="+mn-lt"/>
-              </a:defRPr>
-            </a:pPr>
-            <a:endParaRPr lang="en-US"/>
-          </a:p>
-        </c:txPr>
-        <c:crossAx val="2094734552"/>
-        <c:crosses val="autoZero"/>
-        <c:auto val="1"/>
-        <c:lblAlgn val="ctr"/>
-        <c:noMultiLvlLbl val="1"/>
-      </c:catAx>
-      <c:valAx>
-        <c:axId val="2094734552"/>
-        <c:scaling>
-          <c:orientation val="minMax"/>
-          <c:max val="55"/>
-          <c:min val="0"/>
-        </c:scaling>
-        <c:delete val="1"/>
-        <c:axPos val="b"/>
-        <c:numFmt formatCode="General" sourceLinked="0"/>
-        <c:majorTickMark val="out"/>
-        <c:minorTickMark val="none"/>
-        <c:tickLblPos val="low"/>
-        <c:spPr>
-          <a:ln w="12700" cap="flat">
-            <a:solidFill>
-              <a:srgbClr val="888888"/>
-            </a:solidFill>
-            <a:prstDash val="solid"/>
-            <a:round/>
-          </a:ln>
-        </c:spPr>
-        <c:txPr>
-          <a:bodyPr/>
-          <a:lstStyle/>
-          <a:p>
-            <a:pPr>
-              <a:defRPr sz="1200" b="0" i="0" u="none" strike="noStrike">
-                <a:solidFill>
-                  <a:srgbClr val="000000"/>
-                </a:solidFill>
-                <a:latin typeface="Arial"/>
-              </a:defRPr>
-            </a:pPr>
-            <a:endParaRPr lang="en-US"/>
-          </a:p>
-        </c:txPr>
-        <c:crossAx val="2094734554"/>
-        <c:crosses val="autoZero"/>
-        <c:crossBetween val="between"/>
-      </c:valAx>
-      <c:spPr>
-        <a:noFill/>
-        <a:ln>
-          <a:noFill/>
-        </a:ln>
-        <a:effectLst/>
-      </c:spPr>
-    </c:plotArea>
-    <c:plotVisOnly val="1"/>
-    <c:dispBlanksAs val="span"/>
-  </c:chart>
-  <c:spPr>
-    <a:noFill/>
-    <a:ln>
-      <a:noFill/>
-    </a:ln>
-    <a:effectLst/>
-  </c:spPr>
-  <c:externalData r:id="rId1">
-    <c:autoUpdate val="0"/>
-  </c:externalData>
-</c:chartSpace>
-</file>
-
-<file path=ppt/charts/chart5.xml><?xml version="1.0" encoding="utf-8"?>
-<c:chartSpace xmlns:c="http://schemas.openxmlformats.org/drawingml/2006/chart" xmlns:a="http://schemas.openxmlformats.org/drawingml/2006/main" xmlns:r="http://schemas.openxmlformats.org/officeDocument/2006/relationships">
-  <c:date1904 val="0"/>
-  <c:roundedCorners val="1"/>
-  <c:chart>
-    <c:autoTitleDeleted val="1"/>
-    <c:plotArea>
-      <c:layout/>
-      <c:barChart>
-        <c:barDir val="col"/>
-        <c:grouping val="clustered"/>
-        <c:varyColors val="0"/>
-        <c:ser>
-          <c:idx val="0"/>
-          <c:order val="0"/>
-          <c:tx>
-            <c:strRef>
-              <c:f>Sheet1!$B$1</c:f>
-              <c:strCache>
-                <c:ptCount val="1"/>
-                <c:pt idx="0">
-                  <c:v>Bırakma oranı</c:v>
-                </c:pt>
-              </c:strCache>
-            </c:strRef>
-          </c:tx>
-          <c:spPr>
-            <a:solidFill>
-              <a:srgbClr val="2A9D8F"/>
-            </a:solidFill>
-            <a:effectLst/>
-          </c:spPr>
-          <c:invertIfNegative val="0"/>
-          <c:dLbls>
-            <c:numFmt formatCode="&quot;%&quot;0.0" sourceLinked="0"/>
-            <c:txPr>
-              <a:bodyPr/>
-              <a:lstStyle/>
-              <a:p>
-                <a:pPr>
-                  <a:defRPr b="1" i="0" strike="noStrike" sz="2400" u="none">
-                    <a:solidFill>
-                      <a:srgbClr val="0F4C5C"/>
-                    </a:solidFill>
-                    <a:latin typeface="+mn-lt"/>
-                  </a:defRPr>
-                </a:pPr>
-              </a:p>
-            </c:txPr>
-            <c:showLegendKey val="0"/>
-            <c:showVal val="1"/>
-            <c:showCatName val="0"/>
-            <c:showSerName val="0"/>
-            <c:showPercent val="0"/>
-            <c:showBubbleSize val="0"/>
-            <c:showLeaderLines val="0"/>
-          </c:dLbls>
-          <c:cat>
-            <c:multiLvlStrRef>
-              <c:f>Sheet1!$A$2:$A$3</c:f>
-              <c:multiLvlStrCache>
-                <c:ptCount val="2"/>
-                <c:lvl>
-                  <c:pt idx="0">
-                    <c:v>Bupropion</c:v>
-                  </c:pt>
-                  <c:pt idx="1">
-                    <c:v>Kombine tedavi</c:v>
-                  </c:pt>
-                </c:lvl>
-              </c:multiLvlStrCache>
-            </c:multiLvlStrRef>
-          </c:cat>
-          <c:val>
-            <c:numRef>
-              <c:f>Sheet1!$B$2:$B$3</c:f>
-              <c:numCache>
-                <c:formatCode>General</c:formatCode>
-                <c:ptCount val="2"/>
-                <c:pt idx="0">
-                  <c:v>16.52</c:v>
-                </c:pt>
-                <c:pt idx="1">
-                  <c:v>43.98</c:v>
-                </c:pt>
-              </c:numCache>
-            </c:numRef>
-          </c:val>
-        </c:ser>
-        <c:dLbls>
-          <c:numFmt formatCode="&quot;%&quot;0.0" sourceLinked="0"/>
-          <c:txPr>
-            <a:bodyPr/>
-            <a:lstStyle/>
-            <a:p>
-              <a:pPr>
-                <a:defRPr b="1" i="0" strike="noStrike" sz="2400" u="none">
-                  <a:solidFill>
-                    <a:srgbClr val="0F4C5C"/>
-                  </a:solidFill>
-                  <a:latin typeface="+mn-lt"/>
-                </a:defRPr>
-              </a:pPr>
-            </a:p>
-          </c:txPr>
-          <c:showLegendKey val="0"/>
-          <c:showVal val="1"/>
-          <c:showCatName val="0"/>
-          <c:showSerName val="0"/>
-          <c:showPercent val="0"/>
-          <c:showBubbleSize val="0"/>
-          <c:showLeaderLines val="0"/>
-        </c:dLbls>
-        <c:gapWidth val="55"/>
-        <c:overlap val="0"/>
-        <c:axId val="2094734554"/>
-        <c:axId val="2094734552"/>
-        <c:axId val="2094734556"/>
-      </c:barChart>
-      <c:catAx>
-        <c:axId val="2094734554"/>
-        <c:scaling>
-          <c:orientation val="minMax"/>
-        </c:scaling>
-        <c:delete val="0"/>
-        <c:axPos val="b"/>
-        <c:numFmt formatCode="General" sourceLinked="1"/>
-        <c:majorTickMark val="out"/>
-        <c:minorTickMark val="none"/>
-        <c:tickLblPos val="low"/>
-        <c:spPr>
-          <a:ln w="12700" cap="flat">
-            <a:noFill/>
-            <a:prstDash val="solid"/>
-            <a:round/>
-          </a:ln>
-        </c:spPr>
-        <c:txPr>
-          <a:bodyPr/>
-          <a:lstStyle/>
-          <a:p>
-            <a:pPr>
-              <a:defRPr sz="1800" b="0" i="0" u="none" strike="noStrike">
-                <a:solidFill>
-                  <a:srgbClr val="0F4C5C"/>
-                </a:solidFill>
-                <a:latin typeface="+mn-lt"/>
-              </a:defRPr>
-            </a:pPr>
-            <a:endParaRPr lang="en-US"/>
-          </a:p>
-        </c:txPr>
-        <c:crossAx val="2094734552"/>
-        <c:crosses val="autoZero"/>
-        <c:auto val="1"/>
-        <c:lblAlgn val="ctr"/>
-        <c:noMultiLvlLbl val="1"/>
-      </c:catAx>
-      <c:valAx>
-        <c:axId val="2094734552"/>
-        <c:scaling>
-          <c:orientation val="minMax"/>
-          <c:max val="55"/>
-          <c:min val="0"/>
-        </c:scaling>
-        <c:delete val="1"/>
-        <c:axPos val="l"/>
-        <c:numFmt formatCode="General" sourceLinked="0"/>
-        <c:majorTickMark val="out"/>
-        <c:minorTickMark val="none"/>
-        <c:tickLblPos val="nextTo"/>
-        <c:spPr>
-          <a:ln w="12700" cap="flat">
-            <a:solidFill>
-              <a:srgbClr val="888888"/>
-            </a:solidFill>
-            <a:prstDash val="solid"/>
-            <a:round/>
-          </a:ln>
-        </c:spPr>
-        <c:txPr>
-          <a:bodyPr/>
-          <a:lstStyle/>
-          <a:p>
-            <a:pPr>
-              <a:defRPr sz="1200" b="0" i="0" u="none" strike="noStrike">
-                <a:solidFill>
-                  <a:srgbClr val="000000"/>
-                </a:solidFill>
-                <a:latin typeface="Arial"/>
-              </a:defRPr>
-            </a:pPr>
-            <a:endParaRPr lang="en-US"/>
-          </a:p>
-        </c:txPr>
-        <c:crossAx val="2094734554"/>
-        <c:crosses val="autoZero"/>
-        <c:crossBetween val="between"/>
-      </c:valAx>
-      <c:spPr>
-        <a:noFill/>
-        <a:ln>
-          <a:noFill/>
-        </a:ln>
-        <a:effectLst/>
-      </c:spPr>
-    </c:plotArea>
-    <c:plotVisOnly val="1"/>
-    <c:dispBlanksAs val="span"/>
-  </c:chart>
-  <c:spPr>
-    <a:noFill/>
-    <a:ln>
-      <a:noFill/>
-    </a:ln>
-    <a:effectLst/>
-  </c:spPr>
-  <c:externalData r:id="rId1">
-    <c:autoUpdate val="0"/>
-  </c:externalData>
-</c:chartSpace>
 </file>
 
 <file path=ppt/notesMasters/notesMaster1.xml><?xml version="1.0" encoding="utf-8"?>
@@ -1760,7 +587,7 @@
             <a:r>
               <a:rPr lang="en-US" dirty="0"/>
               <a:t>Günaydın hocalarım, değerli arkadaşlarım. Ben [Ad Soyad], [kaçıncı yıl] asistanıyım.
-Bugün sizlere, Turkish Journal of Family Practice dergisinin 2026 yılı 30. cilt 2. sayısında yayımlanan, Cenberlitaş, Gökçe ve Öztürk'ün “Bir üniversite hastanesine bağlı sigara bırakma polikliniğine başvuran hastaların demografik ve klinik özellikleri ile sigara bırakma durumlarını etkileyen faktörler” başlıklı özgün araştırma makalesini sunacağım.
+Bugün sizlere Turkish Journal of Family Practice dergisinin 2026 yılı 30. cilt 2. sayısında yayımlanan, Cenberlitaş, Gökçe ve Öztürk'ün “Bir üniversite hastanesine bağlı sigara bırakma polikliniğine başvuran hastaların demografik ve klinik özellikleri ile sigara bırakma durumlarını etkileyen faktörler” başlıklı özgün araştırma makalesini sunacağım.
 Konu birinci basamakta neredeyse her gün karşılaştığımız bir sorun olduğu için bu makaleyi seçtim.</a:t>
             </a:r>
             <a:endParaRPr lang="en-US" dirty="0"/>
@@ -1849,9 +676,8 @@
           <a:p>
             <a:r>
               <a:rPr lang="en-US" dirty="0"/>
-              <a:t>Tedavi; FNBT puanı, kronik hastalıklar, kullanılan ilaçlar, kontrendikasyonlar ve hasta uyumuna göre bireyselleştirilmiştir.
-Hastalar üç gruba ayrılmıştır: yalnızca davranışsal tedavi, monoterapi ve kombine tedavi. Kombine tedavi seçenekleri bupropion ile NRT, vareniklin ile NRT, sitizin ile NRT ve üçlü tedavidir.
-Önemli bir ayrıntı: Sağlık Bakanlığı politikaları doğrultusunda NRT ve sitizin belirli dönemlerde ücretsiz verilmiştir. Bu durum tedavi seçimini ve uyumu etkilemiş olabilir.</a:t>
+              <a:t>Tedavi FNBT puanı, kronik hastalıklar, kullanılan ilaçlar, kontrendikasyonlar ve hasta uyumuna göre bireyselleştirilmiştir.
+Hastalara yalnızca davranışsal tedavi, monoterapi ya da kombine tedavi uygulanmıştır. Kombine tedavi seçenekleri bupropion ile NRT, vareniklin ile NRT, sitizin ile NRT ve üçlü tedavidir. Sağlık Bakanlığı politikaları doğrultusunda NRT ve sitizin belirli dönemlerde ücretsiz sağlanmıştır.</a:t>
             </a:r>
             <a:endParaRPr lang="en-US" dirty="0"/>
           </a:p>
@@ -1939,9 +765,9 @@
           <a:p>
             <a:r>
               <a:rPr lang="en-US" dirty="0"/>
-              <a:t>Analizler SPSS 25 ile yapılmıştır. Dağılımın normalliği histogram ve Kolmogorov–Smirnov testiyle değerlendirilmiş, veriler normal dağılmadığı için non-parametrik testler tercih edilmiştir.
-Kategorik değişkenler ki-kare testiyle, iki grup karşılaştırmaları Mann–Whitney U, ikiden fazla grup karşılaştırmaları Kruskal–Wallis testiyle yapılmıştır. Post-hoc karşılaştırmalar için Duncan testi bildirilmiştir.
-Bağımsız belirleyicileri bulmak için ikili lojistik regresyon kurulmuş ve çoklu karşılaştırma için Bonferroni düzeltmesi uygulanarak anlamlılık eşiği p&lt;0,003 olarak belirlenmiştir. Bu eşiği aklınızda tutmanızı rica ediyorum; regresyon sonuçlarında önemli olacak.</a:t>
+              <a:t>Analizler SPSS 25 ile yapılmıştır. Normallik histogram ve Kolmogorov–Smirnov testiyle değerlendirilmiştir.
+Kategorik değişkenler ki-kare testiyle, iki grup karşılaştırmaları Mann–Whitney U, ikiden fazla grup karşılaştırmaları Kruskal–Wallis testiyle yapılmıştır. Post-hoc karşılaştırmalarda Duncan testi kullanılmıştır.
+Tedavi yöntemlerinin bırakma üzerindeki etkisi ikili lojistik regresyonla değerlendirilmiş ve Bonferroni düzeltmesi uygulanmıştır.</a:t>
             </a:r>
             <a:endParaRPr lang="en-US" dirty="0"/>
           </a:p>
@@ -2029,9 +855,8 @@
           <a:p>
             <a:r>
               <a:rPr lang="en-US" dirty="0"/>
-              <a:t>Bulgulara geçiyorum. Analize alınan 399 hastanın yaş ortalaması 44,7 yıldır; standart sapma 12,1 olup hastaların yaklaşık üçte ikisi 33–57 yaş aralığındadır.
-Hastaların yüzde 63,7'si erkektir. Ortalama FNBT puanı 5,66 ile orta düzey bağımlılığa karşılık gelmektedir. Ortalama tüketim 27,4 paket-yıl, hasta başına ortalama görüşme sayısı 2,21'dir.
-Genel bırakma oranı yüzde 34,1'dir; yani her üç hastadan biri sigarayı bırakmıştır.</a:t>
+              <a:t>Bulgulara geçiyorum. Analize 399 hasta alınmıştır. Yaş ortalaması 44,7 yıldır ve hastaların yüzde 63,7'si erkektir.
+Ortalama FNBT puanı 5,66, ortalama tüketim 27,4 paket-yıl, hasta başına ortalama görüşme sayısı 2,21'dir. Hastaların yüzde 34,1'i, yani yaklaşık üçte biri sigarayı bırakmıştır.</a:t>
             </a:r>
             <a:endParaRPr lang="en-US" dirty="0"/>
           </a:p>
@@ -2119,9 +944,8 @@
           <a:p>
             <a:r>
               <a:rPr lang="en-US" dirty="0"/>
-              <a:t>Hastaların büyük çoğunluğu, yüzde 61'i, orta düzey bağımlılık grubundadır. Dörtte biri yüksek bağımlılık göstermektedir.
-Hastaların dörtte üçü daha önce bırakmayı denemiş, bunların yaklaşık yarısı profesyonel destek almıştır. Yüzde 7,2'si sigara dışında elektronik sigara, nargile veya puro gibi ürünler kullanmaktadır.
-Bir ayrıntıya dikkatinizi çekmek isterim: Bu yüzdeler makalede 399 değil 432 hasta üzerinden hesaplanmıştır. Örneğin 57, 265 ve 110 toplandığında 432 elde edilmektedir. Eleştirel değerlendirmede bu noktaya döneceğim.</a:t>
+              <a:t>FNBT puanlarına göre hastaların yüzde 13,2'si düşük, yüzde 61,3'ü orta, yüzde 25,5'i yüksek bağımlılık düzeyindedir.
+Hastaların yüzde 75,7'si daha önce sigarayı bırakmayı denemiş ve bunların yaklaşık yarısı bu denemede profesyonel destek almıştır. Yüzde 7,2'si sigara dışında elektronik sigara, nargile veya puro gibi tütün ürünleri kullanmaktadır.</a:t>
             </a:r>
             <a:endParaRPr lang="en-US" dirty="0"/>
           </a:p>
@@ -2209,9 +1033,8 @@
           <a:p>
             <a:r>
               <a:rPr lang="en-US" dirty="0"/>
-              <a:t>Tablo 2'de sosyodemografik özellikler ile bırakma durumu karşılaştırılmıştır. Anlamlı fark yalnızca bir değişkende bulunmuştur: hanede başka bir sigara içicisinin varlığı.
-Hanesinde sigara içen olmayanların yüzde 39,8'i, olanların ise yüzde 25,3'ü sigarayı bırakmıştır; p değeri 0,003'tür.
-Cinsiyet, yaş, medeni durum, eğitim, yerleşim yeri, çalışma durumu ve alkol kullanımı ile bırakma arasında anlamlı ilişki saptanmamıştır. Kırsalda yaşayanlarda oran yüzde 23 ile düşük görünse de bu grup yalnızca 56 kişidir ve fark anlamlı değildir.</a:t>
+              <a:t>Tablo 1'de katılımcıların sosyodemografik özellikleri yer almaktadır. Hastaların çoğu 26–44 yaş grubundadır, yüzde 82'si evlidir ve yüzde 43'ü yükseköğretim mezunudur.
+Hastaların yüzde 86'sı il merkezinde yaşamaktadır. Yüzde 39,6'sının hanesinde sigara içen başka biri bulunmaktadır.</a:t>
             </a:r>
             <a:endParaRPr lang="en-US" dirty="0"/>
           </a:p>
@@ -2299,9 +1122,8 @@
           <a:p>
             <a:r>
               <a:rPr lang="en-US" dirty="0"/>
-              <a:t>Tablo 3'te tedavi dağılımı görülmektedir. En sık uygulanan yöntem 141 hasta ile kombine tedavidir; bunu 109 hasta ile bupropion monoterapisi ve 80 hasta ile NRT monoterapisi izlemektedir.
-Vareniklin yalnızca 18 hastada kullanılmıştır; bunun nedeni çalışma döneminde vareniklinin piyasadan çekilmesidir. Sitizin 34 hastada tek başına verilmiştir.
-Kombine tedavi alanların büyük çoğunluğu, 141 hastanın 125'i, bupropion ile NRT almıştır. Özette bu sayı 134 olarak geçmektedir; tablo ile özet arasında küçük bir tutarsızlık bulunmaktadır.</a:t>
+              <a:t>Tablo 2'de sosyodemografik özelliklere göre bırakma durumu karşılaştırılmıştır. Tablonun ilk bölümünde cinsiyet, yaş grubu, medeni durum ve eğitim durumu yer almaktadır.
+Bu değişkenlerin hiçbirinde başarılı ve başarısız gruplar arasında anlamlı fark bulunmamıştır.</a:t>
             </a:r>
             <a:endParaRPr lang="en-US" dirty="0"/>
           </a:p>
@@ -2389,9 +1211,8 @@
           <a:p>
             <a:r>
               <a:rPr lang="en-US" dirty="0"/>
-              <a:t>Tablo 5 çalışmanın ana bulgusunu göstermektedir. Bupropion monoterapisi alanların yalnızca yüzde 16,5'i sigarayı bırakmıştır.
-Diğer tüm gruplarda bu oran yüzde 35 ile 44 arasındadır. En yüksek oranlar vareniklin ve kombine tedavi gruplarındadır; altı grup arasındaki fark anlamlıdır, p&lt;0,001.
-İlginç bir nokta, hiç ilaç almayan 17 hastada bile oranın yüzde 35 olmasıdır. Bu grup küçüktür ve büyük olasılıkla motivasyonu yüksek, bağımlılığı düşük hastalardan oluşmaktadır. Bu durum seçim yanlılığının bir göstergesi olabilir.</a:t>
+              <a:t>Tablonun ikinci bölümünde yerleşim yeri, çalışma durumu, hanede başka sigara içen varlığı ve alkol kullanımı yer almaktadır.
+Anlamlı fark yalnızca hanede başka sigara içen varlığında bulunmuştur. Hanesinde sigara içen olmayanların yüzde 39,8'i, olanların yüzde 25,3'ü sigarayı bırakmıştır; p değeri 0,003'tür.</a:t>
             </a:r>
             <a:endParaRPr lang="en-US" dirty="0"/>
           </a:p>
@@ -2479,9 +1300,8 @@
           <a:p>
             <a:r>
               <a:rPr lang="en-US" dirty="0"/>
-              <a:t>Tablo 4'te sürekli değişkenler karşılaştırılmıştır. Sigarayı bırakanlar ortalama 2,83 kez, bırakamayanlar 1,96 kez görüşmeye gelmiştir; fark yüksek düzeyde anlamlıdır.
-Bırakanların FNBT puanı da daha düşüktür: 5,26'ya karşı 5,85. Fark istatistiksel olarak anlamlı olmakla birlikte yarım puan civarındadır ve bireysel hasta düzeyinde klinik önemi sınırlıdır.
-Paket-yıl açısından iki grup arasında fark bulunmamıştır. Görüşme sayısı bulgusunun yönü konusunda dikkatli olmak gerekir: Sık gelen hasta mı bırakıyor, yoksa bırakmayı başaran hasta mı kontrollere gelmeye devam ediyor? Retrospektif tasarım bu soruyu yanıtlayamamaktadır.</a:t>
+              <a:t>Tablo 3'te uygulanan tedaviler görülmektedir. En sık uygulanan yöntem 141 hasta ile kombine tedavidir. Bunu 109 hasta ile bupropion ve 80 hasta ile NRT monoterapisi izlemektedir.
+Kombine tedavi alan hastaların 125'i bupropion ile NRT almıştır. Vareniklin 18, sitizin 34 hastada tek başına kullanılmış; 17 hastaya yalnızca farmakolojik olmayan tedavi uygulanmıştır.</a:t>
             </a:r>
             <a:endParaRPr lang="en-US" dirty="0"/>
           </a:p>
@@ -2569,10 +1389,8 @@
           <a:p>
             <a:r>
               <a:rPr lang="en-US" dirty="0"/>
-              <a:t>Bu slaytta makalenin Tablo 6'sını özgün haliyle görüyorsunuz. Referans grup bupropion monoterapisidir; Exp(B) sütunu odds oranını vermektedir.
-Bupropiona göre bırakma odds'u vareniklinde 4,0, kombine tedavide 4,0, NRT'de 3,0, sitizinde 2,8 kat yüksektir. Hanede sigara içen olmaması odds'u yaklaşık 2 kat, sigaraya bağlı yakınma olmaması 1,6 kat artırmaktadır.
-Burada önemli bir nokta var: Yazarların kendi belirlediği Bonferroni eşiği p&lt;0,003'tür. Bu eşiğe göre yalnızca NRT ve kombine tedavi anlamlı kalmaktadır; hane faktörü tam sınırdadır. Vareniklin, sitizin ve yakınma satırları 0,05'in altında olsa da düzeltilmiş eşiği geçmemektedir.
-Ayrıca tabloda bazı değerlerin başındaki “0,” basımda düşmüştür; örneğin standart hata 540 yerine 0,540 olarak okunmalıdır. Wald değerleri bu okumayı doğrulamaktadır.</a:t>
+              <a:t>Tablo 4'te sürekli değişkenler bırakma durumuna göre karşılaştırılmıştır. Sigarayı bırakanlar ortalama 2,83 kez, bırakamayanlar 1,96 kez görüşmeye gelmiştir; fark anlamlıdır, p&lt;0,001.
+Bırakanların FNBT puanı daha düşüktür: 5,26'ya karşı 5,85; p değeri 0,024'tür. Paket-yıl açısından iki grup arasında anlamlı fark bulunmamıştır.</a:t>
             </a:r>
             <a:endParaRPr lang="en-US" dirty="0"/>
           </a:p>
@@ -2660,9 +1478,8 @@
           <a:p>
             <a:r>
               <a:rPr lang="en-US" dirty="0"/>
-              <a:t>Asistan arkadaşlarım için kısa bir istatistik notu eklemek istedim. Makalede kombine tedavi için “bırakma olasılığı yaklaşık dört kat yüksek” denmektedir. Bu ifade odds oranına dayanmaktadır.
-Gerçek oranlara baktığımızda bupropion grubunda bırakma yüzde 16,5, kombine grupta yüzde 44'tür. Yani risk oranı yaklaşık 2,7'dir. Odds oranı ise 0,78'in 0,20'ye bölünmesiyle 3,97 çıkmaktadır.
-Sonuç sık görüldüğünde, bu çalışmada olduğu gibi yüzde 34 civarında, odds oranı etkiyi olduğundan büyük gösterir. Hastaya anlatırken “kombine tedavide başarı şansınız yaklaşık 2,5–3 kat artıyor” demek daha doğru olacaktır.</a:t>
+              <a:t>Tablo 5'te tedavi yöntemlerine göre bırakma oranları yer almaktadır. En yüksek oranlar vareniklin grubunda yüzde 44,5 ve kombine tedavi grubunda yüzde 44,0 olarak bulunmuştur.
+NRT grubunda oran yüzde 37,5, sitizin ve yalnızca davranışsal tedavi gruplarında yüzde 35,3'tür. En düşük oran yüzde 16,5 ile bupropion monoterapisindedir. Gruplar arasındaki fark anlamlıdır, p&lt;0,001.</a:t>
             </a:r>
             <a:endParaRPr lang="en-US" dirty="0"/>
           </a:p>
@@ -2750,9 +1567,8 @@
           <a:p>
             <a:r>
               <a:rPr lang="en-US" dirty="0"/>
-              <a:t>Sunum 28 slayttan oluşmakta ve yaklaşık yarım saat sürecektir. Sonunda 10 dakikalık bir tartışma bölümü planladım.
-Önce makalenin künyesini ve giriş bölümünü, ardından gereç ve yöntemi aktaracağım. Bulgular bölümünde makaledeki altı tablonun öne çıkan sonuçlarını grafiklerle göstereceğim.
-Tartışma ve kısıtlılıklardan sonra makaleyi eleştirel gözle değerlendireceğim. Son olarak kısa bir olgu üzerinden sizlerin görüşlerini almak istiyorum.</a:t>
+              <a:t>Sunum 28 slayttan oluşmakta ve yaklaşık yarım saat sürecektir. Sonunda kısa bir tartışma bölümü planladım.
+Makalenin künyesi ve giriş bölümüyle başlayıp gereç ve yöntemi aktaracağım. Bulgular bölümünde makaledeki altı tabloyu özgün halleriyle göstereceğim. Ardından yazarların tartışma ve sonuçlarını aktaracak, kısa bir olgu üzerinden görüşlerinizi alacağım.</a:t>
             </a:r>
             <a:endParaRPr lang="en-US" dirty="0"/>
           </a:p>
@@ -2840,9 +1656,9 @@
           <a:p>
             <a:r>
               <a:rPr lang="en-US" dirty="0"/>
-              <a:t>Yazarlar bulgularını literatürle karşılaştırmıştır. Vareniklinin bupropiona üstünlüğü Cochrane ağ meta-analizi ve EAGLES çalışmasıyla uyumludur.
-Sitizin plaseboya üstün, NRT ile benzer bulunmuştur; Avustralya'daki randomize çalışmada vareniklinle benzer etkinlik ve daha az yan etki bildirilmiştir.
-Kombine tedavinin üstünlüğü kılavuzların monoterapi başarısız olduğunda veya bağımlılık ağır olduğunda kombinasyon önerisiyle örtüşmektedir. Hane faktörü ise eş desteğine yönelik Cochrane derlemesindeki bulgularla uyumludur.</a:t>
+              <a:t>Tablo 6'da lojistik regresyon sonuçları görülmektedir. Referans grup bupropion monoterapisidir ve Exp(B) sütunu odds oranını vermektedir.
+Bupropiona göre bırakma olasılığı vareniklinde 4,0, kombine tedavide 4,0, NRT'de 3,0, sitizinde 2,8 kat yüksektir. Farmakolojik tedavi almayanlarda görülen 2,8 katlık fark anlamlı değildir.
+Hanede sigara içen olmaması bırakma olasılığını yaklaşık iki katına, sigaraya bağlı yakınma olmaması 1,6 katına çıkarmaktadır. Yazarlar ayrıca FNBT puanının bırakma başarısının negatif bir öngörücüsü olduğunu bildirmektedir.</a:t>
             </a:r>
             <a:endParaRPr lang="en-US" dirty="0"/>
           </a:p>
@@ -2930,9 +1746,9 @@
           <a:p>
             <a:r>
               <a:rPr lang="en-US" dirty="0"/>
-              <a:t>Yazarlar üç kısıtlılık bildirmiştir. Birincisi, görüşmeleri yürüten asistanların rotasyonlar nedeniyle değişmesidir; bu durum takip sürekliliğini ve öz bildirimin doğruluğunu etkilemiş olabilir.
-İkincisi, eksik verilerin telefonla ve hasta beyanıyla tamamlanmasıdır. Üçüncüsü, vareniklinin piyasadan çekilmesi ve sitizinin kullanıma girmesinin ilaç seçimini değiştirmesidir.
-Yazarlar ayrıca ilaçların ücretsiz sağlanıp sağlanmadığının analiz edilmediğini ve bunun olası bir karıştırıcı faktör olduğunu belirtmektedir.</a:t>
+              <a:t>Yazarlar bulgularını literatürle karşılaştırmıştır. Vareniklinin bupropiona üstünlüğü büyük meta-analizler ve EAGLES çalışmasıyla uyumludur. Bu üstünlük, vareniklinin α4β2 nikotinik reseptördeki parsiyel agonist etkisiyle açıklanmaktadır.
+Sitizin vareniklinle benzer mekanizmaya sahip, maliyet-etkin bir seçenektir; plaseboya üstün ve NRT ile benzer etkinlikte bulunmuştur. Kombine tedavinin üstünlüğü, monoterapi yetersiz kaldığında kombinasyon öneren kılavuzlarla uyumludur.
+Benli ve arkadaşlarının çalışmasında da vareniklin ilk altı ayda bupropiondan daha yüksek bırakma oranı sağlamıştır.</a:t>
             </a:r>
             <a:endParaRPr lang="en-US" dirty="0"/>
           </a:p>
@@ -3020,9 +1836,9 @@
           <a:p>
             <a:r>
               <a:rPr lang="en-US" dirty="0"/>
-              <a:t>Makalenin güçlü yönleriyle başlamak istiyorum. Gerçek yaşam verisi sunmaktadır, beş farklı tedavi seçeneğini bir arada değerlendirmektedir ve yazarların ifadesiyle sitizin ile ilgili erişilebilir ilk tez verisidir. Ayrıca bir yıllık takip süresi uygundur.
-Geliştirilebilecek yönlere gelince, en önemlisi randomizasyon olmamasıdır. Tedaviyi hekim ve hasta birlikte seçmiştir; bu da endikasyona bağlı karıştırıcılık yaratır. Örneğin ilaçsız grubun başarısı bunu düşündürmektedir.
-Bırakma durumu karbonmonoksit ölçümü gibi biyokimyasal bir yöntemle doğrulanmamıştır. Son olarak çalışma kesitsel olarak tanımlanmış olsa da başvurudaki özellikler ve bir yıl sonraki sonuç kullanıldığı için metodolojik olarak retrospektif kohort tasarımına daha yakındır.</a:t>
+              <a:t>Yazarlar davranışsal desteğin önemini vurgulamaktadır: Daha fazla görüşmeye gelen hastalarda bırakma oranı daha yüksektir.
+Hanede sigara içen olmaması bırakma olasılığını neredeyse iki katına çıkarmaktadır. Literatürde eşin veya aile bireylerinin sigara içmesi hem tetikleyici hem de motivasyon engeli olarak tanımlanmaktadır.
+Yüksek FNBT puanı düşük başarıyla ilişkilidir. Yakınması olmayan hastalarda başarının daha yüksek olması ise uzun vadeli sağlığı korumaya yönelik içsel motivasyonla açıklanmaktadır.</a:t>
             </a:r>
             <a:endParaRPr lang="en-US" dirty="0"/>
           </a:p>
@@ -3110,10 +1926,8 @@
           <a:p>
             <a:r>
               <a:rPr lang="en-US" dirty="0"/>
-              <a:t>Raporlamada dikkatimi çeken noktaları yapıcı bir gözle paylaşmak istiyorum.
-Bonferroni eşiği yöntemde belirtilmiş ancak yorumda uygulanmamıştır. Kruskal–Wallis sonrası parametrik bir test olan Duncan kullanılmıştır; bu durumda Dunn testi daha uygun olurdu.
-Bazı yüzdeler 432, bazıları 399 hasta üzerinden verilmiştir. Özette erkek hasta sayısı 275, tablolarda 254'tür; kombine tedavi oranı da özet ve tabloda farklıdır.
-Yöntemde “sigarayı bırakamayanlar dışlandı” ifadesi yer almaktadır; bu ifade bulgularla çelişmektedir ve büyük olasılıkla bir yazım hatasıdır. Son olarak Tablo 4 ve 6'da bazı değerlerin başındaki sıfırlar basımda düşmüştür.</a:t>
+              <a:t>Yazarlar kısıtlılık olarak asistan rotasyonlarının takip sürekliliğini etkileyebileceğini, eksik verilerin telefonla ve hasta beyanıyla tamamlandığını ve vareniklinin piyasadan çekilmesinin ilaç seçimini etkilediğini belirtmektedir.
+Güçlü yön olarak bu çalışmanın, bildikleri kadarıyla sitizin ile sigara bırakma tedavisini ele alan erişilebilir ilk tez çalışması olduğunu ve birçok tedavi seçeneğini bir arada değerlendirdiğini vurgulamaktadırlar.</a:t>
             </a:r>
             <a:endParaRPr lang="en-US" dirty="0"/>
           </a:p>
@@ -3201,8 +2015,8 @@
           <a:p>
             <a:r>
               <a:rPr lang="en-US" dirty="0"/>
-              <a:t>Yazarların sonucu özetle şöyledir: Hastaların yaklaşık üçte biri sigarayı bırakmıştır. Kombine tedavi alanlarda bırakma oranı diğer seçeneklere göre daha yüksektir. Tedaviye uyum arttıkça bırakma oranı da artmaktadır.
-Yazarlar tedavi seansları sırasında hastaların motivasyonunu artırmaya yönelik çabaların yoğunlaştırılmasını önermektedir.</a:t>
+              <a:t>Yazarların sonucuna göre hastaların yaklaşık üçte biri sigarayı bırakmıştır. Kombine tedavi alanlarda bırakma oranı diğer seçeneklere göre daha yüksektir ve tedaviye uyum arttıkça başarı da artmaktadır.
+Yazarlar tedavi seanslarında hastaların bırakma motivasyonunu artırmaya yönelik çabaların yoğunlaştırılmasını önermektedir.</a:t>
             </a:r>
             <a:endParaRPr lang="en-US" dirty="0"/>
           </a:p>
@@ -3290,10 +2104,10 @@
           <a:p>
             <a:r>
               <a:rPr lang="en-US" dirty="0"/>
-              <a:t>Şimdi kısa bir olgu üzerinden sizlerin görüşlerini almak istiyorum.
-52 yaşında erkek hasta; günde 25 sigara içiyor, 30 paket-yıl öyküsü var ve FNBT puanı 8, yani yüksek bağımlılık. İki yıl önce bupropion ile denemiş ve başaramamış. Eşi de sigara içiyor.
-Bu hastada hangi tedaviyi seçerdiniz? Takip sıklığını nasıl planlardınız? Eşini sürece nasıl dahil ederdiniz?
-[Burada 2–3 dakika görüş alın. Makaleye göre tartışmayı yönlendirebileceğiniz noktalar: Bupropion tek başına tekrar verilmemeli, kombine NRT veya sitizin/vareniklin temelli tedavi düşünülmeli, ilk ay sık kontrol planlanmalı ve eşe de bırakma danışmanlığı önerilmelidir.]</a:t>
+              <a:t>Bulguları pratiğe aktarmak için kısa bir olgu üzerinden görüşlerinizi almak istiyorum.
+52 yaşında erkek hasta; günde 25 sigara içiyor, 30 paket-yıl öyküsü var, FNBT puanı 8. Daha önce bupropion ile denemiş ve başaramamış. Eşi de sigara içiyor.
+Bu hastada hangi tedaviyi seçerdiniz? Takibi nasıl planlardınız? Eşini sürece nasıl dahil ederdiniz?
+[Burada 2–3 dakika görüş alın. Makalenin bulgularına göre tartışmayı şu noktalara yönlendirebilirsiniz: Kombine tedavi veya vareniklin/sitizin temelli tedavi, sık kontrol görüşmeleri ve eşe de bırakma danışmanlığı önerilmesi.]</a:t>
             </a:r>
             <a:endParaRPr lang="en-US" dirty="0"/>
           </a:p>
@@ -3381,9 +2195,8 @@
           <a:p>
             <a:r>
               <a:rPr lang="en-US" dirty="0"/>
-              <a:t>Sunumu özetlemek gerekirse beş mesajla ayrılmak istiyorum.
-Bupropion tek başına bu çalışmada en zayıf seçenek olmuştur. Kombine tedavi ve NRT, düzeltilmiş eşiği de geçen en güvenilir sonuçları vermiştir.
-Hastanın hanesinde sigara içen olup olmadığı mutlaka sorgulanmalıdır. Sık takip başarıyla ilişkilidir. Son olarak, retrospektif ve randomize olmayan tasarım nedeniyle bu sonuçlar dikkatli yorumlanmalıdır.</a:t>
+              <a:t>Sunumu beş mesajla özetlemek istiyorum.
+Hastaların yaklaşık üçte biri sigarayı bırakmıştır. Kombine tedavide başarı daha yüksektir. Bupropion monoterapisi en düşük başarının görüldüğü seçenektir. Hanesinde sigara içen olup olmadığı sorgulanmalıdır. Sık takip başarıyla ilişkilidir.</a:t>
             </a:r>
             <a:endParaRPr lang="en-US" dirty="0"/>
           </a:p>
@@ -3471,7 +2284,7 @@
           <a:p>
             <a:r>
               <a:rPr lang="en-US" dirty="0"/>
-              <a:t>Sunumda kullandığım kaynaklar Vancouver stiline uygun olarak, kullanım sırasıyla listelenmiştir. Birinci kaynak sunulan makalenin kendisidir; diğerleri makalenin atıf yaptığı çalışmalardır.</a:t>
+              <a:t>Kaynaklar Vancouver stiline uygun olarak, kullanım sırasıyla listelenmiştir. Birinci kaynak sunulan makalenin kendisidir; diğerleri makalenin atıf yaptığı çalışmalardır.</a:t>
             </a:r>
             <a:endParaRPr lang="en-US" dirty="0"/>
           </a:p>
@@ -3647,9 +2460,7 @@
           <a:p>
             <a:r>
               <a:rPr lang="en-US" dirty="0"/>
-              <a:t>Bu sunumun sonunda üç şeyi hedefliyorum.
-Birincisi, sigara bırakma tedavilerinin gerçek yaşam koşullarındaki etkinliğini karşılaştırmak. İkincisi, bırakma başarısını etkileyen hasta ve çevre faktörlerini tanımak.
-Üçüncüsü ve belki en önemlisi, makaleyi yalnızca özetlemek değil, yöntem ve raporlama açısından eleştirel bir gözle değerlendirmek.</a:t>
+              <a:t>Bu sunumun sonunda sigara bırakma tedavilerinin etkinliğini makalenin bulgularıyla karşılaştırmayı, bırakma başarısını etkileyen faktörleri tanımayı ve bu bulguları bir olgu üzerinden klinik pratiğimize aktarmayı hedefliyorum.</a:t>
             </a:r>
             <a:endParaRPr lang="en-US" dirty="0"/>
           </a:p>
@@ -3737,9 +2548,8 @@
           <a:p>
             <a:r>
               <a:rPr lang="en-US" dirty="0"/>
-              <a:t>Solda makalenin ilk sayfasını görüyorsunuz. Makale, Türkiye Aile Hekimleri Uzmanlık Derneği'nin yayın organı olan Turkish Journal of Family Practice'te 2026 yılında yayımlanmıştır. Açık erişimli olup CC BY lisansı ile yayımlanmıştır.
-Çalışma retrospektif, kesitsel bir araştırma olarak tanımlanmıştır. Veriler Samsun Eğitim ve Araştırma Hastanesi Sigara Bırakma Polikliniği'nden elde edilmiştir.
-Bir bilgi notu olarak: Dergi PubMed'de dizinlenmemektedir. Makaleye DOI numarası üzerinden ulaşılabilmektedir.</a:t>
+              <a:t>Solda makalenin ilk sayfasını görüyorsunuz. Makale Türkiye Aile Hekimleri Uzmanlık Derneği'nin yayın organı olan Turkish Journal of Family Practice'te 2026 yılında yayımlanmıştır. Açık erişimlidir ve CC BY lisansıyla yayımlanmıştır.
+Çalışma retrospektif, kesitsel bir araştırmadır. Veriler Samsun Eğitim ve Araştırma Hastanesi Sigara Bırakma Polikliniği'nden elde edilmiştir.</a:t>
             </a:r>
             <a:endParaRPr lang="en-US" dirty="0"/>
           </a:p>
@@ -3827,9 +2637,8 @@
           <a:p>
             <a:r>
               <a:rPr lang="en-US" dirty="0"/>
-              <a:t>Giriş bölümünde yazarlar sorunun büyüklüğünü vurgulamaktadır. Küresel Yetişkin Tütün Araştırması 2016 verilerine göre Türkiye'de sigara içme prevalansı erkeklerde yüzde 44,1, kadınlarda yüzde 19,2'dir.
-Ülkemizde 500'ün üzerinde sigara bırakma polikliniği bulunmakta ve bu polikliniklere 2,5 milyondan fazla kişi başvurmuştur.
-Polikliniklerde bildirilen bırakma oranları ise yüzde 20 ile 50 arasında değişmektedir. Bu geniş aralık, hangi faktörlerin başarıyı belirlediği sorusunu gündeme getirmektedir.</a:t>
+              <a:t>Yazarlar giriş bölümünde tütün bağımlılığının önlenebilir ölüm nedenlerinin başında geldiğini vurgulamaktadır. Küresel Yetişkin Tütün Araştırması 2016 verilerine göre Türkiye'de sigara içme sıklığı erkeklerde yüzde 44,1, kadınlarda yüzde 19,2'dir.
+Ülkemizde 500'ün üzerinde sigara bırakma polikliniği bulunmakta, bu polikliniklere 2,5 milyondan fazla kişi başvurmuş bulunmaktadır. Polikliniklerde bırakma oranları yüzde 20 ile 50 arasında değişmektedir.</a:t>
             </a:r>
             <a:endParaRPr lang="en-US" dirty="0"/>
           </a:p>
@@ -3917,9 +2726,8 @@
           <a:p>
             <a:r>
               <a:rPr lang="en-US" dirty="0"/>
-              <a:t>Sigara bırakma tedavisi iki ayak üzerinde durmaktadır. Davranışsal tarafta motivasyonel görüşme ve davranış değişikliği modelleri yer almaktadır; bunlardan en sık kullanılanı Transteorik Model'dir.
-Farmakolojik tarafta nikotin replasman tedavisi, bupropion ve vareniklin klasik seçeneklerdir. Sitizin ise ülkemizde son yıllarda kullanıma giren, vareniklinle benzer mekanizmaya sahip bir parsiyel agonisttir.
-Kılavuzlar farmakoterapinin davranışsal destekle birlikte verilmesini ve gerektiğinde kombinasyonların kullanılmasını önermektedir.</a:t>
+              <a:t>Sigara bırakma tedavisi davranışsal yaklaşımlar ve farmakoterapiden oluşmaktadır. Davranışsal tarafta motivasyonel görüşme ve Transteorik Model gibi davranış değişikliği modelleri kullanılmaktadır.
+Farmakoterapi nikotin replasman tedavisi, bupropion ve vareniklinden oluşmaktadır. Sitizin son yıllarda ek bir seçenek olarak kullanıma girmiştir. Farmakoterapinin davranışsal destekle birlikte verilmesi ve gerektiğinde kombinasyonların düşünülmesi önerilmektedir.</a:t>
             </a:r>
             <a:endParaRPr lang="en-US" dirty="0"/>
           </a:p>
@@ -4007,8 +2815,7 @@
           <a:p>
             <a:r>
               <a:rPr lang="en-US" dirty="0"/>
-              <a:t>Yazarların amacı, kombine tedavinin ve yakın takibin sigara bırakma başarısı üzerindeki etkisini değerlendirmek ve bırakmayı etkileyen hasta özelliklerini belirlemektir.
-Bu amacın ileride bulgular bölümünde nasıl karşılandığına dikkatinizi çekmek istiyorum.</a:t>
+              <a:t>Yazarların amacı, kombine tedavinin ve yakın takibin sigara bırakma başarısı üzerindeki etkisini değerlendirmek ve bırakmayı etkileyen hasta özelliklerini belirlemektir.</a:t>
             </a:r>
             <a:endParaRPr lang="en-US" dirty="0"/>
           </a:p>
@@ -4096,9 +2903,8 @@
           <a:p>
             <a:r>
               <a:rPr lang="en-US" dirty="0"/>
-              <a:t>Çalışma 1 Ağustos 2020 ile 31 Ağustos 2024 arasındaki dört yıllık dönemi kapsamaktadır. Polikliniğe başvuran, 18 yaş ve üzeri, sigara içen 432 hastanın dosyası taranmıştır.
-Bunlardan 33 dosyada veriler eksik olduğu için 399 hasta analize alınmıştır. Tüm kayıtlar kullanıldığından örneklem büyüklüğü hesaplanmamıştır.
-Yıllık kontrolünü kaçıran hastaların takip bilgileri asistan hekimler tarafından uzaktan görüşmeyle tamamlanmıştır. Bu noktaya kısıtlılıklarda tekrar değineceğim.</a:t>
+              <a:t>Çalışma 1 Ağustos 2020 ile 31 Ağustos 2024 arasını kapsamaktadır. Polikliniğe başvuran, 18 yaş ve üzeri, sigara içen 432 hastanın dosyası taranmıştır.
+Verilerine eksiksiz ulaşılan 399 hasta analize alınmıştır. Tüm kayıtlar kullanıldığından örneklem büyüklüğü hesaplanmamıştır. Yıllık kontrolüne gelmeyen hastaların takip bilgileri asistan hekimlerin yaptığı uzaktan görüşmelerle tamamlanmıştır.</a:t>
             </a:r>
             <a:endParaRPr lang="en-US" dirty="0"/>
           </a:p>
@@ -4187,8 +2993,7 @@
             <a:r>
               <a:rPr lang="en-US" dirty="0"/>
               <a:t>Hasta dosyalarından yaş, cinsiyet, meslek, alkol kullanımı, kronik hastalık, sigara öyküsü ve uygulanan tedaviler kaydedilmiştir.
-Nikotin bağımlılığı ilk vizitte Fagerström Nikotin Bağımlılık Testi ile ölçülmüştür. Altı sorudan oluşan test 0 ile 10 arasında puanlanmakta; 0–2 düşük, 3–7 orta, 8–10 yüksek bağımlılık olarak sınıflanmaktadır.
-Testin Türkçe geçerlik çalışmasında Cronbach alfa değeri 0,56 bulunmuştur. Bu değer iç tutarlılığın sınırlı olduğunu göstermektedir; ancak özgün İngilizce sürümde de 0,61 civarındadır ve testin az sayıda, farklı yönleri ölçen sorudan oluşmasıyla ilişkilidir.</a:t>
+Nikotin bağımlılığı ilk vizitte Fagerström Nikotin Bağımlılık Testi ile değerlendirilmiştir. 0–2 puan düşük, 3–7 puan orta, 8–10 puan yüksek bağımlılık olarak sınıflanmıştır. Testin Türkçe geçerlik ve güvenilirlik çalışması 2004 yılında Uysal ve arkadaşları tarafından yapılmıştır.</a:t>
             </a:r>
             <a:endParaRPr lang="en-US" dirty="0"/>
           </a:p>
@@ -6544,7 +5349,7 @@
                             <a:schemeClr val="accent1"/>
                           </a:solidFill>
                         </a:rPr>
-                        <a:t>Bağımsız belirleyiciler</a:t>
+                        <a:t>Tedavinin etkisi</a:t>
                       </a:r>
                       <a:endParaRPr lang="en-US" sz="2200" dirty="0"/>
                     </a:p>
@@ -6724,12 +5529,12 @@
                         <a:buNone/>
                       </a:pPr>
                       <a:r>
-                        <a:rPr lang="en-US" sz="2200" b="1" dirty="0">
+                        <a:rPr lang="en-US" sz="2200" dirty="0">
                           <a:solidFill>
                             <a:schemeClr val="accent1"/>
                           </a:solidFill>
                         </a:rPr>
-                        <a:t>p&lt;0,05; Bonferroni ile p&lt;0,003</a:t>
+                        <a:t>p&lt;0,05; Bonferroni düzeltmesi</a:t>
                       </a:r>
                       <a:endParaRPr lang="en-US" sz="2200" dirty="0"/>
                     </a:p>
@@ -7437,11 +6242,11 @@
             </a:avLst>
           </a:prstGeom>
           <a:solidFill>
-            <a:schemeClr val="bg2"/>
+            <a:schemeClr val="accent1"/>
           </a:solidFill>
           <a:ln w="12700">
             <a:solidFill>
-              <a:schemeClr val="bg2"/>
+              <a:schemeClr val="accent1"/>
             </a:solidFill>
             <a:prstDash val="solid"/>
           </a:ln>
@@ -7474,10 +6279,10 @@
             <a:r>
               <a:rPr lang="en-US" sz="3600" b="1" dirty="0">
                 <a:solidFill>
-                  <a:schemeClr val="accent1"/>
-                </a:solidFill>
-              </a:rPr>
-              <a:t>2,21 ± 1,28</a:t>
+                  <a:schemeClr val="bg1"/>
+                </a:solidFill>
+              </a:rPr>
+              <a:t>%34,1</a:t>
             </a:r>
             <a:endParaRPr lang="en-US" sz="3600" dirty="0"/>
           </a:p>
@@ -7510,10 +6315,10 @@
             <a:r>
               <a:rPr lang="en-US" sz="2200" dirty="0">
                 <a:solidFill>
-                  <a:schemeClr val="accent1"/>
-                </a:solidFill>
-              </a:rPr>
-              <a:t>görüşme sayısı</a:t>
+                  <a:schemeClr val="bg1"/>
+                </a:solidFill>
+              </a:rPr>
+              <a:t>sigarayı bırakan</a:t>
             </a:r>
             <a:endParaRPr lang="en-US" sz="2200" dirty="0"/>
           </a:p>
@@ -7657,38 +6462,22 @@
                   <a:schemeClr val="accent1"/>
                 </a:solidFill>
               </a:rPr>
-              <a:t>Hastaların çoğunda orta düzey bağımlılık</a:t>
+              <a:t>Bağımlılık düzeyi ve deneme öyküsü</a:t>
             </a:r>
             <a:endParaRPr lang="en-US" sz="3600" dirty="0"/>
           </a:p>
         </p:txBody>
       </p:sp>
-      <p:graphicFrame>
-        <p:nvGraphicFramePr>
-          <p:cNvPr id="4" name="FNBT dağılımı" descr=""/>
-          <p:cNvGraphicFramePr/>
-          <p:nvPr/>
-        </p:nvGraphicFramePr>
-        <p:xfrm>
-          <a:off x="548640" y="1371600"/>
-          <a:ext cx="6035040" cy="4206240"/>
-        </p:xfrm>
-        <a:graphic xmlns:a="http://schemas.openxmlformats.org/drawingml/2006/main">
-          <a:graphicData uri="http://schemas.openxmlformats.org/drawingml/2006/chart">
-            <c:chart xmlns:c="http://schemas.openxmlformats.org/drawingml/2006/chart" r:id="rId1"/>
-          </a:graphicData>
-        </a:graphic>
-      </p:graphicFrame>
-      <p:sp>
-        <p:nvSpPr>
-          <p:cNvPr id="5" name="Text 1"/>
+      <p:sp>
+        <p:nvSpPr>
+          <p:cNvPr id="4" name="Text 1"/>
           <p:cNvSpPr txBox="1"/>
           <p:nvPr/>
         </p:nvSpPr>
         <p:spPr>
           <a:xfrm>
-            <a:off x="548640" y="5623560"/>
-            <a:ext cx="6035040" cy="411480"/>
+            <a:off x="548640" y="1325880"/>
+            <a:ext cx="10972800" cy="457200"/>
           </a:xfrm>
           <a:prstGeom prst="rect">
             <a:avLst/>
@@ -7704,31 +6493,298 @@
               <a:buNone/>
             </a:pPr>
             <a:r>
-              <a:rPr lang="en-US" sz="1600" i="1" dirty="0">
-                <a:solidFill>
-                  <a:schemeClr val="accent3"/>
-                </a:solidFill>
-              </a:rPr>
-              <a:t>Yüzdeler makalede 432 hasta üzerinden verilmiştir.</a:t>
-            </a:r>
-            <a:endParaRPr lang="en-US" sz="1600" dirty="0"/>
-          </a:p>
-        </p:txBody>
-      </p:sp>
-      <p:sp>
-        <p:nvSpPr>
-          <p:cNvPr id="6" name="Kart"/>
+              <a:rPr lang="en-US" sz="2200" b="1" dirty="0">
+                <a:solidFill>
+                  <a:schemeClr val="accent2"/>
+                </a:solidFill>
+              </a:rPr>
+              <a:t>FNBT'ye göre bağımlılık düzeyi</a:t>
+            </a:r>
+            <a:endParaRPr lang="en-US" sz="2200" dirty="0"/>
+          </a:p>
+        </p:txBody>
+      </p:sp>
+      <p:sp>
+        <p:nvSpPr>
+          <p:cNvPr id="5" name="Kart"/>
           <p:cNvSpPr/>
           <p:nvPr/>
         </p:nvSpPr>
         <p:spPr>
           <a:xfrm>
-            <a:off x="6949440" y="1463040"/>
-            <a:ext cx="4663440" cy="1234440"/>
+            <a:off x="548640" y="1828800"/>
+            <a:ext cx="3566160" cy="1737360"/>
           </a:xfrm>
           <a:prstGeom prst="roundRect">
             <a:avLst>
-              <a:gd name="adj" fmla="val 8889"/>
+              <a:gd name="adj" fmla="val 6316"/>
+            </a:avLst>
+          </a:prstGeom>
+          <a:solidFill>
+            <a:schemeClr val="accent5"/>
+          </a:solidFill>
+          <a:ln w="12700">
+            <a:solidFill>
+              <a:schemeClr val="accent5"/>
+            </a:solidFill>
+            <a:prstDash val="solid"/>
+          </a:ln>
+        </p:spPr>
+      </p:sp>
+      <p:sp>
+        <p:nvSpPr>
+          <p:cNvPr id="6" name="Text 3"/>
+          <p:cNvSpPr txBox="1"/>
+          <p:nvPr/>
+        </p:nvSpPr>
+        <p:spPr>
+          <a:xfrm>
+            <a:off x="548640" y="1828800"/>
+            <a:ext cx="3566160" cy="1737360"/>
+          </a:xfrm>
+          <a:prstGeom prst="rect">
+            <a:avLst/>
+          </a:prstGeom>
+          <a:noFill/>
+          <a:ln/>
+        </p:spPr>
+        <p:txBody>
+          <a:bodyPr wrap="square" lIns="0" tIns="0" rIns="0" bIns="0" rtlCol="0" anchor="ctr"/>
+          <a:lstStyle/>
+          <a:p>
+            <a:pPr algn="ctr" indent="0" marL="0">
+              <a:buNone/>
+            </a:pPr>
+            <a:r>
+              <a:rPr lang="en-US" sz="4000" b="1" dirty="0">
+                <a:solidFill>
+                  <a:schemeClr val="accent1"/>
+                </a:solidFill>
+              </a:rPr>
+              <a:t>%13,2</a:t>
+            </a:r>
+            <a:endParaRPr lang="en-US" sz="4000" dirty="0"/>
+          </a:p>
+          <a:p>
+            <a:pPr algn="ctr" indent="0" marL="0">
+              <a:buNone/>
+            </a:pPr>
+            <a:r>
+              <a:rPr lang="en-US" sz="2200" dirty="0">
+                <a:solidFill>
+                  <a:schemeClr val="accent1"/>
+                </a:solidFill>
+              </a:rPr>
+              <a:t>düşük (0–2)</a:t>
+            </a:r>
+            <a:endParaRPr lang="en-US" sz="4000" dirty="0"/>
+          </a:p>
+        </p:txBody>
+      </p:sp>
+      <p:sp>
+        <p:nvSpPr>
+          <p:cNvPr id="7" name="Kart"/>
+          <p:cNvSpPr/>
+          <p:nvPr/>
+        </p:nvSpPr>
+        <p:spPr>
+          <a:xfrm>
+            <a:off x="4297680" y="1828800"/>
+            <a:ext cx="3566160" cy="1737360"/>
+          </a:xfrm>
+          <a:prstGeom prst="roundRect">
+            <a:avLst>
+              <a:gd name="adj" fmla="val 6316"/>
+            </a:avLst>
+          </a:prstGeom>
+          <a:solidFill>
+            <a:schemeClr val="accent2"/>
+          </a:solidFill>
+          <a:ln w="12700">
+            <a:solidFill>
+              <a:schemeClr val="accent2"/>
+            </a:solidFill>
+            <a:prstDash val="solid"/>
+          </a:ln>
+        </p:spPr>
+      </p:sp>
+      <p:sp>
+        <p:nvSpPr>
+          <p:cNvPr id="8" name="Text 5"/>
+          <p:cNvSpPr txBox="1"/>
+          <p:nvPr/>
+        </p:nvSpPr>
+        <p:spPr>
+          <a:xfrm>
+            <a:off x="4297680" y="1828800"/>
+            <a:ext cx="3566160" cy="1737360"/>
+          </a:xfrm>
+          <a:prstGeom prst="rect">
+            <a:avLst/>
+          </a:prstGeom>
+          <a:noFill/>
+          <a:ln/>
+        </p:spPr>
+        <p:txBody>
+          <a:bodyPr wrap="square" lIns="0" tIns="0" rIns="0" bIns="0" rtlCol="0" anchor="ctr"/>
+          <a:lstStyle/>
+          <a:p>
+            <a:pPr algn="ctr" indent="0" marL="0">
+              <a:buNone/>
+            </a:pPr>
+            <a:r>
+              <a:rPr lang="en-US" sz="4000" b="1" dirty="0">
+                <a:solidFill>
+                  <a:schemeClr val="bg1"/>
+                </a:solidFill>
+              </a:rPr>
+              <a:t>%61,3</a:t>
+            </a:r>
+            <a:endParaRPr lang="en-US" sz="4000" dirty="0"/>
+          </a:p>
+          <a:p>
+            <a:pPr algn="ctr" indent="0" marL="0">
+              <a:buNone/>
+            </a:pPr>
+            <a:r>
+              <a:rPr lang="en-US" sz="2200" dirty="0">
+                <a:solidFill>
+                  <a:schemeClr val="bg1"/>
+                </a:solidFill>
+              </a:rPr>
+              <a:t>orta (3–7)</a:t>
+            </a:r>
+            <a:endParaRPr lang="en-US" sz="4000" dirty="0"/>
+          </a:p>
+        </p:txBody>
+      </p:sp>
+      <p:sp>
+        <p:nvSpPr>
+          <p:cNvPr id="9" name="Kart"/>
+          <p:cNvSpPr/>
+          <p:nvPr/>
+        </p:nvSpPr>
+        <p:spPr>
+          <a:xfrm>
+            <a:off x="8046720" y="1828800"/>
+            <a:ext cx="3566160" cy="1737360"/>
+          </a:xfrm>
+          <a:prstGeom prst="roundRect">
+            <a:avLst>
+              <a:gd name="adj" fmla="val 6316"/>
+            </a:avLst>
+          </a:prstGeom>
+          <a:solidFill>
+            <a:schemeClr val="accent1"/>
+          </a:solidFill>
+          <a:ln w="12700">
+            <a:solidFill>
+              <a:schemeClr val="accent1"/>
+            </a:solidFill>
+            <a:prstDash val="solid"/>
+          </a:ln>
+        </p:spPr>
+      </p:sp>
+      <p:sp>
+        <p:nvSpPr>
+          <p:cNvPr id="10" name="Text 7"/>
+          <p:cNvSpPr txBox="1"/>
+          <p:nvPr/>
+        </p:nvSpPr>
+        <p:spPr>
+          <a:xfrm>
+            <a:off x="8046720" y="1828800"/>
+            <a:ext cx="3566160" cy="1737360"/>
+          </a:xfrm>
+          <a:prstGeom prst="rect">
+            <a:avLst/>
+          </a:prstGeom>
+          <a:noFill/>
+          <a:ln/>
+        </p:spPr>
+        <p:txBody>
+          <a:bodyPr wrap="square" lIns="0" tIns="0" rIns="0" bIns="0" rtlCol="0" anchor="ctr"/>
+          <a:lstStyle/>
+          <a:p>
+            <a:pPr algn="ctr" indent="0" marL="0">
+              <a:buNone/>
+            </a:pPr>
+            <a:r>
+              <a:rPr lang="en-US" sz="4000" b="1" dirty="0">
+                <a:solidFill>
+                  <a:schemeClr val="bg1"/>
+                </a:solidFill>
+              </a:rPr>
+              <a:t>%25,5</a:t>
+            </a:r>
+            <a:endParaRPr lang="en-US" sz="4000" dirty="0"/>
+          </a:p>
+          <a:p>
+            <a:pPr algn="ctr" indent="0" marL="0">
+              <a:buNone/>
+            </a:pPr>
+            <a:r>
+              <a:rPr lang="en-US" sz="2200" dirty="0">
+                <a:solidFill>
+                  <a:schemeClr val="bg1"/>
+                </a:solidFill>
+              </a:rPr>
+              <a:t>yüksek (8–10)</a:t>
+            </a:r>
+            <a:endParaRPr lang="en-US" sz="4000" dirty="0"/>
+          </a:p>
+        </p:txBody>
+      </p:sp>
+      <p:sp>
+        <p:nvSpPr>
+          <p:cNvPr id="11" name="Text 8"/>
+          <p:cNvSpPr txBox="1"/>
+          <p:nvPr/>
+        </p:nvSpPr>
+        <p:spPr>
+          <a:xfrm>
+            <a:off x="548640" y="3794760"/>
+            <a:ext cx="10972800" cy="457200"/>
+          </a:xfrm>
+          <a:prstGeom prst="rect">
+            <a:avLst/>
+          </a:prstGeom>
+          <a:noFill/>
+          <a:ln/>
+        </p:spPr>
+        <p:txBody>
+          <a:bodyPr wrap="square" lIns="0" tIns="0" rIns="0" bIns="0" rtlCol="0" anchor="ctr"/>
+          <a:lstStyle/>
+          <a:p>
+            <a:pPr indent="0" marL="0">
+              <a:buNone/>
+            </a:pPr>
+            <a:r>
+              <a:rPr lang="en-US" sz="2200" b="1" dirty="0">
+                <a:solidFill>
+                  <a:schemeClr val="accent2"/>
+                </a:solidFill>
+              </a:rPr>
+              <a:t>Önceki deneyimler</a:t>
+            </a:r>
+            <a:endParaRPr lang="en-US" sz="2200" dirty="0"/>
+          </a:p>
+        </p:txBody>
+      </p:sp>
+      <p:sp>
+        <p:nvSpPr>
+          <p:cNvPr id="12" name="Kart"/>
+          <p:cNvSpPr/>
+          <p:nvPr/>
+        </p:nvSpPr>
+        <p:spPr>
+          <a:xfrm>
+            <a:off x="548640" y="4297680"/>
+            <a:ext cx="3566160" cy="1691640"/>
+          </a:xfrm>
+          <a:prstGeom prst="roundRect">
+            <a:avLst>
+              <a:gd name="adj" fmla="val 6486"/>
             </a:avLst>
           </a:prstGeom>
           <a:solidFill>
@@ -7744,14 +6800,14 @@
       </p:sp>
       <p:sp>
         <p:nvSpPr>
-          <p:cNvPr id="7" name="Text 3"/>
+          <p:cNvPr id="13" name="Text 10"/>
           <p:cNvSpPr txBox="1"/>
           <p:nvPr/>
         </p:nvSpPr>
         <p:spPr>
           <a:xfrm>
-            <a:off x="7086600" y="1463040"/>
-            <a:ext cx="1783080" cy="1234440"/>
+            <a:off x="685800" y="4297680"/>
+            <a:ext cx="1417320" cy="1691640"/>
           </a:xfrm>
           <a:prstGeom prst="rect">
             <a:avLst/>
@@ -7767,27 +6823,27 @@
               <a:buNone/>
             </a:pPr>
             <a:r>
-              <a:rPr lang="en-US" sz="3600" b="1" dirty="0">
-                <a:solidFill>
-                  <a:schemeClr val="accent2"/>
+              <a:rPr lang="en-US" sz="3200" b="1" dirty="0">
+                <a:solidFill>
+                  <a:schemeClr val="accent1"/>
                 </a:solidFill>
               </a:rPr>
               <a:t>%75,7</a:t>
             </a:r>
-            <a:endParaRPr lang="en-US" sz="3600" dirty="0"/>
-          </a:p>
-        </p:txBody>
-      </p:sp>
-      <p:sp>
-        <p:nvSpPr>
-          <p:cNvPr id="8" name="Text 4"/>
+            <a:endParaRPr lang="en-US" sz="3200" dirty="0"/>
+          </a:p>
+        </p:txBody>
+      </p:sp>
+      <p:sp>
+        <p:nvSpPr>
+          <p:cNvPr id="14" name="Text 11"/>
           <p:cNvSpPr txBox="1"/>
           <p:nvPr/>
         </p:nvSpPr>
         <p:spPr>
           <a:xfrm>
-            <a:off x="8915400" y="1463040"/>
-            <a:ext cx="2560320" cy="1234440"/>
+            <a:off x="2148840" y="4297680"/>
+            <a:ext cx="1828800" cy="1691640"/>
           </a:xfrm>
           <a:prstGeom prst="rect">
             <a:avLst/>
@@ -7803,31 +6859,31 @@
               <a:buNone/>
             </a:pPr>
             <a:r>
-              <a:rPr lang="en-US" sz="2000" dirty="0">
+              <a:rPr lang="en-US" sz="1800" dirty="0">
                 <a:solidFill>
                   <a:schemeClr val="accent1"/>
                 </a:solidFill>
               </a:rPr>
               <a:t>daha önce bırakmayı denemiş</a:t>
             </a:r>
-            <a:endParaRPr lang="en-US" sz="2000" dirty="0"/>
-          </a:p>
-        </p:txBody>
-      </p:sp>
-      <p:sp>
-        <p:nvSpPr>
-          <p:cNvPr id="9" name="Kart"/>
+            <a:endParaRPr lang="en-US" sz="1800" dirty="0"/>
+          </a:p>
+        </p:txBody>
+      </p:sp>
+      <p:sp>
+        <p:nvSpPr>
+          <p:cNvPr id="15" name="Kart"/>
           <p:cNvSpPr/>
           <p:nvPr/>
         </p:nvSpPr>
         <p:spPr>
           <a:xfrm>
-            <a:off x="6949440" y="2880360"/>
-            <a:ext cx="4663440" cy="1234440"/>
+            <a:off x="4297680" y="4297680"/>
+            <a:ext cx="3566160" cy="1691640"/>
           </a:xfrm>
           <a:prstGeom prst="roundRect">
             <a:avLst>
-              <a:gd name="adj" fmla="val 8889"/>
+              <a:gd name="adj" fmla="val 6486"/>
             </a:avLst>
           </a:prstGeom>
           <a:solidFill>
@@ -7843,14 +6899,14 @@
       </p:sp>
       <p:sp>
         <p:nvSpPr>
-          <p:cNvPr id="10" name="Text 6"/>
+          <p:cNvPr id="16" name="Text 13"/>
           <p:cNvSpPr txBox="1"/>
           <p:nvPr/>
         </p:nvSpPr>
         <p:spPr>
           <a:xfrm>
-            <a:off x="7086600" y="2880360"/>
-            <a:ext cx="1783080" cy="1234440"/>
+            <a:off x="4434840" y="4297680"/>
+            <a:ext cx="1417320" cy="1691640"/>
           </a:xfrm>
           <a:prstGeom prst="rect">
             <a:avLst/>
@@ -7866,27 +6922,27 @@
               <a:buNone/>
             </a:pPr>
             <a:r>
-              <a:rPr lang="en-US" sz="3600" b="1" dirty="0">
+              <a:rPr lang="en-US" sz="3200" b="1" dirty="0">
                 <a:solidFill>
                   <a:schemeClr val="accent1"/>
                 </a:solidFill>
               </a:rPr>
               <a:t>%49,9</a:t>
             </a:r>
-            <a:endParaRPr lang="en-US" sz="3600" dirty="0"/>
-          </a:p>
-        </p:txBody>
-      </p:sp>
-      <p:sp>
-        <p:nvSpPr>
-          <p:cNvPr id="11" name="Text 7"/>
+            <a:endParaRPr lang="en-US" sz="3200" dirty="0"/>
+          </a:p>
+        </p:txBody>
+      </p:sp>
+      <p:sp>
+        <p:nvSpPr>
+          <p:cNvPr id="17" name="Text 14"/>
           <p:cNvSpPr txBox="1"/>
           <p:nvPr/>
         </p:nvSpPr>
         <p:spPr>
           <a:xfrm>
-            <a:off x="8915400" y="2880360"/>
-            <a:ext cx="2560320" cy="1234440"/>
+            <a:off x="5897880" y="4297680"/>
+            <a:ext cx="1828800" cy="1691640"/>
           </a:xfrm>
           <a:prstGeom prst="rect">
             <a:avLst/>
@@ -7902,31 +6958,31 @@
               <a:buNone/>
             </a:pPr>
             <a:r>
-              <a:rPr lang="en-US" sz="2000" dirty="0">
+              <a:rPr lang="en-US" sz="1800" dirty="0">
                 <a:solidFill>
                   <a:schemeClr val="accent1"/>
                 </a:solidFill>
               </a:rPr>
               <a:t>denemede profesyonel destek almış</a:t>
             </a:r>
-            <a:endParaRPr lang="en-US" sz="2000" dirty="0"/>
-          </a:p>
-        </p:txBody>
-      </p:sp>
-      <p:sp>
-        <p:nvSpPr>
-          <p:cNvPr id="12" name="Kart"/>
+            <a:endParaRPr lang="en-US" sz="1800" dirty="0"/>
+          </a:p>
+        </p:txBody>
+      </p:sp>
+      <p:sp>
+        <p:nvSpPr>
+          <p:cNvPr id="18" name="Kart"/>
           <p:cNvSpPr/>
           <p:nvPr/>
         </p:nvSpPr>
         <p:spPr>
           <a:xfrm>
-            <a:off x="6949440" y="4297680"/>
-            <a:ext cx="4663440" cy="1234440"/>
+            <a:off x="8046720" y="4297680"/>
+            <a:ext cx="3566160" cy="1691640"/>
           </a:xfrm>
           <a:prstGeom prst="roundRect">
             <a:avLst>
-              <a:gd name="adj" fmla="val 8889"/>
+              <a:gd name="adj" fmla="val 6486"/>
             </a:avLst>
           </a:prstGeom>
           <a:solidFill>
@@ -7942,14 +6998,14 @@
       </p:sp>
       <p:sp>
         <p:nvSpPr>
-          <p:cNvPr id="13" name="Text 9"/>
+          <p:cNvPr id="19" name="Text 16"/>
           <p:cNvSpPr txBox="1"/>
           <p:nvPr/>
         </p:nvSpPr>
         <p:spPr>
           <a:xfrm>
-            <a:off x="7086600" y="4297680"/>
-            <a:ext cx="1783080" cy="1234440"/>
+            <a:off x="8183880" y="4297680"/>
+            <a:ext cx="1417320" cy="1691640"/>
           </a:xfrm>
           <a:prstGeom prst="rect">
             <a:avLst/>
@@ -7965,27 +7021,27 @@
               <a:buNone/>
             </a:pPr>
             <a:r>
-              <a:rPr lang="en-US" sz="3600" b="1" dirty="0">
+              <a:rPr lang="en-US" sz="3200" b="1" dirty="0">
                 <a:solidFill>
                   <a:schemeClr val="accent1"/>
                 </a:solidFill>
               </a:rPr>
               <a:t>%7,2</a:t>
             </a:r>
-            <a:endParaRPr lang="en-US" sz="3600" dirty="0"/>
-          </a:p>
-        </p:txBody>
-      </p:sp>
-      <p:sp>
-        <p:nvSpPr>
-          <p:cNvPr id="14" name="Text 10"/>
+            <a:endParaRPr lang="en-US" sz="3200" dirty="0"/>
+          </a:p>
+        </p:txBody>
+      </p:sp>
+      <p:sp>
+        <p:nvSpPr>
+          <p:cNvPr id="20" name="Text 17"/>
           <p:cNvSpPr txBox="1"/>
           <p:nvPr/>
         </p:nvSpPr>
         <p:spPr>
           <a:xfrm>
-            <a:off x="8915400" y="4297680"/>
-            <a:ext cx="2560320" cy="1234440"/>
+            <a:off x="9646920" y="4297680"/>
+            <a:ext cx="1828800" cy="1691640"/>
           </a:xfrm>
           <a:prstGeom prst="rect">
             <a:avLst/>
@@ -8001,20 +7057,20 @@
               <a:buNone/>
             </a:pPr>
             <a:r>
-              <a:rPr lang="en-US" sz="2000" dirty="0">
+              <a:rPr lang="en-US" sz="1800" dirty="0">
                 <a:solidFill>
                   <a:schemeClr val="accent1"/>
                 </a:solidFill>
               </a:rPr>
               <a:t>sigara dışı tütün ürünü kullanıyor</a:t>
             </a:r>
-            <a:endParaRPr lang="en-US" sz="2000" dirty="0"/>
-          </a:p>
-        </p:txBody>
-      </p:sp>
-      <p:sp>
-        <p:nvSpPr>
-          <p:cNvPr id="15" name="Kaynak"/>
+            <a:endParaRPr lang="en-US" sz="1800" dirty="0"/>
+          </a:p>
+        </p:txBody>
+      </p:sp>
+      <p:sp>
+        <p:nvSpPr>
+          <p:cNvPr id="21" name="Kaynak"/>
           <p:cNvSpPr txBox="1"/>
           <p:nvPr/>
         </p:nvSpPr>
@@ -8150,7 +7206,7 @@
                   <a:schemeClr val="accent1"/>
                 </a:solidFill>
               </a:rPr>
-              <a:t>Evde sigara içilmesi başarıyı azaltmaktadır</a:t>
+              <a:t>Tablo 1: Sosyodemografik özellikler</a:t>
             </a:r>
             <a:endParaRPr lang="en-US" sz="3600" dirty="0"/>
           </a:p>
@@ -8158,270 +7214,226 @@
       </p:sp>
       <p:sp>
         <p:nvSpPr>
-          <p:cNvPr id="4" name="Text 1"/>
-          <p:cNvSpPr txBox="1"/>
-          <p:nvPr/>
-        </p:nvSpPr>
-        <p:spPr>
-          <a:xfrm>
-            <a:off x="548640" y="1371600"/>
-            <a:ext cx="6035040" cy="457200"/>
-          </a:xfrm>
-          <a:prstGeom prst="rect">
-            <a:avLst/>
-          </a:prstGeom>
-          <a:noFill/>
-          <a:ln/>
-        </p:spPr>
-        <p:txBody>
-          <a:bodyPr wrap="square" lIns="0" tIns="0" rIns="0" bIns="0" rtlCol="0" anchor="ctr"/>
-          <a:lstStyle/>
-          <a:p>
-            <a:pPr indent="0" marL="0">
-              <a:buNone/>
-            </a:pPr>
-            <a:r>
-              <a:rPr lang="en-US" sz="2200" b="1" dirty="0">
-                <a:solidFill>
-                  <a:schemeClr val="accent2"/>
-                </a:solidFill>
-              </a:rPr>
-              <a:t>Sigarayı bırakma oranı</a:t>
-            </a:r>
-            <a:endParaRPr lang="en-US" sz="2200" dirty="0"/>
-          </a:p>
-        </p:txBody>
-      </p:sp>
-      <p:graphicFrame>
-        <p:nvGraphicFramePr>
-          <p:cNvPr id="5" name="Hane grafiği" descr=""/>
-          <p:cNvGraphicFramePr/>
-          <p:nvPr/>
-        </p:nvGraphicFramePr>
-        <p:xfrm>
-          <a:off x="548640" y="1828800"/>
-          <a:ext cx="6035040" cy="3566160"/>
-        </p:xfrm>
-        <a:graphic xmlns:a="http://schemas.openxmlformats.org/drawingml/2006/main">
-          <a:graphicData uri="http://schemas.openxmlformats.org/drawingml/2006/chart">
-            <c:chart xmlns:c="http://schemas.openxmlformats.org/drawingml/2006/chart" r:id="rId1"/>
-          </a:graphicData>
-        </a:graphic>
-      </p:graphicFrame>
-      <p:sp>
-        <p:nvSpPr>
-          <p:cNvPr id="6" name="Text 2"/>
-          <p:cNvSpPr txBox="1"/>
-          <p:nvPr/>
-        </p:nvSpPr>
-        <p:spPr>
-          <a:xfrm>
-            <a:off x="548640" y="5440680"/>
-            <a:ext cx="6035040" cy="457200"/>
-          </a:xfrm>
-          <a:prstGeom prst="rect">
-            <a:avLst/>
-          </a:prstGeom>
-          <a:noFill/>
-          <a:ln/>
-        </p:spPr>
-        <p:txBody>
-          <a:bodyPr wrap="square" lIns="0" tIns="0" rIns="0" bIns="0" rtlCol="0" anchor="ctr"/>
-          <a:lstStyle/>
-          <a:p>
-            <a:pPr algn="ctr" indent="0" marL="0">
-              <a:buNone/>
-            </a:pPr>
-            <a:r>
-              <a:rPr lang="en-US" sz="2200" b="1" dirty="0">
-                <a:solidFill>
-                  <a:schemeClr val="accent1"/>
-                </a:solidFill>
-              </a:rPr>
-              <a:t>p = 0,003</a:t>
-            </a:r>
-            <a:endParaRPr lang="en-US" sz="2200" dirty="0"/>
-          </a:p>
-        </p:txBody>
-      </p:sp>
-      <p:sp>
-        <p:nvSpPr>
-          <p:cNvPr id="7" name="Kart"/>
+          <p:cNvPr id="4" name="Görsel çerçeve"/>
           <p:cNvSpPr/>
           <p:nvPr/>
         </p:nvSpPr>
         <p:spPr>
           <a:xfrm>
-            <a:off x="6949440" y="1371600"/>
-            <a:ext cx="4663440" cy="4526280"/>
-          </a:xfrm>
-          <a:prstGeom prst="roundRect">
-            <a:avLst>
-              <a:gd name="adj" fmla="val 2424"/>
-            </a:avLst>
+            <a:off x="548640" y="1325880"/>
+            <a:ext cx="7191299" cy="4892040"/>
+          </a:xfrm>
+          <a:prstGeom prst="rect">
+            <a:avLst/>
           </a:prstGeom>
           <a:solidFill>
-            <a:schemeClr val="bg2"/>
+            <a:schemeClr val="bg1"/>
           </a:solidFill>
           <a:ln w="12700">
             <a:solidFill>
-              <a:schemeClr val="bg2"/>
+              <a:srgbClr val="C9DCDF"/>
             </a:solidFill>
             <a:prstDash val="solid"/>
           </a:ln>
         </p:spPr>
       </p:sp>
-      <p:sp>
-        <p:nvSpPr>
-          <p:cNvPr id="8" name="Text 4"/>
+      <p:pic>
+        <p:nvPicPr>
+          <p:cNvPr id="5" name="Tablo 1: Katılımcıların sosyodemografik özellikleri" descr="Tablo 1: Katılımcıların sosyodemografik özellikleri">    </p:cNvPr>
+          <p:cNvPicPr>
+            <a:picLocks noChangeAspect="1"/>
+          </p:cNvPicPr>
+          <p:nvPr/>
+        </p:nvPicPr>
+        <p:blipFill>
+          <a:blip r:embed="rId1"/>
+          <a:stretch>
+            <a:fillRect/>
+          </a:stretch>
+        </p:blipFill>
+        <p:spPr>
+          <a:xfrm>
+            <a:off x="548640" y="1325880"/>
+            <a:ext cx="7191299" cy="4892040"/>
+          </a:xfrm>
+          <a:prstGeom prst="rect">
+            <a:avLst/>
+          </a:prstGeom>
+        </p:spPr>
+      </p:pic>
+      <p:sp>
+        <p:nvSpPr>
+          <p:cNvPr id="6" name="Kart"/>
+          <p:cNvSpPr/>
+          <p:nvPr/>
+        </p:nvSpPr>
+        <p:spPr>
+          <a:xfrm>
+            <a:off x="8059979" y="1325880"/>
+            <a:ext cx="3580333" cy="4892040"/>
+          </a:xfrm>
+          <a:prstGeom prst="roundRect">
+            <a:avLst>
+              <a:gd name="adj" fmla="val 3065"/>
+            </a:avLst>
+          </a:prstGeom>
+          <a:solidFill>
+            <a:schemeClr val="accent1"/>
+          </a:solidFill>
+          <a:ln w="12700">
+            <a:solidFill>
+              <a:schemeClr val="accent1"/>
+            </a:solidFill>
+            <a:prstDash val="solid"/>
+          </a:ln>
+        </p:spPr>
+      </p:sp>
+      <p:sp>
+        <p:nvSpPr>
+          <p:cNvPr id="7" name="Text 3"/>
           <p:cNvSpPr txBox="1"/>
           <p:nvPr/>
         </p:nvSpPr>
         <p:spPr>
           <a:xfrm>
-            <a:off x="7223760" y="1554480"/>
-            <a:ext cx="4206240" cy="502920"/>
-          </a:xfrm>
-          <a:prstGeom prst="rect">
-            <a:avLst/>
-          </a:prstGeom>
-          <a:noFill/>
-          <a:ln/>
-        </p:spPr>
-        <p:txBody>
-          <a:bodyPr wrap="square" lIns="0" tIns="0" rIns="0" bIns="0" rtlCol="0" anchor="ctr"/>
+            <a:off x="8288579" y="1508760"/>
+            <a:ext cx="3123133" cy="4526280"/>
+          </a:xfrm>
+          <a:prstGeom prst="rect">
+            <a:avLst/>
+          </a:prstGeom>
+          <a:noFill/>
+          <a:ln/>
+        </p:spPr>
+        <p:txBody>
+          <a:bodyPr wrap="square" lIns="0" tIns="0" rIns="0" bIns="0" rtlCol="0" anchor="t"/>
           <a:lstStyle/>
           <a:p>
             <a:pPr indent="0" marL="0">
               <a:buNone/>
             </a:pPr>
             <a:r>
-              <a:rPr lang="en-US" sz="2200" b="1" dirty="0">
-                <a:solidFill>
-                  <a:schemeClr val="accent2"/>
-                </a:solidFill>
-              </a:rPr>
-              <a:t>Anlamlı fark bulunmayanlar</a:t>
-            </a:r>
-            <a:endParaRPr lang="en-US" sz="2200" dirty="0"/>
-          </a:p>
-        </p:txBody>
-      </p:sp>
-      <p:sp>
-        <p:nvSpPr>
-          <p:cNvPr id="9" name="Text 5"/>
-          <p:cNvSpPr txBox="1"/>
-          <p:nvPr/>
-        </p:nvSpPr>
-        <p:spPr>
-          <a:xfrm>
-            <a:off x="7223760" y="2194560"/>
-            <a:ext cx="4206240" cy="3474720"/>
-          </a:xfrm>
-          <a:prstGeom prst="rect">
-            <a:avLst/>
-          </a:prstGeom>
-          <a:noFill/>
-          <a:ln/>
-        </p:spPr>
-        <p:txBody>
-          <a:bodyPr wrap="square" lIns="0" tIns="0" rIns="0" bIns="0" rtlCol="0" anchor="t"/>
-          <a:lstStyle/>
-          <a:p>
-            <a:pPr algn="just" marL="279400" indent="-279400">
+              <a:rPr lang="en-US" sz="3000" b="1" dirty="0">
+                <a:solidFill>
+                  <a:schemeClr val="bg1"/>
+                </a:solidFill>
+              </a:rPr>
+              <a:t>%63,7</a:t>
+            </a:r>
+            <a:endParaRPr lang="en-US" sz="3000" dirty="0"/>
+          </a:p>
+          <a:p>
+            <a:pPr indent="0" marL="0">
               <a:spcAft>
-                <a:spcPts val="1000"/>
+                <a:spcPts val="1200"/>
               </a:spcAft>
-              <a:buSzPct val="100000"/>
-              <a:buChar char="•"/>
-            </a:pPr>
-            <a:r>
-              <a:rPr lang="en-US" sz="2200" dirty="0">
-                <a:solidFill>
-                  <a:schemeClr val="accent1"/>
-                </a:solidFill>
-              </a:rPr>
-              <a:t>Cinsiyet ve yaş</a:t>
-            </a:r>
-            <a:endParaRPr lang="en-US" sz="2200" dirty="0"/>
-          </a:p>
-          <a:p>
-            <a:pPr algn="just" marL="279400" indent="-279400">
+              <a:buNone/>
+            </a:pPr>
+            <a:r>
+              <a:rPr lang="en-US" sz="2000" dirty="0">
+                <a:solidFill>
+                  <a:schemeClr val="bg1"/>
+                </a:solidFill>
+              </a:rPr>
+              <a:t>erkek</a:t>
+            </a:r>
+            <a:endParaRPr lang="en-US" sz="3000" dirty="0"/>
+          </a:p>
+          <a:p>
+            <a:pPr indent="0" marL="0">
+              <a:buNone/>
+            </a:pPr>
+            <a:r>
+              <a:rPr lang="en-US" sz="3000" b="1" dirty="0">
+                <a:solidFill>
+                  <a:schemeClr val="bg1"/>
+                </a:solidFill>
+              </a:rPr>
+              <a:t>%82,0</a:t>
+            </a:r>
+            <a:endParaRPr lang="en-US" sz="3000" dirty="0"/>
+          </a:p>
+          <a:p>
+            <a:pPr indent="0" marL="0">
               <a:spcAft>
-                <a:spcPts val="1000"/>
+                <a:spcPts val="1200"/>
               </a:spcAft>
-              <a:buSzPct val="100000"/>
-              <a:buChar char="•"/>
-            </a:pPr>
-            <a:r>
-              <a:rPr lang="en-US" sz="2200" dirty="0">
-                <a:solidFill>
-                  <a:schemeClr val="accent1"/>
-                </a:solidFill>
-              </a:rPr>
-              <a:t>Medeni ve eğitim durumu</a:t>
-            </a:r>
-            <a:endParaRPr lang="en-US" sz="2200" dirty="0"/>
-          </a:p>
-          <a:p>
-            <a:pPr algn="just" marL="279400" indent="-279400">
+              <a:buNone/>
+            </a:pPr>
+            <a:r>
+              <a:rPr lang="en-US" sz="2000" dirty="0">
+                <a:solidFill>
+                  <a:schemeClr val="bg1"/>
+                </a:solidFill>
+              </a:rPr>
+              <a:t>evli</a:t>
+            </a:r>
+            <a:endParaRPr lang="en-US" sz="3000" dirty="0"/>
+          </a:p>
+          <a:p>
+            <a:pPr indent="0" marL="0">
+              <a:buNone/>
+            </a:pPr>
+            <a:r>
+              <a:rPr lang="en-US" sz="3000" b="1" dirty="0">
+                <a:solidFill>
+                  <a:schemeClr val="bg1"/>
+                </a:solidFill>
+              </a:rPr>
+              <a:t>%43,4</a:t>
+            </a:r>
+            <a:endParaRPr lang="en-US" sz="3000" dirty="0"/>
+          </a:p>
+          <a:p>
+            <a:pPr indent="0" marL="0">
               <a:spcAft>
-                <a:spcPts val="1000"/>
+                <a:spcPts val="1200"/>
               </a:spcAft>
-              <a:buSzPct val="100000"/>
-              <a:buChar char="•"/>
-            </a:pPr>
-            <a:r>
-              <a:rPr lang="en-US" sz="2200" dirty="0">
-                <a:solidFill>
-                  <a:schemeClr val="accent1"/>
-                </a:solidFill>
-              </a:rPr>
-              <a:t>Yerleşim yeri</a:t>
-            </a:r>
-            <a:endParaRPr lang="en-US" sz="2200" dirty="0"/>
-          </a:p>
-          <a:p>
-            <a:pPr algn="just" marL="279400" indent="-279400">
-              <a:spcAft>
-                <a:spcPts val="1000"/>
-              </a:spcAft>
-              <a:buSzPct val="100000"/>
-              <a:buChar char="•"/>
-            </a:pPr>
-            <a:r>
-              <a:rPr lang="en-US" sz="2200" dirty="0">
-                <a:solidFill>
-                  <a:schemeClr val="accent1"/>
-                </a:solidFill>
-              </a:rPr>
-              <a:t>Çalışma durumu</a:t>
-            </a:r>
-            <a:endParaRPr lang="en-US" sz="2200" dirty="0"/>
-          </a:p>
-          <a:p>
-            <a:pPr algn="just" marL="279400" indent="-279400">
-              <a:spcAft>
-                <a:spcPts val="1000"/>
-              </a:spcAft>
-              <a:buSzPct val="100000"/>
-              <a:buChar char="•"/>
-            </a:pPr>
-            <a:r>
-              <a:rPr lang="en-US" sz="2200" dirty="0">
-                <a:solidFill>
-                  <a:schemeClr val="accent1"/>
-                </a:solidFill>
-              </a:rPr>
-              <a:t>Alkol kullanımı</a:t>
-            </a:r>
-            <a:endParaRPr lang="en-US" sz="2200" dirty="0"/>
-          </a:p>
-        </p:txBody>
-      </p:sp>
-      <p:sp>
-        <p:nvSpPr>
-          <p:cNvPr id="10" name="Kaynak"/>
+              <a:buNone/>
+            </a:pPr>
+            <a:r>
+              <a:rPr lang="en-US" sz="2000" dirty="0">
+                <a:solidFill>
+                  <a:schemeClr val="bg1"/>
+                </a:solidFill>
+              </a:rPr>
+              <a:t>yükseköğretim mezunu</a:t>
+            </a:r>
+            <a:endParaRPr lang="en-US" sz="3000" dirty="0"/>
+          </a:p>
+          <a:p>
+            <a:pPr indent="0" marL="0">
+              <a:buNone/>
+            </a:pPr>
+            <a:r>
+              <a:rPr lang="en-US" sz="3000" b="1" dirty="0">
+                <a:solidFill>
+                  <a:schemeClr val="bg1"/>
+                </a:solidFill>
+              </a:rPr>
+              <a:t>%39,6</a:t>
+            </a:r>
+            <a:endParaRPr lang="en-US" sz="3000" dirty="0"/>
+          </a:p>
+          <a:p>
+            <a:pPr indent="0" marL="0">
+              <a:buNone/>
+            </a:pPr>
+            <a:r>
+              <a:rPr lang="en-US" sz="2000" dirty="0">
+                <a:solidFill>
+                  <a:schemeClr val="bg1"/>
+                </a:solidFill>
+              </a:rPr>
+              <a:t>hanesinde sigara içen var</a:t>
+            </a:r>
+            <a:endParaRPr lang="en-US" sz="3000" dirty="0"/>
+          </a:p>
+        </p:txBody>
+      </p:sp>
+      <p:sp>
+        <p:nvSpPr>
+          <p:cNvPr id="8" name="Kaynak"/>
           <p:cNvSpPr txBox="1"/>
           <p:nvPr/>
         </p:nvSpPr>
@@ -8449,7 +7461,7 @@
                   <a:schemeClr val="accent3"/>
                 </a:solidFill>
               </a:rPr>
-              <a:t>Kaynak: Cenberlitaş E, Gökçe A, Öztürk O. Turk J Fam Pract. 2026;30(2):97-106. Tablo 2.</a:t>
+              <a:t>Görsel: Cenberlitaş E, Gökçe A, Öztürk O. Turk J Fam Pract. 2026;30(2):97-106, Tablo 1.</a:t>
             </a:r>
             <a:endParaRPr lang="en-US" sz="1200" dirty="0"/>
           </a:p>
@@ -8557,42 +7569,75 @@
                   <a:schemeClr val="accent1"/>
                 </a:solidFill>
               </a:rPr>
-              <a:t>En sık kombine tedavi uygulanmıştır</a:t>
+              <a:t>Tablo 2: Sosyodemografik özellikler ve bırakma</a:t>
             </a:r>
             <a:endParaRPr lang="en-US" sz="3600" dirty="0"/>
           </a:p>
         </p:txBody>
       </p:sp>
-      <p:graphicFrame>
-        <p:nvGraphicFramePr>
-          <p:cNvPr id="4" name="Tedavi dağılımı" descr=""/>
-          <p:cNvGraphicFramePr/>
-          <p:nvPr/>
-        </p:nvGraphicFramePr>
-        <p:xfrm>
-          <a:off x="548640" y="1325880"/>
-          <a:ext cx="6949440" cy="4754880"/>
-        </p:xfrm>
-        <a:graphic xmlns:a="http://schemas.openxmlformats.org/drawingml/2006/main">
-          <a:graphicData uri="http://schemas.openxmlformats.org/drawingml/2006/chart">
-            <c:chart xmlns:c="http://schemas.openxmlformats.org/drawingml/2006/chart" r:id="rId1"/>
-          </a:graphicData>
-        </a:graphic>
-      </p:graphicFrame>
-      <p:sp>
-        <p:nvSpPr>
-          <p:cNvPr id="5" name="Kart"/>
+      <p:sp>
+        <p:nvSpPr>
+          <p:cNvPr id="4" name="Görsel çerçeve"/>
           <p:cNvSpPr/>
           <p:nvPr/>
         </p:nvSpPr>
         <p:spPr>
           <a:xfrm>
-            <a:off x="7863840" y="1463040"/>
-            <a:ext cx="3749040" cy="4480560"/>
+            <a:off x="548640" y="1325880"/>
+            <a:ext cx="8321040" cy="4575618"/>
+          </a:xfrm>
+          <a:prstGeom prst="rect">
+            <a:avLst/>
+          </a:prstGeom>
+          <a:solidFill>
+            <a:schemeClr val="bg1"/>
+          </a:solidFill>
+          <a:ln w="12700">
+            <a:solidFill>
+              <a:srgbClr val="C9DCDF"/>
+            </a:solidFill>
+            <a:prstDash val="solid"/>
+          </a:ln>
+        </p:spPr>
+      </p:sp>
+      <p:pic>
+        <p:nvPicPr>
+          <p:cNvPr id="5" name="Tablo 2, birinci bölüm" descr="Tablo 2, birinci bölüm">    </p:cNvPr>
+          <p:cNvPicPr>
+            <a:picLocks noChangeAspect="1"/>
+          </p:cNvPicPr>
+          <p:nvPr/>
+        </p:nvPicPr>
+        <p:blipFill>
+          <a:blip r:embed="rId1"/>
+          <a:stretch>
+            <a:fillRect/>
+          </a:stretch>
+        </p:blipFill>
+        <p:spPr>
+          <a:xfrm>
+            <a:off x="548640" y="1325880"/>
+            <a:ext cx="8321040" cy="4575618"/>
+          </a:xfrm>
+          <a:prstGeom prst="rect">
+            <a:avLst/>
+          </a:prstGeom>
+        </p:spPr>
+      </p:pic>
+      <p:sp>
+        <p:nvSpPr>
+          <p:cNvPr id="6" name="Kart"/>
+          <p:cNvSpPr/>
+          <p:nvPr/>
+        </p:nvSpPr>
+        <p:spPr>
+          <a:xfrm>
+            <a:off x="9189720" y="1325880"/>
+            <a:ext cx="2450592" cy="4575618"/>
           </a:xfrm>
           <a:prstGeom prst="roundRect">
             <a:avLst>
-              <a:gd name="adj" fmla="val 2927"/>
+              <a:gd name="adj" fmla="val 4478"/>
             </a:avLst>
           </a:prstGeom>
           <a:solidFill>
@@ -8608,64 +7653,14 @@
       </p:sp>
       <p:sp>
         <p:nvSpPr>
-          <p:cNvPr id="6" name="Text 2"/>
-          <p:cNvSpPr txBox="1"/>
-          <p:nvPr/>
-        </p:nvSpPr>
-        <p:spPr>
-          <a:xfrm>
-            <a:off x="8092440" y="1691640"/>
-            <a:ext cx="3291840" cy="2377440"/>
-          </a:xfrm>
-          <a:prstGeom prst="rect">
-            <a:avLst/>
-          </a:prstGeom>
-          <a:noFill/>
-          <a:ln/>
-        </p:spPr>
-        <p:txBody>
-          <a:bodyPr wrap="square" lIns="0" tIns="0" rIns="0" bIns="0" rtlCol="0" anchor="t"/>
-          <a:lstStyle/>
-          <a:p>
-            <a:pPr indent="0" marL="0">
-              <a:buNone/>
-            </a:pPr>
-            <a:r>
-              <a:rPr lang="en-US" sz="4400" b="1" dirty="0">
-                <a:solidFill>
-                  <a:schemeClr val="bg1"/>
-                </a:solidFill>
-              </a:rPr>
-              <a:t>125 / 141</a:t>
-            </a:r>
-            <a:endParaRPr lang="en-US" sz="4400" dirty="0"/>
-          </a:p>
-          <a:p>
-            <a:pPr indent="0" marL="0">
-              <a:buNone/>
-            </a:pPr>
-            <a:r>
-              <a:rPr lang="en-US" sz="2200" dirty="0">
-                <a:solidFill>
-                  <a:schemeClr val="bg1"/>
-                </a:solidFill>
-              </a:rPr>
-              <a:t>kombine tedavi hastası bupropion + NRT almıştır</a:t>
-            </a:r>
-            <a:endParaRPr lang="en-US" sz="4400" dirty="0"/>
-          </a:p>
-        </p:txBody>
-      </p:sp>
-      <p:sp>
-        <p:nvSpPr>
           <p:cNvPr id="7" name="Text 3"/>
           <p:cNvSpPr txBox="1"/>
           <p:nvPr/>
         </p:nvSpPr>
         <p:spPr>
           <a:xfrm>
-            <a:off x="8092440" y="4206240"/>
-            <a:ext cx="3291840" cy="1554480"/>
+            <a:off x="9418320" y="1508760"/>
+            <a:ext cx="1993392" cy="4209858"/>
           </a:xfrm>
           <a:prstGeom prst="rect">
             <a:avLst/>
@@ -8678,15 +7673,32 @@
           <a:lstStyle/>
           <a:p>
             <a:pPr indent="0" marL="0">
-              <a:buNone/>
-            </a:pPr>
-            <a:r>
-              <a:rPr lang="en-US" sz="2000" i="1" dirty="0">
-                <a:solidFill>
-                  <a:schemeClr val="bg2"/>
-                </a:solidFill>
-              </a:rPr>
-              <a:t>Vareniklin, piyasadan çekildiği için az kullanılmıştır.</a:t>
+              <a:spcAft>
+                <a:spcPts val="1200"/>
+              </a:spcAft>
+              <a:buNone/>
+            </a:pPr>
+            <a:r>
+              <a:rPr lang="en-US" sz="2000" b="1" dirty="0">
+                <a:solidFill>
+                  <a:schemeClr val="bg1"/>
+                </a:solidFill>
+              </a:rPr>
+              <a:t>Anlamlı fark yok</a:t>
+            </a:r>
+            <a:endParaRPr lang="en-US" sz="2000" dirty="0"/>
+          </a:p>
+          <a:p>
+            <a:pPr indent="0" marL="0">
+              <a:buNone/>
+            </a:pPr>
+            <a:r>
+              <a:rPr lang="en-US" sz="2000" dirty="0">
+                <a:solidFill>
+                  <a:schemeClr val="bg1"/>
+                </a:solidFill>
+              </a:rPr>
+              <a:t>Cinsiyet, yaş grubu, medeni durum ve eğitim durumu</a:t>
             </a:r>
             <a:endParaRPr lang="en-US" sz="2000" dirty="0"/>
           </a:p>
@@ -8722,7 +7734,7 @@
                   <a:schemeClr val="accent3"/>
                 </a:solidFill>
               </a:rPr>
-              <a:t>Kaynak: Cenberlitaş E, Gökçe A, Öztürk O. Turk J Fam Pract. 2026;30(2):97-106. Tablo 3.</a:t>
+              <a:t>Görsel: Cenberlitaş E, Gökçe A, Öztürk O. Turk J Fam Pract. 2026;30(2):97-106, Tablo 2.</a:t>
             </a:r>
             <a:endParaRPr lang="en-US" sz="1200" dirty="0"/>
           </a:p>
@@ -8830,127 +7842,83 @@
                   <a:schemeClr val="accent1"/>
                 </a:solidFill>
               </a:rPr>
-              <a:t>En düşük başarı bupropion monoterapisinde</a:t>
+              <a:t>Tablo 2 (devam)</a:t>
             </a:r>
             <a:endParaRPr lang="en-US" sz="3600" dirty="0"/>
           </a:p>
         </p:txBody>
       </p:sp>
-      <p:graphicFrame>
-        <p:nvGraphicFramePr>
-          <p:cNvPr id="4" name="Tedaviye göre bırakma" descr=""/>
-          <p:cNvGraphicFramePr/>
-          <p:nvPr/>
-        </p:nvGraphicFramePr>
-        <p:xfrm>
-          <a:off x="548640" y="1325880"/>
-          <a:ext cx="6949440" cy="4754880"/>
-        </p:xfrm>
-        <a:graphic xmlns:a="http://schemas.openxmlformats.org/drawingml/2006/main">
-          <a:graphicData uri="http://schemas.openxmlformats.org/drawingml/2006/chart">
-            <c:chart xmlns:c="http://schemas.openxmlformats.org/drawingml/2006/chart" r:id="rId1"/>
-          </a:graphicData>
-        </a:graphic>
-      </p:graphicFrame>
-      <p:sp>
-        <p:nvSpPr>
-          <p:cNvPr id="5" name="Kart"/>
+      <p:sp>
+        <p:nvSpPr>
+          <p:cNvPr id="4" name="Görsel çerçeve"/>
           <p:cNvSpPr/>
           <p:nvPr/>
         </p:nvSpPr>
         <p:spPr>
           <a:xfrm>
-            <a:off x="7863840" y="1463040"/>
-            <a:ext cx="3749040" cy="2057400"/>
-          </a:xfrm>
-          <a:prstGeom prst="roundRect">
-            <a:avLst>
-              <a:gd name="adj" fmla="val 5333"/>
-            </a:avLst>
+            <a:off x="548640" y="1325880"/>
+            <a:ext cx="8321040" cy="3688167"/>
+          </a:xfrm>
+          <a:prstGeom prst="rect">
+            <a:avLst/>
           </a:prstGeom>
           <a:solidFill>
-            <a:schemeClr val="bg2"/>
+            <a:schemeClr val="bg1"/>
           </a:solidFill>
           <a:ln w="12700">
             <a:solidFill>
-              <a:schemeClr val="bg2"/>
+              <a:srgbClr val="C9DCDF"/>
             </a:solidFill>
             <a:prstDash val="solid"/>
           </a:ln>
         </p:spPr>
       </p:sp>
-      <p:sp>
-        <p:nvSpPr>
-          <p:cNvPr id="6" name="Text 2"/>
-          <p:cNvSpPr txBox="1"/>
-          <p:nvPr/>
-        </p:nvSpPr>
-        <p:spPr>
-          <a:xfrm>
-            <a:off x="8046720" y="1554480"/>
-            <a:ext cx="3383280" cy="1874520"/>
-          </a:xfrm>
-          <a:prstGeom prst="rect">
-            <a:avLst/>
-          </a:prstGeom>
-          <a:noFill/>
-          <a:ln/>
-        </p:spPr>
-        <p:txBody>
-          <a:bodyPr wrap="square" lIns="0" tIns="0" rIns="0" bIns="0" rtlCol="0" anchor="ctr"/>
-          <a:lstStyle/>
-          <a:p>
-            <a:pPr algn="ctr" indent="0" marL="0">
-              <a:buNone/>
-            </a:pPr>
-            <a:r>
-              <a:rPr lang="en-US" sz="4400" b="1" dirty="0">
-                <a:solidFill>
-                  <a:schemeClr val="accent2"/>
-                </a:solidFill>
-              </a:rPr>
-              <a:t>%34,1</a:t>
-            </a:r>
-            <a:endParaRPr lang="en-US" sz="4400" dirty="0"/>
-          </a:p>
-          <a:p>
-            <a:pPr algn="ctr" indent="0" marL="0">
-              <a:buNone/>
-            </a:pPr>
-            <a:r>
-              <a:rPr lang="en-US" sz="2000" dirty="0">
-                <a:solidFill>
-                  <a:schemeClr val="accent1"/>
-                </a:solidFill>
-              </a:rPr>
-              <a:t>genel bırakma oranı (136/399)</a:t>
-            </a:r>
-            <a:endParaRPr lang="en-US" sz="4400" dirty="0"/>
-          </a:p>
-        </p:txBody>
-      </p:sp>
-      <p:sp>
-        <p:nvSpPr>
-          <p:cNvPr id="7" name="Kart"/>
+      <p:pic>
+        <p:nvPicPr>
+          <p:cNvPr id="5" name="Tablo 2, ikinci bölüm" descr="Tablo 2, ikinci bölüm">    </p:cNvPr>
+          <p:cNvPicPr>
+            <a:picLocks noChangeAspect="1"/>
+          </p:cNvPicPr>
+          <p:nvPr/>
+        </p:nvPicPr>
+        <p:blipFill>
+          <a:blip r:embed="rId1"/>
+          <a:stretch>
+            <a:fillRect/>
+          </a:stretch>
+        </p:blipFill>
+        <p:spPr>
+          <a:xfrm>
+            <a:off x="548640" y="1325880"/>
+            <a:ext cx="8321040" cy="3688167"/>
+          </a:xfrm>
+          <a:prstGeom prst="rect">
+            <a:avLst/>
+          </a:prstGeom>
+        </p:spPr>
+      </p:pic>
+      <p:sp>
+        <p:nvSpPr>
+          <p:cNvPr id="6" name="Kart"/>
           <p:cNvSpPr/>
           <p:nvPr/>
         </p:nvSpPr>
         <p:spPr>
           <a:xfrm>
-            <a:off x="7863840" y="3749040"/>
-            <a:ext cx="3749040" cy="2194560"/>
+            <a:off x="9189720" y="1325880"/>
+            <a:ext cx="2450592" cy="3688167"/>
           </a:xfrm>
           <a:prstGeom prst="roundRect">
             <a:avLst>
-              <a:gd name="adj" fmla="val 5000"/>
+              <a:gd name="adj" fmla="val 4478"/>
             </a:avLst>
           </a:prstGeom>
           <a:solidFill>
-            <a:schemeClr val="bg2"/>
+            <a:schemeClr val="accent1"/>
           </a:solidFill>
           <a:ln w="12700">
             <a:solidFill>
-              <a:schemeClr val="bg2"/>
+              <a:schemeClr val="accent1"/>
             </a:solidFill>
             <a:prstDash val="solid"/>
           </a:ln>
@@ -8958,57 +7926,91 @@
       </p:sp>
       <p:sp>
         <p:nvSpPr>
-          <p:cNvPr id="8" name="Text 4"/>
+          <p:cNvPr id="7" name="Text 3"/>
           <p:cNvSpPr txBox="1"/>
           <p:nvPr/>
         </p:nvSpPr>
         <p:spPr>
           <a:xfrm>
-            <a:off x="8046720" y="3840480"/>
-            <a:ext cx="3383280" cy="2011680"/>
-          </a:xfrm>
-          <a:prstGeom prst="rect">
-            <a:avLst/>
-          </a:prstGeom>
-          <a:noFill/>
-          <a:ln/>
-        </p:spPr>
-        <p:txBody>
-          <a:bodyPr wrap="square" lIns="0" tIns="0" rIns="0" bIns="0" rtlCol="0" anchor="ctr"/>
-          <a:lstStyle/>
-          <a:p>
-            <a:pPr algn="ctr" indent="0" marL="0">
-              <a:buNone/>
-            </a:pPr>
-            <a:r>
-              <a:rPr lang="en-US" sz="3600" b="1" dirty="0">
-                <a:solidFill>
-                  <a:schemeClr val="accent1"/>
-                </a:solidFill>
-              </a:rPr>
-              <a:t>p &lt; 0,001</a:t>
-            </a:r>
-            <a:endParaRPr lang="en-US" sz="3600" dirty="0"/>
-          </a:p>
-          <a:p>
-            <a:pPr algn="ctr" indent="0" marL="0">
+            <a:off x="9418320" y="1508760"/>
+            <a:ext cx="1993392" cy="3322407"/>
+          </a:xfrm>
+          <a:prstGeom prst="rect">
+            <a:avLst/>
+          </a:prstGeom>
+          <a:noFill/>
+          <a:ln/>
+        </p:spPr>
+        <p:txBody>
+          <a:bodyPr wrap="square" lIns="0" tIns="0" rIns="0" bIns="0" rtlCol="0" anchor="t"/>
+          <a:lstStyle/>
+          <a:p>
+            <a:pPr indent="0" marL="0">
+              <a:spcAft>
+                <a:spcPts val="1200"/>
+              </a:spcAft>
+              <a:buNone/>
+            </a:pPr>
+            <a:r>
+              <a:rPr lang="en-US" sz="2000" b="1" dirty="0">
+                <a:solidFill>
+                  <a:schemeClr val="bg1"/>
+                </a:solidFill>
+              </a:rPr>
+              <a:t>Tek anlamlı fark:</a:t>
+            </a:r>
+            <a:endParaRPr lang="en-US" sz="2000" dirty="0"/>
+          </a:p>
+          <a:p>
+            <a:pPr indent="0" marL="0">
+              <a:spcAft>
+                <a:spcPts val="1200"/>
+              </a:spcAft>
               <a:buNone/>
             </a:pPr>
             <a:r>
               <a:rPr lang="en-US" sz="2000" dirty="0">
                 <a:solidFill>
-                  <a:schemeClr val="accent1"/>
-                </a:solidFill>
-              </a:rPr>
-              <a:t>altı grup arasında (ki-kare)</a:t>
-            </a:r>
-            <a:endParaRPr lang="en-US" sz="3600" dirty="0"/>
-          </a:p>
-        </p:txBody>
-      </p:sp>
-      <p:sp>
-        <p:nvSpPr>
-          <p:cNvPr id="9" name="Kaynak"/>
+                  <a:schemeClr val="bg1"/>
+                </a:solidFill>
+              </a:rPr>
+              <a:t>hanede sigara içen varlığı</a:t>
+            </a:r>
+            <a:endParaRPr lang="en-US" sz="2000" dirty="0"/>
+          </a:p>
+          <a:p>
+            <a:pPr indent="0" marL="0">
+              <a:buNone/>
+            </a:pPr>
+            <a:r>
+              <a:rPr lang="en-US" sz="3000" b="1" dirty="0">
+                <a:solidFill>
+                  <a:schemeClr val="bg1"/>
+                </a:solidFill>
+              </a:rPr>
+              <a:t>p = 0,003</a:t>
+            </a:r>
+            <a:endParaRPr lang="en-US" sz="2000" dirty="0"/>
+          </a:p>
+          <a:p>
+            <a:pPr indent="0" marL="0">
+              <a:buNone/>
+            </a:pPr>
+            <a:r>
+              <a:rPr lang="en-US" sz="1800" dirty="0">
+                <a:solidFill>
+                  <a:schemeClr val="bg1"/>
+                </a:solidFill>
+              </a:rPr>
+              <a:t>Bırakma: %39,8 ve %25,3</a:t>
+            </a:r>
+            <a:endParaRPr lang="en-US" sz="2000" dirty="0"/>
+          </a:p>
+        </p:txBody>
+      </p:sp>
+      <p:sp>
+        <p:nvSpPr>
+          <p:cNvPr id="8" name="Kaynak"/>
           <p:cNvSpPr txBox="1"/>
           <p:nvPr/>
         </p:nvSpPr>
@@ -9036,7 +8038,7 @@
                   <a:schemeClr val="accent3"/>
                 </a:solidFill>
               </a:rPr>
-              <a:t>Kaynak: Cenberlitaş E, Gökçe A, Öztürk O. Turk J Fam Pract. 2026;30(2):97-106. Tablo 5.</a:t>
+              <a:t>Görsel: Cenberlitaş E, Gökçe A, Öztürk O. Turk J Fam Pract. 2026;30(2):97-106, Tablo 2.</a:t>
             </a:r>
             <a:endParaRPr lang="en-US" sz="1200" dirty="0"/>
           </a:p>
@@ -9144,7 +8146,7 @@
                   <a:schemeClr val="accent1"/>
                 </a:solidFill>
               </a:rPr>
-              <a:t>Başarı görüşme sayısıyla artmaktadır</a:t>
+              <a:t>Tablo 3: Uygulanan tedaviler</a:t>
             </a:r>
             <a:endParaRPr lang="en-US" sz="3600" dirty="0"/>
           </a:p>
@@ -9152,305 +8154,75 @@
       </p:sp>
       <p:sp>
         <p:nvSpPr>
-          <p:cNvPr id="4" name="Text 1"/>
-          <p:cNvSpPr txBox="1"/>
-          <p:nvPr/>
-        </p:nvSpPr>
-        <p:spPr>
-          <a:xfrm>
-            <a:off x="4663440" y="1371600"/>
-            <a:ext cx="2377440" cy="502920"/>
-          </a:xfrm>
-          <a:prstGeom prst="rect">
-            <a:avLst/>
-          </a:prstGeom>
-          <a:noFill/>
-          <a:ln/>
-        </p:spPr>
-        <p:txBody>
-          <a:bodyPr wrap="square" lIns="0" tIns="0" rIns="0" bIns="0" rtlCol="0" anchor="ctr"/>
-          <a:lstStyle/>
-          <a:p>
-            <a:pPr algn="ctr" indent="0" marL="0">
-              <a:buNone/>
-            </a:pPr>
-            <a:r>
-              <a:rPr lang="en-US" sz="2200" b="1" dirty="0">
-                <a:solidFill>
-                  <a:schemeClr val="accent3"/>
-                </a:solidFill>
-              </a:rPr>
-              <a:t>Başarısız</a:t>
-            </a:r>
-            <a:endParaRPr lang="en-US" sz="2200" dirty="0"/>
-          </a:p>
-        </p:txBody>
-      </p:sp>
-      <p:sp>
-        <p:nvSpPr>
-          <p:cNvPr id="5" name="Text 2"/>
-          <p:cNvSpPr txBox="1"/>
-          <p:nvPr/>
-        </p:nvSpPr>
-        <p:spPr>
-          <a:xfrm>
-            <a:off x="7223760" y="1371600"/>
-            <a:ext cx="2377440" cy="502920"/>
-          </a:xfrm>
-          <a:prstGeom prst="rect">
-            <a:avLst/>
-          </a:prstGeom>
-          <a:noFill/>
-          <a:ln/>
-        </p:spPr>
-        <p:txBody>
-          <a:bodyPr wrap="square" lIns="0" tIns="0" rIns="0" bIns="0" rtlCol="0" anchor="ctr"/>
-          <a:lstStyle/>
-          <a:p>
-            <a:pPr algn="ctr" indent="0" marL="0">
-              <a:buNone/>
-            </a:pPr>
-            <a:r>
-              <a:rPr lang="en-US" sz="2200" b="1" dirty="0">
-                <a:solidFill>
-                  <a:schemeClr val="accent2"/>
-                </a:solidFill>
-              </a:rPr>
-              <a:t>Başarılı</a:t>
-            </a:r>
-            <a:endParaRPr lang="en-US" sz="2200" dirty="0"/>
-          </a:p>
-        </p:txBody>
-      </p:sp>
-      <p:sp>
-        <p:nvSpPr>
-          <p:cNvPr id="6" name="Text 3"/>
-          <p:cNvSpPr txBox="1"/>
-          <p:nvPr/>
-        </p:nvSpPr>
-        <p:spPr>
-          <a:xfrm>
-            <a:off x="9784080" y="1371600"/>
-            <a:ext cx="1828800" cy="502920"/>
-          </a:xfrm>
-          <a:prstGeom prst="rect">
-            <a:avLst/>
-          </a:prstGeom>
-          <a:noFill/>
-          <a:ln/>
-        </p:spPr>
-        <p:txBody>
-          <a:bodyPr wrap="square" lIns="0" tIns="0" rIns="0" bIns="0" rtlCol="0" anchor="ctr"/>
-          <a:lstStyle/>
-          <a:p>
-            <a:pPr algn="ctr" indent="0" marL="0">
-              <a:buNone/>
-            </a:pPr>
-            <a:r>
-              <a:rPr lang="en-US" sz="2200" b="1" dirty="0">
-                <a:solidFill>
-                  <a:schemeClr val="accent1"/>
-                </a:solidFill>
-              </a:rPr>
-              <a:t>p</a:t>
-            </a:r>
-            <a:endParaRPr lang="en-US" sz="2200" dirty="0"/>
-          </a:p>
-        </p:txBody>
-      </p:sp>
-      <p:sp>
-        <p:nvSpPr>
-          <p:cNvPr id="7" name="Kart"/>
+          <p:cNvPr id="4" name="Görsel çerçeve"/>
           <p:cNvSpPr/>
           <p:nvPr/>
         </p:nvSpPr>
         <p:spPr>
           <a:xfrm>
-            <a:off x="548640" y="2011680"/>
-            <a:ext cx="11064240" cy="1143000"/>
-          </a:xfrm>
-          <a:prstGeom prst="roundRect">
-            <a:avLst>
-              <a:gd name="adj" fmla="val 9600"/>
-            </a:avLst>
+            <a:off x="548640" y="1325880"/>
+            <a:ext cx="8321040" cy="3485982"/>
+          </a:xfrm>
+          <a:prstGeom prst="rect">
+            <a:avLst/>
           </a:prstGeom>
           <a:solidFill>
-            <a:schemeClr val="bg2"/>
+            <a:schemeClr val="bg1"/>
           </a:solidFill>
           <a:ln w="12700">
             <a:solidFill>
-              <a:schemeClr val="bg2"/>
+              <a:srgbClr val="C9DCDF"/>
             </a:solidFill>
             <a:prstDash val="solid"/>
           </a:ln>
         </p:spPr>
       </p:sp>
-      <p:sp>
-        <p:nvSpPr>
-          <p:cNvPr id="8" name="Text 5"/>
-          <p:cNvSpPr txBox="1"/>
-          <p:nvPr/>
-        </p:nvSpPr>
-        <p:spPr>
-          <a:xfrm>
-            <a:off x="822960" y="2011680"/>
-            <a:ext cx="3749040" cy="1143000"/>
-          </a:xfrm>
-          <a:prstGeom prst="rect">
-            <a:avLst/>
-          </a:prstGeom>
-          <a:noFill/>
-          <a:ln/>
-        </p:spPr>
-        <p:txBody>
-          <a:bodyPr wrap="square" lIns="0" tIns="0" rIns="0" bIns="0" rtlCol="0" anchor="ctr"/>
-          <a:lstStyle/>
-          <a:p>
-            <a:pPr indent="0" marL="0">
-              <a:buNone/>
-            </a:pPr>
-            <a:r>
-              <a:rPr lang="en-US" sz="2600" b="1" dirty="0">
-                <a:solidFill>
-                  <a:schemeClr val="accent1"/>
-                </a:solidFill>
-              </a:rPr>
-              <a:t>Görüşme sayısı</a:t>
-            </a:r>
-            <a:endParaRPr lang="en-US" sz="2600" dirty="0"/>
-          </a:p>
-        </p:txBody>
-      </p:sp>
-      <p:sp>
-        <p:nvSpPr>
-          <p:cNvPr id="9" name="Text 6"/>
-          <p:cNvSpPr txBox="1"/>
-          <p:nvPr/>
-        </p:nvSpPr>
-        <p:spPr>
-          <a:xfrm>
-            <a:off x="4663440" y="2011680"/>
-            <a:ext cx="2377440" cy="1143000"/>
-          </a:xfrm>
-          <a:prstGeom prst="rect">
-            <a:avLst/>
-          </a:prstGeom>
-          <a:noFill/>
-          <a:ln/>
-        </p:spPr>
-        <p:txBody>
-          <a:bodyPr wrap="square" lIns="0" tIns="0" rIns="0" bIns="0" rtlCol="0" anchor="ctr"/>
-          <a:lstStyle/>
-          <a:p>
-            <a:pPr algn="ctr" indent="0" marL="0">
-              <a:buNone/>
-            </a:pPr>
-            <a:r>
-              <a:rPr lang="en-US" sz="3600" dirty="0">
-                <a:solidFill>
-                  <a:schemeClr val="accent3"/>
-                </a:solidFill>
-              </a:rPr>
-              <a:t>1,96</a:t>
-            </a:r>
-            <a:endParaRPr lang="en-US" sz="3600" dirty="0"/>
-          </a:p>
-        </p:txBody>
-      </p:sp>
-      <p:sp>
-        <p:nvSpPr>
-          <p:cNvPr id="10" name="Text 7"/>
-          <p:cNvSpPr txBox="1"/>
-          <p:nvPr/>
-        </p:nvSpPr>
-        <p:spPr>
-          <a:xfrm>
-            <a:off x="7223760" y="2011680"/>
-            <a:ext cx="2377440" cy="1143000"/>
-          </a:xfrm>
-          <a:prstGeom prst="rect">
-            <a:avLst/>
-          </a:prstGeom>
-          <a:noFill/>
-          <a:ln/>
-        </p:spPr>
-        <p:txBody>
-          <a:bodyPr wrap="square" lIns="0" tIns="0" rIns="0" bIns="0" rtlCol="0" anchor="ctr"/>
-          <a:lstStyle/>
-          <a:p>
-            <a:pPr algn="ctr" indent="0" marL="0">
-              <a:buNone/>
-            </a:pPr>
-            <a:r>
-              <a:rPr lang="en-US" sz="3600" b="1" dirty="0">
-                <a:solidFill>
-                  <a:schemeClr val="accent2"/>
-                </a:solidFill>
-              </a:rPr>
-              <a:t>2,83</a:t>
-            </a:r>
-            <a:endParaRPr lang="en-US" sz="3600" dirty="0"/>
-          </a:p>
-        </p:txBody>
-      </p:sp>
-      <p:sp>
-        <p:nvSpPr>
-          <p:cNvPr id="11" name="Text 8"/>
-          <p:cNvSpPr txBox="1"/>
-          <p:nvPr/>
-        </p:nvSpPr>
-        <p:spPr>
-          <a:xfrm>
-            <a:off x="9784080" y="2011680"/>
-            <a:ext cx="1828800" cy="1143000"/>
-          </a:xfrm>
-          <a:prstGeom prst="rect">
-            <a:avLst/>
-          </a:prstGeom>
-          <a:noFill/>
-          <a:ln/>
-        </p:spPr>
-        <p:txBody>
-          <a:bodyPr wrap="square" lIns="0" tIns="0" rIns="0" bIns="0" rtlCol="0" anchor="ctr"/>
-          <a:lstStyle/>
-          <a:p>
-            <a:pPr algn="ctr" indent="0" marL="0">
-              <a:buNone/>
-            </a:pPr>
-            <a:r>
-              <a:rPr lang="en-US" sz="2600" b="1" dirty="0">
-                <a:solidFill>
-                  <a:schemeClr val="accent1"/>
-                </a:solidFill>
-              </a:rPr>
-              <a:t>&lt;0,001</a:t>
-            </a:r>
-            <a:endParaRPr lang="en-US" sz="2600" dirty="0"/>
-          </a:p>
-        </p:txBody>
-      </p:sp>
-      <p:sp>
-        <p:nvSpPr>
-          <p:cNvPr id="12" name="Kart"/>
+      <p:pic>
+        <p:nvPicPr>
+          <p:cNvPr id="5" name="Tablo 3: Katılımcıların kullandığı tedavi seçenekleri" descr="Tablo 3: Katılımcıların kullandığı tedavi seçenekleri">    </p:cNvPr>
+          <p:cNvPicPr>
+            <a:picLocks noChangeAspect="1"/>
+          </p:cNvPicPr>
+          <p:nvPr/>
+        </p:nvPicPr>
+        <p:blipFill>
+          <a:blip r:embed="rId1"/>
+          <a:stretch>
+            <a:fillRect/>
+          </a:stretch>
+        </p:blipFill>
+        <p:spPr>
+          <a:xfrm>
+            <a:off x="548640" y="1325880"/>
+            <a:ext cx="8321040" cy="3485982"/>
+          </a:xfrm>
+          <a:prstGeom prst="rect">
+            <a:avLst/>
+          </a:prstGeom>
+        </p:spPr>
+      </p:pic>
+      <p:sp>
+        <p:nvSpPr>
+          <p:cNvPr id="6" name="Kart"/>
           <p:cNvSpPr/>
           <p:nvPr/>
         </p:nvSpPr>
         <p:spPr>
           <a:xfrm>
-            <a:off x="548640" y="3337560"/>
-            <a:ext cx="11064240" cy="1143000"/>
+            <a:off x="9189720" y="1325880"/>
+            <a:ext cx="2450592" cy="3485982"/>
           </a:xfrm>
           <a:prstGeom prst="roundRect">
             <a:avLst>
-              <a:gd name="adj" fmla="val 9600"/>
+              <a:gd name="adj" fmla="val 4478"/>
             </a:avLst>
           </a:prstGeom>
           <a:solidFill>
-            <a:schemeClr val="bg2"/>
+            <a:schemeClr val="accent1"/>
           </a:solidFill>
           <a:ln w="12700">
             <a:solidFill>
-              <a:schemeClr val="bg2"/>
+              <a:schemeClr val="accent1"/>
             </a:solidFill>
             <a:prstDash val="solid"/>
           </a:ln>
@@ -9458,358 +8230,88 @@
       </p:sp>
       <p:sp>
         <p:nvSpPr>
-          <p:cNvPr id="13" name="Text 10"/>
+          <p:cNvPr id="7" name="Text 3"/>
           <p:cNvSpPr txBox="1"/>
           <p:nvPr/>
         </p:nvSpPr>
         <p:spPr>
           <a:xfrm>
-            <a:off x="822960" y="3337560"/>
-            <a:ext cx="3749040" cy="1143000"/>
-          </a:xfrm>
-          <a:prstGeom prst="rect">
-            <a:avLst/>
-          </a:prstGeom>
-          <a:noFill/>
-          <a:ln/>
-        </p:spPr>
-        <p:txBody>
-          <a:bodyPr wrap="square" lIns="0" tIns="0" rIns="0" bIns="0" rtlCol="0" anchor="ctr"/>
+            <a:off x="9418320" y="1508760"/>
+            <a:ext cx="1993392" cy="3120222"/>
+          </a:xfrm>
+          <a:prstGeom prst="rect">
+            <a:avLst/>
+          </a:prstGeom>
+          <a:noFill/>
+          <a:ln/>
+        </p:spPr>
+        <p:txBody>
+          <a:bodyPr wrap="square" lIns="0" tIns="0" rIns="0" bIns="0" rtlCol="0" anchor="t"/>
           <a:lstStyle/>
           <a:p>
             <a:pPr indent="0" marL="0">
               <a:buNone/>
             </a:pPr>
             <a:r>
-              <a:rPr lang="en-US" sz="2600" b="1" dirty="0">
-                <a:solidFill>
-                  <a:schemeClr val="accent1"/>
-                </a:solidFill>
-              </a:rPr>
-              <a:t>FNBT puanı</a:t>
-            </a:r>
-            <a:endParaRPr lang="en-US" sz="2600" dirty="0"/>
-          </a:p>
-        </p:txBody>
-      </p:sp>
-      <p:sp>
-        <p:nvSpPr>
-          <p:cNvPr id="14" name="Text 11"/>
-          <p:cNvSpPr txBox="1"/>
-          <p:nvPr/>
-        </p:nvSpPr>
-        <p:spPr>
-          <a:xfrm>
-            <a:off x="4663440" y="3337560"/>
-            <a:ext cx="2377440" cy="1143000"/>
-          </a:xfrm>
-          <a:prstGeom prst="rect">
-            <a:avLst/>
-          </a:prstGeom>
-          <a:noFill/>
-          <a:ln/>
-        </p:spPr>
-        <p:txBody>
-          <a:bodyPr wrap="square" lIns="0" tIns="0" rIns="0" bIns="0" rtlCol="0" anchor="ctr"/>
-          <a:lstStyle/>
-          <a:p>
-            <a:pPr algn="ctr" indent="0" marL="0">
-              <a:buNone/>
-            </a:pPr>
-            <a:r>
-              <a:rPr lang="en-US" sz="3600" dirty="0">
-                <a:solidFill>
-                  <a:schemeClr val="accent3"/>
-                </a:solidFill>
-              </a:rPr>
-              <a:t>5,85</a:t>
-            </a:r>
-            <a:endParaRPr lang="en-US" sz="3600" dirty="0"/>
-          </a:p>
-        </p:txBody>
-      </p:sp>
-      <p:sp>
-        <p:nvSpPr>
-          <p:cNvPr id="15" name="Text 12"/>
-          <p:cNvSpPr txBox="1"/>
-          <p:nvPr/>
-        </p:nvSpPr>
-        <p:spPr>
-          <a:xfrm>
-            <a:off x="7223760" y="3337560"/>
-            <a:ext cx="2377440" cy="1143000"/>
-          </a:xfrm>
-          <a:prstGeom prst="rect">
-            <a:avLst/>
-          </a:prstGeom>
-          <a:noFill/>
-          <a:ln/>
-        </p:spPr>
-        <p:txBody>
-          <a:bodyPr wrap="square" lIns="0" tIns="0" rIns="0" bIns="0" rtlCol="0" anchor="ctr"/>
-          <a:lstStyle/>
-          <a:p>
-            <a:pPr algn="ctr" indent="0" marL="0">
-              <a:buNone/>
-            </a:pPr>
-            <a:r>
-              <a:rPr lang="en-US" sz="3600" b="1" dirty="0">
-                <a:solidFill>
-                  <a:schemeClr val="accent2"/>
-                </a:solidFill>
-              </a:rPr>
-              <a:t>5,26</a:t>
-            </a:r>
-            <a:endParaRPr lang="en-US" sz="3600" dirty="0"/>
-          </a:p>
-        </p:txBody>
-      </p:sp>
-      <p:sp>
-        <p:nvSpPr>
-          <p:cNvPr id="16" name="Text 13"/>
-          <p:cNvSpPr txBox="1"/>
-          <p:nvPr/>
-        </p:nvSpPr>
-        <p:spPr>
-          <a:xfrm>
-            <a:off x="9784080" y="3337560"/>
-            <a:ext cx="1828800" cy="1143000"/>
-          </a:xfrm>
-          <a:prstGeom prst="rect">
-            <a:avLst/>
-          </a:prstGeom>
-          <a:noFill/>
-          <a:ln/>
-        </p:spPr>
-        <p:txBody>
-          <a:bodyPr wrap="square" lIns="0" tIns="0" rIns="0" bIns="0" rtlCol="0" anchor="ctr"/>
-          <a:lstStyle/>
-          <a:p>
-            <a:pPr algn="ctr" indent="0" marL="0">
-              <a:buNone/>
-            </a:pPr>
-            <a:r>
-              <a:rPr lang="en-US" sz="2600" b="1" dirty="0">
-                <a:solidFill>
-                  <a:schemeClr val="accent1"/>
-                </a:solidFill>
-              </a:rPr>
-              <a:t>0,024</a:t>
-            </a:r>
-            <a:endParaRPr lang="en-US" sz="2600" dirty="0"/>
-          </a:p>
-        </p:txBody>
-      </p:sp>
-      <p:sp>
-        <p:nvSpPr>
-          <p:cNvPr id="17" name="Kart"/>
-          <p:cNvSpPr/>
-          <p:nvPr/>
-        </p:nvSpPr>
-        <p:spPr>
-          <a:xfrm>
-            <a:off x="548640" y="4663440"/>
-            <a:ext cx="11064240" cy="1143000"/>
-          </a:xfrm>
-          <a:prstGeom prst="roundRect">
-            <a:avLst>
-              <a:gd name="adj" fmla="val 9600"/>
-            </a:avLst>
-          </a:prstGeom>
-          <a:solidFill>
-            <a:schemeClr val="bg2"/>
-          </a:solidFill>
-          <a:ln w="12700">
-            <a:solidFill>
-              <a:schemeClr val="bg2"/>
-            </a:solidFill>
-            <a:prstDash val="solid"/>
-          </a:ln>
-        </p:spPr>
-      </p:sp>
-      <p:sp>
-        <p:nvSpPr>
-          <p:cNvPr id="18" name="Text 15"/>
-          <p:cNvSpPr txBox="1"/>
-          <p:nvPr/>
-        </p:nvSpPr>
-        <p:spPr>
-          <a:xfrm>
-            <a:off x="822960" y="4663440"/>
-            <a:ext cx="3749040" cy="1143000"/>
-          </a:xfrm>
-          <a:prstGeom prst="rect">
-            <a:avLst/>
-          </a:prstGeom>
-          <a:noFill/>
-          <a:ln/>
-        </p:spPr>
-        <p:txBody>
-          <a:bodyPr wrap="square" lIns="0" tIns="0" rIns="0" bIns="0" rtlCol="0" anchor="ctr"/>
-          <a:lstStyle/>
+              <a:rPr lang="en-US" sz="3000" b="1" dirty="0">
+                <a:solidFill>
+                  <a:schemeClr val="bg1"/>
+                </a:solidFill>
+              </a:rPr>
+              <a:t>%35,3</a:t>
+            </a:r>
+            <a:endParaRPr lang="en-US" sz="3000" dirty="0"/>
+          </a:p>
           <a:p>
             <a:pPr indent="0" marL="0">
-              <a:buNone/>
-            </a:pPr>
-            <a:r>
-              <a:rPr lang="en-US" sz="2600" b="1" dirty="0">
-                <a:solidFill>
-                  <a:schemeClr val="accent1"/>
-                </a:solidFill>
-              </a:rPr>
-              <a:t>Paket-yıl</a:t>
-            </a:r>
-            <a:endParaRPr lang="en-US" sz="2600" dirty="0"/>
-          </a:p>
-        </p:txBody>
-      </p:sp>
-      <p:sp>
-        <p:nvSpPr>
-          <p:cNvPr id="19" name="Text 16"/>
-          <p:cNvSpPr txBox="1"/>
-          <p:nvPr/>
-        </p:nvSpPr>
-        <p:spPr>
-          <a:xfrm>
-            <a:off x="4663440" y="4663440"/>
-            <a:ext cx="2377440" cy="1143000"/>
-          </a:xfrm>
-          <a:prstGeom prst="rect">
-            <a:avLst/>
-          </a:prstGeom>
-          <a:noFill/>
-          <a:ln/>
-        </p:spPr>
-        <p:txBody>
-          <a:bodyPr wrap="square" lIns="0" tIns="0" rIns="0" bIns="0" rtlCol="0" anchor="ctr"/>
-          <a:lstStyle/>
-          <a:p>
-            <a:pPr algn="ctr" indent="0" marL="0">
-              <a:buNone/>
-            </a:pPr>
-            <a:r>
-              <a:rPr lang="en-US" sz="3600" dirty="0">
-                <a:solidFill>
-                  <a:schemeClr val="accent3"/>
-                </a:solidFill>
-              </a:rPr>
-              <a:t>28,12</a:t>
-            </a:r>
-            <a:endParaRPr lang="en-US" sz="3600" dirty="0"/>
-          </a:p>
-        </p:txBody>
-      </p:sp>
-      <p:sp>
-        <p:nvSpPr>
-          <p:cNvPr id="20" name="Text 17"/>
-          <p:cNvSpPr txBox="1"/>
-          <p:nvPr/>
-        </p:nvSpPr>
-        <p:spPr>
-          <a:xfrm>
-            <a:off x="7223760" y="4663440"/>
-            <a:ext cx="2377440" cy="1143000"/>
-          </a:xfrm>
-          <a:prstGeom prst="rect">
-            <a:avLst/>
-          </a:prstGeom>
-          <a:noFill/>
-          <a:ln/>
-        </p:spPr>
-        <p:txBody>
-          <a:bodyPr wrap="square" lIns="0" tIns="0" rIns="0" bIns="0" rtlCol="0" anchor="ctr"/>
-          <a:lstStyle/>
-          <a:p>
-            <a:pPr algn="ctr" indent="0" marL="0">
-              <a:buNone/>
-            </a:pPr>
-            <a:r>
-              <a:rPr lang="en-US" sz="3600" b="1" dirty="0">
-                <a:solidFill>
-                  <a:schemeClr val="accent2"/>
-                </a:solidFill>
-              </a:rPr>
-              <a:t>26,66</a:t>
-            </a:r>
-            <a:endParaRPr lang="en-US" sz="3600" dirty="0"/>
-          </a:p>
-        </p:txBody>
-      </p:sp>
-      <p:sp>
-        <p:nvSpPr>
-          <p:cNvPr id="21" name="Text 18"/>
-          <p:cNvSpPr txBox="1"/>
-          <p:nvPr/>
-        </p:nvSpPr>
-        <p:spPr>
-          <a:xfrm>
-            <a:off x="9784080" y="4663440"/>
-            <a:ext cx="1828800" cy="1143000"/>
-          </a:xfrm>
-          <a:prstGeom prst="rect">
-            <a:avLst/>
-          </a:prstGeom>
-          <a:noFill/>
-          <a:ln/>
-        </p:spPr>
-        <p:txBody>
-          <a:bodyPr wrap="square" lIns="0" tIns="0" rIns="0" bIns="0" rtlCol="0" anchor="ctr"/>
-          <a:lstStyle/>
-          <a:p>
-            <a:pPr algn="ctr" indent="0" marL="0">
-              <a:buNone/>
-            </a:pPr>
-            <a:r>
-              <a:rPr lang="en-US" sz="2600" dirty="0">
-                <a:solidFill>
-                  <a:schemeClr val="accent3"/>
-                </a:solidFill>
-              </a:rPr>
-              <a:t>0,550</a:t>
-            </a:r>
-            <a:endParaRPr lang="en-US" sz="2600" dirty="0"/>
-          </a:p>
-        </p:txBody>
-      </p:sp>
-      <p:sp>
-        <p:nvSpPr>
-          <p:cNvPr id="22" name="Text 19"/>
-          <p:cNvSpPr txBox="1"/>
-          <p:nvPr/>
-        </p:nvSpPr>
-        <p:spPr>
-          <a:xfrm>
-            <a:off x="548640" y="5852160"/>
-            <a:ext cx="11064240" cy="411480"/>
-          </a:xfrm>
-          <a:prstGeom prst="rect">
-            <a:avLst/>
-          </a:prstGeom>
-          <a:noFill/>
-          <a:ln/>
-        </p:spPr>
-        <p:txBody>
-          <a:bodyPr wrap="square" lIns="0" tIns="0" rIns="0" bIns="0" rtlCol="0" anchor="ctr"/>
-          <a:lstStyle/>
+              <a:spcAft>
+                <a:spcPts val="1200"/>
+              </a:spcAft>
+              <a:buNone/>
+            </a:pPr>
+            <a:r>
+              <a:rPr lang="en-US" sz="2000" dirty="0">
+                <a:solidFill>
+                  <a:schemeClr val="bg1"/>
+                </a:solidFill>
+              </a:rPr>
+              <a:t>kombine tedavi</a:t>
+            </a:r>
+            <a:endParaRPr lang="en-US" sz="3000" dirty="0"/>
+          </a:p>
           <a:p>
             <a:pPr indent="0" marL="0">
               <a:buNone/>
             </a:pPr>
             <a:r>
-              <a:rPr lang="en-US" sz="1600" i="1" dirty="0">
-                <a:solidFill>
-                  <a:schemeClr val="accent3"/>
-                </a:solidFill>
-              </a:rPr>
-              <a:t>Ortalama değerler; Mann–Whitney U testi. Tabloda p değerleri “24” ve “550” olarak basılmıştır.</a:t>
-            </a:r>
-            <a:endParaRPr lang="en-US" sz="1600" dirty="0"/>
-          </a:p>
-        </p:txBody>
-      </p:sp>
-      <p:sp>
-        <p:nvSpPr>
-          <p:cNvPr id="23" name="Kaynak"/>
+              <a:rPr lang="en-US" sz="3000" b="1" dirty="0">
+                <a:solidFill>
+                  <a:schemeClr val="bg1"/>
+                </a:solidFill>
+              </a:rPr>
+              <a:t>125 / 141</a:t>
+            </a:r>
+            <a:endParaRPr lang="en-US" sz="3000" dirty="0"/>
+          </a:p>
+          <a:p>
+            <a:pPr indent="0" marL="0">
+              <a:buNone/>
+            </a:pPr>
+            <a:r>
+              <a:rPr lang="en-US" sz="1800" dirty="0">
+                <a:solidFill>
+                  <a:schemeClr val="bg1"/>
+                </a:solidFill>
+              </a:rPr>
+              <a:t>bupropion + NRT</a:t>
+            </a:r>
+            <a:endParaRPr lang="en-US" sz="3000" dirty="0"/>
+          </a:p>
+        </p:txBody>
+      </p:sp>
+      <p:sp>
+        <p:nvSpPr>
+          <p:cNvPr id="8" name="Kaynak"/>
           <p:cNvSpPr txBox="1"/>
           <p:nvPr/>
         </p:nvSpPr>
@@ -9837,7 +8339,7 @@
                   <a:schemeClr val="accent3"/>
                 </a:solidFill>
               </a:rPr>
-              <a:t>Kaynak: Cenberlitaş E, Gökçe A, Öztürk O. Turk J Fam Pract. 2026;30(2):97-106. Tablo 4.</a:t>
+              <a:t>Görsel: Cenberlitaş E, Gökçe A, Öztürk O. Turk J Fam Pract. 2026;30(2):97-106, Tablo 3.</a:t>
             </a:r>
             <a:endParaRPr lang="en-US" sz="1200" dirty="0"/>
           </a:p>
@@ -9945,7 +8447,7 @@
                   <a:schemeClr val="accent1"/>
                 </a:solidFill>
               </a:rPr>
-              <a:t>Bağımsız belirleyiciler: lojistik regresyon</a:t>
+              <a:t>Tablo 4: Görüşme sayısı, FNBT ve paket-yıl</a:t>
             </a:r>
             <a:endParaRPr lang="en-US" sz="3600" dirty="0"/>
           </a:p>
@@ -9960,7 +8462,7 @@
         <p:spPr>
           <a:xfrm>
             <a:off x="548640" y="1325880"/>
-            <a:ext cx="7680357" cy="4800600"/>
+            <a:ext cx="11091672" cy="2713227"/>
           </a:xfrm>
           <a:prstGeom prst="rect">
             <a:avLst/>
@@ -9978,7 +8480,7 @@
       </p:sp>
       <p:pic>
         <p:nvPicPr>
-          <p:cNvPr id="5" name="Tablo 6" descr="Makalenin Tablo 6'sı: lojistik regresyon sonuçları">    </p:cNvPr>
+          <p:cNvPr id="5" name="Tablo 4: Sigara ve tedavi parametrelerinin bırakma durumu ile karşılaştırılması" descr="Tablo 4: Sigara ve tedavi parametrelerinin bırakma durumu ile karşılaştırılması">    </p:cNvPr>
           <p:cNvPicPr>
             <a:picLocks noChangeAspect="1"/>
           </p:cNvPicPr>
@@ -9993,7 +8495,7 @@
         <p:spPr>
           <a:xfrm>
             <a:off x="548640" y="1325880"/>
-            <a:ext cx="7680357" cy="4800600"/>
+            <a:ext cx="11091672" cy="2713227"/>
           </a:xfrm>
           <a:prstGeom prst="rect">
             <a:avLst/>
@@ -10008,12 +8510,12 @@
         </p:nvSpPr>
         <p:spPr>
           <a:xfrm>
-            <a:off x="8549037" y="1325880"/>
-            <a:ext cx="3091275" cy="4800600"/>
+            <a:off x="548640" y="4359147"/>
+            <a:ext cx="3566160" cy="1767333"/>
           </a:xfrm>
           <a:prstGeom prst="roundRect">
             <a:avLst>
-              <a:gd name="adj" fmla="val 3550"/>
+              <a:gd name="adj" fmla="val 6209"/>
             </a:avLst>
           </a:prstGeom>
           <a:solidFill>
@@ -10035,135 +8537,247 @@
         </p:nvSpPr>
         <p:spPr>
           <a:xfrm>
-            <a:off x="8777637" y="1508760"/>
-            <a:ext cx="2634075" cy="4434840"/>
-          </a:xfrm>
-          <a:prstGeom prst="rect">
-            <a:avLst/>
-          </a:prstGeom>
-          <a:noFill/>
-          <a:ln/>
-        </p:spPr>
-        <p:txBody>
-          <a:bodyPr wrap="square" lIns="0" tIns="0" rIns="0" bIns="0" rtlCol="0" anchor="t"/>
-          <a:lstStyle/>
-          <a:p>
-            <a:pPr indent="0" marL="0">
-              <a:buNone/>
-            </a:pPr>
-            <a:r>
-              <a:rPr lang="en-US" sz="2000" dirty="0">
+            <a:off x="731520" y="4359147"/>
+            <a:ext cx="3200400" cy="1767333"/>
+          </a:xfrm>
+          <a:prstGeom prst="rect">
+            <a:avLst/>
+          </a:prstGeom>
+          <a:noFill/>
+          <a:ln/>
+        </p:spPr>
+        <p:txBody>
+          <a:bodyPr wrap="square" lIns="0" tIns="0" rIns="0" bIns="0" rtlCol="0" anchor="ctr"/>
+          <a:lstStyle/>
+          <a:p>
+            <a:pPr algn="ctr" indent="0" marL="0">
+              <a:buNone/>
+            </a:pPr>
+            <a:r>
+              <a:rPr lang="en-US" sz="2000" b="1" dirty="0">
                 <a:solidFill>
                   <a:schemeClr val="bg1"/>
                 </a:solidFill>
               </a:rPr>
-              <a:t>Bonferroni eşiği</a:t>
+              <a:t>Görüşme sayısı</a:t>
             </a:r>
             <a:endParaRPr lang="en-US" sz="2000" dirty="0"/>
           </a:p>
           <a:p>
-            <a:pPr indent="0" marL="0">
-              <a:buNone/>
-            </a:pPr>
-            <a:r>
-              <a:rPr lang="en-US" sz="3200" b="1" dirty="0">
+            <a:pPr algn="ctr" indent="0" marL="0">
+              <a:buNone/>
+            </a:pPr>
+            <a:r>
+              <a:rPr lang="en-US" sz="3000" b="1" dirty="0">
                 <a:solidFill>
                   <a:schemeClr val="bg1"/>
                 </a:solidFill>
               </a:rPr>
-              <a:t>p &lt; 0,003</a:t>
+              <a:t>p &lt; 0,001</a:t>
             </a:r>
             <a:endParaRPr lang="en-US" sz="2000" dirty="0"/>
           </a:p>
           <a:p>
-            <a:pPr indent="0" marL="0">
-              <a:buNone/>
-            </a:pPr>
-            <a:r>
-              <a:rPr lang="en-US" sz="1000" dirty="0">
+            <a:pPr algn="ctr" indent="0" marL="0">
+              <a:buNone/>
+            </a:pPr>
+            <a:r>
+              <a:rPr lang="en-US" sz="1800" dirty="0">
                 <a:solidFill>
                   <a:schemeClr val="bg1"/>
                 </a:solidFill>
               </a:rPr>
-              <a:t> </a:t>
+              <a:t>Başarılı 2,83; başarısız 1,96</a:t>
             </a:r>
             <a:endParaRPr lang="en-US" sz="2000" dirty="0"/>
           </a:p>
-          <a:p>
-            <a:pPr indent="0" marL="0">
+        </p:txBody>
+      </p:sp>
+      <p:sp>
+        <p:nvSpPr>
+          <p:cNvPr id="8" name="Kart"/>
+          <p:cNvSpPr/>
+          <p:nvPr/>
+        </p:nvSpPr>
+        <p:spPr>
+          <a:xfrm>
+            <a:off x="4297680" y="4359147"/>
+            <a:ext cx="3566160" cy="1767333"/>
+          </a:xfrm>
+          <a:prstGeom prst="roundRect">
+            <a:avLst>
+              <a:gd name="adj" fmla="val 6209"/>
+            </a:avLst>
+          </a:prstGeom>
+          <a:solidFill>
+            <a:schemeClr val="bg2"/>
+          </a:solidFill>
+          <a:ln w="12700">
+            <a:solidFill>
+              <a:schemeClr val="bg2"/>
+            </a:solidFill>
+            <a:prstDash val="solid"/>
+          </a:ln>
+        </p:spPr>
+      </p:sp>
+      <p:sp>
+        <p:nvSpPr>
+          <p:cNvPr id="9" name="Text 5"/>
+          <p:cNvSpPr txBox="1"/>
+          <p:nvPr/>
+        </p:nvSpPr>
+        <p:spPr>
+          <a:xfrm>
+            <a:off x="4480560" y="4359147"/>
+            <a:ext cx="3200400" cy="1767333"/>
+          </a:xfrm>
+          <a:prstGeom prst="rect">
+            <a:avLst/>
+          </a:prstGeom>
+          <a:noFill/>
+          <a:ln/>
+        </p:spPr>
+        <p:txBody>
+          <a:bodyPr wrap="square" lIns="0" tIns="0" rIns="0" bIns="0" rtlCol="0" anchor="ctr"/>
+          <a:lstStyle/>
+          <a:p>
+            <a:pPr algn="ctr" indent="0" marL="0">
               <a:buNone/>
             </a:pPr>
             <a:r>
               <a:rPr lang="en-US" sz="2000" b="1" dirty="0">
                 <a:solidFill>
-                  <a:schemeClr val="bg1"/>
-                </a:solidFill>
-              </a:rPr>
-              <a:t>Eşiği geçen:</a:t>
+                  <a:schemeClr val="accent1"/>
+                </a:solidFill>
+              </a:rPr>
+              <a:t>FNBT puanı</a:t>
             </a:r>
             <a:endParaRPr lang="en-US" sz="2000" dirty="0"/>
           </a:p>
           <a:p>
-            <a:pPr indent="0" marL="0">
-              <a:buNone/>
-            </a:pPr>
-            <a:r>
-              <a:rPr lang="en-US" sz="2000" dirty="0">
-                <a:solidFill>
-                  <a:schemeClr val="bg1"/>
-                </a:solidFill>
-              </a:rPr>
-              <a:t>NRT, kombine tedavi</a:t>
+            <a:pPr algn="ctr" indent="0" marL="0">
+              <a:buNone/>
+            </a:pPr>
+            <a:r>
+              <a:rPr lang="en-US" sz="3000" b="1" dirty="0">
+                <a:solidFill>
+                  <a:schemeClr val="accent2"/>
+                </a:solidFill>
+              </a:rPr>
+              <a:t>p = 0,024</a:t>
             </a:r>
             <a:endParaRPr lang="en-US" sz="2000" dirty="0"/>
           </a:p>
           <a:p>
-            <a:pPr indent="0" marL="0">
-              <a:buNone/>
-            </a:pPr>
-            <a:r>
-              <a:rPr lang="en-US" sz="1000" dirty="0">
-                <a:solidFill>
-                  <a:schemeClr val="bg1"/>
-                </a:solidFill>
-              </a:rPr>
-              <a:t> </a:t>
+            <a:pPr algn="ctr" indent="0" marL="0">
+              <a:buNone/>
+            </a:pPr>
+            <a:r>
+              <a:rPr lang="en-US" sz="1800" dirty="0">
+                <a:solidFill>
+                  <a:schemeClr val="accent1"/>
+                </a:solidFill>
+              </a:rPr>
+              <a:t>Başarılı 5,26; başarısız 5,85</a:t>
             </a:r>
             <a:endParaRPr lang="en-US" sz="2000" dirty="0"/>
           </a:p>
-          <a:p>
-            <a:pPr indent="0" marL="0">
+        </p:txBody>
+      </p:sp>
+      <p:sp>
+        <p:nvSpPr>
+          <p:cNvPr id="10" name="Kart"/>
+          <p:cNvSpPr/>
+          <p:nvPr/>
+        </p:nvSpPr>
+        <p:spPr>
+          <a:xfrm>
+            <a:off x="8046720" y="4359147"/>
+            <a:ext cx="3566160" cy="1767333"/>
+          </a:xfrm>
+          <a:prstGeom prst="roundRect">
+            <a:avLst>
+              <a:gd name="adj" fmla="val 6209"/>
+            </a:avLst>
+          </a:prstGeom>
+          <a:solidFill>
+            <a:schemeClr val="bg2"/>
+          </a:solidFill>
+          <a:ln w="12700">
+            <a:solidFill>
+              <a:schemeClr val="bg2"/>
+            </a:solidFill>
+            <a:prstDash val="solid"/>
+          </a:ln>
+        </p:spPr>
+      </p:sp>
+      <p:sp>
+        <p:nvSpPr>
+          <p:cNvPr id="11" name="Text 7"/>
+          <p:cNvSpPr txBox="1"/>
+          <p:nvPr/>
+        </p:nvSpPr>
+        <p:spPr>
+          <a:xfrm>
+            <a:off x="8229600" y="4359147"/>
+            <a:ext cx="3200400" cy="1767333"/>
+          </a:xfrm>
+          <a:prstGeom prst="rect">
+            <a:avLst/>
+          </a:prstGeom>
+          <a:noFill/>
+          <a:ln/>
+        </p:spPr>
+        <p:txBody>
+          <a:bodyPr wrap="square" lIns="0" tIns="0" rIns="0" bIns="0" rtlCol="0" anchor="ctr"/>
+          <a:lstStyle/>
+          <a:p>
+            <a:pPr algn="ctr" indent="0" marL="0">
               <a:buNone/>
             </a:pPr>
             <a:r>
               <a:rPr lang="en-US" sz="2000" b="1" dirty="0">
                 <a:solidFill>
-                  <a:schemeClr val="bg1"/>
-                </a:solidFill>
-              </a:rPr>
-              <a:t>Sınırda:</a:t>
+                  <a:schemeClr val="accent1"/>
+                </a:solidFill>
+              </a:rPr>
+              <a:t>Paket-yıl</a:t>
             </a:r>
             <a:endParaRPr lang="en-US" sz="2000" dirty="0"/>
           </a:p>
           <a:p>
-            <a:pPr indent="0" marL="0">
-              <a:buNone/>
-            </a:pPr>
-            <a:r>
-              <a:rPr lang="en-US" sz="2000" dirty="0">
-                <a:solidFill>
-                  <a:schemeClr val="bg1"/>
-                </a:solidFill>
-              </a:rPr>
-              <a:t>hanede sigara içen olmaması</a:t>
+            <a:pPr algn="ctr" indent="0" marL="0">
+              <a:buNone/>
+            </a:pPr>
+            <a:r>
+              <a:rPr lang="en-US" sz="3000" b="1" dirty="0">
+                <a:solidFill>
+                  <a:schemeClr val="accent2"/>
+                </a:solidFill>
+              </a:rPr>
+              <a:t>Fark yok</a:t>
             </a:r>
             <a:endParaRPr lang="en-US" sz="2000" dirty="0"/>
           </a:p>
-        </p:txBody>
-      </p:sp>
-      <p:sp>
-        <p:nvSpPr>
-          <p:cNvPr id="8" name="Kaynak"/>
+          <a:p>
+            <a:pPr algn="ctr" indent="0" marL="0">
+              <a:buNone/>
+            </a:pPr>
+            <a:r>
+              <a:rPr lang="en-US" sz="1800" dirty="0">
+                <a:solidFill>
+                  <a:schemeClr val="accent1"/>
+                </a:solidFill>
+              </a:rPr>
+              <a:t>İki grup benzer</a:t>
+            </a:r>
+            <a:endParaRPr lang="en-US" sz="2000" dirty="0"/>
+          </a:p>
+        </p:txBody>
+      </p:sp>
+      <p:sp>
+        <p:nvSpPr>
+          <p:cNvPr id="12" name="Kaynak"/>
           <p:cNvSpPr txBox="1"/>
           <p:nvPr/>
         </p:nvSpPr>
@@ -10191,7 +8805,7 @@
                   <a:schemeClr val="accent3"/>
                 </a:solidFill>
               </a:rPr>
-              <a:t>Görsel: Cenberlitaş E, Gökçe A, Öztürk O. Turk J Fam Pract. 2026;30(2):97-106, Tablo 6. Referans: bupropion monoterapisi.</a:t>
+              <a:t>Görsel: Cenberlitaş E, Gökçe A, Öztürk O. Turk J Fam Pract. 2026;30(2):97-106, Tablo 4.</a:t>
             </a:r>
             <a:endParaRPr lang="en-US" sz="1200" dirty="0"/>
           </a:p>
@@ -10299,7 +8913,7 @@
                   <a:schemeClr val="accent1"/>
                 </a:solidFill>
               </a:rPr>
-              <a:t>Odds oranı, risk oranı değildir</a:t>
+              <a:t>Tablo 5: Tedavi yöntemine göre bırakma</a:t>
             </a:r>
             <a:endParaRPr lang="en-US" sz="3600" dirty="0"/>
           </a:p>
@@ -10307,56 +8921,53 @@
       </p:sp>
       <p:sp>
         <p:nvSpPr>
-          <p:cNvPr id="4" name="Text 1"/>
-          <p:cNvSpPr txBox="1"/>
+          <p:cNvPr id="4" name="Görsel çerçeve"/>
+          <p:cNvSpPr/>
           <p:nvPr/>
         </p:nvSpPr>
         <p:spPr>
           <a:xfrm>
             <a:off x="548640" y="1325880"/>
-            <a:ext cx="10972800" cy="457200"/>
-          </a:xfrm>
-          <a:prstGeom prst="rect">
-            <a:avLst/>
-          </a:prstGeom>
-          <a:noFill/>
-          <a:ln/>
-        </p:spPr>
-        <p:txBody>
-          <a:bodyPr wrap="square" lIns="0" tIns="0" rIns="0" bIns="0" rtlCol="0" anchor="ctr"/>
-          <a:lstStyle/>
-          <a:p>
-            <a:pPr indent="0" marL="0">
-              <a:buNone/>
-            </a:pPr>
-            <a:r>
-              <a:rPr lang="en-US" sz="2200" b="1" dirty="0">
-                <a:solidFill>
-                  <a:schemeClr val="accent2"/>
-                </a:solidFill>
-              </a:rPr>
-              <a:t>Kombine tedavi ve bupropion monoterapisi</a:t>
-            </a:r>
-            <a:endParaRPr lang="en-US" sz="2200" dirty="0"/>
-          </a:p>
-        </p:txBody>
-      </p:sp>
-      <p:graphicFrame>
-        <p:nvGraphicFramePr>
-          <p:cNvPr id="5" name="Bırakma oranları" descr=""/>
-          <p:cNvGraphicFramePr/>
-          <p:nvPr/>
-        </p:nvGraphicFramePr>
-        <p:xfrm>
-          <a:off x="548640" y="1828800"/>
-          <a:ext cx="4754880" cy="4023360"/>
-        </p:xfrm>
-        <a:graphic xmlns:a="http://schemas.openxmlformats.org/drawingml/2006/main">
-          <a:graphicData uri="http://schemas.openxmlformats.org/drawingml/2006/chart">
-            <c:chart xmlns:c="http://schemas.openxmlformats.org/drawingml/2006/chart" r:id="rId1"/>
-          </a:graphicData>
-        </a:graphic>
-      </p:graphicFrame>
+            <a:ext cx="11091672" cy="3216842"/>
+          </a:xfrm>
+          <a:prstGeom prst="rect">
+            <a:avLst/>
+          </a:prstGeom>
+          <a:solidFill>
+            <a:schemeClr val="bg1"/>
+          </a:solidFill>
+          <a:ln w="12700">
+            <a:solidFill>
+              <a:srgbClr val="C9DCDF"/>
+            </a:solidFill>
+            <a:prstDash val="solid"/>
+          </a:ln>
+        </p:spPr>
+      </p:sp>
+      <p:pic>
+        <p:nvPicPr>
+          <p:cNvPr id="5" name="Tablo 5: Tedavi yöntemlerinin bırakma durumu ile karşılaştırılması" descr="Tablo 5: Tedavi yöntemlerinin bırakma durumu ile karşılaştırılması">    </p:cNvPr>
+          <p:cNvPicPr>
+            <a:picLocks noChangeAspect="1"/>
+          </p:cNvPicPr>
+          <p:nvPr/>
+        </p:nvPicPr>
+        <p:blipFill>
+          <a:blip r:embed="rId1"/>
+          <a:stretch>
+            <a:fillRect/>
+          </a:stretch>
+        </p:blipFill>
+        <p:spPr>
+          <a:xfrm>
+            <a:off x="548640" y="1325880"/>
+            <a:ext cx="11091672" cy="3216842"/>
+          </a:xfrm>
+          <a:prstGeom prst="rect">
+            <a:avLst/>
+          </a:prstGeom>
+        </p:spPr>
+      </p:pic>
       <p:sp>
         <p:nvSpPr>
           <p:cNvPr id="6" name="Kart"/>
@@ -10365,12 +8976,12 @@
         </p:nvSpPr>
         <p:spPr>
           <a:xfrm>
-            <a:off x="5760720" y="1828800"/>
-            <a:ext cx="2788920" cy="3108960"/>
+            <a:off x="548640" y="4817042"/>
+            <a:ext cx="3566160" cy="1309438"/>
           </a:xfrm>
           <a:prstGeom prst="roundRect">
             <a:avLst>
-              <a:gd name="adj" fmla="val 3934"/>
+              <a:gd name="adj" fmla="val 8380"/>
             </a:avLst>
           </a:prstGeom>
           <a:solidFill>
@@ -10392,8 +9003,8 @@
         </p:nvSpPr>
         <p:spPr>
           <a:xfrm>
-            <a:off x="5760720" y="1828800"/>
-            <a:ext cx="2788920" cy="3108960"/>
+            <a:off x="731520" y="4817042"/>
+            <a:ext cx="3200400" cy="1309438"/>
           </a:xfrm>
           <a:prstGeom prst="rect">
             <a:avLst/>
@@ -10409,42 +9020,28 @@
               <a:buNone/>
             </a:pPr>
             <a:r>
-              <a:rPr lang="en-US" sz="2200" b="1" dirty="0">
+              <a:rPr lang="en-US" sz="2000" b="1" dirty="0">
                 <a:solidFill>
                   <a:schemeClr val="accent1"/>
                 </a:solidFill>
               </a:rPr>
-              <a:t>Risk oranı</a:t>
-            </a:r>
-            <a:endParaRPr lang="en-US" sz="2200" dirty="0"/>
+              <a:t>En yüksek</a:t>
+            </a:r>
+            <a:endParaRPr lang="en-US" sz="2000" dirty="0"/>
           </a:p>
           <a:p>
             <a:pPr algn="ctr" indent="0" marL="0">
               <a:buNone/>
             </a:pPr>
             <a:r>
-              <a:rPr lang="en-US" sz="6000" b="1" dirty="0">
-                <a:solidFill>
-                  <a:schemeClr val="accent2"/>
-                </a:solidFill>
-              </a:rPr>
-              <a:t>2,7</a:t>
-            </a:r>
-            <a:endParaRPr lang="en-US" sz="2200" dirty="0"/>
-          </a:p>
-          <a:p>
-            <a:pPr algn="ctr" indent="0" marL="0">
-              <a:buNone/>
-            </a:pPr>
-            <a:r>
-              <a:rPr lang="en-US" sz="1800" dirty="0">
+              <a:rPr lang="en-US" sz="2200" dirty="0">
                 <a:solidFill>
                   <a:schemeClr val="accent1"/>
                 </a:solidFill>
               </a:rPr>
-              <a:t>%44,0 ÷ %16,5</a:t>
-            </a:r>
-            <a:endParaRPr lang="en-US" sz="2200" dirty="0"/>
+              <a:t>Vareniklin %44,5; kombine %44,0</a:t>
+            </a:r>
+            <a:endParaRPr lang="en-US" sz="2000" dirty="0"/>
           </a:p>
         </p:txBody>
       </p:sp>
@@ -10456,12 +9053,12 @@
         </p:nvSpPr>
         <p:spPr>
           <a:xfrm>
-            <a:off x="8823960" y="1828800"/>
-            <a:ext cx="2788920" cy="3108960"/>
+            <a:off x="4297680" y="4817042"/>
+            <a:ext cx="3566160" cy="1309438"/>
           </a:xfrm>
           <a:prstGeom prst="roundRect">
             <a:avLst>
-              <a:gd name="adj" fmla="val 3934"/>
+              <a:gd name="adj" fmla="val 8380"/>
             </a:avLst>
           </a:prstGeom>
           <a:solidFill>
@@ -10483,8 +9080,8 @@
         </p:nvSpPr>
         <p:spPr>
           <a:xfrm>
-            <a:off x="8823960" y="1828800"/>
-            <a:ext cx="2788920" cy="3108960"/>
+            <a:off x="4480560" y="4817042"/>
+            <a:ext cx="3200400" cy="1309438"/>
           </a:xfrm>
           <a:prstGeom prst="rect">
             <a:avLst/>
@@ -10500,84 +9097,111 @@
               <a:buNone/>
             </a:pPr>
             <a:r>
-              <a:rPr lang="en-US" sz="2200" b="1" dirty="0">
+              <a:rPr lang="en-US" sz="2000" b="1" dirty="0">
                 <a:solidFill>
                   <a:schemeClr val="bg1"/>
                 </a:solidFill>
               </a:rPr>
-              <a:t>Odds oranı</a:t>
-            </a:r>
-            <a:endParaRPr lang="en-US" sz="2200" dirty="0"/>
+              <a:t>En düşük</a:t>
+            </a:r>
+            <a:endParaRPr lang="en-US" sz="2000" dirty="0"/>
           </a:p>
           <a:p>
             <a:pPr algn="ctr" indent="0" marL="0">
               <a:buNone/>
             </a:pPr>
             <a:r>
-              <a:rPr lang="en-US" sz="6000" b="1" dirty="0">
+              <a:rPr lang="en-US" sz="2200" dirty="0">
                 <a:solidFill>
                   <a:schemeClr val="bg1"/>
                 </a:solidFill>
               </a:rPr>
-              <a:t>4,0</a:t>
-            </a:r>
-            <a:endParaRPr lang="en-US" sz="2200" dirty="0"/>
-          </a:p>
+              <a:t>Bupropion %16,5</a:t>
+            </a:r>
+            <a:endParaRPr lang="en-US" sz="2000" dirty="0"/>
+          </a:p>
+        </p:txBody>
+      </p:sp>
+      <p:sp>
+        <p:nvSpPr>
+          <p:cNvPr id="10" name="Kart"/>
+          <p:cNvSpPr/>
+          <p:nvPr/>
+        </p:nvSpPr>
+        <p:spPr>
+          <a:xfrm>
+            <a:off x="8046720" y="4817042"/>
+            <a:ext cx="3566160" cy="1309438"/>
+          </a:xfrm>
+          <a:prstGeom prst="roundRect">
+            <a:avLst>
+              <a:gd name="adj" fmla="val 8380"/>
+            </a:avLst>
+          </a:prstGeom>
+          <a:solidFill>
+            <a:schemeClr val="bg2"/>
+          </a:solidFill>
+          <a:ln w="12700">
+            <a:solidFill>
+              <a:schemeClr val="bg2"/>
+            </a:solidFill>
+            <a:prstDash val="solid"/>
+          </a:ln>
+        </p:spPr>
+      </p:sp>
+      <p:sp>
+        <p:nvSpPr>
+          <p:cNvPr id="11" name="Text 7"/>
+          <p:cNvSpPr txBox="1"/>
+          <p:nvPr/>
+        </p:nvSpPr>
+        <p:spPr>
+          <a:xfrm>
+            <a:off x="8229600" y="4817042"/>
+            <a:ext cx="3200400" cy="1309438"/>
+          </a:xfrm>
+          <a:prstGeom prst="rect">
+            <a:avLst/>
+          </a:prstGeom>
+          <a:noFill/>
+          <a:ln/>
+        </p:spPr>
+        <p:txBody>
+          <a:bodyPr wrap="square" lIns="0" tIns="0" rIns="0" bIns="0" rtlCol="0" anchor="ctr"/>
+          <a:lstStyle/>
           <a:p>
             <a:pPr algn="ctr" indent="0" marL="0">
               <a:buNone/>
             </a:pPr>
             <a:r>
-              <a:rPr lang="en-US" sz="1800" dirty="0">
-                <a:solidFill>
-                  <a:schemeClr val="bg1"/>
-                </a:solidFill>
-              </a:rPr>
-              <a:t>0,78 ÷ 0,20</a:t>
-            </a:r>
-            <a:endParaRPr lang="en-US" sz="2200" dirty="0"/>
-          </a:p>
-        </p:txBody>
-      </p:sp>
-      <p:sp>
-        <p:nvSpPr>
-          <p:cNvPr id="10" name="Text 6"/>
-          <p:cNvSpPr txBox="1"/>
-          <p:nvPr/>
-        </p:nvSpPr>
-        <p:spPr>
-          <a:xfrm>
-            <a:off x="5760720" y="5166360"/>
-            <a:ext cx="5852160" cy="731520"/>
-          </a:xfrm>
-          <a:prstGeom prst="rect">
-            <a:avLst/>
-          </a:prstGeom>
-          <a:noFill/>
-          <a:ln/>
-        </p:spPr>
-        <p:txBody>
-          <a:bodyPr wrap="square" lIns="0" tIns="0" rIns="0" bIns="0" rtlCol="0" anchor="t"/>
-          <a:lstStyle/>
-          <a:p>
-            <a:pPr indent="0" marL="0">
-              <a:buNone/>
-            </a:pPr>
-            <a:r>
-              <a:rPr lang="en-US" sz="2000" b="1" i="1" dirty="0">
+              <a:rPr lang="en-US" sz="2000" b="1" dirty="0">
                 <a:solidFill>
                   <a:schemeClr val="accent1"/>
                 </a:solidFill>
               </a:rPr>
-              <a:t>Sık görülen sonuçlarda odds oranı etkiyi büyük göstermektedir.</a:t>
+              <a:t>Gruplar arası</a:t>
             </a:r>
             <a:endParaRPr lang="en-US" sz="2000" dirty="0"/>
           </a:p>
-        </p:txBody>
-      </p:sp>
-      <p:sp>
-        <p:nvSpPr>
-          <p:cNvPr id="11" name="Kaynak"/>
+          <a:p>
+            <a:pPr algn="ctr" indent="0" marL="0">
+              <a:buNone/>
+            </a:pPr>
+            <a:r>
+              <a:rPr lang="en-US" sz="2200" dirty="0">
+                <a:solidFill>
+                  <a:schemeClr val="accent1"/>
+                </a:solidFill>
+              </a:rPr>
+              <a:t>p &lt; 0,001</a:t>
+            </a:r>
+            <a:endParaRPr lang="en-US" sz="2000" dirty="0"/>
+          </a:p>
+        </p:txBody>
+      </p:sp>
+      <p:sp>
+        <p:nvSpPr>
+          <p:cNvPr id="12" name="Kaynak"/>
           <p:cNvSpPr txBox="1"/>
           <p:nvPr/>
         </p:nvSpPr>
@@ -10605,7 +9229,7 @@
                   <a:schemeClr val="accent3"/>
                 </a:solidFill>
               </a:rPr>
-              <a:t>Hesaplama makalenin Tablo 5 verilerinden yapılmıştır. Kaynak: Cenberlitaş E, Gökçe A, Öztürk O. Turk J Fam Pract. 2026;30(2):97-106.</a:t>
+              <a:t>Görsel: Cenberlitaş E, Gökçe A, Öztürk O. Turk J Fam Pract. 2026;30(2):97-106, Tablo 5.</a:t>
             </a:r>
             <a:endParaRPr lang="en-US" sz="1200" dirty="0"/>
           </a:p>
@@ -11209,7 +9833,7 @@
                   <a:schemeClr val="accent1"/>
                 </a:solidFill>
               </a:rPr>
-              <a:t>Tartışma ve kısıtlılıklar</a:t>
+              <a:t>Tartışma</a:t>
             </a:r>
             <a:endParaRPr lang="en-US" sz="2600" dirty="0"/>
           </a:p>
@@ -11333,7 +9957,7 @@
                   <a:schemeClr val="accent1"/>
                 </a:solidFill>
               </a:rPr>
-              <a:t>Eleştirel değerlendirme</a:t>
+              <a:t>Sonuç ve öneriler</a:t>
             </a:r>
             <a:endParaRPr lang="en-US" sz="2600" dirty="0"/>
           </a:p>
@@ -11457,7 +10081,7 @@
                   <a:schemeClr val="accent1"/>
                 </a:solidFill>
               </a:rPr>
-              <a:t>Olgu ve sonuç</a:t>
+              <a:t>Olgu ve özet</a:t>
             </a:r>
             <a:endParaRPr lang="en-US" sz="2600" dirty="0"/>
           </a:p>
@@ -11565,7 +10189,7 @@
                   <a:schemeClr val="accent1"/>
                 </a:solidFill>
               </a:rPr>
-              <a:t>Tartışma: literatürle uyum</a:t>
+              <a:t>Tablo 6: Lojistik regresyon</a:t>
             </a:r>
             <a:endParaRPr lang="en-US" sz="3600" dirty="0"/>
           </a:p>
@@ -11573,24 +10197,24 @@
       </p:sp>
       <p:sp>
         <p:nvSpPr>
-          <p:cNvPr id="4" name="Ikon zemini"/>
+          <p:cNvPr id="4" name="Görsel çerçeve"/>
           <p:cNvSpPr/>
           <p:nvPr/>
         </p:nvSpPr>
         <p:spPr>
           <a:xfrm>
-            <a:off x="548640" y="1444752"/>
-            <a:ext cx="868680" cy="868680"/>
-          </a:xfrm>
-          <a:prstGeom prst="ellipse">
+            <a:off x="548640" y="1325880"/>
+            <a:ext cx="7841940" cy="4892040"/>
+          </a:xfrm>
+          <a:prstGeom prst="rect">
             <a:avLst/>
           </a:prstGeom>
           <a:solidFill>
-            <a:schemeClr val="accent2"/>
+            <a:schemeClr val="bg1"/>
           </a:solidFill>
           <a:ln w="12700">
             <a:solidFill>
-              <a:schemeClr val="accent2"/>
+              <a:srgbClr val="C9DCDF"/>
             </a:solidFill>
             <a:prstDash val="solid"/>
           </a:ln>
@@ -11598,7 +10222,7 @@
       </p:sp>
       <p:pic>
         <p:nvPicPr>
-          <p:cNvPr id="5" name="Ikon" descr="FaPills">    </p:cNvPr>
+          <p:cNvPr id="5" name="Tablo 6: Lojistik regresyon sonuçları" descr="Tablo 6: Lojistik regresyon sonuçları">    </p:cNvPr>
           <p:cNvPicPr>
             <a:picLocks noChangeAspect="1"/>
           </p:cNvPicPr>
@@ -11612,8 +10236,8 @@
         </p:blipFill>
         <p:spPr>
           <a:xfrm>
-            <a:off x="774497" y="1670609"/>
-            <a:ext cx="416966" cy="416966"/>
+            <a:off x="548640" y="1325880"/>
+            <a:ext cx="7841940" cy="4892040"/>
           </a:xfrm>
           <a:prstGeom prst="rect">
             <a:avLst/>
@@ -11622,100 +10246,19 @@
       </p:pic>
       <p:sp>
         <p:nvSpPr>
-          <p:cNvPr id="6" name="Text 2"/>
-          <p:cNvSpPr txBox="1"/>
-          <p:nvPr/>
-        </p:nvSpPr>
-        <p:spPr>
-          <a:xfrm>
-            <a:off x="1691640" y="1371600"/>
-            <a:ext cx="3200400" cy="1005840"/>
-          </a:xfrm>
-          <a:prstGeom prst="rect">
-            <a:avLst/>
-          </a:prstGeom>
-          <a:noFill/>
-          <a:ln/>
-        </p:spPr>
-        <p:txBody>
-          <a:bodyPr wrap="square" lIns="0" tIns="0" rIns="0" bIns="0" rtlCol="0" anchor="ctr"/>
-          <a:lstStyle/>
-          <a:p>
-            <a:pPr indent="0" marL="0">
-              <a:buNone/>
-            </a:pPr>
-            <a:r>
-              <a:rPr lang="en-US" sz="2600" b="1" dirty="0">
-                <a:solidFill>
-                  <a:schemeClr val="accent1"/>
-                </a:solidFill>
-              </a:rPr>
-              <a:t>Vareniklin</a:t>
-            </a:r>
-            <a:endParaRPr lang="en-US" sz="2600" dirty="0"/>
-          </a:p>
-        </p:txBody>
-      </p:sp>
-      <p:sp>
-        <p:nvSpPr>
-          <p:cNvPr id="7" name="Text 3"/>
-          <p:cNvSpPr txBox="1"/>
-          <p:nvPr/>
-        </p:nvSpPr>
-        <p:spPr>
-          <a:xfrm>
-            <a:off x="4937760" y="1371600"/>
-            <a:ext cx="6675120" cy="1005840"/>
-          </a:xfrm>
-          <a:prstGeom prst="rect">
-            <a:avLst/>
-          </a:prstGeom>
-          <a:noFill/>
-          <a:ln/>
-        </p:spPr>
-        <p:txBody>
-          <a:bodyPr wrap="square" lIns="0" tIns="0" rIns="0" bIns="0" rtlCol="0" anchor="ctr"/>
-          <a:lstStyle/>
-          <a:p>
-            <a:pPr indent="0" marL="0">
-              <a:buNone/>
-            </a:pPr>
-            <a:r>
-              <a:rPr lang="en-US" sz="2200" dirty="0">
-                <a:solidFill>
-                  <a:schemeClr val="accent1"/>
-                </a:solidFill>
-              </a:rPr>
-              <a:t>Bupropiona üstün; meta-analiz ve EAGLES ile uyumlu</a:t>
-            </a:r>
-            <a:pPr indent="0" marL="0">
-              <a:buNone/>
-            </a:pPr>
-            <a:r>
-              <a:rPr lang="en-US" sz="1800" dirty="0">
-                <a:solidFill>
-                  <a:schemeClr val="accent3"/>
-                </a:solidFill>
-              </a:rPr>
-              <a:t>  [8, 9]</a:t>
-            </a:r>
-            <a:endParaRPr lang="en-US" sz="2200" dirty="0"/>
-          </a:p>
-        </p:txBody>
-      </p:sp>
-      <p:sp>
-        <p:nvSpPr>
-          <p:cNvPr id="8" name="Ikon zemini"/>
+          <p:cNvPr id="6" name="Kart"/>
           <p:cNvSpPr/>
           <p:nvPr/>
         </p:nvSpPr>
         <p:spPr>
           <a:xfrm>
-            <a:off x="548640" y="2651760"/>
-            <a:ext cx="868680" cy="868680"/>
-          </a:xfrm>
-          <a:prstGeom prst="ellipse">
-            <a:avLst/>
+            <a:off x="8710620" y="1325880"/>
+            <a:ext cx="2929692" cy="4892040"/>
+          </a:xfrm>
+          <a:prstGeom prst="roundRect">
+            <a:avLst>
+              <a:gd name="adj" fmla="val 3745"/>
+            </a:avLst>
           </a:prstGeom>
           <a:solidFill>
             <a:schemeClr val="accent1"/>
@@ -11728,380 +10271,138 @@
           </a:ln>
         </p:spPr>
       </p:sp>
-      <p:pic>
-        <p:nvPicPr>
-          <p:cNvPr id="9" name="Ikon" descr="FaLeaf">    </p:cNvPr>
-          <p:cNvPicPr>
-            <a:picLocks noChangeAspect="1"/>
-          </p:cNvPicPr>
-          <p:nvPr/>
-        </p:nvPicPr>
-        <p:blipFill>
-          <a:blip r:embed="rId2"/>
-          <a:stretch>
-            <a:fillRect/>
-          </a:stretch>
-        </p:blipFill>
-        <p:spPr>
-          <a:xfrm>
-            <a:off x="774497" y="2877617"/>
-            <a:ext cx="416966" cy="416966"/>
-          </a:xfrm>
-          <a:prstGeom prst="rect">
-            <a:avLst/>
-          </a:prstGeom>
-        </p:spPr>
-      </p:pic>
-      <p:sp>
-        <p:nvSpPr>
-          <p:cNvPr id="10" name="Text 5"/>
+      <p:sp>
+        <p:nvSpPr>
+          <p:cNvPr id="7" name="Text 3"/>
           <p:cNvSpPr txBox="1"/>
           <p:nvPr/>
         </p:nvSpPr>
         <p:spPr>
           <a:xfrm>
-            <a:off x="1691640" y="2578608"/>
-            <a:ext cx="3200400" cy="1005840"/>
-          </a:xfrm>
-          <a:prstGeom prst="rect">
-            <a:avLst/>
-          </a:prstGeom>
-          <a:noFill/>
-          <a:ln/>
-        </p:spPr>
-        <p:txBody>
-          <a:bodyPr wrap="square" lIns="0" tIns="0" rIns="0" bIns="0" rtlCol="0" anchor="ctr"/>
+            <a:off x="8939220" y="1508760"/>
+            <a:ext cx="2472492" cy="4526280"/>
+          </a:xfrm>
+          <a:prstGeom prst="rect">
+            <a:avLst/>
+          </a:prstGeom>
+          <a:noFill/>
+          <a:ln/>
+        </p:spPr>
+        <p:txBody>
+          <a:bodyPr wrap="square" lIns="0" tIns="0" rIns="0" bIns="0" rtlCol="0" anchor="t"/>
           <a:lstStyle/>
           <a:p>
             <a:pPr indent="0" marL="0">
-              <a:buNone/>
-            </a:pPr>
-            <a:r>
-              <a:rPr lang="en-US" sz="2600" b="1" dirty="0">
-                <a:solidFill>
-                  <a:schemeClr val="accent1"/>
-                </a:solidFill>
-              </a:rPr>
-              <a:t>Sitizin</a:t>
-            </a:r>
-            <a:endParaRPr lang="en-US" sz="2600" dirty="0"/>
-          </a:p>
-        </p:txBody>
-      </p:sp>
-      <p:sp>
-        <p:nvSpPr>
-          <p:cNvPr id="11" name="Text 6"/>
-          <p:cNvSpPr txBox="1"/>
-          <p:nvPr/>
-        </p:nvSpPr>
-        <p:spPr>
-          <a:xfrm>
-            <a:off x="4937760" y="2578608"/>
-            <a:ext cx="6675120" cy="1005840"/>
-          </a:xfrm>
-          <a:prstGeom prst="rect">
-            <a:avLst/>
-          </a:prstGeom>
-          <a:noFill/>
-          <a:ln/>
-        </p:spPr>
-        <p:txBody>
-          <a:bodyPr wrap="square" lIns="0" tIns="0" rIns="0" bIns="0" rtlCol="0" anchor="ctr"/>
-          <a:lstStyle/>
+              <a:spcAft>
+                <a:spcPts val="1200"/>
+              </a:spcAft>
+              <a:buNone/>
+            </a:pPr>
+            <a:r>
+              <a:rPr lang="en-US" sz="1800" b="1" dirty="0">
+                <a:solidFill>
+                  <a:schemeClr val="bg1"/>
+                </a:solidFill>
+              </a:rPr>
+              <a:t>Referans: bupropion</a:t>
+            </a:r>
+            <a:endParaRPr lang="en-US" sz="1800" dirty="0"/>
+          </a:p>
           <a:p>
             <a:pPr indent="0" marL="0">
               <a:buNone/>
             </a:pPr>
             <a:r>
-              <a:rPr lang="en-US" sz="2200" dirty="0">
-                <a:solidFill>
-                  <a:schemeClr val="accent1"/>
-                </a:solidFill>
-              </a:rPr>
-              <a:t>Plaseboya üstün; NRT ve vareniklinle benzer</a:t>
-            </a:r>
+              <a:rPr lang="en-US" sz="3000" b="1" dirty="0">
+                <a:solidFill>
+                  <a:schemeClr val="bg1"/>
+                </a:solidFill>
+              </a:rPr>
+              <a:t>4,0 kat</a:t>
+            </a:r>
+            <a:endParaRPr lang="en-US" sz="1800" dirty="0"/>
+          </a:p>
+          <a:p>
             <a:pPr indent="0" marL="0">
+              <a:spcAft>
+                <a:spcPts val="1200"/>
+              </a:spcAft>
               <a:buNone/>
             </a:pPr>
             <a:r>
               <a:rPr lang="en-US" sz="1800" dirty="0">
                 <a:solidFill>
-                  <a:schemeClr val="accent3"/>
-                </a:solidFill>
-              </a:rPr>
-              <a:t>  [10, 11]</a:t>
-            </a:r>
-            <a:endParaRPr lang="en-US" sz="2200" dirty="0"/>
-          </a:p>
-        </p:txBody>
-      </p:sp>
-      <p:sp>
-        <p:nvSpPr>
-          <p:cNvPr id="12" name="Ikon zemini"/>
-          <p:cNvSpPr/>
-          <p:nvPr/>
-        </p:nvSpPr>
-        <p:spPr>
-          <a:xfrm>
-            <a:off x="548640" y="3858768"/>
-            <a:ext cx="868680" cy="868680"/>
-          </a:xfrm>
-          <a:prstGeom prst="ellipse">
-            <a:avLst/>
-          </a:prstGeom>
-          <a:solidFill>
-            <a:schemeClr val="accent2"/>
-          </a:solidFill>
-          <a:ln w="12700">
-            <a:solidFill>
-              <a:schemeClr val="accent2"/>
-            </a:solidFill>
-            <a:prstDash val="solid"/>
-          </a:ln>
-        </p:spPr>
-      </p:sp>
-      <p:pic>
-        <p:nvPicPr>
-          <p:cNvPr id="13" name="Ikon" descr="FaExchangeAlt">    </p:cNvPr>
-          <p:cNvPicPr>
-            <a:picLocks noChangeAspect="1"/>
-          </p:cNvPicPr>
-          <p:nvPr/>
-        </p:nvPicPr>
-        <p:blipFill>
-          <a:blip r:embed="rId3"/>
-          <a:stretch>
-            <a:fillRect/>
-          </a:stretch>
-        </p:blipFill>
-        <p:spPr>
-          <a:xfrm>
-            <a:off x="774497" y="4084625"/>
-            <a:ext cx="416966" cy="416966"/>
-          </a:xfrm>
-          <a:prstGeom prst="rect">
-            <a:avLst/>
-          </a:prstGeom>
-        </p:spPr>
-      </p:pic>
-      <p:sp>
-        <p:nvSpPr>
-          <p:cNvPr id="14" name="Text 8"/>
-          <p:cNvSpPr txBox="1"/>
-          <p:nvPr/>
-        </p:nvSpPr>
-        <p:spPr>
-          <a:xfrm>
-            <a:off x="1691640" y="3785616"/>
-            <a:ext cx="3200400" cy="1005840"/>
-          </a:xfrm>
-          <a:prstGeom prst="rect">
-            <a:avLst/>
-          </a:prstGeom>
-          <a:noFill/>
-          <a:ln/>
-        </p:spPr>
-        <p:txBody>
-          <a:bodyPr wrap="square" lIns="0" tIns="0" rIns="0" bIns="0" rtlCol="0" anchor="ctr"/>
-          <a:lstStyle/>
+                  <a:schemeClr val="bg1"/>
+                </a:solidFill>
+              </a:rPr>
+              <a:t>vareniklin, kombine</a:t>
+            </a:r>
+            <a:endParaRPr lang="en-US" sz="1800" dirty="0"/>
+          </a:p>
           <a:p>
             <a:pPr indent="0" marL="0">
               <a:buNone/>
             </a:pPr>
             <a:r>
-              <a:rPr lang="en-US" sz="2600" b="1" dirty="0">
-                <a:solidFill>
-                  <a:schemeClr val="accent1"/>
-                </a:solidFill>
-              </a:rPr>
-              <a:t>Kombine tedavi</a:t>
-            </a:r>
-            <a:endParaRPr lang="en-US" sz="2600" dirty="0"/>
-          </a:p>
-        </p:txBody>
-      </p:sp>
-      <p:sp>
-        <p:nvSpPr>
-          <p:cNvPr id="15" name="Text 9"/>
-          <p:cNvSpPr txBox="1"/>
-          <p:nvPr/>
-        </p:nvSpPr>
-        <p:spPr>
-          <a:xfrm>
-            <a:off x="4937760" y="3785616"/>
-            <a:ext cx="6675120" cy="1005840"/>
-          </a:xfrm>
-          <a:prstGeom prst="rect">
-            <a:avLst/>
-          </a:prstGeom>
-          <a:noFill/>
-          <a:ln/>
-        </p:spPr>
-        <p:txBody>
-          <a:bodyPr wrap="square" lIns="0" tIns="0" rIns="0" bIns="0" rtlCol="0" anchor="ctr"/>
-          <a:lstStyle/>
+              <a:rPr lang="en-US" sz="3000" b="1" dirty="0">
+                <a:solidFill>
+                  <a:schemeClr val="bg1"/>
+                </a:solidFill>
+              </a:rPr>
+              <a:t>2,0 kat</a:t>
+            </a:r>
+            <a:endParaRPr lang="en-US" sz="1800" dirty="0"/>
+          </a:p>
           <a:p>
             <a:pPr indent="0" marL="0">
-              <a:buNone/>
-            </a:pPr>
-            <a:r>
-              <a:rPr lang="en-US" sz="2200" dirty="0">
-                <a:solidFill>
-                  <a:schemeClr val="accent1"/>
-                </a:solidFill>
-              </a:rPr>
-              <a:t>Kılavuz önerileriyle uyumlu</a:t>
-            </a:r>
+              <a:spcAft>
+                <a:spcPts val="1200"/>
+              </a:spcAft>
+              <a:buNone/>
+            </a:pPr>
+            <a:r>
+              <a:rPr lang="en-US" sz="1800" dirty="0">
+                <a:solidFill>
+                  <a:schemeClr val="bg1"/>
+                </a:solidFill>
+              </a:rPr>
+              <a:t>hanede sigara içen yok</a:t>
+            </a:r>
+            <a:endParaRPr lang="en-US" sz="1800" dirty="0"/>
+          </a:p>
+          <a:p>
             <a:pPr indent="0" marL="0">
               <a:buNone/>
             </a:pPr>
             <a:r>
+              <a:rPr lang="en-US" sz="3000" b="1" dirty="0">
+                <a:solidFill>
+                  <a:schemeClr val="bg1"/>
+                </a:solidFill>
+              </a:rPr>
+              <a:t>1,6 kat</a:t>
+            </a:r>
+            <a:endParaRPr lang="en-US" sz="1800" dirty="0"/>
+          </a:p>
+          <a:p>
+            <a:pPr indent="0" marL="0">
+              <a:buNone/>
+            </a:pPr>
+            <a:r>
               <a:rPr lang="en-US" sz="1800" dirty="0">
                 <a:solidFill>
-                  <a:schemeClr val="accent3"/>
-                </a:solidFill>
-              </a:rPr>
-              <a:t>  [12]</a:t>
-            </a:r>
-            <a:endParaRPr lang="en-US" sz="2200" dirty="0"/>
-          </a:p>
-        </p:txBody>
-      </p:sp>
-      <p:sp>
-        <p:nvSpPr>
-          <p:cNvPr id="16" name="Ikon zemini"/>
-          <p:cNvSpPr/>
-          <p:nvPr/>
-        </p:nvSpPr>
-        <p:spPr>
-          <a:xfrm>
-            <a:off x="548640" y="5065776"/>
-            <a:ext cx="868680" cy="868680"/>
-          </a:xfrm>
-          <a:prstGeom prst="ellipse">
-            <a:avLst/>
-          </a:prstGeom>
-          <a:solidFill>
-            <a:schemeClr val="accent1"/>
-          </a:solidFill>
-          <a:ln w="12700">
-            <a:solidFill>
-              <a:schemeClr val="accent1"/>
-            </a:solidFill>
-            <a:prstDash val="solid"/>
-          </a:ln>
-        </p:spPr>
-      </p:sp>
-      <p:pic>
-        <p:nvPicPr>
-          <p:cNvPr id="17" name="Ikon" descr="FaHandsHelping">    </p:cNvPr>
-          <p:cNvPicPr>
-            <a:picLocks noChangeAspect="1"/>
-          </p:cNvPicPr>
-          <p:nvPr/>
-        </p:nvPicPr>
-        <p:blipFill>
-          <a:blip r:embed="rId4"/>
-          <a:stretch>
-            <a:fillRect/>
-          </a:stretch>
-        </p:blipFill>
-        <p:spPr>
-          <a:xfrm>
-            <a:off x="774497" y="5291633"/>
-            <a:ext cx="416966" cy="416966"/>
-          </a:xfrm>
-          <a:prstGeom prst="rect">
-            <a:avLst/>
-          </a:prstGeom>
-        </p:spPr>
-      </p:pic>
-      <p:sp>
-        <p:nvSpPr>
-          <p:cNvPr id="18" name="Text 11"/>
-          <p:cNvSpPr txBox="1"/>
-          <p:nvPr/>
-        </p:nvSpPr>
-        <p:spPr>
-          <a:xfrm>
-            <a:off x="1691640" y="4992624"/>
-            <a:ext cx="3200400" cy="1005840"/>
-          </a:xfrm>
-          <a:prstGeom prst="rect">
-            <a:avLst/>
-          </a:prstGeom>
-          <a:noFill/>
-          <a:ln/>
-        </p:spPr>
-        <p:txBody>
-          <a:bodyPr wrap="square" lIns="0" tIns="0" rIns="0" bIns="0" rtlCol="0" anchor="ctr"/>
-          <a:lstStyle/>
-          <a:p>
-            <a:pPr indent="0" marL="0">
-              <a:buNone/>
-            </a:pPr>
-            <a:r>
-              <a:rPr lang="en-US" sz="2600" b="1" dirty="0">
-                <a:solidFill>
-                  <a:schemeClr val="accent1"/>
-                </a:solidFill>
-              </a:rPr>
-              <a:t>Hane ve eş desteği</a:t>
-            </a:r>
-            <a:endParaRPr lang="en-US" sz="2600" dirty="0"/>
-          </a:p>
-        </p:txBody>
-      </p:sp>
-      <p:sp>
-        <p:nvSpPr>
-          <p:cNvPr id="19" name="Text 12"/>
-          <p:cNvSpPr txBox="1"/>
-          <p:nvPr/>
-        </p:nvSpPr>
-        <p:spPr>
-          <a:xfrm>
-            <a:off x="4937760" y="4992624"/>
-            <a:ext cx="6675120" cy="1005840"/>
-          </a:xfrm>
-          <a:prstGeom prst="rect">
-            <a:avLst/>
-          </a:prstGeom>
-          <a:noFill/>
-          <a:ln/>
-        </p:spPr>
-        <p:txBody>
-          <a:bodyPr wrap="square" lIns="0" tIns="0" rIns="0" bIns="0" rtlCol="0" anchor="ctr"/>
-          <a:lstStyle/>
-          <a:p>
-            <a:pPr indent="0" marL="0">
-              <a:buNone/>
-            </a:pPr>
-            <a:r>
-              <a:rPr lang="en-US" sz="2200" dirty="0">
-                <a:solidFill>
-                  <a:schemeClr val="accent1"/>
-                </a:solidFill>
-              </a:rPr>
-              <a:t>Cochrane derlemesiyle uyumlu</a:t>
-            </a:r>
-            <a:pPr indent="0" marL="0">
-              <a:buNone/>
-            </a:pPr>
-            <a:r>
-              <a:rPr lang="en-US" sz="1800" dirty="0">
-                <a:solidFill>
-                  <a:schemeClr val="accent3"/>
-                </a:solidFill>
-              </a:rPr>
-              <a:t>  [13]</a:t>
-            </a:r>
-            <a:endParaRPr lang="en-US" sz="2200" dirty="0"/>
-          </a:p>
-        </p:txBody>
-      </p:sp>
-      <p:sp>
-        <p:nvSpPr>
-          <p:cNvPr id="20" name="Kaynak"/>
+                  <a:schemeClr val="bg1"/>
+                </a:solidFill>
+              </a:rPr>
+              <a:t>yakınma yok</a:t>
+            </a:r>
+            <a:endParaRPr lang="en-US" sz="1800" dirty="0"/>
+          </a:p>
+        </p:txBody>
+      </p:sp>
+      <p:sp>
+        <p:nvSpPr>
+          <p:cNvPr id="8" name="Kaynak"/>
           <p:cNvSpPr txBox="1"/>
           <p:nvPr/>
         </p:nvSpPr>
@@ -12129,7 +10430,7 @@
                   <a:schemeClr val="accent3"/>
                 </a:solidFill>
               </a:rPr>
-              <a:t>Kaynak: 8–13</a:t>
+              <a:t>Görsel: Cenberlitaş E, Gökçe A, Öztürk O. Turk J Fam Pract. 2026;30(2):97-106, Tablo 6.</a:t>
             </a:r>
             <a:endParaRPr lang="en-US" sz="1200" dirty="0"/>
           </a:p>
@@ -12237,7 +10538,7 @@
                   <a:schemeClr val="accent1"/>
                 </a:solidFill>
               </a:rPr>
-              <a:t>Yazarların bildirdiği kısıtlılıklar</a:t>
+              <a:t>Tartışma: tedaviler ve literatür</a:t>
             </a:r>
             <a:endParaRPr lang="en-US" sz="3600" dirty="0"/>
           </a:p>
@@ -12245,41 +10546,14 @@
       </p:sp>
       <p:sp>
         <p:nvSpPr>
-          <p:cNvPr id="4" name="Kart"/>
+          <p:cNvPr id="4" name="Ikon zemini"/>
           <p:cNvSpPr/>
           <p:nvPr/>
         </p:nvSpPr>
         <p:spPr>
           <a:xfrm>
-            <a:off x="548640" y="1417320"/>
-            <a:ext cx="3566160" cy="4480560"/>
-          </a:xfrm>
-          <a:prstGeom prst="roundRect">
-            <a:avLst>
-              <a:gd name="adj" fmla="val 3077"/>
-            </a:avLst>
-          </a:prstGeom>
-          <a:solidFill>
-            <a:schemeClr val="bg2"/>
-          </a:solidFill>
-          <a:ln w="12700">
-            <a:solidFill>
-              <a:schemeClr val="bg2"/>
-            </a:solidFill>
-            <a:prstDash val="solid"/>
-          </a:ln>
-        </p:spPr>
-      </p:sp>
-      <p:sp>
-        <p:nvSpPr>
-          <p:cNvPr id="5" name="Ikon zemini"/>
-          <p:cNvSpPr/>
-          <p:nvPr/>
-        </p:nvSpPr>
-        <p:spPr>
-          <a:xfrm>
-            <a:off x="1783080" y="1691640"/>
-            <a:ext cx="1097280" cy="1097280"/>
+            <a:off x="548640" y="1444752"/>
+            <a:ext cx="868680" cy="868680"/>
           </a:xfrm>
           <a:prstGeom prst="ellipse">
             <a:avLst/>
@@ -12297,7 +10571,7 @@
       </p:sp>
       <p:pic>
         <p:nvPicPr>
-          <p:cNvPr id="6" name="Ikon" descr="FaUserMd">    </p:cNvPr>
+          <p:cNvPr id="5" name="Ikon" descr="FaPills">    </p:cNvPr>
           <p:cNvPicPr>
             <a:picLocks noChangeAspect="1"/>
           </p:cNvPicPr>
@@ -12311,14 +10585,50 @@
         </p:blipFill>
         <p:spPr>
           <a:xfrm>
-            <a:off x="2068373" y="1976933"/>
-            <a:ext cx="526694" cy="526694"/>
+            <a:off x="774497" y="1670609"/>
+            <a:ext cx="416966" cy="416966"/>
           </a:xfrm>
           <a:prstGeom prst="rect">
             <a:avLst/>
           </a:prstGeom>
         </p:spPr>
       </p:pic>
+      <p:sp>
+        <p:nvSpPr>
+          <p:cNvPr id="6" name="Text 2"/>
+          <p:cNvSpPr txBox="1"/>
+          <p:nvPr/>
+        </p:nvSpPr>
+        <p:spPr>
+          <a:xfrm>
+            <a:off x="1691640" y="1371600"/>
+            <a:ext cx="3200400" cy="1005840"/>
+          </a:xfrm>
+          <a:prstGeom prst="rect">
+            <a:avLst/>
+          </a:prstGeom>
+          <a:noFill/>
+          <a:ln/>
+        </p:spPr>
+        <p:txBody>
+          <a:bodyPr wrap="square" lIns="0" tIns="0" rIns="0" bIns="0" rtlCol="0" anchor="ctr"/>
+          <a:lstStyle/>
+          <a:p>
+            <a:pPr indent="0" marL="0">
+              <a:buNone/>
+            </a:pPr>
+            <a:r>
+              <a:rPr lang="en-US" sz="2600" b="1" dirty="0">
+                <a:solidFill>
+                  <a:schemeClr val="accent1"/>
+                </a:solidFill>
+              </a:rPr>
+              <a:t>Vareniklin</a:t>
+            </a:r>
+            <a:endParaRPr lang="en-US" sz="2600" dirty="0"/>
+          </a:p>
+        </p:txBody>
+      </p:sp>
       <p:sp>
         <p:nvSpPr>
           <p:cNvPr id="7" name="Text 3"/>
@@ -12327,8 +10637,8 @@
         </p:nvSpPr>
         <p:spPr>
           <a:xfrm>
-            <a:off x="777240" y="2971800"/>
-            <a:ext cx="3108960" cy="1005840"/>
+            <a:off x="4937760" y="1371600"/>
+            <a:ext cx="6675120" cy="1005840"/>
           </a:xfrm>
           <a:prstGeom prst="rect">
             <a:avLst/>
@@ -12340,94 +10650,42 @@
           <a:bodyPr wrap="square" lIns="0" tIns="0" rIns="0" bIns="0" rtlCol="0" anchor="ctr"/>
           <a:lstStyle/>
           <a:p>
-            <a:pPr algn="ctr" indent="0" marL="0">
-              <a:buNone/>
-            </a:pPr>
-            <a:r>
-              <a:rPr lang="en-US" sz="2400" b="1" dirty="0">
+            <a:pPr indent="0" marL="0">
+              <a:buNone/>
+            </a:pPr>
+            <a:r>
+              <a:rPr lang="en-US" sz="2200" dirty="0">
                 <a:solidFill>
                   <a:schemeClr val="accent1"/>
                 </a:solidFill>
               </a:rPr>
-              <a:t>Asistan rotasyonu</a:t>
-            </a:r>
-            <a:endParaRPr lang="en-US" sz="2400" dirty="0"/>
-          </a:p>
-        </p:txBody>
-      </p:sp>
-      <p:sp>
-        <p:nvSpPr>
-          <p:cNvPr id="8" name="Text 4"/>
-          <p:cNvSpPr txBox="1"/>
-          <p:nvPr/>
-        </p:nvSpPr>
-        <p:spPr>
-          <a:xfrm>
-            <a:off x="822960" y="4023360"/>
-            <a:ext cx="3017520" cy="1645920"/>
-          </a:xfrm>
-          <a:prstGeom prst="rect">
-            <a:avLst/>
-          </a:prstGeom>
-          <a:noFill/>
-          <a:ln/>
-        </p:spPr>
-        <p:txBody>
-          <a:bodyPr wrap="square" lIns="0" tIns="0" rIns="0" bIns="0" rtlCol="0" anchor="t"/>
-          <a:lstStyle/>
-          <a:p>
-            <a:pPr algn="ctr" indent="0" marL="0">
-              <a:buNone/>
-            </a:pPr>
-            <a:r>
-              <a:rPr lang="en-US" sz="2000" dirty="0">
-                <a:solidFill>
-                  <a:schemeClr val="accent1"/>
-                </a:solidFill>
-              </a:rPr>
-              <a:t>Takip sürekliliği ve öz bildirim etkilenmiş olabilir</a:t>
-            </a:r>
-            <a:endParaRPr lang="en-US" sz="2000" dirty="0"/>
-          </a:p>
-        </p:txBody>
-      </p:sp>
-      <p:sp>
-        <p:nvSpPr>
-          <p:cNvPr id="9" name="Kart"/>
+              <a:t>Bupropiona üstün; meta-analiz ve EAGLES ile uyumlu</a:t>
+            </a:r>
+            <a:pPr indent="0" marL="0">
+              <a:buNone/>
+            </a:pPr>
+            <a:r>
+              <a:rPr lang="en-US" sz="1800" dirty="0">
+                <a:solidFill>
+                  <a:schemeClr val="accent3"/>
+                </a:solidFill>
+              </a:rPr>
+              <a:t>  [8, 9]</a:t>
+            </a:r>
+            <a:endParaRPr lang="en-US" sz="2200" dirty="0"/>
+          </a:p>
+        </p:txBody>
+      </p:sp>
+      <p:sp>
+        <p:nvSpPr>
+          <p:cNvPr id="8" name="Ikon zemini"/>
           <p:cNvSpPr/>
           <p:nvPr/>
         </p:nvSpPr>
         <p:spPr>
           <a:xfrm>
-            <a:off x="4297680" y="1417320"/>
-            <a:ext cx="3566160" cy="4480560"/>
-          </a:xfrm>
-          <a:prstGeom prst="roundRect">
-            <a:avLst>
-              <a:gd name="adj" fmla="val 3077"/>
-            </a:avLst>
-          </a:prstGeom>
-          <a:solidFill>
-            <a:schemeClr val="bg2"/>
-          </a:solidFill>
-          <a:ln w="12700">
-            <a:solidFill>
-              <a:schemeClr val="bg2"/>
-            </a:solidFill>
-            <a:prstDash val="solid"/>
-          </a:ln>
-        </p:spPr>
-      </p:sp>
-      <p:sp>
-        <p:nvSpPr>
-          <p:cNvPr id="10" name="Ikon zemini"/>
-          <p:cNvSpPr/>
-          <p:nvPr/>
-        </p:nvSpPr>
-        <p:spPr>
-          <a:xfrm>
-            <a:off x="5532120" y="1691640"/>
-            <a:ext cx="1097280" cy="1097280"/>
+            <a:off x="548640" y="2651760"/>
+            <a:ext cx="868680" cy="868680"/>
           </a:xfrm>
           <a:prstGeom prst="ellipse">
             <a:avLst/>
@@ -12445,7 +10703,7 @@
       </p:sp>
       <p:pic>
         <p:nvPicPr>
-          <p:cNvPr id="11" name="Ikon" descr="FaComments">    </p:cNvPr>
+          <p:cNvPr id="9" name="Ikon" descr="FaLeaf">    </p:cNvPr>
           <p:cNvPicPr>
             <a:picLocks noChangeAspect="1"/>
           </p:cNvPicPr>
@@ -12459,8 +10717,8 @@
         </p:blipFill>
         <p:spPr>
           <a:xfrm>
-            <a:off x="5817413" y="1976933"/>
-            <a:ext cx="526694" cy="526694"/>
+            <a:off x="774497" y="2877617"/>
+            <a:ext cx="416966" cy="416966"/>
           </a:xfrm>
           <a:prstGeom prst="rect">
             <a:avLst/>
@@ -12469,14 +10727,14 @@
       </p:pic>
       <p:sp>
         <p:nvSpPr>
-          <p:cNvPr id="12" name="Text 7"/>
+          <p:cNvPr id="10" name="Text 5"/>
           <p:cNvSpPr txBox="1"/>
           <p:nvPr/>
         </p:nvSpPr>
         <p:spPr>
           <a:xfrm>
-            <a:off x="4526280" y="2971800"/>
-            <a:ext cx="3108960" cy="1005840"/>
+            <a:off x="1691640" y="2578608"/>
+            <a:ext cx="3200400" cy="1005840"/>
           </a:xfrm>
           <a:prstGeom prst="rect">
             <a:avLst/>
@@ -12488,94 +10746,78 @@
           <a:bodyPr wrap="square" lIns="0" tIns="0" rIns="0" bIns="0" rtlCol="0" anchor="ctr"/>
           <a:lstStyle/>
           <a:p>
-            <a:pPr algn="ctr" indent="0" marL="0">
-              <a:buNone/>
-            </a:pPr>
-            <a:r>
-              <a:rPr lang="en-US" sz="2400" b="1" dirty="0">
+            <a:pPr indent="0" marL="0">
+              <a:buNone/>
+            </a:pPr>
+            <a:r>
+              <a:rPr lang="en-US" sz="2600" b="1" dirty="0">
                 <a:solidFill>
                   <a:schemeClr val="accent1"/>
                 </a:solidFill>
               </a:rPr>
-              <a:t>Telefonla tamamlanan veri</a:t>
-            </a:r>
-            <a:endParaRPr lang="en-US" sz="2400" dirty="0"/>
-          </a:p>
-        </p:txBody>
-      </p:sp>
-      <p:sp>
-        <p:nvSpPr>
-          <p:cNvPr id="13" name="Text 8"/>
+              <a:t>Sitizin</a:t>
+            </a:r>
+            <a:endParaRPr lang="en-US" sz="2600" dirty="0"/>
+          </a:p>
+        </p:txBody>
+      </p:sp>
+      <p:sp>
+        <p:nvSpPr>
+          <p:cNvPr id="11" name="Text 6"/>
           <p:cNvSpPr txBox="1"/>
           <p:nvPr/>
         </p:nvSpPr>
         <p:spPr>
           <a:xfrm>
-            <a:off x="4572000" y="4023360"/>
-            <a:ext cx="3017520" cy="1645920"/>
-          </a:xfrm>
-          <a:prstGeom prst="rect">
-            <a:avLst/>
-          </a:prstGeom>
-          <a:noFill/>
-          <a:ln/>
-        </p:spPr>
-        <p:txBody>
-          <a:bodyPr wrap="square" lIns="0" tIns="0" rIns="0" bIns="0" rtlCol="0" anchor="t"/>
-          <a:lstStyle/>
-          <a:p>
-            <a:pPr algn="ctr" indent="0" marL="0">
-              <a:buNone/>
-            </a:pPr>
-            <a:r>
-              <a:rPr lang="en-US" sz="2000" dirty="0">
+            <a:off x="4937760" y="2578608"/>
+            <a:ext cx="6675120" cy="1005840"/>
+          </a:xfrm>
+          <a:prstGeom prst="rect">
+            <a:avLst/>
+          </a:prstGeom>
+          <a:noFill/>
+          <a:ln/>
+        </p:spPr>
+        <p:txBody>
+          <a:bodyPr wrap="square" lIns="0" tIns="0" rIns="0" bIns="0" rtlCol="0" anchor="ctr"/>
+          <a:lstStyle/>
+          <a:p>
+            <a:pPr indent="0" marL="0">
+              <a:buNone/>
+            </a:pPr>
+            <a:r>
+              <a:rPr lang="en-US" sz="2200" dirty="0">
                 <a:solidFill>
                   <a:schemeClr val="accent1"/>
                 </a:solidFill>
               </a:rPr>
-              <a:t>Eksik veriler hasta beyanına dayanmaktadır</a:t>
-            </a:r>
-            <a:endParaRPr lang="en-US" sz="2000" dirty="0"/>
-          </a:p>
-        </p:txBody>
-      </p:sp>
-      <p:sp>
-        <p:nvSpPr>
-          <p:cNvPr id="14" name="Kart"/>
+              <a:t>Plaseboya üstün; NRT ve vareniklinle benzer</a:t>
+            </a:r>
+            <a:pPr indent="0" marL="0">
+              <a:buNone/>
+            </a:pPr>
+            <a:r>
+              <a:rPr lang="en-US" sz="1800" dirty="0">
+                <a:solidFill>
+                  <a:schemeClr val="accent3"/>
+                </a:solidFill>
+              </a:rPr>
+              <a:t>  [10, 11]</a:t>
+            </a:r>
+            <a:endParaRPr lang="en-US" sz="2200" dirty="0"/>
+          </a:p>
+        </p:txBody>
+      </p:sp>
+      <p:sp>
+        <p:nvSpPr>
+          <p:cNvPr id="12" name="Ikon zemini"/>
           <p:cNvSpPr/>
           <p:nvPr/>
         </p:nvSpPr>
         <p:spPr>
           <a:xfrm>
-            <a:off x="8046720" y="1417320"/>
-            <a:ext cx="3566160" cy="4480560"/>
-          </a:xfrm>
-          <a:prstGeom prst="roundRect">
-            <a:avLst>
-              <a:gd name="adj" fmla="val 3077"/>
-            </a:avLst>
-          </a:prstGeom>
-          <a:solidFill>
-            <a:schemeClr val="bg2"/>
-          </a:solidFill>
-          <a:ln w="12700">
-            <a:solidFill>
-              <a:schemeClr val="bg2"/>
-            </a:solidFill>
-            <a:prstDash val="solid"/>
-          </a:ln>
-        </p:spPr>
-      </p:sp>
-      <p:sp>
-        <p:nvSpPr>
-          <p:cNvPr id="15" name="Ikon zemini"/>
-          <p:cNvSpPr/>
-          <p:nvPr/>
-        </p:nvSpPr>
-        <p:spPr>
-          <a:xfrm>
-            <a:off x="9281160" y="1691640"/>
-            <a:ext cx="1097280" cy="1097280"/>
+            <a:off x="548640" y="3858768"/>
+            <a:ext cx="868680" cy="868680"/>
           </a:xfrm>
           <a:prstGeom prst="ellipse">
             <a:avLst/>
@@ -12593,7 +10835,7 @@
       </p:sp>
       <p:pic>
         <p:nvPicPr>
-          <p:cNvPr id="16" name="Ikon" descr="FaPills">    </p:cNvPr>
+          <p:cNvPr id="13" name="Ikon" descr="FaExchangeAlt">    </p:cNvPr>
           <p:cNvPicPr>
             <a:picLocks noChangeAspect="1"/>
           </p:cNvPicPr>
@@ -12607,8 +10849,8 @@
         </p:blipFill>
         <p:spPr>
           <a:xfrm>
-            <a:off x="9566453" y="1976933"/>
-            <a:ext cx="526694" cy="526694"/>
+            <a:off x="774497" y="4084625"/>
+            <a:ext cx="416966" cy="416966"/>
           </a:xfrm>
           <a:prstGeom prst="rect">
             <a:avLst/>
@@ -12617,14 +10859,14 @@
       </p:pic>
       <p:sp>
         <p:nvSpPr>
-          <p:cNvPr id="17" name="Text 11"/>
+          <p:cNvPr id="14" name="Text 8"/>
           <p:cNvSpPr txBox="1"/>
           <p:nvPr/>
         </p:nvSpPr>
         <p:spPr>
           <a:xfrm>
-            <a:off x="8275320" y="2971800"/>
-            <a:ext cx="3108960" cy="1005840"/>
+            <a:off x="1691640" y="3785616"/>
+            <a:ext cx="3200400" cy="1005840"/>
           </a:xfrm>
           <a:prstGeom prst="rect">
             <a:avLst/>
@@ -12636,60 +10878,203 @@
           <a:bodyPr wrap="square" lIns="0" tIns="0" rIns="0" bIns="0" rtlCol="0" anchor="ctr"/>
           <a:lstStyle/>
           <a:p>
-            <a:pPr algn="ctr" indent="0" marL="0">
-              <a:buNone/>
-            </a:pPr>
-            <a:r>
-              <a:rPr lang="en-US" sz="2400" b="1" dirty="0">
+            <a:pPr indent="0" marL="0">
+              <a:buNone/>
+            </a:pPr>
+            <a:r>
+              <a:rPr lang="en-US" sz="2600" b="1" dirty="0">
                 <a:solidFill>
                   <a:schemeClr val="accent1"/>
                 </a:solidFill>
               </a:rPr>
-              <a:t>Vareniklinin piyasadan çekilmesi</a:t>
-            </a:r>
-            <a:endParaRPr lang="en-US" sz="2400" dirty="0"/>
-          </a:p>
-        </p:txBody>
-      </p:sp>
-      <p:sp>
-        <p:nvSpPr>
-          <p:cNvPr id="18" name="Text 12"/>
+              <a:t>Kombine tedavi</a:t>
+            </a:r>
+            <a:endParaRPr lang="en-US" sz="2600" dirty="0"/>
+          </a:p>
+        </p:txBody>
+      </p:sp>
+      <p:sp>
+        <p:nvSpPr>
+          <p:cNvPr id="15" name="Text 9"/>
           <p:cNvSpPr txBox="1"/>
           <p:nvPr/>
         </p:nvSpPr>
         <p:spPr>
           <a:xfrm>
-            <a:off x="8321040" y="4023360"/>
-            <a:ext cx="3017520" cy="1645920"/>
-          </a:xfrm>
-          <a:prstGeom prst="rect">
-            <a:avLst/>
-          </a:prstGeom>
-          <a:noFill/>
-          <a:ln/>
-        </p:spPr>
-        <p:txBody>
-          <a:bodyPr wrap="square" lIns="0" tIns="0" rIns="0" bIns="0" rtlCol="0" anchor="t"/>
-          <a:lstStyle/>
-          <a:p>
-            <a:pPr algn="ctr" indent="0" marL="0">
-              <a:buNone/>
-            </a:pPr>
-            <a:r>
-              <a:rPr lang="en-US" sz="2000" dirty="0">
+            <a:off x="4937760" y="3785616"/>
+            <a:ext cx="6675120" cy="1005840"/>
+          </a:xfrm>
+          <a:prstGeom prst="rect">
+            <a:avLst/>
+          </a:prstGeom>
+          <a:noFill/>
+          <a:ln/>
+        </p:spPr>
+        <p:txBody>
+          <a:bodyPr wrap="square" lIns="0" tIns="0" rIns="0" bIns="0" rtlCol="0" anchor="ctr"/>
+          <a:lstStyle/>
+          <a:p>
+            <a:pPr indent="0" marL="0">
+              <a:buNone/>
+            </a:pPr>
+            <a:r>
+              <a:rPr lang="en-US" sz="2200" dirty="0">
                 <a:solidFill>
                   <a:schemeClr val="accent1"/>
                 </a:solidFill>
               </a:rPr>
-              <a:t>İlaç seçimi dönem içinde değişmiştir</a:t>
-            </a:r>
-            <a:endParaRPr lang="en-US" sz="2000" dirty="0"/>
-          </a:p>
-        </p:txBody>
-      </p:sp>
-      <p:sp>
-        <p:nvSpPr>
-          <p:cNvPr id="19" name="Kaynak"/>
+              <a:t>Kılavuz önerileriyle uyumlu</a:t>
+            </a:r>
+            <a:pPr indent="0" marL="0">
+              <a:buNone/>
+            </a:pPr>
+            <a:r>
+              <a:rPr lang="en-US" sz="1800" dirty="0">
+                <a:solidFill>
+                  <a:schemeClr val="accent3"/>
+                </a:solidFill>
+              </a:rPr>
+              <a:t>  [12]</a:t>
+            </a:r>
+            <a:endParaRPr lang="en-US" sz="2200" dirty="0"/>
+          </a:p>
+        </p:txBody>
+      </p:sp>
+      <p:sp>
+        <p:nvSpPr>
+          <p:cNvPr id="16" name="Ikon zemini"/>
+          <p:cNvSpPr/>
+          <p:nvPr/>
+        </p:nvSpPr>
+        <p:spPr>
+          <a:xfrm>
+            <a:off x="548640" y="5065776"/>
+            <a:ext cx="868680" cy="868680"/>
+          </a:xfrm>
+          <a:prstGeom prst="ellipse">
+            <a:avLst/>
+          </a:prstGeom>
+          <a:solidFill>
+            <a:schemeClr val="accent1"/>
+          </a:solidFill>
+          <a:ln w="12700">
+            <a:solidFill>
+              <a:schemeClr val="accent1"/>
+            </a:solidFill>
+            <a:prstDash val="solid"/>
+          </a:ln>
+        </p:spPr>
+      </p:sp>
+      <p:pic>
+        <p:nvPicPr>
+          <p:cNvPr id="17" name="Ikon" descr="FaBookMedical">    </p:cNvPr>
+          <p:cNvPicPr>
+            <a:picLocks noChangeAspect="1"/>
+          </p:cNvPicPr>
+          <p:nvPr/>
+        </p:nvPicPr>
+        <p:blipFill>
+          <a:blip r:embed="rId4"/>
+          <a:stretch>
+            <a:fillRect/>
+          </a:stretch>
+        </p:blipFill>
+        <p:spPr>
+          <a:xfrm>
+            <a:off x="774497" y="5291633"/>
+            <a:ext cx="416966" cy="416966"/>
+          </a:xfrm>
+          <a:prstGeom prst="rect">
+            <a:avLst/>
+          </a:prstGeom>
+        </p:spPr>
+      </p:pic>
+      <p:sp>
+        <p:nvSpPr>
+          <p:cNvPr id="18" name="Text 11"/>
+          <p:cNvSpPr txBox="1"/>
+          <p:nvPr/>
+        </p:nvSpPr>
+        <p:spPr>
+          <a:xfrm>
+            <a:off x="1691640" y="4992624"/>
+            <a:ext cx="3200400" cy="1005840"/>
+          </a:xfrm>
+          <a:prstGeom prst="rect">
+            <a:avLst/>
+          </a:prstGeom>
+          <a:noFill/>
+          <a:ln/>
+        </p:spPr>
+        <p:txBody>
+          <a:bodyPr wrap="square" lIns="0" tIns="0" rIns="0" bIns="0" rtlCol="0" anchor="ctr"/>
+          <a:lstStyle/>
+          <a:p>
+            <a:pPr indent="0" marL="0">
+              <a:buNone/>
+            </a:pPr>
+            <a:r>
+              <a:rPr lang="en-US" sz="2600" b="1" dirty="0">
+                <a:solidFill>
+                  <a:schemeClr val="accent1"/>
+                </a:solidFill>
+              </a:rPr>
+              <a:t>Benli ve ark.</a:t>
+            </a:r>
+            <a:endParaRPr lang="en-US" sz="2600" dirty="0"/>
+          </a:p>
+        </p:txBody>
+      </p:sp>
+      <p:sp>
+        <p:nvSpPr>
+          <p:cNvPr id="19" name="Text 12"/>
+          <p:cNvSpPr txBox="1"/>
+          <p:nvPr/>
+        </p:nvSpPr>
+        <p:spPr>
+          <a:xfrm>
+            <a:off x="4937760" y="4992624"/>
+            <a:ext cx="6675120" cy="1005840"/>
+          </a:xfrm>
+          <a:prstGeom prst="rect">
+            <a:avLst/>
+          </a:prstGeom>
+          <a:noFill/>
+          <a:ln/>
+        </p:spPr>
+        <p:txBody>
+          <a:bodyPr wrap="square" lIns="0" tIns="0" rIns="0" bIns="0" rtlCol="0" anchor="ctr"/>
+          <a:lstStyle/>
+          <a:p>
+            <a:pPr indent="0" marL="0">
+              <a:buNone/>
+            </a:pPr>
+            <a:r>
+              <a:rPr lang="en-US" sz="2200" dirty="0">
+                <a:solidFill>
+                  <a:schemeClr val="accent1"/>
+                </a:solidFill>
+              </a:rPr>
+              <a:t>Vareniklin ilk 6 ayda daha etkili</a:t>
+            </a:r>
+            <a:pPr indent="0" marL="0">
+              <a:buNone/>
+            </a:pPr>
+            <a:r>
+              <a:rPr lang="en-US" sz="1800" dirty="0">
+                <a:solidFill>
+                  <a:schemeClr val="accent3"/>
+                </a:solidFill>
+              </a:rPr>
+              <a:t>  [13]</a:t>
+            </a:r>
+            <a:endParaRPr lang="en-US" sz="2200" dirty="0"/>
+          </a:p>
+        </p:txBody>
+      </p:sp>
+      <p:sp>
+        <p:nvSpPr>
+          <p:cNvPr id="20" name="Kaynak"/>
           <p:cNvSpPr txBox="1"/>
           <p:nvPr/>
         </p:nvSpPr>
@@ -12717,7 +11102,7 @@
                   <a:schemeClr val="accent3"/>
                 </a:solidFill>
               </a:rPr>
-              <a:t>Kaynak: Cenberlitaş E, Gökçe A, Öztürk O. Turk J Fam Pract. 2026;30(2):97-106.</a:t>
+              <a:t>Kaynak: 1, 8–13</a:t>
             </a:r>
             <a:endParaRPr lang="en-US" sz="1200" dirty="0"/>
           </a:p>
@@ -12825,7 +11210,7 @@
                   <a:schemeClr val="accent1"/>
                 </a:solidFill>
               </a:rPr>
-              <a:t>Eleştirel değerlendirme: yöntem</a:t>
+              <a:t>Tartışma: başarıyı etkileyen faktörler</a:t>
             </a:r>
             <a:endParaRPr lang="en-US" sz="3600" dirty="0"/>
           </a:p>
@@ -12833,41 +11218,14 @@
       </p:sp>
       <p:sp>
         <p:nvSpPr>
-          <p:cNvPr id="4" name="Kart"/>
+          <p:cNvPr id="4" name="Ikon zemini"/>
           <p:cNvSpPr/>
           <p:nvPr/>
         </p:nvSpPr>
         <p:spPr>
           <a:xfrm>
-            <a:off x="548640" y="1371600"/>
-            <a:ext cx="5440680" cy="4572000"/>
-          </a:xfrm>
-          <a:prstGeom prst="roundRect">
-            <a:avLst>
-              <a:gd name="adj" fmla="val 2400"/>
-            </a:avLst>
-          </a:prstGeom>
-          <a:solidFill>
-            <a:schemeClr val="bg2"/>
-          </a:solidFill>
-          <a:ln w="12700">
-            <a:solidFill>
-              <a:schemeClr val="bg2"/>
-            </a:solidFill>
-            <a:prstDash val="solid"/>
-          </a:ln>
-        </p:spPr>
-      </p:sp>
-      <p:sp>
-        <p:nvSpPr>
-          <p:cNvPr id="5" name="Ikon zemini"/>
-          <p:cNvSpPr/>
-          <p:nvPr/>
-        </p:nvSpPr>
-        <p:spPr>
-          <a:xfrm>
-            <a:off x="822960" y="1572768"/>
-            <a:ext cx="822960" cy="822960"/>
+            <a:off x="548640" y="1444752"/>
+            <a:ext cx="868680" cy="868680"/>
           </a:xfrm>
           <a:prstGeom prst="ellipse">
             <a:avLst/>
@@ -12885,7 +11243,7 @@
       </p:sp>
       <p:pic>
         <p:nvPicPr>
-          <p:cNvPr id="6" name="Ikon" descr="FaCheck">    </p:cNvPr>
+          <p:cNvPr id="5" name="Ikon" descr="FaComments">    </p:cNvPr>
           <p:cNvPicPr>
             <a:picLocks noChangeAspect="1"/>
           </p:cNvPicPr>
@@ -12899,14 +11257,50 @@
         </p:blipFill>
         <p:spPr>
           <a:xfrm>
-            <a:off x="1036930" y="1786738"/>
-            <a:ext cx="395021" cy="395021"/>
+            <a:off x="774497" y="1670609"/>
+            <a:ext cx="416966" cy="416966"/>
           </a:xfrm>
           <a:prstGeom prst="rect">
             <a:avLst/>
           </a:prstGeom>
         </p:spPr>
       </p:pic>
+      <p:sp>
+        <p:nvSpPr>
+          <p:cNvPr id="6" name="Text 2"/>
+          <p:cNvSpPr txBox="1"/>
+          <p:nvPr/>
+        </p:nvSpPr>
+        <p:spPr>
+          <a:xfrm>
+            <a:off x="1691640" y="1371600"/>
+            <a:ext cx="3200400" cy="1005840"/>
+          </a:xfrm>
+          <a:prstGeom prst="rect">
+            <a:avLst/>
+          </a:prstGeom>
+          <a:noFill/>
+          <a:ln/>
+        </p:spPr>
+        <p:txBody>
+          <a:bodyPr wrap="square" lIns="0" tIns="0" rIns="0" bIns="0" rtlCol="0" anchor="ctr"/>
+          <a:lstStyle/>
+          <a:p>
+            <a:pPr indent="0" marL="0">
+              <a:buNone/>
+            </a:pPr>
+            <a:r>
+              <a:rPr lang="en-US" sz="2600" b="1" dirty="0">
+                <a:solidFill>
+                  <a:schemeClr val="accent1"/>
+                </a:solidFill>
+              </a:rPr>
+              <a:t>Davranışsal destek</a:t>
+            </a:r>
+            <a:endParaRPr lang="en-US" sz="2600" dirty="0"/>
+          </a:p>
+        </p:txBody>
+      </p:sp>
       <p:sp>
         <p:nvSpPr>
           <p:cNvPr id="7" name="Text 3"/>
@@ -12915,8 +11309,8 @@
         </p:nvSpPr>
         <p:spPr>
           <a:xfrm>
-            <a:off x="1828800" y="1572768"/>
-            <a:ext cx="4023360" cy="822960"/>
+            <a:off x="4937760" y="1371600"/>
+            <a:ext cx="6675120" cy="1005840"/>
           </a:xfrm>
           <a:prstGeom prst="rect">
             <a:avLst/>
@@ -12932,148 +11326,27 @@
               <a:buNone/>
             </a:pPr>
             <a:r>
-              <a:rPr lang="en-US" sz="2800" b="1" dirty="0">
-                <a:solidFill>
-                  <a:schemeClr val="accent2"/>
-                </a:solidFill>
-              </a:rPr>
-              <a:t>Güçlü yönler</a:t>
-            </a:r>
-            <a:endParaRPr lang="en-US" sz="2800" dirty="0"/>
-          </a:p>
-        </p:txBody>
-      </p:sp>
-      <p:sp>
-        <p:nvSpPr>
-          <p:cNvPr id="8" name="Text 4"/>
-          <p:cNvSpPr txBox="1"/>
-          <p:nvPr/>
-        </p:nvSpPr>
-        <p:spPr>
-          <a:xfrm>
-            <a:off x="914400" y="2651760"/>
-            <a:ext cx="4846320" cy="3154680"/>
-          </a:xfrm>
-          <a:prstGeom prst="rect">
-            <a:avLst/>
-          </a:prstGeom>
-          <a:noFill/>
-          <a:ln/>
-        </p:spPr>
-        <p:txBody>
-          <a:bodyPr wrap="square" lIns="0" tIns="0" rIns="0" bIns="0" rtlCol="0" anchor="t"/>
-          <a:lstStyle/>
-          <a:p>
-            <a:pPr algn="just" marL="279400" indent="-279400">
-              <a:spcAft>
-                <a:spcPts val="1400"/>
-              </a:spcAft>
-              <a:buSzPct val="100000"/>
-              <a:buChar char="•"/>
-            </a:pPr>
-            <a:r>
               <a:rPr lang="en-US" sz="2200" dirty="0">
                 <a:solidFill>
                   <a:schemeClr val="accent1"/>
                 </a:solidFill>
               </a:rPr>
-              <a:t>Gerçek yaşam verisi</a:t>
+              <a:t>Görüşme sayısı arttıkça başarı artmaktadır</a:t>
             </a:r>
             <a:endParaRPr lang="en-US" sz="2200" dirty="0"/>
           </a:p>
-          <a:p>
-            <a:pPr algn="just" marL="279400" indent="-279400">
-              <a:spcAft>
-                <a:spcPts val="1400"/>
-              </a:spcAft>
-              <a:buSzPct val="100000"/>
-              <a:buChar char="•"/>
-            </a:pPr>
-            <a:r>
-              <a:rPr lang="en-US" sz="2200" dirty="0">
-                <a:solidFill>
-                  <a:schemeClr val="accent1"/>
-                </a:solidFill>
-              </a:rPr>
-              <a:t>Beş tedavi seçeneği bir arada</a:t>
-            </a:r>
-            <a:endParaRPr lang="en-US" sz="2200" dirty="0"/>
-          </a:p>
-          <a:p>
-            <a:pPr algn="just" marL="279400" indent="-279400">
-              <a:spcAft>
-                <a:spcPts val="1400"/>
-              </a:spcAft>
-              <a:buSzPct val="100000"/>
-              <a:buChar char="•"/>
-            </a:pPr>
-            <a:r>
-              <a:rPr lang="en-US" sz="2200" dirty="0">
-                <a:solidFill>
-                  <a:schemeClr val="accent1"/>
-                </a:solidFill>
-              </a:rPr>
-              <a:t>Sitizin ile güncel veri</a:t>
-            </a:r>
-            <a:endParaRPr lang="en-US" sz="2200" dirty="0"/>
-          </a:p>
-          <a:p>
-            <a:pPr algn="just" marL="279400" indent="-279400">
-              <a:spcAft>
-                <a:spcPts val="1400"/>
-              </a:spcAft>
-              <a:buSzPct val="100000"/>
-              <a:buChar char="•"/>
-            </a:pPr>
-            <a:r>
-              <a:rPr lang="en-US" sz="2200" dirty="0">
-                <a:solidFill>
-                  <a:schemeClr val="accent1"/>
-                </a:solidFill>
-              </a:rPr>
-              <a:t>Bir yıllık takip</a:t>
-            </a:r>
-            <a:endParaRPr lang="en-US" sz="2200" dirty="0"/>
-          </a:p>
-        </p:txBody>
-      </p:sp>
-      <p:sp>
-        <p:nvSpPr>
-          <p:cNvPr id="9" name="Kart"/>
+        </p:txBody>
+      </p:sp>
+      <p:sp>
+        <p:nvSpPr>
+          <p:cNvPr id="8" name="Ikon zemini"/>
           <p:cNvSpPr/>
           <p:nvPr/>
         </p:nvSpPr>
         <p:spPr>
           <a:xfrm>
-            <a:off x="6172200" y="1371600"/>
-            <a:ext cx="5440680" cy="4572000"/>
-          </a:xfrm>
-          <a:prstGeom prst="roundRect">
-            <a:avLst>
-              <a:gd name="adj" fmla="val 2400"/>
-            </a:avLst>
-          </a:prstGeom>
-          <a:solidFill>
-            <a:schemeClr val="bg2"/>
-          </a:solidFill>
-          <a:ln w="12700">
-            <a:solidFill>
-              <a:schemeClr val="bg2"/>
-            </a:solidFill>
-            <a:prstDash val="solid"/>
-          </a:ln>
-        </p:spPr>
-      </p:sp>
-      <p:sp>
-        <p:nvSpPr>
-          <p:cNvPr id="10" name="Ikon zemini"/>
-          <p:cNvSpPr/>
-          <p:nvPr/>
-        </p:nvSpPr>
-        <p:spPr>
-          <a:xfrm>
-            <a:off x="6446520" y="1572768"/>
-            <a:ext cx="822960" cy="822960"/>
+            <a:off x="548640" y="2651760"/>
+            <a:ext cx="868680" cy="868680"/>
           </a:xfrm>
           <a:prstGeom prst="ellipse">
             <a:avLst/>
@@ -13091,7 +11364,7 @@
       </p:sp>
       <p:pic>
         <p:nvPicPr>
-          <p:cNvPr id="11" name="Ikon" descr="FaLightbulb">    </p:cNvPr>
+          <p:cNvPr id="9" name="Ikon" descr="FaHome">    </p:cNvPr>
           <p:cNvPicPr>
             <a:picLocks noChangeAspect="1"/>
           </p:cNvPicPr>
@@ -13105,8 +11378,8 @@
         </p:blipFill>
         <p:spPr>
           <a:xfrm>
-            <a:off x="6660490" y="1786738"/>
-            <a:ext cx="395021" cy="395021"/>
+            <a:off x="774497" y="2877617"/>
+            <a:ext cx="416966" cy="416966"/>
           </a:xfrm>
           <a:prstGeom prst="rect">
             <a:avLst/>
@@ -13115,14 +11388,14 @@
       </p:pic>
       <p:sp>
         <p:nvSpPr>
-          <p:cNvPr id="12" name="Text 7"/>
+          <p:cNvPr id="10" name="Text 5"/>
           <p:cNvSpPr txBox="1"/>
           <p:nvPr/>
         </p:nvSpPr>
         <p:spPr>
           <a:xfrm>
-            <a:off x="7452360" y="1572768"/>
-            <a:ext cx="4023360" cy="822960"/>
+            <a:off x="1691640" y="2578608"/>
+            <a:ext cx="3200400" cy="1005840"/>
           </a:xfrm>
           <a:prstGeom prst="rect">
             <a:avLst/>
@@ -13138,44 +11411,40 @@
               <a:buNone/>
             </a:pPr>
             <a:r>
-              <a:rPr lang="en-US" sz="2800" b="1" dirty="0">
+              <a:rPr lang="en-US" sz="2600" b="1" dirty="0">
                 <a:solidFill>
                   <a:schemeClr val="accent1"/>
                 </a:solidFill>
               </a:rPr>
-              <a:t>Geliştirilebilir yönler</a:t>
-            </a:r>
-            <a:endParaRPr lang="en-US" sz="2800" dirty="0"/>
-          </a:p>
-        </p:txBody>
-      </p:sp>
-      <p:sp>
-        <p:nvSpPr>
-          <p:cNvPr id="13" name="Text 8"/>
+              <a:t>Hane ortamı</a:t>
+            </a:r>
+            <a:endParaRPr lang="en-US" sz="2600" dirty="0"/>
+          </a:p>
+        </p:txBody>
+      </p:sp>
+      <p:sp>
+        <p:nvSpPr>
+          <p:cNvPr id="11" name="Text 6"/>
           <p:cNvSpPr txBox="1"/>
           <p:nvPr/>
         </p:nvSpPr>
         <p:spPr>
           <a:xfrm>
-            <a:off x="6537960" y="2651760"/>
-            <a:ext cx="4846320" cy="3154680"/>
-          </a:xfrm>
-          <a:prstGeom prst="rect">
-            <a:avLst/>
-          </a:prstGeom>
-          <a:noFill/>
-          <a:ln/>
-        </p:spPr>
-        <p:txBody>
-          <a:bodyPr wrap="square" lIns="0" tIns="0" rIns="0" bIns="0" rtlCol="0" anchor="t"/>
-          <a:lstStyle/>
-          <a:p>
-            <a:pPr algn="just" marL="279400" indent="-279400">
-              <a:spcAft>
-                <a:spcPts val="1400"/>
-              </a:spcAft>
-              <a:buSzPct val="100000"/>
-              <a:buChar char="•"/>
+            <a:off x="4937760" y="2578608"/>
+            <a:ext cx="6675120" cy="1005840"/>
+          </a:xfrm>
+          <a:prstGeom prst="rect">
+            <a:avLst/>
+          </a:prstGeom>
+          <a:noFill/>
+          <a:ln/>
+        </p:spPr>
+        <p:txBody>
+          <a:bodyPr wrap="square" lIns="0" tIns="0" rIns="0" bIns="0" rtlCol="0" anchor="ctr"/>
+          <a:lstStyle/>
+          <a:p>
+            <a:pPr indent="0" marL="0">
+              <a:buNone/>
             </a:pPr>
             <a:r>
               <a:rPr lang="en-US" sz="2200" dirty="0">
@@ -13183,17 +11452,131 @@
                   <a:schemeClr val="accent1"/>
                 </a:solidFill>
               </a:rPr>
-              <a:t>Randomizasyon yok: seçim yanlılığı</a:t>
+              <a:t>Evde sigara içilmemesi olasılığı ikiye katlamaktadır</a:t>
+            </a:r>
+            <a:pPr indent="0" marL="0">
+              <a:buNone/>
+            </a:pPr>
+            <a:r>
+              <a:rPr lang="en-US" sz="1800" dirty="0">
+                <a:solidFill>
+                  <a:schemeClr val="accent3"/>
+                </a:solidFill>
+              </a:rPr>
+              <a:t>  [14]</a:t>
             </a:r>
             <a:endParaRPr lang="en-US" sz="2200" dirty="0"/>
           </a:p>
-          <a:p>
-            <a:pPr algn="just" marL="279400" indent="-279400">
-              <a:spcAft>
-                <a:spcPts val="1400"/>
-              </a:spcAft>
-              <a:buSzPct val="100000"/>
-              <a:buChar char="•"/>
+        </p:txBody>
+      </p:sp>
+      <p:sp>
+        <p:nvSpPr>
+          <p:cNvPr id="12" name="Ikon zemini"/>
+          <p:cNvSpPr/>
+          <p:nvPr/>
+        </p:nvSpPr>
+        <p:spPr>
+          <a:xfrm>
+            <a:off x="548640" y="3858768"/>
+            <a:ext cx="868680" cy="868680"/>
+          </a:xfrm>
+          <a:prstGeom prst="ellipse">
+            <a:avLst/>
+          </a:prstGeom>
+          <a:solidFill>
+            <a:schemeClr val="accent2"/>
+          </a:solidFill>
+          <a:ln w="12700">
+            <a:solidFill>
+              <a:schemeClr val="accent2"/>
+            </a:solidFill>
+            <a:prstDash val="solid"/>
+          </a:ln>
+        </p:spPr>
+      </p:sp>
+      <p:pic>
+        <p:nvPicPr>
+          <p:cNvPr id="13" name="Ikon" descr="FaClipboardList">    </p:cNvPr>
+          <p:cNvPicPr>
+            <a:picLocks noChangeAspect="1"/>
+          </p:cNvPicPr>
+          <p:nvPr/>
+        </p:nvPicPr>
+        <p:blipFill>
+          <a:blip r:embed="rId3"/>
+          <a:stretch>
+            <a:fillRect/>
+          </a:stretch>
+        </p:blipFill>
+        <p:spPr>
+          <a:xfrm>
+            <a:off x="774497" y="4084625"/>
+            <a:ext cx="416966" cy="416966"/>
+          </a:xfrm>
+          <a:prstGeom prst="rect">
+            <a:avLst/>
+          </a:prstGeom>
+        </p:spPr>
+      </p:pic>
+      <p:sp>
+        <p:nvSpPr>
+          <p:cNvPr id="14" name="Text 8"/>
+          <p:cNvSpPr txBox="1"/>
+          <p:nvPr/>
+        </p:nvSpPr>
+        <p:spPr>
+          <a:xfrm>
+            <a:off x="1691640" y="3785616"/>
+            <a:ext cx="3200400" cy="1005840"/>
+          </a:xfrm>
+          <a:prstGeom prst="rect">
+            <a:avLst/>
+          </a:prstGeom>
+          <a:noFill/>
+          <a:ln/>
+        </p:spPr>
+        <p:txBody>
+          <a:bodyPr wrap="square" lIns="0" tIns="0" rIns="0" bIns="0" rtlCol="0" anchor="ctr"/>
+          <a:lstStyle/>
+          <a:p>
+            <a:pPr indent="0" marL="0">
+              <a:buNone/>
+            </a:pPr>
+            <a:r>
+              <a:rPr lang="en-US" sz="2600" b="1" dirty="0">
+                <a:solidFill>
+                  <a:schemeClr val="accent1"/>
+                </a:solidFill>
+              </a:rPr>
+              <a:t>Bağımlılık düzeyi</a:t>
+            </a:r>
+            <a:endParaRPr lang="en-US" sz="2600" dirty="0"/>
+          </a:p>
+        </p:txBody>
+      </p:sp>
+      <p:sp>
+        <p:nvSpPr>
+          <p:cNvPr id="15" name="Text 9"/>
+          <p:cNvSpPr txBox="1"/>
+          <p:nvPr/>
+        </p:nvSpPr>
+        <p:spPr>
+          <a:xfrm>
+            <a:off x="4937760" y="3785616"/>
+            <a:ext cx="6675120" cy="1005840"/>
+          </a:xfrm>
+          <a:prstGeom prst="rect">
+            <a:avLst/>
+          </a:prstGeom>
+          <a:noFill/>
+          <a:ln/>
+        </p:spPr>
+        <p:txBody>
+          <a:bodyPr wrap="square" lIns="0" tIns="0" rIns="0" bIns="0" rtlCol="0" anchor="ctr"/>
+          <a:lstStyle/>
+          <a:p>
+            <a:pPr indent="0" marL="0">
+              <a:buNone/>
             </a:pPr>
             <a:r>
               <a:rPr lang="en-US" sz="2200" dirty="0">
@@ -13201,17 +11584,131 @@
                   <a:schemeClr val="accent1"/>
                 </a:solidFill>
               </a:rPr>
-              <a:t>Bırakma biyokimyasal doğrulanmamış</a:t>
+              <a:t>Yüksek FNBT puanı düşük başarıyla ilişkilidir</a:t>
+            </a:r>
+            <a:pPr indent="0" marL="0">
+              <a:buNone/>
+            </a:pPr>
+            <a:r>
+              <a:rPr lang="en-US" sz="1800" dirty="0">
+                <a:solidFill>
+                  <a:schemeClr val="accent3"/>
+                </a:solidFill>
+              </a:rPr>
+              <a:t>  [15]</a:t>
             </a:r>
             <a:endParaRPr lang="en-US" sz="2200" dirty="0"/>
           </a:p>
-          <a:p>
-            <a:pPr algn="just" marL="279400" indent="-279400">
-              <a:spcAft>
-                <a:spcPts val="1400"/>
-              </a:spcAft>
-              <a:buSzPct val="100000"/>
-              <a:buChar char="•"/>
+        </p:txBody>
+      </p:sp>
+      <p:sp>
+        <p:nvSpPr>
+          <p:cNvPr id="16" name="Ikon zemini"/>
+          <p:cNvSpPr/>
+          <p:nvPr/>
+        </p:nvSpPr>
+        <p:spPr>
+          <a:xfrm>
+            <a:off x="548640" y="5065776"/>
+            <a:ext cx="868680" cy="868680"/>
+          </a:xfrm>
+          <a:prstGeom prst="ellipse">
+            <a:avLst/>
+          </a:prstGeom>
+          <a:solidFill>
+            <a:schemeClr val="accent1"/>
+          </a:solidFill>
+          <a:ln w="12700">
+            <a:solidFill>
+              <a:schemeClr val="accent1"/>
+            </a:solidFill>
+            <a:prstDash val="solid"/>
+          </a:ln>
+        </p:spPr>
+      </p:sp>
+      <p:pic>
+        <p:nvPicPr>
+          <p:cNvPr id="17" name="Ikon" descr="FaLightbulb">    </p:cNvPr>
+          <p:cNvPicPr>
+            <a:picLocks noChangeAspect="1"/>
+          </p:cNvPicPr>
+          <p:nvPr/>
+        </p:nvPicPr>
+        <p:blipFill>
+          <a:blip r:embed="rId4"/>
+          <a:stretch>
+            <a:fillRect/>
+          </a:stretch>
+        </p:blipFill>
+        <p:spPr>
+          <a:xfrm>
+            <a:off x="774497" y="5291633"/>
+            <a:ext cx="416966" cy="416966"/>
+          </a:xfrm>
+          <a:prstGeom prst="rect">
+            <a:avLst/>
+          </a:prstGeom>
+        </p:spPr>
+      </p:pic>
+      <p:sp>
+        <p:nvSpPr>
+          <p:cNvPr id="18" name="Text 11"/>
+          <p:cNvSpPr txBox="1"/>
+          <p:nvPr/>
+        </p:nvSpPr>
+        <p:spPr>
+          <a:xfrm>
+            <a:off x="1691640" y="4992624"/>
+            <a:ext cx="3200400" cy="1005840"/>
+          </a:xfrm>
+          <a:prstGeom prst="rect">
+            <a:avLst/>
+          </a:prstGeom>
+          <a:noFill/>
+          <a:ln/>
+        </p:spPr>
+        <p:txBody>
+          <a:bodyPr wrap="square" lIns="0" tIns="0" rIns="0" bIns="0" rtlCol="0" anchor="ctr"/>
+          <a:lstStyle/>
+          <a:p>
+            <a:pPr indent="0" marL="0">
+              <a:buNone/>
+            </a:pPr>
+            <a:r>
+              <a:rPr lang="en-US" sz="2600" b="1" dirty="0">
+                <a:solidFill>
+                  <a:schemeClr val="accent1"/>
+                </a:solidFill>
+              </a:rPr>
+              <a:t>İçsel motivasyon</a:t>
+            </a:r>
+            <a:endParaRPr lang="en-US" sz="2600" dirty="0"/>
+          </a:p>
+        </p:txBody>
+      </p:sp>
+      <p:sp>
+        <p:nvSpPr>
+          <p:cNvPr id="19" name="Text 12"/>
+          <p:cNvSpPr txBox="1"/>
+          <p:nvPr/>
+        </p:nvSpPr>
+        <p:spPr>
+          <a:xfrm>
+            <a:off x="4937760" y="4992624"/>
+            <a:ext cx="6675120" cy="1005840"/>
+          </a:xfrm>
+          <a:prstGeom prst="rect">
+            <a:avLst/>
+          </a:prstGeom>
+          <a:noFill/>
+          <a:ln/>
+        </p:spPr>
+        <p:txBody>
+          <a:bodyPr wrap="square" lIns="0" tIns="0" rIns="0" bIns="0" rtlCol="0" anchor="ctr"/>
+          <a:lstStyle/>
+          <a:p>
+            <a:pPr indent="0" marL="0">
+              <a:buNone/>
             </a:pPr>
             <a:r>
               <a:rPr lang="en-US" sz="2200" dirty="0">
@@ -13219,33 +11716,26 @@
                   <a:schemeClr val="accent1"/>
                 </a:solidFill>
               </a:rPr>
-              <a:t>İlaç ücretinin etkisi incelenmemiş</a:t>
+              <a:t>Yakınması olmayanlarda başarı daha yüksektir</a:t>
+            </a:r>
+            <a:pPr indent="0" marL="0">
+              <a:buNone/>
+            </a:pPr>
+            <a:r>
+              <a:rPr lang="en-US" sz="1800" dirty="0">
+                <a:solidFill>
+                  <a:schemeClr val="accent3"/>
+                </a:solidFill>
+              </a:rPr>
+              <a:t>  [16]</a:t>
             </a:r>
             <a:endParaRPr lang="en-US" sz="2200" dirty="0"/>
           </a:p>
-          <a:p>
-            <a:pPr algn="just" marL="279400" indent="-279400">
-              <a:spcAft>
-                <a:spcPts val="1400"/>
-              </a:spcAft>
-              <a:buSzPct val="100000"/>
-              <a:buChar char="•"/>
-            </a:pPr>
-            <a:r>
-              <a:rPr lang="en-US" sz="2200" dirty="0">
-                <a:solidFill>
-                  <a:schemeClr val="accent1"/>
-                </a:solidFill>
-              </a:rPr>
-              <a:t>Tasarım retrospektif kohorta daha yakın</a:t>
-            </a:r>
-            <a:endParaRPr lang="en-US" sz="2200" dirty="0"/>
-          </a:p>
-        </p:txBody>
-      </p:sp>
-      <p:sp>
-        <p:nvSpPr>
-          <p:cNvPr id="14" name="Kaynak"/>
+        </p:txBody>
+      </p:sp>
+      <p:sp>
+        <p:nvSpPr>
+          <p:cNvPr id="20" name="Kaynak"/>
           <p:cNvSpPr txBox="1"/>
           <p:nvPr/>
         </p:nvSpPr>
@@ -13273,7 +11763,7 @@
                   <a:schemeClr val="accent3"/>
                 </a:solidFill>
               </a:rPr>
-              <a:t>Kaynak: Cenberlitaş E, Gökçe A, Öztürk O. Turk J Fam Pract. 2026;30(2):97-106.</a:t>
+              <a:t>Kaynak: 1, 14–16</a:t>
             </a:r>
             <a:endParaRPr lang="en-US" sz="1200" dirty="0"/>
           </a:p>
@@ -13381,7 +11871,7 @@
                   <a:schemeClr val="accent1"/>
                 </a:solidFill>
               </a:rPr>
-              <a:t>Eleştirel değerlendirme: raporlama</a:t>
+              <a:t>Kısıtlılıklar ve güçlü yönler</a:t>
             </a:r>
             <a:endParaRPr lang="en-US" sz="3600" dirty="0"/>
           </a:p>
@@ -13389,14 +11879,229 @@
       </p:sp>
       <p:sp>
         <p:nvSpPr>
-          <p:cNvPr id="4" name="Ikon zemini"/>
+          <p:cNvPr id="4" name="Kart"/>
           <p:cNvSpPr/>
           <p:nvPr/>
         </p:nvSpPr>
         <p:spPr>
           <a:xfrm>
-            <a:off x="548640" y="1508760"/>
-            <a:ext cx="1371600" cy="1371600"/>
+            <a:off x="548640" y="1371600"/>
+            <a:ext cx="5440680" cy="4572000"/>
+          </a:xfrm>
+          <a:prstGeom prst="roundRect">
+            <a:avLst>
+              <a:gd name="adj" fmla="val 2400"/>
+            </a:avLst>
+          </a:prstGeom>
+          <a:solidFill>
+            <a:schemeClr val="bg2"/>
+          </a:solidFill>
+          <a:ln w="12700">
+            <a:solidFill>
+              <a:schemeClr val="bg2"/>
+            </a:solidFill>
+            <a:prstDash val="solid"/>
+          </a:ln>
+        </p:spPr>
+      </p:sp>
+      <p:sp>
+        <p:nvSpPr>
+          <p:cNvPr id="5" name="Ikon zemini"/>
+          <p:cNvSpPr/>
+          <p:nvPr/>
+        </p:nvSpPr>
+        <p:spPr>
+          <a:xfrm>
+            <a:off x="822960" y="1572768"/>
+            <a:ext cx="822960" cy="822960"/>
+          </a:xfrm>
+          <a:prstGeom prst="ellipse">
+            <a:avLst/>
+          </a:prstGeom>
+          <a:solidFill>
+            <a:schemeClr val="accent1"/>
+          </a:solidFill>
+          <a:ln w="12700">
+            <a:solidFill>
+              <a:schemeClr val="accent1"/>
+            </a:solidFill>
+            <a:prstDash val="solid"/>
+          </a:ln>
+        </p:spPr>
+      </p:sp>
+      <p:pic>
+        <p:nvPicPr>
+          <p:cNvPr id="6" name="Ikon" descr="FaExclamationCircle">    </p:cNvPr>
+          <p:cNvPicPr>
+            <a:picLocks noChangeAspect="1"/>
+          </p:cNvPicPr>
+          <p:nvPr/>
+        </p:nvPicPr>
+        <p:blipFill>
+          <a:blip r:embed="rId1"/>
+          <a:stretch>
+            <a:fillRect/>
+          </a:stretch>
+        </p:blipFill>
+        <p:spPr>
+          <a:xfrm>
+            <a:off x="1036930" y="1786738"/>
+            <a:ext cx="395021" cy="395021"/>
+          </a:xfrm>
+          <a:prstGeom prst="rect">
+            <a:avLst/>
+          </a:prstGeom>
+        </p:spPr>
+      </p:pic>
+      <p:sp>
+        <p:nvSpPr>
+          <p:cNvPr id="7" name="Text 3"/>
+          <p:cNvSpPr txBox="1"/>
+          <p:nvPr/>
+        </p:nvSpPr>
+        <p:spPr>
+          <a:xfrm>
+            <a:off x="1828800" y="1572768"/>
+            <a:ext cx="4023360" cy="822960"/>
+          </a:xfrm>
+          <a:prstGeom prst="rect">
+            <a:avLst/>
+          </a:prstGeom>
+          <a:noFill/>
+          <a:ln/>
+        </p:spPr>
+        <p:txBody>
+          <a:bodyPr wrap="square" lIns="0" tIns="0" rIns="0" bIns="0" rtlCol="0" anchor="ctr"/>
+          <a:lstStyle/>
+          <a:p>
+            <a:pPr indent="0" marL="0">
+              <a:buNone/>
+            </a:pPr>
+            <a:r>
+              <a:rPr lang="en-US" sz="2800" b="1" dirty="0">
+                <a:solidFill>
+                  <a:schemeClr val="accent1"/>
+                </a:solidFill>
+              </a:rPr>
+              <a:t>Kısıtlılıklar</a:t>
+            </a:r>
+            <a:endParaRPr lang="en-US" sz="2800" dirty="0"/>
+          </a:p>
+        </p:txBody>
+      </p:sp>
+      <p:sp>
+        <p:nvSpPr>
+          <p:cNvPr id="8" name="Text 4"/>
+          <p:cNvSpPr txBox="1"/>
+          <p:nvPr/>
+        </p:nvSpPr>
+        <p:spPr>
+          <a:xfrm>
+            <a:off x="914400" y="2651760"/>
+            <a:ext cx="4846320" cy="3154680"/>
+          </a:xfrm>
+          <a:prstGeom prst="rect">
+            <a:avLst/>
+          </a:prstGeom>
+          <a:noFill/>
+          <a:ln/>
+        </p:spPr>
+        <p:txBody>
+          <a:bodyPr wrap="square" lIns="0" tIns="0" rIns="0" bIns="0" rtlCol="0" anchor="t"/>
+          <a:lstStyle/>
+          <a:p>
+            <a:pPr algn="just" marL="279400" indent="-279400">
+              <a:spcAft>
+                <a:spcPts val="1400"/>
+              </a:spcAft>
+              <a:buSzPct val="100000"/>
+              <a:buChar char="•"/>
+            </a:pPr>
+            <a:r>
+              <a:rPr lang="en-US" sz="2200" dirty="0">
+                <a:solidFill>
+                  <a:schemeClr val="accent1"/>
+                </a:solidFill>
+              </a:rPr>
+              <a:t>Asistan rotasyonu</a:t>
+            </a:r>
+            <a:endParaRPr lang="en-US" sz="2200" dirty="0"/>
+          </a:p>
+          <a:p>
+            <a:pPr algn="just" marL="279400" indent="-279400">
+              <a:spcAft>
+                <a:spcPts val="1400"/>
+              </a:spcAft>
+              <a:buSzPct val="100000"/>
+              <a:buChar char="•"/>
+            </a:pPr>
+            <a:r>
+              <a:rPr lang="en-US" sz="2200" dirty="0">
+                <a:solidFill>
+                  <a:schemeClr val="accent1"/>
+                </a:solidFill>
+              </a:rPr>
+              <a:t>Telefonla tamamlanan veriler</a:t>
+            </a:r>
+            <a:endParaRPr lang="en-US" sz="2200" dirty="0"/>
+          </a:p>
+          <a:p>
+            <a:pPr algn="just" marL="279400" indent="-279400">
+              <a:spcAft>
+                <a:spcPts val="1400"/>
+              </a:spcAft>
+              <a:buSzPct val="100000"/>
+              <a:buChar char="•"/>
+            </a:pPr>
+            <a:r>
+              <a:rPr lang="en-US" sz="2200" dirty="0">
+                <a:solidFill>
+                  <a:schemeClr val="accent1"/>
+                </a:solidFill>
+              </a:rPr>
+              <a:t>Vareniklinin piyasadan çekilmesi</a:t>
+            </a:r>
+            <a:endParaRPr lang="en-US" sz="2200" dirty="0"/>
+          </a:p>
+        </p:txBody>
+      </p:sp>
+      <p:sp>
+        <p:nvSpPr>
+          <p:cNvPr id="9" name="Kart"/>
+          <p:cNvSpPr/>
+          <p:nvPr/>
+        </p:nvSpPr>
+        <p:spPr>
+          <a:xfrm>
+            <a:off x="6172200" y="1371600"/>
+            <a:ext cx="5440680" cy="4572000"/>
+          </a:xfrm>
+          <a:prstGeom prst="roundRect">
+            <a:avLst>
+              <a:gd name="adj" fmla="val 2400"/>
+            </a:avLst>
+          </a:prstGeom>
+          <a:solidFill>
+            <a:schemeClr val="bg2"/>
+          </a:solidFill>
+          <a:ln w="12700">
+            <a:solidFill>
+              <a:schemeClr val="bg2"/>
+            </a:solidFill>
+            <a:prstDash val="solid"/>
+          </a:ln>
+        </p:spPr>
+      </p:sp>
+      <p:sp>
+        <p:nvSpPr>
+          <p:cNvPr id="10" name="Ikon zemini"/>
+          <p:cNvSpPr/>
+          <p:nvPr/>
+        </p:nvSpPr>
+        <p:spPr>
+          <a:xfrm>
+            <a:off x="6446520" y="1572768"/>
+            <a:ext cx="822960" cy="822960"/>
           </a:xfrm>
           <a:prstGeom prst="ellipse">
             <a:avLst/>
@@ -13414,22 +12119,22 @@
       </p:sp>
       <p:pic>
         <p:nvPicPr>
-          <p:cNvPr id="5" name="Ikon" descr="FaSearch">    </p:cNvPr>
+          <p:cNvPr id="11" name="Ikon" descr="FaStar">    </p:cNvPr>
           <p:cNvPicPr>
             <a:picLocks noChangeAspect="1"/>
           </p:cNvPicPr>
           <p:nvPr/>
         </p:nvPicPr>
         <p:blipFill>
-          <a:blip r:embed="rId1"/>
+          <a:blip r:embed="rId2"/>
           <a:stretch>
             <a:fillRect/>
           </a:stretch>
         </p:blipFill>
         <p:spPr>
           <a:xfrm>
-            <a:off x="905256" y="1865376"/>
-            <a:ext cx="658368" cy="658368"/>
+            <a:off x="6660490" y="1786738"/>
+            <a:ext cx="395021" cy="395021"/>
           </a:xfrm>
           <a:prstGeom prst="rect">
             <a:avLst/>
@@ -13438,14 +12143,50 @@
       </p:pic>
       <p:sp>
         <p:nvSpPr>
-          <p:cNvPr id="6" name="Text 2"/>
+          <p:cNvPr id="12" name="Text 7"/>
           <p:cNvSpPr txBox="1"/>
           <p:nvPr/>
         </p:nvSpPr>
         <p:spPr>
           <a:xfrm>
-            <a:off x="2377440" y="1417320"/>
-            <a:ext cx="9235440" cy="4572000"/>
+            <a:off x="7452360" y="1572768"/>
+            <a:ext cx="4023360" cy="822960"/>
+          </a:xfrm>
+          <a:prstGeom prst="rect">
+            <a:avLst/>
+          </a:prstGeom>
+          <a:noFill/>
+          <a:ln/>
+        </p:spPr>
+        <p:txBody>
+          <a:bodyPr wrap="square" lIns="0" tIns="0" rIns="0" bIns="0" rtlCol="0" anchor="ctr"/>
+          <a:lstStyle/>
+          <a:p>
+            <a:pPr indent="0" marL="0">
+              <a:buNone/>
+            </a:pPr>
+            <a:r>
+              <a:rPr lang="en-US" sz="2800" b="1" dirty="0">
+                <a:solidFill>
+                  <a:schemeClr val="accent2"/>
+                </a:solidFill>
+              </a:rPr>
+              <a:t>Güçlü yönler</a:t>
+            </a:r>
+            <a:endParaRPr lang="en-US" sz="2800" dirty="0"/>
+          </a:p>
+        </p:txBody>
+      </p:sp>
+      <p:sp>
+        <p:nvSpPr>
+          <p:cNvPr id="13" name="Text 8"/>
+          <p:cNvSpPr txBox="1"/>
+          <p:nvPr/>
+        </p:nvSpPr>
+        <p:spPr>
+          <a:xfrm>
+            <a:off x="6537960" y="2651760"/>
+            <a:ext cx="4846320" cy="3154680"/>
           </a:xfrm>
           <a:prstGeom prst="rect">
             <a:avLst/>
@@ -13459,116 +12200,44 @@
           <a:p>
             <a:pPr algn="just" marL="279400" indent="-279400">
               <a:spcAft>
-                <a:spcPts val="1200"/>
+                <a:spcPts val="1400"/>
               </a:spcAft>
               <a:buSzPct val="100000"/>
               <a:buChar char="•"/>
             </a:pPr>
             <a:r>
-              <a:rPr lang="en-US" sz="2400" dirty="0">
+              <a:rPr lang="en-US" sz="2200" dirty="0">
                 <a:solidFill>
                   <a:schemeClr val="accent1"/>
                 </a:solidFill>
               </a:rPr>
-              <a:t>Bonferroni eşiği yorumda uygulanmamış</a:t>
-            </a:r>
-            <a:endParaRPr lang="en-US" sz="2400" dirty="0"/>
+              <a:t>Sitizin ile ilk erişilebilir tez çalışması</a:t>
+            </a:r>
+            <a:endParaRPr lang="en-US" sz="2200" dirty="0"/>
           </a:p>
           <a:p>
             <a:pPr algn="just" marL="279400" indent="-279400">
               <a:spcAft>
-                <a:spcPts val="1200"/>
+                <a:spcPts val="1400"/>
               </a:spcAft>
               <a:buSzPct val="100000"/>
               <a:buChar char="•"/>
             </a:pPr>
             <a:r>
-              <a:rPr lang="en-US" sz="2400" dirty="0">
+              <a:rPr lang="en-US" sz="2200" dirty="0">
                 <a:solidFill>
                   <a:schemeClr val="accent1"/>
                 </a:solidFill>
               </a:rPr>
-              <a:t>Kruskal–Wallis sonrası Duncan testi</a:t>
-            </a:r>
-            <a:endParaRPr lang="en-US" sz="2400" dirty="0"/>
-          </a:p>
-          <a:p>
-            <a:pPr algn="just" marL="279400" indent="-279400">
-              <a:spcAft>
-                <a:spcPts val="1200"/>
-              </a:spcAft>
-              <a:buSzPct val="100000"/>
-              <a:buChar char="•"/>
-            </a:pPr>
-            <a:r>
-              <a:rPr lang="en-US" sz="2400" dirty="0">
-                <a:solidFill>
-                  <a:schemeClr val="accent1"/>
-                </a:solidFill>
-              </a:rPr>
-              <a:t>Paydalar tutarsız: 432 ve 399</a:t>
-            </a:r>
-            <a:endParaRPr lang="en-US" sz="2400" dirty="0"/>
-          </a:p>
-          <a:p>
-            <a:pPr algn="just" marL="279400" indent="-279400">
-              <a:spcAft>
-                <a:spcPts val="1200"/>
-              </a:spcAft>
-              <a:buSzPct val="100000"/>
-              <a:buChar char="•"/>
-            </a:pPr>
-            <a:r>
-              <a:rPr lang="en-US" sz="2400" dirty="0">
-                <a:solidFill>
-                  <a:schemeClr val="accent1"/>
-                </a:solidFill>
-              </a:rPr>
-              <a:t>Özet ile tablolar arasında farklılıklar</a:t>
-            </a:r>
-            <a:endParaRPr lang="en-US" sz="2400" dirty="0"/>
-          </a:p>
-          <a:p>
-            <a:pPr algn="just" marL="279400" indent="-279400">
-              <a:spcAft>
-                <a:spcPts val="1200"/>
-              </a:spcAft>
-              <a:buSzPct val="100000"/>
-              <a:buChar char="•"/>
-            </a:pPr>
-            <a:r>
-              <a:rPr lang="en-US" sz="2400" dirty="0">
-                <a:solidFill>
-                  <a:schemeClr val="accent1"/>
-                </a:solidFill>
-              </a:rPr>
-              <a:t>Dışlama ölçütü bulgularla çelişkili</a:t>
-            </a:r>
-            <a:endParaRPr lang="en-US" sz="2400" dirty="0"/>
-          </a:p>
-          <a:p>
-            <a:pPr algn="just" marL="279400" indent="-279400">
-              <a:spcAft>
-                <a:spcPts val="1200"/>
-              </a:spcAft>
-              <a:buSzPct val="100000"/>
-              <a:buChar char="•"/>
-            </a:pPr>
-            <a:r>
-              <a:rPr lang="en-US" sz="2400" dirty="0">
-                <a:solidFill>
-                  <a:schemeClr val="accent1"/>
-                </a:solidFill>
-              </a:rPr>
-              <a:t>Tablo 4 ve 6'da basım hataları</a:t>
-            </a:r>
-            <a:endParaRPr lang="en-US" sz="2400" dirty="0"/>
-          </a:p>
-        </p:txBody>
-      </p:sp>
-      <p:sp>
-        <p:nvSpPr>
-          <p:cNvPr id="7" name="Kaynak"/>
+              <a:t>Birçok tedavi seçeneğini kapsaması</a:t>
+            </a:r>
+            <a:endParaRPr lang="en-US" sz="2200" dirty="0"/>
+          </a:p>
+        </p:txBody>
+      </p:sp>
+      <p:sp>
+        <p:nvSpPr>
+          <p:cNvPr id="14" name="Kaynak"/>
           <p:cNvSpPr txBox="1"/>
           <p:nvPr/>
         </p:nvSpPr>
@@ -13704,7 +12373,7 @@
                   <a:schemeClr val="accent1"/>
                 </a:solidFill>
               </a:rPr>
-              <a:t>Yazarların sonucu</a:t>
+              <a:t>Sonuç ve öneriler</a:t>
             </a:r>
             <a:endParaRPr lang="en-US" sz="3600" dirty="0"/>
           </a:p>
@@ -14768,7 +13437,7 @@
                   <a:schemeClr val="accent1"/>
                 </a:solidFill>
               </a:rPr>
-              <a:t>Bupropion tek başına en zayıf seçenektir</a:t>
+              <a:t>Hastaların üçte biri sigarayı bırakmıştır</a:t>
             </a:r>
             <a:endParaRPr lang="en-US" sz="2600" dirty="0"/>
           </a:p>
@@ -14853,7 +13522,7 @@
                   <a:schemeClr val="accent1"/>
                 </a:solidFill>
               </a:rPr>
-              <a:t>Kombine tedavi ve NRT en güvenilir sonucu vermiştir</a:t>
+              <a:t>Kombine tedavide başarı daha yüksektir</a:t>
             </a:r>
             <a:endParaRPr lang="en-US" sz="2600" dirty="0"/>
           </a:p>
@@ -14938,7 +13607,7 @@
                   <a:schemeClr val="accent1"/>
                 </a:solidFill>
               </a:rPr>
-              <a:t>Hanede sigara içen sorgulanmalıdır</a:t>
+              <a:t>En düşük başarı bupropion monoterapisindedir</a:t>
             </a:r>
             <a:endParaRPr lang="en-US" sz="2600" dirty="0"/>
           </a:p>
@@ -15023,7 +13692,7 @@
                   <a:schemeClr val="accent1"/>
                 </a:solidFill>
               </a:rPr>
-              <a:t>Sık takip başarıyla ilişkilidir</a:t>
+              <a:t>Hanede sigara içen sorgulanmalıdır</a:t>
             </a:r>
             <a:endParaRPr lang="en-US" sz="2600" dirty="0"/>
           </a:p>
@@ -15044,11 +13713,11 @@
             <a:avLst/>
           </a:prstGeom>
           <a:solidFill>
-            <a:schemeClr val="accent1"/>
+            <a:schemeClr val="accent2"/>
           </a:solidFill>
           <a:ln w="12700">
             <a:solidFill>
-              <a:schemeClr val="accent1"/>
+              <a:schemeClr val="accent2"/>
             </a:solidFill>
             <a:prstDash val="solid"/>
           </a:ln>
@@ -15103,12 +13772,12 @@
               <a:buNone/>
             </a:pPr>
             <a:r>
-              <a:rPr lang="en-US" sz="2600" b="1" dirty="0">
+              <a:rPr lang="en-US" sz="2600" dirty="0">
                 <a:solidFill>
                   <a:schemeClr val="accent1"/>
                 </a:solidFill>
               </a:rPr>
-              <a:t>Sonuçlar dikkatli yorumlanmalıdır</a:t>
+              <a:t>Sık takip başarıyla ilişkilidir</a:t>
             </a:r>
             <a:endParaRPr lang="en-US" sz="2600" dirty="0"/>
           </a:p>
@@ -15260,14 +13929,14 @@
       </p:sp>
       <p:sp>
         <p:nvSpPr>
-          <p:cNvPr id="4" name="Kaynaklar 1-7"/>
+          <p:cNvPr id="4" name="Kaynaklar 1-8"/>
           <p:cNvSpPr txBox="1"/>
           <p:nvPr/>
         </p:nvSpPr>
         <p:spPr>
           <a:xfrm>
-            <a:off x="548640" y="1280160"/>
-            <a:ext cx="5440680" cy="4983480"/>
+            <a:off x="548640" y="1234440"/>
+            <a:ext cx="5440680" cy="5074920"/>
           </a:xfrm>
           <a:prstGeom prst="rect">
             <a:avLst/>
@@ -15281,271 +13950,328 @@
           <a:p>
             <a:pPr algn="just" marL="342900" indent="-342900">
               <a:spcAft>
-                <a:spcPts val="500"/>
+                <a:spcPts val="400"/>
               </a:spcAft>
               <a:buSzPct val="100000"/>
               <a:buFont typeface="+mj-lt"/>
               <a:buAutoNum type="arabicPeriod" startAt="1"/>
             </a:pPr>
             <a:r>
-              <a:rPr lang="en-US" sz="1200" dirty="0">
+              <a:rPr lang="en-US" sz="1100" dirty="0">
                 <a:solidFill>
                   <a:schemeClr val="accent1"/>
                 </a:solidFill>
               </a:rPr>
               <a:t>Cenberlitaş E, Gökçe A, Öztürk O. Demographic and clinical characteristics of patients applying to a smoking cessation clinic affiliated with a university hospital and factors affecting their smoking cessation status. Turk J Fam Pract. 2026;30(2):97-106.</a:t>
             </a:r>
-            <a:endParaRPr lang="en-US" sz="1200" dirty="0"/>
+            <a:endParaRPr lang="en-US" sz="1100" dirty="0"/>
           </a:p>
           <a:p>
             <a:pPr algn="just" marL="342900" indent="-342900">
               <a:spcAft>
-                <a:spcPts val="500"/>
+                <a:spcPts val="400"/>
               </a:spcAft>
               <a:buSzPct val="100000"/>
               <a:buFont typeface="+mj-lt"/>
               <a:buAutoNum type="arabicPeriod" startAt="1"/>
             </a:pPr>
             <a:r>
-              <a:rPr lang="en-US" sz="1200" dirty="0">
+              <a:rPr lang="en-US" sz="1100" dirty="0">
                 <a:solidFill>
                   <a:schemeClr val="accent1"/>
                 </a:solidFill>
               </a:rPr>
               <a:t>Summers AD, Sirin H, Palipudi K, Erguder T, Ciobanu A, Ahluwalia IB. Changes in prevalence and predictors of tobacco smoking and interest in smoking cessation in Turkey: evidence from the Global Adult Tobacco Survey, 2008-2016. Tob Prev Cessat. 2022;8:35.</a:t>
             </a:r>
-            <a:endParaRPr lang="en-US" sz="1200" dirty="0"/>
+            <a:endParaRPr lang="en-US" sz="1100" dirty="0"/>
           </a:p>
           <a:p>
             <a:pPr algn="just" marL="342900" indent="-342900">
               <a:spcAft>
-                <a:spcPts val="500"/>
+                <a:spcPts val="400"/>
               </a:spcAft>
               <a:buSzPct val="100000"/>
               <a:buFont typeface="+mj-lt"/>
               <a:buAutoNum type="arabicPeriod" startAt="1"/>
             </a:pPr>
             <a:r>
-              <a:rPr lang="en-US" sz="1200" dirty="0">
+              <a:rPr lang="en-US" sz="1100" dirty="0">
                 <a:solidFill>
                   <a:schemeClr val="accent1"/>
                 </a:solidFill>
               </a:rPr>
               <a:t>Sigarayı bırakma polikliniklerinden 2,5 milyon kişi hizmet aldı [İnternet]. Anadolu Ajansı. Erişim: 25.09.2025. https://www.aa.com.tr/tr/saglik/sigarayi-birakma-polikliniklerinden-2-5-milyon-kisi-hizmet-aldi/1533870</a:t>
             </a:r>
-            <a:endParaRPr lang="en-US" sz="1200" dirty="0"/>
+            <a:endParaRPr lang="en-US" sz="1100" dirty="0"/>
           </a:p>
           <a:p>
             <a:pPr algn="just" marL="342900" indent="-342900">
               <a:spcAft>
-                <a:spcPts val="500"/>
+                <a:spcPts val="400"/>
               </a:spcAft>
               <a:buSzPct val="100000"/>
               <a:buFont typeface="+mj-lt"/>
               <a:buAutoNum type="arabicPeriod" startAt="1"/>
             </a:pPr>
             <a:r>
-              <a:rPr lang="en-US" sz="1200" dirty="0">
+              <a:rPr lang="en-US" sz="1100" dirty="0">
                 <a:solidFill>
                   <a:schemeClr val="accent1"/>
                 </a:solidFill>
               </a:rPr>
               <a:t>Fidanci I, Ozturk O, Unal M. Transtheoretic Model in smoking cessation. J Exp Clin Med. 2017;34(1):9-13.</a:t>
             </a:r>
-            <a:endParaRPr lang="en-US" sz="1200" dirty="0"/>
+            <a:endParaRPr lang="en-US" sz="1100" dirty="0"/>
           </a:p>
           <a:p>
             <a:pPr algn="just" marL="342900" indent="-342900">
               <a:spcAft>
-                <a:spcPts val="500"/>
+                <a:spcPts val="400"/>
               </a:spcAft>
               <a:buSzPct val="100000"/>
               <a:buFont typeface="+mj-lt"/>
               <a:buAutoNum type="arabicPeriod" startAt="1"/>
             </a:pPr>
             <a:r>
-              <a:rPr lang="en-US" sz="1200" dirty="0">
+              <a:rPr lang="en-US" sz="1100" dirty="0">
                 <a:solidFill>
                   <a:schemeClr val="accent1"/>
                 </a:solidFill>
               </a:rPr>
               <a:t>McDonough M. Update on medicines for smoking cessation. Aust Prescr. 2015;38(4):106-11.</a:t>
             </a:r>
-            <a:endParaRPr lang="en-US" sz="1200" dirty="0"/>
+            <a:endParaRPr lang="en-US" sz="1100" dirty="0"/>
           </a:p>
           <a:p>
             <a:pPr algn="just" marL="342900" indent="-342900">
               <a:spcAft>
-                <a:spcPts val="500"/>
+                <a:spcPts val="400"/>
               </a:spcAft>
               <a:buSzPct val="100000"/>
               <a:buFont typeface="+mj-lt"/>
               <a:buAutoNum type="arabicPeriod" startAt="1"/>
             </a:pPr>
             <a:r>
-              <a:rPr lang="en-US" sz="1200" dirty="0">
+              <a:rPr lang="en-US" sz="1100" dirty="0">
                 <a:solidFill>
                   <a:schemeClr val="accent1"/>
                 </a:solidFill>
               </a:rPr>
               <a:t>Heatherton TF, Kozlowski LT, Frecker RC, Fagerström KO. The Fagerström test for nicotine dependence: a revision of the Fagerström Tolerance Questionnaire. Br J Addict. 1991;86(9):1119-27.</a:t>
             </a:r>
-            <a:endParaRPr lang="en-US" sz="1200" dirty="0"/>
+            <a:endParaRPr lang="en-US" sz="1100" dirty="0"/>
           </a:p>
           <a:p>
             <a:pPr algn="just" marL="342900" indent="-342900">
               <a:spcAft>
-                <a:spcPts val="500"/>
+                <a:spcPts val="400"/>
               </a:spcAft>
               <a:buSzPct val="100000"/>
               <a:buFont typeface="+mj-lt"/>
               <a:buAutoNum type="arabicPeriod" startAt="1"/>
             </a:pPr>
             <a:r>
-              <a:rPr lang="en-US" sz="1200" dirty="0">
+              <a:rPr lang="en-US" sz="1100" dirty="0">
                 <a:solidFill>
                   <a:schemeClr val="accent1"/>
                 </a:solidFill>
               </a:rPr>
               <a:t>Uysal M, Kadakal F, Karşıdağ Ç, Bayram N, Uysal O, Yilmaz V. Fagerström test for nicotine dependence: reliability in a Turkish sample and factor analysis. Tuberk Toraks. 2004;52(2):175-82.</a:t>
             </a:r>
-            <a:endParaRPr lang="en-US" sz="1200" dirty="0"/>
-          </a:p>
-        </p:txBody>
-      </p:sp>
-      <p:sp>
-        <p:nvSpPr>
-          <p:cNvPr id="5" name="Kaynaklar 8-13"/>
-          <p:cNvSpPr txBox="1"/>
-          <p:nvPr/>
-        </p:nvSpPr>
-        <p:spPr>
-          <a:xfrm>
-            <a:off x="6263640" y="1280160"/>
-            <a:ext cx="5349240" cy="4983480"/>
-          </a:xfrm>
-          <a:prstGeom prst="rect">
-            <a:avLst/>
-          </a:prstGeom>
-          <a:noFill/>
-          <a:ln/>
-        </p:spPr>
-        <p:txBody>
-          <a:bodyPr wrap="square" lIns="0" tIns="0" rIns="0" bIns="0" rtlCol="0" anchor="t"/>
-          <a:lstStyle/>
+            <a:endParaRPr lang="en-US" sz="1100" dirty="0"/>
+          </a:p>
           <a:p>
             <a:pPr algn="just" marL="342900" indent="-342900">
               <a:spcAft>
-                <a:spcPts val="500"/>
+                <a:spcPts val="400"/>
               </a:spcAft>
               <a:buSzPct val="100000"/>
               <a:buFont typeface="+mj-lt"/>
-              <a:buAutoNum type="arabicPeriod" startAt="8"/>
-            </a:pPr>
-            <a:r>
-              <a:rPr lang="en-US" sz="1200" dirty="0">
+              <a:buAutoNum type="arabicPeriod" startAt="1"/>
+            </a:pPr>
+            <a:r>
+              <a:rPr lang="en-US" sz="1100" dirty="0">
                 <a:solidFill>
                   <a:schemeClr val="accent1"/>
                 </a:solidFill>
               </a:rPr>
               <a:t>Cahill K, Stevens S, Perera R, Lancaster T. Pharmacological interventions for smoking cessation: an overview and network meta-analysis. Cochrane Database Syst Rev. 2013;(5):CD009329.</a:t>
             </a:r>
-            <a:endParaRPr lang="en-US" sz="1200" dirty="0"/>
-          </a:p>
+            <a:endParaRPr lang="en-US" sz="1100" dirty="0"/>
+          </a:p>
+        </p:txBody>
+      </p:sp>
+      <p:sp>
+        <p:nvSpPr>
+          <p:cNvPr id="5" name="Kaynaklar 9-16"/>
+          <p:cNvSpPr txBox="1"/>
+          <p:nvPr/>
+        </p:nvSpPr>
+        <p:spPr>
+          <a:xfrm>
+            <a:off x="6263640" y="1234440"/>
+            <a:ext cx="5349240" cy="5074920"/>
+          </a:xfrm>
+          <a:prstGeom prst="rect">
+            <a:avLst/>
+          </a:prstGeom>
+          <a:noFill/>
+          <a:ln/>
+        </p:spPr>
+        <p:txBody>
+          <a:bodyPr wrap="square" lIns="0" tIns="0" rIns="0" bIns="0" rtlCol="0" anchor="t"/>
+          <a:lstStyle/>
           <a:p>
             <a:pPr algn="just" marL="342900" indent="-342900">
               <a:spcAft>
-                <a:spcPts val="500"/>
+                <a:spcPts val="400"/>
               </a:spcAft>
               <a:buSzPct val="100000"/>
               <a:buFont typeface="+mj-lt"/>
-              <a:buAutoNum type="arabicPeriod" startAt="8"/>
-            </a:pPr>
-            <a:r>
-              <a:rPr lang="en-US" sz="1200" dirty="0">
+              <a:buAutoNum type="arabicPeriod" startAt="9"/>
+            </a:pPr>
+            <a:r>
+              <a:rPr lang="en-US" sz="1100" dirty="0">
                 <a:solidFill>
                   <a:schemeClr val="accent1"/>
                 </a:solidFill>
               </a:rPr>
               <a:t>Anthenelli RM, Benowitz NL, West R, et al. Neuropsychiatric safety and efficacy of varenicline, bupropion, and nicotine patch in smokers with and without psychiatric disorders (EAGLES). Lancet. 2016;387(10037):2507-20.</a:t>
             </a:r>
-            <a:endParaRPr lang="en-US" sz="1200" dirty="0"/>
+            <a:endParaRPr lang="en-US" sz="1100" dirty="0"/>
           </a:p>
           <a:p>
             <a:pPr algn="just" marL="342900" indent="-342900">
               <a:spcAft>
-                <a:spcPts val="500"/>
+                <a:spcPts val="400"/>
               </a:spcAft>
               <a:buSzPct val="100000"/>
               <a:buFont typeface="+mj-lt"/>
-              <a:buAutoNum type="arabicPeriod" startAt="8"/>
-            </a:pPr>
-            <a:r>
-              <a:rPr lang="en-US" sz="1200" dirty="0">
+              <a:buAutoNum type="arabicPeriod" startAt="9"/>
+            </a:pPr>
+            <a:r>
+              <a:rPr lang="en-US" sz="1100" dirty="0">
                 <a:solidFill>
                   <a:schemeClr val="accent1"/>
                 </a:solidFill>
               </a:rPr>
               <a:t>Walker N, Howe C, Glover M, et al. Cytisine versus nicotine for smoking cessation. N Engl J Med. 2014;371(25):2353-62.</a:t>
             </a:r>
-            <a:endParaRPr lang="en-US" sz="1200" dirty="0"/>
+            <a:endParaRPr lang="en-US" sz="1100" dirty="0"/>
           </a:p>
           <a:p>
             <a:pPr algn="just" marL="342900" indent="-342900">
               <a:spcAft>
-                <a:spcPts val="500"/>
+                <a:spcPts val="400"/>
               </a:spcAft>
               <a:buSzPct val="100000"/>
               <a:buFont typeface="+mj-lt"/>
-              <a:buAutoNum type="arabicPeriod" startAt="8"/>
-            </a:pPr>
-            <a:r>
-              <a:rPr lang="en-US" sz="1200" dirty="0">
+              <a:buAutoNum type="arabicPeriod" startAt="9"/>
+            </a:pPr>
+            <a:r>
+              <a:rPr lang="en-US" sz="1100" dirty="0">
                 <a:solidFill>
                   <a:schemeClr val="accent1"/>
                 </a:solidFill>
               </a:rPr>
               <a:t>Courtney RJ, McRobbie H, Tutka P, et al. Effect of cytisine vs varenicline on smoking cessation: a randomized clinical trial. JAMA. 2021;326(1):56-64.</a:t>
             </a:r>
-            <a:endParaRPr lang="en-US" sz="1200" dirty="0"/>
+            <a:endParaRPr lang="en-US" sz="1100" dirty="0"/>
           </a:p>
           <a:p>
             <a:pPr algn="just" marL="342900" indent="-342900">
               <a:spcAft>
-                <a:spcPts val="500"/>
+                <a:spcPts val="400"/>
               </a:spcAft>
               <a:buSzPct val="100000"/>
               <a:buFont typeface="+mj-lt"/>
-              <a:buAutoNum type="arabicPeriod" startAt="8"/>
-            </a:pPr>
-            <a:r>
-              <a:rPr lang="en-US" sz="1200" dirty="0">
+              <a:buAutoNum type="arabicPeriod" startAt="9"/>
+            </a:pPr>
+            <a:r>
+              <a:rPr lang="en-US" sz="1100" dirty="0">
                 <a:solidFill>
                   <a:schemeClr val="accent1"/>
                 </a:solidFill>
               </a:rPr>
               <a:t>Koegelenberg CFN, Noor F, Bateman ED, et al. Efficacy of varenicline combined with nicotine replacement therapy vs varenicline alone for smoking cessation: a randomized clinical trial. JAMA. 2014;312(2):155-61.</a:t>
             </a:r>
-            <a:endParaRPr lang="en-US" sz="1200" dirty="0"/>
+            <a:endParaRPr lang="en-US" sz="1100" dirty="0"/>
           </a:p>
           <a:p>
             <a:pPr algn="just" marL="342900" indent="-342900">
               <a:spcAft>
-                <a:spcPts val="500"/>
+                <a:spcPts val="400"/>
               </a:spcAft>
               <a:buSzPct val="100000"/>
               <a:buFont typeface="+mj-lt"/>
-              <a:buAutoNum type="arabicPeriod" startAt="8"/>
-            </a:pPr>
-            <a:r>
-              <a:rPr lang="en-US" sz="1200" dirty="0">
+              <a:buAutoNum type="arabicPeriod" startAt="9"/>
+            </a:pPr>
+            <a:r>
+              <a:rPr lang="en-US" sz="1100" dirty="0">
                 <a:solidFill>
                   <a:schemeClr val="accent1"/>
                 </a:solidFill>
               </a:rPr>
+              <a:t>Benli AR, Erturhan S, Oruc MA, Kalpakci P, Sunay D, Demirel Y. A comparison of the efficacy of varenicline and bupropion and an evaluation of the effect of the medications in the context of the smoking cessation programme. Tob Induc Dis. 2017;15:10.</a:t>
+            </a:r>
+            <a:endParaRPr lang="en-US" sz="1100" dirty="0"/>
+          </a:p>
+          <a:p>
+            <a:pPr algn="just" marL="342900" indent="-342900">
+              <a:spcAft>
+                <a:spcPts val="400"/>
+              </a:spcAft>
+              <a:buSzPct val="100000"/>
+              <a:buFont typeface="+mj-lt"/>
+              <a:buAutoNum type="arabicPeriod" startAt="9"/>
+            </a:pPr>
+            <a:r>
+              <a:rPr lang="en-US" sz="1100" dirty="0">
+                <a:solidFill>
+                  <a:schemeClr val="accent1"/>
+                </a:solidFill>
+              </a:rPr>
               <a:t>Park EW, Schultz JK, Tudiver F, Campbell T, Becker L. Enhancing partner support to improve smoking cessation. Cochrane Database Syst Rev. 2004;(3):CD002928.</a:t>
             </a:r>
-            <a:endParaRPr lang="en-US" sz="1200" dirty="0"/>
+            <a:endParaRPr lang="en-US" sz="1100" dirty="0"/>
+          </a:p>
+          <a:p>
+            <a:pPr algn="just" marL="342900" indent="-342900">
+              <a:spcAft>
+                <a:spcPts val="400"/>
+              </a:spcAft>
+              <a:buSzPct val="100000"/>
+              <a:buFont typeface="+mj-lt"/>
+              <a:buAutoNum type="arabicPeriod" startAt="9"/>
+            </a:pPr>
+            <a:r>
+              <a:rPr lang="en-US" sz="1100" dirty="0">
+                <a:solidFill>
+                  <a:schemeClr val="accent1"/>
+                </a:solidFill>
+              </a:rPr>
+              <a:t>Davis JM, Masclans L, Rose JE. Adaptive smoking cessation using precessation varenicline or nicotine patch: a randomized clinical trial. JAMA Netw Open. 2023;6(9):e2332214.</a:t>
+            </a:r>
+            <a:endParaRPr lang="en-US" sz="1100" dirty="0"/>
+          </a:p>
+          <a:p>
+            <a:pPr algn="just" marL="342900" indent="-342900">
+              <a:spcAft>
+                <a:spcPts val="400"/>
+              </a:spcAft>
+              <a:buSzPct val="100000"/>
+              <a:buFont typeface="+mj-lt"/>
+              <a:buAutoNum type="arabicPeriod" startAt="9"/>
+            </a:pPr>
+            <a:r>
+              <a:rPr lang="en-US" sz="1100" dirty="0">
+                <a:solidFill>
+                  <a:schemeClr val="accent1"/>
+                </a:solidFill>
+              </a:rPr>
+              <a:t>Curry S, Wagner EH, Grothaus LC. Intrinsic and extrinsic motivation for smoking cessation. J Consult Clin Psychol. 1990;58(3):310-6.</a:t>
+            </a:r>
+            <a:endParaRPr lang="en-US" sz="1100" dirty="0"/>
           </a:p>
         </p:txBody>
       </p:sp>
@@ -16043,7 +14769,7 @@
                   <a:schemeClr val="accent3"/>
                 </a:solidFill>
               </a:rPr>
-              <a:t>Gerçek yaşam verisiyle</a:t>
+              <a:t>Makalenin bulgularıyla</a:t>
             </a:r>
             <a:endParaRPr lang="en-US" sz="2200" dirty="0"/>
           </a:p>
@@ -16197,7 +14923,7 @@
       </p:sp>
       <p:pic>
         <p:nvPicPr>
-          <p:cNvPr id="13" name="Ikon" descr="FaSearch">    </p:cNvPr>
+          <p:cNvPr id="13" name="Ikon" descr="FaUserMd">    </p:cNvPr>
           <p:cNvPicPr>
             <a:picLocks noChangeAspect="1"/>
           </p:cNvPicPr>
@@ -16249,7 +14975,7 @@
                   <a:schemeClr val="accent1"/>
                 </a:solidFill>
               </a:rPr>
-              <a:t>Makaleyi eleştirel değerlendirmek</a:t>
+              <a:t>Bulguları klinik pratiğe aktarmak</a:t>
             </a:r>
             <a:endParaRPr lang="en-US" sz="2800" dirty="0"/>
           </a:p>
@@ -16285,7 +15011,7 @@
                   <a:schemeClr val="accent3"/>
                 </a:solidFill>
               </a:rPr>
-              <a:t>Yöntem ve raporlama açısından</a:t>
+              <a:t>Olgu üzerinden tartışma</a:t>
             </a:r>
             <a:endParaRPr lang="en-US" sz="2200" dirty="0"/>
           </a:p>
@@ -18469,6 +17195,9 @@
           </a:p>
           <a:p>
             <a:pPr algn="just" marL="279400" indent="-279400">
+              <a:spcAft>
+                <a:spcPts val="1800"/>
+              </a:spcAft>
               <a:buSzPct val="100000"/>
               <a:buChar char="•"/>
             </a:pPr>
@@ -18731,93 +17460,7 @@
       </p:pic>
       <p:sp>
         <p:nvSpPr>
-          <p:cNvPr id="7" name="Dışlanan"/>
-          <p:cNvSpPr/>
-          <p:nvPr/>
-        </p:nvSpPr>
-        <p:spPr>
-          <a:xfrm>
-            <a:off x="4663440" y="2807208"/>
-            <a:ext cx="2103120" cy="685800"/>
-          </a:xfrm>
-          <a:prstGeom prst="roundRect">
-            <a:avLst>
-              <a:gd name="adj" fmla="val 13333"/>
-            </a:avLst>
-          </a:prstGeom>
-          <a:solidFill>
-            <a:schemeClr val="bg1"/>
-          </a:solidFill>
-          <a:ln w="15875">
-            <a:solidFill>
-              <a:schemeClr val="accent3"/>
-            </a:solidFill>
-            <a:prstDash val="dash"/>
-          </a:ln>
-        </p:spPr>
-      </p:sp>
-      <p:sp>
-        <p:nvSpPr>
-          <p:cNvPr id="8" name="Text 4"/>
-          <p:cNvSpPr txBox="1"/>
-          <p:nvPr/>
-        </p:nvSpPr>
-        <p:spPr>
-          <a:xfrm>
-            <a:off x="4663440" y="2807208"/>
-            <a:ext cx="2103120" cy="685800"/>
-          </a:xfrm>
-          <a:prstGeom prst="rect">
-            <a:avLst/>
-          </a:prstGeom>
-          <a:noFill/>
-          <a:ln/>
-        </p:spPr>
-        <p:txBody>
-          <a:bodyPr wrap="square" lIns="0" tIns="0" rIns="0" bIns="0" rtlCol="0" anchor="ctr"/>
-          <a:lstStyle/>
-          <a:p>
-            <a:pPr algn="ctr" indent="0" marL="0">
-              <a:buNone/>
-            </a:pPr>
-            <a:r>
-              <a:rPr lang="en-US" sz="2000" dirty="0">
-                <a:solidFill>
-                  <a:schemeClr val="accent3"/>
-                </a:solidFill>
-              </a:rPr>
-              <a:t>33 dosya eksik</a:t>
-            </a:r>
-            <a:endParaRPr lang="en-US" sz="2000" dirty="0"/>
-          </a:p>
-        </p:txBody>
-      </p:sp>
-      <p:sp>
-        <p:nvSpPr>
-          <p:cNvPr id="9" name="Bağlantı"/>
-          <p:cNvSpPr/>
-          <p:nvPr/>
-        </p:nvSpPr>
-        <p:spPr>
-          <a:xfrm>
-            <a:off x="2468880" y="3154680"/>
-            <a:ext cx="2194560" cy="0"/>
-          </a:xfrm>
-          <a:prstGeom prst="line">
-            <a:avLst/>
-          </a:prstGeom>
-          <a:noFill/>
-          <a:ln w="15875">
-            <a:solidFill>
-              <a:schemeClr val="accent3"/>
-            </a:solidFill>
-            <a:prstDash val="dash"/>
-          </a:ln>
-        </p:spPr>
-      </p:sp>
-      <p:sp>
-        <p:nvSpPr>
-          <p:cNvPr id="10" name="Akış kutusu"/>
+          <p:cNvPr id="7" name="Akış kutusu"/>
           <p:cNvSpPr/>
           <p:nvPr/>
         </p:nvSpPr>
@@ -18844,7 +17487,7 @@
       </p:sp>
       <p:sp>
         <p:nvSpPr>
-          <p:cNvPr id="11" name="Text 7"/>
+          <p:cNvPr id="8" name="Text 4"/>
           <p:cNvSpPr txBox="1"/>
           <p:nvPr/>
         </p:nvSpPr>
@@ -18886,7 +17529,7 @@
                   <a:schemeClr val="bg1"/>
                 </a:solidFill>
               </a:rPr>
-              <a:t>hasta analize alındı</a:t>
+              <a:t>hastanın verisi eksiksiz</a:t>
             </a:r>
             <a:endParaRPr lang="en-US" sz="3600" dirty="0"/>
           </a:p>
@@ -18894,13 +17537,13 @@
       </p:sp>
       <p:sp>
         <p:nvSpPr>
-          <p:cNvPr id="12" name="Ikon zemini"/>
+          <p:cNvPr id="9" name="Ikon zemini"/>
           <p:cNvSpPr/>
           <p:nvPr/>
         </p:nvSpPr>
         <p:spPr>
           <a:xfrm>
-            <a:off x="7132320" y="1463040"/>
+            <a:off x="5669280" y="1463040"/>
             <a:ext cx="731520" cy="731520"/>
           </a:xfrm>
           <a:prstGeom prst="ellipse">
@@ -18919,7 +17562,7 @@
       </p:sp>
       <p:pic>
         <p:nvPicPr>
-          <p:cNvPr id="13" name="Ikon" descr="FaCalendarAlt">    </p:cNvPr>
+          <p:cNvPr id="10" name="Ikon" descr="FaCalendarAlt">    </p:cNvPr>
           <p:cNvPicPr>
             <a:picLocks noChangeAspect="1"/>
           </p:cNvPicPr>
@@ -18933,7 +17576,7 @@
         </p:blipFill>
         <p:spPr>
           <a:xfrm>
-            <a:off x="7322515" y="1653235"/>
+            <a:off x="5859475" y="1653235"/>
             <a:ext cx="351130" cy="351130"/>
           </a:xfrm>
           <a:prstGeom prst="rect">
@@ -18943,14 +17586,14 @@
       </p:pic>
       <p:sp>
         <p:nvSpPr>
-          <p:cNvPr id="14" name="Text 9"/>
+          <p:cNvPr id="11" name="Text 6"/>
           <p:cNvSpPr txBox="1"/>
           <p:nvPr/>
         </p:nvSpPr>
         <p:spPr>
           <a:xfrm>
-            <a:off x="8092440" y="1463040"/>
-            <a:ext cx="3566160" cy="731520"/>
+            <a:off x="6629400" y="1463040"/>
+            <a:ext cx="4937760" cy="731520"/>
           </a:xfrm>
           <a:prstGeom prst="rect">
             <a:avLst/>
@@ -18979,13 +17622,13 @@
       </p:sp>
       <p:sp>
         <p:nvSpPr>
-          <p:cNvPr id="15" name="Ikon zemini"/>
+          <p:cNvPr id="12" name="Ikon zemini"/>
           <p:cNvSpPr/>
           <p:nvPr/>
         </p:nvSpPr>
         <p:spPr>
           <a:xfrm>
-            <a:off x="7132320" y="2487168"/>
+            <a:off x="5669280" y="2487168"/>
             <a:ext cx="731520" cy="731520"/>
           </a:xfrm>
           <a:prstGeom prst="ellipse">
@@ -19004,7 +17647,7 @@
       </p:sp>
       <p:pic>
         <p:nvPicPr>
-          <p:cNvPr id="16" name="Ikon" descr="FaFileMedical">    </p:cNvPr>
+          <p:cNvPr id="13" name="Ikon" descr="FaFileMedical">    </p:cNvPr>
           <p:cNvPicPr>
             <a:picLocks noChangeAspect="1"/>
           </p:cNvPicPr>
@@ -19018,7 +17661,7 @@
         </p:blipFill>
         <p:spPr>
           <a:xfrm>
-            <a:off x="7322515" y="2677363"/>
+            <a:off x="5859475" y="2677363"/>
             <a:ext cx="351130" cy="351130"/>
           </a:xfrm>
           <a:prstGeom prst="rect">
@@ -19028,14 +17671,14 @@
       </p:pic>
       <p:sp>
         <p:nvSpPr>
-          <p:cNvPr id="17" name="Text 11"/>
+          <p:cNvPr id="14" name="Text 8"/>
           <p:cNvSpPr txBox="1"/>
           <p:nvPr/>
         </p:nvSpPr>
         <p:spPr>
           <a:xfrm>
-            <a:off x="8092440" y="2487168"/>
-            <a:ext cx="3566160" cy="731520"/>
+            <a:off x="6629400" y="2487168"/>
+            <a:ext cx="4937760" cy="731520"/>
           </a:xfrm>
           <a:prstGeom prst="rect">
             <a:avLst/>
@@ -19064,13 +17707,13 @@
       </p:sp>
       <p:sp>
         <p:nvSpPr>
-          <p:cNvPr id="18" name="Ikon zemini"/>
+          <p:cNvPr id="15" name="Ikon zemini"/>
           <p:cNvSpPr/>
           <p:nvPr/>
         </p:nvSpPr>
         <p:spPr>
           <a:xfrm>
-            <a:off x="7132320" y="3511296"/>
+            <a:off x="5669280" y="3511296"/>
             <a:ext cx="731520" cy="731520"/>
           </a:xfrm>
           <a:prstGeom prst="ellipse">
@@ -19089,7 +17732,7 @@
       </p:sp>
       <p:pic>
         <p:nvPicPr>
-          <p:cNvPr id="19" name="Ikon" descr="FaClipboardList">    </p:cNvPr>
+          <p:cNvPr id="16" name="Ikon" descr="FaClipboardList">    </p:cNvPr>
           <p:cNvPicPr>
             <a:picLocks noChangeAspect="1"/>
           </p:cNvPicPr>
@@ -19103,7 +17746,7 @@
         </p:blipFill>
         <p:spPr>
           <a:xfrm>
-            <a:off x="7322515" y="3701491"/>
+            <a:off x="5859475" y="3701491"/>
             <a:ext cx="351130" cy="351130"/>
           </a:xfrm>
           <a:prstGeom prst="rect">
@@ -19113,14 +17756,14 @@
       </p:pic>
       <p:sp>
         <p:nvSpPr>
-          <p:cNvPr id="20" name="Text 13"/>
+          <p:cNvPr id="17" name="Text 10"/>
           <p:cNvSpPr txBox="1"/>
           <p:nvPr/>
         </p:nvSpPr>
         <p:spPr>
           <a:xfrm>
-            <a:off x="8092440" y="3511296"/>
-            <a:ext cx="3566160" cy="731520"/>
+            <a:off x="6629400" y="3511296"/>
+            <a:ext cx="4937760" cy="731520"/>
           </a:xfrm>
           <a:prstGeom prst="rect">
             <a:avLst/>
@@ -19149,13 +17792,13 @@
       </p:sp>
       <p:sp>
         <p:nvSpPr>
-          <p:cNvPr id="21" name="Ikon zemini"/>
+          <p:cNvPr id="18" name="Ikon zemini"/>
           <p:cNvSpPr/>
           <p:nvPr/>
         </p:nvSpPr>
         <p:spPr>
           <a:xfrm>
-            <a:off x="7132320" y="4535424"/>
+            <a:off x="5669280" y="4535424"/>
             <a:ext cx="731520" cy="731520"/>
           </a:xfrm>
           <a:prstGeom prst="ellipse">
@@ -19174,7 +17817,7 @@
       </p:sp>
       <p:pic>
         <p:nvPicPr>
-          <p:cNvPr id="22" name="Ikon" descr="FaCheck">    </p:cNvPr>
+          <p:cNvPr id="19" name="Ikon" descr="FaCheck">    </p:cNvPr>
           <p:cNvPicPr>
             <a:picLocks noChangeAspect="1"/>
           </p:cNvPicPr>
@@ -19188,7 +17831,7 @@
         </p:blipFill>
         <p:spPr>
           <a:xfrm>
-            <a:off x="7322515" y="4725619"/>
+            <a:off x="5859475" y="4725619"/>
             <a:ext cx="351130" cy="351130"/>
           </a:xfrm>
           <a:prstGeom prst="rect">
@@ -19198,14 +17841,14 @@
       </p:pic>
       <p:sp>
         <p:nvSpPr>
-          <p:cNvPr id="23" name="Text 15"/>
+          <p:cNvPr id="20" name="Text 12"/>
           <p:cNvSpPr txBox="1"/>
           <p:nvPr/>
         </p:nvSpPr>
         <p:spPr>
           <a:xfrm>
-            <a:off x="8092440" y="4535424"/>
-            <a:ext cx="3566160" cy="731520"/>
+            <a:off x="6629400" y="4535424"/>
+            <a:ext cx="4937760" cy="731520"/>
           </a:xfrm>
           <a:prstGeom prst="rect">
             <a:avLst/>
@@ -19234,7 +17877,7 @@
       </p:sp>
       <p:sp>
         <p:nvSpPr>
-          <p:cNvPr id="24" name="Text 16"/>
+          <p:cNvPr id="21" name="Text 13"/>
           <p:cNvSpPr txBox="1"/>
           <p:nvPr/>
         </p:nvSpPr>
@@ -19270,7 +17913,7 @@
       </p:sp>
       <p:sp>
         <p:nvSpPr>
-          <p:cNvPr id="25" name="Kaynak"/>
+          <p:cNvPr id="22" name="Kaynak"/>
           <p:cNvSpPr txBox="1"/>
           <p:nvPr/>
         </p:nvSpPr>
@@ -20117,7 +18760,7 @@
                   <a:schemeClr val="accent3"/>
                 </a:solidFill>
               </a:rPr>
-              <a:t>6 soru, 0–10 puan  •  Türkçe geçerlik: Cronbach α = 0,56</a:t>
+              <a:t>6 soru, 0–10 puan  •  Türkçe geçerlik ve güvenilirlik: Uysal ve ark., 2004</a:t>
             </a:r>
             <a:endParaRPr lang="en-US" sz="2000" dirty="0"/>
           </a:p>

--- a/Sunumlar/Makale_Sunumu_Sigara_Birakma.pptx
+++ b/Sunumlar/Makale_Sunumu_Sigara_Birakma.pptx
@@ -4,39 +4,38 @@
   <p:sldMasterIdLst>
     <p:sldMasterId id="2147483648" r:id="rId1"/>
   </p:sldMasterIdLst>
+  <p:notesMasterIdLst>
+    <p:notesMasterId r:id="rId29"/>
+  </p:notesMasterIdLst>
   <p:sldIdLst>
     <p:sldId id="256" r:id="rId2"/>
     <p:sldId id="257" r:id="rId3"/>
-    <p:sldId id="258" r:id="rId4"/>
-    <p:sldId id="259" r:id="rId5"/>
-    <p:sldId id="260" r:id="rId6"/>
-    <p:sldId id="261" r:id="rId7"/>
-    <p:sldId id="262" r:id="rId8"/>
-    <p:sldId id="263" r:id="rId9"/>
-    <p:sldId id="264" r:id="rId10"/>
-    <p:sldId id="265" r:id="rId11"/>
-    <p:sldId id="266" r:id="rId12"/>
-    <p:sldId id="267" r:id="rId13"/>
-    <p:sldId id="268" r:id="rId14"/>
-    <p:sldId id="269" r:id="rId15"/>
-    <p:sldId id="270" r:id="rId16"/>
-    <p:sldId id="271" r:id="rId17"/>
-    <p:sldId id="272" r:id="rId18"/>
-    <p:sldId id="273" r:id="rId19"/>
-    <p:sldId id="274" r:id="rId20"/>
-    <p:sldId id="275" r:id="rId21"/>
-    <p:sldId id="276" r:id="rId22"/>
-    <p:sldId id="277" r:id="rId23"/>
-    <p:sldId id="278" r:id="rId24"/>
-    <p:sldId id="279" r:id="rId25"/>
-    <p:sldId id="280" r:id="rId26"/>
-    <p:sldId id="281" r:id="rId27"/>
-    <p:sldId id="282" r:id="rId28"/>
-    <p:sldId id="283" r:id="rId29"/>
+    <p:sldId id="259" r:id="rId4"/>
+    <p:sldId id="260" r:id="rId5"/>
+    <p:sldId id="261" r:id="rId6"/>
+    <p:sldId id="262" r:id="rId7"/>
+    <p:sldId id="263" r:id="rId8"/>
+    <p:sldId id="264" r:id="rId9"/>
+    <p:sldId id="265" r:id="rId10"/>
+    <p:sldId id="266" r:id="rId11"/>
+    <p:sldId id="267" r:id="rId12"/>
+    <p:sldId id="268" r:id="rId13"/>
+    <p:sldId id="269" r:id="rId14"/>
+    <p:sldId id="270" r:id="rId15"/>
+    <p:sldId id="271" r:id="rId16"/>
+    <p:sldId id="272" r:id="rId17"/>
+    <p:sldId id="273" r:id="rId18"/>
+    <p:sldId id="274" r:id="rId19"/>
+    <p:sldId id="275" r:id="rId20"/>
+    <p:sldId id="276" r:id="rId21"/>
+    <p:sldId id="277" r:id="rId22"/>
+    <p:sldId id="278" r:id="rId23"/>
+    <p:sldId id="279" r:id="rId24"/>
+    <p:sldId id="280" r:id="rId25"/>
+    <p:sldId id="281" r:id="rId26"/>
+    <p:sldId id="282" r:id="rId27"/>
+    <p:sldId id="283" r:id="rId28"/>
   </p:sldIdLst>
-  <p:notesMasterIdLst>
-    <p:notesMasterId r:id="rId30"/>
-  </p:notesMasterIdLst>
   <p:sldSz cx="12192000" cy="6858000"/>
   <p:notesSz cx="6858000" cy="12192000"/>
   <p:defaultTextStyle>
@@ -134,18 +133,17 @@
   <p:extLst>
     <p:ext uri="{521415D9-36F7-43E2-AB2F-B90AF26B5E84}">
       <p14:sectionLst xmlns:p14="http://schemas.microsoft.com/office/powerpoint/2010/main">
-        <p14:section name="Giriş" id="{cbd3b5d9-2f93-2580-60f6-41f54a367a1e}">
+        <p14:section name="Giriş" id="{CBD3B5D9-2F93-2580-60F6-41F54A367A1E}">
           <p14:sldIdLst>
             <p14:sldId id="256"/>
             <p14:sldId id="257"/>
-            <p14:sldId id="258"/>
             <p14:sldId id="259"/>
             <p14:sldId id="260"/>
             <p14:sldId id="261"/>
             <p14:sldId id="262"/>
           </p14:sldIdLst>
         </p14:section>
-        <p14:section name="Gereç ve yöntem" id="{04071607-34fb-0e23-ad47-b8414c83e64f}">
+        <p14:section name="Gereç ve yöntem" id="{04071607-34FB-0E23-AD47-B8414C83E64F}">
           <p14:sldIdLst>
             <p14:sldId id="263"/>
             <p14:sldId id="264"/>
@@ -153,7 +151,7 @@
             <p14:sldId id="266"/>
           </p14:sldIdLst>
         </p14:section>
-        <p14:section name="Bulgular" id="{68d7aa3f-a07b-6d95-8eb4-aff56fc4ece4}">
+        <p14:section name="Bulgular" id="{68D7AA3F-A07B-6D95-8EB4-AFF56FC4ECE4}">
           <p14:sldIdLst>
             <p14:sldId id="267"/>
             <p14:sldId id="268"/>
@@ -166,14 +164,14 @@
             <p14:sldId id="275"/>
           </p14:sldIdLst>
         </p14:section>
-        <p14:section name="Tartışma" id="{0b6da766-f717-08aa-80f2-d174bc057a12}">
+        <p14:section name="Tartışma" id="{0B6DA766-F717-08AA-80F2-D174BC057A12}">
           <p14:sldIdLst>
             <p14:sldId id="276"/>
             <p14:sldId id="277"/>
             <p14:sldId id="278"/>
           </p14:sldIdLst>
         </p14:section>
-        <p14:section name="Sonuç" id="{d7d5b8d7-35cc-0bdf-fc0e-24c71fe0ebf6}">
+        <p14:section name="Sonuç" id="{D7D5B8D7-35CC-0BDF-FC0E-24C71FE0EBF6}">
           <p14:sldIdLst>
             <p14:sldId id="279"/>
             <p14:sldId id="280"/>
@@ -189,6 +187,190 @@
     </p:ext>
   </p:extLst>
 </p:presentation>
+</file>
+
+<file path=ppt/changesInfos/changesInfo1.xml><?xml version="1.0" encoding="utf-8"?>
+<pc:chgInfo xmlns:a="http://schemas.openxmlformats.org/drawingml/2006/main" xmlns:r="http://schemas.openxmlformats.org/officeDocument/2006/relationships" xmlns:ac="http://schemas.microsoft.com/office/drawing/2013/main/command" xmlns:pc="http://schemas.microsoft.com/office/powerpoint/2013/main/command">
+  <pc:docChgLst>
+    <pc:chgData name="Ahmet Kıran" userId="79d1f92f95b4ea5f" providerId="LiveId" clId="{731B8B29-0491-457A-988D-17AFD8C29442}"/>
+    <pc:docChg chg="undo redo custSel delSld modSld modSection">
+      <pc:chgData name="Ahmet Kıran" userId="79d1f92f95b4ea5f" providerId="LiveId" clId="{731B8B29-0491-457A-988D-17AFD8C29442}" dt="2026-10-14T19:04:15.953" v="136" actId="6549"/>
+      <pc:docMkLst>
+        <pc:docMk/>
+      </pc:docMkLst>
+      <pc:sldChg chg="modSp mod">
+        <pc:chgData name="Ahmet Kıran" userId="79d1f92f95b4ea5f" providerId="LiveId" clId="{731B8B29-0491-457A-988D-17AFD8C29442}" dt="2026-10-14T18:31:35.752" v="134" actId="20577"/>
+        <pc:sldMkLst>
+          <pc:docMk/>
+          <pc:sldMk cId="0" sldId="256"/>
+        </pc:sldMkLst>
+        <pc:spChg chg="mod">
+          <ac:chgData name="Ahmet Kıran" userId="79d1f92f95b4ea5f" providerId="LiveId" clId="{731B8B29-0491-457A-988D-17AFD8C29442}" dt="2026-10-14T18:31:35.752" v="134" actId="20577"/>
+          <ac:spMkLst>
+            <pc:docMk/>
+            <pc:sldMk cId="0" sldId="256"/>
+            <ac:spMk id="3" creationId="{00000000-0000-0000-0000-000000000000}"/>
+          </ac:spMkLst>
+        </pc:spChg>
+        <pc:spChg chg="mod">
+          <ac:chgData name="Ahmet Kıran" userId="79d1f92f95b4ea5f" providerId="LiveId" clId="{731B8B29-0491-457A-988D-17AFD8C29442}" dt="2026-10-14T18:03:36.972" v="94" actId="20577"/>
+          <ac:spMkLst>
+            <pc:docMk/>
+            <pc:sldMk cId="0" sldId="256"/>
+            <ac:spMk id="5" creationId="{00000000-0000-0000-0000-000000000000}"/>
+          </ac:spMkLst>
+        </pc:spChg>
+      </pc:sldChg>
+      <pc:sldChg chg="delSp modSp mod">
+        <pc:chgData name="Ahmet Kıran" userId="79d1f92f95b4ea5f" providerId="LiveId" clId="{731B8B29-0491-457A-988D-17AFD8C29442}" dt="2026-10-14T18:04:40.524" v="99" actId="478"/>
+        <pc:sldMkLst>
+          <pc:docMk/>
+          <pc:sldMk cId="0" sldId="257"/>
+        </pc:sldMkLst>
+        <pc:spChg chg="del">
+          <ac:chgData name="Ahmet Kıran" userId="79d1f92f95b4ea5f" providerId="LiveId" clId="{731B8B29-0491-457A-988D-17AFD8C29442}" dt="2026-10-14T18:04:30.937" v="95" actId="478"/>
+          <ac:spMkLst>
+            <pc:docMk/>
+            <pc:sldMk cId="0" sldId="257"/>
+            <ac:spMk id="24" creationId="{00000000-0000-0000-0000-000000000000}"/>
+          </ac:spMkLst>
+        </pc:spChg>
+        <pc:spChg chg="del">
+          <ac:chgData name="Ahmet Kıran" userId="79d1f92f95b4ea5f" providerId="LiveId" clId="{731B8B29-0491-457A-988D-17AFD8C29442}" dt="2026-10-14T18:04:34.614" v="97" actId="478"/>
+          <ac:spMkLst>
+            <pc:docMk/>
+            <pc:sldMk cId="0" sldId="257"/>
+            <ac:spMk id="25" creationId="{00000000-0000-0000-0000-000000000000}"/>
+          </ac:spMkLst>
+        </pc:spChg>
+        <pc:spChg chg="del">
+          <ac:chgData name="Ahmet Kıran" userId="79d1f92f95b4ea5f" providerId="LiveId" clId="{731B8B29-0491-457A-988D-17AFD8C29442}" dt="2026-10-14T18:04:32.992" v="96" actId="478"/>
+          <ac:spMkLst>
+            <pc:docMk/>
+            <pc:sldMk cId="0" sldId="257"/>
+            <ac:spMk id="26" creationId="{00000000-0000-0000-0000-000000000000}"/>
+          </ac:spMkLst>
+        </pc:spChg>
+        <pc:spChg chg="del mod">
+          <ac:chgData name="Ahmet Kıran" userId="79d1f92f95b4ea5f" providerId="LiveId" clId="{731B8B29-0491-457A-988D-17AFD8C29442}" dt="2026-10-14T18:04:40.524" v="99" actId="478"/>
+          <ac:spMkLst>
+            <pc:docMk/>
+            <pc:sldMk cId="0" sldId="257"/>
+            <ac:spMk id="27" creationId="{00000000-0000-0000-0000-000000000000}"/>
+          </ac:spMkLst>
+        </pc:spChg>
+      </pc:sldChg>
+      <pc:sldChg chg="addSp delSp del mod">
+        <pc:chgData name="Ahmet Kıran" userId="79d1f92f95b4ea5f" providerId="LiveId" clId="{731B8B29-0491-457A-988D-17AFD8C29442}" dt="2026-10-14T18:35:30.027" v="135" actId="2696"/>
+        <pc:sldMkLst>
+          <pc:docMk/>
+          <pc:sldMk cId="0" sldId="258"/>
+        </pc:sldMkLst>
+        <pc:spChg chg="del">
+          <ac:chgData name="Ahmet Kıran" userId="79d1f92f95b4ea5f" providerId="LiveId" clId="{731B8B29-0491-457A-988D-17AFD8C29442}" dt="2026-10-14T18:05:01.802" v="101" actId="478"/>
+          <ac:spMkLst>
+            <pc:docMk/>
+            <pc:sldMk cId="0" sldId="258"/>
+            <ac:spMk id="12" creationId="{00000000-0000-0000-0000-000000000000}"/>
+          </ac:spMkLst>
+        </pc:spChg>
+        <pc:spChg chg="del">
+          <ac:chgData name="Ahmet Kıran" userId="79d1f92f95b4ea5f" providerId="LiveId" clId="{731B8B29-0491-457A-988D-17AFD8C29442}" dt="2026-10-14T18:05:05.042" v="102" actId="478"/>
+          <ac:spMkLst>
+            <pc:docMk/>
+            <pc:sldMk cId="0" sldId="258"/>
+            <ac:spMk id="14" creationId="{00000000-0000-0000-0000-000000000000}"/>
+          </ac:spMkLst>
+        </pc:spChg>
+        <pc:spChg chg="add del">
+          <ac:chgData name="Ahmet Kıran" userId="79d1f92f95b4ea5f" providerId="LiveId" clId="{731B8B29-0491-457A-988D-17AFD8C29442}" dt="2026-10-14T18:28:00.627" v="124" actId="478"/>
+          <ac:spMkLst>
+            <pc:docMk/>
+            <pc:sldMk cId="0" sldId="258"/>
+            <ac:spMk id="15" creationId="{00000000-0000-0000-0000-000000000000}"/>
+          </ac:spMkLst>
+        </pc:spChg>
+        <pc:picChg chg="del">
+          <ac:chgData name="Ahmet Kıran" userId="79d1f92f95b4ea5f" providerId="LiveId" clId="{731B8B29-0491-457A-988D-17AFD8C29442}" dt="2026-10-14T18:04:59.822" v="100" actId="478"/>
+          <ac:picMkLst>
+            <pc:docMk/>
+            <pc:sldMk cId="0" sldId="258"/>
+            <ac:picMk id="13" creationId="{00000000-0000-0000-0000-000000000000}"/>
+          </ac:picMkLst>
+        </pc:picChg>
+      </pc:sldChg>
+      <pc:sldChg chg="addSp delSp modSp mod">
+        <pc:chgData name="Ahmet Kıran" userId="79d1f92f95b4ea5f" providerId="LiveId" clId="{731B8B29-0491-457A-988D-17AFD8C29442}" dt="2026-10-14T18:28:10.708" v="126" actId="478"/>
+        <pc:sldMkLst>
+          <pc:docMk/>
+          <pc:sldMk cId="0" sldId="259"/>
+        </pc:sldMkLst>
+        <pc:spChg chg="mod">
+          <ac:chgData name="Ahmet Kıran" userId="79d1f92f95b4ea5f" providerId="LiveId" clId="{731B8B29-0491-457A-988D-17AFD8C29442}" dt="2026-10-14T18:27:54.157" v="122"/>
+          <ac:spMkLst>
+            <pc:docMk/>
+            <pc:sldMk cId="0" sldId="259"/>
+            <ac:spMk id="7" creationId="{00000000-0000-0000-0000-000000000000}"/>
+          </ac:spMkLst>
+        </pc:spChg>
+        <pc:spChg chg="add del">
+          <ac:chgData name="Ahmet Kıran" userId="79d1f92f95b4ea5f" providerId="LiveId" clId="{731B8B29-0491-457A-988D-17AFD8C29442}" dt="2026-10-14T18:28:07.667" v="125" actId="478"/>
+          <ac:spMkLst>
+            <pc:docMk/>
+            <pc:sldMk cId="0" sldId="259"/>
+            <ac:spMk id="10" creationId="{00000000-0000-0000-0000-000000000000}"/>
+          </ac:spMkLst>
+        </pc:spChg>
+        <pc:spChg chg="add del">
+          <ac:chgData name="Ahmet Kıran" userId="79d1f92f95b4ea5f" providerId="LiveId" clId="{731B8B29-0491-457A-988D-17AFD8C29442}" dt="2026-10-14T18:28:10.708" v="126" actId="478"/>
+          <ac:spMkLst>
+            <pc:docMk/>
+            <pc:sldMk cId="0" sldId="259"/>
+            <ac:spMk id="11" creationId="{00000000-0000-0000-0000-000000000000}"/>
+          </ac:spMkLst>
+        </pc:spChg>
+      </pc:sldChg>
+      <pc:sldChg chg="modSp mod">
+        <pc:chgData name="Ahmet Kıran" userId="79d1f92f95b4ea5f" providerId="LiveId" clId="{731B8B29-0491-457A-988D-17AFD8C29442}" dt="2026-10-14T19:04:15.953" v="136" actId="6549"/>
+        <pc:sldMkLst>
+          <pc:docMk/>
+          <pc:sldMk cId="0" sldId="261"/>
+        </pc:sldMkLst>
+        <pc:spChg chg="mod">
+          <ac:chgData name="Ahmet Kıran" userId="79d1f92f95b4ea5f" providerId="LiveId" clId="{731B8B29-0491-457A-988D-17AFD8C29442}" dt="2026-10-14T19:04:15.953" v="136" actId="6549"/>
+          <ac:spMkLst>
+            <pc:docMk/>
+            <pc:sldMk cId="0" sldId="261"/>
+            <ac:spMk id="13" creationId="{00000000-0000-0000-0000-000000000000}"/>
+          </ac:spMkLst>
+        </pc:spChg>
+      </pc:sldChg>
+      <pc:sldChg chg="modSp mod">
+        <pc:chgData name="Ahmet Kıran" userId="79d1f92f95b4ea5f" providerId="LiveId" clId="{731B8B29-0491-457A-988D-17AFD8C29442}" dt="2026-10-13T18:42:58.784" v="8" actId="1036"/>
+        <pc:sldMkLst>
+          <pc:docMk/>
+          <pc:sldMk cId="0" sldId="274"/>
+        </pc:sldMkLst>
+        <pc:spChg chg="mod">
+          <ac:chgData name="Ahmet Kıran" userId="79d1f92f95b4ea5f" providerId="LiveId" clId="{731B8B29-0491-457A-988D-17AFD8C29442}" dt="2026-10-13T18:42:41.582" v="7" actId="20577"/>
+          <ac:spMkLst>
+            <pc:docMk/>
+            <pc:sldMk cId="0" sldId="274"/>
+            <ac:spMk id="7" creationId="{00000000-0000-0000-0000-000000000000}"/>
+          </ac:spMkLst>
+        </pc:spChg>
+        <pc:spChg chg="mod">
+          <ac:chgData name="Ahmet Kıran" userId="79d1f92f95b4ea5f" providerId="LiveId" clId="{731B8B29-0491-457A-988D-17AFD8C29442}" dt="2026-10-13T18:42:58.784" v="8" actId="1036"/>
+          <ac:spMkLst>
+            <pc:docMk/>
+            <pc:sldMk cId="0" sldId="274"/>
+            <ac:spMk id="9" creationId="{00000000-0000-0000-0000-000000000000}"/>
+          </ac:spMkLst>
+        </pc:spChg>
+      </pc:sldChg>
+    </pc:docChg>
+  </pc:docChgLst>
+</pc:chgInfo>
 </file>
 
 <file path=ppt/notesMasters/notesMaster1.xml><?xml version="1.0" encoding="utf-8"?>
@@ -213,234 +395,10 @@
           <a:chExt cx="0" cy="0"/>
         </a:xfrm>
       </p:grpSpPr>
-      <p:sp>
-        <p:nvSpPr>
-          <p:cNvPr id="2" name="Header Placeholder 1"/>
-          <p:cNvSpPr>
-            <a:spLocks noGrp="1"/>
-          </p:cNvSpPr>
-          <p:nvPr>
-            <p:ph type="hdr" sz="quarter"/>
-          </p:nvPr>
-        </p:nvSpPr>
-        <p:spPr>
-          <a:xfrm>
-            <a:off x="0" y="0"/>
-            <a:ext cx="2971800" cy="458788"/>
-          </a:xfrm>
-          <a:prstGeom prst="rect">
-            <a:avLst/>
-          </a:prstGeom>
-        </p:spPr>
-        <p:txBody>
-          <a:bodyPr vert="horz" lIns="91440" tIns="45720" rIns="91440" bIns="45720" rtlCol="0"/>
-          <a:lstStyle>
-            <a:lvl1pPr algn="l">
-              <a:defRPr sz="1200"/>
-            </a:lvl1pPr>
-          </a:lstStyle>
-          <a:p>
-            <a:endParaRPr lang="en-US"/>
-          </a:p>
-        </p:txBody>
-      </p:sp>
-      <p:sp>
-        <p:nvSpPr>
-          <p:cNvPr id="3" name="Date Placeholder 2"/>
-          <p:cNvSpPr>
-            <a:spLocks noGrp="1"/>
-          </p:cNvSpPr>
-          <p:nvPr>
-            <p:ph type="dt" idx="1"/>
-          </p:nvPr>
-        </p:nvSpPr>
-        <p:spPr>
-          <a:xfrm>
-            <a:off x="3884613" y="0"/>
-            <a:ext cx="2971800" cy="458788"/>
-          </a:xfrm>
-          <a:prstGeom prst="rect">
-            <a:avLst/>
-          </a:prstGeom>
-        </p:spPr>
-        <p:txBody>
-          <a:bodyPr vert="horz" lIns="91440" tIns="45720" rIns="91440" bIns="45720" rtlCol="0"/>
-          <a:lstStyle>
-            <a:lvl1pPr algn="r">
-              <a:defRPr sz="1200"/>
-            </a:lvl1pPr>
-          </a:lstStyle>
-          <a:p>
-            <a:fld id="{5282F153-3F37-0F45-9E97-73ACFA13230C}" type="datetimeFigureOut">
-              <a:rPr lang="en-US"/>
-              <a:t>7/23/19</a:t>
-            </a:fld>
-            <a:endParaRPr lang="en-US"/>
-          </a:p>
-        </p:txBody>
-      </p:sp>
-      <p:sp>
-        <p:nvSpPr>
-          <p:cNvPr id="4" name="Slide Image Placeholder 3"/>
-          <p:cNvSpPr>
-            <a:spLocks noGrp="1" noRot="1" noChangeAspect="1"/>
-          </p:cNvSpPr>
-          <p:nvPr>
-            <p:ph type="sldImg" idx="2"/>
-          </p:nvPr>
-        </p:nvSpPr>
-        <p:spPr>
-          <a:xfrm>
-            <a:off x="685800" y="1143000"/>
-            <a:ext cx="5486400" cy="3086100"/>
-          </a:xfrm>
-          <a:prstGeom prst="rect">
-            <a:avLst/>
-          </a:prstGeom>
-          <a:noFill/>
-          <a:ln w="12700">
-            <a:solidFill>
-              <a:prstClr val="black"/>
-            </a:solidFill>
-          </a:ln>
-        </p:spPr>
-        <p:txBody>
-          <a:bodyPr vert="horz" lIns="91440" tIns="45720" rIns="91440" bIns="45720" rtlCol="0" anchor="ctr"/>
-          <a:lstStyle/>
-          <a:p>
-            <a:endParaRPr lang="en-US"/>
-          </a:p>
-        </p:txBody>
-      </p:sp>
-      <p:sp>
-        <p:nvSpPr>
-          <p:cNvPr id="5" name="Notes Placeholder 4"/>
-          <p:cNvSpPr>
-            <a:spLocks noGrp="1"/>
-          </p:cNvSpPr>
-          <p:nvPr>
-            <p:ph type="body" sz="quarter" idx="3"/>
-          </p:nvPr>
-        </p:nvSpPr>
-        <p:spPr>
-          <a:xfrm>
-            <a:off x="685800" y="4400550"/>
-            <a:ext cx="5486400" cy="3600450"/>
-          </a:xfrm>
-          <a:prstGeom prst="rect">
-            <a:avLst/>
-          </a:prstGeom>
-        </p:spPr>
-        <p:txBody>
-          <a:bodyPr vert="horz" lIns="91440" tIns="45720" rIns="91440" bIns="45720" rtlCol="0"/>
-          <a:lstStyle/>
-          <a:p>
-            <a:pPr lvl="0"/>
-            <a:r>
-              <a:rPr lang="en-US"/>
-              <a:t>Click to edit Master text styles</a:t>
-            </a:r>
-          </a:p>
-          <a:p>
-            <a:pPr lvl="1"/>
-            <a:r>
-              <a:rPr lang="en-US"/>
-              <a:t>Second level</a:t>
-            </a:r>
-          </a:p>
-          <a:p>
-            <a:pPr lvl="2"/>
-            <a:r>
-              <a:rPr lang="en-US"/>
-              <a:t>Third level</a:t>
-            </a:r>
-          </a:p>
-          <a:p>
-            <a:pPr lvl="3"/>
-            <a:r>
-              <a:rPr lang="en-US"/>
-              <a:t>Fourth level</a:t>
-            </a:r>
-          </a:p>
-          <a:p>
-            <a:pPr lvl="4"/>
-            <a:r>
-              <a:rPr lang="en-US"/>
-              <a:t>Fifth level</a:t>
-            </a:r>
-          </a:p>
-        </p:txBody>
-      </p:sp>
-      <p:sp>
-        <p:nvSpPr>
-          <p:cNvPr id="6" name="Footer Placeholder 5"/>
-          <p:cNvSpPr>
-            <a:spLocks noGrp="1"/>
-          </p:cNvSpPr>
-          <p:nvPr>
-            <p:ph type="ftr" sz="quarter" idx="4"/>
-          </p:nvPr>
-        </p:nvSpPr>
-        <p:spPr>
-          <a:xfrm>
-            <a:off x="0" y="8685213"/>
-            <a:ext cx="2971800" cy="458787"/>
-          </a:xfrm>
-          <a:prstGeom prst="rect">
-            <a:avLst/>
-          </a:prstGeom>
-        </p:spPr>
-        <p:txBody>
-          <a:bodyPr vert="horz" lIns="91440" tIns="45720" rIns="91440" bIns="45720" rtlCol="0" anchor="b"/>
-          <a:lstStyle>
-            <a:lvl1pPr algn="l">
-              <a:defRPr sz="1200"/>
-            </a:lvl1pPr>
-          </a:lstStyle>
-          <a:p>
-            <a:endParaRPr lang="en-US"/>
-          </a:p>
-        </p:txBody>
-      </p:sp>
-      <p:sp>
-        <p:nvSpPr>
-          <p:cNvPr id="7" name="Slide Number Placeholder 6"/>
-          <p:cNvSpPr>
-            <a:spLocks noGrp="1"/>
-          </p:cNvSpPr>
-          <p:nvPr>
-            <p:ph type="sldNum" sz="quarter" idx="5"/>
-          </p:nvPr>
-        </p:nvSpPr>
-        <p:spPr>
-          <a:xfrm>
-            <a:off x="3884613" y="8685213"/>
-            <a:ext cx="2971800" cy="458787"/>
-          </a:xfrm>
-          <a:prstGeom prst="rect">
-            <a:avLst/>
-          </a:prstGeom>
-        </p:spPr>
-        <p:txBody>
-          <a:bodyPr vert="horz" lIns="91440" tIns="45720" rIns="91440" bIns="45720" rtlCol="0" anchor="b"/>
-          <a:lstStyle>
-            <a:lvl1pPr algn="r">
-              <a:defRPr sz="1200"/>
-            </a:lvl1pPr>
-          </a:lstStyle>
-          <a:p>
-            <a:fld id="{CE5E9CC1-C706-0F49-92D6-E571CC5EEA8F}" type="slidenum">
-              <a:rPr lang="en-US"/>
-              <a:t>‹#›</a:t>
-            </a:fld>
-            <a:endParaRPr lang="en-US"/>
-          </a:p>
-        </p:txBody>
-      </p:sp>
     </p:spTree>
     <p:extLst>
       <p:ext uri="{BB962C8B-B14F-4D97-AF65-F5344CB8AC3E}">
-        <p14:creationId xmlns:p14="http://schemas.microsoft.com/office/powerpoint/2010/main" val="1024086991"/>
+        <p14:creationId xmlns:p14="http://schemas.microsoft.com/office/powerpoint/2010/main" val="1898704680"/>
       </p:ext>
     </p:extLst>
   </p:cSld>
@@ -585,12 +543,13 @@
           <a:lstStyle/>
           <a:p>
             <a:r>
-              <a:rPr lang="en-US" dirty="0"/>
-              <a:t>Günaydın hocalarım, değerli arkadaşlarım. Ben [Ad Soyad], [kaçıncı yıl] asistanıyım.
-Bugün sizlere Turkish Journal of Family Practice dergisinin 2026 yılı 30. cilt 2. sayısında yayımlanan, Cenberlitaş, Gökçe ve Öztürk'ün “Bir üniversite hastanesine bağlı sigara bırakma polikliniğine başvuran hastaların demografik ve klinik özellikleri ile sigara bırakma durumlarını etkileyen faktörler” başlıklı özgün araştırma makalesini sunacağım.
-Konu birinci basamakta neredeyse her gün karşılaştığımız bir sorun olduğu için bu makaleyi seçtim.</a:t>
-            </a:r>
-            <a:endParaRPr lang="en-US" dirty="0"/>
+              <a:t>Günaydın hocalarım, değerli arkadaşlarım. Ben Asistan Dr. Ahmet Kıran.</a:t>
+            </a:r>
+          </a:p>
+          <a:p>
+            <a:r>
+              <a:t>Bugün sizlere Turkish Journal of Family Practice dergisinin 2026 yılı 30. cilt 2. sayısında yayımlanan, Uzm. Dr. Emre Cenberlitaş ve hocalarımızdan Aksanur ve Onur hocamızın “Bir üniversite hastanesine bağlı sigara bırakma polikliniğine başvuran hastaların demografik ve klinik özellikleri ile sigara bırakma durumlarını etkileyen faktörler” başlıklı makalesini sunacağım.</a:t>
+            </a:r>
           </a:p>
         </p:txBody>
       </p:sp>
@@ -675,11 +634,18 @@
           <a:lstStyle/>
           <a:p>
             <a:r>
-              <a:rPr lang="en-US" dirty="0"/>
-              <a:t>Tedavi FNBT puanı, kronik hastalıklar, kullanılan ilaçlar, kontrendikasyonlar ve hasta uyumuna göre bireyselleştirilmiştir.
-Hastalara yalnızca davranışsal tedavi, monoterapi ya da kombine tedavi uygulanmıştır. Kombine tedavi seçenekleri bupropion ile NRT, vareniklin ile NRT, sitizin ile NRT ve üçlü tedavidir. Sağlık Bakanlığı politikaları doğrultusunda NRT ve sitizin belirli dönemlerde ücretsiz sağlanmıştır.</a:t>
-            </a:r>
-            <a:endParaRPr lang="en-US" dirty="0"/>
+              <a:t>Analizler SPSS 25 ile yapılmıştır. Normallik histogram ve Kolmogorov–Smirnov testiyle değerlendirilmiştir.</a:t>
+            </a:r>
+          </a:p>
+          <a:p>
+            <a:r>
+              <a:t>Kategorik değişkenler ki-kare testiyle, iki grup karşılaştırmaları Mann–Whitney U, ikiden fazla grup karşılaştırmaları Kruskal–Wallis testiyle yapılmıştır. Post-hoc karşılaştırmalarda Duncan testi kullanılmıştır.</a:t>
+            </a:r>
+          </a:p>
+          <a:p>
+            <a:r>
+              <a:t>Tedavi yöntemlerinin bırakma üzerindeki etkisi ikili lojistik regresyonla değerlendirilmiş ve Bonferroni düzeltmesi uygulanmıştır.</a:t>
+            </a:r>
           </a:p>
         </p:txBody>
       </p:sp>
@@ -764,12 +730,13 @@
           <a:lstStyle/>
           <a:p>
             <a:r>
-              <a:rPr lang="en-US" dirty="0"/>
-              <a:t>Analizler SPSS 25 ile yapılmıştır. Normallik histogram ve Kolmogorov–Smirnov testiyle değerlendirilmiştir.
-Kategorik değişkenler ki-kare testiyle, iki grup karşılaştırmaları Mann–Whitney U, ikiden fazla grup karşılaştırmaları Kruskal–Wallis testiyle yapılmıştır. Post-hoc karşılaştırmalarda Duncan testi kullanılmıştır.
-Tedavi yöntemlerinin bırakma üzerindeki etkisi ikili lojistik regresyonla değerlendirilmiş ve Bonferroni düzeltmesi uygulanmıştır.</a:t>
-            </a:r>
-            <a:endParaRPr lang="en-US" dirty="0"/>
+              <a:t>Bulgulara geçiyorum. Analize 399 hasta alınmıştır. Yaş ortalaması 44,7 yıldır ve hastaların yüzde 63,7'si erkektir.</a:t>
+            </a:r>
+          </a:p>
+          <a:p>
+            <a:r>
+              <a:t>Ortalama FNBT puanı 5,66, ortalama tüketim 27,4 paket-yıl, hasta başına ortalama görüşme sayısı 2,21'dir. Hastaların yüzde 34,1'i, yani yaklaşık üçte biri sigarayı bırakmıştır.</a:t>
+            </a:r>
           </a:p>
         </p:txBody>
       </p:sp>
@@ -854,11 +821,13 @@
           <a:lstStyle/>
           <a:p>
             <a:r>
-              <a:rPr lang="en-US" dirty="0"/>
-              <a:t>Bulgulara geçiyorum. Analize 399 hasta alınmıştır. Yaş ortalaması 44,7 yıldır ve hastaların yüzde 63,7'si erkektir.
-Ortalama FNBT puanı 5,66, ortalama tüketim 27,4 paket-yıl, hasta başına ortalama görüşme sayısı 2,21'dir. Hastaların yüzde 34,1'i, yani yaklaşık üçte biri sigarayı bırakmıştır.</a:t>
-            </a:r>
-            <a:endParaRPr lang="en-US" dirty="0"/>
+              <a:t>FNBT puanlarına göre hastaların yüzde 13,2'si düşük, yüzde 61,3'ü orta, yüzde 25,5'i yüksek bağımlılık düzeyindedir.</a:t>
+            </a:r>
+          </a:p>
+          <a:p>
+            <a:r>
+              <a:t>Hastaların yüzde 75,7'si daha önce sigarayı bırakmayı denemiş ve bunların yaklaşık yarısı bu denemede profesyonel destek almıştır. Yüzde 7,2'si sigara dışında elektronik sigara, nargile veya puro gibi tütün ürünleri kullanmaktadır.</a:t>
+            </a:r>
           </a:p>
         </p:txBody>
       </p:sp>
@@ -943,11 +912,13 @@
           <a:lstStyle/>
           <a:p>
             <a:r>
-              <a:rPr lang="en-US" dirty="0"/>
-              <a:t>FNBT puanlarına göre hastaların yüzde 13,2'si düşük, yüzde 61,3'ü orta, yüzde 25,5'i yüksek bağımlılık düzeyindedir.
-Hastaların yüzde 75,7'si daha önce sigarayı bırakmayı denemiş ve bunların yaklaşık yarısı bu denemede profesyonel destek almıştır. Yüzde 7,2'si sigara dışında elektronik sigara, nargile veya puro gibi tütün ürünleri kullanmaktadır.</a:t>
-            </a:r>
-            <a:endParaRPr lang="en-US" dirty="0"/>
+              <a:t>Tablo 1'de katılımcıların sosyodemografik özellikleri yer almaktadır. En kalabalık yaş grubu yüzde 45,6 ile 26–44 yaş grubudur. Hastaların yüzde 82'si evlidir ve yüzde 43'ü yükseköğretim mezunudur.</a:t>
+            </a:r>
+          </a:p>
+          <a:p>
+            <a:r>
+              <a:t>Hastaların yüzde 86'sı il merkezinde yaşamaktadır. Yüzde 39,6'sının hanesinde sigara içen başka biri bulunmaktadır.</a:t>
+            </a:r>
           </a:p>
         </p:txBody>
       </p:sp>
@@ -1032,11 +1003,13 @@
           <a:lstStyle/>
           <a:p>
             <a:r>
-              <a:rPr lang="en-US" dirty="0"/>
-              <a:t>Tablo 1'de katılımcıların sosyodemografik özellikleri yer almaktadır. Hastaların çoğu 26–44 yaş grubundadır, yüzde 82'si evlidir ve yüzde 43'ü yükseköğretim mezunudur.
-Hastaların yüzde 86'sı il merkezinde yaşamaktadır. Yüzde 39,6'sının hanesinde sigara içen başka biri bulunmaktadır.</a:t>
-            </a:r>
-            <a:endParaRPr lang="en-US" dirty="0"/>
+              <a:t>Tablo 2'de sosyodemografik özelliklere göre bırakma durumu karşılaştırılmıştır. Bu tablo aslında uzun bir tablo ikiye böldüm yarısı diğer slaytta. Tablonun ilk bölümünde cinsiyet, yaş grubu, medeni durum ve eğitim durumu yer almaktadır.</a:t>
+            </a:r>
+          </a:p>
+          <a:p>
+            <a:r>
+              <a:t>Bu değişkenlerin hiçbirinde başarılı ve başarısız gruplar arasında anlamlı fark bulunmamıştır.</a:t>
+            </a:r>
           </a:p>
         </p:txBody>
       </p:sp>
@@ -1121,11 +1094,13 @@
           <a:lstStyle/>
           <a:p>
             <a:r>
-              <a:rPr lang="en-US" dirty="0"/>
-              <a:t>Tablo 2'de sosyodemografik özelliklere göre bırakma durumu karşılaştırılmıştır. Tablonun ilk bölümünde cinsiyet, yaş grubu, medeni durum ve eğitim durumu yer almaktadır.
-Bu değişkenlerin hiçbirinde başarılı ve başarısız gruplar arasında anlamlı fark bulunmamıştır.</a:t>
-            </a:r>
-            <a:endParaRPr lang="en-US" dirty="0"/>
+              <a:t>Tablonun ikinci bölümünde yerleşim yeri, çalışma durumu, hanede başka sigara içen varlığı ve alkol kullanımı yer almaktadır.</a:t>
+            </a:r>
+          </a:p>
+          <a:p>
+            <a:r>
+              <a:t>Anlamlı fark yalnızca hanede başka sigara içen varlığında bulunmuştur. Hanesinde sigara içen olmayanların yüzde 39,8'i, olanların yüzde 25,3'ü sigarayı bırakmıştır; p değeri 0,003'tür.</a:t>
+            </a:r>
           </a:p>
         </p:txBody>
       </p:sp>
@@ -1210,11 +1185,13 @@
           <a:lstStyle/>
           <a:p>
             <a:r>
-              <a:rPr lang="en-US" dirty="0"/>
-              <a:t>Tablonun ikinci bölümünde yerleşim yeri, çalışma durumu, hanede başka sigara içen varlığı ve alkol kullanımı yer almaktadır.
-Anlamlı fark yalnızca hanede başka sigara içen varlığında bulunmuştur. Hanesinde sigara içen olmayanların yüzde 39,8'i, olanların yüzde 25,3'ü sigarayı bırakmıştır; p değeri 0,003'tür.</a:t>
-            </a:r>
-            <a:endParaRPr lang="en-US" dirty="0"/>
+              <a:t>Tablo 3'te uygulanan tedaviler görülmektedir. En sık uygulanan yöntem 141 hasta ile kombine tedavidir. Bunu 109 hasta ile bupropion ve 80 hasta ile NRT monoterapisi izlemektedir.</a:t>
+            </a:r>
+          </a:p>
+          <a:p>
+            <a:r>
+              <a:t>Kombine tedavi alan hastaların 125'i bupropion ile NRT almıştır. Vareniklin 18, sitizin 34 hastada tek başına kullanılmış; 17 hastaya yalnızca farmakolojik olmayan tedavi uygulanmıştır.</a:t>
+            </a:r>
           </a:p>
         </p:txBody>
       </p:sp>
@@ -1299,11 +1276,13 @@
           <a:lstStyle/>
           <a:p>
             <a:r>
-              <a:rPr lang="en-US" dirty="0"/>
-              <a:t>Tablo 3'te uygulanan tedaviler görülmektedir. En sık uygulanan yöntem 141 hasta ile kombine tedavidir. Bunu 109 hasta ile bupropion ve 80 hasta ile NRT monoterapisi izlemektedir.
-Kombine tedavi alan hastaların 125'i bupropion ile NRT almıştır. Vareniklin 18, sitizin 34 hastada tek başına kullanılmış; 17 hastaya yalnızca farmakolojik olmayan tedavi uygulanmıştır.</a:t>
-            </a:r>
-            <a:endParaRPr lang="en-US" dirty="0"/>
+              <a:t>Tablo 4'te sürekli değişkenler bırakma durumuna göre karşılaştırılmıştır. Sigarayı bırakanlar ortalama 2,83 kez, bırakamayanlar 1,96 kez görüşmeye gelmiştir; fark anlamlıdır, p&lt;0,001.</a:t>
+            </a:r>
+          </a:p>
+          <a:p>
+            <a:r>
+              <a:t>Bırakanların FNBT puanı daha düşüktür: 5,26'ya karşı 5,85; p değeri 0,024'tür. Paket-yıl açısından iki grup arasında anlamlı fark bulunmamıştır.</a:t>
+            </a:r>
           </a:p>
         </p:txBody>
       </p:sp>
@@ -1388,11 +1367,13 @@
           <a:lstStyle/>
           <a:p>
             <a:r>
-              <a:rPr lang="en-US" dirty="0"/>
-              <a:t>Tablo 4'te sürekli değişkenler bırakma durumuna göre karşılaştırılmıştır. Sigarayı bırakanlar ortalama 2,83 kez, bırakamayanlar 1,96 kez görüşmeye gelmiştir; fark anlamlıdır, p&lt;0,001.
-Bırakanların FNBT puanı daha düşüktür: 5,26'ya karşı 5,85; p değeri 0,024'tür. Paket-yıl açısından iki grup arasında anlamlı fark bulunmamıştır.</a:t>
-            </a:r>
-            <a:endParaRPr lang="en-US" dirty="0"/>
+              <a:t>Tablo 5'te tedavi yöntemlerine göre bırakma oranları yer almaktadır. Yazarlara göre en yüksek bırakma oranı yüzde 44,0 ile kombine tedavi grubundadır ve kombine tedavi diğer tüm seçeneklerden anlamlı derecede üstündür.</a:t>
+            </a:r>
+          </a:p>
+          <a:p>
+            <a:r>
+              <a:t>NRT grubunda oran yüzde 37,5, sitizin ve yalnızca davranışsal tedavi gruplarında yüzde 35,3'tür. En düşük oran yüzde 16,5 ile bupropion monoterapisindedir. Gruplar arasındaki fark anlamlıdır, p&lt;0,001.</a:t>
+            </a:r>
           </a:p>
         </p:txBody>
       </p:sp>
@@ -1477,11 +1458,18 @@
           <a:lstStyle/>
           <a:p>
             <a:r>
-              <a:rPr lang="en-US" dirty="0"/>
-              <a:t>Tablo 5'te tedavi yöntemlerine göre bırakma oranları yer almaktadır. En yüksek oranlar vareniklin grubunda yüzde 44,5 ve kombine tedavi grubunda yüzde 44,0 olarak bulunmuştur.
-NRT grubunda oran yüzde 37,5, sitizin ve yalnızca davranışsal tedavi gruplarında yüzde 35,3'tür. En düşük oran yüzde 16,5 ile bupropion monoterapisindedir. Gruplar arasındaki fark anlamlıdır, p&lt;0,001.</a:t>
-            </a:r>
-            <a:endParaRPr lang="en-US" dirty="0"/>
+              <a:t>Tablo 6'da lojistik regresyon sonuçları görülmektedir. Referans grup bupropion monoterapisidir ve Exp(B) sütunu odds oranını vermektedir.</a:t>
+            </a:r>
+          </a:p>
+          <a:p>
+            <a:r>
+              <a:t>Bupropiona göre bırakma olasılığı vareniklinde 4,0, kombine tedavide 4,0, NRT'de 3,0, sitizinde 2,8 kat yüksektir. Farmakolojik tedavi almayanlarda görülen 2,8 katlık fark anlamlı değildir.</a:t>
+            </a:r>
+          </a:p>
+          <a:p>
+            <a:r>
+              <a:t>Hanede sigara içen olmaması bırakma olasılığını yaklaşık iki katına, sigaraya bağlı yakınma olmaması 1,6 katına çıkarmaktadır. Yazarlar ayrıca FNBT puanının bırakma başarısının negatif bir öngörücüsü olduğunu bildirmektedir.</a:t>
+            </a:r>
           </a:p>
         </p:txBody>
       </p:sp>
@@ -1566,11 +1554,13 @@
           <a:lstStyle/>
           <a:p>
             <a:r>
-              <a:rPr lang="en-US" dirty="0"/>
-              <a:t>Sunum 28 slayttan oluşmakta ve yaklaşık yarım saat sürecektir. Sonunda kısa bir tartışma bölümü planladım.
-Makalenin künyesi ve giriş bölümüyle başlayıp gereç ve yöntemi aktaracağım. Bulgular bölümünde makaledeki altı tabloyu özgün halleriyle göstereceğim. Ardından yazarların tartışma ve sonuçlarını aktaracak, kısa bir olgu üzerinden görüşlerinizi alacağım.</a:t>
-            </a:r>
-            <a:endParaRPr lang="en-US" dirty="0"/>
+              <a:t>Sunum 27 slayttan oluşmakta ve yaklaşık yarım saat sürecektir.</a:t>
+            </a:r>
+          </a:p>
+          <a:p>
+            <a:r>
+              <a:t>Makalenin künyesi ve giriş bölümüyle başlayıp gereç ve yöntemi aktaracağım. Bulgular bölümünde makaledeki altı tabloyu özgün halleriyle göstereceğim. Ardından hocalarımızın tartışma ve sonuçlarını aktaracak, son olarak kısa bir olgu üzerinden görüşlerinizi alacağım.</a:t>
+            </a:r>
           </a:p>
         </p:txBody>
       </p:sp>
@@ -1655,12 +1645,18 @@
           <a:lstStyle/>
           <a:p>
             <a:r>
-              <a:rPr lang="en-US" dirty="0"/>
-              <a:t>Tablo 6'da lojistik regresyon sonuçları görülmektedir. Referans grup bupropion monoterapisidir ve Exp(B) sütunu odds oranını vermektedir.
-Bupropiona göre bırakma olasılığı vareniklinde 4,0, kombine tedavide 4,0, NRT'de 3,0, sitizinde 2,8 kat yüksektir. Farmakolojik tedavi almayanlarda görülen 2,8 katlık fark anlamlı değildir.
-Hanede sigara içen olmaması bırakma olasılığını yaklaşık iki katına, sigaraya bağlı yakınma olmaması 1,6 katına çıkarmaktadır. Yazarlar ayrıca FNBT puanının bırakma başarısının negatif bir öngörücüsü olduğunu bildirmektedir.</a:t>
-            </a:r>
-            <a:endParaRPr lang="en-US" dirty="0"/>
+              <a:t>Yazarlar bulgularını literatürle karşılaştırmıştır. Vareniklinin bupropiona üstünlüğü büyük ölçekli meta-analizler ve randomize kontrollü çalışmalarla uyumludur. Bu üstünlüğün, vareniklinin α4β2 nikotinik reseptördeki parsiyel agonist etkisiyle ilişkili olduğu düşünülmektedir.</a:t>
+            </a:r>
+          </a:p>
+          <a:p>
+            <a:r>
+              <a:t>Sitizin vareniklinle benzer mekanizmaya sahip, maliyet-etkin bir seçenektir; plaseboya üstün ve NRT ile benzer etkinlikte bulunmuştur. Kombine tedavinin üstünlüğü, monoterapi yetersiz kaldığında kombinasyon öneren kılavuzlarla uyumludur.</a:t>
+            </a:r>
+          </a:p>
+          <a:p>
+            <a:r>
+              <a:t>Benli ve arkadaşlarının çalışmasında da vareniklin ilk altı ayda bupropiondan daha yüksek bırakma oranı sağlamıştır.</a:t>
+            </a:r>
           </a:p>
         </p:txBody>
       </p:sp>
@@ -1745,12 +1741,18 @@
           <a:lstStyle/>
           <a:p>
             <a:r>
-              <a:rPr lang="en-US" dirty="0"/>
-              <a:t>Yazarlar bulgularını literatürle karşılaştırmıştır. Vareniklinin bupropiona üstünlüğü büyük meta-analizler ve EAGLES çalışmasıyla uyumludur. Bu üstünlük, vareniklinin α4β2 nikotinik reseptördeki parsiyel agonist etkisiyle açıklanmaktadır.
-Sitizin vareniklinle benzer mekanizmaya sahip, maliyet-etkin bir seçenektir; plaseboya üstün ve NRT ile benzer etkinlikte bulunmuştur. Kombine tedavinin üstünlüğü, monoterapi yetersiz kaldığında kombinasyon öneren kılavuzlarla uyumludur.
-Benli ve arkadaşlarının çalışmasında da vareniklin ilk altı ayda bupropiondan daha yüksek bırakma oranı sağlamıştır.</a:t>
-            </a:r>
-            <a:endParaRPr lang="en-US" dirty="0"/>
+              <a:t>Yazarlar davranışsal desteğin önemini vurgulamaktadır: Daha fazla görüşmeye gelen hastalarda bırakma oranı daha yüksektir.</a:t>
+            </a:r>
+          </a:p>
+          <a:p>
+            <a:r>
+              <a:t>Hanede sigara içen olmaması bırakma olasılığını neredeyse iki katına çıkarmaktadır. Literatürde eşin veya aile bireylerinin sigara içmesi hem tetikleyici hem de motivasyon engeli olarak tanımlanmaktadır.</a:t>
+            </a:r>
+          </a:p>
+          <a:p>
+            <a:r>
+              <a:t>Hastaların ortalama FNBT puanı, tedavi arayan sigara içicilerinde bildirilen yaklaşık 5 puanla uyumludur ve yüksek puan düşük başarıyla ilişkilidir. Yakınması olmayan hastalarda başarının daha yüksek olması uzun vadeli sağlığı korumaya yönelik içsel motivasyonla açıklanmaktadır. Yazarlar ikinci bir olasılık olarak, kronik hastalığı veya semptomu olan bireylerin sigarayı bir baş etme aracı olarak kullanıyor olabileceğini ve bunun bırakmayı zorlaştırabileceğini belirtmektedir.</a:t>
+            </a:r>
           </a:p>
         </p:txBody>
       </p:sp>
@@ -1835,12 +1837,13 @@
           <a:lstStyle/>
           <a:p>
             <a:r>
-              <a:rPr lang="en-US" dirty="0"/>
-              <a:t>Yazarlar davranışsal desteğin önemini vurgulamaktadır: Daha fazla görüşmeye gelen hastalarda bırakma oranı daha yüksektir.
-Hanede sigara içen olmaması bırakma olasılığını neredeyse iki katına çıkarmaktadır. Literatürde eşin veya aile bireylerinin sigara içmesi hem tetikleyici hem de motivasyon engeli olarak tanımlanmaktadır.
-Yüksek FNBT puanı düşük başarıyla ilişkilidir. Yakınması olmayan hastalarda başarının daha yüksek olması ise uzun vadeli sağlığı korumaya yönelik içsel motivasyonla açıklanmaktadır.</a:t>
-            </a:r>
-            <a:endParaRPr lang="en-US" dirty="0"/>
+              <a:t>Yazarlar kısıtlılık olarak asistan rotasyonlarının takip sürekliliğini etkileyebileceğini, eksik verilerin telefonla ve hasta beyanıyla tamamlandığını ve vareniklinin piyasadan çekilmesinin ilaç seçimini etkilediğini belirtmektedir.</a:t>
+            </a:r>
+          </a:p>
+          <a:p>
+            <a:r>
+              <a:t>Güçlü yön olarak bu çalışmanın, bildikleri kadarıyla sitizin ile sigara bırakma tedavisini ele alan erişilebilir ilk tez çalışması olduğunu ve birçok tedavi seçeneğini bir arada değerlendirdiğini vurgulamaktadırlar.</a:t>
+            </a:r>
           </a:p>
         </p:txBody>
       </p:sp>
@@ -1925,11 +1928,13 @@
           <a:lstStyle/>
           <a:p>
             <a:r>
-              <a:rPr lang="en-US" dirty="0"/>
-              <a:t>Yazarlar kısıtlılık olarak asistan rotasyonlarının takip sürekliliğini etkileyebileceğini, eksik verilerin telefonla ve hasta beyanıyla tamamlandığını ve vareniklinin piyasadan çekilmesinin ilaç seçimini etkilediğini belirtmektedir.
-Güçlü yön olarak bu çalışmanın, bildikleri kadarıyla sitizin ile sigara bırakma tedavisini ele alan erişilebilir ilk tez çalışması olduğunu ve birçok tedavi seçeneğini bir arada değerlendirdiğini vurgulamaktadırlar.</a:t>
-            </a:r>
-            <a:endParaRPr lang="en-US" dirty="0"/>
+              <a:t>Yazarların sonucuna göre hastaların yaklaşık üçte biri sigarayı bırakmıştır. Kombine tedavi alanlarda bırakma oranı diğer seçeneklere göre daha yüksektir ve tedaviye uyum arttıkça başarı da artmaktadır.</a:t>
+            </a:r>
+          </a:p>
+          <a:p>
+            <a:r>
+              <a:t>Yazarlar tedavi seanslarında hastaların bırakma motivasyonunu artırmaya yönelik çabaların yoğunlaştırılmasını önermektedir.</a:t>
+            </a:r>
           </a:p>
         </p:txBody>
       </p:sp>
@@ -2014,11 +2019,23 @@
           <a:lstStyle/>
           <a:p>
             <a:r>
-              <a:rPr lang="en-US" dirty="0"/>
-              <a:t>Yazarların sonucuna göre hastaların yaklaşık üçte biri sigarayı bırakmıştır. Kombine tedavi alanlarda bırakma oranı diğer seçeneklere göre daha yüksektir ve tedaviye uyum arttıkça başarı da artmaktadır.
-Yazarlar tedavi seanslarında hastaların bırakma motivasyonunu artırmaya yönelik çabaların yoğunlaştırılmasını önermektedir.</a:t>
-            </a:r>
-            <a:endParaRPr lang="en-US" dirty="0"/>
+              <a:t>Bulguları pratiğe aktarmak için kısa bir olgu üzerinden görüşlerinizi almak istiyorum.</a:t>
+            </a:r>
+          </a:p>
+          <a:p>
+            <a:r>
+              <a:t>52 yaşında erkek hasta; günde 25 sigara içiyor, 30 paket-yıl öyküsü var, FNBT puanı 8. Daha önce bupropion ile denemiş ve başaramamış. Eşi de sigara içiyor.</a:t>
+            </a:r>
+          </a:p>
+          <a:p>
+            <a:r>
+              <a:t>Bu hastada hangi tedaviyi seçerdiniz? Takibi nasıl planlardınız? Eşini sürece nasıl dahil ederdiniz?</a:t>
+            </a:r>
+          </a:p>
+          <a:p>
+            <a:r>
+              <a:t>[Burada 2–3 dakika görüş alın. Makalenin bulgularına göre tartışmayı şu noktalara yönlendirebilirsiniz: Kombine tedavi veya vareniklin/sitizin temelli tedavi, sık kontrol görüşmeleri ve eşe de bırakma danışmanlığı önerilmesi.]</a:t>
+            </a:r>
           </a:p>
         </p:txBody>
       </p:sp>
@@ -2103,13 +2120,13 @@
           <a:lstStyle/>
           <a:p>
             <a:r>
-              <a:rPr lang="en-US" dirty="0"/>
-              <a:t>Bulguları pratiğe aktarmak için kısa bir olgu üzerinden görüşlerinizi almak istiyorum.
-52 yaşında erkek hasta; günde 25 sigara içiyor, 30 paket-yıl öyküsü var, FNBT puanı 8. Daha önce bupropion ile denemiş ve başaramamış. Eşi de sigara içiyor.
-Bu hastada hangi tedaviyi seçerdiniz? Takibi nasıl planlardınız? Eşini sürece nasıl dahil ederdiniz?
-[Burada 2–3 dakika görüş alın. Makalenin bulgularına göre tartışmayı şu noktalara yönlendirebilirsiniz: Kombine tedavi veya vareniklin/sitizin temelli tedavi, sık kontrol görüşmeleri ve eşe de bırakma danışmanlığı önerilmesi.]</a:t>
-            </a:r>
-            <a:endParaRPr lang="en-US" dirty="0"/>
+              <a:t>Sunumu beş mesajla özetlemek istiyorum.</a:t>
+            </a:r>
+          </a:p>
+          <a:p>
+            <a:r>
+              <a:t>Hastaların yaklaşık üçte biri sigarayı bırakmıştır. Kombine tedavide başarı daha yüksektir. Bupropion monoterapisi en düşük başarının görüldüğü seçenektir. Hanede sigara içen olması başarıyı azaltmaktadır. Sık takip başarıyla ilişkilidir.</a:t>
+            </a:r>
           </a:p>
         </p:txBody>
       </p:sp>
@@ -2194,11 +2211,8 @@
           <a:lstStyle/>
           <a:p>
             <a:r>
-              <a:rPr lang="en-US" dirty="0"/>
-              <a:t>Sunumu beş mesajla özetlemek istiyorum.
-Hastaların yaklaşık üçte biri sigarayı bırakmıştır. Kombine tedavide başarı daha yüksektir. Bupropion monoterapisi en düşük başarının görüldüğü seçenektir. Hanesinde sigara içen olup olmadığı sorgulanmalıdır. Sık takip başarıyla ilişkilidir.</a:t>
-            </a:r>
-            <a:endParaRPr lang="en-US" dirty="0"/>
+              <a:t>Kaynaklar Vancouver stiline uygun olarak, kullanım sırasıyla listelenmiştir. Birinci kaynak sunulan makalenin kendisidir; diğerleri makalenin atıf yaptığı çalışmalardır.</a:t>
+            </a:r>
           </a:p>
         </p:txBody>
       </p:sp>
@@ -2283,10 +2297,8 @@
           <a:lstStyle/>
           <a:p>
             <a:r>
-              <a:rPr lang="en-US" dirty="0"/>
-              <a:t>Kaynaklar Vancouver stiline uygun olarak, kullanım sırasıyla listelenmiştir. Birinci kaynak sunulan makalenin kendisidir; diğerleri makalenin atıf yaptığı çalışmalardır.</a:t>
-            </a:r>
-            <a:endParaRPr lang="en-US" dirty="0"/>
+              <a:t>İlginiz ve katkılarınız için teşekkür ederim. Sorularınızı ve görüşlerinizi almaktan memnuniyet duyarım.</a:t>
+            </a:r>
           </a:p>
         </p:txBody>
       </p:sp>
@@ -2308,94 +2320,6 @@
             <a:fld id="{F7021451-1387-4CA6-816F-3879F97B5CBC}" type="slidenum">
               <a:rPr lang="en-US"/>
               <a:t>27</a:t>
-            </a:fld>
-            <a:endParaRPr lang="en-US"/>
-          </a:p>
-        </p:txBody>
-      </p:sp>
-    </p:spTree>
-    <p:extLst>
-      <p:ext uri="{BB962C8B-B14F-4D97-AF65-F5344CB8AC3E}">
-        <p14:creationId xmlns:p14="http://schemas.microsoft.com/office/powerpoint/2010/main" val="1024086991"/>
-      </p:ext>
-    </p:extLst>
-  </p:cSld>
-  <p:clrMapOvr>
-    <a:masterClrMapping/>
-  </p:clrMapOvr>
-</p:notes>
-</file>
-
-<file path=ppt/notesSlides/notesSlide28.xml><?xml version="1.0" encoding="utf-8"?>
-<p:notes xmlns:a="http://schemas.openxmlformats.org/drawingml/2006/main" xmlns:r="http://schemas.openxmlformats.org/officeDocument/2006/relationships" xmlns:p="http://schemas.openxmlformats.org/presentationml/2006/main">
-  <p:cSld>
-    <p:spTree>
-      <p:nvGrpSpPr>
-        <p:cNvPr id="1" name=""/>
-        <p:cNvGrpSpPr/>
-        <p:nvPr/>
-      </p:nvGrpSpPr>
-      <p:grpSpPr>
-        <a:xfrm>
-          <a:off x="0" y="0"/>
-          <a:ext cx="0" cy="0"/>
-          <a:chOff x="0" y="0"/>
-          <a:chExt cx="0" cy="0"/>
-        </a:xfrm>
-      </p:grpSpPr>
-      <p:sp>
-        <p:nvSpPr>
-          <p:cNvPr id="2" name="Slide Image Placeholder 1"/>
-          <p:cNvSpPr>
-            <a:spLocks noGrp="1" noRot="1" noChangeAspect="1"/>
-          </p:cNvSpPr>
-          <p:nvPr>
-            <p:ph type="sldImg"/>
-          </p:nvPr>
-        </p:nvSpPr>
-        <p:spPr/>
-      </p:sp>
-      <p:sp>
-        <p:nvSpPr>
-          <p:cNvPr id="3" name="Notes Placeholder 2"/>
-          <p:cNvSpPr>
-            <a:spLocks noGrp="1"/>
-          </p:cNvSpPr>
-          <p:nvPr>
-            <p:ph type="body" idx="1"/>
-          </p:nvPr>
-        </p:nvSpPr>
-        <p:spPr/>
-        <p:txBody>
-          <a:bodyPr/>
-          <a:lstStyle/>
-          <a:p>
-            <a:r>
-              <a:rPr lang="en-US" dirty="0"/>
-              <a:t>İlginiz ve katkılarınız için teşekkür ederim. Sorularınızı ve görüşlerinizi almaktan memnuniyet duyarım.</a:t>
-            </a:r>
-            <a:endParaRPr lang="en-US" dirty="0"/>
-          </a:p>
-        </p:txBody>
-      </p:sp>
-      <p:sp>
-        <p:nvSpPr>
-          <p:cNvPr id="4" name="Slide Number Placeholder 3"/>
-          <p:cNvSpPr>
-            <a:spLocks noGrp="1"/>
-          </p:cNvSpPr>
-          <p:nvPr>
-            <p:ph type="sldNum" sz="quarter" idx="10"/>
-          </p:nvPr>
-        </p:nvSpPr>
-        <p:spPr/>
-        <p:txBody>
-          <a:bodyPr/>
-          <a:lstStyle/>
-          <a:p>
-            <a:fld id="{F7021451-1387-4CA6-816F-3879F97B5CBC}" type="slidenum">
-              <a:rPr lang="en-US"/>
-              <a:t>28</a:t>
             </a:fld>
             <a:endParaRPr lang="en-US"/>
           </a:p>
@@ -2459,10 +2383,13 @@
           <a:lstStyle/>
           <a:p>
             <a:r>
-              <a:rPr lang="en-US" dirty="0"/>
-              <a:t>Bu sunumun sonunda sigara bırakma tedavilerinin etkinliğini makalenin bulgularıyla karşılaştırmayı, bırakma başarısını etkileyen faktörleri tanımayı ve bu bulguları bir olgu üzerinden klinik pratiğimize aktarmayı hedefliyorum.</a:t>
-            </a:r>
-            <a:endParaRPr lang="en-US" dirty="0"/>
+              <a:t>Solda makalenin ilk sayfasını görüyorsunuz. Makale Türkiye Aile Hekimleri Uzmanlık Derneği'nin yayın organı olan Turkish Journal of Family Practice'te 2026 yılında yayımlanmıştır.</a:t>
+            </a:r>
+          </a:p>
+          <a:p>
+            <a:r>
+              <a:t>Çalışma retrospektif, kesitsel bir araştırmadır. Veriler Samsun Eğitim ve Araştırma Hastanesi Sigara Bırakma Polikliniği'nden elde edilmiştir.</a:t>
+            </a:r>
           </a:p>
         </p:txBody>
       </p:sp>
@@ -2547,11 +2474,13 @@
           <a:lstStyle/>
           <a:p>
             <a:r>
-              <a:rPr lang="en-US" dirty="0"/>
-              <a:t>Solda makalenin ilk sayfasını görüyorsunuz. Makale Türkiye Aile Hekimleri Uzmanlık Derneği'nin yayın organı olan Turkish Journal of Family Practice'te 2026 yılında yayımlanmıştır. Açık erişimlidir ve CC BY lisansıyla yayımlanmıştır.
-Çalışma retrospektif, kesitsel bir araştırmadır. Veriler Samsun Eğitim ve Araştırma Hastanesi Sigara Bırakma Polikliniği'nden elde edilmiştir.</a:t>
-            </a:r>
-            <a:endParaRPr lang="en-US" dirty="0"/>
+              <a:t>Giriş bölümünde tütün bağımlılığının önlenebilir ölüm nedenlerinin başında geldiği vurgulanmaktadır. Küresel Yetişkin Tütün Araştırması 2016 verilerine göre Türkiye'de sigara içme sıklığı erkeklerde yüzde 44,1, kadınlarda yüzde 19,2'dir.</a:t>
+            </a:r>
+          </a:p>
+          <a:p>
+            <a:r>
+              <a:t>Ülkemizde 500'ün üzerinde sigara bırakma polikliniği bulunmakta, bu polikliniklere 2,5 milyondan fazla kişi başvurmuş bulunmaktadır. Polikliniklerde bırakma oranları yüzde 20 ile 50 arasında değişmektedir.</a:t>
+            </a:r>
           </a:p>
         </p:txBody>
       </p:sp>
@@ -2636,11 +2565,13 @@
           <a:lstStyle/>
           <a:p>
             <a:r>
-              <a:rPr lang="en-US" dirty="0"/>
-              <a:t>Yazarlar giriş bölümünde tütün bağımlılığının önlenebilir ölüm nedenlerinin başında geldiğini vurgulamaktadır. Küresel Yetişkin Tütün Araştırması 2016 verilerine göre Türkiye'de sigara içme sıklığı erkeklerde yüzde 44,1, kadınlarda yüzde 19,2'dir.
-Ülkemizde 500'ün üzerinde sigara bırakma polikliniği bulunmakta, bu polikliniklere 2,5 milyondan fazla kişi başvurmuş bulunmaktadır. Polikliniklerde bırakma oranları yüzde 20 ile 50 arasında değişmektedir.</a:t>
-            </a:r>
-            <a:endParaRPr lang="en-US" dirty="0"/>
+              <a:t>Sigara bırakma tedavisi Onur hocamızın da dersinde anlattığı gibi davranışsal yaklaşımlar ve farmakoterapiden oluşmakta. Davranışsal tarafta Sağlık İnanç Modeli, Sağlık Kontrol Odağı, Yeniliklerin Yayılımı Modeli, Pender'in Sağlığı Geliştirme Modeli ve Transteorik Model gibi davranış değişikliği modelleri kullanılmaktadır.</a:t>
+            </a:r>
+          </a:p>
+          <a:p>
+            <a:r>
+              <a:t>Farmakoterapi nikotin replasman tedavisi, bupropion ve vareniklinden oluşmaktadır. Sitizin de yine Onur hocamızın bahsettiği gibi son yıllarda ek bir seçenek olarak kullanıma girmiştir. Farmakoterapinin davranışsal destekle birlikte verilmesi ve gerektiğinde kombinasyonların düşünülmesi önerilmektedir.</a:t>
+            </a:r>
           </a:p>
         </p:txBody>
       </p:sp>
@@ -2725,11 +2656,8 @@
           <a:lstStyle/>
           <a:p>
             <a:r>
-              <a:rPr lang="en-US" dirty="0"/>
-              <a:t>Sigara bırakma tedavisi davranışsal yaklaşımlar ve farmakoterapiden oluşmaktadır. Davranışsal tarafta motivasyonel görüşme ve Transteorik Model gibi davranış değişikliği modelleri kullanılmaktadır.
-Farmakoterapi nikotin replasman tedavisi, bupropion ve vareniklinden oluşmaktadır. Sitizin son yıllarda ek bir seçenek olarak kullanıma girmiştir. Farmakoterapinin davranışsal destekle birlikte verilmesi ve gerektiğinde kombinasyonların düşünülmesi önerilmektedir.</a:t>
-            </a:r>
-            <a:endParaRPr lang="en-US" dirty="0"/>
+              <a:t>Yazarların amacı, kombine tedavinin ve yakın takibin sigara bırakma başarısı üzerindeki etkisini değerlendirmek ve bırakmayı etkileyen hasta özelliklerini belirlemektir.</a:t>
+            </a:r>
           </a:p>
         </p:txBody>
       </p:sp>
@@ -2814,10 +2742,13 @@
           <a:lstStyle/>
           <a:p>
             <a:r>
-              <a:rPr lang="en-US" dirty="0"/>
-              <a:t>Yazarların amacı, kombine tedavinin ve yakın takibin sigara bırakma başarısı üzerindeki etkisini değerlendirmek ve bırakmayı etkileyen hasta özelliklerini belirlemektir.</a:t>
-            </a:r>
-            <a:endParaRPr lang="en-US" dirty="0"/>
+              <a:t>Çalışma 1 Ağustos 2020 ile 31 Ağustos 2024 arasını kapsamaktadır. Polikliniğe başvuran, 18 yaş ve üzeri, sigara içen 432 hastanın dosyası taranmıştır.</a:t>
+            </a:r>
+          </a:p>
+          <a:p>
+            <a:r>
+              <a:t>Verilerine eksiksiz ulaşılan 399 hasta analize alınmıştır. Tüm kayıtlar kullanıldığından örneklem büyüklüğü hesaplanmamıştır. Yıllık kontrolüne gelmeyen hastaların takip bilgileri asistan hekimlerin yaptığı uzaktan görüşmelerle tamamlanmıştır.</a:t>
+            </a:r>
           </a:p>
         </p:txBody>
       </p:sp>
@@ -2902,11 +2833,13 @@
           <a:lstStyle/>
           <a:p>
             <a:r>
-              <a:rPr lang="en-US" dirty="0"/>
-              <a:t>Çalışma 1 Ağustos 2020 ile 31 Ağustos 2024 arasını kapsamaktadır. Polikliniğe başvuran, 18 yaş ve üzeri, sigara içen 432 hastanın dosyası taranmıştır.
-Verilerine eksiksiz ulaşılan 399 hasta analize alınmıştır. Tüm kayıtlar kullanıldığından örneklem büyüklüğü hesaplanmamıştır. Yıllık kontrolüne gelmeyen hastaların takip bilgileri asistan hekimlerin yaptığı uzaktan görüşmelerle tamamlanmıştır.</a:t>
-            </a:r>
-            <a:endParaRPr lang="en-US" dirty="0"/>
+              <a:t>Hasta dosyalarından yaş, cinsiyet, meslek, alkol kullanımı, kronik hastalık, sigara öyküsü ve uygulanan tedaviler kaydedilmiştir.</a:t>
+            </a:r>
+          </a:p>
+          <a:p>
+            <a:r>
+              <a:t>Nikotin bağımlılığı ilk vizitte Fagerström Nikotin Bağımlılık Testi ile değerlendirilmiştir. 0–2 puan düşük, 3–7 puan orta, 8–10 puan yüksek bağımlılık olarak sınıflanmıştır. Testin Türkçe geçerlik ve güvenilirlik çalışması 2004 yılında Uysal ve arkadaşları tarafından yapılmıştır.</a:t>
+            </a:r>
           </a:p>
         </p:txBody>
       </p:sp>
@@ -2991,11 +2924,13 @@
           <a:lstStyle/>
           <a:p>
             <a:r>
-              <a:rPr lang="en-US" dirty="0"/>
-              <a:t>Hasta dosyalarından yaş, cinsiyet, meslek, alkol kullanımı, kronik hastalık, sigara öyküsü ve uygulanan tedaviler kaydedilmiştir.
-Nikotin bağımlılığı ilk vizitte Fagerström Nikotin Bağımlılık Testi ile değerlendirilmiştir. 0–2 puan düşük, 3–7 puan orta, 8–10 puan yüksek bağımlılık olarak sınıflanmıştır. Testin Türkçe geçerlik ve güvenilirlik çalışması 2004 yılında Uysal ve arkadaşları tarafından yapılmıştır.</a:t>
-            </a:r>
-            <a:endParaRPr lang="en-US" dirty="0"/>
+              <a:t>Tedavi FNBT puanı, kronik hastalıklar, kullanılan ilaçlar, kontrendikasyonlar ve hasta uyumuna göre bireyselleştirilmiştir.</a:t>
+            </a:r>
+          </a:p>
+          <a:p>
+            <a:r>
+              <a:t>Hastalara yalnızca davranışsal tedavi, monoterapi ya da kombine tedavi uygulanmıştır. Kombine tedavi seçenekleri bupropion ile NRT, vareniklin ile NRT, sitizin ile NRT ve üçlü tedavidir. Sağlık Bakanlığı politikaları doğrultusunda NRT ve sitizin belirli dönemlerde ücretsiz sağlanmıştır.</a:t>
+            </a:r>
           </a:p>
         </p:txBody>
       </p:sp>
@@ -3073,6 +3008,7 @@
         <a:solidFill>
           <a:srgbClr val="0F4C5C"/>
         </a:solidFill>
+        <a:effectLst/>
       </p:bgPr>
     </p:bg>
     <p:spTree>
@@ -3092,9 +3028,11 @@
       <p:sp>
         <p:nvSpPr>
           <p:cNvPr id="2" name="Text 0"/>
-          <p:cNvSpPr/>
+          <p:cNvSpPr>
+            <a:spLocks noGrp="1"/>
+          </p:cNvSpPr>
           <p:nvPr>
-            <p:ph idx="100" type="title" hasCustomPrompt="1"/>
+            <p:ph type="title" idx="100" hasCustomPrompt="1"/>
           </p:nvPr>
         </p:nvSpPr>
         <p:spPr>
@@ -3111,7 +3049,7 @@
         <p:txBody>
           <a:bodyPr wrap="square" rtlCol="0"/>
           <a:lstStyle>
-            <a:lvl1pPr algn="l" indent="0" marL="0">
+            <a:lvl1pPr marL="0" indent="0" algn="l">
               <a:buNone/>
               <a:defRPr lang="en-US" sz="3600" b="1" dirty="0">
                 <a:solidFill>
@@ -3121,7 +3059,7 @@
             </a:lvl1pPr>
           </a:lstStyle>
           <a:p>
-            <a:pPr algn="l" indent="0" marL="0">
+            <a:pPr marL="0" indent="0" algn="l">
               <a:buNone/>
             </a:pPr>
             <a:endParaRPr lang="en-US" sz="3600" dirty="0"/>
@@ -3131,9 +3069,11 @@
       <p:sp>
         <p:nvSpPr>
           <p:cNvPr id="3" name="Text 0"/>
-          <p:cNvSpPr/>
+          <p:cNvSpPr>
+            <a:spLocks noGrp="1"/>
+          </p:cNvSpPr>
           <p:nvPr>
-            <p:ph idx="101" type="body" hasCustomPrompt="1"/>
+            <p:ph type="body" idx="101" hasCustomPrompt="1"/>
           </p:nvPr>
         </p:nvSpPr>
         <p:spPr>
@@ -3150,7 +3090,7 @@
         <p:txBody>
           <a:bodyPr wrap="square" rtlCol="0"/>
           <a:lstStyle>
-            <a:lvl1pPr algn="l" indent="0" marL="0">
+            <a:lvl1pPr marL="0" indent="0" algn="l">
               <a:buNone/>
               <a:defRPr lang="en-US" sz="2000" dirty="0">
                 <a:solidFill>
@@ -3160,7 +3100,7 @@
             </a:lvl1pPr>
           </a:lstStyle>
           <a:p>
-            <a:pPr algn="l" indent="0" marL="0">
+            <a:pPr marL="0" indent="0" algn="l">
               <a:buNone/>
             </a:pPr>
             <a:endParaRPr lang="en-US" sz="2000" dirty="0"/>
@@ -3187,7 +3127,7 @@
           </a:prstGeom>
           <a:extLst>
             <a:ext uri="{C572A759-6A51-4108-AA02-DFA0A04FC94B}">
-              <ma14:wrappingTextBoxFlag xmlns:ma14="http://schemas.microsoft.com/office/mac/drawingml/2011/main" val="0"/>
+              <ma14:wrappingTextBoxFlag xmlns:ma14="http://schemas.microsoft.com/office/mac/drawingml/2011/main" xmlns="" val="0"/>
             </a:ext>
           </a:extLst>
         </p:spPr>
@@ -3205,8 +3145,8 @@
           <a:p>
             <a:pPr algn="r"/>
             <a:fld id="{F7021451-1387-4CA6-816F-3879F97B5CBC}" type="slidenum">
-              <a:rPr b="0" lang="en-US"/>
-              <a:t>1002</a:t>
+              <a:rPr lang="en-US" b="0"/>
+              <a:t>‹#›</a:t>
             </a:fld>
             <a:endParaRPr lang="en-US"/>
           </a:p>
@@ -3228,6 +3168,7 @@
         <a:solidFill>
           <a:srgbClr val="FFFFFF"/>
         </a:solidFill>
+        <a:effectLst/>
       </p:bgPr>
     </p:bg>
     <p:spTree>
@@ -3247,9 +3188,11 @@
       <p:sp>
         <p:nvSpPr>
           <p:cNvPr id="2" name="Text 0"/>
-          <p:cNvSpPr/>
+          <p:cNvSpPr>
+            <a:spLocks noGrp="1"/>
+          </p:cNvSpPr>
           <p:nvPr>
-            <p:ph idx="100" type="title" hasCustomPrompt="1"/>
+            <p:ph type="title" idx="100" hasCustomPrompt="1"/>
           </p:nvPr>
         </p:nvSpPr>
         <p:spPr>
@@ -3266,7 +3209,7 @@
         <p:txBody>
           <a:bodyPr wrap="square" rtlCol="0"/>
           <a:lstStyle>
-            <a:lvl1pPr algn="l" indent="0" marL="0">
+            <a:lvl1pPr marL="0" indent="0" algn="l">
               <a:buNone/>
               <a:defRPr lang="en-US" sz="3600" b="1" dirty="0">
                 <a:solidFill>
@@ -3276,7 +3219,7 @@
             </a:lvl1pPr>
           </a:lstStyle>
           <a:p>
-            <a:pPr algn="l" indent="0" marL="0">
+            <a:pPr marL="0" indent="0" algn="l">
               <a:buNone/>
             </a:pPr>
             <a:endParaRPr lang="en-US" sz="3600" dirty="0"/>
@@ -3303,7 +3246,7 @@
           </a:prstGeom>
           <a:extLst>
             <a:ext uri="{C572A759-6A51-4108-AA02-DFA0A04FC94B}">
-              <ma14:wrappingTextBoxFlag xmlns:ma14="http://schemas.microsoft.com/office/mac/drawingml/2011/main" val="0"/>
+              <ma14:wrappingTextBoxFlag xmlns:ma14="http://schemas.microsoft.com/office/mac/drawingml/2011/main" xmlns="" val="0"/>
             </a:ext>
           </a:extLst>
         </p:spPr>
@@ -3321,8 +3264,8 @@
           <a:p>
             <a:pPr algn="r"/>
             <a:fld id="{F7021451-1387-4CA6-816F-3879F97B5CBC}" type="slidenum">
-              <a:rPr b="0" lang="en-US"/>
-              <a:t>1003</a:t>
+              <a:rPr lang="en-US" b="0"/>
+              <a:t>‹#›</a:t>
             </a:fld>
             <a:endParaRPr lang="en-US"/>
           </a:p>
@@ -3344,6 +3287,7 @@
         <a:solidFill>
           <a:srgbClr val="0F4C5C"/>
         </a:solidFill>
+        <a:effectLst/>
       </p:bgPr>
     </p:bg>
     <p:spTree>
@@ -3363,9 +3307,11 @@
       <p:sp>
         <p:nvSpPr>
           <p:cNvPr id="2" name="Text 0"/>
-          <p:cNvSpPr/>
+          <p:cNvSpPr>
+            <a:spLocks noGrp="1"/>
+          </p:cNvSpPr>
           <p:nvPr>
-            <p:ph idx="100" type="title" hasCustomPrompt="1"/>
+            <p:ph type="title" idx="100" hasCustomPrompt="1"/>
           </p:nvPr>
         </p:nvSpPr>
         <p:spPr>
@@ -3382,7 +3328,7 @@
         <p:txBody>
           <a:bodyPr wrap="square" rtlCol="0"/>
           <a:lstStyle>
-            <a:lvl1pPr algn="l" indent="0" marL="0">
+            <a:lvl1pPr marL="0" indent="0" algn="l">
               <a:buNone/>
               <a:defRPr lang="en-US" sz="4000" b="1" dirty="0">
                 <a:solidFill>
@@ -3392,7 +3338,7 @@
             </a:lvl1pPr>
           </a:lstStyle>
           <a:p>
-            <a:pPr algn="l" indent="0" marL="0">
+            <a:pPr marL="0" indent="0" algn="l">
               <a:buNone/>
             </a:pPr>
             <a:endParaRPr lang="en-US" sz="4000" dirty="0"/>
@@ -3419,7 +3365,7 @@
           </a:prstGeom>
           <a:extLst>
             <a:ext uri="{C572A759-6A51-4108-AA02-DFA0A04FC94B}">
-              <ma14:wrappingTextBoxFlag xmlns:ma14="http://schemas.microsoft.com/office/mac/drawingml/2011/main" val="0"/>
+              <ma14:wrappingTextBoxFlag xmlns:ma14="http://schemas.microsoft.com/office/mac/drawingml/2011/main" xmlns="" val="0"/>
             </a:ext>
           </a:extLst>
         </p:spPr>
@@ -3437,8 +3383,8 @@
           <a:p>
             <a:pPr algn="r"/>
             <a:fld id="{F7021451-1387-4CA6-816F-3879F97B5CBC}" type="slidenum">
-              <a:rPr b="0" lang="en-US"/>
-              <a:t>1004</a:t>
+              <a:rPr lang="en-US" b="0"/>
+              <a:t>‹#›</a:t>
             </a:fld>
             <a:endParaRPr lang="en-US"/>
           </a:p>
@@ -3455,6 +3401,11 @@
 <file path=ppt/slideMasters/slideMaster1.xml><?xml version="1.0" encoding="utf-8"?>
 <p:sldMaster xmlns:a="http://schemas.openxmlformats.org/drawingml/2006/main" xmlns:r="http://schemas.openxmlformats.org/officeDocument/2006/relationships" xmlns:p="http://schemas.openxmlformats.org/presentationml/2006/main">
   <p:cSld>
+    <p:bg>
+      <p:bgRef idx="1001">
+        <a:schemeClr val="bg1"/>
+      </p:bgRef>
+    </p:bg>
     <p:spTree>
       <p:nvGrpSpPr>
         <p:cNvPr id="1" name=""/>
@@ -3489,7 +3440,7 @@
           </a:prstGeom>
           <a:extLst>
             <a:ext uri="{C572A759-6A51-4108-AA02-DFA0A04FC94B}">
-              <ma14:wrappingTextBoxFlag xmlns:ma14="http://schemas.microsoft.com/office/mac/drawingml/2011/main" val="0"/>
+              <ma14:wrappingTextBoxFlag xmlns:ma14="http://schemas.microsoft.com/office/mac/drawingml/2011/main" xmlns="" val="0"/>
             </a:ext>
           </a:extLst>
         </p:spPr>
@@ -3507,8 +3458,8 @@
           <a:p>
             <a:pPr algn="r"/>
             <a:fld id="{F7021451-1387-4CA6-816F-3879F97B5CBC}" type="slidenum">
-              <a:rPr b="0" lang="en-US"/>
-              <a:t>null</a:t>
+              <a:rPr lang="en-US" b="0"/>
+              <a:t>‹#›</a:t>
             </a:fld>
             <a:endParaRPr lang="en-US"/>
           </a:p>
@@ -3815,17 +3766,19 @@
           <a:bodyPr wrap="square" lIns="0" tIns="0" rIns="0" bIns="0" rtlCol="0" anchor="ctr"/>
           <a:lstStyle/>
           <a:p>
-            <a:pPr indent="0" marL="0">
-              <a:buNone/>
-            </a:pPr>
-            <a:r>
-              <a:rPr lang="en-US" sz="2200" b="1" spc="100" kern="0" dirty="0">
-                <a:solidFill>
-                  <a:schemeClr val="accent5"/>
-                </a:solidFill>
-              </a:rPr>
-              <a:t>Makale Sunumu</a:t>
-            </a:r>
+            <a:pPr marL="0" indent="0">
+              <a:buNone/>
+            </a:pPr>
+            <a:endParaRPr lang="tr-TR" sz="2200" b="1" kern="0" spc="100" dirty="0">
+              <a:solidFill>
+                <a:schemeClr val="accent5"/>
+              </a:solidFill>
+            </a:endParaRPr>
+          </a:p>
+          <a:p>
+            <a:pPr marL="0" indent="0">
+              <a:buNone/>
+            </a:pPr>
             <a:endParaRPr lang="en-US" sz="2200" dirty="0"/>
           </a:p>
         </p:txBody>
@@ -3833,9 +3786,11 @@
       <p:sp>
         <p:nvSpPr>
           <p:cNvPr id="4" name="Text 0"/>
-          <p:cNvSpPr/>
+          <p:cNvSpPr>
+            <a:spLocks noGrp="1"/>
+          </p:cNvSpPr>
           <p:nvPr>
-            <p:ph idx="100" type="title" hasCustomPrompt="1"/>
+            <p:ph type="title" idx="100" hasCustomPrompt="1"/>
           </p:nvPr>
         </p:nvSpPr>
         <p:spPr>
@@ -3853,7 +3808,7 @@
           <a:bodyPr wrap="square" lIns="0" tIns="0" rIns="0" bIns="0" rtlCol="0" anchor="t"/>
           <a:lstStyle/>
           <a:p>
-            <a:pPr algn="l" indent="0" marL="0">
+            <a:pPr marL="0" indent="0" algn="l">
               <a:buNone/>
             </a:pPr>
             <a:r>
@@ -3871,9 +3826,11 @@
       <p:sp>
         <p:nvSpPr>
           <p:cNvPr id="5" name="Text 0"/>
-          <p:cNvSpPr/>
+          <p:cNvSpPr>
+            <a:spLocks noGrp="1"/>
+          </p:cNvSpPr>
           <p:nvPr>
-            <p:ph idx="101" type="body" hasCustomPrompt="1"/>
+            <p:ph type="body" idx="101" hasCustomPrompt="1"/>
           </p:nvPr>
         </p:nvSpPr>
         <p:spPr>
@@ -3891,7 +3848,7 @@
           <a:bodyPr wrap="square" lIns="0" tIns="0" rIns="0" bIns="0" rtlCol="0" anchor="t"/>
           <a:lstStyle/>
           <a:p>
-            <a:pPr algn="l" indent="0" marL="0">
+            <a:pPr marL="0" indent="0" algn="l">
               <a:buNone/>
             </a:pPr>
             <a:r>
@@ -3905,7 +3862,7 @@
             <a:endParaRPr lang="en-US" sz="2000" dirty="0"/>
           </a:p>
           <a:p>
-            <a:pPr algn="l" indent="0" marL="0">
+            <a:pPr marL="0" indent="0" algn="l">
               <a:buNone/>
             </a:pPr>
             <a:r>
@@ -3919,16 +3876,63 @@
             <a:endParaRPr lang="en-US" sz="2000" dirty="0"/>
           </a:p>
           <a:p>
-            <a:pPr algn="l" indent="0" marL="0">
-              <a:buNone/>
-            </a:pPr>
+            <a:pPr marL="0" indent="0" algn="l">
+              <a:buNone/>
+            </a:pPr>
+            <a:r>
+              <a:rPr lang="tr-TR" sz="2000" b="1" dirty="0">
+                <a:solidFill>
+                  <a:schemeClr val="bg2"/>
+                </a:solidFill>
+              </a:rPr>
+              <a:t>	</a:t>
+            </a:r>
             <a:r>
               <a:rPr lang="en-US" sz="2000" b="1" dirty="0">
                 <a:solidFill>
                   <a:schemeClr val="bg2"/>
                 </a:solidFill>
               </a:rPr>
-              <a:t>Sunan: Dr. [Ad Soyad]</a:t>
+              <a:t>Suna</a:t>
+            </a:r>
+            <a:r>
+              <a:rPr lang="tr-TR" sz="2000" b="1" dirty="0">
+                <a:solidFill>
+                  <a:schemeClr val="bg2"/>
+                </a:solidFill>
+              </a:rPr>
+              <a:t>n		</a:t>
+            </a:r>
+            <a:r>
+              <a:rPr lang="en-US" sz="2000" b="1" dirty="0">
+                <a:solidFill>
+                  <a:schemeClr val="bg2"/>
+                </a:solidFill>
+              </a:rPr>
+              <a:t>: Dr. </a:t>
+            </a:r>
+            <a:r>
+              <a:rPr lang="tr-TR" sz="2000" b="1" dirty="0">
+                <a:solidFill>
+                  <a:schemeClr val="bg2"/>
+                </a:solidFill>
+              </a:rPr>
+              <a:t>Ahmet KIRAN</a:t>
+            </a:r>
+            <a:br>
+              <a:rPr lang="tr-TR" sz="2000" b="1" dirty="0">
+                <a:solidFill>
+                  <a:schemeClr val="bg2"/>
+                </a:solidFill>
+              </a:rPr>
+            </a:br>
+            <a:r>
+              <a:rPr lang="tr-TR" sz="2000" b="1" dirty="0">
+                <a:solidFill>
+                  <a:schemeClr val="bg2"/>
+                </a:solidFill>
+              </a:rPr>
+              <a:t>	Danışman	:Prof. Dr. Onur ÖZTÜRK</a:t>
             </a:r>
             <a:endParaRPr lang="en-US" sz="2000" dirty="0"/>
           </a:p>
@@ -3954,7 +3958,7 @@
           </a:prstGeom>
           <a:extLst>
             <a:ext uri="{C572A759-6A51-4108-AA02-DFA0A04FC94B}">
-              <ma14:wrappingTextBoxFlag xmlns:ma14="http://schemas.microsoft.com/office/mac/drawingml/2011/main" val="0"/>
+              <ma14:wrappingTextBoxFlag xmlns:ma14="http://schemas.microsoft.com/office/mac/drawingml/2011/main" xmlns="" val="0"/>
             </a:ext>
           </a:extLst>
         </p:spPr>
@@ -3972,7 +3976,7 @@
           <a:p>
             <a:pPr algn="r"/>
             <a:fld id="{F7021451-1387-4CA6-816F-3879F97B5CBC}" type="slidenum">
-              <a:rPr b="0" lang="en-US"/>
+              <a:rPr lang="en-US" b="0"/>
               <a:t>1</a:t>
             </a:fld>
             <a:endParaRPr lang="en-US"/>
@@ -3988,652 +3992,6 @@
 </file>
 
 <file path=ppt/slides/slide10.xml><?xml version="1.0" encoding="utf-8"?>
-<p:sld xmlns:a="http://schemas.openxmlformats.org/drawingml/2006/main" xmlns:r="http://schemas.openxmlformats.org/officeDocument/2006/relationships" xmlns:p="http://schemas.openxmlformats.org/presentationml/2006/main">
-  <p:cSld name="Slide 10">
-    <p:spTree>
-      <p:nvGrpSpPr>
-        <p:cNvPr id="1" name=""/>
-        <p:cNvGrpSpPr/>
-        <p:nvPr/>
-      </p:nvGrpSpPr>
-      <p:grpSpPr>
-        <a:xfrm>
-          <a:off x="0" y="0"/>
-          <a:ext cx="0" cy="0"/>
-          <a:chOff x="0" y="0"/>
-          <a:chExt cx="0" cy="0"/>
-        </a:xfrm>
-      </p:grpSpPr>
-      <p:sp>
-        <p:nvSpPr>
-          <p:cNvPr id="3" name="Text 0"/>
-          <p:cNvSpPr/>
-          <p:nvPr>
-            <p:ph idx="100" type="title" hasCustomPrompt="1"/>
-          </p:nvPr>
-        </p:nvSpPr>
-        <p:spPr>
-          <a:xfrm>
-            <a:off x="548640" y="320040"/>
-            <a:ext cx="10607040" cy="868680"/>
-          </a:xfrm>
-          <a:prstGeom prst="rect">
-            <a:avLst/>
-          </a:prstGeom>
-          <a:noFill/>
-          <a:ln/>
-        </p:spPr>
-        <p:txBody>
-          <a:bodyPr wrap="square" lIns="0" tIns="0" rIns="0" bIns="0" rtlCol="0" anchor="ctr"/>
-          <a:lstStyle/>
-          <a:p>
-            <a:pPr algn="l" indent="0" marL="0">
-              <a:buNone/>
-            </a:pPr>
-            <a:r>
-              <a:rPr lang="en-US" sz="3600" b="1" dirty="0">
-                <a:solidFill>
-                  <a:schemeClr val="accent1"/>
-                </a:solidFill>
-              </a:rPr>
-              <a:t>Tedavi yaklaşımı</a:t>
-            </a:r>
-            <a:endParaRPr lang="en-US" sz="3600" dirty="0"/>
-          </a:p>
-        </p:txBody>
-      </p:sp>
-      <p:sp>
-        <p:nvSpPr>
-          <p:cNvPr id="4" name="Kart"/>
-          <p:cNvSpPr/>
-          <p:nvPr/>
-        </p:nvSpPr>
-        <p:spPr>
-          <a:xfrm>
-            <a:off x="548640" y="1417320"/>
-            <a:ext cx="3566160" cy="3063240"/>
-          </a:xfrm>
-          <a:prstGeom prst="roundRect">
-            <a:avLst>
-              <a:gd name="adj" fmla="val 3582"/>
-            </a:avLst>
-          </a:prstGeom>
-          <a:solidFill>
-            <a:schemeClr val="bg2"/>
-          </a:solidFill>
-          <a:ln w="12700">
-            <a:solidFill>
-              <a:schemeClr val="bg2"/>
-            </a:solidFill>
-            <a:prstDash val="solid"/>
-          </a:ln>
-        </p:spPr>
-      </p:sp>
-      <p:sp>
-        <p:nvSpPr>
-          <p:cNvPr id="5" name="Ikon zemini"/>
-          <p:cNvSpPr/>
-          <p:nvPr/>
-        </p:nvSpPr>
-        <p:spPr>
-          <a:xfrm>
-            <a:off x="1783080" y="1645920"/>
-            <a:ext cx="1097280" cy="1097280"/>
-          </a:xfrm>
-          <a:prstGeom prst="ellipse">
-            <a:avLst/>
-          </a:prstGeom>
-          <a:solidFill>
-            <a:schemeClr val="accent3"/>
-          </a:solidFill>
-          <a:ln w="12700">
-            <a:solidFill>
-              <a:schemeClr val="accent3"/>
-            </a:solidFill>
-            <a:prstDash val="solid"/>
-          </a:ln>
-        </p:spPr>
-      </p:sp>
-      <p:pic>
-        <p:nvPicPr>
-          <p:cNvPr id="6" name="Ikon" descr="FaComments">    </p:cNvPr>
-          <p:cNvPicPr>
-            <a:picLocks noChangeAspect="1"/>
-          </p:cNvPicPr>
-          <p:nvPr/>
-        </p:nvPicPr>
-        <p:blipFill>
-          <a:blip r:embed="rId1"/>
-          <a:stretch>
-            <a:fillRect/>
-          </a:stretch>
-        </p:blipFill>
-        <p:spPr>
-          <a:xfrm>
-            <a:off x="2068373" y="1931213"/>
-            <a:ext cx="526694" cy="526694"/>
-          </a:xfrm>
-          <a:prstGeom prst="rect">
-            <a:avLst/>
-          </a:prstGeom>
-        </p:spPr>
-      </p:pic>
-      <p:sp>
-        <p:nvSpPr>
-          <p:cNvPr id="7" name="Text 3"/>
-          <p:cNvSpPr txBox="1"/>
-          <p:nvPr/>
-        </p:nvSpPr>
-        <p:spPr>
-          <a:xfrm>
-            <a:off x="731520" y="2834640"/>
-            <a:ext cx="3200400" cy="548640"/>
-          </a:xfrm>
-          <a:prstGeom prst="rect">
-            <a:avLst/>
-          </a:prstGeom>
-          <a:noFill/>
-          <a:ln/>
-        </p:spPr>
-        <p:txBody>
-          <a:bodyPr wrap="square" lIns="0" tIns="0" rIns="0" bIns="0" rtlCol="0" anchor="ctr"/>
-          <a:lstStyle/>
-          <a:p>
-            <a:pPr algn="ctr" indent="0" marL="0">
-              <a:buNone/>
-            </a:pPr>
-            <a:r>
-              <a:rPr lang="en-US" sz="2800" b="1" dirty="0">
-                <a:solidFill>
-                  <a:schemeClr val="accent3"/>
-                </a:solidFill>
-              </a:rPr>
-              <a:t>Davranışsal</a:t>
-            </a:r>
-            <a:endParaRPr lang="en-US" sz="2800" dirty="0"/>
-          </a:p>
-        </p:txBody>
-      </p:sp>
-      <p:sp>
-        <p:nvSpPr>
-          <p:cNvPr id="8" name="Text 4"/>
-          <p:cNvSpPr txBox="1"/>
-          <p:nvPr/>
-        </p:nvSpPr>
-        <p:spPr>
-          <a:xfrm>
-            <a:off x="822960" y="3383280"/>
-            <a:ext cx="3017520" cy="1005840"/>
-          </a:xfrm>
-          <a:prstGeom prst="rect">
-            <a:avLst/>
-          </a:prstGeom>
-          <a:noFill/>
-          <a:ln/>
-        </p:spPr>
-        <p:txBody>
-          <a:bodyPr wrap="square" lIns="0" tIns="0" rIns="0" bIns="0" rtlCol="0" anchor="t"/>
-          <a:lstStyle/>
-          <a:p>
-            <a:pPr algn="ctr" indent="0" marL="0">
-              <a:buNone/>
-            </a:pPr>
-            <a:r>
-              <a:rPr lang="en-US" sz="2000" dirty="0">
-                <a:solidFill>
-                  <a:schemeClr val="accent1"/>
-                </a:solidFill>
-              </a:rPr>
-              <a:t>Yalnızca danışmanlık</a:t>
-            </a:r>
-            <a:endParaRPr lang="en-US" sz="2000" dirty="0"/>
-          </a:p>
-        </p:txBody>
-      </p:sp>
-      <p:sp>
-        <p:nvSpPr>
-          <p:cNvPr id="9" name="Kart"/>
-          <p:cNvSpPr/>
-          <p:nvPr/>
-        </p:nvSpPr>
-        <p:spPr>
-          <a:xfrm>
-            <a:off x="4297680" y="1417320"/>
-            <a:ext cx="3566160" cy="3063240"/>
-          </a:xfrm>
-          <a:prstGeom prst="roundRect">
-            <a:avLst>
-              <a:gd name="adj" fmla="val 3582"/>
-            </a:avLst>
-          </a:prstGeom>
-          <a:solidFill>
-            <a:schemeClr val="bg2"/>
-          </a:solidFill>
-          <a:ln w="12700">
-            <a:solidFill>
-              <a:schemeClr val="bg2"/>
-            </a:solidFill>
-            <a:prstDash val="solid"/>
-          </a:ln>
-        </p:spPr>
-      </p:sp>
-      <p:sp>
-        <p:nvSpPr>
-          <p:cNvPr id="10" name="Ikon zemini"/>
-          <p:cNvSpPr/>
-          <p:nvPr/>
-        </p:nvSpPr>
-        <p:spPr>
-          <a:xfrm>
-            <a:off x="5532120" y="1645920"/>
-            <a:ext cx="1097280" cy="1097280"/>
-          </a:xfrm>
-          <a:prstGeom prst="ellipse">
-            <a:avLst/>
-          </a:prstGeom>
-          <a:solidFill>
-            <a:schemeClr val="accent2"/>
-          </a:solidFill>
-          <a:ln w="12700">
-            <a:solidFill>
-              <a:schemeClr val="accent2"/>
-            </a:solidFill>
-            <a:prstDash val="solid"/>
-          </a:ln>
-        </p:spPr>
-      </p:sp>
-      <p:pic>
-        <p:nvPicPr>
-          <p:cNvPr id="11" name="Ikon" descr="FaPills">    </p:cNvPr>
-          <p:cNvPicPr>
-            <a:picLocks noChangeAspect="1"/>
-          </p:cNvPicPr>
-          <p:nvPr/>
-        </p:nvPicPr>
-        <p:blipFill>
-          <a:blip r:embed="rId2"/>
-          <a:stretch>
-            <a:fillRect/>
-          </a:stretch>
-        </p:blipFill>
-        <p:spPr>
-          <a:xfrm>
-            <a:off x="5817413" y="1931213"/>
-            <a:ext cx="526694" cy="526694"/>
-          </a:xfrm>
-          <a:prstGeom prst="rect">
-            <a:avLst/>
-          </a:prstGeom>
-        </p:spPr>
-      </p:pic>
-      <p:sp>
-        <p:nvSpPr>
-          <p:cNvPr id="12" name="Text 7"/>
-          <p:cNvSpPr txBox="1"/>
-          <p:nvPr/>
-        </p:nvSpPr>
-        <p:spPr>
-          <a:xfrm>
-            <a:off x="4480560" y="2834640"/>
-            <a:ext cx="3200400" cy="548640"/>
-          </a:xfrm>
-          <a:prstGeom prst="rect">
-            <a:avLst/>
-          </a:prstGeom>
-          <a:noFill/>
-          <a:ln/>
-        </p:spPr>
-        <p:txBody>
-          <a:bodyPr wrap="square" lIns="0" tIns="0" rIns="0" bIns="0" rtlCol="0" anchor="ctr"/>
-          <a:lstStyle/>
-          <a:p>
-            <a:pPr algn="ctr" indent="0" marL="0">
-              <a:buNone/>
-            </a:pPr>
-            <a:r>
-              <a:rPr lang="en-US" sz="2800" b="1" dirty="0">
-                <a:solidFill>
-                  <a:schemeClr val="accent2"/>
-                </a:solidFill>
-              </a:rPr>
-              <a:t>Monoterapi</a:t>
-            </a:r>
-            <a:endParaRPr lang="en-US" sz="2800" dirty="0"/>
-          </a:p>
-        </p:txBody>
-      </p:sp>
-      <p:sp>
-        <p:nvSpPr>
-          <p:cNvPr id="13" name="Text 8"/>
-          <p:cNvSpPr txBox="1"/>
-          <p:nvPr/>
-        </p:nvSpPr>
-        <p:spPr>
-          <a:xfrm>
-            <a:off x="4572000" y="3383280"/>
-            <a:ext cx="3017520" cy="1005840"/>
-          </a:xfrm>
-          <a:prstGeom prst="rect">
-            <a:avLst/>
-          </a:prstGeom>
-          <a:noFill/>
-          <a:ln/>
-        </p:spPr>
-        <p:txBody>
-          <a:bodyPr wrap="square" lIns="0" tIns="0" rIns="0" bIns="0" rtlCol="0" anchor="t"/>
-          <a:lstStyle/>
-          <a:p>
-            <a:pPr algn="ctr" indent="0" marL="0">
-              <a:buNone/>
-            </a:pPr>
-            <a:r>
-              <a:rPr lang="en-US" sz="2000" dirty="0">
-                <a:solidFill>
-                  <a:schemeClr val="accent1"/>
-                </a:solidFill>
-              </a:rPr>
-              <a:t>Vareniklin, bupropion, sitizin veya NRT</a:t>
-            </a:r>
-            <a:endParaRPr lang="en-US" sz="2000" dirty="0"/>
-          </a:p>
-        </p:txBody>
-      </p:sp>
-      <p:sp>
-        <p:nvSpPr>
-          <p:cNvPr id="14" name="Kart"/>
-          <p:cNvSpPr/>
-          <p:nvPr/>
-        </p:nvSpPr>
-        <p:spPr>
-          <a:xfrm>
-            <a:off x="8046720" y="1417320"/>
-            <a:ext cx="3566160" cy="3063240"/>
-          </a:xfrm>
-          <a:prstGeom prst="roundRect">
-            <a:avLst>
-              <a:gd name="adj" fmla="val 3582"/>
-            </a:avLst>
-          </a:prstGeom>
-          <a:solidFill>
-            <a:schemeClr val="bg2"/>
-          </a:solidFill>
-          <a:ln w="12700">
-            <a:solidFill>
-              <a:schemeClr val="bg2"/>
-            </a:solidFill>
-            <a:prstDash val="solid"/>
-          </a:ln>
-        </p:spPr>
-      </p:sp>
-      <p:sp>
-        <p:nvSpPr>
-          <p:cNvPr id="15" name="Ikon zemini"/>
-          <p:cNvSpPr/>
-          <p:nvPr/>
-        </p:nvSpPr>
-        <p:spPr>
-          <a:xfrm>
-            <a:off x="9281160" y="1645920"/>
-            <a:ext cx="1097280" cy="1097280"/>
-          </a:xfrm>
-          <a:prstGeom prst="ellipse">
-            <a:avLst/>
-          </a:prstGeom>
-          <a:solidFill>
-            <a:schemeClr val="accent1"/>
-          </a:solidFill>
-          <a:ln w="12700">
-            <a:solidFill>
-              <a:schemeClr val="accent1"/>
-            </a:solidFill>
-            <a:prstDash val="solid"/>
-          </a:ln>
-        </p:spPr>
-      </p:sp>
-      <p:pic>
-        <p:nvPicPr>
-          <p:cNvPr id="16" name="Ikon" descr="FaExchangeAlt">    </p:cNvPr>
-          <p:cNvPicPr>
-            <a:picLocks noChangeAspect="1"/>
-          </p:cNvPicPr>
-          <p:nvPr/>
-        </p:nvPicPr>
-        <p:blipFill>
-          <a:blip r:embed="rId3"/>
-          <a:stretch>
-            <a:fillRect/>
-          </a:stretch>
-        </p:blipFill>
-        <p:spPr>
-          <a:xfrm>
-            <a:off x="9566453" y="1931213"/>
-            <a:ext cx="526694" cy="526694"/>
-          </a:xfrm>
-          <a:prstGeom prst="rect">
-            <a:avLst/>
-          </a:prstGeom>
-        </p:spPr>
-      </p:pic>
-      <p:sp>
-        <p:nvSpPr>
-          <p:cNvPr id="17" name="Text 11"/>
-          <p:cNvSpPr txBox="1"/>
-          <p:nvPr/>
-        </p:nvSpPr>
-        <p:spPr>
-          <a:xfrm>
-            <a:off x="8229600" y="2834640"/>
-            <a:ext cx="3200400" cy="548640"/>
-          </a:xfrm>
-          <a:prstGeom prst="rect">
-            <a:avLst/>
-          </a:prstGeom>
-          <a:noFill/>
-          <a:ln/>
-        </p:spPr>
-        <p:txBody>
-          <a:bodyPr wrap="square" lIns="0" tIns="0" rIns="0" bIns="0" rtlCol="0" anchor="ctr"/>
-          <a:lstStyle/>
-          <a:p>
-            <a:pPr algn="ctr" indent="0" marL="0">
-              <a:buNone/>
-            </a:pPr>
-            <a:r>
-              <a:rPr lang="en-US" sz="2800" b="1" dirty="0">
-                <a:solidFill>
-                  <a:schemeClr val="accent1"/>
-                </a:solidFill>
-              </a:rPr>
-              <a:t>Kombine</a:t>
-            </a:r>
-            <a:endParaRPr lang="en-US" sz="2800" dirty="0"/>
-          </a:p>
-        </p:txBody>
-      </p:sp>
-      <p:sp>
-        <p:nvSpPr>
-          <p:cNvPr id="18" name="Text 12"/>
-          <p:cNvSpPr txBox="1"/>
-          <p:nvPr/>
-        </p:nvSpPr>
-        <p:spPr>
-          <a:xfrm>
-            <a:off x="8321040" y="3383280"/>
-            <a:ext cx="3017520" cy="1005840"/>
-          </a:xfrm>
-          <a:prstGeom prst="rect">
-            <a:avLst/>
-          </a:prstGeom>
-          <a:noFill/>
-          <a:ln/>
-        </p:spPr>
-        <p:txBody>
-          <a:bodyPr wrap="square" lIns="0" tIns="0" rIns="0" bIns="0" rtlCol="0" anchor="t"/>
-          <a:lstStyle/>
-          <a:p>
-            <a:pPr algn="ctr" indent="0" marL="0">
-              <a:buNone/>
-            </a:pPr>
-            <a:r>
-              <a:rPr lang="en-US" sz="2000" dirty="0">
-                <a:solidFill>
-                  <a:schemeClr val="accent1"/>
-                </a:solidFill>
-              </a:rPr>
-              <a:t>Bupropion, vareniklin veya sitizin + NRT; üçlü</a:t>
-            </a:r>
-            <a:endParaRPr lang="en-US" sz="2000" dirty="0"/>
-          </a:p>
-        </p:txBody>
-      </p:sp>
-      <p:sp>
-        <p:nvSpPr>
-          <p:cNvPr id="19" name="Text 13"/>
-          <p:cNvSpPr txBox="1"/>
-          <p:nvPr/>
-        </p:nvSpPr>
-        <p:spPr>
-          <a:xfrm>
-            <a:off x="548640" y="4709160"/>
-            <a:ext cx="11064240" cy="1234440"/>
-          </a:xfrm>
-          <a:prstGeom prst="rect">
-            <a:avLst/>
-          </a:prstGeom>
-          <a:noFill/>
-          <a:ln/>
-        </p:spPr>
-        <p:txBody>
-          <a:bodyPr wrap="square" lIns="0" tIns="0" rIns="0" bIns="0" rtlCol="0" anchor="ctr"/>
-          <a:lstStyle/>
-          <a:p>
-            <a:pPr algn="just" marL="279400" indent="-279400">
-              <a:spcAft>
-                <a:spcPts val="1000"/>
-              </a:spcAft>
-              <a:buSzPct val="100000"/>
-              <a:buChar char="•"/>
-            </a:pPr>
-            <a:r>
-              <a:rPr lang="en-US" sz="2200" dirty="0">
-                <a:solidFill>
-                  <a:schemeClr val="accent1"/>
-                </a:solidFill>
-              </a:rPr>
-              <a:t>Bireyselleştirme: FNBT, komorbidite, kontrendikasyon, uyum</a:t>
-            </a:r>
-            <a:endParaRPr lang="en-US" sz="2200" dirty="0"/>
-          </a:p>
-          <a:p>
-            <a:pPr algn="just" marL="279400" indent="-279400">
-              <a:spcAft>
-                <a:spcPts val="1000"/>
-              </a:spcAft>
-              <a:buSzPct val="100000"/>
-              <a:buChar char="•"/>
-            </a:pPr>
-            <a:r>
-              <a:rPr lang="en-US" sz="2200" dirty="0">
-                <a:solidFill>
-                  <a:schemeClr val="accent1"/>
-                </a:solidFill>
-              </a:rPr>
-              <a:t>NRT ve sitizin dönemsel olarak ücretsiz sağlanmıştır</a:t>
-            </a:r>
-            <a:endParaRPr lang="en-US" sz="2200" dirty="0"/>
-          </a:p>
-        </p:txBody>
-      </p:sp>
-      <p:sp>
-        <p:nvSpPr>
-          <p:cNvPr id="20" name="Kaynak"/>
-          <p:cNvSpPr txBox="1"/>
-          <p:nvPr/>
-        </p:nvSpPr>
-        <p:spPr>
-          <a:xfrm>
-            <a:off x="548640" y="6382512"/>
-            <a:ext cx="10424160" cy="292608"/>
-          </a:xfrm>
-          <a:prstGeom prst="rect">
-            <a:avLst/>
-          </a:prstGeom>
-          <a:noFill/>
-          <a:ln/>
-        </p:spPr>
-        <p:txBody>
-          <a:bodyPr wrap="square" lIns="0" tIns="0" rIns="0" bIns="0" rtlCol="0" anchor="ctr"/>
-          <a:lstStyle/>
-          <a:p>
-            <a:pPr indent="0" marL="0">
-              <a:buNone/>
-            </a:pPr>
-            <a:r>
-              <a:rPr lang="en-US" sz="1200" i="1" dirty="0">
-                <a:solidFill>
-                  <a:schemeClr val="accent3"/>
-                </a:solidFill>
-              </a:rPr>
-              <a:t>Kaynak: Cenberlitaş E, Gökçe A, Öztürk O. Turk J Fam Pract. 2026;30(2):97-106.</a:t>
-            </a:r>
-            <a:endParaRPr lang="en-US" sz="1200" dirty="0"/>
-          </a:p>
-        </p:txBody>
-      </p:sp>
-      <p:sp>
-        <p:nvSpPr>
-          <p:cNvPr id="25" name="Slide Number Placeholder 0"/>
-          <p:cNvSpPr>
-            <a:spLocks noGrp="1"/>
-          </p:cNvSpPr>
-          <p:nvPr>
-            <p:ph type="sldNum" sz="quarter" idx="4294967295"/>
-          </p:nvPr>
-        </p:nvSpPr>
-        <p:spPr>
-          <a:xfrm>
-            <a:off x="11201400" y="6382512"/>
-            <a:ext cx="548640" cy="292608"/>
-          </a:xfrm>
-          <a:prstGeom prst="rect">
-            <a:avLst/>
-          </a:prstGeom>
-          <a:extLst>
-            <a:ext uri="{C572A759-6A51-4108-AA02-DFA0A04FC94B}">
-              <ma14:wrappingTextBoxFlag xmlns:ma14="http://schemas.microsoft.com/office/mac/drawingml/2011/main" val="0"/>
-            </a:ext>
-          </a:extLst>
-        </p:spPr>
-        <p:txBody>
-          <a:bodyPr/>
-          <a:lstStyle>
-            <a:lvl1pPr>
-              <a:defRPr sz="1400">
-                <a:solidFill>
-                  <a:srgbClr val="7A8C94"/>
-                </a:solidFill>
-              </a:defRPr>
-            </a:lvl1pPr>
-          </a:lstStyle>
-          <a:p>
-            <a:pPr algn="r"/>
-            <a:fld id="{F7021451-1387-4CA6-816F-3879F97B5CBC}" type="slidenum">
-              <a:rPr b="0" lang="en-US"/>
-              <a:t>10</a:t>
-            </a:fld>
-            <a:endParaRPr lang="en-US"/>
-          </a:p>
-        </p:txBody>
-      </p:sp>
-    </p:spTree>
-  </p:cSld>
-  <p:clrMapOvr>
-    <a:masterClrMapping/>
-  </p:clrMapOvr>
-</p:sld>
-</file>
-
-<file path=ppt/slides/slide11.xml><?xml version="1.0" encoding="utf-8"?>
 <p:sld xmlns:a="http://schemas.openxmlformats.org/drawingml/2006/main" xmlns:r="http://schemas.openxmlformats.org/officeDocument/2006/relationships" xmlns:p="http://schemas.openxmlformats.org/presentationml/2006/main">
   <p:cSld name="Slide 11">
     <p:spTree>
@@ -4653,9 +4011,11 @@
       <p:sp>
         <p:nvSpPr>
           <p:cNvPr id="3" name="Text 0"/>
-          <p:cNvSpPr/>
+          <p:cNvSpPr>
+            <a:spLocks noGrp="1"/>
+          </p:cNvSpPr>
           <p:nvPr>
-            <p:ph idx="100" type="title" hasCustomPrompt="1"/>
+            <p:ph type="title" idx="100" hasCustomPrompt="1"/>
           </p:nvPr>
         </p:nvSpPr>
         <p:spPr>
@@ -4673,7 +4033,7 @@
           <a:bodyPr wrap="square" lIns="0" tIns="0" rIns="0" bIns="0" rtlCol="0" anchor="ctr"/>
           <a:lstStyle/>
           <a:p>
-            <a:pPr algn="l" indent="0" marL="0">
+            <a:pPr marL="0" indent="0" algn="l">
               <a:buNone/>
             </a:pPr>
             <a:r>
@@ -4704,15 +4064,27 @@
         </p:nvGraphicFramePr>
         <p:xfrm>
           <a:off x="548640" y="1371600"/>
-          <a:ext cx="11064240" cy="914400"/>
+          <a:ext cx="11064240" cy="4224528"/>
         </p:xfrm>
         <a:graphic>
           <a:graphicData uri="http://schemas.openxmlformats.org/drawingml/2006/table">
             <a:tbl>
               <a:tblPr/>
               <a:tblGrid>
-                <a:gridCol w="4023360"/>
-                <a:gridCol w="7040880"/>
+                <a:gridCol w="4023360">
+                  <a:extLst>
+                    <a:ext uri="{9D8B030D-6E8A-4147-A177-3AD203B41FA5}">
+                      <a16:colId xmlns:a16="http://schemas.microsoft.com/office/drawing/2014/main" val="20000"/>
+                    </a:ext>
+                  </a:extLst>
+                </a:gridCol>
+                <a:gridCol w="7040880">
+                  <a:extLst>
+                    <a:ext uri="{9D8B030D-6E8A-4147-A177-3AD203B41FA5}">
+                      <a16:colId xmlns:a16="http://schemas.microsoft.com/office/drawing/2014/main" val="20001"/>
+                    </a:ext>
+                  </a:extLst>
+                </a:gridCol>
               </a:tblGrid>
               <a:tr h="603504">
                 <a:tc>
@@ -4720,7 +4092,7 @@
                     <a:bodyPr/>
                     <a:lstStyle/>
                     <a:p>
-                      <a:pPr indent="0" marL="0">
+                      <a:pPr marL="0" indent="0">
                         <a:buNone/>
                       </a:pPr>
                       <a:r>
@@ -4734,7 +4106,7 @@
                       <a:endParaRPr lang="en-US" sz="2200" dirty="0"/>
                     </a:p>
                   </a:txBody>
-                  <a:tcPr marL="137160" marR="137160" marT="45720" marB="45720" anchor="ctr">
+                  <a:tcPr marL="137160" marR="137160" anchor="ctr">
                     <a:lnL w="12700" cap="flat" cmpd="sng" algn="ctr">
                       <a:solidFill>
                         <a:srgbClr val="C9DCDF"/>
@@ -4781,7 +4153,7 @@
                     <a:bodyPr/>
                     <a:lstStyle/>
                     <a:p>
-                      <a:pPr indent="0" marL="0">
+                      <a:pPr marL="0" indent="0">
                         <a:buNone/>
                       </a:pPr>
                       <a:r>
@@ -4795,7 +4167,7 @@
                       <a:endParaRPr lang="en-US" sz="2200" dirty="0"/>
                     </a:p>
                   </a:txBody>
-                  <a:tcPr marL="137160" marR="137160" marT="45720" marB="45720" anchor="ctr">
+                  <a:tcPr marL="137160" marR="137160" anchor="ctr">
                     <a:lnL w="12700" cap="flat" cmpd="sng" algn="ctr">
                       <a:solidFill>
                         <a:srgbClr val="C9DCDF"/>
@@ -4837,6 +4209,11 @@
                     </a:solidFill>
                   </a:tcPr>
                 </a:tc>
+                <a:extLst>
+                  <a:ext uri="{0D108BD9-81ED-4DB2-BD59-A6C34878D82A}">
+                    <a16:rowId xmlns:a16="http://schemas.microsoft.com/office/drawing/2014/main" val="10000"/>
+                  </a:ext>
+                </a:extLst>
               </a:tr>
               <a:tr h="603504">
                 <a:tc>
@@ -4844,7 +4221,7 @@
                     <a:bodyPr/>
                     <a:lstStyle/>
                     <a:p>
-                      <a:pPr indent="0" marL="0">
+                      <a:pPr marL="0" indent="0">
                         <a:buNone/>
                       </a:pPr>
                       <a:r>
@@ -4858,7 +4235,7 @@
                       <a:endParaRPr lang="en-US" sz="2200" dirty="0"/>
                     </a:p>
                   </a:txBody>
-                  <a:tcPr marL="137160" marR="137160" marT="45720" marB="45720" anchor="ctr">
+                  <a:tcPr marL="137160" marR="137160" anchor="ctr">
                     <a:lnL w="12700" cap="flat" cmpd="sng" algn="ctr">
                       <a:solidFill>
                         <a:srgbClr val="C9DCDF"/>
@@ -4905,7 +4282,7 @@
                     <a:bodyPr/>
                     <a:lstStyle/>
                     <a:p>
-                      <a:pPr indent="0" marL="0">
+                      <a:pPr marL="0" indent="0">
                         <a:buNone/>
                       </a:pPr>
                       <a:r>
@@ -4919,7 +4296,7 @@
                       <a:endParaRPr lang="en-US" sz="2200" dirty="0"/>
                     </a:p>
                   </a:txBody>
-                  <a:tcPr marL="137160" marR="137160" marT="45720" marB="45720" anchor="ctr">
+                  <a:tcPr marL="137160" marR="137160" anchor="ctr">
                     <a:lnL w="12700" cap="flat" cmpd="sng" algn="ctr">
                       <a:solidFill>
                         <a:srgbClr val="C9DCDF"/>
@@ -4961,6 +4338,11 @@
                     </a:solidFill>
                   </a:tcPr>
                 </a:tc>
+                <a:extLst>
+                  <a:ext uri="{0D108BD9-81ED-4DB2-BD59-A6C34878D82A}">
+                    <a16:rowId xmlns:a16="http://schemas.microsoft.com/office/drawing/2014/main" val="10001"/>
+                  </a:ext>
+                </a:extLst>
               </a:tr>
               <a:tr h="603504">
                 <a:tc>
@@ -4968,7 +4350,7 @@
                     <a:bodyPr/>
                     <a:lstStyle/>
                     <a:p>
-                      <a:pPr indent="0" marL="0">
+                      <a:pPr marL="0" indent="0">
                         <a:buNone/>
                       </a:pPr>
                       <a:r>
@@ -4982,7 +4364,7 @@
                       <a:endParaRPr lang="en-US" sz="2200" dirty="0"/>
                     </a:p>
                   </a:txBody>
-                  <a:tcPr marL="137160" marR="137160" marT="45720" marB="45720" anchor="ctr">
+                  <a:tcPr marL="137160" marR="137160" anchor="ctr">
                     <a:lnL w="12700" cap="flat" cmpd="sng" algn="ctr">
                       <a:solidFill>
                         <a:srgbClr val="C9DCDF"/>
@@ -5029,7 +4411,7 @@
                     <a:bodyPr/>
                     <a:lstStyle/>
                     <a:p>
-                      <a:pPr indent="0" marL="0">
+                      <a:pPr marL="0" indent="0">
                         <a:buNone/>
                       </a:pPr>
                       <a:r>
@@ -5043,7 +4425,7 @@
                       <a:endParaRPr lang="en-US" sz="2200" dirty="0"/>
                     </a:p>
                   </a:txBody>
-                  <a:tcPr marL="137160" marR="137160" marT="45720" marB="45720" anchor="ctr">
+                  <a:tcPr marL="137160" marR="137160" anchor="ctr">
                     <a:lnL w="12700" cap="flat" cmpd="sng" algn="ctr">
                       <a:solidFill>
                         <a:srgbClr val="C9DCDF"/>
@@ -5085,6 +4467,11 @@
                     </a:solidFill>
                   </a:tcPr>
                 </a:tc>
+                <a:extLst>
+                  <a:ext uri="{0D108BD9-81ED-4DB2-BD59-A6C34878D82A}">
+                    <a16:rowId xmlns:a16="http://schemas.microsoft.com/office/drawing/2014/main" val="10002"/>
+                  </a:ext>
+                </a:extLst>
               </a:tr>
               <a:tr h="603504">
                 <a:tc>
@@ -5092,7 +4479,7 @@
                     <a:bodyPr/>
                     <a:lstStyle/>
                     <a:p>
-                      <a:pPr indent="0" marL="0">
+                      <a:pPr marL="0" indent="0">
                         <a:buNone/>
                       </a:pPr>
                       <a:r>
@@ -5106,7 +4493,7 @@
                       <a:endParaRPr lang="en-US" sz="2200" dirty="0"/>
                     </a:p>
                   </a:txBody>
-                  <a:tcPr marL="137160" marR="137160" marT="45720" marB="45720" anchor="ctr">
+                  <a:tcPr marL="137160" marR="137160" anchor="ctr">
                     <a:lnL w="12700" cap="flat" cmpd="sng" algn="ctr">
                       <a:solidFill>
                         <a:srgbClr val="C9DCDF"/>
@@ -5153,7 +4540,7 @@
                     <a:bodyPr/>
                     <a:lstStyle/>
                     <a:p>
-                      <a:pPr indent="0" marL="0">
+                      <a:pPr marL="0" indent="0">
                         <a:buNone/>
                       </a:pPr>
                       <a:r>
@@ -5167,7 +4554,7 @@
                       <a:endParaRPr lang="en-US" sz="2200" dirty="0"/>
                     </a:p>
                   </a:txBody>
-                  <a:tcPr marL="137160" marR="137160" marT="45720" marB="45720" anchor="ctr">
+                  <a:tcPr marL="137160" marR="137160" anchor="ctr">
                     <a:lnL w="12700" cap="flat" cmpd="sng" algn="ctr">
                       <a:solidFill>
                         <a:srgbClr val="C9DCDF"/>
@@ -5209,6 +4596,11 @@
                     </a:solidFill>
                   </a:tcPr>
                 </a:tc>
+                <a:extLst>
+                  <a:ext uri="{0D108BD9-81ED-4DB2-BD59-A6C34878D82A}">
+                    <a16:rowId xmlns:a16="http://schemas.microsoft.com/office/drawing/2014/main" val="10003"/>
+                  </a:ext>
+                </a:extLst>
               </a:tr>
               <a:tr h="603504">
                 <a:tc>
@@ -5216,7 +4608,7 @@
                     <a:bodyPr/>
                     <a:lstStyle/>
                     <a:p>
-                      <a:pPr indent="0" marL="0">
+                      <a:pPr marL="0" indent="0">
                         <a:buNone/>
                       </a:pPr>
                       <a:r>
@@ -5230,7 +4622,7 @@
                       <a:endParaRPr lang="en-US" sz="2200" dirty="0"/>
                     </a:p>
                   </a:txBody>
-                  <a:tcPr marL="137160" marR="137160" marT="45720" marB="45720" anchor="ctr">
+                  <a:tcPr marL="137160" marR="137160" anchor="ctr">
                     <a:lnL w="12700" cap="flat" cmpd="sng" algn="ctr">
                       <a:solidFill>
                         <a:srgbClr val="C9DCDF"/>
@@ -5277,7 +4669,7 @@
                     <a:bodyPr/>
                     <a:lstStyle/>
                     <a:p>
-                      <a:pPr indent="0" marL="0">
+                      <a:pPr marL="0" indent="0">
                         <a:buNone/>
                       </a:pPr>
                       <a:r>
@@ -5291,7 +4683,7 @@
                       <a:endParaRPr lang="en-US" sz="2200" dirty="0"/>
                     </a:p>
                   </a:txBody>
-                  <a:tcPr marL="137160" marR="137160" marT="45720" marB="45720" anchor="ctr">
+                  <a:tcPr marL="137160" marR="137160" anchor="ctr">
                     <a:lnL w="12700" cap="flat" cmpd="sng" algn="ctr">
                       <a:solidFill>
                         <a:srgbClr val="C9DCDF"/>
@@ -5333,6 +4725,11 @@
                     </a:solidFill>
                   </a:tcPr>
                 </a:tc>
+                <a:extLst>
+                  <a:ext uri="{0D108BD9-81ED-4DB2-BD59-A6C34878D82A}">
+                    <a16:rowId xmlns:a16="http://schemas.microsoft.com/office/drawing/2014/main" val="10004"/>
+                  </a:ext>
+                </a:extLst>
               </a:tr>
               <a:tr h="603504">
                 <a:tc>
@@ -5340,7 +4737,7 @@
                     <a:bodyPr/>
                     <a:lstStyle/>
                     <a:p>
-                      <a:pPr indent="0" marL="0">
+                      <a:pPr marL="0" indent="0">
                         <a:buNone/>
                       </a:pPr>
                       <a:r>
@@ -5354,7 +4751,7 @@
                       <a:endParaRPr lang="en-US" sz="2200" dirty="0"/>
                     </a:p>
                   </a:txBody>
-                  <a:tcPr marL="137160" marR="137160" marT="45720" marB="45720" anchor="ctr">
+                  <a:tcPr marL="137160" marR="137160" anchor="ctr">
                     <a:lnL w="12700" cap="flat" cmpd="sng" algn="ctr">
                       <a:solidFill>
                         <a:srgbClr val="C9DCDF"/>
@@ -5401,7 +4798,7 @@
                     <a:bodyPr/>
                     <a:lstStyle/>
                     <a:p>
-                      <a:pPr indent="0" marL="0">
+                      <a:pPr marL="0" indent="0">
                         <a:buNone/>
                       </a:pPr>
                       <a:r>
@@ -5415,7 +4812,7 @@
                       <a:endParaRPr lang="en-US" sz="2200" dirty="0"/>
                     </a:p>
                   </a:txBody>
-                  <a:tcPr marL="137160" marR="137160" marT="45720" marB="45720" anchor="ctr">
+                  <a:tcPr marL="137160" marR="137160" anchor="ctr">
                     <a:lnL w="12700" cap="flat" cmpd="sng" algn="ctr">
                       <a:solidFill>
                         <a:srgbClr val="C9DCDF"/>
@@ -5457,6 +4854,11 @@
                     </a:solidFill>
                   </a:tcPr>
                 </a:tc>
+                <a:extLst>
+                  <a:ext uri="{0D108BD9-81ED-4DB2-BD59-A6C34878D82A}">
+                    <a16:rowId xmlns:a16="http://schemas.microsoft.com/office/drawing/2014/main" val="10005"/>
+                  </a:ext>
+                </a:extLst>
               </a:tr>
               <a:tr h="603504">
                 <a:tc>
@@ -5464,7 +4866,7 @@
                     <a:bodyPr/>
                     <a:lstStyle/>
                     <a:p>
-                      <a:pPr indent="0" marL="0">
+                      <a:pPr marL="0" indent="0">
                         <a:buNone/>
                       </a:pPr>
                       <a:r>
@@ -5478,7 +4880,7 @@
                       <a:endParaRPr lang="en-US" sz="2200" dirty="0"/>
                     </a:p>
                   </a:txBody>
-                  <a:tcPr marL="137160" marR="137160" marT="45720" marB="45720" anchor="ctr">
+                  <a:tcPr marL="137160" marR="137160" anchor="ctr">
                     <a:lnL w="12700" cap="flat" cmpd="sng" algn="ctr">
                       <a:solidFill>
                         <a:srgbClr val="C9DCDF"/>
@@ -5525,7 +4927,7 @@
                     <a:bodyPr/>
                     <a:lstStyle/>
                     <a:p>
-                      <a:pPr indent="0" marL="0">
+                      <a:pPr marL="0" indent="0">
                         <a:buNone/>
                       </a:pPr>
                       <a:r>
@@ -5539,7 +4941,7 @@
                       <a:endParaRPr lang="en-US" sz="2200" dirty="0"/>
                     </a:p>
                   </a:txBody>
-                  <a:tcPr marL="137160" marR="137160" marT="45720" marB="45720" anchor="ctr">
+                  <a:tcPr marL="137160" marR="137160" anchor="ctr">
                     <a:lnL w="12700" cap="flat" cmpd="sng" algn="ctr">
                       <a:solidFill>
                         <a:srgbClr val="C9DCDF"/>
@@ -5581,6 +4983,11 @@
                     </a:solidFill>
                   </a:tcPr>
                 </a:tc>
+                <a:extLst>
+                  <a:ext uri="{0D108BD9-81ED-4DB2-BD59-A6C34878D82A}">
+                    <a16:rowId xmlns:a16="http://schemas.microsoft.com/office/drawing/2014/main" val="10006"/>
+                  </a:ext>
+                </a:extLst>
               </a:tr>
             </a:tbl>
           </a:graphicData>
@@ -5607,7 +5014,7 @@
           <a:bodyPr wrap="square" lIns="0" tIns="0" rIns="0" bIns="0" rtlCol="0" anchor="ctr"/>
           <a:lstStyle/>
           <a:p>
-            <a:pPr indent="0" marL="0">
+            <a:pPr marL="0" indent="0">
               <a:buNone/>
             </a:pPr>
             <a:r>
@@ -5642,7 +5049,7 @@
           </a:prstGeom>
           <a:extLst>
             <a:ext uri="{C572A759-6A51-4108-AA02-DFA0A04FC94B}">
-              <ma14:wrappingTextBoxFlag xmlns:ma14="http://schemas.microsoft.com/office/mac/drawingml/2011/main" val="0"/>
+              <ma14:wrappingTextBoxFlag xmlns:ma14="http://schemas.microsoft.com/office/mac/drawingml/2011/main" xmlns="" val="0"/>
             </a:ext>
           </a:extLst>
         </p:spPr>
@@ -5660,8 +5067,8 @@
           <a:p>
             <a:pPr algn="r"/>
             <a:fld id="{F7021451-1387-4CA6-816F-3879F97B5CBC}" type="slidenum">
-              <a:rPr b="0" lang="en-US"/>
-              <a:t>11</a:t>
+              <a:rPr lang="en-US" b="0"/>
+              <a:t>10</a:t>
             </a:fld>
             <a:endParaRPr lang="en-US"/>
           </a:p>
@@ -5675,7 +5082,7 @@
 </p:sld>
 </file>
 
-<file path=ppt/slides/slide12.xml><?xml version="1.0" encoding="utf-8"?>
+<file path=ppt/slides/slide11.xml><?xml version="1.0" encoding="utf-8"?>
 <p:sld xmlns:a="http://schemas.openxmlformats.org/drawingml/2006/main" xmlns:r="http://schemas.openxmlformats.org/officeDocument/2006/relationships" xmlns:p="http://schemas.openxmlformats.org/presentationml/2006/main">
   <p:cSld name="Slide 12">
     <p:spTree>
@@ -5695,9 +5102,11 @@
       <p:sp>
         <p:nvSpPr>
           <p:cNvPr id="3" name="Text 0"/>
-          <p:cNvSpPr/>
+          <p:cNvSpPr>
+            <a:spLocks noGrp="1"/>
+          </p:cNvSpPr>
           <p:nvPr>
-            <p:ph idx="100" type="title" hasCustomPrompt="1"/>
+            <p:ph type="title" idx="100" hasCustomPrompt="1"/>
           </p:nvPr>
         </p:nvSpPr>
         <p:spPr>
@@ -5715,7 +5124,7 @@
           <a:bodyPr wrap="square" lIns="0" tIns="0" rIns="0" bIns="0" rtlCol="0" anchor="ctr"/>
           <a:lstStyle/>
           <a:p>
-            <a:pPr algn="l" indent="0" marL="0">
+            <a:pPr marL="0" indent="0" algn="l">
               <a:buNone/>
             </a:pPr>
             <a:r>
@@ -5778,7 +5187,7 @@
           <a:bodyPr wrap="square" lIns="0" tIns="0" rIns="0" bIns="0" rtlCol="0" anchor="ctr"/>
           <a:lstStyle/>
           <a:p>
-            <a:pPr algn="ctr" indent="0" marL="0">
+            <a:pPr marL="0" indent="0" algn="ctr">
               <a:buNone/>
             </a:pPr>
             <a:r>
@@ -5814,7 +5223,7 @@
           <a:bodyPr wrap="square" lIns="0" tIns="0" rIns="0" bIns="0" rtlCol="0" anchor="ctr"/>
           <a:lstStyle/>
           <a:p>
-            <a:pPr algn="ctr" indent="0" marL="0">
+            <a:pPr marL="0" indent="0" algn="ctr">
               <a:buNone/>
             </a:pPr>
             <a:r>
@@ -5877,7 +5286,7 @@
           <a:bodyPr wrap="square" lIns="0" tIns="0" rIns="0" bIns="0" rtlCol="0" anchor="ctr"/>
           <a:lstStyle/>
           <a:p>
-            <a:pPr algn="ctr" indent="0" marL="0">
+            <a:pPr marL="0" indent="0" algn="ctr">
               <a:buNone/>
             </a:pPr>
             <a:r>
@@ -5913,7 +5322,7 @@
           <a:bodyPr wrap="square" lIns="0" tIns="0" rIns="0" bIns="0" rtlCol="0" anchor="ctr"/>
           <a:lstStyle/>
           <a:p>
-            <a:pPr algn="ctr" indent="0" marL="0">
+            <a:pPr marL="0" indent="0" algn="ctr">
               <a:buNone/>
             </a:pPr>
             <a:r>
@@ -5976,7 +5385,7 @@
           <a:bodyPr wrap="square" lIns="0" tIns="0" rIns="0" bIns="0" rtlCol="0" anchor="ctr"/>
           <a:lstStyle/>
           <a:p>
-            <a:pPr algn="ctr" indent="0" marL="0">
+            <a:pPr marL="0" indent="0" algn="ctr">
               <a:buNone/>
             </a:pPr>
             <a:r>
@@ -6012,7 +5421,7 @@
           <a:bodyPr wrap="square" lIns="0" tIns="0" rIns="0" bIns="0" rtlCol="0" anchor="ctr"/>
           <a:lstStyle/>
           <a:p>
-            <a:pPr algn="ctr" indent="0" marL="0">
+            <a:pPr marL="0" indent="0" algn="ctr">
               <a:buNone/>
             </a:pPr>
             <a:r>
@@ -6075,7 +5484,7 @@
           <a:bodyPr wrap="square" lIns="0" tIns="0" rIns="0" bIns="0" rtlCol="0" anchor="ctr"/>
           <a:lstStyle/>
           <a:p>
-            <a:pPr algn="ctr" indent="0" marL="0">
+            <a:pPr marL="0" indent="0" algn="ctr">
               <a:buNone/>
             </a:pPr>
             <a:r>
@@ -6111,7 +5520,7 @@
           <a:bodyPr wrap="square" lIns="0" tIns="0" rIns="0" bIns="0" rtlCol="0" anchor="ctr"/>
           <a:lstStyle/>
           <a:p>
-            <a:pPr algn="ctr" indent="0" marL="0">
+            <a:pPr marL="0" indent="0" algn="ctr">
               <a:buNone/>
             </a:pPr>
             <a:r>
@@ -6174,7 +5583,7 @@
           <a:bodyPr wrap="square" lIns="0" tIns="0" rIns="0" bIns="0" rtlCol="0" anchor="ctr"/>
           <a:lstStyle/>
           <a:p>
-            <a:pPr algn="ctr" indent="0" marL="0">
+            <a:pPr marL="0" indent="0" algn="ctr">
               <a:buNone/>
             </a:pPr>
             <a:r>
@@ -6210,7 +5619,7 @@
           <a:bodyPr wrap="square" lIns="0" tIns="0" rIns="0" bIns="0" rtlCol="0" anchor="ctr"/>
           <a:lstStyle/>
           <a:p>
-            <a:pPr algn="ctr" indent="0" marL="0">
+            <a:pPr marL="0" indent="0" algn="ctr">
               <a:buNone/>
             </a:pPr>
             <a:r>
@@ -6273,7 +5682,7 @@
           <a:bodyPr wrap="square" lIns="0" tIns="0" rIns="0" bIns="0" rtlCol="0" anchor="ctr"/>
           <a:lstStyle/>
           <a:p>
-            <a:pPr algn="ctr" indent="0" marL="0">
+            <a:pPr marL="0" indent="0" algn="ctr">
               <a:buNone/>
             </a:pPr>
             <a:r>
@@ -6309,7 +5718,7 @@
           <a:bodyPr wrap="square" lIns="0" tIns="0" rIns="0" bIns="0" rtlCol="0" anchor="ctr"/>
           <a:lstStyle/>
           <a:p>
-            <a:pPr algn="ctr" indent="0" marL="0">
+            <a:pPr marL="0" indent="0" algn="ctr">
               <a:buNone/>
             </a:pPr>
             <a:r>
@@ -6345,7 +5754,7 @@
           <a:bodyPr wrap="square" lIns="0" tIns="0" rIns="0" bIns="0" rtlCol="0" anchor="ctr"/>
           <a:lstStyle/>
           <a:p>
-            <a:pPr indent="0" marL="0">
+            <a:pPr marL="0" indent="0">
               <a:buNone/>
             </a:pPr>
             <a:r>
@@ -6380,7 +5789,7 @@
           </a:prstGeom>
           <a:extLst>
             <a:ext uri="{C572A759-6A51-4108-AA02-DFA0A04FC94B}">
-              <ma14:wrappingTextBoxFlag xmlns:ma14="http://schemas.microsoft.com/office/mac/drawingml/2011/main" val="0"/>
+              <ma14:wrappingTextBoxFlag xmlns:ma14="http://schemas.microsoft.com/office/mac/drawingml/2011/main" xmlns="" val="0"/>
             </a:ext>
           </a:extLst>
         </p:spPr>
@@ -6398,8 +5807,8 @@
           <a:p>
             <a:pPr algn="r"/>
             <a:fld id="{F7021451-1387-4CA6-816F-3879F97B5CBC}" type="slidenum">
-              <a:rPr b="0" lang="en-US"/>
-              <a:t>12</a:t>
+              <a:rPr lang="en-US" b="0"/>
+              <a:t>11</a:t>
             </a:fld>
             <a:endParaRPr lang="en-US"/>
           </a:p>
@@ -6413,7 +5822,7 @@
 </p:sld>
 </file>
 
-<file path=ppt/slides/slide13.xml><?xml version="1.0" encoding="utf-8"?>
+<file path=ppt/slides/slide12.xml><?xml version="1.0" encoding="utf-8"?>
 <p:sld xmlns:a="http://schemas.openxmlformats.org/drawingml/2006/main" xmlns:r="http://schemas.openxmlformats.org/officeDocument/2006/relationships" xmlns:p="http://schemas.openxmlformats.org/presentationml/2006/main">
   <p:cSld name="Slide 13">
     <p:spTree>
@@ -6433,9 +5842,11 @@
       <p:sp>
         <p:nvSpPr>
           <p:cNvPr id="3" name="Text 0"/>
-          <p:cNvSpPr/>
+          <p:cNvSpPr>
+            <a:spLocks noGrp="1"/>
+          </p:cNvSpPr>
           <p:nvPr>
-            <p:ph idx="100" type="title" hasCustomPrompt="1"/>
+            <p:ph type="title" idx="100" hasCustomPrompt="1"/>
           </p:nvPr>
         </p:nvSpPr>
         <p:spPr>
@@ -6453,7 +5864,7 @@
           <a:bodyPr wrap="square" lIns="0" tIns="0" rIns="0" bIns="0" rtlCol="0" anchor="ctr"/>
           <a:lstStyle/>
           <a:p>
-            <a:pPr algn="l" indent="0" marL="0">
+            <a:pPr marL="0" indent="0" algn="l">
               <a:buNone/>
             </a:pPr>
             <a:r>
@@ -6489,7 +5900,7 @@
           <a:bodyPr wrap="square" lIns="0" tIns="0" rIns="0" bIns="0" rtlCol="0" anchor="ctr"/>
           <a:lstStyle/>
           <a:p>
-            <a:pPr indent="0" marL="0">
+            <a:pPr marL="0" indent="0">
               <a:buNone/>
             </a:pPr>
             <a:r>
@@ -6552,7 +5963,7 @@
           <a:bodyPr wrap="square" lIns="0" tIns="0" rIns="0" bIns="0" rtlCol="0" anchor="ctr"/>
           <a:lstStyle/>
           <a:p>
-            <a:pPr algn="ctr" indent="0" marL="0">
+            <a:pPr marL="0" indent="0" algn="ctr">
               <a:buNone/>
             </a:pPr>
             <a:r>
@@ -6566,7 +5977,7 @@
             <a:endParaRPr lang="en-US" sz="4000" dirty="0"/>
           </a:p>
           <a:p>
-            <a:pPr algn="ctr" indent="0" marL="0">
+            <a:pPr marL="0" indent="0" algn="ctr">
               <a:buNone/>
             </a:pPr>
             <a:r>
@@ -6629,7 +6040,7 @@
           <a:bodyPr wrap="square" lIns="0" tIns="0" rIns="0" bIns="0" rtlCol="0" anchor="ctr"/>
           <a:lstStyle/>
           <a:p>
-            <a:pPr algn="ctr" indent="0" marL="0">
+            <a:pPr marL="0" indent="0" algn="ctr">
               <a:buNone/>
             </a:pPr>
             <a:r>
@@ -6643,7 +6054,7 @@
             <a:endParaRPr lang="en-US" sz="4000" dirty="0"/>
           </a:p>
           <a:p>
-            <a:pPr algn="ctr" indent="0" marL="0">
+            <a:pPr marL="0" indent="0" algn="ctr">
               <a:buNone/>
             </a:pPr>
             <a:r>
@@ -6706,7 +6117,7 @@
           <a:bodyPr wrap="square" lIns="0" tIns="0" rIns="0" bIns="0" rtlCol="0" anchor="ctr"/>
           <a:lstStyle/>
           <a:p>
-            <a:pPr algn="ctr" indent="0" marL="0">
+            <a:pPr marL="0" indent="0" algn="ctr">
               <a:buNone/>
             </a:pPr>
             <a:r>
@@ -6720,7 +6131,7 @@
             <a:endParaRPr lang="en-US" sz="4000" dirty="0"/>
           </a:p>
           <a:p>
-            <a:pPr algn="ctr" indent="0" marL="0">
+            <a:pPr marL="0" indent="0" algn="ctr">
               <a:buNone/>
             </a:pPr>
             <a:r>
@@ -6756,7 +6167,7 @@
           <a:bodyPr wrap="square" lIns="0" tIns="0" rIns="0" bIns="0" rtlCol="0" anchor="ctr"/>
           <a:lstStyle/>
           <a:p>
-            <a:pPr indent="0" marL="0">
+            <a:pPr marL="0" indent="0">
               <a:buNone/>
             </a:pPr>
             <a:r>
@@ -6819,7 +6230,7 @@
           <a:bodyPr wrap="square" lIns="0" tIns="0" rIns="0" bIns="0" rtlCol="0" anchor="ctr"/>
           <a:lstStyle/>
           <a:p>
-            <a:pPr algn="ctr" indent="0" marL="0">
+            <a:pPr marL="0" indent="0" algn="ctr">
               <a:buNone/>
             </a:pPr>
             <a:r>
@@ -6855,7 +6266,7 @@
           <a:bodyPr wrap="square" lIns="0" tIns="0" rIns="0" bIns="0" rtlCol="0" anchor="ctr"/>
           <a:lstStyle/>
           <a:p>
-            <a:pPr indent="0" marL="0">
+            <a:pPr marL="0" indent="0">
               <a:buNone/>
             </a:pPr>
             <a:r>
@@ -6918,7 +6329,7 @@
           <a:bodyPr wrap="square" lIns="0" tIns="0" rIns="0" bIns="0" rtlCol="0" anchor="ctr"/>
           <a:lstStyle/>
           <a:p>
-            <a:pPr algn="ctr" indent="0" marL="0">
+            <a:pPr marL="0" indent="0" algn="ctr">
               <a:buNone/>
             </a:pPr>
             <a:r>
@@ -6954,7 +6365,7 @@
           <a:bodyPr wrap="square" lIns="0" tIns="0" rIns="0" bIns="0" rtlCol="0" anchor="ctr"/>
           <a:lstStyle/>
           <a:p>
-            <a:pPr indent="0" marL="0">
+            <a:pPr marL="0" indent="0">
               <a:buNone/>
             </a:pPr>
             <a:r>
@@ -7017,7 +6428,7 @@
           <a:bodyPr wrap="square" lIns="0" tIns="0" rIns="0" bIns="0" rtlCol="0" anchor="ctr"/>
           <a:lstStyle/>
           <a:p>
-            <a:pPr algn="ctr" indent="0" marL="0">
+            <a:pPr marL="0" indent="0" algn="ctr">
               <a:buNone/>
             </a:pPr>
             <a:r>
@@ -7053,7 +6464,7 @@
           <a:bodyPr wrap="square" lIns="0" tIns="0" rIns="0" bIns="0" rtlCol="0" anchor="ctr"/>
           <a:lstStyle/>
           <a:p>
-            <a:pPr indent="0" marL="0">
+            <a:pPr marL="0" indent="0">
               <a:buNone/>
             </a:pPr>
             <a:r>
@@ -7089,7 +6500,7 @@
           <a:bodyPr wrap="square" lIns="0" tIns="0" rIns="0" bIns="0" rtlCol="0" anchor="ctr"/>
           <a:lstStyle/>
           <a:p>
-            <a:pPr indent="0" marL="0">
+            <a:pPr marL="0" indent="0">
               <a:buNone/>
             </a:pPr>
             <a:r>
@@ -7124,7 +6535,7 @@
           </a:prstGeom>
           <a:extLst>
             <a:ext uri="{C572A759-6A51-4108-AA02-DFA0A04FC94B}">
-              <ma14:wrappingTextBoxFlag xmlns:ma14="http://schemas.microsoft.com/office/mac/drawingml/2011/main" val="0"/>
+              <ma14:wrappingTextBoxFlag xmlns:ma14="http://schemas.microsoft.com/office/mac/drawingml/2011/main" xmlns="" val="0"/>
             </a:ext>
           </a:extLst>
         </p:spPr>
@@ -7142,8 +6553,8 @@
           <a:p>
             <a:pPr algn="r"/>
             <a:fld id="{F7021451-1387-4CA6-816F-3879F97B5CBC}" type="slidenum">
-              <a:rPr b="0" lang="en-US"/>
-              <a:t>13</a:t>
+              <a:rPr lang="en-US" b="0"/>
+              <a:t>12</a:t>
             </a:fld>
             <a:endParaRPr lang="en-US"/>
           </a:p>
@@ -7157,7 +6568,7 @@
 </p:sld>
 </file>
 
-<file path=ppt/slides/slide14.xml><?xml version="1.0" encoding="utf-8"?>
+<file path=ppt/slides/slide13.xml><?xml version="1.0" encoding="utf-8"?>
 <p:sld xmlns:a="http://schemas.openxmlformats.org/drawingml/2006/main" xmlns:r="http://schemas.openxmlformats.org/officeDocument/2006/relationships" xmlns:p="http://schemas.openxmlformats.org/presentationml/2006/main">
   <p:cSld name="Slide 14">
     <p:spTree>
@@ -7177,9 +6588,11 @@
       <p:sp>
         <p:nvSpPr>
           <p:cNvPr id="3" name="Text 0"/>
-          <p:cNvSpPr/>
+          <p:cNvSpPr>
+            <a:spLocks noGrp="1"/>
+          </p:cNvSpPr>
           <p:nvPr>
-            <p:ph idx="100" type="title" hasCustomPrompt="1"/>
+            <p:ph type="title" idx="100" hasCustomPrompt="1"/>
           </p:nvPr>
         </p:nvSpPr>
         <p:spPr>
@@ -7197,7 +6610,7 @@
           <a:bodyPr wrap="square" lIns="0" tIns="0" rIns="0" bIns="0" rtlCol="0" anchor="ctr"/>
           <a:lstStyle/>
           <a:p>
-            <a:pPr algn="l" indent="0" marL="0">
+            <a:pPr marL="0" indent="0" algn="l">
               <a:buNone/>
             </a:pPr>
             <a:r>
@@ -7239,14 +6652,14 @@
       </p:sp>
       <p:pic>
         <p:nvPicPr>
-          <p:cNvPr id="5" name="Tablo 1: Katılımcıların sosyodemografik özellikleri" descr="Tablo 1: Katılımcıların sosyodemografik özellikleri">    </p:cNvPr>
+          <p:cNvPr id="5" name="Tablo 1: Katılımcıların sosyodemografik özellikleri" descr="Tablo 1: Katılımcıların sosyodemografik özellikleri"/>
           <p:cNvPicPr>
             <a:picLocks noChangeAspect="1"/>
           </p:cNvPicPr>
           <p:nvPr/>
         </p:nvPicPr>
         <p:blipFill>
-          <a:blip r:embed="rId1"/>
+          <a:blip r:embed="rId3"/>
           <a:stretch>
             <a:fillRect/>
           </a:stretch>
@@ -7309,7 +6722,7 @@
           <a:bodyPr wrap="square" lIns="0" tIns="0" rIns="0" bIns="0" rtlCol="0" anchor="t"/>
           <a:lstStyle/>
           <a:p>
-            <a:pPr indent="0" marL="0">
+            <a:pPr marL="0" indent="0">
               <a:buNone/>
             </a:pPr>
             <a:r>
@@ -7323,7 +6736,7 @@
             <a:endParaRPr lang="en-US" sz="3000" dirty="0"/>
           </a:p>
           <a:p>
-            <a:pPr indent="0" marL="0">
+            <a:pPr marL="0" indent="0">
               <a:spcAft>
                 <a:spcPts val="1200"/>
               </a:spcAft>
@@ -7340,7 +6753,7 @@
             <a:endParaRPr lang="en-US" sz="3000" dirty="0"/>
           </a:p>
           <a:p>
-            <a:pPr indent="0" marL="0">
+            <a:pPr marL="0" indent="0">
               <a:buNone/>
             </a:pPr>
             <a:r>
@@ -7354,7 +6767,7 @@
             <a:endParaRPr lang="en-US" sz="3000" dirty="0"/>
           </a:p>
           <a:p>
-            <a:pPr indent="0" marL="0">
+            <a:pPr marL="0" indent="0">
               <a:spcAft>
                 <a:spcPts val="1200"/>
               </a:spcAft>
@@ -7371,7 +6784,7 @@
             <a:endParaRPr lang="en-US" sz="3000" dirty="0"/>
           </a:p>
           <a:p>
-            <a:pPr indent="0" marL="0">
+            <a:pPr marL="0" indent="0">
               <a:buNone/>
             </a:pPr>
             <a:r>
@@ -7385,7 +6798,7 @@
             <a:endParaRPr lang="en-US" sz="3000" dirty="0"/>
           </a:p>
           <a:p>
-            <a:pPr indent="0" marL="0">
+            <a:pPr marL="0" indent="0">
               <a:spcAft>
                 <a:spcPts val="1200"/>
               </a:spcAft>
@@ -7402,7 +6815,7 @@
             <a:endParaRPr lang="en-US" sz="3000" dirty="0"/>
           </a:p>
           <a:p>
-            <a:pPr indent="0" marL="0">
+            <a:pPr marL="0" indent="0">
               <a:buNone/>
             </a:pPr>
             <a:r>
@@ -7416,7 +6829,7 @@
             <a:endParaRPr lang="en-US" sz="3000" dirty="0"/>
           </a:p>
           <a:p>
-            <a:pPr indent="0" marL="0">
+            <a:pPr marL="0" indent="0">
               <a:buNone/>
             </a:pPr>
             <a:r>
@@ -7452,7 +6865,7 @@
           <a:bodyPr wrap="square" lIns="0" tIns="0" rIns="0" bIns="0" rtlCol="0" anchor="ctr"/>
           <a:lstStyle/>
           <a:p>
-            <a:pPr indent="0" marL="0">
+            <a:pPr marL="0" indent="0">
               <a:buNone/>
             </a:pPr>
             <a:r>
@@ -7487,7 +6900,7 @@
           </a:prstGeom>
           <a:extLst>
             <a:ext uri="{C572A759-6A51-4108-AA02-DFA0A04FC94B}">
-              <ma14:wrappingTextBoxFlag xmlns:ma14="http://schemas.microsoft.com/office/mac/drawingml/2011/main" val="0"/>
+              <ma14:wrappingTextBoxFlag xmlns:ma14="http://schemas.microsoft.com/office/mac/drawingml/2011/main" xmlns="" val="0"/>
             </a:ext>
           </a:extLst>
         </p:spPr>
@@ -7505,8 +6918,8 @@
           <a:p>
             <a:pPr algn="r"/>
             <a:fld id="{F7021451-1387-4CA6-816F-3879F97B5CBC}" type="slidenum">
-              <a:rPr b="0" lang="en-US"/>
-              <a:t>14</a:t>
+              <a:rPr lang="en-US" b="0"/>
+              <a:t>13</a:t>
             </a:fld>
             <a:endParaRPr lang="en-US"/>
           </a:p>
@@ -7520,7 +6933,7 @@
 </p:sld>
 </file>
 
-<file path=ppt/slides/slide15.xml><?xml version="1.0" encoding="utf-8"?>
+<file path=ppt/slides/slide14.xml><?xml version="1.0" encoding="utf-8"?>
 <p:sld xmlns:a="http://schemas.openxmlformats.org/drawingml/2006/main" xmlns:r="http://schemas.openxmlformats.org/officeDocument/2006/relationships" xmlns:p="http://schemas.openxmlformats.org/presentationml/2006/main">
   <p:cSld name="Slide 15">
     <p:spTree>
@@ -7540,9 +6953,11 @@
       <p:sp>
         <p:nvSpPr>
           <p:cNvPr id="3" name="Text 0"/>
-          <p:cNvSpPr/>
+          <p:cNvSpPr>
+            <a:spLocks noGrp="1"/>
+          </p:cNvSpPr>
           <p:nvPr>
-            <p:ph idx="100" type="title" hasCustomPrompt="1"/>
+            <p:ph type="title" idx="100" hasCustomPrompt="1"/>
           </p:nvPr>
         </p:nvSpPr>
         <p:spPr>
@@ -7560,7 +6975,7 @@
           <a:bodyPr wrap="square" lIns="0" tIns="0" rIns="0" bIns="0" rtlCol="0" anchor="ctr"/>
           <a:lstStyle/>
           <a:p>
-            <a:pPr algn="l" indent="0" marL="0">
+            <a:pPr marL="0" indent="0" algn="l">
               <a:buNone/>
             </a:pPr>
             <a:r>
@@ -7602,14 +7017,14 @@
       </p:sp>
       <p:pic>
         <p:nvPicPr>
-          <p:cNvPr id="5" name="Tablo 2, birinci bölüm" descr="Tablo 2, birinci bölüm">    </p:cNvPr>
+          <p:cNvPr id="5" name="Tablo 2, birinci bölüm" descr="Tablo 2, birinci bölüm"/>
           <p:cNvPicPr>
             <a:picLocks noChangeAspect="1"/>
           </p:cNvPicPr>
           <p:nvPr/>
         </p:nvPicPr>
         <p:blipFill>
-          <a:blip r:embed="rId1"/>
+          <a:blip r:embed="rId3"/>
           <a:stretch>
             <a:fillRect/>
           </a:stretch>
@@ -7672,7 +7087,7 @@
           <a:bodyPr wrap="square" lIns="0" tIns="0" rIns="0" bIns="0" rtlCol="0" anchor="t"/>
           <a:lstStyle/>
           <a:p>
-            <a:pPr indent="0" marL="0">
+            <a:pPr marL="0" indent="0">
               <a:spcAft>
                 <a:spcPts val="1200"/>
               </a:spcAft>
@@ -7689,7 +7104,7 @@
             <a:endParaRPr lang="en-US" sz="2000" dirty="0"/>
           </a:p>
           <a:p>
-            <a:pPr indent="0" marL="0">
+            <a:pPr marL="0" indent="0">
               <a:buNone/>
             </a:pPr>
             <a:r>
@@ -7725,7 +7140,7 @@
           <a:bodyPr wrap="square" lIns="0" tIns="0" rIns="0" bIns="0" rtlCol="0" anchor="ctr"/>
           <a:lstStyle/>
           <a:p>
-            <a:pPr indent="0" marL="0">
+            <a:pPr marL="0" indent="0">
               <a:buNone/>
             </a:pPr>
             <a:r>
@@ -7760,7 +7175,7 @@
           </a:prstGeom>
           <a:extLst>
             <a:ext uri="{C572A759-6A51-4108-AA02-DFA0A04FC94B}">
-              <ma14:wrappingTextBoxFlag xmlns:ma14="http://schemas.microsoft.com/office/mac/drawingml/2011/main" val="0"/>
+              <ma14:wrappingTextBoxFlag xmlns:ma14="http://schemas.microsoft.com/office/mac/drawingml/2011/main" xmlns="" val="0"/>
             </a:ext>
           </a:extLst>
         </p:spPr>
@@ -7778,8 +7193,8 @@
           <a:p>
             <a:pPr algn="r"/>
             <a:fld id="{F7021451-1387-4CA6-816F-3879F97B5CBC}" type="slidenum">
-              <a:rPr b="0" lang="en-US"/>
-              <a:t>15</a:t>
+              <a:rPr lang="en-US" b="0"/>
+              <a:t>14</a:t>
             </a:fld>
             <a:endParaRPr lang="en-US"/>
           </a:p>
@@ -7793,7 +7208,7 @@
 </p:sld>
 </file>
 
-<file path=ppt/slides/slide16.xml><?xml version="1.0" encoding="utf-8"?>
+<file path=ppt/slides/slide15.xml><?xml version="1.0" encoding="utf-8"?>
 <p:sld xmlns:a="http://schemas.openxmlformats.org/drawingml/2006/main" xmlns:r="http://schemas.openxmlformats.org/officeDocument/2006/relationships" xmlns:p="http://schemas.openxmlformats.org/presentationml/2006/main">
   <p:cSld name="Slide 16">
     <p:spTree>
@@ -7813,9 +7228,11 @@
       <p:sp>
         <p:nvSpPr>
           <p:cNvPr id="3" name="Text 0"/>
-          <p:cNvSpPr/>
+          <p:cNvSpPr>
+            <a:spLocks noGrp="1"/>
+          </p:cNvSpPr>
           <p:nvPr>
-            <p:ph idx="100" type="title" hasCustomPrompt="1"/>
+            <p:ph type="title" idx="100" hasCustomPrompt="1"/>
           </p:nvPr>
         </p:nvSpPr>
         <p:spPr>
@@ -7833,7 +7250,7 @@
           <a:bodyPr wrap="square" lIns="0" tIns="0" rIns="0" bIns="0" rtlCol="0" anchor="ctr"/>
           <a:lstStyle/>
           <a:p>
-            <a:pPr algn="l" indent="0" marL="0">
+            <a:pPr marL="0" indent="0" algn="l">
               <a:buNone/>
             </a:pPr>
             <a:r>
@@ -7875,14 +7292,14 @@
       </p:sp>
       <p:pic>
         <p:nvPicPr>
-          <p:cNvPr id="5" name="Tablo 2, ikinci bölüm" descr="Tablo 2, ikinci bölüm">    </p:cNvPr>
+          <p:cNvPr id="5" name="Tablo 2, ikinci bölüm" descr="Tablo 2, ikinci bölüm"/>
           <p:cNvPicPr>
             <a:picLocks noChangeAspect="1"/>
           </p:cNvPicPr>
           <p:nvPr/>
         </p:nvPicPr>
         <p:blipFill>
-          <a:blip r:embed="rId1"/>
+          <a:blip r:embed="rId3"/>
           <a:stretch>
             <a:fillRect/>
           </a:stretch>
@@ -7945,7 +7362,7 @@
           <a:bodyPr wrap="square" lIns="0" tIns="0" rIns="0" bIns="0" rtlCol="0" anchor="t"/>
           <a:lstStyle/>
           <a:p>
-            <a:pPr indent="0" marL="0">
+            <a:pPr marL="0" indent="0">
               <a:spcAft>
                 <a:spcPts val="1200"/>
               </a:spcAft>
@@ -7962,7 +7379,7 @@
             <a:endParaRPr lang="en-US" sz="2000" dirty="0"/>
           </a:p>
           <a:p>
-            <a:pPr indent="0" marL="0">
+            <a:pPr marL="0" indent="0">
               <a:spcAft>
                 <a:spcPts val="1200"/>
               </a:spcAft>
@@ -7979,7 +7396,7 @@
             <a:endParaRPr lang="en-US" sz="2000" dirty="0"/>
           </a:p>
           <a:p>
-            <a:pPr indent="0" marL="0">
+            <a:pPr marL="0" indent="0">
               <a:buNone/>
             </a:pPr>
             <a:r>
@@ -7993,7 +7410,7 @@
             <a:endParaRPr lang="en-US" sz="2000" dirty="0"/>
           </a:p>
           <a:p>
-            <a:pPr indent="0" marL="0">
+            <a:pPr marL="0" indent="0">
               <a:buNone/>
             </a:pPr>
             <a:r>
@@ -8029,7 +7446,7 @@
           <a:bodyPr wrap="square" lIns="0" tIns="0" rIns="0" bIns="0" rtlCol="0" anchor="ctr"/>
           <a:lstStyle/>
           <a:p>
-            <a:pPr indent="0" marL="0">
+            <a:pPr marL="0" indent="0">
               <a:buNone/>
             </a:pPr>
             <a:r>
@@ -8064,7 +7481,7 @@
           </a:prstGeom>
           <a:extLst>
             <a:ext uri="{C572A759-6A51-4108-AA02-DFA0A04FC94B}">
-              <ma14:wrappingTextBoxFlag xmlns:ma14="http://schemas.microsoft.com/office/mac/drawingml/2011/main" val="0"/>
+              <ma14:wrappingTextBoxFlag xmlns:ma14="http://schemas.microsoft.com/office/mac/drawingml/2011/main" xmlns="" val="0"/>
             </a:ext>
           </a:extLst>
         </p:spPr>
@@ -8082,8 +7499,8 @@
           <a:p>
             <a:pPr algn="r"/>
             <a:fld id="{F7021451-1387-4CA6-816F-3879F97B5CBC}" type="slidenum">
-              <a:rPr b="0" lang="en-US"/>
-              <a:t>16</a:t>
+              <a:rPr lang="en-US" b="0"/>
+              <a:t>15</a:t>
             </a:fld>
             <a:endParaRPr lang="en-US"/>
           </a:p>
@@ -8097,7 +7514,7 @@
 </p:sld>
 </file>
 
-<file path=ppt/slides/slide17.xml><?xml version="1.0" encoding="utf-8"?>
+<file path=ppt/slides/slide16.xml><?xml version="1.0" encoding="utf-8"?>
 <p:sld xmlns:a="http://schemas.openxmlformats.org/drawingml/2006/main" xmlns:r="http://schemas.openxmlformats.org/officeDocument/2006/relationships" xmlns:p="http://schemas.openxmlformats.org/presentationml/2006/main">
   <p:cSld name="Slide 17">
     <p:spTree>
@@ -8117,9 +7534,11 @@
       <p:sp>
         <p:nvSpPr>
           <p:cNvPr id="3" name="Text 0"/>
-          <p:cNvSpPr/>
+          <p:cNvSpPr>
+            <a:spLocks noGrp="1"/>
+          </p:cNvSpPr>
           <p:nvPr>
-            <p:ph idx="100" type="title" hasCustomPrompt="1"/>
+            <p:ph type="title" idx="100" hasCustomPrompt="1"/>
           </p:nvPr>
         </p:nvSpPr>
         <p:spPr>
@@ -8137,7 +7556,7 @@
           <a:bodyPr wrap="square" lIns="0" tIns="0" rIns="0" bIns="0" rtlCol="0" anchor="ctr"/>
           <a:lstStyle/>
           <a:p>
-            <a:pPr algn="l" indent="0" marL="0">
+            <a:pPr marL="0" indent="0" algn="l">
               <a:buNone/>
             </a:pPr>
             <a:r>
@@ -8179,14 +7598,14 @@
       </p:sp>
       <p:pic>
         <p:nvPicPr>
-          <p:cNvPr id="5" name="Tablo 3: Katılımcıların kullandığı tedavi seçenekleri" descr="Tablo 3: Katılımcıların kullandığı tedavi seçenekleri">    </p:cNvPr>
+          <p:cNvPr id="5" name="Tablo 3: Katılımcıların kullandığı tedavi seçenekleri" descr="Tablo 3: Katılımcıların kullandığı tedavi seçenekleri"/>
           <p:cNvPicPr>
             <a:picLocks noChangeAspect="1"/>
           </p:cNvPicPr>
           <p:nvPr/>
         </p:nvPicPr>
         <p:blipFill>
-          <a:blip r:embed="rId1"/>
+          <a:blip r:embed="rId3"/>
           <a:stretch>
             <a:fillRect/>
           </a:stretch>
@@ -8249,7 +7668,7 @@
           <a:bodyPr wrap="square" lIns="0" tIns="0" rIns="0" bIns="0" rtlCol="0" anchor="t"/>
           <a:lstStyle/>
           <a:p>
-            <a:pPr indent="0" marL="0">
+            <a:pPr marL="0" indent="0">
               <a:buNone/>
             </a:pPr>
             <a:r>
@@ -8263,7 +7682,7 @@
             <a:endParaRPr lang="en-US" sz="3000" dirty="0"/>
           </a:p>
           <a:p>
-            <a:pPr indent="0" marL="0">
+            <a:pPr marL="0" indent="0">
               <a:spcAft>
                 <a:spcPts val="1200"/>
               </a:spcAft>
@@ -8280,7 +7699,7 @@
             <a:endParaRPr lang="en-US" sz="3000" dirty="0"/>
           </a:p>
           <a:p>
-            <a:pPr indent="0" marL="0">
+            <a:pPr marL="0" indent="0">
               <a:buNone/>
             </a:pPr>
             <a:r>
@@ -8294,7 +7713,7 @@
             <a:endParaRPr lang="en-US" sz="3000" dirty="0"/>
           </a:p>
           <a:p>
-            <a:pPr indent="0" marL="0">
+            <a:pPr marL="0" indent="0">
               <a:buNone/>
             </a:pPr>
             <a:r>
@@ -8330,7 +7749,7 @@
           <a:bodyPr wrap="square" lIns="0" tIns="0" rIns="0" bIns="0" rtlCol="0" anchor="ctr"/>
           <a:lstStyle/>
           <a:p>
-            <a:pPr indent="0" marL="0">
+            <a:pPr marL="0" indent="0">
               <a:buNone/>
             </a:pPr>
             <a:r>
@@ -8365,7 +7784,7 @@
           </a:prstGeom>
           <a:extLst>
             <a:ext uri="{C572A759-6A51-4108-AA02-DFA0A04FC94B}">
-              <ma14:wrappingTextBoxFlag xmlns:ma14="http://schemas.microsoft.com/office/mac/drawingml/2011/main" val="0"/>
+              <ma14:wrappingTextBoxFlag xmlns:ma14="http://schemas.microsoft.com/office/mac/drawingml/2011/main" xmlns="" val="0"/>
             </a:ext>
           </a:extLst>
         </p:spPr>
@@ -8383,8 +7802,8 @@
           <a:p>
             <a:pPr algn="r"/>
             <a:fld id="{F7021451-1387-4CA6-816F-3879F97B5CBC}" type="slidenum">
-              <a:rPr b="0" lang="en-US"/>
-              <a:t>17</a:t>
+              <a:rPr lang="en-US" b="0"/>
+              <a:t>16</a:t>
             </a:fld>
             <a:endParaRPr lang="en-US"/>
           </a:p>
@@ -8398,7 +7817,7 @@
 </p:sld>
 </file>
 
-<file path=ppt/slides/slide18.xml><?xml version="1.0" encoding="utf-8"?>
+<file path=ppt/slides/slide17.xml><?xml version="1.0" encoding="utf-8"?>
 <p:sld xmlns:a="http://schemas.openxmlformats.org/drawingml/2006/main" xmlns:r="http://schemas.openxmlformats.org/officeDocument/2006/relationships" xmlns:p="http://schemas.openxmlformats.org/presentationml/2006/main">
   <p:cSld name="Slide 18">
     <p:spTree>
@@ -8418,9 +7837,11 @@
       <p:sp>
         <p:nvSpPr>
           <p:cNvPr id="3" name="Text 0"/>
-          <p:cNvSpPr/>
+          <p:cNvSpPr>
+            <a:spLocks noGrp="1"/>
+          </p:cNvSpPr>
           <p:nvPr>
-            <p:ph idx="100" type="title" hasCustomPrompt="1"/>
+            <p:ph type="title" idx="100" hasCustomPrompt="1"/>
           </p:nvPr>
         </p:nvSpPr>
         <p:spPr>
@@ -8438,7 +7859,7 @@
           <a:bodyPr wrap="square" lIns="0" tIns="0" rIns="0" bIns="0" rtlCol="0" anchor="ctr"/>
           <a:lstStyle/>
           <a:p>
-            <a:pPr algn="l" indent="0" marL="0">
+            <a:pPr marL="0" indent="0" algn="l">
               <a:buNone/>
             </a:pPr>
             <a:r>
@@ -8480,14 +7901,14 @@
       </p:sp>
       <p:pic>
         <p:nvPicPr>
-          <p:cNvPr id="5" name="Tablo 4: Sigara ve tedavi parametrelerinin bırakma durumu ile karşılaştırılması" descr="Tablo 4: Sigara ve tedavi parametrelerinin bırakma durumu ile karşılaştırılması">    </p:cNvPr>
+          <p:cNvPr id="5" name="Tablo 4: Sigara ve tedavi parametrelerinin bırakma durumu ile karşılaştırılması" descr="Tablo 4: Sigara ve tedavi parametrelerinin bırakma durumu ile karşılaştırılması"/>
           <p:cNvPicPr>
             <a:picLocks noChangeAspect="1"/>
           </p:cNvPicPr>
           <p:nvPr/>
         </p:nvPicPr>
         <p:blipFill>
-          <a:blip r:embed="rId1"/>
+          <a:blip r:embed="rId3"/>
           <a:stretch>
             <a:fillRect/>
           </a:stretch>
@@ -8550,7 +7971,7 @@
           <a:bodyPr wrap="square" lIns="0" tIns="0" rIns="0" bIns="0" rtlCol="0" anchor="ctr"/>
           <a:lstStyle/>
           <a:p>
-            <a:pPr algn="ctr" indent="0" marL="0">
+            <a:pPr marL="0" indent="0" algn="ctr">
               <a:buNone/>
             </a:pPr>
             <a:r>
@@ -8564,7 +7985,7 @@
             <a:endParaRPr lang="en-US" sz="2000" dirty="0"/>
           </a:p>
           <a:p>
-            <a:pPr algn="ctr" indent="0" marL="0">
+            <a:pPr marL="0" indent="0" algn="ctr">
               <a:buNone/>
             </a:pPr>
             <a:r>
@@ -8578,7 +7999,7 @@
             <a:endParaRPr lang="en-US" sz="2000" dirty="0"/>
           </a:p>
           <a:p>
-            <a:pPr algn="ctr" indent="0" marL="0">
+            <a:pPr marL="0" indent="0" algn="ctr">
               <a:buNone/>
             </a:pPr>
             <a:r>
@@ -8641,7 +8062,7 @@
           <a:bodyPr wrap="square" lIns="0" tIns="0" rIns="0" bIns="0" rtlCol="0" anchor="ctr"/>
           <a:lstStyle/>
           <a:p>
-            <a:pPr algn="ctr" indent="0" marL="0">
+            <a:pPr marL="0" indent="0" algn="ctr">
               <a:buNone/>
             </a:pPr>
             <a:r>
@@ -8655,7 +8076,7 @@
             <a:endParaRPr lang="en-US" sz="2000" dirty="0"/>
           </a:p>
           <a:p>
-            <a:pPr algn="ctr" indent="0" marL="0">
+            <a:pPr marL="0" indent="0" algn="ctr">
               <a:buNone/>
             </a:pPr>
             <a:r>
@@ -8669,7 +8090,7 @@
             <a:endParaRPr lang="en-US" sz="2000" dirty="0"/>
           </a:p>
           <a:p>
-            <a:pPr algn="ctr" indent="0" marL="0">
+            <a:pPr marL="0" indent="0" algn="ctr">
               <a:buNone/>
             </a:pPr>
             <a:r>
@@ -8732,7 +8153,7 @@
           <a:bodyPr wrap="square" lIns="0" tIns="0" rIns="0" bIns="0" rtlCol="0" anchor="ctr"/>
           <a:lstStyle/>
           <a:p>
-            <a:pPr algn="ctr" indent="0" marL="0">
+            <a:pPr marL="0" indent="0" algn="ctr">
               <a:buNone/>
             </a:pPr>
             <a:r>
@@ -8746,7 +8167,7 @@
             <a:endParaRPr lang="en-US" sz="2000" dirty="0"/>
           </a:p>
           <a:p>
-            <a:pPr algn="ctr" indent="0" marL="0">
+            <a:pPr marL="0" indent="0" algn="ctr">
               <a:buNone/>
             </a:pPr>
             <a:r>
@@ -8760,7 +8181,7 @@
             <a:endParaRPr lang="en-US" sz="2000" dirty="0"/>
           </a:p>
           <a:p>
-            <a:pPr algn="ctr" indent="0" marL="0">
+            <a:pPr marL="0" indent="0" algn="ctr">
               <a:buNone/>
             </a:pPr>
             <a:r>
@@ -8796,7 +8217,7 @@
           <a:bodyPr wrap="square" lIns="0" tIns="0" rIns="0" bIns="0" rtlCol="0" anchor="ctr"/>
           <a:lstStyle/>
           <a:p>
-            <a:pPr indent="0" marL="0">
+            <a:pPr marL="0" indent="0">
               <a:buNone/>
             </a:pPr>
             <a:r>
@@ -8831,7 +8252,7 @@
           </a:prstGeom>
           <a:extLst>
             <a:ext uri="{C572A759-6A51-4108-AA02-DFA0A04FC94B}">
-              <ma14:wrappingTextBoxFlag xmlns:ma14="http://schemas.microsoft.com/office/mac/drawingml/2011/main" val="0"/>
+              <ma14:wrappingTextBoxFlag xmlns:ma14="http://schemas.microsoft.com/office/mac/drawingml/2011/main" xmlns="" val="0"/>
             </a:ext>
           </a:extLst>
         </p:spPr>
@@ -8849,8 +8270,8 @@
           <a:p>
             <a:pPr algn="r"/>
             <a:fld id="{F7021451-1387-4CA6-816F-3879F97B5CBC}" type="slidenum">
-              <a:rPr b="0" lang="en-US"/>
-              <a:t>18</a:t>
+              <a:rPr lang="en-US" b="0"/>
+              <a:t>17</a:t>
             </a:fld>
             <a:endParaRPr lang="en-US"/>
           </a:p>
@@ -8864,7 +8285,7 @@
 </p:sld>
 </file>
 
-<file path=ppt/slides/slide19.xml><?xml version="1.0" encoding="utf-8"?>
+<file path=ppt/slides/slide18.xml><?xml version="1.0" encoding="utf-8"?>
 <p:sld xmlns:a="http://schemas.openxmlformats.org/drawingml/2006/main" xmlns:r="http://schemas.openxmlformats.org/officeDocument/2006/relationships" xmlns:p="http://schemas.openxmlformats.org/presentationml/2006/main">
   <p:cSld name="Slide 19">
     <p:spTree>
@@ -8884,9 +8305,11 @@
       <p:sp>
         <p:nvSpPr>
           <p:cNvPr id="3" name="Text 0"/>
-          <p:cNvSpPr/>
+          <p:cNvSpPr>
+            <a:spLocks noGrp="1"/>
+          </p:cNvSpPr>
           <p:nvPr>
-            <p:ph idx="100" type="title" hasCustomPrompt="1"/>
+            <p:ph type="title" idx="100" hasCustomPrompt="1"/>
           </p:nvPr>
         </p:nvSpPr>
         <p:spPr>
@@ -8904,7 +8327,7 @@
           <a:bodyPr wrap="square" lIns="0" tIns="0" rIns="0" bIns="0" rtlCol="0" anchor="ctr"/>
           <a:lstStyle/>
           <a:p>
-            <a:pPr algn="l" indent="0" marL="0">
+            <a:pPr marL="0" indent="0" algn="l">
               <a:buNone/>
             </a:pPr>
             <a:r>
@@ -8943,17 +8366,21 @@
             <a:prstDash val="solid"/>
           </a:ln>
         </p:spPr>
+        <p:txBody>
+          <a:bodyPr/>
+          <a:p/>
+        </p:txBody>
       </p:sp>
       <p:pic>
         <p:nvPicPr>
-          <p:cNvPr id="5" name="Tablo 5: Tedavi yöntemlerinin bırakma durumu ile karşılaştırılması" descr="Tablo 5: Tedavi yöntemlerinin bırakma durumu ile karşılaştırılması">    </p:cNvPr>
+          <p:cNvPr id="5" name="Tablo 5: Tedavi yöntemlerinin bırakma durumu ile karşılaştırılması" descr="Tablo 5: Tedavi yöntemlerinin bırakma durumu ile karşılaştırılması"/>
           <p:cNvPicPr>
             <a:picLocks noChangeAspect="1"/>
           </p:cNvPicPr>
           <p:nvPr/>
         </p:nvPicPr>
         <p:blipFill>
-          <a:blip r:embed="rId1"/>
+          <a:blip r:embed="rId3"/>
           <a:stretch>
             <a:fillRect/>
           </a:stretch>
@@ -8994,6 +8421,10 @@
             <a:prstDash val="solid"/>
           </a:ln>
         </p:spPr>
+        <p:txBody>
+          <a:bodyPr/>
+          <a:p/>
+        </p:txBody>
       </p:sp>
       <p:sp>
         <p:nvSpPr>
@@ -9016,7 +8447,7 @@
           <a:bodyPr wrap="square" lIns="0" tIns="0" rIns="0" bIns="0" rtlCol="0" anchor="ctr"/>
           <a:lstStyle/>
           <a:p>
-            <a:pPr algn="ctr" indent="0" marL="0">
+            <a:pPr marL="0" indent="0" algn="ctr">
               <a:buNone/>
             </a:pPr>
             <a:r>
@@ -9030,7 +8461,7 @@
             <a:endParaRPr lang="en-US" sz="2000" dirty="0"/>
           </a:p>
           <a:p>
-            <a:pPr algn="ctr" indent="0" marL="0">
+            <a:pPr marL="0" indent="0" algn="ctr">
               <a:buNone/>
             </a:pPr>
             <a:r>
@@ -9039,7 +8470,7 @@
                   <a:schemeClr val="accent1"/>
                 </a:solidFill>
               </a:rPr>
-              <a:t>Vareniklin %44,5; kombine %44,0</a:t>
+              <a:t>Kombine tedavi %44,0</a:t>
             </a:r>
             <a:endParaRPr lang="en-US" sz="2000" dirty="0"/>
           </a:p>
@@ -9071,6 +8502,10 @@
             <a:prstDash val="solid"/>
           </a:ln>
         </p:spPr>
+        <p:txBody>
+          <a:bodyPr/>
+          <a:p/>
+        </p:txBody>
       </p:sp>
       <p:sp>
         <p:nvSpPr>
@@ -9080,7 +8515,7 @@
         </p:nvSpPr>
         <p:spPr>
           <a:xfrm>
-            <a:off x="4480560" y="4817042"/>
+            <a:off x="4480560" y="4826373"/>
             <a:ext cx="3200400" cy="1309438"/>
           </a:xfrm>
           <a:prstGeom prst="rect">
@@ -9093,7 +8528,7 @@
           <a:bodyPr wrap="square" lIns="0" tIns="0" rIns="0" bIns="0" rtlCol="0" anchor="ctr"/>
           <a:lstStyle/>
           <a:p>
-            <a:pPr algn="ctr" indent="0" marL="0">
+            <a:pPr marL="0" indent="0" algn="ctr">
               <a:buNone/>
             </a:pPr>
             <a:r>
@@ -9107,7 +8542,7 @@
             <a:endParaRPr lang="en-US" sz="2000" dirty="0"/>
           </a:p>
           <a:p>
-            <a:pPr algn="ctr" indent="0" marL="0">
+            <a:pPr marL="0" indent="0" algn="ctr">
               <a:buNone/>
             </a:pPr>
             <a:r>
@@ -9148,6 +8583,10 @@
             <a:prstDash val="solid"/>
           </a:ln>
         </p:spPr>
+        <p:txBody>
+          <a:bodyPr/>
+          <a:p/>
+        </p:txBody>
       </p:sp>
       <p:sp>
         <p:nvSpPr>
@@ -9170,7 +8609,7 @@
           <a:bodyPr wrap="square" lIns="0" tIns="0" rIns="0" bIns="0" rtlCol="0" anchor="ctr"/>
           <a:lstStyle/>
           <a:p>
-            <a:pPr algn="ctr" indent="0" marL="0">
+            <a:pPr marL="0" indent="0" algn="ctr">
               <a:buNone/>
             </a:pPr>
             <a:r>
@@ -9184,7 +8623,7 @@
             <a:endParaRPr lang="en-US" sz="2000" dirty="0"/>
           </a:p>
           <a:p>
-            <a:pPr algn="ctr" indent="0" marL="0">
+            <a:pPr marL="0" indent="0" algn="ctr">
               <a:buNone/>
             </a:pPr>
             <a:r>
@@ -9220,7 +8659,7 @@
           <a:bodyPr wrap="square" lIns="0" tIns="0" rIns="0" bIns="0" rtlCol="0" anchor="ctr"/>
           <a:lstStyle/>
           <a:p>
-            <a:pPr indent="0" marL="0">
+            <a:pPr marL="0" indent="0">
               <a:buNone/>
             </a:pPr>
             <a:r>
@@ -9255,7 +8694,7 @@
           </a:prstGeom>
           <a:extLst>
             <a:ext uri="{C572A759-6A51-4108-AA02-DFA0A04FC94B}">
-              <ma14:wrappingTextBoxFlag xmlns:ma14="http://schemas.microsoft.com/office/mac/drawingml/2011/main" val="0"/>
+              <ma14:wrappingTextBoxFlag xmlns:ma14="http://schemas.microsoft.com/office/mac/drawingml/2011/main" xmlns="" val="0"/>
             </a:ext>
           </a:extLst>
         </p:spPr>
@@ -9273,7 +8712,358 @@
           <a:p>
             <a:pPr algn="r"/>
             <a:fld id="{F7021451-1387-4CA6-816F-3879F97B5CBC}" type="slidenum">
-              <a:rPr b="0" lang="en-US"/>
+              <a:rPr lang="en-US" b="0"/>
+              <a:t>18</a:t>
+            </a:fld>
+            <a:endParaRPr lang="en-US"/>
+          </a:p>
+        </p:txBody>
+      </p:sp>
+    </p:spTree>
+  </p:cSld>
+  <p:clrMapOvr>
+    <a:masterClrMapping/>
+  </p:clrMapOvr>
+</p:sld>
+</file>
+
+<file path=ppt/slides/slide19.xml><?xml version="1.0" encoding="utf-8"?>
+<p:sld xmlns:a="http://schemas.openxmlformats.org/drawingml/2006/main" xmlns:r="http://schemas.openxmlformats.org/officeDocument/2006/relationships" xmlns:p="http://schemas.openxmlformats.org/presentationml/2006/main">
+  <p:cSld name="Slide 20">
+    <p:spTree>
+      <p:nvGrpSpPr>
+        <p:cNvPr id="1" name=""/>
+        <p:cNvGrpSpPr/>
+        <p:nvPr/>
+      </p:nvGrpSpPr>
+      <p:grpSpPr>
+        <a:xfrm>
+          <a:off x="0" y="0"/>
+          <a:ext cx="0" cy="0"/>
+          <a:chOff x="0" y="0"/>
+          <a:chExt cx="0" cy="0"/>
+        </a:xfrm>
+      </p:grpSpPr>
+      <p:sp>
+        <p:nvSpPr>
+          <p:cNvPr id="3" name="Text 0"/>
+          <p:cNvSpPr>
+            <a:spLocks noGrp="1"/>
+          </p:cNvSpPr>
+          <p:nvPr>
+            <p:ph type="title" idx="100" hasCustomPrompt="1"/>
+          </p:nvPr>
+        </p:nvSpPr>
+        <p:spPr>
+          <a:xfrm>
+            <a:off x="548640" y="320040"/>
+            <a:ext cx="10607040" cy="868680"/>
+          </a:xfrm>
+          <a:prstGeom prst="rect">
+            <a:avLst/>
+          </a:prstGeom>
+          <a:noFill/>
+          <a:ln/>
+        </p:spPr>
+        <p:txBody>
+          <a:bodyPr wrap="square" lIns="0" tIns="0" rIns="0" bIns="0" rtlCol="0" anchor="ctr"/>
+          <a:lstStyle/>
+          <a:p>
+            <a:pPr marL="0" indent="0" algn="l">
+              <a:buNone/>
+            </a:pPr>
+            <a:r>
+              <a:rPr lang="en-US" sz="3600" b="1" dirty="0">
+                <a:solidFill>
+                  <a:schemeClr val="accent1"/>
+                </a:solidFill>
+              </a:rPr>
+              <a:t>Tablo 6: Lojistik regresyon</a:t>
+            </a:r>
+            <a:endParaRPr lang="en-US" sz="3600" dirty="0"/>
+          </a:p>
+        </p:txBody>
+      </p:sp>
+      <p:sp>
+        <p:nvSpPr>
+          <p:cNvPr id="4" name="Görsel çerçeve"/>
+          <p:cNvSpPr/>
+          <p:nvPr/>
+        </p:nvSpPr>
+        <p:spPr>
+          <a:xfrm>
+            <a:off x="548640" y="1325880"/>
+            <a:ext cx="7841940" cy="4892040"/>
+          </a:xfrm>
+          <a:prstGeom prst="rect">
+            <a:avLst/>
+          </a:prstGeom>
+          <a:solidFill>
+            <a:schemeClr val="bg1"/>
+          </a:solidFill>
+          <a:ln w="12700">
+            <a:solidFill>
+              <a:srgbClr val="C9DCDF"/>
+            </a:solidFill>
+            <a:prstDash val="solid"/>
+          </a:ln>
+        </p:spPr>
+      </p:sp>
+      <p:pic>
+        <p:nvPicPr>
+          <p:cNvPr id="5" name="Tablo 6: Lojistik regresyon sonuçları" descr="Tablo 6: Lojistik regresyon sonuçları"/>
+          <p:cNvPicPr>
+            <a:picLocks noChangeAspect="1"/>
+          </p:cNvPicPr>
+          <p:nvPr/>
+        </p:nvPicPr>
+        <p:blipFill>
+          <a:blip r:embed="rId3"/>
+          <a:stretch>
+            <a:fillRect/>
+          </a:stretch>
+        </p:blipFill>
+        <p:spPr>
+          <a:xfrm>
+            <a:off x="548640" y="1325880"/>
+            <a:ext cx="7841940" cy="4892040"/>
+          </a:xfrm>
+          <a:prstGeom prst="rect">
+            <a:avLst/>
+          </a:prstGeom>
+        </p:spPr>
+      </p:pic>
+      <p:sp>
+        <p:nvSpPr>
+          <p:cNvPr id="6" name="Kart"/>
+          <p:cNvSpPr/>
+          <p:nvPr/>
+        </p:nvSpPr>
+        <p:spPr>
+          <a:xfrm>
+            <a:off x="8710620" y="1325880"/>
+            <a:ext cx="2929692" cy="4892040"/>
+          </a:xfrm>
+          <a:prstGeom prst="roundRect">
+            <a:avLst>
+              <a:gd name="adj" fmla="val 3745"/>
+            </a:avLst>
+          </a:prstGeom>
+          <a:solidFill>
+            <a:schemeClr val="accent1"/>
+          </a:solidFill>
+          <a:ln w="12700">
+            <a:solidFill>
+              <a:schemeClr val="accent1"/>
+            </a:solidFill>
+            <a:prstDash val="solid"/>
+          </a:ln>
+        </p:spPr>
+      </p:sp>
+      <p:sp>
+        <p:nvSpPr>
+          <p:cNvPr id="7" name="Text 3"/>
+          <p:cNvSpPr txBox="1"/>
+          <p:nvPr/>
+        </p:nvSpPr>
+        <p:spPr>
+          <a:xfrm>
+            <a:off x="8939220" y="1508760"/>
+            <a:ext cx="2472492" cy="4526280"/>
+          </a:xfrm>
+          <a:prstGeom prst="rect">
+            <a:avLst/>
+          </a:prstGeom>
+          <a:noFill/>
+          <a:ln/>
+        </p:spPr>
+        <p:txBody>
+          <a:bodyPr wrap="square" lIns="0" tIns="0" rIns="0" bIns="0" rtlCol="0" anchor="t"/>
+          <a:lstStyle/>
+          <a:p>
+            <a:pPr marL="0" indent="0">
+              <a:spcAft>
+                <a:spcPts val="1200"/>
+              </a:spcAft>
+              <a:buNone/>
+            </a:pPr>
+            <a:r>
+              <a:rPr lang="en-US" sz="1800" b="1" dirty="0">
+                <a:solidFill>
+                  <a:schemeClr val="bg1"/>
+                </a:solidFill>
+              </a:rPr>
+              <a:t>Referans: bupropion</a:t>
+            </a:r>
+            <a:endParaRPr lang="en-US" sz="1800" dirty="0"/>
+          </a:p>
+          <a:p>
+            <a:pPr marL="0" indent="0">
+              <a:buNone/>
+            </a:pPr>
+            <a:r>
+              <a:rPr lang="en-US" sz="3000" b="1" dirty="0">
+                <a:solidFill>
+                  <a:schemeClr val="bg1"/>
+                </a:solidFill>
+              </a:rPr>
+              <a:t>4,0 kat</a:t>
+            </a:r>
+            <a:endParaRPr lang="en-US" sz="1800" dirty="0"/>
+          </a:p>
+          <a:p>
+            <a:pPr marL="0" indent="0">
+              <a:spcAft>
+                <a:spcPts val="1200"/>
+              </a:spcAft>
+              <a:buNone/>
+            </a:pPr>
+            <a:r>
+              <a:rPr lang="en-US" sz="1800" dirty="0">
+                <a:solidFill>
+                  <a:schemeClr val="bg1"/>
+                </a:solidFill>
+              </a:rPr>
+              <a:t>vareniklin, kombine</a:t>
+            </a:r>
+            <a:endParaRPr lang="en-US" sz="1800" dirty="0"/>
+          </a:p>
+          <a:p>
+            <a:pPr marL="0" indent="0">
+              <a:buNone/>
+            </a:pPr>
+            <a:r>
+              <a:rPr lang="en-US" sz="3000" b="1" dirty="0">
+                <a:solidFill>
+                  <a:schemeClr val="bg1"/>
+                </a:solidFill>
+              </a:rPr>
+              <a:t>2,0 kat</a:t>
+            </a:r>
+            <a:endParaRPr lang="en-US" sz="1800" dirty="0"/>
+          </a:p>
+          <a:p>
+            <a:pPr marL="0" indent="0">
+              <a:spcAft>
+                <a:spcPts val="1200"/>
+              </a:spcAft>
+              <a:buNone/>
+            </a:pPr>
+            <a:r>
+              <a:rPr lang="en-US" sz="1800" dirty="0">
+                <a:solidFill>
+                  <a:schemeClr val="bg1"/>
+                </a:solidFill>
+              </a:rPr>
+              <a:t>hanede sigara içen yok</a:t>
+            </a:r>
+            <a:endParaRPr lang="en-US" sz="1800" dirty="0"/>
+          </a:p>
+          <a:p>
+            <a:pPr marL="0" indent="0">
+              <a:buNone/>
+            </a:pPr>
+            <a:r>
+              <a:rPr lang="en-US" sz="3000" b="1" dirty="0">
+                <a:solidFill>
+                  <a:schemeClr val="bg1"/>
+                </a:solidFill>
+              </a:rPr>
+              <a:t>1,6 kat</a:t>
+            </a:r>
+            <a:endParaRPr lang="en-US" sz="1800" dirty="0"/>
+          </a:p>
+          <a:p>
+            <a:pPr marL="0" indent="0">
+              <a:buNone/>
+            </a:pPr>
+            <a:r>
+              <a:rPr lang="en-US" sz="1800" dirty="0">
+                <a:solidFill>
+                  <a:schemeClr val="bg1"/>
+                </a:solidFill>
+              </a:rPr>
+              <a:t>yakınma yok</a:t>
+            </a:r>
+            <a:endParaRPr lang="en-US" sz="1800" dirty="0"/>
+          </a:p>
+        </p:txBody>
+      </p:sp>
+      <p:sp>
+        <p:nvSpPr>
+          <p:cNvPr id="8" name="Kaynak"/>
+          <p:cNvSpPr txBox="1"/>
+          <p:nvPr/>
+        </p:nvSpPr>
+        <p:spPr>
+          <a:xfrm>
+            <a:off x="548640" y="6382512"/>
+            <a:ext cx="10424160" cy="292608"/>
+          </a:xfrm>
+          <a:prstGeom prst="rect">
+            <a:avLst/>
+          </a:prstGeom>
+          <a:noFill/>
+          <a:ln/>
+        </p:spPr>
+        <p:txBody>
+          <a:bodyPr wrap="square" lIns="0" tIns="0" rIns="0" bIns="0" rtlCol="0" anchor="ctr"/>
+          <a:lstStyle/>
+          <a:p>
+            <a:pPr marL="0" indent="0">
+              <a:buNone/>
+            </a:pPr>
+            <a:r>
+              <a:rPr lang="en-US" sz="1200" i="1" dirty="0">
+                <a:solidFill>
+                  <a:schemeClr val="accent3"/>
+                </a:solidFill>
+              </a:rPr>
+              <a:t>Görsel: Cenberlitaş E, Gökçe A, Öztürk O. Turk J Fam Pract. 2026;30(2):97-106, Tablo 6.</a:t>
+            </a:r>
+            <a:endParaRPr lang="en-US" sz="1200" dirty="0"/>
+          </a:p>
+        </p:txBody>
+      </p:sp>
+      <p:sp>
+        <p:nvSpPr>
+          <p:cNvPr id="25" name="Slide Number Placeholder 0"/>
+          <p:cNvSpPr>
+            <a:spLocks noGrp="1"/>
+          </p:cNvSpPr>
+          <p:nvPr>
+            <p:ph type="sldNum" sz="quarter" idx="4294967295"/>
+          </p:nvPr>
+        </p:nvSpPr>
+        <p:spPr>
+          <a:xfrm>
+            <a:off x="11201400" y="6382512"/>
+            <a:ext cx="548640" cy="292608"/>
+          </a:xfrm>
+          <a:prstGeom prst="rect">
+            <a:avLst/>
+          </a:prstGeom>
+          <a:extLst>
+            <a:ext uri="{C572A759-6A51-4108-AA02-DFA0A04FC94B}">
+              <ma14:wrappingTextBoxFlag xmlns:ma14="http://schemas.microsoft.com/office/mac/drawingml/2011/main" xmlns="" val="0"/>
+            </a:ext>
+          </a:extLst>
+        </p:spPr>
+        <p:txBody>
+          <a:bodyPr/>
+          <a:lstStyle>
+            <a:lvl1pPr>
+              <a:defRPr sz="1400">
+                <a:solidFill>
+                  <a:srgbClr val="7A8C94"/>
+                </a:solidFill>
+              </a:defRPr>
+            </a:lvl1pPr>
+          </a:lstStyle>
+          <a:p>
+            <a:pPr algn="r"/>
+            <a:fld id="{F7021451-1387-4CA6-816F-3879F97B5CBC}" type="slidenum">
+              <a:rPr lang="en-US" b="0"/>
               <a:t>19</a:t>
             </a:fld>
             <a:endParaRPr lang="en-US"/>
@@ -9308,9 +9098,11 @@
       <p:sp>
         <p:nvSpPr>
           <p:cNvPr id="3" name="Text 0"/>
-          <p:cNvSpPr/>
+          <p:cNvSpPr>
+            <a:spLocks noGrp="1"/>
+          </p:cNvSpPr>
           <p:nvPr>
-            <p:ph idx="100" type="title" hasCustomPrompt="1"/>
+            <p:ph type="title" idx="100" hasCustomPrompt="1"/>
           </p:nvPr>
         </p:nvSpPr>
         <p:spPr>
@@ -9328,7 +9120,7 @@
           <a:bodyPr wrap="square" lIns="0" tIns="0" rIns="0" bIns="0" rtlCol="0" anchor="ctr"/>
           <a:lstStyle/>
           <a:p>
-            <a:pPr algn="l" indent="0" marL="0">
+            <a:pPr marL="0" indent="0" algn="l">
               <a:buNone/>
             </a:pPr>
             <a:r>
@@ -9369,6 +9161,10 @@
             <a:prstDash val="solid"/>
           </a:ln>
         </p:spPr>
+        <p:txBody>
+          <a:bodyPr/>
+          <a:p/>
+        </p:txBody>
       </p:sp>
       <p:sp>
         <p:nvSpPr>
@@ -9394,6 +9190,10 @@
             <a:prstDash val="solid"/>
           </a:ln>
         </p:spPr>
+        <p:txBody>
+          <a:bodyPr/>
+          <a:p/>
+        </p:txBody>
       </p:sp>
       <p:sp>
         <p:nvSpPr>
@@ -9416,7 +9216,7 @@
           <a:bodyPr wrap="square" lIns="0" tIns="0" rIns="0" bIns="0" rtlCol="0" anchor="ctr"/>
           <a:lstStyle/>
           <a:p>
-            <a:pPr algn="ctr" indent="0" marL="0">
+            <a:pPr marL="0" indent="0" algn="ctr">
               <a:buNone/>
             </a:pPr>
             <a:r>
@@ -9452,7 +9252,7 @@
           <a:bodyPr wrap="square" lIns="0" tIns="0" rIns="0" bIns="0" rtlCol="0" anchor="ctr"/>
           <a:lstStyle/>
           <a:p>
-            <a:pPr indent="0" marL="0">
+            <a:pPr marL="0" indent="0">
               <a:buNone/>
             </a:pPr>
             <a:r>
@@ -9493,6 +9293,10 @@
             <a:prstDash val="solid"/>
           </a:ln>
         </p:spPr>
+        <p:txBody>
+          <a:bodyPr/>
+          <a:p/>
+        </p:txBody>
       </p:sp>
       <p:sp>
         <p:nvSpPr>
@@ -9518,6 +9322,10 @@
             <a:prstDash val="solid"/>
           </a:ln>
         </p:spPr>
+        <p:txBody>
+          <a:bodyPr/>
+          <a:p/>
+        </p:txBody>
       </p:sp>
       <p:sp>
         <p:nvSpPr>
@@ -9540,7 +9348,7 @@
           <a:bodyPr wrap="square" lIns="0" tIns="0" rIns="0" bIns="0" rtlCol="0" anchor="ctr"/>
           <a:lstStyle/>
           <a:p>
-            <a:pPr algn="ctr" indent="0" marL="0">
+            <a:pPr marL="0" indent="0" algn="ctr">
               <a:buNone/>
             </a:pPr>
             <a:r>
@@ -9576,7 +9384,7 @@
           <a:bodyPr wrap="square" lIns="0" tIns="0" rIns="0" bIns="0" rtlCol="0" anchor="ctr"/>
           <a:lstStyle/>
           <a:p>
-            <a:pPr indent="0" marL="0">
+            <a:pPr marL="0" indent="0">
               <a:buNone/>
             </a:pPr>
             <a:r>
@@ -9617,6 +9425,10 @@
             <a:prstDash val="solid"/>
           </a:ln>
         </p:spPr>
+        <p:txBody>
+          <a:bodyPr/>
+          <a:p/>
+        </p:txBody>
       </p:sp>
       <p:sp>
         <p:nvSpPr>
@@ -9642,6 +9454,10 @@
             <a:prstDash val="solid"/>
           </a:ln>
         </p:spPr>
+        <p:txBody>
+          <a:bodyPr/>
+          <a:p/>
+        </p:txBody>
       </p:sp>
       <p:sp>
         <p:nvSpPr>
@@ -9664,7 +9480,7 @@
           <a:bodyPr wrap="square" lIns="0" tIns="0" rIns="0" bIns="0" rtlCol="0" anchor="ctr"/>
           <a:lstStyle/>
           <a:p>
-            <a:pPr algn="ctr" indent="0" marL="0">
+            <a:pPr marL="0" indent="0" algn="ctr">
               <a:buNone/>
             </a:pPr>
             <a:r>
@@ -9700,7 +9516,7 @@
           <a:bodyPr wrap="square" lIns="0" tIns="0" rIns="0" bIns="0" rtlCol="0" anchor="ctr"/>
           <a:lstStyle/>
           <a:p>
-            <a:pPr indent="0" marL="0">
+            <a:pPr marL="0" indent="0">
               <a:buNone/>
             </a:pPr>
             <a:r>
@@ -9741,6 +9557,10 @@
             <a:prstDash val="solid"/>
           </a:ln>
         </p:spPr>
+        <p:txBody>
+          <a:bodyPr/>
+          <a:p/>
+        </p:txBody>
       </p:sp>
       <p:sp>
         <p:nvSpPr>
@@ -9766,6 +9586,10 @@
             <a:prstDash val="solid"/>
           </a:ln>
         </p:spPr>
+        <p:txBody>
+          <a:bodyPr/>
+          <a:p/>
+        </p:txBody>
       </p:sp>
       <p:sp>
         <p:nvSpPr>
@@ -9788,7 +9612,7 @@
           <a:bodyPr wrap="square" lIns="0" tIns="0" rIns="0" bIns="0" rtlCol="0" anchor="ctr"/>
           <a:lstStyle/>
           <a:p>
-            <a:pPr algn="ctr" indent="0" marL="0">
+            <a:pPr marL="0" indent="0" algn="ctr">
               <a:buNone/>
             </a:pPr>
             <a:r>
@@ -9824,7 +9648,7 @@
           <a:bodyPr wrap="square" lIns="0" tIns="0" rIns="0" bIns="0" rtlCol="0" anchor="ctr"/>
           <a:lstStyle/>
           <a:p>
-            <a:pPr indent="0" marL="0">
+            <a:pPr marL="0" indent="0">
               <a:buNone/>
             </a:pPr>
             <a:r>
@@ -9865,6 +9689,10 @@
             <a:prstDash val="solid"/>
           </a:ln>
         </p:spPr>
+        <p:txBody>
+          <a:bodyPr/>
+          <a:p/>
+        </p:txBody>
       </p:sp>
       <p:sp>
         <p:nvSpPr>
@@ -9890,6 +9718,10 @@
             <a:prstDash val="solid"/>
           </a:ln>
         </p:spPr>
+        <p:txBody>
+          <a:bodyPr/>
+          <a:p/>
+        </p:txBody>
       </p:sp>
       <p:sp>
         <p:nvSpPr>
@@ -9912,7 +9744,7 @@
           <a:bodyPr wrap="square" lIns="0" tIns="0" rIns="0" bIns="0" rtlCol="0" anchor="ctr"/>
           <a:lstStyle/>
           <a:p>
-            <a:pPr algn="ctr" indent="0" marL="0">
+            <a:pPr marL="0" indent="0" algn="ctr">
               <a:buNone/>
             </a:pPr>
             <a:r>
@@ -9948,7 +9780,7 @@
           <a:bodyPr wrap="square" lIns="0" tIns="0" rIns="0" bIns="0" rtlCol="0" anchor="ctr"/>
           <a:lstStyle/>
           <a:p>
-            <a:pPr indent="0" marL="0">
+            <a:pPr marL="0" indent="0">
               <a:buNone/>
             </a:pPr>
             <a:r>
@@ -9960,6 +9792,51 @@
               <a:t>Sonuç ve öneriler</a:t>
             </a:r>
             <a:endParaRPr lang="en-US" sz="2600" dirty="0"/>
+          </a:p>
+        </p:txBody>
+      </p:sp>
+      <p:sp>
+        <p:nvSpPr>
+          <p:cNvPr id="2" name="Slide Number Placeholder 0"/>
+          <p:cNvSpPr>
+            <a:spLocks noGrp="1"/>
+          </p:cNvSpPr>
+          <p:nvPr>
+            <p:ph type="sldNum" sz="quarter" idx="4294967295"/>
+          </p:nvPr>
+        </p:nvSpPr>
+        <p:spPr>
+          <a:xfrm>
+            <a:off x="11201400" y="6382512"/>
+            <a:ext cx="548640" cy="292608"/>
+          </a:xfrm>
+          <a:prstGeom prst="rect">
+            <a:avLst/>
+          </a:prstGeom>
+          <a:extLst>
+            <a:ext uri="{C572A759-6A51-4108-AA02-DFA0A04FC94B}">
+              <ma14:wrappingTextBoxFlag xmlns:ma14="http://schemas.microsoft.com/office/mac/drawingml/2011/main" xmlns="" val="0"/>
+            </a:ext>
+          </a:extLst>
+        </p:spPr>
+        <p:txBody>
+          <a:bodyPr/>
+          <a:lstStyle>
+            <a:lvl1pPr>
+              <a:defRPr sz="1400">
+                <a:solidFill>
+                  <a:srgbClr val="7A8C94"/>
+                </a:solidFill>
+              </a:defRPr>
+            </a:lvl1pPr>
+          </a:lstStyle>
+          <a:p>
+            <a:pPr algn="r"/>
+            <a:fld id="{F7021451-1387-4CA6-816F-3879F97B5CBC}" type="slidenum">
+              <a:rPr lang="en-US" b="0"/>
+              <a:t>2</a:t>
+            </a:fld>
+            <a:endParaRPr lang="en-US"/>
           </a:p>
         </p:txBody>
       </p:sp>
@@ -9989,6 +9866,10 @@
             <a:prstDash val="solid"/>
           </a:ln>
         </p:spPr>
+        <p:txBody>
+          <a:bodyPr/>
+          <a:p/>
+        </p:txBody>
       </p:sp>
       <p:sp>
         <p:nvSpPr>
@@ -10014,10 +9895,14 @@
             <a:prstDash val="solid"/>
           </a:ln>
         </p:spPr>
-      </p:sp>
-      <p:sp>
-        <p:nvSpPr>
-          <p:cNvPr id="26" name="Text 23"/>
+        <p:txBody>
+          <a:bodyPr/>
+          <a:p/>
+        </p:txBody>
+      </p:sp>
+      <p:sp>
+        <p:nvSpPr>
+          <p:cNvPr id="26" name="Text 15"/>
           <p:cNvSpPr txBox="1"/>
           <p:nvPr/>
         </p:nvSpPr>
@@ -10036,7 +9921,7 @@
           <a:bodyPr wrap="square" lIns="0" tIns="0" rIns="0" bIns="0" rtlCol="0" anchor="ctr"/>
           <a:lstStyle/>
           <a:p>
-            <a:pPr algn="ctr" indent="0" marL="0">
+            <a:pPr marL="0" indent="0" algn="ctr">
               <a:buNone/>
             </a:pPr>
             <a:r>
@@ -10053,7 +9938,7 @@
       </p:sp>
       <p:sp>
         <p:nvSpPr>
-          <p:cNvPr id="27" name="Text 24"/>
+          <p:cNvPr id="27" name="Text 16"/>
           <p:cNvSpPr txBox="1"/>
           <p:nvPr/>
         </p:nvSpPr>
@@ -10072,7 +9957,7 @@
           <a:bodyPr wrap="square" lIns="0" tIns="0" rIns="0" bIns="0" rtlCol="0" anchor="ctr"/>
           <a:lstStyle/>
           <a:p>
-            <a:pPr indent="0" marL="0">
+            <a:pPr marL="0" indent="0">
               <a:buNone/>
             </a:pPr>
             <a:r>
@@ -10084,51 +9969,6 @@
               <a:t>Olgu ve özet</a:t>
             </a:r>
             <a:endParaRPr lang="en-US" sz="2600" dirty="0"/>
-          </a:p>
-        </p:txBody>
-      </p:sp>
-      <p:sp>
-        <p:nvSpPr>
-          <p:cNvPr id="25" name="Slide Number Placeholder 0"/>
-          <p:cNvSpPr>
-            <a:spLocks noGrp="1"/>
-          </p:cNvSpPr>
-          <p:nvPr>
-            <p:ph type="sldNum" sz="quarter" idx="4294967295"/>
-          </p:nvPr>
-        </p:nvSpPr>
-        <p:spPr>
-          <a:xfrm>
-            <a:off x="11201400" y="6382512"/>
-            <a:ext cx="548640" cy="292608"/>
-          </a:xfrm>
-          <a:prstGeom prst="rect">
-            <a:avLst/>
-          </a:prstGeom>
-          <a:extLst>
-            <a:ext uri="{C572A759-6A51-4108-AA02-DFA0A04FC94B}">
-              <ma14:wrappingTextBoxFlag xmlns:ma14="http://schemas.microsoft.com/office/mac/drawingml/2011/main" val="0"/>
-            </a:ext>
-          </a:extLst>
-        </p:spPr>
-        <p:txBody>
-          <a:bodyPr/>
-          <a:lstStyle>
-            <a:lvl1pPr>
-              <a:defRPr sz="1400">
-                <a:solidFill>
-                  <a:srgbClr val="7A8C94"/>
-                </a:solidFill>
-              </a:defRPr>
-            </a:lvl1pPr>
-          </a:lstStyle>
-          <a:p>
-            <a:pPr algn="r"/>
-            <a:fld id="{F7021451-1387-4CA6-816F-3879F97B5CBC}" type="slidenum">
-              <a:rPr b="0" lang="en-US"/>
-              <a:t>2</a:t>
-            </a:fld>
-            <a:endParaRPr lang="en-US"/>
           </a:p>
         </p:txBody>
       </p:sp>
@@ -10141,355 +9981,6 @@
 </file>
 
 <file path=ppt/slides/slide20.xml><?xml version="1.0" encoding="utf-8"?>
-<p:sld xmlns:a="http://schemas.openxmlformats.org/drawingml/2006/main" xmlns:r="http://schemas.openxmlformats.org/officeDocument/2006/relationships" xmlns:p="http://schemas.openxmlformats.org/presentationml/2006/main">
-  <p:cSld name="Slide 20">
-    <p:spTree>
-      <p:nvGrpSpPr>
-        <p:cNvPr id="1" name=""/>
-        <p:cNvGrpSpPr/>
-        <p:nvPr/>
-      </p:nvGrpSpPr>
-      <p:grpSpPr>
-        <a:xfrm>
-          <a:off x="0" y="0"/>
-          <a:ext cx="0" cy="0"/>
-          <a:chOff x="0" y="0"/>
-          <a:chExt cx="0" cy="0"/>
-        </a:xfrm>
-      </p:grpSpPr>
-      <p:sp>
-        <p:nvSpPr>
-          <p:cNvPr id="3" name="Text 0"/>
-          <p:cNvSpPr/>
-          <p:nvPr>
-            <p:ph idx="100" type="title" hasCustomPrompt="1"/>
-          </p:nvPr>
-        </p:nvSpPr>
-        <p:spPr>
-          <a:xfrm>
-            <a:off x="548640" y="320040"/>
-            <a:ext cx="10607040" cy="868680"/>
-          </a:xfrm>
-          <a:prstGeom prst="rect">
-            <a:avLst/>
-          </a:prstGeom>
-          <a:noFill/>
-          <a:ln/>
-        </p:spPr>
-        <p:txBody>
-          <a:bodyPr wrap="square" lIns="0" tIns="0" rIns="0" bIns="0" rtlCol="0" anchor="ctr"/>
-          <a:lstStyle/>
-          <a:p>
-            <a:pPr algn="l" indent="0" marL="0">
-              <a:buNone/>
-            </a:pPr>
-            <a:r>
-              <a:rPr lang="en-US" sz="3600" b="1" dirty="0">
-                <a:solidFill>
-                  <a:schemeClr val="accent1"/>
-                </a:solidFill>
-              </a:rPr>
-              <a:t>Tablo 6: Lojistik regresyon</a:t>
-            </a:r>
-            <a:endParaRPr lang="en-US" sz="3600" dirty="0"/>
-          </a:p>
-        </p:txBody>
-      </p:sp>
-      <p:sp>
-        <p:nvSpPr>
-          <p:cNvPr id="4" name="Görsel çerçeve"/>
-          <p:cNvSpPr/>
-          <p:nvPr/>
-        </p:nvSpPr>
-        <p:spPr>
-          <a:xfrm>
-            <a:off x="548640" y="1325880"/>
-            <a:ext cx="7841940" cy="4892040"/>
-          </a:xfrm>
-          <a:prstGeom prst="rect">
-            <a:avLst/>
-          </a:prstGeom>
-          <a:solidFill>
-            <a:schemeClr val="bg1"/>
-          </a:solidFill>
-          <a:ln w="12700">
-            <a:solidFill>
-              <a:srgbClr val="C9DCDF"/>
-            </a:solidFill>
-            <a:prstDash val="solid"/>
-          </a:ln>
-        </p:spPr>
-      </p:sp>
-      <p:pic>
-        <p:nvPicPr>
-          <p:cNvPr id="5" name="Tablo 6: Lojistik regresyon sonuçları" descr="Tablo 6: Lojistik regresyon sonuçları">    </p:cNvPr>
-          <p:cNvPicPr>
-            <a:picLocks noChangeAspect="1"/>
-          </p:cNvPicPr>
-          <p:nvPr/>
-        </p:nvPicPr>
-        <p:blipFill>
-          <a:blip r:embed="rId1"/>
-          <a:stretch>
-            <a:fillRect/>
-          </a:stretch>
-        </p:blipFill>
-        <p:spPr>
-          <a:xfrm>
-            <a:off x="548640" y="1325880"/>
-            <a:ext cx="7841940" cy="4892040"/>
-          </a:xfrm>
-          <a:prstGeom prst="rect">
-            <a:avLst/>
-          </a:prstGeom>
-        </p:spPr>
-      </p:pic>
-      <p:sp>
-        <p:nvSpPr>
-          <p:cNvPr id="6" name="Kart"/>
-          <p:cNvSpPr/>
-          <p:nvPr/>
-        </p:nvSpPr>
-        <p:spPr>
-          <a:xfrm>
-            <a:off x="8710620" y="1325880"/>
-            <a:ext cx="2929692" cy="4892040"/>
-          </a:xfrm>
-          <a:prstGeom prst="roundRect">
-            <a:avLst>
-              <a:gd name="adj" fmla="val 3745"/>
-            </a:avLst>
-          </a:prstGeom>
-          <a:solidFill>
-            <a:schemeClr val="accent1"/>
-          </a:solidFill>
-          <a:ln w="12700">
-            <a:solidFill>
-              <a:schemeClr val="accent1"/>
-            </a:solidFill>
-            <a:prstDash val="solid"/>
-          </a:ln>
-        </p:spPr>
-      </p:sp>
-      <p:sp>
-        <p:nvSpPr>
-          <p:cNvPr id="7" name="Text 3"/>
-          <p:cNvSpPr txBox="1"/>
-          <p:nvPr/>
-        </p:nvSpPr>
-        <p:spPr>
-          <a:xfrm>
-            <a:off x="8939220" y="1508760"/>
-            <a:ext cx="2472492" cy="4526280"/>
-          </a:xfrm>
-          <a:prstGeom prst="rect">
-            <a:avLst/>
-          </a:prstGeom>
-          <a:noFill/>
-          <a:ln/>
-        </p:spPr>
-        <p:txBody>
-          <a:bodyPr wrap="square" lIns="0" tIns="0" rIns="0" bIns="0" rtlCol="0" anchor="t"/>
-          <a:lstStyle/>
-          <a:p>
-            <a:pPr indent="0" marL="0">
-              <a:spcAft>
-                <a:spcPts val="1200"/>
-              </a:spcAft>
-              <a:buNone/>
-            </a:pPr>
-            <a:r>
-              <a:rPr lang="en-US" sz="1800" b="1" dirty="0">
-                <a:solidFill>
-                  <a:schemeClr val="bg1"/>
-                </a:solidFill>
-              </a:rPr>
-              <a:t>Referans: bupropion</a:t>
-            </a:r>
-            <a:endParaRPr lang="en-US" sz="1800" dirty="0"/>
-          </a:p>
-          <a:p>
-            <a:pPr indent="0" marL="0">
-              <a:buNone/>
-            </a:pPr>
-            <a:r>
-              <a:rPr lang="en-US" sz="3000" b="1" dirty="0">
-                <a:solidFill>
-                  <a:schemeClr val="bg1"/>
-                </a:solidFill>
-              </a:rPr>
-              <a:t>4,0 kat</a:t>
-            </a:r>
-            <a:endParaRPr lang="en-US" sz="1800" dirty="0"/>
-          </a:p>
-          <a:p>
-            <a:pPr indent="0" marL="0">
-              <a:spcAft>
-                <a:spcPts val="1200"/>
-              </a:spcAft>
-              <a:buNone/>
-            </a:pPr>
-            <a:r>
-              <a:rPr lang="en-US" sz="1800" dirty="0">
-                <a:solidFill>
-                  <a:schemeClr val="bg1"/>
-                </a:solidFill>
-              </a:rPr>
-              <a:t>vareniklin, kombine</a:t>
-            </a:r>
-            <a:endParaRPr lang="en-US" sz="1800" dirty="0"/>
-          </a:p>
-          <a:p>
-            <a:pPr indent="0" marL="0">
-              <a:buNone/>
-            </a:pPr>
-            <a:r>
-              <a:rPr lang="en-US" sz="3000" b="1" dirty="0">
-                <a:solidFill>
-                  <a:schemeClr val="bg1"/>
-                </a:solidFill>
-              </a:rPr>
-              <a:t>2,0 kat</a:t>
-            </a:r>
-            <a:endParaRPr lang="en-US" sz="1800" dirty="0"/>
-          </a:p>
-          <a:p>
-            <a:pPr indent="0" marL="0">
-              <a:spcAft>
-                <a:spcPts val="1200"/>
-              </a:spcAft>
-              <a:buNone/>
-            </a:pPr>
-            <a:r>
-              <a:rPr lang="en-US" sz="1800" dirty="0">
-                <a:solidFill>
-                  <a:schemeClr val="bg1"/>
-                </a:solidFill>
-              </a:rPr>
-              <a:t>hanede sigara içen yok</a:t>
-            </a:r>
-            <a:endParaRPr lang="en-US" sz="1800" dirty="0"/>
-          </a:p>
-          <a:p>
-            <a:pPr indent="0" marL="0">
-              <a:buNone/>
-            </a:pPr>
-            <a:r>
-              <a:rPr lang="en-US" sz="3000" b="1" dirty="0">
-                <a:solidFill>
-                  <a:schemeClr val="bg1"/>
-                </a:solidFill>
-              </a:rPr>
-              <a:t>1,6 kat</a:t>
-            </a:r>
-            <a:endParaRPr lang="en-US" sz="1800" dirty="0"/>
-          </a:p>
-          <a:p>
-            <a:pPr indent="0" marL="0">
-              <a:buNone/>
-            </a:pPr>
-            <a:r>
-              <a:rPr lang="en-US" sz="1800" dirty="0">
-                <a:solidFill>
-                  <a:schemeClr val="bg1"/>
-                </a:solidFill>
-              </a:rPr>
-              <a:t>yakınma yok</a:t>
-            </a:r>
-            <a:endParaRPr lang="en-US" sz="1800" dirty="0"/>
-          </a:p>
-        </p:txBody>
-      </p:sp>
-      <p:sp>
-        <p:nvSpPr>
-          <p:cNvPr id="8" name="Kaynak"/>
-          <p:cNvSpPr txBox="1"/>
-          <p:nvPr/>
-        </p:nvSpPr>
-        <p:spPr>
-          <a:xfrm>
-            <a:off x="548640" y="6382512"/>
-            <a:ext cx="10424160" cy="292608"/>
-          </a:xfrm>
-          <a:prstGeom prst="rect">
-            <a:avLst/>
-          </a:prstGeom>
-          <a:noFill/>
-          <a:ln/>
-        </p:spPr>
-        <p:txBody>
-          <a:bodyPr wrap="square" lIns="0" tIns="0" rIns="0" bIns="0" rtlCol="0" anchor="ctr"/>
-          <a:lstStyle/>
-          <a:p>
-            <a:pPr indent="0" marL="0">
-              <a:buNone/>
-            </a:pPr>
-            <a:r>
-              <a:rPr lang="en-US" sz="1200" i="1" dirty="0">
-                <a:solidFill>
-                  <a:schemeClr val="accent3"/>
-                </a:solidFill>
-              </a:rPr>
-              <a:t>Görsel: Cenberlitaş E, Gökçe A, Öztürk O. Turk J Fam Pract. 2026;30(2):97-106, Tablo 6.</a:t>
-            </a:r>
-            <a:endParaRPr lang="en-US" sz="1200" dirty="0"/>
-          </a:p>
-        </p:txBody>
-      </p:sp>
-      <p:sp>
-        <p:nvSpPr>
-          <p:cNvPr id="25" name="Slide Number Placeholder 0"/>
-          <p:cNvSpPr>
-            <a:spLocks noGrp="1"/>
-          </p:cNvSpPr>
-          <p:nvPr>
-            <p:ph type="sldNum" sz="quarter" idx="4294967295"/>
-          </p:nvPr>
-        </p:nvSpPr>
-        <p:spPr>
-          <a:xfrm>
-            <a:off x="11201400" y="6382512"/>
-            <a:ext cx="548640" cy="292608"/>
-          </a:xfrm>
-          <a:prstGeom prst="rect">
-            <a:avLst/>
-          </a:prstGeom>
-          <a:extLst>
-            <a:ext uri="{C572A759-6A51-4108-AA02-DFA0A04FC94B}">
-              <ma14:wrappingTextBoxFlag xmlns:ma14="http://schemas.microsoft.com/office/mac/drawingml/2011/main" val="0"/>
-            </a:ext>
-          </a:extLst>
-        </p:spPr>
-        <p:txBody>
-          <a:bodyPr/>
-          <a:lstStyle>
-            <a:lvl1pPr>
-              <a:defRPr sz="1400">
-                <a:solidFill>
-                  <a:srgbClr val="7A8C94"/>
-                </a:solidFill>
-              </a:defRPr>
-            </a:lvl1pPr>
-          </a:lstStyle>
-          <a:p>
-            <a:pPr algn="r"/>
-            <a:fld id="{F7021451-1387-4CA6-816F-3879F97B5CBC}" type="slidenum">
-              <a:rPr b="0" lang="en-US"/>
-              <a:t>20</a:t>
-            </a:fld>
-            <a:endParaRPr lang="en-US"/>
-          </a:p>
-        </p:txBody>
-      </p:sp>
-    </p:spTree>
-  </p:cSld>
-  <p:clrMapOvr>
-    <a:masterClrMapping/>
-  </p:clrMapOvr>
-</p:sld>
-</file>
-
-<file path=ppt/slides/slide21.xml><?xml version="1.0" encoding="utf-8"?>
 <p:sld xmlns:a="http://schemas.openxmlformats.org/drawingml/2006/main" xmlns:r="http://schemas.openxmlformats.org/officeDocument/2006/relationships" xmlns:p="http://schemas.openxmlformats.org/presentationml/2006/main">
   <p:cSld name="Slide 21">
     <p:spTree>
@@ -10509,9 +10000,11 @@
       <p:sp>
         <p:nvSpPr>
           <p:cNvPr id="3" name="Text 0"/>
-          <p:cNvSpPr/>
+          <p:cNvSpPr>
+            <a:spLocks noGrp="1"/>
+          </p:cNvSpPr>
           <p:nvPr>
-            <p:ph idx="100" type="title" hasCustomPrompt="1"/>
+            <p:ph type="title" idx="100" hasCustomPrompt="1"/>
           </p:nvPr>
         </p:nvSpPr>
         <p:spPr>
@@ -10529,7 +10022,7 @@
           <a:bodyPr wrap="square" lIns="0" tIns="0" rIns="0" bIns="0" rtlCol="0" anchor="ctr"/>
           <a:lstStyle/>
           <a:p>
-            <a:pPr algn="l" indent="0" marL="0">
+            <a:pPr marL="0" indent="0" algn="l">
               <a:buNone/>
             </a:pPr>
             <a:r>
@@ -10568,17 +10061,21 @@
             <a:prstDash val="solid"/>
           </a:ln>
         </p:spPr>
+        <p:txBody>
+          <a:bodyPr/>
+          <a:p/>
+        </p:txBody>
       </p:sp>
       <p:pic>
         <p:nvPicPr>
-          <p:cNvPr id="5" name="Ikon" descr="FaPills">    </p:cNvPr>
+          <p:cNvPr id="5" name="Ikon" descr="FaPills"/>
           <p:cNvPicPr>
             <a:picLocks noChangeAspect="1"/>
           </p:cNvPicPr>
           <p:nvPr/>
         </p:nvPicPr>
         <p:blipFill>
-          <a:blip r:embed="rId1"/>
+          <a:blip r:embed="rId3"/>
           <a:stretch>
             <a:fillRect/>
           </a:stretch>
@@ -10614,7 +10111,7 @@
           <a:bodyPr wrap="square" lIns="0" tIns="0" rIns="0" bIns="0" rtlCol="0" anchor="ctr"/>
           <a:lstStyle/>
           <a:p>
-            <a:pPr indent="0" marL="0">
+            <a:pPr marL="0" indent="0">
               <a:buNone/>
             </a:pPr>
             <a:r>
@@ -10650,7 +10147,7 @@
           <a:bodyPr wrap="square" lIns="0" tIns="0" rIns="0" bIns="0" rtlCol="0" anchor="ctr"/>
           <a:lstStyle/>
           <a:p>
-            <a:pPr indent="0" marL="0">
+            <a:pPr marL="0" indent="0">
               <a:buNone/>
             </a:pPr>
             <a:r>
@@ -10659,11 +10156,8 @@
                   <a:schemeClr val="accent1"/>
                 </a:solidFill>
               </a:rPr>
-              <a:t>Bupropiona üstün; meta-analiz ve EAGLES ile uyumlu</a:t>
-            </a:r>
-            <a:pPr indent="0" marL="0">
-              <a:buNone/>
-            </a:pPr>
+              <a:t>Bupropiona üstün; parsiyel agonist etkiyle açıklanmaktadır</a:t>
+            </a:r>
             <a:r>
               <a:rPr lang="en-US" sz="1800" dirty="0">
                 <a:solidFill>
@@ -10700,17 +10194,21 @@
             <a:prstDash val="solid"/>
           </a:ln>
         </p:spPr>
+        <p:txBody>
+          <a:bodyPr/>
+          <a:p/>
+        </p:txBody>
       </p:sp>
       <p:pic>
         <p:nvPicPr>
-          <p:cNvPr id="9" name="Ikon" descr="FaLeaf">    </p:cNvPr>
+          <p:cNvPr id="9" name="Ikon" descr="FaLeaf"/>
           <p:cNvPicPr>
             <a:picLocks noChangeAspect="1"/>
           </p:cNvPicPr>
           <p:nvPr/>
         </p:nvPicPr>
         <p:blipFill>
-          <a:blip r:embed="rId2"/>
+          <a:blip r:embed="rId4"/>
           <a:stretch>
             <a:fillRect/>
           </a:stretch>
@@ -10746,7 +10244,7 @@
           <a:bodyPr wrap="square" lIns="0" tIns="0" rIns="0" bIns="0" rtlCol="0" anchor="ctr"/>
           <a:lstStyle/>
           <a:p>
-            <a:pPr indent="0" marL="0">
+            <a:pPr marL="0" indent="0">
               <a:buNone/>
             </a:pPr>
             <a:r>
@@ -10782,7 +10280,7 @@
           <a:bodyPr wrap="square" lIns="0" tIns="0" rIns="0" bIns="0" rtlCol="0" anchor="ctr"/>
           <a:lstStyle/>
           <a:p>
-            <a:pPr indent="0" marL="0">
+            <a:pPr marL="0" indent="0">
               <a:buNone/>
             </a:pPr>
             <a:r>
@@ -10793,9 +10291,6 @@
               </a:rPr>
               <a:t>Plaseboya üstün; NRT ve vareniklinle benzer</a:t>
             </a:r>
-            <a:pPr indent="0" marL="0">
-              <a:buNone/>
-            </a:pPr>
             <a:r>
               <a:rPr lang="en-US" sz="1800" dirty="0">
                 <a:solidFill>
@@ -10832,17 +10327,21 @@
             <a:prstDash val="solid"/>
           </a:ln>
         </p:spPr>
+        <p:txBody>
+          <a:bodyPr/>
+          <a:p/>
+        </p:txBody>
       </p:sp>
       <p:pic>
         <p:nvPicPr>
-          <p:cNvPr id="13" name="Ikon" descr="FaExchangeAlt">    </p:cNvPr>
+          <p:cNvPr id="13" name="Ikon" descr="FaExchangeAlt"/>
           <p:cNvPicPr>
             <a:picLocks noChangeAspect="1"/>
           </p:cNvPicPr>
           <p:nvPr/>
         </p:nvPicPr>
         <p:blipFill>
-          <a:blip r:embed="rId3"/>
+          <a:blip r:embed="rId5"/>
           <a:stretch>
             <a:fillRect/>
           </a:stretch>
@@ -10878,7 +10377,7 @@
           <a:bodyPr wrap="square" lIns="0" tIns="0" rIns="0" bIns="0" rtlCol="0" anchor="ctr"/>
           <a:lstStyle/>
           <a:p>
-            <a:pPr indent="0" marL="0">
+            <a:pPr marL="0" indent="0">
               <a:buNone/>
             </a:pPr>
             <a:r>
@@ -10914,7 +10413,7 @@
           <a:bodyPr wrap="square" lIns="0" tIns="0" rIns="0" bIns="0" rtlCol="0" anchor="ctr"/>
           <a:lstStyle/>
           <a:p>
-            <a:pPr indent="0" marL="0">
+            <a:pPr marL="0" indent="0">
               <a:buNone/>
             </a:pPr>
             <a:r>
@@ -10925,9 +10424,6 @@
               </a:rPr>
               <a:t>Kılavuz önerileriyle uyumlu</a:t>
             </a:r>
-            <a:pPr indent="0" marL="0">
-              <a:buNone/>
-            </a:pPr>
             <a:r>
               <a:rPr lang="en-US" sz="1800" dirty="0">
                 <a:solidFill>
@@ -10964,17 +10460,21 @@
             <a:prstDash val="solid"/>
           </a:ln>
         </p:spPr>
+        <p:txBody>
+          <a:bodyPr/>
+          <a:p/>
+        </p:txBody>
       </p:sp>
       <p:pic>
         <p:nvPicPr>
-          <p:cNvPr id="17" name="Ikon" descr="FaBookMedical">    </p:cNvPr>
+          <p:cNvPr id="17" name="Ikon" descr="FaBookMedical"/>
           <p:cNvPicPr>
             <a:picLocks noChangeAspect="1"/>
           </p:cNvPicPr>
           <p:nvPr/>
         </p:nvPicPr>
         <p:blipFill>
-          <a:blip r:embed="rId4"/>
+          <a:blip r:embed="rId6"/>
           <a:stretch>
             <a:fillRect/>
           </a:stretch>
@@ -11010,7 +10510,7 @@
           <a:bodyPr wrap="square" lIns="0" tIns="0" rIns="0" bIns="0" rtlCol="0" anchor="ctr"/>
           <a:lstStyle/>
           <a:p>
-            <a:pPr indent="0" marL="0">
+            <a:pPr marL="0" indent="0">
               <a:buNone/>
             </a:pPr>
             <a:r>
@@ -11046,7 +10546,7 @@
           <a:bodyPr wrap="square" lIns="0" tIns="0" rIns="0" bIns="0" rtlCol="0" anchor="ctr"/>
           <a:lstStyle/>
           <a:p>
-            <a:pPr indent="0" marL="0">
+            <a:pPr marL="0" indent="0">
               <a:buNone/>
             </a:pPr>
             <a:r>
@@ -11057,9 +10557,6 @@
               </a:rPr>
               <a:t>Vareniklin ilk 6 ayda daha etkili</a:t>
             </a:r>
-            <a:pPr indent="0" marL="0">
-              <a:buNone/>
-            </a:pPr>
             <a:r>
               <a:rPr lang="en-US" sz="1800" dirty="0">
                 <a:solidFill>
@@ -11093,7 +10590,7 @@
           <a:bodyPr wrap="square" lIns="0" tIns="0" rIns="0" bIns="0" rtlCol="0" anchor="ctr"/>
           <a:lstStyle/>
           <a:p>
-            <a:pPr indent="0" marL="0">
+            <a:pPr marL="0" indent="0">
               <a:buNone/>
             </a:pPr>
             <a:r>
@@ -11128,7 +10625,7 @@
           </a:prstGeom>
           <a:extLst>
             <a:ext uri="{C572A759-6A51-4108-AA02-DFA0A04FC94B}">
-              <ma14:wrappingTextBoxFlag xmlns:ma14="http://schemas.microsoft.com/office/mac/drawingml/2011/main" val="0"/>
+              <ma14:wrappingTextBoxFlag xmlns:ma14="http://schemas.microsoft.com/office/mac/drawingml/2011/main" xmlns="" val="0"/>
             </a:ext>
           </a:extLst>
         </p:spPr>
@@ -11146,8 +10643,8 @@
           <a:p>
             <a:pPr algn="r"/>
             <a:fld id="{F7021451-1387-4CA6-816F-3879F97B5CBC}" type="slidenum">
-              <a:rPr b="0" lang="en-US"/>
-              <a:t>21</a:t>
+              <a:rPr lang="en-US" b="0"/>
+              <a:t>20</a:t>
             </a:fld>
             <a:endParaRPr lang="en-US"/>
           </a:p>
@@ -11161,7 +10658,7 @@
 </p:sld>
 </file>
 
-<file path=ppt/slides/slide22.xml><?xml version="1.0" encoding="utf-8"?>
+<file path=ppt/slides/slide21.xml><?xml version="1.0" encoding="utf-8"?>
 <p:sld xmlns:a="http://schemas.openxmlformats.org/drawingml/2006/main" xmlns:r="http://schemas.openxmlformats.org/officeDocument/2006/relationships" xmlns:p="http://schemas.openxmlformats.org/presentationml/2006/main">
   <p:cSld name="Slide 22">
     <p:spTree>
@@ -11181,9 +10678,11 @@
       <p:sp>
         <p:nvSpPr>
           <p:cNvPr id="3" name="Text 0"/>
-          <p:cNvSpPr/>
+          <p:cNvSpPr>
+            <a:spLocks noGrp="1"/>
+          </p:cNvSpPr>
           <p:nvPr>
-            <p:ph idx="100" type="title" hasCustomPrompt="1"/>
+            <p:ph type="title" idx="100" hasCustomPrompt="1"/>
           </p:nvPr>
         </p:nvSpPr>
         <p:spPr>
@@ -11201,7 +10700,7 @@
           <a:bodyPr wrap="square" lIns="0" tIns="0" rIns="0" bIns="0" rtlCol="0" anchor="ctr"/>
           <a:lstStyle/>
           <a:p>
-            <a:pPr algn="l" indent="0" marL="0">
+            <a:pPr marL="0" indent="0" algn="l">
               <a:buNone/>
             </a:pPr>
             <a:r>
@@ -11240,17 +10739,21 @@
             <a:prstDash val="solid"/>
           </a:ln>
         </p:spPr>
+        <p:txBody>
+          <a:bodyPr/>
+          <a:p/>
+        </p:txBody>
       </p:sp>
       <p:pic>
         <p:nvPicPr>
-          <p:cNvPr id="5" name="Ikon" descr="FaComments">    </p:cNvPr>
+          <p:cNvPr id="5" name="Ikon" descr="FaComments"/>
           <p:cNvPicPr>
             <a:picLocks noChangeAspect="1"/>
           </p:cNvPicPr>
           <p:nvPr/>
         </p:nvPicPr>
         <p:blipFill>
-          <a:blip r:embed="rId1"/>
+          <a:blip r:embed="rId3"/>
           <a:stretch>
             <a:fillRect/>
           </a:stretch>
@@ -11286,7 +10789,7 @@
           <a:bodyPr wrap="square" lIns="0" tIns="0" rIns="0" bIns="0" rtlCol="0" anchor="ctr"/>
           <a:lstStyle/>
           <a:p>
-            <a:pPr indent="0" marL="0">
+            <a:pPr marL="0" indent="0">
               <a:buNone/>
             </a:pPr>
             <a:r>
@@ -11322,7 +10825,7 @@
           <a:bodyPr wrap="square" lIns="0" tIns="0" rIns="0" bIns="0" rtlCol="0" anchor="ctr"/>
           <a:lstStyle/>
           <a:p>
-            <a:pPr indent="0" marL="0">
+            <a:pPr marL="0" indent="0">
               <a:buNone/>
             </a:pPr>
             <a:r>
@@ -11361,17 +10864,21 @@
             <a:prstDash val="solid"/>
           </a:ln>
         </p:spPr>
+        <p:txBody>
+          <a:bodyPr/>
+          <a:p/>
+        </p:txBody>
       </p:sp>
       <p:pic>
         <p:nvPicPr>
-          <p:cNvPr id="9" name="Ikon" descr="FaHome">    </p:cNvPr>
+          <p:cNvPr id="9" name="Ikon" descr="FaHome"/>
           <p:cNvPicPr>
             <a:picLocks noChangeAspect="1"/>
           </p:cNvPicPr>
           <p:nvPr/>
         </p:nvPicPr>
         <p:blipFill>
-          <a:blip r:embed="rId2"/>
+          <a:blip r:embed="rId4"/>
           <a:stretch>
             <a:fillRect/>
           </a:stretch>
@@ -11407,7 +10914,7 @@
           <a:bodyPr wrap="square" lIns="0" tIns="0" rIns="0" bIns="0" rtlCol="0" anchor="ctr"/>
           <a:lstStyle/>
           <a:p>
-            <a:pPr indent="0" marL="0">
+            <a:pPr marL="0" indent="0">
               <a:buNone/>
             </a:pPr>
             <a:r>
@@ -11443,7 +10950,7 @@
           <a:bodyPr wrap="square" lIns="0" tIns="0" rIns="0" bIns="0" rtlCol="0" anchor="ctr"/>
           <a:lstStyle/>
           <a:p>
-            <a:pPr indent="0" marL="0">
+            <a:pPr marL="0" indent="0">
               <a:buNone/>
             </a:pPr>
             <a:r>
@@ -11454,9 +10961,6 @@
               </a:rPr>
               <a:t>Evde sigara içilmemesi olasılığı ikiye katlamaktadır</a:t>
             </a:r>
-            <a:pPr indent="0" marL="0">
-              <a:buNone/>
-            </a:pPr>
             <a:r>
               <a:rPr lang="en-US" sz="1800" dirty="0">
                 <a:solidFill>
@@ -11493,17 +10997,21 @@
             <a:prstDash val="solid"/>
           </a:ln>
         </p:spPr>
+        <p:txBody>
+          <a:bodyPr/>
+          <a:p/>
+        </p:txBody>
       </p:sp>
       <p:pic>
         <p:nvPicPr>
-          <p:cNvPr id="13" name="Ikon" descr="FaClipboardList">    </p:cNvPr>
+          <p:cNvPr id="13" name="Ikon" descr="FaClipboardList"/>
           <p:cNvPicPr>
             <a:picLocks noChangeAspect="1"/>
           </p:cNvPicPr>
           <p:nvPr/>
         </p:nvPicPr>
         <p:blipFill>
-          <a:blip r:embed="rId3"/>
+          <a:blip r:embed="rId5"/>
           <a:stretch>
             <a:fillRect/>
           </a:stretch>
@@ -11539,7 +11047,7 @@
           <a:bodyPr wrap="square" lIns="0" tIns="0" rIns="0" bIns="0" rtlCol="0" anchor="ctr"/>
           <a:lstStyle/>
           <a:p>
-            <a:pPr indent="0" marL="0">
+            <a:pPr marL="0" indent="0">
               <a:buNone/>
             </a:pPr>
             <a:r>
@@ -11575,7 +11083,7 @@
           <a:bodyPr wrap="square" lIns="0" tIns="0" rIns="0" bIns="0" rtlCol="0" anchor="ctr"/>
           <a:lstStyle/>
           <a:p>
-            <a:pPr indent="0" marL="0">
+            <a:pPr marL="0" indent="0">
               <a:buNone/>
             </a:pPr>
             <a:r>
@@ -11584,11 +11092,8 @@
                   <a:schemeClr val="accent1"/>
                 </a:solidFill>
               </a:rPr>
-              <a:t>Yüksek FNBT puanı düşük başarıyla ilişkilidir</a:t>
-            </a:r>
-            <a:pPr indent="0" marL="0">
-              <a:buNone/>
-            </a:pPr>
+              <a:t>Ortalama puan literatürle uyumlu; yüksek puan düşük başarıyla ilişkili</a:t>
+            </a:r>
             <a:r>
               <a:rPr lang="en-US" sz="1800" dirty="0">
                 <a:solidFill>
@@ -11625,17 +11130,21 @@
             <a:prstDash val="solid"/>
           </a:ln>
         </p:spPr>
+        <p:txBody>
+          <a:bodyPr/>
+          <a:p/>
+        </p:txBody>
       </p:sp>
       <p:pic>
         <p:nvPicPr>
-          <p:cNvPr id="17" name="Ikon" descr="FaLightbulb">    </p:cNvPr>
+          <p:cNvPr id="17" name="Ikon" descr="FaLightbulb"/>
           <p:cNvPicPr>
             <a:picLocks noChangeAspect="1"/>
           </p:cNvPicPr>
           <p:nvPr/>
         </p:nvPicPr>
         <p:blipFill>
-          <a:blip r:embed="rId4"/>
+          <a:blip r:embed="rId6"/>
           <a:stretch>
             <a:fillRect/>
           </a:stretch>
@@ -11671,7 +11180,7 @@
           <a:bodyPr wrap="square" lIns="0" tIns="0" rIns="0" bIns="0" rtlCol="0" anchor="ctr"/>
           <a:lstStyle/>
           <a:p>
-            <a:pPr indent="0" marL="0">
+            <a:pPr marL="0" indent="0">
               <a:buNone/>
             </a:pPr>
             <a:r>
@@ -11707,7 +11216,7 @@
           <a:bodyPr wrap="square" lIns="0" tIns="0" rIns="0" bIns="0" rtlCol="0" anchor="ctr"/>
           <a:lstStyle/>
           <a:p>
-            <a:pPr indent="0" marL="0">
+            <a:pPr marL="0" indent="0">
               <a:buNone/>
             </a:pPr>
             <a:r>
@@ -11718,9 +11227,6 @@
               </a:rPr>
               <a:t>Yakınması olmayanlarda başarı daha yüksektir</a:t>
             </a:r>
-            <a:pPr indent="0" marL="0">
-              <a:buNone/>
-            </a:pPr>
             <a:r>
               <a:rPr lang="en-US" sz="1800" dirty="0">
                 <a:solidFill>
@@ -11754,7 +11260,7 @@
           <a:bodyPr wrap="square" lIns="0" tIns="0" rIns="0" bIns="0" rtlCol="0" anchor="ctr"/>
           <a:lstStyle/>
           <a:p>
-            <a:pPr indent="0" marL="0">
+            <a:pPr marL="0" indent="0">
               <a:buNone/>
             </a:pPr>
             <a:r>
@@ -11789,7 +11295,7 @@
           </a:prstGeom>
           <a:extLst>
             <a:ext uri="{C572A759-6A51-4108-AA02-DFA0A04FC94B}">
-              <ma14:wrappingTextBoxFlag xmlns:ma14="http://schemas.microsoft.com/office/mac/drawingml/2011/main" val="0"/>
+              <ma14:wrappingTextBoxFlag xmlns:ma14="http://schemas.microsoft.com/office/mac/drawingml/2011/main" xmlns="" val="0"/>
             </a:ext>
           </a:extLst>
         </p:spPr>
@@ -11807,8 +11313,8 @@
           <a:p>
             <a:pPr algn="r"/>
             <a:fld id="{F7021451-1387-4CA6-816F-3879F97B5CBC}" type="slidenum">
-              <a:rPr b="0" lang="en-US"/>
-              <a:t>22</a:t>
+              <a:rPr lang="en-US" b="0"/>
+              <a:t>21</a:t>
             </a:fld>
             <a:endParaRPr lang="en-US"/>
           </a:p>
@@ -11822,7 +11328,7 @@
 </p:sld>
 </file>
 
-<file path=ppt/slides/slide23.xml><?xml version="1.0" encoding="utf-8"?>
+<file path=ppt/slides/slide22.xml><?xml version="1.0" encoding="utf-8"?>
 <p:sld xmlns:a="http://schemas.openxmlformats.org/drawingml/2006/main" xmlns:r="http://schemas.openxmlformats.org/officeDocument/2006/relationships" xmlns:p="http://schemas.openxmlformats.org/presentationml/2006/main">
   <p:cSld name="Slide 23">
     <p:spTree>
@@ -11842,9 +11348,11 @@
       <p:sp>
         <p:nvSpPr>
           <p:cNvPr id="3" name="Text 0"/>
-          <p:cNvSpPr/>
+          <p:cNvSpPr>
+            <a:spLocks noGrp="1"/>
+          </p:cNvSpPr>
           <p:nvPr>
-            <p:ph idx="100" type="title" hasCustomPrompt="1"/>
+            <p:ph type="title" idx="100" hasCustomPrompt="1"/>
           </p:nvPr>
         </p:nvSpPr>
         <p:spPr>
@@ -11862,7 +11370,7 @@
           <a:bodyPr wrap="square" lIns="0" tIns="0" rIns="0" bIns="0" rtlCol="0" anchor="ctr"/>
           <a:lstStyle/>
           <a:p>
-            <a:pPr algn="l" indent="0" marL="0">
+            <a:pPr marL="0" indent="0" algn="l">
               <a:buNone/>
             </a:pPr>
             <a:r>
@@ -11931,14 +11439,14 @@
       </p:sp>
       <p:pic>
         <p:nvPicPr>
-          <p:cNvPr id="6" name="Ikon" descr="FaExclamationCircle">    </p:cNvPr>
+          <p:cNvPr id="6" name="Ikon" descr="FaExclamationCircle"/>
           <p:cNvPicPr>
             <a:picLocks noChangeAspect="1"/>
           </p:cNvPicPr>
           <p:nvPr/>
         </p:nvPicPr>
         <p:blipFill>
-          <a:blip r:embed="rId1"/>
+          <a:blip r:embed="rId3"/>
           <a:stretch>
             <a:fillRect/>
           </a:stretch>
@@ -11974,7 +11482,7 @@
           <a:bodyPr wrap="square" lIns="0" tIns="0" rIns="0" bIns="0" rtlCol="0" anchor="ctr"/>
           <a:lstStyle/>
           <a:p>
-            <a:pPr indent="0" marL="0">
+            <a:pPr marL="0" indent="0">
               <a:buNone/>
             </a:pPr>
             <a:r>
@@ -12010,7 +11518,7 @@
           <a:bodyPr wrap="square" lIns="0" tIns="0" rIns="0" bIns="0" rtlCol="0" anchor="t"/>
           <a:lstStyle/>
           <a:p>
-            <a:pPr algn="just" marL="279400" indent="-279400">
+            <a:pPr marL="279400" indent="-279400" algn="just">
               <a:spcAft>
                 <a:spcPts val="1400"/>
               </a:spcAft>
@@ -12028,7 +11536,7 @@
             <a:endParaRPr lang="en-US" sz="2200" dirty="0"/>
           </a:p>
           <a:p>
-            <a:pPr algn="just" marL="279400" indent="-279400">
+            <a:pPr marL="279400" indent="-279400" algn="just">
               <a:spcAft>
                 <a:spcPts val="1400"/>
               </a:spcAft>
@@ -12046,7 +11554,7 @@
             <a:endParaRPr lang="en-US" sz="2200" dirty="0"/>
           </a:p>
           <a:p>
-            <a:pPr algn="just" marL="279400" indent="-279400">
+            <a:pPr marL="279400" indent="-279400" algn="just">
               <a:spcAft>
                 <a:spcPts val="1400"/>
               </a:spcAft>
@@ -12119,14 +11627,14 @@
       </p:sp>
       <p:pic>
         <p:nvPicPr>
-          <p:cNvPr id="11" name="Ikon" descr="FaStar">    </p:cNvPr>
+          <p:cNvPr id="11" name="Ikon" descr="FaStar"/>
           <p:cNvPicPr>
             <a:picLocks noChangeAspect="1"/>
           </p:cNvPicPr>
           <p:nvPr/>
         </p:nvPicPr>
         <p:blipFill>
-          <a:blip r:embed="rId2"/>
+          <a:blip r:embed="rId4"/>
           <a:stretch>
             <a:fillRect/>
           </a:stretch>
@@ -12162,7 +11670,7 @@
           <a:bodyPr wrap="square" lIns="0" tIns="0" rIns="0" bIns="0" rtlCol="0" anchor="ctr"/>
           <a:lstStyle/>
           <a:p>
-            <a:pPr indent="0" marL="0">
+            <a:pPr marL="0" indent="0">
               <a:buNone/>
             </a:pPr>
             <a:r>
@@ -12198,7 +11706,7 @@
           <a:bodyPr wrap="square" lIns="0" tIns="0" rIns="0" bIns="0" rtlCol="0" anchor="t"/>
           <a:lstStyle/>
           <a:p>
-            <a:pPr algn="just" marL="279400" indent="-279400">
+            <a:pPr marL="279400" indent="-279400" algn="just">
               <a:spcAft>
                 <a:spcPts val="1400"/>
               </a:spcAft>
@@ -12216,7 +11724,7 @@
             <a:endParaRPr lang="en-US" sz="2200" dirty="0"/>
           </a:p>
           <a:p>
-            <a:pPr algn="just" marL="279400" indent="-279400">
+            <a:pPr marL="279400" indent="-279400" algn="just">
               <a:spcAft>
                 <a:spcPts val="1400"/>
               </a:spcAft>
@@ -12256,7 +11764,7 @@
           <a:bodyPr wrap="square" lIns="0" tIns="0" rIns="0" bIns="0" rtlCol="0" anchor="ctr"/>
           <a:lstStyle/>
           <a:p>
-            <a:pPr indent="0" marL="0">
+            <a:pPr marL="0" indent="0">
               <a:buNone/>
             </a:pPr>
             <a:r>
@@ -12291,7 +11799,7 @@
           </a:prstGeom>
           <a:extLst>
             <a:ext uri="{C572A759-6A51-4108-AA02-DFA0A04FC94B}">
-              <ma14:wrappingTextBoxFlag xmlns:ma14="http://schemas.microsoft.com/office/mac/drawingml/2011/main" val="0"/>
+              <ma14:wrappingTextBoxFlag xmlns:ma14="http://schemas.microsoft.com/office/mac/drawingml/2011/main" xmlns="" val="0"/>
             </a:ext>
           </a:extLst>
         </p:spPr>
@@ -12309,8 +11817,8 @@
           <a:p>
             <a:pPr algn="r"/>
             <a:fld id="{F7021451-1387-4CA6-816F-3879F97B5CBC}" type="slidenum">
-              <a:rPr b="0" lang="en-US"/>
-              <a:t>23</a:t>
+              <a:rPr lang="en-US" b="0"/>
+              <a:t>22</a:t>
             </a:fld>
             <a:endParaRPr lang="en-US"/>
           </a:p>
@@ -12324,7 +11832,7 @@
 </p:sld>
 </file>
 
-<file path=ppt/slides/slide24.xml><?xml version="1.0" encoding="utf-8"?>
+<file path=ppt/slides/slide23.xml><?xml version="1.0" encoding="utf-8"?>
 <p:sld xmlns:a="http://schemas.openxmlformats.org/drawingml/2006/main" xmlns:r="http://schemas.openxmlformats.org/officeDocument/2006/relationships" xmlns:p="http://schemas.openxmlformats.org/presentationml/2006/main">
   <p:cSld name="Slide 24">
     <p:spTree>
@@ -12344,9 +11852,11 @@
       <p:sp>
         <p:nvSpPr>
           <p:cNvPr id="3" name="Text 0"/>
-          <p:cNvSpPr/>
+          <p:cNvSpPr>
+            <a:spLocks noGrp="1"/>
+          </p:cNvSpPr>
           <p:nvPr>
-            <p:ph idx="100" type="title" hasCustomPrompt="1"/>
+            <p:ph type="title" idx="100" hasCustomPrompt="1"/>
           </p:nvPr>
         </p:nvSpPr>
         <p:spPr>
@@ -12364,7 +11874,7 @@
           <a:bodyPr wrap="square" lIns="0" tIns="0" rIns="0" bIns="0" rtlCol="0" anchor="ctr"/>
           <a:lstStyle/>
           <a:p>
-            <a:pPr algn="l" indent="0" marL="0">
+            <a:pPr marL="0" indent="0" algn="l">
               <a:buNone/>
             </a:pPr>
             <a:r>
@@ -12427,7 +11937,7 @@
           <a:bodyPr wrap="square" lIns="0" tIns="0" rIns="0" bIns="0" rtlCol="0" anchor="ctr"/>
           <a:lstStyle/>
           <a:p>
-            <a:pPr algn="ctr" indent="0" marL="0">
+            <a:pPr marL="0" indent="0" algn="ctr">
               <a:buNone/>
             </a:pPr>
             <a:r>
@@ -12463,7 +11973,7 @@
           <a:bodyPr wrap="square" lIns="0" tIns="0" rIns="0" bIns="0" rtlCol="0" anchor="t"/>
           <a:lstStyle/>
           <a:p>
-            <a:pPr algn="ctr" indent="0" marL="0">
+            <a:pPr marL="0" indent="0" algn="ctr">
               <a:buNone/>
             </a:pPr>
             <a:r>
@@ -12526,7 +12036,7 @@
           <a:bodyPr wrap="square" lIns="0" tIns="0" rIns="0" bIns="0" rtlCol="0" anchor="ctr"/>
           <a:lstStyle/>
           <a:p>
-            <a:pPr algn="ctr" indent="0" marL="0">
+            <a:pPr marL="0" indent="0" algn="ctr">
               <a:buNone/>
             </a:pPr>
             <a:r>
@@ -12562,7 +12072,7 @@
           <a:bodyPr wrap="square" lIns="0" tIns="0" rIns="0" bIns="0" rtlCol="0" anchor="t"/>
           <a:lstStyle/>
           <a:p>
-            <a:pPr algn="ctr" indent="0" marL="0">
+            <a:pPr marL="0" indent="0" algn="ctr">
               <a:buNone/>
             </a:pPr>
             <a:r>
@@ -12625,7 +12135,7 @@
           <a:bodyPr wrap="square" lIns="0" tIns="0" rIns="0" bIns="0" rtlCol="0" anchor="ctr"/>
           <a:lstStyle/>
           <a:p>
-            <a:pPr algn="ctr" indent="0" marL="0">
+            <a:pPr marL="0" indent="0" algn="ctr">
               <a:buNone/>
             </a:pPr>
             <a:r>
@@ -12661,7 +12171,7 @@
           <a:bodyPr wrap="square" lIns="0" tIns="0" rIns="0" bIns="0" rtlCol="0" anchor="t"/>
           <a:lstStyle/>
           <a:p>
-            <a:pPr algn="ctr" indent="0" marL="0">
+            <a:pPr marL="0" indent="0" algn="ctr">
               <a:buNone/>
             </a:pPr>
             <a:r>
@@ -12697,7 +12207,7 @@
           <a:bodyPr wrap="square" lIns="0" tIns="0" rIns="0" bIns="0" rtlCol="0" anchor="ctr"/>
           <a:lstStyle/>
           <a:p>
-            <a:pPr algn="just" indent="0" marL="0">
+            <a:pPr marL="0" indent="0" algn="just">
               <a:buNone/>
             </a:pPr>
             <a:r>
@@ -12733,7 +12243,7 @@
           <a:bodyPr wrap="square" lIns="0" tIns="0" rIns="0" bIns="0" rtlCol="0" anchor="ctr"/>
           <a:lstStyle/>
           <a:p>
-            <a:pPr indent="0" marL="0">
+            <a:pPr marL="0" indent="0">
               <a:buNone/>
             </a:pPr>
             <a:r>
@@ -12768,7 +12278,7 @@
           </a:prstGeom>
           <a:extLst>
             <a:ext uri="{C572A759-6A51-4108-AA02-DFA0A04FC94B}">
-              <ma14:wrappingTextBoxFlag xmlns:ma14="http://schemas.microsoft.com/office/mac/drawingml/2011/main" val="0"/>
+              <ma14:wrappingTextBoxFlag xmlns:ma14="http://schemas.microsoft.com/office/mac/drawingml/2011/main" xmlns="" val="0"/>
             </a:ext>
           </a:extLst>
         </p:spPr>
@@ -12786,8 +12296,8 @@
           <a:p>
             <a:pPr algn="r"/>
             <a:fld id="{F7021451-1387-4CA6-816F-3879F97B5CBC}" type="slidenum">
-              <a:rPr b="0" lang="en-US"/>
-              <a:t>24</a:t>
+              <a:rPr lang="en-US" b="0"/>
+              <a:t>23</a:t>
             </a:fld>
             <a:endParaRPr lang="en-US"/>
           </a:p>
@@ -12801,7 +12311,7 @@
 </p:sld>
 </file>
 
-<file path=ppt/slides/slide25.xml><?xml version="1.0" encoding="utf-8"?>
+<file path=ppt/slides/slide24.xml><?xml version="1.0" encoding="utf-8"?>
 <p:sld xmlns:a="http://schemas.openxmlformats.org/drawingml/2006/main" xmlns:r="http://schemas.openxmlformats.org/officeDocument/2006/relationships" xmlns:p="http://schemas.openxmlformats.org/presentationml/2006/main">
   <p:cSld name="Slide 25">
     <p:spTree>
@@ -12821,9 +12331,11 @@
       <p:sp>
         <p:nvSpPr>
           <p:cNvPr id="3" name="Text 0"/>
-          <p:cNvSpPr/>
+          <p:cNvSpPr>
+            <a:spLocks noGrp="1"/>
+          </p:cNvSpPr>
           <p:nvPr>
-            <p:ph idx="100" type="title" hasCustomPrompt="1"/>
+            <p:ph type="title" idx="100" hasCustomPrompt="1"/>
           </p:nvPr>
         </p:nvSpPr>
         <p:spPr>
@@ -12841,7 +12353,7 @@
           <a:bodyPr wrap="square" lIns="0" tIns="0" rIns="0" bIns="0" rtlCol="0" anchor="ctr"/>
           <a:lstStyle/>
           <a:p>
-            <a:pPr algn="l" indent="0" marL="0">
+            <a:pPr marL="0" indent="0" algn="l">
               <a:buNone/>
             </a:pPr>
             <a:r>
@@ -12910,14 +12422,14 @@
       </p:sp>
       <p:pic>
         <p:nvPicPr>
-          <p:cNvPr id="6" name="Ikon" descr="FaUserMd">    </p:cNvPr>
+          <p:cNvPr id="6" name="Ikon" descr="FaUserMd"/>
           <p:cNvPicPr>
             <a:picLocks noChangeAspect="1"/>
           </p:cNvPicPr>
           <p:nvPr/>
         </p:nvPicPr>
         <p:blipFill>
-          <a:blip r:embed="rId1"/>
+          <a:blip r:embed="rId3"/>
           <a:stretch>
             <a:fillRect/>
           </a:stretch>
@@ -12953,7 +12465,7 @@
           <a:bodyPr wrap="square" lIns="0" tIns="0" rIns="0" bIns="0" rtlCol="0" anchor="ctr"/>
           <a:lstStyle/>
           <a:p>
-            <a:pPr indent="0" marL="0">
+            <a:pPr marL="0" indent="0">
               <a:buNone/>
             </a:pPr>
             <a:r>
@@ -12989,7 +12501,7 @@
           <a:bodyPr wrap="square" lIns="0" tIns="0" rIns="0" bIns="0" rtlCol="0" anchor="t"/>
           <a:lstStyle/>
           <a:p>
-            <a:pPr algn="just" marL="279400" indent="-279400">
+            <a:pPr marL="279400" indent="-279400" algn="just">
               <a:spcAft>
                 <a:spcPts val="1400"/>
               </a:spcAft>
@@ -13007,7 +12519,7 @@
             <a:endParaRPr lang="en-US" sz="2200" dirty="0"/>
           </a:p>
           <a:p>
-            <a:pPr algn="just" marL="279400" indent="-279400">
+            <a:pPr marL="279400" indent="-279400" algn="just">
               <a:spcAft>
                 <a:spcPts val="1400"/>
               </a:spcAft>
@@ -13025,7 +12537,7 @@
             <a:endParaRPr lang="en-US" sz="2200" dirty="0"/>
           </a:p>
           <a:p>
-            <a:pPr algn="just" marL="279400" indent="-279400">
+            <a:pPr marL="279400" indent="-279400" algn="just">
               <a:spcAft>
                 <a:spcPts val="1400"/>
               </a:spcAft>
@@ -13043,7 +12555,7 @@
             <a:endParaRPr lang="en-US" sz="2200" dirty="0"/>
           </a:p>
           <a:p>
-            <a:pPr algn="just" marL="279400" indent="-279400">
+            <a:pPr marL="279400" indent="-279400" algn="just">
               <a:spcAft>
                 <a:spcPts val="1400"/>
               </a:spcAft>
@@ -13116,14 +12628,14 @@
       </p:sp>
       <p:pic>
         <p:nvPicPr>
-          <p:cNvPr id="11" name="Ikon" descr="FaQuestion">    </p:cNvPr>
+          <p:cNvPr id="11" name="Ikon" descr="FaQuestion"/>
           <p:cNvPicPr>
             <a:picLocks noChangeAspect="1"/>
           </p:cNvPicPr>
           <p:nvPr/>
         </p:nvPicPr>
         <p:blipFill>
-          <a:blip r:embed="rId2"/>
+          <a:blip r:embed="rId4"/>
           <a:stretch>
             <a:fillRect/>
           </a:stretch>
@@ -13159,7 +12671,7 @@
           <a:bodyPr wrap="square" lIns="0" tIns="0" rIns="0" bIns="0" rtlCol="0" anchor="ctr"/>
           <a:lstStyle/>
           <a:p>
-            <a:pPr indent="0" marL="0">
+            <a:pPr marL="0" indent="0">
               <a:buNone/>
             </a:pPr>
             <a:r>
@@ -13195,7 +12707,7 @@
           <a:bodyPr wrap="square" lIns="0" tIns="0" rIns="0" bIns="0" rtlCol="0" anchor="t"/>
           <a:lstStyle/>
           <a:p>
-            <a:pPr algn="just" marL="279400" indent="-279400">
+            <a:pPr marL="279400" indent="-279400" algn="just">
               <a:spcAft>
                 <a:spcPts val="1800"/>
               </a:spcAft>
@@ -13213,7 +12725,7 @@
             <a:endParaRPr lang="en-US" sz="2200" dirty="0"/>
           </a:p>
           <a:p>
-            <a:pPr algn="just" marL="279400" indent="-279400">
+            <a:pPr marL="279400" indent="-279400" algn="just">
               <a:spcAft>
                 <a:spcPts val="1800"/>
               </a:spcAft>
@@ -13231,7 +12743,7 @@
             <a:endParaRPr lang="en-US" sz="2200" dirty="0"/>
           </a:p>
           <a:p>
-            <a:pPr algn="just" marL="279400" indent="-279400">
+            <a:pPr marL="279400" indent="-279400" algn="just">
               <a:spcAft>
                 <a:spcPts val="1800"/>
               </a:spcAft>
@@ -13270,7 +12782,7 @@
           </a:prstGeom>
           <a:extLst>
             <a:ext uri="{C572A759-6A51-4108-AA02-DFA0A04FC94B}">
-              <ma14:wrappingTextBoxFlag xmlns:ma14="http://schemas.microsoft.com/office/mac/drawingml/2011/main" val="0"/>
+              <ma14:wrappingTextBoxFlag xmlns:ma14="http://schemas.microsoft.com/office/mac/drawingml/2011/main" xmlns="" val="0"/>
             </a:ext>
           </a:extLst>
         </p:spPr>
@@ -13288,8 +12800,8 @@
           <a:p>
             <a:pPr algn="r"/>
             <a:fld id="{F7021451-1387-4CA6-816F-3879F97B5CBC}" type="slidenum">
-              <a:rPr b="0" lang="en-US"/>
-              <a:t>25</a:t>
+              <a:rPr lang="en-US" b="0"/>
+              <a:t>24</a:t>
             </a:fld>
             <a:endParaRPr lang="en-US"/>
           </a:p>
@@ -13303,7 +12815,7 @@
 </p:sld>
 </file>
 
-<file path=ppt/slides/slide26.xml><?xml version="1.0" encoding="utf-8"?>
+<file path=ppt/slides/slide25.xml><?xml version="1.0" encoding="utf-8"?>
 <p:sld xmlns:a="http://schemas.openxmlformats.org/drawingml/2006/main" xmlns:r="http://schemas.openxmlformats.org/officeDocument/2006/relationships" xmlns:p="http://schemas.openxmlformats.org/presentationml/2006/main">
   <p:cSld name="Slide 26">
     <p:spTree>
@@ -13323,9 +12835,11 @@
       <p:sp>
         <p:nvSpPr>
           <p:cNvPr id="3" name="Text 0"/>
-          <p:cNvSpPr/>
+          <p:cNvSpPr>
+            <a:spLocks noGrp="1"/>
+          </p:cNvSpPr>
           <p:nvPr>
-            <p:ph idx="100" type="title" hasCustomPrompt="1"/>
+            <p:ph type="title" idx="100" hasCustomPrompt="1"/>
           </p:nvPr>
         </p:nvSpPr>
         <p:spPr>
@@ -13343,7 +12857,7 @@
           <a:bodyPr wrap="square" lIns="0" tIns="0" rIns="0" bIns="0" rtlCol="0" anchor="ctr"/>
           <a:lstStyle/>
           <a:p>
-            <a:pPr algn="l" indent="0" marL="0">
+            <a:pPr marL="0" indent="0" algn="l">
               <a:buNone/>
             </a:pPr>
             <a:r>
@@ -13382,17 +12896,21 @@
             <a:prstDash val="solid"/>
           </a:ln>
         </p:spPr>
+        <p:txBody>
+          <a:bodyPr/>
+          <a:p/>
+        </p:txBody>
       </p:sp>
       <p:pic>
         <p:nvPicPr>
-          <p:cNvPr id="5" name="Image 0" descr="onay">    </p:cNvPr>
+          <p:cNvPr id="5" name="Image 0" descr="onay"/>
           <p:cNvPicPr>
             <a:picLocks noChangeAspect="1"/>
           </p:cNvPicPr>
           <p:nvPr/>
         </p:nvPicPr>
         <p:blipFill>
-          <a:blip r:embed="rId1"/>
+          <a:blip r:embed="rId3"/>
           <a:stretch>
             <a:fillRect/>
           </a:stretch>
@@ -13428,7 +12946,7 @@
           <a:bodyPr wrap="square" lIns="0" tIns="0" rIns="0" bIns="0" rtlCol="0" anchor="ctr"/>
           <a:lstStyle/>
           <a:p>
-            <a:pPr indent="0" marL="0">
+            <a:pPr marL="0" indent="0">
               <a:buNone/>
             </a:pPr>
             <a:r>
@@ -13467,17 +12985,21 @@
             <a:prstDash val="solid"/>
           </a:ln>
         </p:spPr>
+        <p:txBody>
+          <a:bodyPr/>
+          <a:p/>
+        </p:txBody>
       </p:sp>
       <p:pic>
         <p:nvPicPr>
-          <p:cNvPr id="8" name="Image 1" descr="onay">    </p:cNvPr>
+          <p:cNvPr id="8" name="Image 1" descr="onay"/>
           <p:cNvPicPr>
             <a:picLocks noChangeAspect="1"/>
           </p:cNvPicPr>
           <p:nvPr/>
         </p:nvPicPr>
         <p:blipFill>
-          <a:blip r:embed="rId2"/>
+          <a:blip r:embed="rId3"/>
           <a:stretch>
             <a:fillRect/>
           </a:stretch>
@@ -13513,7 +13035,7 @@
           <a:bodyPr wrap="square" lIns="0" tIns="0" rIns="0" bIns="0" rtlCol="0" anchor="ctr"/>
           <a:lstStyle/>
           <a:p>
-            <a:pPr indent="0" marL="0">
+            <a:pPr marL="0" indent="0">
               <a:buNone/>
             </a:pPr>
             <a:r>
@@ -13552,10 +13074,14 @@
             <a:prstDash val="solid"/>
           </a:ln>
         </p:spPr>
+        <p:txBody>
+          <a:bodyPr/>
+          <a:p/>
+        </p:txBody>
       </p:sp>
       <p:pic>
         <p:nvPicPr>
-          <p:cNvPr id="11" name="Image 2" descr="onay">    </p:cNvPr>
+          <p:cNvPr id="11" name="Image 2" descr="onay"/>
           <p:cNvPicPr>
             <a:picLocks noChangeAspect="1"/>
           </p:cNvPicPr>
@@ -13598,7 +13124,7 @@
           <a:bodyPr wrap="square" lIns="0" tIns="0" rIns="0" bIns="0" rtlCol="0" anchor="ctr"/>
           <a:lstStyle/>
           <a:p>
-            <a:pPr indent="0" marL="0">
+            <a:pPr marL="0" indent="0">
               <a:buNone/>
             </a:pPr>
             <a:r>
@@ -13637,17 +13163,21 @@
             <a:prstDash val="solid"/>
           </a:ln>
         </p:spPr>
+        <p:txBody>
+          <a:bodyPr/>
+          <a:p/>
+        </p:txBody>
       </p:sp>
       <p:pic>
         <p:nvPicPr>
-          <p:cNvPr id="14" name="Image 3" descr="onay">    </p:cNvPr>
+          <p:cNvPr id="14" name="Image 3" descr="onay"/>
           <p:cNvPicPr>
             <a:picLocks noChangeAspect="1"/>
           </p:cNvPicPr>
           <p:nvPr/>
         </p:nvPicPr>
         <p:blipFill>
-          <a:blip r:embed="rId4"/>
+          <a:blip r:embed="rId3"/>
           <a:stretch>
             <a:fillRect/>
           </a:stretch>
@@ -13683,7 +13213,7 @@
           <a:bodyPr wrap="square" lIns="0" tIns="0" rIns="0" bIns="0" rtlCol="0" anchor="ctr"/>
           <a:lstStyle/>
           <a:p>
-            <a:pPr indent="0" marL="0">
+            <a:pPr marL="0" indent="0">
               <a:buNone/>
             </a:pPr>
             <a:r>
@@ -13692,7 +13222,7 @@
                   <a:schemeClr val="accent1"/>
                 </a:solidFill>
               </a:rPr>
-              <a:t>Hanede sigara içen sorgulanmalıdır</a:t>
+              <a:t>Hanede sigara içen olması başarıyı azaltmaktadır</a:t>
             </a:r>
             <a:endParaRPr lang="en-US" sz="2600" dirty="0"/>
           </a:p>
@@ -13722,17 +13252,21 @@
             <a:prstDash val="solid"/>
           </a:ln>
         </p:spPr>
+        <p:txBody>
+          <a:bodyPr/>
+          <a:p/>
+        </p:txBody>
       </p:sp>
       <p:pic>
         <p:nvPicPr>
-          <p:cNvPr id="17" name="Image 4" descr="onay">    </p:cNvPr>
+          <p:cNvPr id="17" name="Image 4" descr="onay"/>
           <p:cNvPicPr>
             <a:picLocks noChangeAspect="1"/>
           </p:cNvPicPr>
           <p:nvPr/>
         </p:nvPicPr>
         <p:blipFill>
-          <a:blip r:embed="rId5"/>
+          <a:blip r:embed="rId3"/>
           <a:stretch>
             <a:fillRect/>
           </a:stretch>
@@ -13768,7 +13302,7 @@
           <a:bodyPr wrap="square" lIns="0" tIns="0" rIns="0" bIns="0" rtlCol="0" anchor="ctr"/>
           <a:lstStyle/>
           <a:p>
-            <a:pPr indent="0" marL="0">
+            <a:pPr marL="0" indent="0">
               <a:buNone/>
             </a:pPr>
             <a:r>
@@ -13804,7 +13338,7 @@
           <a:bodyPr wrap="square" lIns="0" tIns="0" rIns="0" bIns="0" rtlCol="0" anchor="ctr"/>
           <a:lstStyle/>
           <a:p>
-            <a:pPr indent="0" marL="0">
+            <a:pPr marL="0" indent="0">
               <a:buNone/>
             </a:pPr>
             <a:r>
@@ -13839,7 +13373,7 @@
           </a:prstGeom>
           <a:extLst>
             <a:ext uri="{C572A759-6A51-4108-AA02-DFA0A04FC94B}">
-              <ma14:wrappingTextBoxFlag xmlns:ma14="http://schemas.microsoft.com/office/mac/drawingml/2011/main" val="0"/>
+              <ma14:wrappingTextBoxFlag xmlns:ma14="http://schemas.microsoft.com/office/mac/drawingml/2011/main" xmlns="" val="0"/>
             </a:ext>
           </a:extLst>
         </p:spPr>
@@ -13857,8 +13391,8 @@
           <a:p>
             <a:pPr algn="r"/>
             <a:fld id="{F7021451-1387-4CA6-816F-3879F97B5CBC}" type="slidenum">
-              <a:rPr b="0" lang="en-US"/>
-              <a:t>26</a:t>
+              <a:rPr lang="en-US" b="0"/>
+              <a:t>25</a:t>
             </a:fld>
             <a:endParaRPr lang="en-US"/>
           </a:p>
@@ -13872,7 +13406,7 @@
 </p:sld>
 </file>
 
-<file path=ppt/slides/slide27.xml><?xml version="1.0" encoding="utf-8"?>
+<file path=ppt/slides/slide26.xml><?xml version="1.0" encoding="utf-8"?>
 <p:sld xmlns:a="http://schemas.openxmlformats.org/drawingml/2006/main" xmlns:r="http://schemas.openxmlformats.org/officeDocument/2006/relationships" xmlns:p="http://schemas.openxmlformats.org/presentationml/2006/main">
   <p:cSld name="Slide 27">
     <p:spTree>
@@ -13892,9 +13426,11 @@
       <p:sp>
         <p:nvSpPr>
           <p:cNvPr id="3" name="Text 0"/>
-          <p:cNvSpPr/>
+          <p:cNvSpPr>
+            <a:spLocks noGrp="1"/>
+          </p:cNvSpPr>
           <p:nvPr>
-            <p:ph idx="100" type="title" hasCustomPrompt="1"/>
+            <p:ph type="title" idx="100" hasCustomPrompt="1"/>
           </p:nvPr>
         </p:nvSpPr>
         <p:spPr>
@@ -13912,7 +13448,7 @@
           <a:bodyPr wrap="square" lIns="0" tIns="0" rIns="0" bIns="0" rtlCol="0" anchor="ctr"/>
           <a:lstStyle/>
           <a:p>
-            <a:pPr algn="l" indent="0" marL="0">
+            <a:pPr marL="0" indent="0" algn="l">
               <a:buNone/>
             </a:pPr>
             <a:r>
@@ -13948,13 +13484,13 @@
           <a:bodyPr wrap="square" lIns="0" tIns="0" rIns="0" bIns="0" rtlCol="0" anchor="t"/>
           <a:lstStyle/>
           <a:p>
-            <a:pPr algn="just" marL="342900" indent="-342900">
+            <a:pPr marL="342900" indent="-342900" algn="just">
               <a:spcAft>
                 <a:spcPts val="400"/>
               </a:spcAft>
               <a:buSzPct val="100000"/>
               <a:buFont typeface="+mj-lt"/>
-              <a:buAutoNum type="arabicPeriod" startAt="1"/>
+              <a:buAutoNum type="arabicPeriod"/>
             </a:pPr>
             <a:r>
               <a:rPr lang="en-US" sz="1100" dirty="0">
@@ -13967,13 +13503,13 @@
             <a:endParaRPr lang="en-US" sz="1100" dirty="0"/>
           </a:p>
           <a:p>
-            <a:pPr algn="just" marL="342900" indent="-342900">
+            <a:pPr marL="342900" indent="-342900" algn="just">
               <a:spcAft>
                 <a:spcPts val="400"/>
               </a:spcAft>
               <a:buSzPct val="100000"/>
               <a:buFont typeface="+mj-lt"/>
-              <a:buAutoNum type="arabicPeriod" startAt="1"/>
+              <a:buAutoNum type="arabicPeriod"/>
             </a:pPr>
             <a:r>
               <a:rPr lang="en-US" sz="1100" dirty="0">
@@ -13986,13 +13522,13 @@
             <a:endParaRPr lang="en-US" sz="1100" dirty="0"/>
           </a:p>
           <a:p>
-            <a:pPr algn="just" marL="342900" indent="-342900">
+            <a:pPr marL="342900" indent="-342900" algn="just">
               <a:spcAft>
                 <a:spcPts val="400"/>
               </a:spcAft>
               <a:buSzPct val="100000"/>
               <a:buFont typeface="+mj-lt"/>
-              <a:buAutoNum type="arabicPeriod" startAt="1"/>
+              <a:buAutoNum type="arabicPeriod"/>
             </a:pPr>
             <a:r>
               <a:rPr lang="en-US" sz="1100" dirty="0">
@@ -14005,13 +13541,13 @@
             <a:endParaRPr lang="en-US" sz="1100" dirty="0"/>
           </a:p>
           <a:p>
-            <a:pPr algn="just" marL="342900" indent="-342900">
+            <a:pPr marL="342900" indent="-342900" algn="just">
               <a:spcAft>
                 <a:spcPts val="400"/>
               </a:spcAft>
               <a:buSzPct val="100000"/>
               <a:buFont typeface="+mj-lt"/>
-              <a:buAutoNum type="arabicPeriod" startAt="1"/>
+              <a:buAutoNum type="arabicPeriod"/>
             </a:pPr>
             <a:r>
               <a:rPr lang="en-US" sz="1100" dirty="0">
@@ -14024,13 +13560,13 @@
             <a:endParaRPr lang="en-US" sz="1100" dirty="0"/>
           </a:p>
           <a:p>
-            <a:pPr algn="just" marL="342900" indent="-342900">
+            <a:pPr marL="342900" indent="-342900" algn="just">
               <a:spcAft>
                 <a:spcPts val="400"/>
               </a:spcAft>
               <a:buSzPct val="100000"/>
               <a:buFont typeface="+mj-lt"/>
-              <a:buAutoNum type="arabicPeriod" startAt="1"/>
+              <a:buAutoNum type="arabicPeriod"/>
             </a:pPr>
             <a:r>
               <a:rPr lang="en-US" sz="1100" dirty="0">
@@ -14043,13 +13579,13 @@
             <a:endParaRPr lang="en-US" sz="1100" dirty="0"/>
           </a:p>
           <a:p>
-            <a:pPr algn="just" marL="342900" indent="-342900">
+            <a:pPr marL="342900" indent="-342900" algn="just">
               <a:spcAft>
                 <a:spcPts val="400"/>
               </a:spcAft>
               <a:buSzPct val="100000"/>
               <a:buFont typeface="+mj-lt"/>
-              <a:buAutoNum type="arabicPeriod" startAt="1"/>
+              <a:buAutoNum type="arabicPeriod"/>
             </a:pPr>
             <a:r>
               <a:rPr lang="en-US" sz="1100" dirty="0">
@@ -14062,13 +13598,13 @@
             <a:endParaRPr lang="en-US" sz="1100" dirty="0"/>
           </a:p>
           <a:p>
-            <a:pPr algn="just" marL="342900" indent="-342900">
+            <a:pPr marL="342900" indent="-342900" algn="just">
               <a:spcAft>
                 <a:spcPts val="400"/>
               </a:spcAft>
               <a:buSzPct val="100000"/>
               <a:buFont typeface="+mj-lt"/>
-              <a:buAutoNum type="arabicPeriod" startAt="1"/>
+              <a:buAutoNum type="arabicPeriod"/>
             </a:pPr>
             <a:r>
               <a:rPr lang="en-US" sz="1100" dirty="0">
@@ -14081,13 +13617,13 @@
             <a:endParaRPr lang="en-US" sz="1100" dirty="0"/>
           </a:p>
           <a:p>
-            <a:pPr algn="just" marL="342900" indent="-342900">
+            <a:pPr marL="342900" indent="-342900" algn="just">
               <a:spcAft>
                 <a:spcPts val="400"/>
               </a:spcAft>
               <a:buSzPct val="100000"/>
               <a:buFont typeface="+mj-lt"/>
-              <a:buAutoNum type="arabicPeriod" startAt="1"/>
+              <a:buAutoNum type="arabicPeriod"/>
             </a:pPr>
             <a:r>
               <a:rPr lang="en-US" sz="1100" dirty="0">
@@ -14122,7 +13658,7 @@
           <a:bodyPr wrap="square" lIns="0" tIns="0" rIns="0" bIns="0" rtlCol="0" anchor="t"/>
           <a:lstStyle/>
           <a:p>
-            <a:pPr algn="just" marL="342900" indent="-342900">
+            <a:pPr marL="342900" indent="-342900" algn="just">
               <a:spcAft>
                 <a:spcPts val="400"/>
               </a:spcAft>
@@ -14141,7 +13677,7 @@
             <a:endParaRPr lang="en-US" sz="1100" dirty="0"/>
           </a:p>
           <a:p>
-            <a:pPr algn="just" marL="342900" indent="-342900">
+            <a:pPr marL="342900" indent="-342900" algn="just">
               <a:spcAft>
                 <a:spcPts val="400"/>
               </a:spcAft>
@@ -14160,7 +13696,7 @@
             <a:endParaRPr lang="en-US" sz="1100" dirty="0"/>
           </a:p>
           <a:p>
-            <a:pPr algn="just" marL="342900" indent="-342900">
+            <a:pPr marL="342900" indent="-342900" algn="just">
               <a:spcAft>
                 <a:spcPts val="400"/>
               </a:spcAft>
@@ -14179,7 +13715,7 @@
             <a:endParaRPr lang="en-US" sz="1100" dirty="0"/>
           </a:p>
           <a:p>
-            <a:pPr algn="just" marL="342900" indent="-342900">
+            <a:pPr marL="342900" indent="-342900" algn="just">
               <a:spcAft>
                 <a:spcPts val="400"/>
               </a:spcAft>
@@ -14198,7 +13734,7 @@
             <a:endParaRPr lang="en-US" sz="1100" dirty="0"/>
           </a:p>
           <a:p>
-            <a:pPr algn="just" marL="342900" indent="-342900">
+            <a:pPr marL="342900" indent="-342900" algn="just">
               <a:spcAft>
                 <a:spcPts val="400"/>
               </a:spcAft>
@@ -14217,7 +13753,7 @@
             <a:endParaRPr lang="en-US" sz="1100" dirty="0"/>
           </a:p>
           <a:p>
-            <a:pPr algn="just" marL="342900" indent="-342900">
+            <a:pPr marL="342900" indent="-342900" algn="just">
               <a:spcAft>
                 <a:spcPts val="400"/>
               </a:spcAft>
@@ -14236,7 +13772,7 @@
             <a:endParaRPr lang="en-US" sz="1100" dirty="0"/>
           </a:p>
           <a:p>
-            <a:pPr algn="just" marL="342900" indent="-342900">
+            <a:pPr marL="342900" indent="-342900" algn="just">
               <a:spcAft>
                 <a:spcPts val="400"/>
               </a:spcAft>
@@ -14255,7 +13791,7 @@
             <a:endParaRPr lang="en-US" sz="1100" dirty="0"/>
           </a:p>
           <a:p>
-            <a:pPr algn="just" marL="342900" indent="-342900">
+            <a:pPr marL="342900" indent="-342900" algn="just">
               <a:spcAft>
                 <a:spcPts val="400"/>
               </a:spcAft>
@@ -14295,7 +13831,7 @@
           </a:prstGeom>
           <a:extLst>
             <a:ext uri="{C572A759-6A51-4108-AA02-DFA0A04FC94B}">
-              <ma14:wrappingTextBoxFlag xmlns:ma14="http://schemas.microsoft.com/office/mac/drawingml/2011/main" val="0"/>
+              <ma14:wrappingTextBoxFlag xmlns:ma14="http://schemas.microsoft.com/office/mac/drawingml/2011/main" xmlns="" val="0"/>
             </a:ext>
           </a:extLst>
         </p:spPr>
@@ -14313,8 +13849,8 @@
           <a:p>
             <a:pPr algn="r"/>
             <a:fld id="{F7021451-1387-4CA6-816F-3879F97B5CBC}" type="slidenum">
-              <a:rPr b="0" lang="en-US"/>
-              <a:t>27</a:t>
+              <a:rPr lang="en-US" b="0"/>
+              <a:t>26</a:t>
             </a:fld>
             <a:endParaRPr lang="en-US"/>
           </a:p>
@@ -14328,7 +13864,7 @@
 </p:sld>
 </file>
 
-<file path=ppt/slides/slide28.xml><?xml version="1.0" encoding="utf-8"?>
+<file path=ppt/slides/slide27.xml><?xml version="1.0" encoding="utf-8"?>
 <p:sld xmlns:a="http://schemas.openxmlformats.org/drawingml/2006/main" xmlns:r="http://schemas.openxmlformats.org/officeDocument/2006/relationships" xmlns:p="http://schemas.openxmlformats.org/presentationml/2006/main">
   <p:cSld name="Slide 28">
     <p:spTree>
@@ -14348,9 +13884,11 @@
       <p:sp>
         <p:nvSpPr>
           <p:cNvPr id="3" name="Text 0"/>
-          <p:cNvSpPr/>
+          <p:cNvSpPr>
+            <a:spLocks noGrp="1"/>
+          </p:cNvSpPr>
           <p:nvPr>
-            <p:ph idx="100" type="title" hasCustomPrompt="1"/>
+            <p:ph type="title" idx="100" hasCustomPrompt="1"/>
           </p:nvPr>
         </p:nvSpPr>
         <p:spPr>
@@ -14368,7 +13906,7 @@
           <a:bodyPr wrap="square" lIns="0" tIns="0" rIns="0" bIns="0" rtlCol="0" anchor="t"/>
           <a:lstStyle/>
           <a:p>
-            <a:pPr algn="l" indent="0" marL="0">
+            <a:pPr marL="0" indent="0" algn="l">
               <a:buNone/>
             </a:pPr>
             <a:r>
@@ -14404,7 +13942,7 @@
           <a:bodyPr wrap="square" lIns="0" tIns="0" rIns="0" bIns="0" rtlCol="0" anchor="t"/>
           <a:lstStyle/>
           <a:p>
-            <a:pPr indent="0" marL="0">
+            <a:pPr marL="0" indent="0">
               <a:buNone/>
             </a:pPr>
             <a:r>
@@ -14418,7 +13956,7 @@
             <a:endParaRPr lang="en-US" sz="2600" dirty="0"/>
           </a:p>
           <a:p>
-            <a:pPr indent="0" marL="0">
+            <a:pPr marL="0" indent="0">
               <a:buNone/>
             </a:pPr>
             <a:r>
@@ -14432,7 +13970,7 @@
             <a:endParaRPr lang="en-US" sz="2600" dirty="0"/>
           </a:p>
           <a:p>
-            <a:pPr indent="0" marL="0">
+            <a:pPr marL="0" indent="0">
               <a:buNone/>
             </a:pPr>
             <a:r>
@@ -14441,21 +13979,7 @@
                   <a:schemeClr val="bg2"/>
                 </a:solidFill>
               </a:rPr>
-              <a:t>Dr. [Ad Soyad]</a:t>
-            </a:r>
-            <a:endParaRPr lang="en-US" sz="2600" dirty="0"/>
-          </a:p>
-          <a:p>
-            <a:pPr indent="0" marL="0">
-              <a:buNone/>
-            </a:pPr>
-            <a:r>
-              <a:rPr lang="en-US" sz="2200" dirty="0">
-                <a:solidFill>
-                  <a:schemeClr val="bg2"/>
-                </a:solidFill>
-              </a:rPr>
-              <a:t>[e-posta adresi]</a:t>
+              <a:t>Dr. Ahmet KIRAN</a:t>
             </a:r>
             <a:endParaRPr lang="en-US" sz="2600" dirty="0"/>
           </a:p>
@@ -14485,17 +14009,21 @@
             <a:prstDash val="solid"/>
           </a:ln>
         </p:spPr>
+        <p:txBody>
+          <a:bodyPr/>
+          <a:p/>
+        </p:txBody>
       </p:sp>
       <p:pic>
         <p:nvPicPr>
-          <p:cNvPr id="6" name="Dumansız simge" descr="Sigara içilmez simgesi">    </p:cNvPr>
+          <p:cNvPr id="6" name="Dumansız simge" descr="Sigara içilmez simgesi"/>
           <p:cNvPicPr>
             <a:picLocks noChangeAspect="1"/>
           </p:cNvPicPr>
           <p:nvPr/>
         </p:nvPicPr>
         <p:blipFill>
-          <a:blip r:embed="rId1"/>
+          <a:blip r:embed="rId3"/>
           <a:stretch>
             <a:fillRect/>
           </a:stretch>
@@ -14531,7 +14059,7 @@
           <a:bodyPr wrap="square" lIns="0" tIns="0" rIns="0" bIns="0" rtlCol="0" anchor="ctr"/>
           <a:lstStyle/>
           <a:p>
-            <a:pPr algn="ctr" indent="0" marL="0">
+            <a:pPr marL="0" indent="0" algn="ctr">
               <a:buNone/>
             </a:pPr>
             <a:r>
@@ -14566,7 +14094,7 @@
           </a:prstGeom>
           <a:extLst>
             <a:ext uri="{C572A759-6A51-4108-AA02-DFA0A04FC94B}">
-              <ma14:wrappingTextBoxFlag xmlns:ma14="http://schemas.microsoft.com/office/mac/drawingml/2011/main" val="0"/>
+              <ma14:wrappingTextBoxFlag xmlns:ma14="http://schemas.microsoft.com/office/mac/drawingml/2011/main" xmlns="" val="0"/>
             </a:ext>
           </a:extLst>
         </p:spPr>
@@ -14584,8 +14112,8 @@
           <a:p>
             <a:pPr algn="r"/>
             <a:fld id="{F7021451-1387-4CA6-816F-3879F97B5CBC}" type="slidenum">
-              <a:rPr b="0" lang="en-US"/>
-              <a:t>28</a:t>
+              <a:rPr lang="en-US" b="0"/>
+              <a:t>27</a:t>
             </a:fld>
             <a:endParaRPr lang="en-US"/>
           </a:p>
@@ -14600,477 +14128,6 @@
 </file>
 
 <file path=ppt/slides/slide3.xml><?xml version="1.0" encoding="utf-8"?>
-<p:sld xmlns:a="http://schemas.openxmlformats.org/drawingml/2006/main" xmlns:r="http://schemas.openxmlformats.org/officeDocument/2006/relationships" xmlns:p="http://schemas.openxmlformats.org/presentationml/2006/main">
-  <p:cSld name="Slide 3">
-    <p:spTree>
-      <p:nvGrpSpPr>
-        <p:cNvPr id="1" name=""/>
-        <p:cNvGrpSpPr/>
-        <p:nvPr/>
-      </p:nvGrpSpPr>
-      <p:grpSpPr>
-        <a:xfrm>
-          <a:off x="0" y="0"/>
-          <a:ext cx="0" cy="0"/>
-          <a:chOff x="0" y="0"/>
-          <a:chExt cx="0" cy="0"/>
-        </a:xfrm>
-      </p:grpSpPr>
-      <p:sp>
-        <p:nvSpPr>
-          <p:cNvPr id="3" name="Text 0"/>
-          <p:cNvSpPr/>
-          <p:nvPr>
-            <p:ph idx="100" type="title" hasCustomPrompt="1"/>
-          </p:nvPr>
-        </p:nvSpPr>
-        <p:spPr>
-          <a:xfrm>
-            <a:off x="548640" y="320040"/>
-            <a:ext cx="10607040" cy="868680"/>
-          </a:xfrm>
-          <a:prstGeom prst="rect">
-            <a:avLst/>
-          </a:prstGeom>
-          <a:noFill/>
-          <a:ln/>
-        </p:spPr>
-        <p:txBody>
-          <a:bodyPr wrap="square" lIns="0" tIns="0" rIns="0" bIns="0" rtlCol="0" anchor="ctr"/>
-          <a:lstStyle/>
-          <a:p>
-            <a:pPr algn="l" indent="0" marL="0">
-              <a:buNone/>
-            </a:pPr>
-            <a:r>
-              <a:rPr lang="en-US" sz="3600" b="1" dirty="0">
-                <a:solidFill>
-                  <a:schemeClr val="accent1"/>
-                </a:solidFill>
-              </a:rPr>
-              <a:t>Hedefler</a:t>
-            </a:r>
-            <a:endParaRPr lang="en-US" sz="3600" dirty="0"/>
-          </a:p>
-        </p:txBody>
-      </p:sp>
-      <p:sp>
-        <p:nvSpPr>
-          <p:cNvPr id="4" name="Ikon zemini"/>
-          <p:cNvSpPr/>
-          <p:nvPr/>
-        </p:nvSpPr>
-        <p:spPr>
-          <a:xfrm>
-            <a:off x="731520" y="1508760"/>
-            <a:ext cx="1097280" cy="1097280"/>
-          </a:xfrm>
-          <a:prstGeom prst="ellipse">
-            <a:avLst/>
-          </a:prstGeom>
-          <a:solidFill>
-            <a:schemeClr val="accent2"/>
-          </a:solidFill>
-          <a:ln w="12700">
-            <a:solidFill>
-              <a:schemeClr val="accent2"/>
-            </a:solidFill>
-            <a:prstDash val="solid"/>
-          </a:ln>
-        </p:spPr>
-      </p:sp>
-      <p:pic>
-        <p:nvPicPr>
-          <p:cNvPr id="5" name="Ikon" descr="FaBalanceScale">    </p:cNvPr>
-          <p:cNvPicPr>
-            <a:picLocks noChangeAspect="1"/>
-          </p:cNvPicPr>
-          <p:nvPr/>
-        </p:nvPicPr>
-        <p:blipFill>
-          <a:blip r:embed="rId1"/>
-          <a:stretch>
-            <a:fillRect/>
-          </a:stretch>
-        </p:blipFill>
-        <p:spPr>
-          <a:xfrm>
-            <a:off x="1016813" y="1794053"/>
-            <a:ext cx="526694" cy="526694"/>
-          </a:xfrm>
-          <a:prstGeom prst="rect">
-            <a:avLst/>
-          </a:prstGeom>
-        </p:spPr>
-      </p:pic>
-      <p:sp>
-        <p:nvSpPr>
-          <p:cNvPr id="6" name="Text 2"/>
-          <p:cNvSpPr txBox="1"/>
-          <p:nvPr/>
-        </p:nvSpPr>
-        <p:spPr>
-          <a:xfrm>
-            <a:off x="2148840" y="1554480"/>
-            <a:ext cx="8778240" cy="548640"/>
-          </a:xfrm>
-          <a:prstGeom prst="rect">
-            <a:avLst/>
-          </a:prstGeom>
-          <a:noFill/>
-          <a:ln/>
-        </p:spPr>
-        <p:txBody>
-          <a:bodyPr wrap="square" lIns="0" tIns="0" rIns="0" bIns="0" rtlCol="0" anchor="ctr"/>
-          <a:lstStyle/>
-          <a:p>
-            <a:pPr indent="0" marL="0">
-              <a:buNone/>
-            </a:pPr>
-            <a:r>
-              <a:rPr lang="en-US" sz="2800" b="1" dirty="0">
-                <a:solidFill>
-                  <a:schemeClr val="accent1"/>
-                </a:solidFill>
-              </a:rPr>
-              <a:t>Tedavilerin etkinliğini karşılaştırmak</a:t>
-            </a:r>
-            <a:endParaRPr lang="en-US" sz="2800" dirty="0"/>
-          </a:p>
-        </p:txBody>
-      </p:sp>
-      <p:sp>
-        <p:nvSpPr>
-          <p:cNvPr id="7" name="Text 3"/>
-          <p:cNvSpPr txBox="1"/>
-          <p:nvPr/>
-        </p:nvSpPr>
-        <p:spPr>
-          <a:xfrm>
-            <a:off x="2148840" y="2103120"/>
-            <a:ext cx="8778240" cy="457200"/>
-          </a:xfrm>
-          <a:prstGeom prst="rect">
-            <a:avLst/>
-          </a:prstGeom>
-          <a:noFill/>
-          <a:ln/>
-        </p:spPr>
-        <p:txBody>
-          <a:bodyPr wrap="square" lIns="0" tIns="0" rIns="0" bIns="0" rtlCol="0" anchor="ctr"/>
-          <a:lstStyle/>
-          <a:p>
-            <a:pPr indent="0" marL="0">
-              <a:buNone/>
-            </a:pPr>
-            <a:r>
-              <a:rPr lang="en-US" sz="2200" dirty="0">
-                <a:solidFill>
-                  <a:schemeClr val="accent3"/>
-                </a:solidFill>
-              </a:rPr>
-              <a:t>Makalenin bulgularıyla</a:t>
-            </a:r>
-            <a:endParaRPr lang="en-US" sz="2200" dirty="0"/>
-          </a:p>
-        </p:txBody>
-      </p:sp>
-      <p:sp>
-        <p:nvSpPr>
-          <p:cNvPr id="8" name="Ikon zemini"/>
-          <p:cNvSpPr/>
-          <p:nvPr/>
-        </p:nvSpPr>
-        <p:spPr>
-          <a:xfrm>
-            <a:off x="731520" y="3063240"/>
-            <a:ext cx="1097280" cy="1097280"/>
-          </a:xfrm>
-          <a:prstGeom prst="ellipse">
-            <a:avLst/>
-          </a:prstGeom>
-          <a:solidFill>
-            <a:schemeClr val="accent1"/>
-          </a:solidFill>
-          <a:ln w="12700">
-            <a:solidFill>
-              <a:schemeClr val="accent1"/>
-            </a:solidFill>
-            <a:prstDash val="solid"/>
-          </a:ln>
-        </p:spPr>
-      </p:sp>
-      <p:pic>
-        <p:nvPicPr>
-          <p:cNvPr id="9" name="Ikon" descr="FaUsers">    </p:cNvPr>
-          <p:cNvPicPr>
-            <a:picLocks noChangeAspect="1"/>
-          </p:cNvPicPr>
-          <p:nvPr/>
-        </p:nvPicPr>
-        <p:blipFill>
-          <a:blip r:embed="rId2"/>
-          <a:stretch>
-            <a:fillRect/>
-          </a:stretch>
-        </p:blipFill>
-        <p:spPr>
-          <a:xfrm>
-            <a:off x="1016813" y="3348533"/>
-            <a:ext cx="526694" cy="526694"/>
-          </a:xfrm>
-          <a:prstGeom prst="rect">
-            <a:avLst/>
-          </a:prstGeom>
-        </p:spPr>
-      </p:pic>
-      <p:sp>
-        <p:nvSpPr>
-          <p:cNvPr id="10" name="Text 5"/>
-          <p:cNvSpPr txBox="1"/>
-          <p:nvPr/>
-        </p:nvSpPr>
-        <p:spPr>
-          <a:xfrm>
-            <a:off x="2148840" y="3108960"/>
-            <a:ext cx="8778240" cy="548640"/>
-          </a:xfrm>
-          <a:prstGeom prst="rect">
-            <a:avLst/>
-          </a:prstGeom>
-          <a:noFill/>
-          <a:ln/>
-        </p:spPr>
-        <p:txBody>
-          <a:bodyPr wrap="square" lIns="0" tIns="0" rIns="0" bIns="0" rtlCol="0" anchor="ctr"/>
-          <a:lstStyle/>
-          <a:p>
-            <a:pPr indent="0" marL="0">
-              <a:buNone/>
-            </a:pPr>
-            <a:r>
-              <a:rPr lang="en-US" sz="2800" b="1" dirty="0">
-                <a:solidFill>
-                  <a:schemeClr val="accent1"/>
-                </a:solidFill>
-              </a:rPr>
-              <a:t>Başarıyı etkileyen faktörleri tanımak</a:t>
-            </a:r>
-            <a:endParaRPr lang="en-US" sz="2800" dirty="0"/>
-          </a:p>
-        </p:txBody>
-      </p:sp>
-      <p:sp>
-        <p:nvSpPr>
-          <p:cNvPr id="11" name="Text 6"/>
-          <p:cNvSpPr txBox="1"/>
-          <p:nvPr/>
-        </p:nvSpPr>
-        <p:spPr>
-          <a:xfrm>
-            <a:off x="2148840" y="3657600"/>
-            <a:ext cx="8778240" cy="457200"/>
-          </a:xfrm>
-          <a:prstGeom prst="rect">
-            <a:avLst/>
-          </a:prstGeom>
-          <a:noFill/>
-          <a:ln/>
-        </p:spPr>
-        <p:txBody>
-          <a:bodyPr wrap="square" lIns="0" tIns="0" rIns="0" bIns="0" rtlCol="0" anchor="ctr"/>
-          <a:lstStyle/>
-          <a:p>
-            <a:pPr indent="0" marL="0">
-              <a:buNone/>
-            </a:pPr>
-            <a:r>
-              <a:rPr lang="en-US" sz="2200" dirty="0">
-                <a:solidFill>
-                  <a:schemeClr val="accent3"/>
-                </a:solidFill>
-              </a:rPr>
-              <a:t>Hasta ve çevre özellikleri</a:t>
-            </a:r>
-            <a:endParaRPr lang="en-US" sz="2200" dirty="0"/>
-          </a:p>
-        </p:txBody>
-      </p:sp>
-      <p:sp>
-        <p:nvSpPr>
-          <p:cNvPr id="12" name="Ikon zemini"/>
-          <p:cNvSpPr/>
-          <p:nvPr/>
-        </p:nvSpPr>
-        <p:spPr>
-          <a:xfrm>
-            <a:off x="731520" y="4617720"/>
-            <a:ext cx="1097280" cy="1097280"/>
-          </a:xfrm>
-          <a:prstGeom prst="ellipse">
-            <a:avLst/>
-          </a:prstGeom>
-          <a:solidFill>
-            <a:schemeClr val="accent2"/>
-          </a:solidFill>
-          <a:ln w="12700">
-            <a:solidFill>
-              <a:schemeClr val="accent2"/>
-            </a:solidFill>
-            <a:prstDash val="solid"/>
-          </a:ln>
-        </p:spPr>
-      </p:sp>
-      <p:pic>
-        <p:nvPicPr>
-          <p:cNvPr id="13" name="Ikon" descr="FaUserMd">    </p:cNvPr>
-          <p:cNvPicPr>
-            <a:picLocks noChangeAspect="1"/>
-          </p:cNvPicPr>
-          <p:nvPr/>
-        </p:nvPicPr>
-        <p:blipFill>
-          <a:blip r:embed="rId3"/>
-          <a:stretch>
-            <a:fillRect/>
-          </a:stretch>
-        </p:blipFill>
-        <p:spPr>
-          <a:xfrm>
-            <a:off x="1016813" y="4903013"/>
-            <a:ext cx="526694" cy="526694"/>
-          </a:xfrm>
-          <a:prstGeom prst="rect">
-            <a:avLst/>
-          </a:prstGeom>
-        </p:spPr>
-      </p:pic>
-      <p:sp>
-        <p:nvSpPr>
-          <p:cNvPr id="14" name="Text 8"/>
-          <p:cNvSpPr txBox="1"/>
-          <p:nvPr/>
-        </p:nvSpPr>
-        <p:spPr>
-          <a:xfrm>
-            <a:off x="2148840" y="4663440"/>
-            <a:ext cx="8778240" cy="548640"/>
-          </a:xfrm>
-          <a:prstGeom prst="rect">
-            <a:avLst/>
-          </a:prstGeom>
-          <a:noFill/>
-          <a:ln/>
-        </p:spPr>
-        <p:txBody>
-          <a:bodyPr wrap="square" lIns="0" tIns="0" rIns="0" bIns="0" rtlCol="0" anchor="ctr"/>
-          <a:lstStyle/>
-          <a:p>
-            <a:pPr indent="0" marL="0">
-              <a:buNone/>
-            </a:pPr>
-            <a:r>
-              <a:rPr lang="en-US" sz="2800" b="1" dirty="0">
-                <a:solidFill>
-                  <a:schemeClr val="accent1"/>
-                </a:solidFill>
-              </a:rPr>
-              <a:t>Bulguları klinik pratiğe aktarmak</a:t>
-            </a:r>
-            <a:endParaRPr lang="en-US" sz="2800" dirty="0"/>
-          </a:p>
-        </p:txBody>
-      </p:sp>
-      <p:sp>
-        <p:nvSpPr>
-          <p:cNvPr id="15" name="Text 9"/>
-          <p:cNvSpPr txBox="1"/>
-          <p:nvPr/>
-        </p:nvSpPr>
-        <p:spPr>
-          <a:xfrm>
-            <a:off x="2148840" y="5212080"/>
-            <a:ext cx="8778240" cy="457200"/>
-          </a:xfrm>
-          <a:prstGeom prst="rect">
-            <a:avLst/>
-          </a:prstGeom>
-          <a:noFill/>
-          <a:ln/>
-        </p:spPr>
-        <p:txBody>
-          <a:bodyPr wrap="square" lIns="0" tIns="0" rIns="0" bIns="0" rtlCol="0" anchor="ctr"/>
-          <a:lstStyle/>
-          <a:p>
-            <a:pPr indent="0" marL="0">
-              <a:buNone/>
-            </a:pPr>
-            <a:r>
-              <a:rPr lang="en-US" sz="2200" dirty="0">
-                <a:solidFill>
-                  <a:schemeClr val="accent3"/>
-                </a:solidFill>
-              </a:rPr>
-              <a:t>Olgu üzerinden tartışma</a:t>
-            </a:r>
-            <a:endParaRPr lang="en-US" sz="2200" dirty="0"/>
-          </a:p>
-        </p:txBody>
-      </p:sp>
-      <p:sp>
-        <p:nvSpPr>
-          <p:cNvPr id="25" name="Slide Number Placeholder 0"/>
-          <p:cNvSpPr>
-            <a:spLocks noGrp="1"/>
-          </p:cNvSpPr>
-          <p:nvPr>
-            <p:ph type="sldNum" sz="quarter" idx="4294967295"/>
-          </p:nvPr>
-        </p:nvSpPr>
-        <p:spPr>
-          <a:xfrm>
-            <a:off x="11201400" y="6382512"/>
-            <a:ext cx="548640" cy="292608"/>
-          </a:xfrm>
-          <a:prstGeom prst="rect">
-            <a:avLst/>
-          </a:prstGeom>
-          <a:extLst>
-            <a:ext uri="{C572A759-6A51-4108-AA02-DFA0A04FC94B}">
-              <ma14:wrappingTextBoxFlag xmlns:ma14="http://schemas.microsoft.com/office/mac/drawingml/2011/main" val="0"/>
-            </a:ext>
-          </a:extLst>
-        </p:spPr>
-        <p:txBody>
-          <a:bodyPr/>
-          <a:lstStyle>
-            <a:lvl1pPr>
-              <a:defRPr sz="1400">
-                <a:solidFill>
-                  <a:srgbClr val="7A8C94"/>
-                </a:solidFill>
-              </a:defRPr>
-            </a:lvl1pPr>
-          </a:lstStyle>
-          <a:p>
-            <a:pPr algn="r"/>
-            <a:fld id="{F7021451-1387-4CA6-816F-3879F97B5CBC}" type="slidenum">
-              <a:rPr b="0" lang="en-US"/>
-              <a:t>3</a:t>
-            </a:fld>
-            <a:endParaRPr lang="en-US"/>
-          </a:p>
-        </p:txBody>
-      </p:sp>
-    </p:spTree>
-  </p:cSld>
-  <p:clrMapOvr>
-    <a:masterClrMapping/>
-  </p:clrMapOvr>
-</p:sld>
-</file>
-
-<file path=ppt/slides/slide4.xml><?xml version="1.0" encoding="utf-8"?>
 <p:sld xmlns:a="http://schemas.openxmlformats.org/drawingml/2006/main" xmlns:r="http://schemas.openxmlformats.org/officeDocument/2006/relationships" xmlns:p="http://schemas.openxmlformats.org/presentationml/2006/main">
   <p:cSld name="Slide 4">
     <p:spTree>
@@ -15090,9 +14147,11 @@
       <p:sp>
         <p:nvSpPr>
           <p:cNvPr id="3" name="Text 0"/>
-          <p:cNvSpPr/>
+          <p:cNvSpPr>
+            <a:spLocks noGrp="1"/>
+          </p:cNvSpPr>
           <p:nvPr>
-            <p:ph idx="100" type="title" hasCustomPrompt="1"/>
+            <p:ph type="title" idx="100" hasCustomPrompt="1"/>
           </p:nvPr>
         </p:nvSpPr>
         <p:spPr>
@@ -15110,7 +14169,7 @@
           <a:bodyPr wrap="square" lIns="0" tIns="0" rIns="0" bIns="0" rtlCol="0" anchor="ctr"/>
           <a:lstStyle/>
           <a:p>
-            <a:pPr algn="l" indent="0" marL="0">
+            <a:pPr marL="0" indent="0" algn="l">
               <a:buNone/>
             </a:pPr>
             <a:r>
@@ -15149,7 +14208,7 @@
             <a:prstDash val="solid"/>
           </a:ln>
           <a:effectLst>
-            <a:outerShdw sx="100000" sy="100000" kx="0" ky="0" algn="bl" rotWithShape="0" blurRad="76200" dist="25400" dir="5400000">
+            <a:outerShdw blurRad="76200" dist="25400" dir="5400000" algn="bl" rotWithShape="0">
               <a:srgbClr val="000000">
                 <a:alpha val="18000"/>
               </a:srgbClr>
@@ -15159,14 +14218,14 @@
       </p:sp>
       <p:pic>
         <p:nvPicPr>
-          <p:cNvPr id="5" name="Makale ilk sayfa" descr="Makalenin ilk sayfası">    </p:cNvPr>
+          <p:cNvPr id="5" name="Makale ilk sayfa" descr="Makalenin ilk sayfası"/>
           <p:cNvPicPr>
             <a:picLocks noChangeAspect="1"/>
           </p:cNvPicPr>
           <p:nvPr/>
         </p:nvPicPr>
         <p:blipFill>
-          <a:blip r:embed="rId1"/>
+          <a:blip r:embed="rId3"/>
           <a:stretch>
             <a:fillRect/>
           </a:stretch>
@@ -15202,7 +14261,7 @@
           <a:bodyPr wrap="square" lIns="0" tIns="0" rIns="0" bIns="0" rtlCol="0" anchor="ctr"/>
           <a:lstStyle/>
           <a:p>
-            <a:pPr indent="0" marL="0">
+            <a:pPr marL="0" indent="0">
               <a:buNone/>
             </a:pPr>
             <a:r>
@@ -15240,7 +14299,7 @@
           </a:bodyPr>
           <a:lstStyle/>
           <a:p>
-            <a:pPr indent="0" marL="0">
+            <a:pPr marL="0" indent="0">
               <a:buNone/>
             </a:pPr>
             <a:r>
@@ -15249,7 +14308,15 @@
                   <a:schemeClr val="accent1"/>
                 </a:solidFill>
               </a:rPr>
-              <a:t>Turk J Fam Pract</a:t>
+              <a:t>Turk J Fam </a:t>
+            </a:r>
+            <a:r>
+              <a:rPr lang="en-US" sz="2200" dirty="0" err="1">
+                <a:solidFill>
+                  <a:schemeClr val="accent1"/>
+                </a:solidFill>
+              </a:rPr>
+              <a:t>Pract</a:t>
             </a:r>
             <a:endParaRPr lang="en-US" sz="2200" dirty="0"/>
           </a:p>
@@ -15276,7 +14343,7 @@
           <a:bodyPr wrap="square" lIns="0" tIns="0" rIns="0" bIns="0" rtlCol="0" anchor="ctr"/>
           <a:lstStyle/>
           <a:p>
-            <a:pPr indent="0" marL="0">
+            <a:pPr marL="0" indent="0">
               <a:buNone/>
             </a:pPr>
             <a:r>
@@ -15314,7 +14381,7 @@
           </a:bodyPr>
           <a:lstStyle/>
           <a:p>
-            <a:pPr indent="0" marL="0">
+            <a:pPr marL="0" indent="0">
               <a:buNone/>
             </a:pPr>
             <a:r>
@@ -15331,13 +14398,13 @@
       </p:sp>
       <p:sp>
         <p:nvSpPr>
-          <p:cNvPr id="10" name="Text 6"/>
+          <p:cNvPr id="12" name="Text 8"/>
           <p:cNvSpPr txBox="1"/>
           <p:nvPr/>
         </p:nvSpPr>
         <p:spPr>
           <a:xfrm>
-            <a:off x="5259012" y="2990088"/>
+            <a:off x="5259012" y="3776472"/>
             <a:ext cx="1508760" cy="640080"/>
           </a:xfrm>
           <a:prstGeom prst="rect">
@@ -15350,7 +14417,7 @@
           <a:bodyPr wrap="square" lIns="0" tIns="0" rIns="0" bIns="0" rtlCol="0" anchor="ctr"/>
           <a:lstStyle/>
           <a:p>
-            <a:pPr indent="0" marL="0">
+            <a:pPr marL="0" indent="0">
               <a:buNone/>
             </a:pPr>
             <a:r>
@@ -15359,7 +14426,7 @@
                   <a:schemeClr val="accent2"/>
                 </a:solidFill>
               </a:rPr>
-              <a:t>Tür</a:t>
+              <a:t>Tasarım</a:t>
             </a:r>
             <a:endParaRPr lang="en-US" sz="2200" dirty="0"/>
           </a:p>
@@ -15367,13 +14434,13 @@
       </p:sp>
       <p:sp>
         <p:nvSpPr>
-          <p:cNvPr id="11" name="Text 7"/>
+          <p:cNvPr id="13" name="Text 9"/>
           <p:cNvSpPr txBox="1"/>
           <p:nvPr/>
         </p:nvSpPr>
         <p:spPr>
           <a:xfrm>
-            <a:off x="6813492" y="2990088"/>
+            <a:off x="6813492" y="3776472"/>
             <a:ext cx="4826820" cy="640080"/>
           </a:xfrm>
           <a:prstGeom prst="rect">
@@ -15388,7 +14455,7 @@
           </a:bodyPr>
           <a:lstStyle/>
           <a:p>
-            <a:pPr indent="0" marL="0">
+            <a:pPr marL="0" indent="0">
               <a:buNone/>
             </a:pPr>
             <a:r>
@@ -15397,7 +14464,7 @@
                   <a:schemeClr val="accent1"/>
                 </a:solidFill>
               </a:rPr>
-              <a:t>Özgün araştırma makalesi</a:t>
+              <a:t>Retrospektif, kesitsel</a:t>
             </a:r>
             <a:endParaRPr lang="en-US" sz="2200" dirty="0"/>
           </a:p>
@@ -15405,13 +14472,13 @@
       </p:sp>
       <p:sp>
         <p:nvSpPr>
-          <p:cNvPr id="12" name="Text 8"/>
+          <p:cNvPr id="14" name="Text 10"/>
           <p:cNvSpPr txBox="1"/>
           <p:nvPr/>
         </p:nvSpPr>
         <p:spPr>
           <a:xfrm>
-            <a:off x="5259012" y="3776472"/>
+            <a:off x="5259012" y="4562856"/>
             <a:ext cx="1508760" cy="640080"/>
           </a:xfrm>
           <a:prstGeom prst="rect">
@@ -15424,7 +14491,7 @@
           <a:bodyPr wrap="square" lIns="0" tIns="0" rIns="0" bIns="0" rtlCol="0" anchor="ctr"/>
           <a:lstStyle/>
           <a:p>
-            <a:pPr indent="0" marL="0">
+            <a:pPr marL="0" indent="0">
               <a:buNone/>
             </a:pPr>
             <a:r>
@@ -15433,7 +14500,7 @@
                   <a:schemeClr val="accent2"/>
                 </a:solidFill>
               </a:rPr>
-              <a:t>Tasarım</a:t>
+              <a:t>Merkez</a:t>
             </a:r>
             <a:endParaRPr lang="en-US" sz="2200" dirty="0"/>
           </a:p>
@@ -15441,13 +14508,13 @@
       </p:sp>
       <p:sp>
         <p:nvSpPr>
-          <p:cNvPr id="13" name="Text 9"/>
+          <p:cNvPr id="15" name="Text 11"/>
           <p:cNvSpPr txBox="1"/>
           <p:nvPr/>
         </p:nvSpPr>
         <p:spPr>
           <a:xfrm>
-            <a:off x="6813492" y="3776472"/>
+            <a:off x="6813492" y="4562856"/>
             <a:ext cx="4826820" cy="640080"/>
           </a:xfrm>
           <a:prstGeom prst="rect">
@@ -15462,7 +14529,7 @@
           </a:bodyPr>
           <a:lstStyle/>
           <a:p>
-            <a:pPr indent="0" marL="0">
+            <a:pPr marL="0" indent="0">
               <a:buNone/>
             </a:pPr>
             <a:r>
@@ -15471,7 +14538,7 @@
                   <a:schemeClr val="accent1"/>
                 </a:solidFill>
               </a:rPr>
-              <a:t>Retrospektif, kesitsel</a:t>
+              <a:t>Samsun EAH Sigara Bırakma Polikliniği</a:t>
             </a:r>
             <a:endParaRPr lang="en-US" sz="2200" dirty="0"/>
           </a:p>
@@ -15479,13 +14546,13 @@
       </p:sp>
       <p:sp>
         <p:nvSpPr>
-          <p:cNvPr id="14" name="Text 10"/>
+          <p:cNvPr id="16" name="Text 12"/>
           <p:cNvSpPr txBox="1"/>
           <p:nvPr/>
         </p:nvSpPr>
         <p:spPr>
           <a:xfrm>
-            <a:off x="5259012" y="4562856"/>
+            <a:off x="5259012" y="5349240"/>
             <a:ext cx="1508760" cy="640080"/>
           </a:xfrm>
           <a:prstGeom prst="rect">
@@ -15498,7 +14565,7 @@
           <a:bodyPr wrap="square" lIns="0" tIns="0" rIns="0" bIns="0" rtlCol="0" anchor="ctr"/>
           <a:lstStyle/>
           <a:p>
-            <a:pPr indent="0" marL="0">
+            <a:pPr marL="0" indent="0">
               <a:buNone/>
             </a:pPr>
             <a:r>
@@ -15507,7 +14574,7 @@
                   <a:schemeClr val="accent2"/>
                 </a:solidFill>
               </a:rPr>
-              <a:t>Merkez</a:t>
+              <a:t>DOI</a:t>
             </a:r>
             <a:endParaRPr lang="en-US" sz="2200" dirty="0"/>
           </a:p>
@@ -15515,13 +14582,13 @@
       </p:sp>
       <p:sp>
         <p:nvSpPr>
-          <p:cNvPr id="15" name="Text 11"/>
+          <p:cNvPr id="17" name="Text 13"/>
           <p:cNvSpPr txBox="1"/>
           <p:nvPr/>
         </p:nvSpPr>
         <p:spPr>
           <a:xfrm>
-            <a:off x="6813492" y="4562856"/>
+            <a:off x="6813492" y="5349240"/>
             <a:ext cx="4826820" cy="640080"/>
           </a:xfrm>
           <a:prstGeom prst="rect">
@@ -15536,7 +14603,7 @@
           </a:bodyPr>
           <a:lstStyle/>
           <a:p>
-            <a:pPr indent="0" marL="0">
+            <a:pPr marL="0" indent="0">
               <a:buNone/>
             </a:pPr>
             <a:r>
@@ -15545,7 +14612,7 @@
                   <a:schemeClr val="accent1"/>
                 </a:solidFill>
               </a:rPr>
-              <a:t>Samsun EAH Sigara Bırakma Polikliniği</a:t>
+              <a:t>10.54308/TJFP.2026.912</a:t>
             </a:r>
             <a:endParaRPr lang="en-US" sz="2200" dirty="0"/>
           </a:p>
@@ -15553,14 +14620,14 @@
       </p:sp>
       <p:sp>
         <p:nvSpPr>
-          <p:cNvPr id="16" name="Text 12"/>
+          <p:cNvPr id="18" name="Kaynak"/>
           <p:cNvSpPr txBox="1"/>
           <p:nvPr/>
         </p:nvSpPr>
         <p:spPr>
           <a:xfrm>
-            <a:off x="5259012" y="5349240"/>
-            <a:ext cx="1508760" cy="640080"/>
+            <a:off x="548640" y="6382512"/>
+            <a:ext cx="10424160" cy="292608"/>
           </a:xfrm>
           <a:prstGeom prst="rect">
             <a:avLst/>
@@ -15572,81 +14639,7 @@
           <a:bodyPr wrap="square" lIns="0" tIns="0" rIns="0" bIns="0" rtlCol="0" anchor="ctr"/>
           <a:lstStyle/>
           <a:p>
-            <a:pPr indent="0" marL="0">
-              <a:buNone/>
-            </a:pPr>
-            <a:r>
-              <a:rPr lang="en-US" sz="2200" b="1" dirty="0">
-                <a:solidFill>
-                  <a:schemeClr val="accent2"/>
-                </a:solidFill>
-              </a:rPr>
-              <a:t>DOI</a:t>
-            </a:r>
-            <a:endParaRPr lang="en-US" sz="2200" dirty="0"/>
-          </a:p>
-        </p:txBody>
-      </p:sp>
-      <p:sp>
-        <p:nvSpPr>
-          <p:cNvPr id="17" name="Text 13"/>
-          <p:cNvSpPr txBox="1"/>
-          <p:nvPr/>
-        </p:nvSpPr>
-        <p:spPr>
-          <a:xfrm>
-            <a:off x="6813492" y="5349240"/>
-            <a:ext cx="4826820" cy="640080"/>
-          </a:xfrm>
-          <a:prstGeom prst="rect">
-            <a:avLst/>
-          </a:prstGeom>
-          <a:noFill/>
-          <a:ln/>
-        </p:spPr>
-        <p:txBody>
-          <a:bodyPr wrap="square" lIns="0" tIns="0" rIns="0" bIns="0" rtlCol="0" anchor="ctr">
-            <a:normAutofit/>
-          </a:bodyPr>
-          <a:lstStyle/>
-          <a:p>
-            <a:pPr indent="0" marL="0">
-              <a:buNone/>
-            </a:pPr>
-            <a:r>
-              <a:rPr lang="en-US" sz="2200" dirty="0">
-                <a:solidFill>
-                  <a:schemeClr val="accent1"/>
-                </a:solidFill>
-              </a:rPr>
-              <a:t>10.54308/TJFP.2026.912</a:t>
-            </a:r>
-            <a:endParaRPr lang="en-US" sz="2200" dirty="0"/>
-          </a:p>
-        </p:txBody>
-      </p:sp>
-      <p:sp>
-        <p:nvSpPr>
-          <p:cNvPr id="18" name="Kaynak"/>
-          <p:cNvSpPr txBox="1"/>
-          <p:nvPr/>
-        </p:nvSpPr>
-        <p:spPr>
-          <a:xfrm>
-            <a:off x="548640" y="6382512"/>
-            <a:ext cx="10424160" cy="292608"/>
-          </a:xfrm>
-          <a:prstGeom prst="rect">
-            <a:avLst/>
-          </a:prstGeom>
-          <a:noFill/>
-          <a:ln/>
-        </p:spPr>
-        <p:txBody>
-          <a:bodyPr wrap="square" lIns="0" tIns="0" rIns="0" bIns="0" rtlCol="0" anchor="ctr"/>
-          <a:lstStyle/>
-          <a:p>
-            <a:pPr indent="0" marL="0">
+            <a:pPr marL="0" indent="0">
               <a:buNone/>
             </a:pPr>
             <a:r>
@@ -15681,7 +14674,7 @@
           </a:prstGeom>
           <a:extLst>
             <a:ext uri="{C572A759-6A51-4108-AA02-DFA0A04FC94B}">
-              <ma14:wrappingTextBoxFlag xmlns:ma14="http://schemas.microsoft.com/office/mac/drawingml/2011/main" val="0"/>
+              <ma14:wrappingTextBoxFlag xmlns:ma14="http://schemas.microsoft.com/office/mac/drawingml/2011/main" xmlns="" val="0"/>
             </a:ext>
           </a:extLst>
         </p:spPr>
@@ -15699,8 +14692,8 @@
           <a:p>
             <a:pPr algn="r"/>
             <a:fld id="{F7021451-1387-4CA6-816F-3879F97B5CBC}" type="slidenum">
-              <a:rPr b="0" lang="en-US"/>
-              <a:t>4</a:t>
+              <a:rPr lang="en-US" b="0"/>
+              <a:t>3</a:t>
             </a:fld>
             <a:endParaRPr lang="en-US"/>
           </a:p>
@@ -15714,7 +14707,7 @@
 </p:sld>
 </file>
 
-<file path=ppt/slides/slide5.xml><?xml version="1.0" encoding="utf-8"?>
+<file path=ppt/slides/slide4.xml><?xml version="1.0" encoding="utf-8"?>
 <p:sld xmlns:a="http://schemas.openxmlformats.org/drawingml/2006/main" xmlns:r="http://schemas.openxmlformats.org/officeDocument/2006/relationships" xmlns:p="http://schemas.openxmlformats.org/presentationml/2006/main">
   <p:cSld name="Slide 5">
     <p:spTree>
@@ -15734,9 +14727,11 @@
       <p:sp>
         <p:nvSpPr>
           <p:cNvPr id="3" name="Text 0"/>
-          <p:cNvSpPr/>
+          <p:cNvSpPr>
+            <a:spLocks noGrp="1"/>
+          </p:cNvSpPr>
           <p:nvPr>
-            <p:ph idx="100" type="title" hasCustomPrompt="1"/>
+            <p:ph type="title" idx="100" hasCustomPrompt="1"/>
           </p:nvPr>
         </p:nvSpPr>
         <p:spPr>
@@ -15754,7 +14749,7 @@
           <a:bodyPr wrap="square" lIns="0" tIns="0" rIns="0" bIns="0" rtlCol="0" anchor="ctr"/>
           <a:lstStyle/>
           <a:p>
-            <a:pPr algn="l" indent="0" marL="0">
+            <a:pPr marL="0" indent="0" algn="l">
               <a:buNone/>
             </a:pPr>
             <a:r>
@@ -15823,14 +14818,14 @@
       </p:sp>
       <p:pic>
         <p:nvPicPr>
-          <p:cNvPr id="6" name="Ikon" descr="FaUserFriends">    </p:cNvPr>
+          <p:cNvPr id="6" name="Ikon" descr="FaUserFriends"/>
           <p:cNvPicPr>
             <a:picLocks noChangeAspect="1"/>
           </p:cNvPicPr>
           <p:nvPr/>
         </p:nvPicPr>
         <p:blipFill>
-          <a:blip r:embed="rId1"/>
+          <a:blip r:embed="rId3"/>
           <a:stretch>
             <a:fillRect/>
           </a:stretch>
@@ -15866,7 +14861,7 @@
           <a:bodyPr wrap="square" lIns="0" tIns="0" rIns="0" bIns="0" rtlCol="0" anchor="ctr"/>
           <a:lstStyle/>
           <a:p>
-            <a:pPr algn="ctr" indent="0" marL="0">
+            <a:pPr marL="0" indent="0" algn="ctr">
               <a:buNone/>
             </a:pPr>
             <a:r>
@@ -15902,7 +14897,7 @@
           <a:bodyPr wrap="square" lIns="0" tIns="0" rIns="0" bIns="0" rtlCol="0" anchor="t"/>
           <a:lstStyle/>
           <a:p>
-            <a:pPr algn="ctr" indent="0" marL="0">
+            <a:pPr marL="0" indent="0" algn="ctr">
               <a:buNone/>
             </a:pPr>
             <a:r>
@@ -15971,14 +14966,14 @@
       </p:sp>
       <p:pic>
         <p:nvPicPr>
-          <p:cNvPr id="11" name="Ikon" descr="FaUserFriends">    </p:cNvPr>
+          <p:cNvPr id="11" name="Ikon" descr="FaUserFriends"/>
           <p:cNvPicPr>
             <a:picLocks noChangeAspect="1"/>
           </p:cNvPicPr>
           <p:nvPr/>
         </p:nvPicPr>
         <p:blipFill>
-          <a:blip r:embed="rId2"/>
+          <a:blip r:embed="rId3"/>
           <a:stretch>
             <a:fillRect/>
           </a:stretch>
@@ -16014,7 +15009,7 @@
           <a:bodyPr wrap="square" lIns="0" tIns="0" rIns="0" bIns="0" rtlCol="0" anchor="ctr"/>
           <a:lstStyle/>
           <a:p>
-            <a:pPr algn="ctr" indent="0" marL="0">
+            <a:pPr marL="0" indent="0" algn="ctr">
               <a:buNone/>
             </a:pPr>
             <a:r>
@@ -16050,7 +15045,7 @@
           <a:bodyPr wrap="square" lIns="0" tIns="0" rIns="0" bIns="0" rtlCol="0" anchor="t"/>
           <a:lstStyle/>
           <a:p>
-            <a:pPr algn="ctr" indent="0" marL="0">
+            <a:pPr marL="0" indent="0" algn="ctr">
               <a:buNone/>
             </a:pPr>
             <a:r>
@@ -16119,14 +15114,14 @@
       </p:sp>
       <p:pic>
         <p:nvPicPr>
-          <p:cNvPr id="16" name="Ikon" descr="FaHospital">    </p:cNvPr>
+          <p:cNvPr id="16" name="Ikon" descr="FaHospital"/>
           <p:cNvPicPr>
             <a:picLocks noChangeAspect="1"/>
           </p:cNvPicPr>
           <p:nvPr/>
         </p:nvPicPr>
         <p:blipFill>
-          <a:blip r:embed="rId3"/>
+          <a:blip r:embed="rId4"/>
           <a:stretch>
             <a:fillRect/>
           </a:stretch>
@@ -16162,7 +15157,7 @@
           <a:bodyPr wrap="square" lIns="0" tIns="0" rIns="0" bIns="0" rtlCol="0" anchor="ctr"/>
           <a:lstStyle/>
           <a:p>
-            <a:pPr algn="ctr" indent="0" marL="0">
+            <a:pPr marL="0" indent="0" algn="ctr">
               <a:buNone/>
             </a:pPr>
             <a:r>
@@ -16198,7 +15193,7 @@
           <a:bodyPr wrap="square" lIns="0" tIns="0" rIns="0" bIns="0" rtlCol="0" anchor="t"/>
           <a:lstStyle/>
           <a:p>
-            <a:pPr algn="ctr" indent="0" marL="0">
+            <a:pPr marL="0" indent="0" algn="ctr">
               <a:buNone/>
             </a:pPr>
             <a:r>
@@ -16267,14 +15262,14 @@
       </p:sp>
       <p:pic>
         <p:nvPicPr>
-          <p:cNvPr id="21" name="Ikon" descr="FaSmokingBan">    </p:cNvPr>
+          <p:cNvPr id="21" name="Ikon" descr="FaSmokingBan"/>
           <p:cNvPicPr>
             <a:picLocks noChangeAspect="1"/>
           </p:cNvPicPr>
           <p:nvPr/>
         </p:nvPicPr>
         <p:blipFill>
-          <a:blip r:embed="rId4"/>
+          <a:blip r:embed="rId5"/>
           <a:stretch>
             <a:fillRect/>
           </a:stretch>
@@ -16310,7 +15305,7 @@
           <a:bodyPr wrap="square" lIns="0" tIns="0" rIns="0" bIns="0" rtlCol="0" anchor="ctr"/>
           <a:lstStyle/>
           <a:p>
-            <a:pPr algn="ctr" indent="0" marL="0">
+            <a:pPr marL="0" indent="0" algn="ctr">
               <a:buNone/>
             </a:pPr>
             <a:r>
@@ -16346,7 +15341,7 @@
           <a:bodyPr wrap="square" lIns="0" tIns="0" rIns="0" bIns="0" rtlCol="0" anchor="t"/>
           <a:lstStyle/>
           <a:p>
-            <a:pPr algn="ctr" indent="0" marL="0">
+            <a:pPr marL="0" indent="0" algn="ctr">
               <a:buNone/>
             </a:pPr>
             <a:r>
@@ -16382,7 +15377,7 @@
           <a:bodyPr wrap="square" lIns="0" tIns="0" rIns="0" bIns="0" rtlCol="0" anchor="ctr"/>
           <a:lstStyle/>
           <a:p>
-            <a:pPr indent="0" marL="0">
+            <a:pPr marL="0" indent="0">
               <a:buNone/>
             </a:pPr>
             <a:r>
@@ -16417,7 +15412,7 @@
           </a:prstGeom>
           <a:extLst>
             <a:ext uri="{C572A759-6A51-4108-AA02-DFA0A04FC94B}">
-              <ma14:wrappingTextBoxFlag xmlns:ma14="http://schemas.microsoft.com/office/mac/drawingml/2011/main" val="0"/>
+              <ma14:wrappingTextBoxFlag xmlns:ma14="http://schemas.microsoft.com/office/mac/drawingml/2011/main" xmlns="" val="0"/>
             </a:ext>
           </a:extLst>
         </p:spPr>
@@ -16435,8 +15430,8 @@
           <a:p>
             <a:pPr algn="r"/>
             <a:fld id="{F7021451-1387-4CA6-816F-3879F97B5CBC}" type="slidenum">
-              <a:rPr b="0" lang="en-US"/>
-              <a:t>5</a:t>
+              <a:rPr lang="en-US" b="0"/>
+              <a:t>4</a:t>
             </a:fld>
             <a:endParaRPr lang="en-US"/>
           </a:p>
@@ -16450,7 +15445,7 @@
 </p:sld>
 </file>
 
-<file path=ppt/slides/slide6.xml><?xml version="1.0" encoding="utf-8"?>
+<file path=ppt/slides/slide5.xml><?xml version="1.0" encoding="utf-8"?>
 <p:sld xmlns:a="http://schemas.openxmlformats.org/drawingml/2006/main" xmlns:r="http://schemas.openxmlformats.org/officeDocument/2006/relationships" xmlns:p="http://schemas.openxmlformats.org/presentationml/2006/main">
   <p:cSld name="Slide 6">
     <p:spTree>
@@ -16470,9 +15465,11 @@
       <p:sp>
         <p:nvSpPr>
           <p:cNvPr id="3" name="Text 0"/>
-          <p:cNvSpPr/>
+          <p:cNvSpPr>
+            <a:spLocks noGrp="1"/>
+          </p:cNvSpPr>
           <p:nvPr>
-            <p:ph idx="100" type="title" hasCustomPrompt="1"/>
+            <p:ph type="title" idx="100" hasCustomPrompt="1"/>
           </p:nvPr>
         </p:nvSpPr>
         <p:spPr>
@@ -16490,7 +15487,7 @@
           <a:bodyPr wrap="square" lIns="0" tIns="0" rIns="0" bIns="0" rtlCol="0" anchor="ctr"/>
           <a:lstStyle/>
           <a:p>
-            <a:pPr algn="l" indent="0" marL="0">
+            <a:pPr marL="0" indent="0" algn="l">
               <a:buNone/>
             </a:pPr>
             <a:r>
@@ -16531,6 +15528,10 @@
             <a:prstDash val="solid"/>
           </a:ln>
         </p:spPr>
+        <p:txBody>
+          <a:bodyPr/>
+          <a:p/>
+        </p:txBody>
       </p:sp>
       <p:sp>
         <p:nvSpPr>
@@ -16556,17 +15557,21 @@
             <a:prstDash val="solid"/>
           </a:ln>
         </p:spPr>
+        <p:txBody>
+          <a:bodyPr/>
+          <a:p/>
+        </p:txBody>
       </p:sp>
       <p:pic>
         <p:nvPicPr>
-          <p:cNvPr id="6" name="Ikon" descr="FaComments">    </p:cNvPr>
+          <p:cNvPr id="6" name="Ikon" descr="FaComments"/>
           <p:cNvPicPr>
             <a:picLocks noChangeAspect="1"/>
           </p:cNvPicPr>
           <p:nvPr/>
         </p:nvPicPr>
         <p:blipFill>
-          <a:blip r:embed="rId1"/>
+          <a:blip r:embed="rId3"/>
           <a:stretch>
             <a:fillRect/>
           </a:stretch>
@@ -16602,7 +15607,7 @@
           <a:bodyPr wrap="square" lIns="0" tIns="0" rIns="0" bIns="0" rtlCol="0" anchor="ctr"/>
           <a:lstStyle/>
           <a:p>
-            <a:pPr indent="0" marL="0">
+            <a:pPr marL="0" indent="0">
               <a:buNone/>
             </a:pPr>
             <a:r>
@@ -16638,7 +15643,7 @@
           <a:bodyPr wrap="square" lIns="0" tIns="0" rIns="0" bIns="0" rtlCol="0" anchor="t"/>
           <a:lstStyle/>
           <a:p>
-            <a:pPr algn="just" marL="279400" indent="-279400">
+            <a:pPr marL="279400" indent="-279400" algn="just">
               <a:spcAft>
                 <a:spcPts val="1000"/>
               </a:spcAft>
@@ -16646,17 +15651,17 @@
               <a:buChar char="•"/>
             </a:pPr>
             <a:r>
-              <a:rPr lang="en-US" sz="2200" dirty="0">
+              <a:rPr lang="en-US" sz="2000" dirty="0">
                 <a:solidFill>
                   <a:schemeClr val="accent1"/>
                 </a:solidFill>
               </a:rPr>
-              <a:t>Motivasyonel görüşme</a:t>
+              <a:t>Sağlık İnanç Modeli</a:t>
             </a:r>
             <a:endParaRPr lang="en-US" sz="2200" dirty="0"/>
           </a:p>
           <a:p>
-            <a:pPr algn="just" marL="279400" indent="-279400">
+            <a:pPr marL="279400" indent="-279400" algn="just">
               <a:spcAft>
                 <a:spcPts val="1000"/>
               </a:spcAft>
@@ -16664,17 +15669,17 @@
               <a:buChar char="•"/>
             </a:pPr>
             <a:r>
-              <a:rPr lang="en-US" sz="2200" dirty="0">
+              <a:rPr lang="en-US" sz="2000" dirty="0">
                 <a:solidFill>
                   <a:schemeClr val="accent1"/>
                 </a:solidFill>
               </a:rPr>
-              <a:t>Davranış değişikliği modelleri</a:t>
+              <a:t>Sağlık Kontrol Odağı</a:t>
             </a:r>
             <a:endParaRPr lang="en-US" sz="2200" dirty="0"/>
           </a:p>
           <a:p>
-            <a:pPr algn="just" marL="279400" indent="-279400">
+            <a:pPr marL="279400" indent="-279400" algn="just">
               <a:spcAft>
                 <a:spcPts val="1000"/>
               </a:spcAft>
@@ -16682,12 +15687,48 @@
               <a:buChar char="•"/>
             </a:pPr>
             <a:r>
-              <a:rPr lang="en-US" sz="2200" dirty="0">
+              <a:rPr lang="en-US" sz="2000" dirty="0">
                 <a:solidFill>
                   <a:schemeClr val="accent1"/>
                 </a:solidFill>
               </a:rPr>
-              <a:t>Transteorik model</a:t>
+              <a:t>Yeniliklerin Yayılımı Modeli</a:t>
+            </a:r>
+            <a:endParaRPr lang="en-US" sz="2200" dirty="0"/>
+          </a:p>
+          <a:p>
+            <a:pPr marL="279400" indent="-279400" algn="just">
+              <a:spcAft>
+                <a:spcPts val="1000"/>
+              </a:spcAft>
+              <a:buSzPct val="100000"/>
+              <a:buChar char="•"/>
+            </a:pPr>
+            <a:r>
+              <a:rPr lang="en-US" sz="2000" dirty="0">
+                <a:solidFill>
+                  <a:schemeClr val="accent1"/>
+                </a:solidFill>
+              </a:rPr>
+              <a:t>Pender'in Sağlığı Geliştirme Modeli</a:t>
+            </a:r>
+            <a:endParaRPr lang="en-US" sz="2200" dirty="0"/>
+          </a:p>
+          <a:p>
+            <a:pPr marL="279400" indent="-279400" algn="just">
+              <a:spcAft>
+                <a:spcPts val="1000"/>
+              </a:spcAft>
+              <a:buSzPct val="100000"/>
+              <a:buChar char="•"/>
+            </a:pPr>
+            <a:r>
+              <a:rPr lang="en-US" sz="2000" dirty="0">
+                <a:solidFill>
+                  <a:schemeClr val="accent1"/>
+                </a:solidFill>
+              </a:rPr>
+              <a:t>Transteorik Model</a:t>
             </a:r>
             <a:endParaRPr lang="en-US" sz="2200" dirty="0"/>
           </a:p>
@@ -16719,6 +15760,10 @@
             <a:prstDash val="solid"/>
           </a:ln>
         </p:spPr>
+        <p:txBody>
+          <a:bodyPr/>
+          <a:p/>
+        </p:txBody>
       </p:sp>
       <p:sp>
         <p:nvSpPr>
@@ -16744,17 +15789,21 @@
             <a:prstDash val="solid"/>
           </a:ln>
         </p:spPr>
+        <p:txBody>
+          <a:bodyPr/>
+          <a:p/>
+        </p:txBody>
       </p:sp>
       <p:pic>
         <p:nvPicPr>
-          <p:cNvPr id="11" name="Ikon" descr="FaPills">    </p:cNvPr>
+          <p:cNvPr id="11" name="Ikon" descr="FaPills"/>
           <p:cNvPicPr>
             <a:picLocks noChangeAspect="1"/>
           </p:cNvPicPr>
           <p:nvPr/>
         </p:nvPicPr>
         <p:blipFill>
-          <a:blip r:embed="rId2"/>
+          <a:blip r:embed="rId4"/>
           <a:stretch>
             <a:fillRect/>
           </a:stretch>
@@ -16790,7 +15839,7 @@
           <a:bodyPr wrap="square" lIns="0" tIns="0" rIns="0" bIns="0" rtlCol="0" anchor="ctr"/>
           <a:lstStyle/>
           <a:p>
-            <a:pPr indent="0" marL="0">
+            <a:pPr marL="0" indent="0">
               <a:buNone/>
             </a:pPr>
             <a:r>
@@ -16826,7 +15875,7 @@
           <a:bodyPr wrap="square" lIns="0" tIns="0" rIns="0" bIns="0" rtlCol="0" anchor="t"/>
           <a:lstStyle/>
           <a:p>
-            <a:pPr algn="just" marL="279400" indent="-279400">
+            <a:pPr marL="279400" indent="-279400" algn="just">
               <a:spcAft>
                 <a:spcPts val="1000"/>
               </a:spcAft>
@@ -16834,7 +15883,7 @@
               <a:buChar char="•"/>
             </a:pPr>
             <a:r>
-              <a:rPr lang="en-US" sz="2200" dirty="0">
+              <a:rPr lang="en-US" sz="2000" dirty="0">
                 <a:solidFill>
                   <a:schemeClr val="accent1"/>
                 </a:solidFill>
@@ -16844,7 +15893,7 @@
             <a:endParaRPr lang="en-US" sz="2200" dirty="0"/>
           </a:p>
           <a:p>
-            <a:pPr algn="just" marL="279400" indent="-279400">
+            <a:pPr marL="279400" indent="-279400" algn="just">
               <a:spcAft>
                 <a:spcPts val="1000"/>
               </a:spcAft>
@@ -16852,7 +15901,7 @@
               <a:buChar char="•"/>
             </a:pPr>
             <a:r>
-              <a:rPr lang="en-US" sz="2200" dirty="0">
+              <a:rPr lang="en-US" sz="2000" dirty="0">
                 <a:solidFill>
                   <a:schemeClr val="accent1"/>
                 </a:solidFill>
@@ -16862,7 +15911,7 @@
             <a:endParaRPr lang="en-US" sz="2200" dirty="0"/>
           </a:p>
           <a:p>
-            <a:pPr algn="just" marL="279400" indent="-279400">
+            <a:pPr marL="279400" indent="-279400" algn="just">
               <a:spcAft>
                 <a:spcPts val="1000"/>
               </a:spcAft>
@@ -16870,7 +15919,7 @@
               <a:buChar char="•"/>
             </a:pPr>
             <a:r>
-              <a:rPr lang="en-US" sz="2200" dirty="0">
+              <a:rPr lang="en-US" sz="2000" dirty="0">
                 <a:solidFill>
                   <a:schemeClr val="accent1"/>
                 </a:solidFill>
@@ -16880,7 +15929,7 @@
             <a:endParaRPr lang="en-US" sz="2200" dirty="0"/>
           </a:p>
           <a:p>
-            <a:pPr algn="just" marL="279400" indent="-279400">
+            <a:pPr marL="279400" indent="-279400" algn="just">
               <a:spcAft>
                 <a:spcPts val="1000"/>
               </a:spcAft>
@@ -16888,12 +15937,12 @@
               <a:buChar char="•"/>
             </a:pPr>
             <a:r>
-              <a:rPr lang="en-US" sz="2200" dirty="0">
+              <a:rPr lang="en-US" sz="2000" dirty="0" err="1">
                 <a:solidFill>
                   <a:schemeClr val="accent1"/>
                 </a:solidFill>
               </a:rPr>
-              <a:t>Sitizin (yeni seçenek)</a:t>
+              <a:t>Sitizin</a:t>
             </a:r>
             <a:endParaRPr lang="en-US" sz="2200" dirty="0"/>
           </a:p>
@@ -16920,7 +15969,7 @@
           <a:bodyPr wrap="square" lIns="0" tIns="0" rIns="0" bIns="0" rtlCol="0" anchor="ctr"/>
           <a:lstStyle/>
           <a:p>
-            <a:pPr indent="0" marL="0">
+            <a:pPr marL="0" indent="0">
               <a:buNone/>
             </a:pPr>
             <a:r>
@@ -16956,7 +16005,7 @@
           <a:bodyPr wrap="square" lIns="0" tIns="0" rIns="0" bIns="0" rtlCol="0" anchor="ctr"/>
           <a:lstStyle/>
           <a:p>
-            <a:pPr indent="0" marL="0">
+            <a:pPr marL="0" indent="0">
               <a:buNone/>
             </a:pPr>
             <a:r>
@@ -16991,7 +16040,7 @@
           </a:prstGeom>
           <a:extLst>
             <a:ext uri="{C572A759-6A51-4108-AA02-DFA0A04FC94B}">
-              <ma14:wrappingTextBoxFlag xmlns:ma14="http://schemas.microsoft.com/office/mac/drawingml/2011/main" val="0"/>
+              <ma14:wrappingTextBoxFlag xmlns:ma14="http://schemas.microsoft.com/office/mac/drawingml/2011/main" xmlns="" val="0"/>
             </a:ext>
           </a:extLst>
         </p:spPr>
@@ -17009,8 +16058,8 @@
           <a:p>
             <a:pPr algn="r"/>
             <a:fld id="{F7021451-1387-4CA6-816F-3879F97B5CBC}" type="slidenum">
-              <a:rPr b="0" lang="en-US"/>
-              <a:t>6</a:t>
+              <a:rPr lang="en-US" b="0"/>
+              <a:t>5</a:t>
             </a:fld>
             <a:endParaRPr lang="en-US"/>
           </a:p>
@@ -17024,7 +16073,7 @@
 </p:sld>
 </file>
 
-<file path=ppt/slides/slide7.xml><?xml version="1.0" encoding="utf-8"?>
+<file path=ppt/slides/slide6.xml><?xml version="1.0" encoding="utf-8"?>
 <p:sld xmlns:a="http://schemas.openxmlformats.org/drawingml/2006/main" xmlns:r="http://schemas.openxmlformats.org/officeDocument/2006/relationships" xmlns:p="http://schemas.openxmlformats.org/presentationml/2006/main">
   <p:cSld name="Slide 7">
     <p:spTree>
@@ -17044,9 +16093,11 @@
       <p:sp>
         <p:nvSpPr>
           <p:cNvPr id="3" name="Text 0"/>
-          <p:cNvSpPr/>
+          <p:cNvSpPr>
+            <a:spLocks noGrp="1"/>
+          </p:cNvSpPr>
           <p:nvPr>
-            <p:ph idx="100" type="title" hasCustomPrompt="1"/>
+            <p:ph type="title" idx="100" hasCustomPrompt="1"/>
           </p:nvPr>
         </p:nvSpPr>
         <p:spPr>
@@ -17064,7 +16115,7 @@
           <a:bodyPr wrap="square" lIns="0" tIns="0" rIns="0" bIns="0" rtlCol="0" anchor="ctr"/>
           <a:lstStyle/>
           <a:p>
-            <a:pPr algn="l" indent="0" marL="0">
+            <a:pPr marL="0" indent="0" algn="l">
               <a:buNone/>
             </a:pPr>
             <a:r>
@@ -17133,14 +16184,14 @@
       </p:sp>
       <p:pic>
         <p:nvPicPr>
-          <p:cNvPr id="6" name="Ikon" descr="FaBullseye">    </p:cNvPr>
+          <p:cNvPr id="6" name="Ikon" descr="FaBullseye"/>
           <p:cNvPicPr>
             <a:picLocks noChangeAspect="1"/>
           </p:cNvPicPr>
           <p:nvPr/>
         </p:nvPicPr>
         <p:blipFill>
-          <a:blip r:embed="rId1"/>
+          <a:blip r:embed="rId3"/>
           <a:stretch>
             <a:fillRect/>
           </a:stretch>
@@ -17176,7 +16227,7 @@
           <a:bodyPr wrap="square" lIns="0" tIns="0" rIns="0" bIns="0" rtlCol="0" anchor="ctr"/>
           <a:lstStyle/>
           <a:p>
-            <a:pPr algn="just" marL="279400" indent="-279400">
+            <a:pPr marL="279400" indent="-279400" algn="just">
               <a:spcAft>
                 <a:spcPts val="1800"/>
               </a:spcAft>
@@ -17194,7 +16245,7 @@
             <a:endParaRPr lang="en-US" sz="2800" dirty="0"/>
           </a:p>
           <a:p>
-            <a:pPr algn="just" marL="279400" indent="-279400">
+            <a:pPr marL="279400" indent="-279400" algn="just">
               <a:spcAft>
                 <a:spcPts val="1800"/>
               </a:spcAft>
@@ -17234,7 +16285,7 @@
           <a:bodyPr wrap="square" lIns="0" tIns="0" rIns="0" bIns="0" rtlCol="0" anchor="ctr"/>
           <a:lstStyle/>
           <a:p>
-            <a:pPr indent="0" marL="0">
+            <a:pPr marL="0" indent="0">
               <a:buNone/>
             </a:pPr>
             <a:r>
@@ -17269,7 +16320,7 @@
           </a:prstGeom>
           <a:extLst>
             <a:ext uri="{C572A759-6A51-4108-AA02-DFA0A04FC94B}">
-              <ma14:wrappingTextBoxFlag xmlns:ma14="http://schemas.microsoft.com/office/mac/drawingml/2011/main" val="0"/>
+              <ma14:wrappingTextBoxFlag xmlns:ma14="http://schemas.microsoft.com/office/mac/drawingml/2011/main" xmlns="" val="0"/>
             </a:ext>
           </a:extLst>
         </p:spPr>
@@ -17287,8 +16338,8 @@
           <a:p>
             <a:pPr algn="r"/>
             <a:fld id="{F7021451-1387-4CA6-816F-3879F97B5CBC}" type="slidenum">
-              <a:rPr b="0" lang="en-US"/>
-              <a:t>7</a:t>
+              <a:rPr lang="en-US" b="0"/>
+              <a:t>6</a:t>
             </a:fld>
             <a:endParaRPr lang="en-US"/>
           </a:p>
@@ -17302,7 +16353,7 @@
 </p:sld>
 </file>
 
-<file path=ppt/slides/slide8.xml><?xml version="1.0" encoding="utf-8"?>
+<file path=ppt/slides/slide7.xml><?xml version="1.0" encoding="utf-8"?>
 <p:sld xmlns:a="http://schemas.openxmlformats.org/drawingml/2006/main" xmlns:r="http://schemas.openxmlformats.org/officeDocument/2006/relationships" xmlns:p="http://schemas.openxmlformats.org/presentationml/2006/main">
   <p:cSld name="Slide 8">
     <p:spTree>
@@ -17322,9 +16373,11 @@
       <p:sp>
         <p:nvSpPr>
           <p:cNvPr id="3" name="Text 0"/>
-          <p:cNvSpPr/>
+          <p:cNvSpPr>
+            <a:spLocks noGrp="1"/>
+          </p:cNvSpPr>
           <p:nvPr>
-            <p:ph idx="100" type="title" hasCustomPrompt="1"/>
+            <p:ph type="title" idx="100" hasCustomPrompt="1"/>
           </p:nvPr>
         </p:nvSpPr>
         <p:spPr>
@@ -17342,7 +16395,7 @@
           <a:bodyPr wrap="square" lIns="0" tIns="0" rIns="0" bIns="0" rtlCol="0" anchor="ctr"/>
           <a:lstStyle/>
           <a:p>
-            <a:pPr algn="l" indent="0" marL="0">
+            <a:pPr marL="0" indent="0" algn="l">
               <a:buNone/>
             </a:pPr>
             <a:r>
@@ -17405,7 +16458,7 @@
           <a:bodyPr wrap="square" lIns="50800" tIns="50800" rIns="50800" bIns="50800" rtlCol="0" anchor="ctr"/>
           <a:lstStyle/>
           <a:p>
-            <a:pPr algn="ctr" indent="0" marL="0">
+            <a:pPr marL="0" indent="0" algn="ctr">
               <a:buNone/>
             </a:pPr>
             <a:r>
@@ -17419,7 +16472,7 @@
             <a:endParaRPr lang="en-US" sz="3600" dirty="0"/>
           </a:p>
           <a:p>
-            <a:pPr algn="ctr" indent="0" marL="0">
+            <a:pPr marL="0" indent="0" algn="ctr">
               <a:buNone/>
             </a:pPr>
             <a:r>
@@ -17436,14 +16489,14 @@
       </p:sp>
       <p:pic>
         <p:nvPicPr>
-          <p:cNvPr id="6" name="Image 0" descr="ok">    </p:cNvPr>
+          <p:cNvPr id="6" name="Image 0" descr="ok"/>
           <p:cNvPicPr>
             <a:picLocks noChangeAspect="1"/>
           </p:cNvPicPr>
           <p:nvPr/>
         </p:nvPicPr>
         <p:blipFill>
-          <a:blip r:embed="rId1"/>
+          <a:blip r:embed="rId3"/>
           <a:stretch>
             <a:fillRect/>
           </a:stretch>
@@ -17506,7 +16559,7 @@
           <a:bodyPr wrap="square" lIns="50800" tIns="50800" rIns="50800" bIns="50800" rtlCol="0" anchor="ctr"/>
           <a:lstStyle/>
           <a:p>
-            <a:pPr algn="ctr" indent="0" marL="0">
+            <a:pPr marL="0" indent="0" algn="ctr">
               <a:buNone/>
             </a:pPr>
             <a:r>
@@ -17520,7 +16573,7 @@
             <a:endParaRPr lang="en-US" sz="3600" dirty="0"/>
           </a:p>
           <a:p>
-            <a:pPr algn="ctr" indent="0" marL="0">
+            <a:pPr marL="0" indent="0" algn="ctr">
               <a:buNone/>
             </a:pPr>
             <a:r>
@@ -17562,14 +16615,14 @@
       </p:sp>
       <p:pic>
         <p:nvPicPr>
-          <p:cNvPr id="10" name="Ikon" descr="FaCalendarAlt">    </p:cNvPr>
+          <p:cNvPr id="10" name="Ikon" descr="FaCalendarAlt"/>
           <p:cNvPicPr>
             <a:picLocks noChangeAspect="1"/>
           </p:cNvPicPr>
           <p:nvPr/>
         </p:nvPicPr>
         <p:blipFill>
-          <a:blip r:embed="rId2"/>
+          <a:blip r:embed="rId4"/>
           <a:stretch>
             <a:fillRect/>
           </a:stretch>
@@ -17605,7 +16658,7 @@
           <a:bodyPr wrap="square" lIns="0" tIns="0" rIns="0" bIns="0" rtlCol="0" anchor="ctr"/>
           <a:lstStyle/>
           <a:p>
-            <a:pPr indent="0" marL="0">
+            <a:pPr marL="0" indent="0">
               <a:buNone/>
             </a:pPr>
             <a:r>
@@ -17647,14 +16700,14 @@
       </p:sp>
       <p:pic>
         <p:nvPicPr>
-          <p:cNvPr id="13" name="Ikon" descr="FaFileMedical">    </p:cNvPr>
+          <p:cNvPr id="13" name="Ikon" descr="FaFileMedical"/>
           <p:cNvPicPr>
             <a:picLocks noChangeAspect="1"/>
           </p:cNvPicPr>
           <p:nvPr/>
         </p:nvPicPr>
         <p:blipFill>
-          <a:blip r:embed="rId3"/>
+          <a:blip r:embed="rId5"/>
           <a:stretch>
             <a:fillRect/>
           </a:stretch>
@@ -17690,7 +16743,7 @@
           <a:bodyPr wrap="square" lIns="0" tIns="0" rIns="0" bIns="0" rtlCol="0" anchor="ctr"/>
           <a:lstStyle/>
           <a:p>
-            <a:pPr indent="0" marL="0">
+            <a:pPr marL="0" indent="0">
               <a:buNone/>
             </a:pPr>
             <a:r>
@@ -17732,14 +16785,14 @@
       </p:sp>
       <p:pic>
         <p:nvPicPr>
-          <p:cNvPr id="16" name="Ikon" descr="FaClipboardList">    </p:cNvPr>
+          <p:cNvPr id="16" name="Ikon" descr="FaClipboardList"/>
           <p:cNvPicPr>
             <a:picLocks noChangeAspect="1"/>
           </p:cNvPicPr>
           <p:nvPr/>
         </p:nvPicPr>
         <p:blipFill>
-          <a:blip r:embed="rId4"/>
+          <a:blip r:embed="rId6"/>
           <a:stretch>
             <a:fillRect/>
           </a:stretch>
@@ -17775,7 +16828,7 @@
           <a:bodyPr wrap="square" lIns="0" tIns="0" rIns="0" bIns="0" rtlCol="0" anchor="ctr"/>
           <a:lstStyle/>
           <a:p>
-            <a:pPr indent="0" marL="0">
+            <a:pPr marL="0" indent="0">
               <a:buNone/>
             </a:pPr>
             <a:r>
@@ -17817,14 +16870,14 @@
       </p:sp>
       <p:pic>
         <p:nvPicPr>
-          <p:cNvPr id="19" name="Ikon" descr="FaCheck">    </p:cNvPr>
+          <p:cNvPr id="19" name="Ikon" descr="FaCheck"/>
           <p:cNvPicPr>
             <a:picLocks noChangeAspect="1"/>
           </p:cNvPicPr>
           <p:nvPr/>
         </p:nvPicPr>
         <p:blipFill>
-          <a:blip r:embed="rId5"/>
+          <a:blip r:embed="rId7"/>
           <a:stretch>
             <a:fillRect/>
           </a:stretch>
@@ -17860,7 +16913,7 @@
           <a:bodyPr wrap="square" lIns="0" tIns="0" rIns="0" bIns="0" rtlCol="0" anchor="ctr"/>
           <a:lstStyle/>
           <a:p>
-            <a:pPr indent="0" marL="0">
+            <a:pPr marL="0" indent="0">
               <a:buNone/>
             </a:pPr>
             <a:r>
@@ -17896,7 +16949,7 @@
           <a:bodyPr wrap="square" lIns="0" tIns="0" rIns="0" bIns="0" rtlCol="0" anchor="ctr"/>
           <a:lstStyle/>
           <a:p>
-            <a:pPr indent="0" marL="0">
+            <a:pPr marL="0" indent="0">
               <a:buNone/>
             </a:pPr>
             <a:r>
@@ -17932,7 +16985,7 @@
           <a:bodyPr wrap="square" lIns="0" tIns="0" rIns="0" bIns="0" rtlCol="0" anchor="ctr"/>
           <a:lstStyle/>
           <a:p>
-            <a:pPr indent="0" marL="0">
+            <a:pPr marL="0" indent="0">
               <a:buNone/>
             </a:pPr>
             <a:r>
@@ -17967,7 +17020,7 @@
           </a:prstGeom>
           <a:extLst>
             <a:ext uri="{C572A759-6A51-4108-AA02-DFA0A04FC94B}">
-              <ma14:wrappingTextBoxFlag xmlns:ma14="http://schemas.microsoft.com/office/mac/drawingml/2011/main" val="0"/>
+              <ma14:wrappingTextBoxFlag xmlns:ma14="http://schemas.microsoft.com/office/mac/drawingml/2011/main" xmlns="" val="0"/>
             </a:ext>
           </a:extLst>
         </p:spPr>
@@ -17985,8 +17038,8 @@
           <a:p>
             <a:pPr algn="r"/>
             <a:fld id="{F7021451-1387-4CA6-816F-3879F97B5CBC}" type="slidenum">
-              <a:rPr b="0" lang="en-US"/>
-              <a:t>8</a:t>
+              <a:rPr lang="en-US" b="0"/>
+              <a:t>7</a:t>
             </a:fld>
             <a:endParaRPr lang="en-US"/>
           </a:p>
@@ -18000,7 +17053,7 @@
 </p:sld>
 </file>
 
-<file path=ppt/slides/slide9.xml><?xml version="1.0" encoding="utf-8"?>
+<file path=ppt/slides/slide8.xml><?xml version="1.0" encoding="utf-8"?>
 <p:sld xmlns:a="http://schemas.openxmlformats.org/drawingml/2006/main" xmlns:r="http://schemas.openxmlformats.org/officeDocument/2006/relationships" xmlns:p="http://schemas.openxmlformats.org/presentationml/2006/main">
   <p:cSld name="Slide 9">
     <p:spTree>
@@ -18020,9 +17073,11 @@
       <p:sp>
         <p:nvSpPr>
           <p:cNvPr id="3" name="Text 0"/>
-          <p:cNvSpPr/>
+          <p:cNvSpPr>
+            <a:spLocks noGrp="1"/>
+          </p:cNvSpPr>
           <p:nvPr>
-            <p:ph idx="100" type="title" hasCustomPrompt="1"/>
+            <p:ph type="title" idx="100" hasCustomPrompt="1"/>
           </p:nvPr>
         </p:nvSpPr>
         <p:spPr>
@@ -18040,7 +17095,7 @@
           <a:bodyPr wrap="square" lIns="0" tIns="0" rIns="0" bIns="0" rtlCol="0" anchor="ctr"/>
           <a:lstStyle/>
           <a:p>
-            <a:pPr algn="l" indent="0" marL="0">
+            <a:pPr marL="0" indent="0" algn="l">
               <a:buNone/>
             </a:pPr>
             <a:r>
@@ -18076,7 +17131,7 @@
           <a:bodyPr wrap="square" lIns="0" tIns="0" rIns="0" bIns="0" rtlCol="0" anchor="ctr"/>
           <a:lstStyle/>
           <a:p>
-            <a:pPr indent="0" marL="0">
+            <a:pPr marL="0" indent="0">
               <a:buNone/>
             </a:pPr>
             <a:r>
@@ -18139,7 +17194,7 @@
           <a:bodyPr wrap="square" lIns="0" tIns="0" rIns="0" bIns="0" rtlCol="0" anchor="ctr"/>
           <a:lstStyle/>
           <a:p>
-            <a:pPr algn="ctr" indent="0" marL="0">
+            <a:pPr marL="0" indent="0" algn="ctr">
               <a:buNone/>
             </a:pPr>
             <a:r>
@@ -18202,7 +17257,7 @@
           <a:bodyPr wrap="square" lIns="0" tIns="0" rIns="0" bIns="0" rtlCol="0" anchor="ctr"/>
           <a:lstStyle/>
           <a:p>
-            <a:pPr algn="ctr" indent="0" marL="0">
+            <a:pPr marL="0" indent="0" algn="ctr">
               <a:buNone/>
             </a:pPr>
             <a:r>
@@ -18265,7 +17320,7 @@
           <a:bodyPr wrap="square" lIns="0" tIns="0" rIns="0" bIns="0" rtlCol="0" anchor="ctr"/>
           <a:lstStyle/>
           <a:p>
-            <a:pPr algn="ctr" indent="0" marL="0">
+            <a:pPr marL="0" indent="0" algn="ctr">
               <a:buNone/>
             </a:pPr>
             <a:r>
@@ -18328,7 +17383,7 @@
           <a:bodyPr wrap="square" lIns="0" tIns="0" rIns="0" bIns="0" rtlCol="0" anchor="ctr"/>
           <a:lstStyle/>
           <a:p>
-            <a:pPr algn="ctr" indent="0" marL="0">
+            <a:pPr marL="0" indent="0" algn="ctr">
               <a:buNone/>
             </a:pPr>
             <a:r>
@@ -18391,7 +17446,7 @@
           <a:bodyPr wrap="square" lIns="0" tIns="0" rIns="0" bIns="0" rtlCol="0" anchor="ctr"/>
           <a:lstStyle/>
           <a:p>
-            <a:pPr algn="ctr" indent="0" marL="0">
+            <a:pPr marL="0" indent="0" algn="ctr">
               <a:buNone/>
             </a:pPr>
             <a:r>
@@ -18454,7 +17509,7 @@
           <a:bodyPr wrap="square" lIns="0" tIns="0" rIns="0" bIns="0" rtlCol="0" anchor="ctr"/>
           <a:lstStyle/>
           <a:p>
-            <a:pPr algn="ctr" indent="0" marL="0">
+            <a:pPr marL="0" indent="0" algn="ctr">
               <a:buNone/>
             </a:pPr>
             <a:r>
@@ -18490,7 +17545,7 @@
           <a:bodyPr wrap="square" lIns="0" tIns="0" rIns="0" bIns="0" rtlCol="0" anchor="ctr"/>
           <a:lstStyle/>
           <a:p>
-            <a:pPr indent="0" marL="0">
+            <a:pPr marL="0" indent="0">
               <a:buNone/>
             </a:pPr>
             <a:r>
@@ -18551,7 +17606,7 @@
           <a:bodyPr wrap="square" lIns="0" tIns="0" rIns="0" bIns="0" rtlCol="0" anchor="ctr"/>
           <a:lstStyle/>
           <a:p>
-            <a:pPr algn="ctr" indent="0" marL="0">
+            <a:pPr marL="0" indent="0" algn="ctr">
               <a:buNone/>
             </a:pPr>
             <a:r>
@@ -18565,7 +17620,7 @@
             <a:endParaRPr lang="en-US" sz="2400" dirty="0"/>
           </a:p>
           <a:p>
-            <a:pPr algn="ctr" indent="0" marL="0">
+            <a:pPr marL="0" indent="0" algn="ctr">
               <a:buNone/>
             </a:pPr>
             <a:r>
@@ -18626,7 +17681,7 @@
           <a:bodyPr wrap="square" lIns="0" tIns="0" rIns="0" bIns="0" rtlCol="0" anchor="ctr"/>
           <a:lstStyle/>
           <a:p>
-            <a:pPr algn="ctr" indent="0" marL="0">
+            <a:pPr marL="0" indent="0" algn="ctr">
               <a:buNone/>
             </a:pPr>
             <a:r>
@@ -18640,7 +17695,7 @@
             <a:endParaRPr lang="en-US" sz="2400" dirty="0"/>
           </a:p>
           <a:p>
-            <a:pPr algn="ctr" indent="0" marL="0">
+            <a:pPr marL="0" indent="0" algn="ctr">
               <a:buNone/>
             </a:pPr>
             <a:r>
@@ -18701,7 +17756,7 @@
           <a:bodyPr wrap="square" lIns="0" tIns="0" rIns="0" bIns="0" rtlCol="0" anchor="ctr"/>
           <a:lstStyle/>
           <a:p>
-            <a:pPr algn="ctr" indent="0" marL="0">
+            <a:pPr marL="0" indent="0" algn="ctr">
               <a:buNone/>
             </a:pPr>
             <a:r>
@@ -18715,7 +17770,7 @@
             <a:endParaRPr lang="en-US" sz="2400" dirty="0"/>
           </a:p>
           <a:p>
-            <a:pPr algn="ctr" indent="0" marL="0">
+            <a:pPr marL="0" indent="0" algn="ctr">
               <a:buNone/>
             </a:pPr>
             <a:r>
@@ -18751,7 +17806,7 @@
           <a:bodyPr wrap="square" lIns="0" tIns="0" rIns="0" bIns="0" rtlCol="0" anchor="ctr"/>
           <a:lstStyle/>
           <a:p>
-            <a:pPr indent="0" marL="0">
+            <a:pPr marL="0" indent="0">
               <a:buNone/>
             </a:pPr>
             <a:r>
@@ -18787,7 +17842,7 @@
           <a:bodyPr wrap="square" lIns="0" tIns="0" rIns="0" bIns="0" rtlCol="0" anchor="ctr"/>
           <a:lstStyle/>
           <a:p>
-            <a:pPr indent="0" marL="0">
+            <a:pPr marL="0" indent="0">
               <a:buNone/>
             </a:pPr>
             <a:r>
@@ -18797,6 +17852,654 @@
                 </a:solidFill>
               </a:rPr>
               <a:t>Kaynak: 1, 6, 7</a:t>
+            </a:r>
+            <a:endParaRPr lang="en-US" sz="1200" dirty="0"/>
+          </a:p>
+        </p:txBody>
+      </p:sp>
+      <p:sp>
+        <p:nvSpPr>
+          <p:cNvPr id="2" name="Slide Number Placeholder 0"/>
+          <p:cNvSpPr>
+            <a:spLocks noGrp="1"/>
+          </p:cNvSpPr>
+          <p:nvPr>
+            <p:ph type="sldNum" sz="quarter" idx="4294967295"/>
+          </p:nvPr>
+        </p:nvSpPr>
+        <p:spPr>
+          <a:xfrm>
+            <a:off x="11201400" y="6382512"/>
+            <a:ext cx="548640" cy="292608"/>
+          </a:xfrm>
+          <a:prstGeom prst="rect">
+            <a:avLst/>
+          </a:prstGeom>
+          <a:extLst>
+            <a:ext uri="{C572A759-6A51-4108-AA02-DFA0A04FC94B}">
+              <ma14:wrappingTextBoxFlag xmlns:ma14="http://schemas.microsoft.com/office/mac/drawingml/2011/main" xmlns="" val="0"/>
+            </a:ext>
+          </a:extLst>
+        </p:spPr>
+        <p:txBody>
+          <a:bodyPr/>
+          <a:lstStyle>
+            <a:lvl1pPr>
+              <a:defRPr sz="1400">
+                <a:solidFill>
+                  <a:srgbClr val="7A8C94"/>
+                </a:solidFill>
+              </a:defRPr>
+            </a:lvl1pPr>
+          </a:lstStyle>
+          <a:p>
+            <a:pPr algn="r"/>
+            <a:fld id="{F7021451-1387-4CA6-816F-3879F97B5CBC}" type="slidenum">
+              <a:rPr lang="en-US" b="0"/>
+              <a:t>8</a:t>
+            </a:fld>
+            <a:endParaRPr lang="en-US"/>
+          </a:p>
+        </p:txBody>
+      </p:sp>
+    </p:spTree>
+  </p:cSld>
+  <p:clrMapOvr>
+    <a:masterClrMapping/>
+  </p:clrMapOvr>
+</p:sld>
+</file>
+
+<file path=ppt/slides/slide9.xml><?xml version="1.0" encoding="utf-8"?>
+<p:sld xmlns:a="http://schemas.openxmlformats.org/drawingml/2006/main" xmlns:r="http://schemas.openxmlformats.org/officeDocument/2006/relationships" xmlns:p="http://schemas.openxmlformats.org/presentationml/2006/main">
+  <p:cSld name="Slide 10">
+    <p:spTree>
+      <p:nvGrpSpPr>
+        <p:cNvPr id="1" name=""/>
+        <p:cNvGrpSpPr/>
+        <p:nvPr/>
+      </p:nvGrpSpPr>
+      <p:grpSpPr>
+        <a:xfrm>
+          <a:off x="0" y="0"/>
+          <a:ext cx="0" cy="0"/>
+          <a:chOff x="0" y="0"/>
+          <a:chExt cx="0" cy="0"/>
+        </a:xfrm>
+      </p:grpSpPr>
+      <p:sp>
+        <p:nvSpPr>
+          <p:cNvPr id="3" name="Text 0"/>
+          <p:cNvSpPr>
+            <a:spLocks noGrp="1"/>
+          </p:cNvSpPr>
+          <p:nvPr>
+            <p:ph type="title" idx="100" hasCustomPrompt="1"/>
+          </p:nvPr>
+        </p:nvSpPr>
+        <p:spPr>
+          <a:xfrm>
+            <a:off x="548640" y="320040"/>
+            <a:ext cx="10607040" cy="868680"/>
+          </a:xfrm>
+          <a:prstGeom prst="rect">
+            <a:avLst/>
+          </a:prstGeom>
+          <a:noFill/>
+          <a:ln/>
+        </p:spPr>
+        <p:txBody>
+          <a:bodyPr wrap="square" lIns="0" tIns="0" rIns="0" bIns="0" rtlCol="0" anchor="ctr"/>
+          <a:lstStyle/>
+          <a:p>
+            <a:pPr marL="0" indent="0" algn="l">
+              <a:buNone/>
+            </a:pPr>
+            <a:r>
+              <a:rPr lang="en-US" sz="3600" b="1" dirty="0">
+                <a:solidFill>
+                  <a:schemeClr val="accent1"/>
+                </a:solidFill>
+              </a:rPr>
+              <a:t>Tedavi yaklaşımı</a:t>
+            </a:r>
+            <a:endParaRPr lang="en-US" sz="3600" dirty="0"/>
+          </a:p>
+        </p:txBody>
+      </p:sp>
+      <p:sp>
+        <p:nvSpPr>
+          <p:cNvPr id="4" name="Kart"/>
+          <p:cNvSpPr/>
+          <p:nvPr/>
+        </p:nvSpPr>
+        <p:spPr>
+          <a:xfrm>
+            <a:off x="548640" y="1417320"/>
+            <a:ext cx="3566160" cy="3063240"/>
+          </a:xfrm>
+          <a:prstGeom prst="roundRect">
+            <a:avLst>
+              <a:gd name="adj" fmla="val 3582"/>
+            </a:avLst>
+          </a:prstGeom>
+          <a:solidFill>
+            <a:schemeClr val="bg2"/>
+          </a:solidFill>
+          <a:ln w="12700">
+            <a:solidFill>
+              <a:schemeClr val="bg2"/>
+            </a:solidFill>
+            <a:prstDash val="solid"/>
+          </a:ln>
+        </p:spPr>
+      </p:sp>
+      <p:sp>
+        <p:nvSpPr>
+          <p:cNvPr id="5" name="Ikon zemini"/>
+          <p:cNvSpPr/>
+          <p:nvPr/>
+        </p:nvSpPr>
+        <p:spPr>
+          <a:xfrm>
+            <a:off x="1783080" y="1645920"/>
+            <a:ext cx="1097280" cy="1097280"/>
+          </a:xfrm>
+          <a:prstGeom prst="ellipse">
+            <a:avLst/>
+          </a:prstGeom>
+          <a:solidFill>
+            <a:schemeClr val="accent3"/>
+          </a:solidFill>
+          <a:ln w="12700">
+            <a:solidFill>
+              <a:schemeClr val="accent3"/>
+            </a:solidFill>
+            <a:prstDash val="solid"/>
+          </a:ln>
+        </p:spPr>
+      </p:sp>
+      <p:pic>
+        <p:nvPicPr>
+          <p:cNvPr id="6" name="Ikon" descr="FaComments"/>
+          <p:cNvPicPr>
+            <a:picLocks noChangeAspect="1"/>
+          </p:cNvPicPr>
+          <p:nvPr/>
+        </p:nvPicPr>
+        <p:blipFill>
+          <a:blip r:embed="rId3"/>
+          <a:stretch>
+            <a:fillRect/>
+          </a:stretch>
+        </p:blipFill>
+        <p:spPr>
+          <a:xfrm>
+            <a:off x="2068373" y="1931213"/>
+            <a:ext cx="526694" cy="526694"/>
+          </a:xfrm>
+          <a:prstGeom prst="rect">
+            <a:avLst/>
+          </a:prstGeom>
+        </p:spPr>
+      </p:pic>
+      <p:sp>
+        <p:nvSpPr>
+          <p:cNvPr id="7" name="Text 3"/>
+          <p:cNvSpPr txBox="1"/>
+          <p:nvPr/>
+        </p:nvSpPr>
+        <p:spPr>
+          <a:xfrm>
+            <a:off x="731520" y="2834640"/>
+            <a:ext cx="3200400" cy="548640"/>
+          </a:xfrm>
+          <a:prstGeom prst="rect">
+            <a:avLst/>
+          </a:prstGeom>
+          <a:noFill/>
+          <a:ln/>
+        </p:spPr>
+        <p:txBody>
+          <a:bodyPr wrap="square" lIns="0" tIns="0" rIns="0" bIns="0" rtlCol="0" anchor="ctr"/>
+          <a:lstStyle/>
+          <a:p>
+            <a:pPr marL="0" indent="0" algn="ctr">
+              <a:buNone/>
+            </a:pPr>
+            <a:r>
+              <a:rPr lang="en-US" sz="2800" b="1" dirty="0">
+                <a:solidFill>
+                  <a:schemeClr val="accent3"/>
+                </a:solidFill>
+              </a:rPr>
+              <a:t>Davranışsal</a:t>
+            </a:r>
+            <a:endParaRPr lang="en-US" sz="2800" dirty="0"/>
+          </a:p>
+        </p:txBody>
+      </p:sp>
+      <p:sp>
+        <p:nvSpPr>
+          <p:cNvPr id="8" name="Text 4"/>
+          <p:cNvSpPr txBox="1"/>
+          <p:nvPr/>
+        </p:nvSpPr>
+        <p:spPr>
+          <a:xfrm>
+            <a:off x="822960" y="3383280"/>
+            <a:ext cx="3017520" cy="1005840"/>
+          </a:xfrm>
+          <a:prstGeom prst="rect">
+            <a:avLst/>
+          </a:prstGeom>
+          <a:noFill/>
+          <a:ln/>
+        </p:spPr>
+        <p:txBody>
+          <a:bodyPr wrap="square" lIns="0" tIns="0" rIns="0" bIns="0" rtlCol="0" anchor="t"/>
+          <a:lstStyle/>
+          <a:p>
+            <a:pPr marL="0" indent="0" algn="ctr">
+              <a:buNone/>
+            </a:pPr>
+            <a:r>
+              <a:rPr lang="en-US" sz="2000" dirty="0">
+                <a:solidFill>
+                  <a:schemeClr val="accent1"/>
+                </a:solidFill>
+              </a:rPr>
+              <a:t>Yalnızca danışmanlık</a:t>
+            </a:r>
+            <a:endParaRPr lang="en-US" sz="2000" dirty="0"/>
+          </a:p>
+        </p:txBody>
+      </p:sp>
+      <p:sp>
+        <p:nvSpPr>
+          <p:cNvPr id="9" name="Kart"/>
+          <p:cNvSpPr/>
+          <p:nvPr/>
+        </p:nvSpPr>
+        <p:spPr>
+          <a:xfrm>
+            <a:off x="4297680" y="1417320"/>
+            <a:ext cx="3566160" cy="3063240"/>
+          </a:xfrm>
+          <a:prstGeom prst="roundRect">
+            <a:avLst>
+              <a:gd name="adj" fmla="val 3582"/>
+            </a:avLst>
+          </a:prstGeom>
+          <a:solidFill>
+            <a:schemeClr val="bg2"/>
+          </a:solidFill>
+          <a:ln w="12700">
+            <a:solidFill>
+              <a:schemeClr val="bg2"/>
+            </a:solidFill>
+            <a:prstDash val="solid"/>
+          </a:ln>
+        </p:spPr>
+      </p:sp>
+      <p:sp>
+        <p:nvSpPr>
+          <p:cNvPr id="10" name="Ikon zemini"/>
+          <p:cNvSpPr/>
+          <p:nvPr/>
+        </p:nvSpPr>
+        <p:spPr>
+          <a:xfrm>
+            <a:off x="5532120" y="1645920"/>
+            <a:ext cx="1097280" cy="1097280"/>
+          </a:xfrm>
+          <a:prstGeom prst="ellipse">
+            <a:avLst/>
+          </a:prstGeom>
+          <a:solidFill>
+            <a:schemeClr val="accent2"/>
+          </a:solidFill>
+          <a:ln w="12700">
+            <a:solidFill>
+              <a:schemeClr val="accent2"/>
+            </a:solidFill>
+            <a:prstDash val="solid"/>
+          </a:ln>
+        </p:spPr>
+      </p:sp>
+      <p:pic>
+        <p:nvPicPr>
+          <p:cNvPr id="11" name="Ikon" descr="FaPills"/>
+          <p:cNvPicPr>
+            <a:picLocks noChangeAspect="1"/>
+          </p:cNvPicPr>
+          <p:nvPr/>
+        </p:nvPicPr>
+        <p:blipFill>
+          <a:blip r:embed="rId4"/>
+          <a:stretch>
+            <a:fillRect/>
+          </a:stretch>
+        </p:blipFill>
+        <p:spPr>
+          <a:xfrm>
+            <a:off x="5817413" y="1931213"/>
+            <a:ext cx="526694" cy="526694"/>
+          </a:xfrm>
+          <a:prstGeom prst="rect">
+            <a:avLst/>
+          </a:prstGeom>
+        </p:spPr>
+      </p:pic>
+      <p:sp>
+        <p:nvSpPr>
+          <p:cNvPr id="12" name="Text 7"/>
+          <p:cNvSpPr txBox="1"/>
+          <p:nvPr/>
+        </p:nvSpPr>
+        <p:spPr>
+          <a:xfrm>
+            <a:off x="4480560" y="2834640"/>
+            <a:ext cx="3200400" cy="548640"/>
+          </a:xfrm>
+          <a:prstGeom prst="rect">
+            <a:avLst/>
+          </a:prstGeom>
+          <a:noFill/>
+          <a:ln/>
+        </p:spPr>
+        <p:txBody>
+          <a:bodyPr wrap="square" lIns="0" tIns="0" rIns="0" bIns="0" rtlCol="0" anchor="ctr"/>
+          <a:lstStyle/>
+          <a:p>
+            <a:pPr marL="0" indent="0" algn="ctr">
+              <a:buNone/>
+            </a:pPr>
+            <a:r>
+              <a:rPr lang="en-US" sz="2800" b="1" dirty="0">
+                <a:solidFill>
+                  <a:schemeClr val="accent2"/>
+                </a:solidFill>
+              </a:rPr>
+              <a:t>Monoterapi</a:t>
+            </a:r>
+            <a:endParaRPr lang="en-US" sz="2800" dirty="0"/>
+          </a:p>
+        </p:txBody>
+      </p:sp>
+      <p:sp>
+        <p:nvSpPr>
+          <p:cNvPr id="13" name="Text 8"/>
+          <p:cNvSpPr txBox="1"/>
+          <p:nvPr/>
+        </p:nvSpPr>
+        <p:spPr>
+          <a:xfrm>
+            <a:off x="4572000" y="3383280"/>
+            <a:ext cx="3017520" cy="1005840"/>
+          </a:xfrm>
+          <a:prstGeom prst="rect">
+            <a:avLst/>
+          </a:prstGeom>
+          <a:noFill/>
+          <a:ln/>
+        </p:spPr>
+        <p:txBody>
+          <a:bodyPr wrap="square" lIns="0" tIns="0" rIns="0" bIns="0" rtlCol="0" anchor="t"/>
+          <a:lstStyle/>
+          <a:p>
+            <a:pPr marL="0" indent="0" algn="ctr">
+              <a:buNone/>
+            </a:pPr>
+            <a:r>
+              <a:rPr lang="en-US" sz="2000" dirty="0">
+                <a:solidFill>
+                  <a:schemeClr val="accent1"/>
+                </a:solidFill>
+              </a:rPr>
+              <a:t>Vareniklin, bupropion, sitizin veya NRT</a:t>
+            </a:r>
+            <a:endParaRPr lang="en-US" sz="2000" dirty="0"/>
+          </a:p>
+        </p:txBody>
+      </p:sp>
+      <p:sp>
+        <p:nvSpPr>
+          <p:cNvPr id="14" name="Kart"/>
+          <p:cNvSpPr/>
+          <p:nvPr/>
+        </p:nvSpPr>
+        <p:spPr>
+          <a:xfrm>
+            <a:off x="8046720" y="1417320"/>
+            <a:ext cx="3566160" cy="3063240"/>
+          </a:xfrm>
+          <a:prstGeom prst="roundRect">
+            <a:avLst>
+              <a:gd name="adj" fmla="val 3582"/>
+            </a:avLst>
+          </a:prstGeom>
+          <a:solidFill>
+            <a:schemeClr val="bg2"/>
+          </a:solidFill>
+          <a:ln w="12700">
+            <a:solidFill>
+              <a:schemeClr val="bg2"/>
+            </a:solidFill>
+            <a:prstDash val="solid"/>
+          </a:ln>
+        </p:spPr>
+      </p:sp>
+      <p:sp>
+        <p:nvSpPr>
+          <p:cNvPr id="15" name="Ikon zemini"/>
+          <p:cNvSpPr/>
+          <p:nvPr/>
+        </p:nvSpPr>
+        <p:spPr>
+          <a:xfrm>
+            <a:off x="9281160" y="1645920"/>
+            <a:ext cx="1097280" cy="1097280"/>
+          </a:xfrm>
+          <a:prstGeom prst="ellipse">
+            <a:avLst/>
+          </a:prstGeom>
+          <a:solidFill>
+            <a:schemeClr val="accent1"/>
+          </a:solidFill>
+          <a:ln w="12700">
+            <a:solidFill>
+              <a:schemeClr val="accent1"/>
+            </a:solidFill>
+            <a:prstDash val="solid"/>
+          </a:ln>
+        </p:spPr>
+      </p:sp>
+      <p:pic>
+        <p:nvPicPr>
+          <p:cNvPr id="16" name="Ikon" descr="FaExchangeAlt"/>
+          <p:cNvPicPr>
+            <a:picLocks noChangeAspect="1"/>
+          </p:cNvPicPr>
+          <p:nvPr/>
+        </p:nvPicPr>
+        <p:blipFill>
+          <a:blip r:embed="rId5"/>
+          <a:stretch>
+            <a:fillRect/>
+          </a:stretch>
+        </p:blipFill>
+        <p:spPr>
+          <a:xfrm>
+            <a:off x="9566453" y="1931213"/>
+            <a:ext cx="526694" cy="526694"/>
+          </a:xfrm>
+          <a:prstGeom prst="rect">
+            <a:avLst/>
+          </a:prstGeom>
+        </p:spPr>
+      </p:pic>
+      <p:sp>
+        <p:nvSpPr>
+          <p:cNvPr id="17" name="Text 11"/>
+          <p:cNvSpPr txBox="1"/>
+          <p:nvPr/>
+        </p:nvSpPr>
+        <p:spPr>
+          <a:xfrm>
+            <a:off x="8229600" y="2834640"/>
+            <a:ext cx="3200400" cy="548640"/>
+          </a:xfrm>
+          <a:prstGeom prst="rect">
+            <a:avLst/>
+          </a:prstGeom>
+          <a:noFill/>
+          <a:ln/>
+        </p:spPr>
+        <p:txBody>
+          <a:bodyPr wrap="square" lIns="0" tIns="0" rIns="0" bIns="0" rtlCol="0" anchor="ctr"/>
+          <a:lstStyle/>
+          <a:p>
+            <a:pPr marL="0" indent="0" algn="ctr">
+              <a:buNone/>
+            </a:pPr>
+            <a:r>
+              <a:rPr lang="en-US" sz="2800" b="1" dirty="0">
+                <a:solidFill>
+                  <a:schemeClr val="accent1"/>
+                </a:solidFill>
+              </a:rPr>
+              <a:t>Kombine</a:t>
+            </a:r>
+            <a:endParaRPr lang="en-US" sz="2800" dirty="0"/>
+          </a:p>
+        </p:txBody>
+      </p:sp>
+      <p:sp>
+        <p:nvSpPr>
+          <p:cNvPr id="18" name="Text 12"/>
+          <p:cNvSpPr txBox="1"/>
+          <p:nvPr/>
+        </p:nvSpPr>
+        <p:spPr>
+          <a:xfrm>
+            <a:off x="8321040" y="3383280"/>
+            <a:ext cx="3017520" cy="1005840"/>
+          </a:xfrm>
+          <a:prstGeom prst="rect">
+            <a:avLst/>
+          </a:prstGeom>
+          <a:noFill/>
+          <a:ln/>
+        </p:spPr>
+        <p:txBody>
+          <a:bodyPr wrap="square" lIns="0" tIns="0" rIns="0" bIns="0" rtlCol="0" anchor="t"/>
+          <a:lstStyle/>
+          <a:p>
+            <a:pPr marL="0" indent="0" algn="ctr">
+              <a:buNone/>
+            </a:pPr>
+            <a:r>
+              <a:rPr lang="en-US" sz="2000" dirty="0">
+                <a:solidFill>
+                  <a:schemeClr val="accent1"/>
+                </a:solidFill>
+              </a:rPr>
+              <a:t>Bupropion, vareniklin veya sitizin + NRT; üçlü</a:t>
+            </a:r>
+            <a:endParaRPr lang="en-US" sz="2000" dirty="0"/>
+          </a:p>
+        </p:txBody>
+      </p:sp>
+      <p:sp>
+        <p:nvSpPr>
+          <p:cNvPr id="19" name="Text 13"/>
+          <p:cNvSpPr txBox="1"/>
+          <p:nvPr/>
+        </p:nvSpPr>
+        <p:spPr>
+          <a:xfrm>
+            <a:off x="548640" y="4709160"/>
+            <a:ext cx="11064240" cy="1234440"/>
+          </a:xfrm>
+          <a:prstGeom prst="rect">
+            <a:avLst/>
+          </a:prstGeom>
+          <a:noFill/>
+          <a:ln/>
+        </p:spPr>
+        <p:txBody>
+          <a:bodyPr wrap="square" lIns="0" tIns="0" rIns="0" bIns="0" rtlCol="0" anchor="ctr"/>
+          <a:lstStyle/>
+          <a:p>
+            <a:pPr marL="279400" indent="-279400" algn="just">
+              <a:spcAft>
+                <a:spcPts val="1000"/>
+              </a:spcAft>
+              <a:buSzPct val="100000"/>
+              <a:buChar char="•"/>
+            </a:pPr>
+            <a:r>
+              <a:rPr lang="en-US" sz="2200" dirty="0">
+                <a:solidFill>
+                  <a:schemeClr val="accent1"/>
+                </a:solidFill>
+              </a:rPr>
+              <a:t>Bireyselleştirme: FNBT, komorbidite, kontrendikasyon, uyum</a:t>
+            </a:r>
+            <a:endParaRPr lang="en-US" sz="2200" dirty="0"/>
+          </a:p>
+          <a:p>
+            <a:pPr marL="279400" indent="-279400" algn="just">
+              <a:spcAft>
+                <a:spcPts val="1000"/>
+              </a:spcAft>
+              <a:buSzPct val="100000"/>
+              <a:buChar char="•"/>
+            </a:pPr>
+            <a:r>
+              <a:rPr lang="en-US" sz="2200" dirty="0">
+                <a:solidFill>
+                  <a:schemeClr val="accent1"/>
+                </a:solidFill>
+              </a:rPr>
+              <a:t>NRT ve sitizin dönemsel olarak ücretsiz sağlanmıştır</a:t>
+            </a:r>
+            <a:endParaRPr lang="en-US" sz="2200" dirty="0"/>
+          </a:p>
+        </p:txBody>
+      </p:sp>
+      <p:sp>
+        <p:nvSpPr>
+          <p:cNvPr id="20" name="Kaynak"/>
+          <p:cNvSpPr txBox="1"/>
+          <p:nvPr/>
+        </p:nvSpPr>
+        <p:spPr>
+          <a:xfrm>
+            <a:off x="548640" y="6382512"/>
+            <a:ext cx="10424160" cy="292608"/>
+          </a:xfrm>
+          <a:prstGeom prst="rect">
+            <a:avLst/>
+          </a:prstGeom>
+          <a:noFill/>
+          <a:ln/>
+        </p:spPr>
+        <p:txBody>
+          <a:bodyPr wrap="square" lIns="0" tIns="0" rIns="0" bIns="0" rtlCol="0" anchor="ctr"/>
+          <a:lstStyle/>
+          <a:p>
+            <a:pPr marL="0" indent="0">
+              <a:buNone/>
+            </a:pPr>
+            <a:r>
+              <a:rPr lang="en-US" sz="1200" i="1" dirty="0">
+                <a:solidFill>
+                  <a:schemeClr val="accent3"/>
+                </a:solidFill>
+              </a:rPr>
+              <a:t>Kaynak: Cenberlitaş E, Gökçe A, Öztürk O. Turk J Fam Pract. 2026;30(2):97-106.</a:t>
             </a:r>
             <a:endParaRPr lang="en-US" sz="1200" dirty="0"/>
           </a:p>
@@ -18822,7 +18525,7 @@
           </a:prstGeom>
           <a:extLst>
             <a:ext uri="{C572A759-6A51-4108-AA02-DFA0A04FC94B}">
-              <ma14:wrappingTextBoxFlag xmlns:ma14="http://schemas.microsoft.com/office/mac/drawingml/2011/main" val="0"/>
+              <ma14:wrappingTextBoxFlag xmlns:ma14="http://schemas.microsoft.com/office/mac/drawingml/2011/main" xmlns="" val="0"/>
             </a:ext>
           </a:extLst>
         </p:spPr>
@@ -18840,7 +18543,7 @@
           <a:p>
             <a:pPr algn="r"/>
             <a:fld id="{F7021451-1387-4CA6-816F-3879F97B5CBC}" type="slidenum">
-              <a:rPr b="0" lang="en-US"/>
+              <a:rPr lang="en-US" b="0"/>
               <a:t>9</a:t>
             </a:fld>
             <a:endParaRPr lang="en-US"/>
@@ -19148,4 +18851,299 @@
     </a:ext>
   </a:extLst>
 </a:theme>
+</file>
+
+<file path=ppt/theme/theme2.xml><?xml version="1.0" encoding="utf-8"?>
+<a:theme xmlns:a="http://schemas.openxmlformats.org/drawingml/2006/main" name="Office Teması">
+  <a:themeElements>
+    <a:clrScheme name="Office">
+      <a:dk1>
+        <a:sysClr val="windowText" lastClr="000000"/>
+      </a:dk1>
+      <a:lt1>
+        <a:sysClr val="window" lastClr="FFFFFF"/>
+      </a:lt1>
+      <a:dk2>
+        <a:srgbClr val="44546A"/>
+      </a:dk2>
+      <a:lt2>
+        <a:srgbClr val="E7E6E6"/>
+      </a:lt2>
+      <a:accent1>
+        <a:srgbClr val="4472C4"/>
+      </a:accent1>
+      <a:accent2>
+        <a:srgbClr val="ED7D31"/>
+      </a:accent2>
+      <a:accent3>
+        <a:srgbClr val="A5A5A5"/>
+      </a:accent3>
+      <a:accent4>
+        <a:srgbClr val="FFC000"/>
+      </a:accent4>
+      <a:accent5>
+        <a:srgbClr val="5B9BD5"/>
+      </a:accent5>
+      <a:accent6>
+        <a:srgbClr val="70AD47"/>
+      </a:accent6>
+      <a:hlink>
+        <a:srgbClr val="0563C1"/>
+      </a:hlink>
+      <a:folHlink>
+        <a:srgbClr val="954F72"/>
+      </a:folHlink>
+    </a:clrScheme>
+    <a:fontScheme name="Office">
+      <a:majorFont>
+        <a:latin typeface="Calibri Light" panose="020F0302020204030204"/>
+        <a:ea typeface=""/>
+        <a:cs typeface=""/>
+        <a:font script="Jpan" typeface="游ゴシック Light"/>
+        <a:font script="Hang" typeface="맑은 고딕"/>
+        <a:font script="Hans" typeface="等线 Light"/>
+        <a:font script="Hant" typeface="新細明體"/>
+        <a:font script="Arab" typeface="Times New Roman"/>
+        <a:font script="Hebr" typeface="Times New Roman"/>
+        <a:font script="Thai" typeface="Angsana New"/>
+        <a:font script="Ethi" typeface="Nyala"/>
+        <a:font script="Beng" typeface="Vrinda"/>
+        <a:font script="Gujr" typeface="Shruti"/>
+        <a:font script="Khmr" typeface="MoolBoran"/>
+        <a:font script="Knda" typeface="Tunga"/>
+        <a:font script="Guru" typeface="Raavi"/>
+        <a:font script="Cans" typeface="Euphemia"/>
+        <a:font script="Cher" typeface="Plantagenet Cherokee"/>
+        <a:font script="Yiii" typeface="Microsoft Yi Baiti"/>
+        <a:font script="Tibt" typeface="Microsoft Himalaya"/>
+        <a:font script="Thaa" typeface="MV Boli"/>
+        <a:font script="Deva" typeface="Mangal"/>
+        <a:font script="Telu" typeface="Gautami"/>
+        <a:font script="Taml" typeface="Latha"/>
+        <a:font script="Syrc" typeface="Estrangelo Edessa"/>
+        <a:font script="Orya" typeface="Kalinga"/>
+        <a:font script="Mlym" typeface="Kartika"/>
+        <a:font script="Laoo" typeface="DokChampa"/>
+        <a:font script="Sinh" typeface="Iskoola Pota"/>
+        <a:font script="Mong" typeface="Mongolian Baiti"/>
+        <a:font script="Viet" typeface="Times New Roman"/>
+        <a:font script="Uigh" typeface="Microsoft Uighur"/>
+        <a:font script="Geor" typeface="Sylfaen"/>
+        <a:font script="Armn" typeface="Arial"/>
+        <a:font script="Bugi" typeface="Leelawadee UI"/>
+        <a:font script="Bopo" typeface="Microsoft JhengHei"/>
+        <a:font script="Java" typeface="Javanese Text"/>
+        <a:font script="Lisu" typeface="Segoe UI"/>
+        <a:font script="Mymr" typeface="Myanmar Text"/>
+        <a:font script="Nkoo" typeface="Ebrima"/>
+        <a:font script="Olck" typeface="Nirmala UI"/>
+        <a:font script="Osma" typeface="Ebrima"/>
+        <a:font script="Phag" typeface="Phagspa"/>
+        <a:font script="Syrn" typeface="Estrangelo Edessa"/>
+        <a:font script="Syrj" typeface="Estrangelo Edessa"/>
+        <a:font script="Syre" typeface="Estrangelo Edessa"/>
+        <a:font script="Sora" typeface="Nirmala UI"/>
+        <a:font script="Tale" typeface="Microsoft Tai Le"/>
+        <a:font script="Talu" typeface="Microsoft New Tai Lue"/>
+        <a:font script="Tfng" typeface="Ebrima"/>
+      </a:majorFont>
+      <a:minorFont>
+        <a:latin typeface="Calibri" panose="020F0502020204030204"/>
+        <a:ea typeface=""/>
+        <a:cs typeface=""/>
+        <a:font script="Jpan" typeface="游ゴシック"/>
+        <a:font script="Hang" typeface="맑은 고딕"/>
+        <a:font script="Hans" typeface="等线"/>
+        <a:font script="Hant" typeface="新細明體"/>
+        <a:font script="Arab" typeface="Arial"/>
+        <a:font script="Hebr" typeface="Arial"/>
+        <a:font script="Thai" typeface="Cordia New"/>
+        <a:font script="Ethi" typeface="Nyala"/>
+        <a:font script="Beng" typeface="Vrinda"/>
+        <a:font script="Gujr" typeface="Shruti"/>
+        <a:font script="Khmr" typeface="DaunPenh"/>
+        <a:font script="Knda" typeface="Tunga"/>
+        <a:font script="Guru" typeface="Raavi"/>
+        <a:font script="Cans" typeface="Euphemia"/>
+        <a:font script="Cher" typeface="Plantagenet Cherokee"/>
+        <a:font script="Yiii" typeface="Microsoft Yi Baiti"/>
+        <a:font script="Tibt" typeface="Microsoft Himalaya"/>
+        <a:font script="Thaa" typeface="MV Boli"/>
+        <a:font script="Deva" typeface="Mangal"/>
+        <a:font script="Telu" typeface="Gautami"/>
+        <a:font script="Taml" typeface="Latha"/>
+        <a:font script="Syrc" typeface="Estrangelo Edessa"/>
+        <a:font script="Orya" typeface="Kalinga"/>
+        <a:font script="Mlym" typeface="Kartika"/>
+        <a:font script="Laoo" typeface="DokChampa"/>
+        <a:font script="Sinh" typeface="Iskoola Pota"/>
+        <a:font script="Mong" typeface="Mongolian Baiti"/>
+        <a:font script="Viet" typeface="Arial"/>
+        <a:font script="Uigh" typeface="Microsoft Uighur"/>
+        <a:font script="Geor" typeface="Sylfaen"/>
+        <a:font script="Armn" typeface="Arial"/>
+        <a:font script="Bugi" typeface="Leelawadee UI"/>
+        <a:font script="Bopo" typeface="Microsoft JhengHei"/>
+        <a:font script="Java" typeface="Javanese Text"/>
+        <a:font script="Lisu" typeface="Segoe UI"/>
+        <a:font script="Mymr" typeface="Myanmar Text"/>
+        <a:font script="Nkoo" typeface="Ebrima"/>
+        <a:font script="Olck" typeface="Nirmala UI"/>
+        <a:font script="Osma" typeface="Ebrima"/>
+        <a:font script="Phag" typeface="Phagspa"/>
+        <a:font script="Syrn" typeface="Estrangelo Edessa"/>
+        <a:font script="Syrj" typeface="Estrangelo Edessa"/>
+        <a:font script="Syre" typeface="Estrangelo Edessa"/>
+        <a:font script="Sora" typeface="Nirmala UI"/>
+        <a:font script="Tale" typeface="Microsoft Tai Le"/>
+        <a:font script="Talu" typeface="Microsoft New Tai Lue"/>
+        <a:font script="Tfng" typeface="Ebrima"/>
+      </a:minorFont>
+    </a:fontScheme>
+    <a:fmtScheme name="Office">
+      <a:fillStyleLst>
+        <a:solidFill>
+          <a:schemeClr val="phClr"/>
+        </a:solidFill>
+        <a:gradFill rotWithShape="1">
+          <a:gsLst>
+            <a:gs pos="0">
+              <a:schemeClr val="phClr">
+                <a:lumMod val="110000"/>
+                <a:satMod val="105000"/>
+                <a:tint val="67000"/>
+              </a:schemeClr>
+            </a:gs>
+            <a:gs pos="50000">
+              <a:schemeClr val="phClr">
+                <a:lumMod val="105000"/>
+                <a:satMod val="103000"/>
+                <a:tint val="73000"/>
+              </a:schemeClr>
+            </a:gs>
+            <a:gs pos="100000">
+              <a:schemeClr val="phClr">
+                <a:lumMod val="105000"/>
+                <a:satMod val="109000"/>
+                <a:tint val="81000"/>
+              </a:schemeClr>
+            </a:gs>
+          </a:gsLst>
+          <a:lin ang="5400000" scaled="0"/>
+        </a:gradFill>
+        <a:gradFill rotWithShape="1">
+          <a:gsLst>
+            <a:gs pos="0">
+              <a:schemeClr val="phClr">
+                <a:satMod val="103000"/>
+                <a:lumMod val="102000"/>
+                <a:tint val="94000"/>
+              </a:schemeClr>
+            </a:gs>
+            <a:gs pos="50000">
+              <a:schemeClr val="phClr">
+                <a:satMod val="110000"/>
+                <a:lumMod val="100000"/>
+                <a:shade val="100000"/>
+              </a:schemeClr>
+            </a:gs>
+            <a:gs pos="100000">
+              <a:schemeClr val="phClr">
+                <a:lumMod val="99000"/>
+                <a:satMod val="120000"/>
+                <a:shade val="78000"/>
+              </a:schemeClr>
+            </a:gs>
+          </a:gsLst>
+          <a:lin ang="5400000" scaled="0"/>
+        </a:gradFill>
+      </a:fillStyleLst>
+      <a:lnStyleLst>
+        <a:ln w="6350" cap="flat" cmpd="sng" algn="ctr">
+          <a:solidFill>
+            <a:schemeClr val="phClr"/>
+          </a:solidFill>
+          <a:prstDash val="solid"/>
+          <a:miter lim="800000"/>
+        </a:ln>
+        <a:ln w="12700" cap="flat" cmpd="sng" algn="ctr">
+          <a:solidFill>
+            <a:schemeClr val="phClr"/>
+          </a:solidFill>
+          <a:prstDash val="solid"/>
+          <a:miter lim="800000"/>
+        </a:ln>
+        <a:ln w="19050" cap="flat" cmpd="sng" algn="ctr">
+          <a:solidFill>
+            <a:schemeClr val="phClr"/>
+          </a:solidFill>
+          <a:prstDash val="solid"/>
+          <a:miter lim="800000"/>
+        </a:ln>
+      </a:lnStyleLst>
+      <a:effectStyleLst>
+        <a:effectStyle>
+          <a:effectLst/>
+        </a:effectStyle>
+        <a:effectStyle>
+          <a:effectLst/>
+        </a:effectStyle>
+        <a:effectStyle>
+          <a:effectLst>
+            <a:outerShdw blurRad="57150" dist="19050" dir="5400000" algn="ctr" rotWithShape="0">
+              <a:srgbClr val="000000">
+                <a:alpha val="63000"/>
+              </a:srgbClr>
+            </a:outerShdw>
+          </a:effectLst>
+        </a:effectStyle>
+      </a:effectStyleLst>
+      <a:bgFillStyleLst>
+        <a:solidFill>
+          <a:schemeClr val="phClr"/>
+        </a:solidFill>
+        <a:solidFill>
+          <a:schemeClr val="phClr">
+            <a:tint val="95000"/>
+            <a:satMod val="170000"/>
+          </a:schemeClr>
+        </a:solidFill>
+        <a:gradFill rotWithShape="1">
+          <a:gsLst>
+            <a:gs pos="0">
+              <a:schemeClr val="phClr">
+                <a:tint val="93000"/>
+                <a:satMod val="150000"/>
+                <a:shade val="98000"/>
+                <a:lumMod val="102000"/>
+              </a:schemeClr>
+            </a:gs>
+            <a:gs pos="50000">
+              <a:schemeClr val="phClr">
+                <a:tint val="98000"/>
+                <a:satMod val="130000"/>
+                <a:shade val="90000"/>
+                <a:lumMod val="103000"/>
+              </a:schemeClr>
+            </a:gs>
+            <a:gs pos="100000">
+              <a:schemeClr val="phClr">
+                <a:shade val="63000"/>
+                <a:satMod val="120000"/>
+              </a:schemeClr>
+            </a:gs>
+          </a:gsLst>
+          <a:lin ang="5400000" scaled="0"/>
+        </a:gradFill>
+      </a:bgFillStyleLst>
+    </a:fmtScheme>
+  </a:themeElements>
+  <a:objectDefaults/>
+  <a:extraClrSchemeLst/>
+  <a:extLst>
+    <a:ext uri="{05A4C25C-085E-4340-85A3-A5531E510DB2}">
+      <thm15:themeFamily xmlns:thm15="http://schemas.microsoft.com/office/thememl/2012/main" name="Office Theme" id="{62F939B6-93AF-4DB8-9C6B-D6C7DFDC589F}" vid="{4A3C46E8-61CC-4603-A589-7422A47A8E4A}"/>
+    </a:ext>
+  </a:extLst>
+</a:theme>
 </file>
--- a/Sunumlar/Makale_Sunumu_Sigara_Birakma.pptx
+++ b/Sunumlar/Makale_Sunumu_Sigara_Birakma.pptx
@@ -1367,7 +1367,7 @@
           <a:lstStyle/>
           <a:p>
             <a:r>
-              <a:t>Tablo 5'te tedavi yöntemlerine göre bırakma oranları yer almaktadır. Yazarlara göre en yüksek bırakma oranı yüzde 44,0 ile kombine tedavi grubundadır ve kombine tedavi diğer tüm seçeneklerden anlamlı derecede üstündür.</a:t>
+              <a:t>Tablo 5'te tedavi yöntemlerine göre bırakma oranları yer almaktadır. Makalede en yüksek bırakma oranının yüzde 44,0 ile kombine tedavi grubunda olduğu ve kombine tedavinin diğer tüm seçeneklerden anlamlı derecede üstün olduğu bildirilmektedir.</a:t>
             </a:r>
           </a:p>
           <a:p>
@@ -1468,7 +1468,7 @@
           </a:p>
           <a:p>
             <a:r>
-              <a:t>Hanede sigara içen olmaması bırakma olasılığını yaklaşık iki katına, sigaraya bağlı yakınma olmaması 1,6 katına çıkarmaktadır. Yazarlar ayrıca FNBT puanının bırakma başarısının negatif bir öngörücüsü olduğunu bildirmektedir.</a:t>
+              <a:t>Hanede sigara içen olmaması bırakma olasılığını yaklaşık iki katına, sigaraya bağlı yakınma olmaması 1,6 katına çıkarmaktadır. Ayrıca FNBT puanının bırakma başarısının negatif bir öngörücüsü olduğu bildirilmektedir.</a:t>
             </a:r>
           </a:p>
         </p:txBody>
@@ -1645,7 +1645,7 @@
           <a:lstStyle/>
           <a:p>
             <a:r>
-              <a:t>Yazarlar bulgularını literatürle karşılaştırmıştır. Vareniklinin bupropiona üstünlüğü büyük ölçekli meta-analizler ve randomize kontrollü çalışmalarla uyumludur. Bu üstünlüğün, vareniklinin α4β2 nikotinik reseptördeki parsiyel agonist etkisiyle ilişkili olduğu düşünülmektedir.</a:t>
+              <a:t>Makalede bulgular literatürle karşılaştırılmaktadır. Vareniklinin bupropiona üstünlüğü büyük ölçekli meta-analizler ve randomize kontrollü çalışmalarla uyumludur. Bu üstünlüğün, vareniklinin α4β2 nikotinik reseptördeki parsiyel agonist etkisiyle ilişkili olduğu düşünülmektedir.</a:t>
             </a:r>
           </a:p>
           <a:p>
@@ -1741,7 +1741,7 @@
           <a:lstStyle/>
           <a:p>
             <a:r>
-              <a:t>Yazarlar davranışsal desteğin önemini vurgulamaktadır: Daha fazla görüşmeye gelen hastalarda bırakma oranı daha yüksektir.</a:t>
+              <a:t>Makalede davranışsal desteğin önemi vurgulanmaktadır: Daha fazla görüşmeye gelen hastalarda bırakma oranı daha yüksektir.</a:t>
             </a:r>
           </a:p>
           <a:p>
@@ -1751,7 +1751,7 @@
           </a:p>
           <a:p>
             <a:r>
-              <a:t>Hastaların ortalama FNBT puanı, tedavi arayan sigara içicilerinde bildirilen yaklaşık 5 puanla uyumludur ve yüksek puan düşük başarıyla ilişkilidir. Yakınması olmayan hastalarda başarının daha yüksek olması uzun vadeli sağlığı korumaya yönelik içsel motivasyonla açıklanmaktadır. Yazarlar ikinci bir olasılık olarak, kronik hastalığı veya semptomu olan bireylerin sigarayı bir baş etme aracı olarak kullanıyor olabileceğini ve bunun bırakmayı zorlaştırabileceğini belirtmektedir.</a:t>
+              <a:t>Hastaların ortalama FNBT puanı, tedavi arayan sigara içicilerinde bildirilen yaklaşık 5 puanla uyumludur ve yüksek puan düşük başarıyla ilişkilidir. Yakınması olmayan hastalarda başarının daha yüksek olması uzun vadeli sağlığı korumaya yönelik içsel motivasyonla açıklanmaktadır. İkinci bir olasılık olarak, kronik hastalığı veya semptomu olan bireylerin sigarayı bir baş etme aracı olarak kullanıyor olabileceği ve bunun bırakmayı zorlaştırabileceği belirtilmektedir.</a:t>
             </a:r>
           </a:p>
         </p:txBody>
@@ -1837,12 +1837,12 @@
           <a:lstStyle/>
           <a:p>
             <a:r>
-              <a:t>Yazarlar kısıtlılık olarak asistan rotasyonlarının takip sürekliliğini etkileyebileceğini, eksik verilerin telefonla ve hasta beyanıyla tamamlandığını ve vareniklinin piyasadan çekilmesinin ilaç seçimini etkilediğini belirtmektedir.</a:t>
-            </a:r>
-          </a:p>
-          <a:p>
-            <a:r>
-              <a:t>Güçlü yön olarak bu çalışmanın, bildikleri kadarıyla sitizin ile sigara bırakma tedavisini ele alan erişilebilir ilk tez çalışması olduğunu ve birçok tedavi seçeneğini bir arada değerlendirdiğini vurgulamaktadırlar.</a:t>
+              <a:t>Makalede kısıtlılık olarak asistan rotasyonlarının takip sürekliliğini etkileyebileceği, eksik verilerin telefonla ve hasta beyanıyla tamamlandığı ve vareniklinin piyasadan çekilmesinin ilaç seçimini etkilediği belirtilmektedir.</a:t>
+            </a:r>
+          </a:p>
+          <a:p>
+            <a:r>
+              <a:t>Güçlü yön olarak, bu çalışmanın bilinen kadarıyla sitizin ile sigara bırakma tedavisini ele alan erişilebilir ilk tez çalışması olduğu ve birçok tedavi seçeneğini bir arada değerlendirdiği vurgulanmaktadır.</a:t>
             </a:r>
           </a:p>
         </p:txBody>
@@ -1928,12 +1928,12 @@
           <a:lstStyle/>
           <a:p>
             <a:r>
-              <a:t>Yazarların sonucuna göre hastaların yaklaşık üçte biri sigarayı bırakmıştır. Kombine tedavi alanlarda bırakma oranı diğer seçeneklere göre daha yüksektir ve tedaviye uyum arttıkça başarı da artmaktadır.</a:t>
-            </a:r>
-          </a:p>
-          <a:p>
-            <a:r>
-              <a:t>Yazarlar tedavi seanslarında hastaların bırakma motivasyonunu artırmaya yönelik çabaların yoğunlaştırılmasını önermektedir.</a:t>
+              <a:t>Çalışmanın sonucuna göre hastaların yaklaşık üçte biri sigarayı bırakmıştır. Kombine tedavi alanlarda bırakma oranı diğer seçeneklere göre daha yüksektir ve tedaviye uyum arttıkça başarı da artmaktadır.</a:t>
+            </a:r>
+          </a:p>
+          <a:p>
+            <a:r>
+              <a:t>Makalede tedavi seanslarında hastaların bırakma motivasyonunu artırmaya yönelik çabaların yoğunlaştırılması önerilmektedir.</a:t>
             </a:r>
           </a:p>
         </p:txBody>
@@ -2656,7 +2656,7 @@
           <a:lstStyle/>
           <a:p>
             <a:r>
-              <a:t>Yazarların amacı, kombine tedavinin ve yakın takibin sigara bırakma başarısı üzerindeki etkisini değerlendirmek ve bırakmayı etkileyen hasta özelliklerini belirlemektir.</a:t>
+              <a:t>Çalışmanın amacı, kombine tedavinin ve yakın takibin sigara bırakma başarısı üzerindeki etkisini değerlendirmek ve bırakmayı etkileyen hasta özelliklerini belirlemektir.</a:t>
             </a:r>
           </a:p>
         </p:txBody>

--- a/Sunumlar/Makale_Sunumu_Sigara_Birakma.pptx
+++ b/Sunumlar/Makale_Sunumu_Sigara_Birakma.pptx
@@ -5,7 +5,7 @@
     <p:sldMasterId id="2147483648" r:id="rId1"/>
   </p:sldMasterIdLst>
   <p:notesMasterIdLst>
-    <p:notesMasterId r:id="rId29"/>
+    <p:notesMasterId r:id="rId28"/>
   </p:notesMasterIdLst>
   <p:sldIdLst>
     <p:sldId id="256" r:id="rId2"/>
@@ -31,10 +31,9 @@
     <p:sldId id="277" r:id="rId22"/>
     <p:sldId id="278" r:id="rId23"/>
     <p:sldId id="279" r:id="rId24"/>
-    <p:sldId id="280" r:id="rId25"/>
-    <p:sldId id="281" r:id="rId26"/>
-    <p:sldId id="282" r:id="rId27"/>
-    <p:sldId id="283" r:id="rId28"/>
+    <p:sldId id="281" r:id="rId25"/>
+    <p:sldId id="282" r:id="rId26"/>
+    <p:sldId id="283" r:id="rId27"/>
   </p:sldIdLst>
   <p:sldSz cx="12192000" cy="6858000"/>
   <p:notesSz cx="6858000" cy="12192000"/>
@@ -174,7 +173,6 @@
         <p14:section name="Sonuç" id="{D7D5B8D7-35CC-0BDF-FC0E-24C71FE0EBF6}">
           <p14:sldIdLst>
             <p14:sldId id="279"/>
-            <p14:sldId id="280"/>
             <p14:sldId id="281"/>
             <p14:sldId id="282"/>
             <p14:sldId id="283"/>
@@ -194,12 +192,12 @@
   <pc:docChgLst>
     <pc:chgData name="Ahmet Kıran" userId="79d1f92f95b4ea5f" providerId="LiveId" clId="{731B8B29-0491-457A-988D-17AFD8C29442}"/>
     <pc:docChg chg="undo redo custSel delSld modSld modSection">
-      <pc:chgData name="Ahmet Kıran" userId="79d1f92f95b4ea5f" providerId="LiveId" clId="{731B8B29-0491-457A-988D-17AFD8C29442}" dt="2026-10-14T19:04:15.953" v="136" actId="6549"/>
+      <pc:chgData name="Ahmet Kıran" userId="79d1f92f95b4ea5f" providerId="LiveId" clId="{731B8B29-0491-457A-988D-17AFD8C29442}" dt="2026-10-14T22:18:28.756" v="226" actId="6549"/>
       <pc:docMkLst>
         <pc:docMk/>
       </pc:docMkLst>
       <pc:sldChg chg="modSp mod">
-        <pc:chgData name="Ahmet Kıran" userId="79d1f92f95b4ea5f" providerId="LiveId" clId="{731B8B29-0491-457A-988D-17AFD8C29442}" dt="2026-10-14T18:31:35.752" v="134" actId="20577"/>
+        <pc:chgData name="Ahmet Kıran" userId="79d1f92f95b4ea5f" providerId="LiveId" clId="{731B8B29-0491-457A-988D-17AFD8C29442}" dt="2026-10-14T21:46:20.291" v="137" actId="20577"/>
         <pc:sldMkLst>
           <pc:docMk/>
           <pc:sldMk cId="0" sldId="256"/>
@@ -213,7 +211,7 @@
           </ac:spMkLst>
         </pc:spChg>
         <pc:spChg chg="mod">
-          <ac:chgData name="Ahmet Kıran" userId="79d1f92f95b4ea5f" providerId="LiveId" clId="{731B8B29-0491-457A-988D-17AFD8C29442}" dt="2026-10-14T18:03:36.972" v="94" actId="20577"/>
+          <ac:chgData name="Ahmet Kıran" userId="79d1f92f95b4ea5f" providerId="LiveId" clId="{731B8B29-0491-457A-988D-17AFD8C29442}" dt="2026-10-14T21:46:20.291" v="137" actId="20577"/>
           <ac:spMkLst>
             <pc:docMk/>
             <pc:sldMk cId="0" sldId="256"/>
@@ -221,14 +219,14 @@
           </ac:spMkLst>
         </pc:spChg>
       </pc:sldChg>
-      <pc:sldChg chg="delSp modSp mod">
-        <pc:chgData name="Ahmet Kıran" userId="79d1f92f95b4ea5f" providerId="LiveId" clId="{731B8B29-0491-457A-988D-17AFD8C29442}" dt="2026-10-14T18:04:40.524" v="99" actId="478"/>
+      <pc:sldChg chg="delSp modSp mod modNotesTx">
+        <pc:chgData name="Ahmet Kıran" userId="79d1f92f95b4ea5f" providerId="LiveId" clId="{731B8B29-0491-457A-988D-17AFD8C29442}" dt="2026-10-14T22:15:37.093" v="221" actId="20577"/>
         <pc:sldMkLst>
           <pc:docMk/>
           <pc:sldMk cId="0" sldId="257"/>
         </pc:sldMkLst>
         <pc:spChg chg="del">
-          <ac:chgData name="Ahmet Kıran" userId="79d1f92f95b4ea5f" providerId="LiveId" clId="{731B8B29-0491-457A-988D-17AFD8C29442}" dt="2026-10-14T18:04:30.937" v="95" actId="478"/>
+          <ac:chgData name="Ahmet Kıran" userId="79d1f92f95b4ea5f" providerId="LiveId" clId="{731B8B29-0491-457A-988D-17AFD8C29442}" dt="2026-10-14T22:15:12.732" v="153" actId="478"/>
           <ac:spMkLst>
             <pc:docMk/>
             <pc:sldMk cId="0" sldId="257"/>
@@ -236,7 +234,7 @@
           </ac:spMkLst>
         </pc:spChg>
         <pc:spChg chg="del">
-          <ac:chgData name="Ahmet Kıran" userId="79d1f92f95b4ea5f" providerId="LiveId" clId="{731B8B29-0491-457A-988D-17AFD8C29442}" dt="2026-10-14T18:04:34.614" v="97" actId="478"/>
+          <ac:chgData name="Ahmet Kıran" userId="79d1f92f95b4ea5f" providerId="LiveId" clId="{731B8B29-0491-457A-988D-17AFD8C29442}" dt="2026-10-14T22:15:19.318" v="156" actId="478"/>
           <ac:spMkLst>
             <pc:docMk/>
             <pc:sldMk cId="0" sldId="257"/>
@@ -244,7 +242,7 @@
           </ac:spMkLst>
         </pc:spChg>
         <pc:spChg chg="del">
-          <ac:chgData name="Ahmet Kıran" userId="79d1f92f95b4ea5f" providerId="LiveId" clId="{731B8B29-0491-457A-988D-17AFD8C29442}" dt="2026-10-14T18:04:32.992" v="96" actId="478"/>
+          <ac:chgData name="Ahmet Kıran" userId="79d1f92f95b4ea5f" providerId="LiveId" clId="{731B8B29-0491-457A-988D-17AFD8C29442}" dt="2026-10-14T22:15:17.319" v="155" actId="478"/>
           <ac:spMkLst>
             <pc:docMk/>
             <pc:sldMk cId="0" sldId="257"/>
@@ -252,7 +250,7 @@
           </ac:spMkLst>
         </pc:spChg>
         <pc:spChg chg="del mod">
-          <ac:chgData name="Ahmet Kıran" userId="79d1f92f95b4ea5f" providerId="LiveId" clId="{731B8B29-0491-457A-988D-17AFD8C29442}" dt="2026-10-14T18:04:40.524" v="99" actId="478"/>
+          <ac:chgData name="Ahmet Kıran" userId="79d1f92f95b4ea5f" providerId="LiveId" clId="{731B8B29-0491-457A-988D-17AFD8C29442}" dt="2026-10-14T22:15:15.211" v="154" actId="478"/>
           <ac:spMkLst>
             <pc:docMk/>
             <pc:sldMk cId="0" sldId="257"/>
@@ -300,7 +298,7 @@
         </pc:picChg>
       </pc:sldChg>
       <pc:sldChg chg="addSp delSp modSp mod">
-        <pc:chgData name="Ahmet Kıran" userId="79d1f92f95b4ea5f" providerId="LiveId" clId="{731B8B29-0491-457A-988D-17AFD8C29442}" dt="2026-10-14T18:28:10.708" v="126" actId="478"/>
+        <pc:chgData name="Ahmet Kıran" userId="79d1f92f95b4ea5f" providerId="LiveId" clId="{731B8B29-0491-457A-988D-17AFD8C29442}" dt="2026-10-14T22:16:27.902" v="224" actId="1076"/>
         <pc:sldMkLst>
           <pc:docMk/>
           <pc:sldMk cId="0" sldId="259"/>
@@ -327,6 +325,54 @@
             <pc:docMk/>
             <pc:sldMk cId="0" sldId="259"/>
             <ac:spMk id="11" creationId="{00000000-0000-0000-0000-000000000000}"/>
+          </ac:spMkLst>
+        </pc:spChg>
+        <pc:spChg chg="mod">
+          <ac:chgData name="Ahmet Kıran" userId="79d1f92f95b4ea5f" providerId="LiveId" clId="{731B8B29-0491-457A-988D-17AFD8C29442}" dt="2026-10-14T22:16:27.902" v="224" actId="1076"/>
+          <ac:spMkLst>
+            <pc:docMk/>
+            <pc:sldMk cId="0" sldId="259"/>
+            <ac:spMk id="12" creationId="{00000000-0000-0000-0000-000000000000}"/>
+          </ac:spMkLst>
+        </pc:spChg>
+        <pc:spChg chg="mod">
+          <ac:chgData name="Ahmet Kıran" userId="79d1f92f95b4ea5f" providerId="LiveId" clId="{731B8B29-0491-457A-988D-17AFD8C29442}" dt="2026-10-14T22:16:27.902" v="224" actId="1076"/>
+          <ac:spMkLst>
+            <pc:docMk/>
+            <pc:sldMk cId="0" sldId="259"/>
+            <ac:spMk id="13" creationId="{00000000-0000-0000-0000-000000000000}"/>
+          </ac:spMkLst>
+        </pc:spChg>
+        <pc:spChg chg="mod">
+          <ac:chgData name="Ahmet Kıran" userId="79d1f92f95b4ea5f" providerId="LiveId" clId="{731B8B29-0491-457A-988D-17AFD8C29442}" dt="2026-10-14T22:16:27.902" v="224" actId="1076"/>
+          <ac:spMkLst>
+            <pc:docMk/>
+            <pc:sldMk cId="0" sldId="259"/>
+            <ac:spMk id="14" creationId="{00000000-0000-0000-0000-000000000000}"/>
+          </ac:spMkLst>
+        </pc:spChg>
+        <pc:spChg chg="mod">
+          <ac:chgData name="Ahmet Kıran" userId="79d1f92f95b4ea5f" providerId="LiveId" clId="{731B8B29-0491-457A-988D-17AFD8C29442}" dt="2026-10-14T22:16:27.902" v="224" actId="1076"/>
+          <ac:spMkLst>
+            <pc:docMk/>
+            <pc:sldMk cId="0" sldId="259"/>
+            <ac:spMk id="15" creationId="{00000000-0000-0000-0000-000000000000}"/>
+          </ac:spMkLst>
+        </pc:spChg>
+        <pc:spChg chg="mod">
+          <ac:chgData name="Ahmet Kıran" userId="79d1f92f95b4ea5f" providerId="LiveId" clId="{731B8B29-0491-457A-988D-17AFD8C29442}" dt="2026-10-14T22:16:27.902" v="224" actId="1076"/>
+          <ac:spMkLst>
+            <pc:docMk/>
+            <pc:sldMk cId="0" sldId="259"/>
+            <ac:spMk id="16" creationId="{00000000-0000-0000-0000-000000000000}"/>
+          </ac:spMkLst>
+        </pc:spChg>
+        <pc:spChg chg="mod">
+          <ac:chgData name="Ahmet Kıran" userId="79d1f92f95b4ea5f" providerId="LiveId" clId="{731B8B29-0491-457A-988D-17AFD8C29442}" dt="2026-10-14T22:16:27.902" v="224" actId="1076"/>
+          <ac:spMkLst>
+            <pc:docMk/>
+            <pc:sldMk cId="0" sldId="259"/>
+            <ac:spMk id="17" creationId="{00000000-0000-0000-0000-000000000000}"/>
           </ac:spMkLst>
         </pc:spChg>
       </pc:sldChg>
@@ -365,6 +411,50 @@
             <pc:docMk/>
             <pc:sldMk cId="0" sldId="274"/>
             <ac:spMk id="9" creationId="{00000000-0000-0000-0000-000000000000}"/>
+          </ac:spMkLst>
+        </pc:spChg>
+      </pc:sldChg>
+      <pc:sldChg chg="modSp mod">
+        <pc:chgData name="Ahmet Kıran" userId="79d1f92f95b4ea5f" providerId="LiveId" clId="{731B8B29-0491-457A-988D-17AFD8C29442}" dt="2026-10-14T22:09:47.944" v="138" actId="1036"/>
+        <pc:sldMkLst>
+          <pc:docMk/>
+          <pc:sldMk cId="0" sldId="277"/>
+        </pc:sldMkLst>
+        <pc:spChg chg="mod">
+          <ac:chgData name="Ahmet Kıran" userId="79d1f92f95b4ea5f" providerId="LiveId" clId="{731B8B29-0491-457A-988D-17AFD8C29442}" dt="2026-10-14T22:09:47.944" v="138" actId="1036"/>
+          <ac:spMkLst>
+            <pc:docMk/>
+            <pc:sldMk cId="0" sldId="277"/>
+            <ac:spMk id="20" creationId="{00000000-0000-0000-0000-000000000000}"/>
+          </ac:spMkLst>
+        </pc:spChg>
+      </pc:sldChg>
+      <pc:sldChg chg="del">
+        <pc:chgData name="Ahmet Kıran" userId="79d1f92f95b4ea5f" providerId="LiveId" clId="{731B8B29-0491-457A-988D-17AFD8C29442}" dt="2026-10-14T22:11:10.644" v="139" actId="2696"/>
+        <pc:sldMkLst>
+          <pc:docMk/>
+          <pc:sldMk cId="0" sldId="280"/>
+        </pc:sldMkLst>
+      </pc:sldChg>
+      <pc:sldChg chg="modNotesTx">
+        <pc:chgData name="Ahmet Kıran" userId="79d1f92f95b4ea5f" providerId="LiveId" clId="{731B8B29-0491-457A-988D-17AFD8C29442}" dt="2026-10-14T22:18:28.756" v="226" actId="6549"/>
+        <pc:sldMkLst>
+          <pc:docMk/>
+          <pc:sldMk cId="0" sldId="282"/>
+        </pc:sldMkLst>
+      </pc:sldChg>
+      <pc:sldChg chg="modSp mod modNotesTx">
+        <pc:chgData name="Ahmet Kıran" userId="79d1f92f95b4ea5f" providerId="LiveId" clId="{731B8B29-0491-457A-988D-17AFD8C29442}" dt="2026-10-14T22:18:13.900" v="225" actId="6549"/>
+        <pc:sldMkLst>
+          <pc:docMk/>
+          <pc:sldMk cId="0" sldId="283"/>
+        </pc:sldMkLst>
+        <pc:spChg chg="mod">
+          <ac:chgData name="Ahmet Kıran" userId="79d1f92f95b4ea5f" providerId="LiveId" clId="{731B8B29-0491-457A-988D-17AFD8C29442}" dt="2026-10-14T22:11:28.430" v="140" actId="6549"/>
+          <ac:spMkLst>
+            <pc:docMk/>
+            <pc:sldMk cId="0" sldId="283"/>
+            <ac:spMk id="4" creationId="{00000000-0000-0000-0000-000000000000}"/>
           </ac:spMkLst>
         </pc:spChg>
       </pc:sldChg>
@@ -1554,12 +1644,12 @@
           <a:lstStyle/>
           <a:p>
             <a:r>
-              <a:t>Sunum 27 slayttan oluşmakta ve yaklaşık yarım saat sürecektir.</a:t>
-            </a:r>
-          </a:p>
-          <a:p>
-            <a:r>
-              <a:t>Makalenin künyesi ve giriş bölümüyle başlayıp gereç ve yöntemi aktaracağım. Bulgular bölümünde makaledeki altı tabloyu özgün halleriyle göstereceğim. Ardından hocalarımızın tartışma ve sonuçlarını aktaracak, son olarak kısa bir olgu üzerinden görüşlerinizi alacağım.</a:t>
+              <a:t>Sunum 26 slayttan oluşmakta ve yaklaşık yirmi dk sürecektir.</a:t>
+            </a:r>
+          </a:p>
+          <a:p>
+            <a:r>
+              <a:t>Makalenin künyesi ve giriş bölümüyle başlayıp gereç ve yöntemi aktaracağım. Bulgular bölümünde makaledeki tabloyu özgün halleriyle göstereceğim. Ardından hocalarımızın tartışma ve sonuçlarını aktaracağım.</a:t>
             </a:r>
           </a:p>
         </p:txBody>
@@ -2019,22 +2109,12 @@
           <a:lstStyle/>
           <a:p>
             <a:r>
-              <a:t>Bulguları pratiğe aktarmak için kısa bir olgu üzerinden görüşlerinizi almak istiyorum.</a:t>
-            </a:r>
-          </a:p>
-          <a:p>
-            <a:r>
-              <a:t>52 yaşında erkek hasta; günde 25 sigara içiyor, 30 paket-yıl öyküsü var, FNBT puanı 8. Daha önce bupropion ile denemiş ve başaramamış. Eşi de sigara içiyor.</a:t>
-            </a:r>
-          </a:p>
-          <a:p>
-            <a:r>
-              <a:t>Bu hastada hangi tedaviyi seçerdiniz? Takibi nasıl planlardınız? Eşini sürece nasıl dahil ederdiniz?</a:t>
-            </a:r>
-          </a:p>
-          <a:p>
-            <a:r>
-              <a:t>[Burada 2–3 dakika görüş alın. Makalenin bulgularına göre tartışmayı şu noktalara yönlendirebilirsiniz: Kombine tedavi veya vareniklin/sitizin temelli tedavi, sık kontrol görüşmeleri ve eşe de bırakma danışmanlığı önerilmesi.]</a:t>
+              <a:t>Sunumu beş mesajla özetlemek istiyorum.</a:t>
+            </a:r>
+          </a:p>
+          <a:p>
+            <a:r>
+              <a:t>Hastaların yaklaşık üçte biri sigarayı bırakmıştır. Kombine tedavide başarı daha yüksektir. Bupropion monoterapisi en düşük başarının görüldüğü seçenektir. Hanede sigara içen olması başarıyı azaltmaktadır. Sık takip başarıyla ilişkilidir.</a:t>
             </a:r>
           </a:p>
         </p:txBody>
@@ -2119,14 +2199,7 @@
           <a:bodyPr/>
           <a:lstStyle/>
           <a:p>
-            <a:r>
-              <a:t>Sunumu beş mesajla özetlemek istiyorum.</a:t>
-            </a:r>
-          </a:p>
-          <a:p>
-            <a:r>
-              <a:t>Hastaların yaklaşık üçte biri sigarayı bırakmıştır. Kombine tedavide başarı daha yüksektir. Bupropion monoterapisi en düşük başarının görüldüğü seçenektir. Hanede sigara içen olması başarıyı azaltmaktadır. Sık takip başarıyla ilişkilidir.</a:t>
-            </a:r>
+            <a:endParaRPr dirty="0"/>
           </a:p>
         </p:txBody>
       </p:sp>
@@ -2210,9 +2283,7 @@
           <a:bodyPr/>
           <a:lstStyle/>
           <a:p>
-            <a:r>
-              <a:t>Kaynaklar Vancouver stiline uygun olarak, kullanım sırasıyla listelenmiştir. Birinci kaynak sunulan makalenin kendisidir; diğerleri makalenin atıf yaptığı çalışmalardır.</a:t>
-            </a:r>
+            <a:endParaRPr dirty="0"/>
           </a:p>
         </p:txBody>
       </p:sp>
@@ -2234,92 +2305,6 @@
             <a:fld id="{F7021451-1387-4CA6-816F-3879F97B5CBC}" type="slidenum">
               <a:rPr lang="en-US"/>
               <a:t>26</a:t>
-            </a:fld>
-            <a:endParaRPr lang="en-US"/>
-          </a:p>
-        </p:txBody>
-      </p:sp>
-    </p:spTree>
-    <p:extLst>
-      <p:ext uri="{BB962C8B-B14F-4D97-AF65-F5344CB8AC3E}">
-        <p14:creationId xmlns:p14="http://schemas.microsoft.com/office/powerpoint/2010/main" val="1024086991"/>
-      </p:ext>
-    </p:extLst>
-  </p:cSld>
-  <p:clrMapOvr>
-    <a:masterClrMapping/>
-  </p:clrMapOvr>
-</p:notes>
-</file>
-
-<file path=ppt/notesSlides/notesSlide27.xml><?xml version="1.0" encoding="utf-8"?>
-<p:notes xmlns:a="http://schemas.openxmlformats.org/drawingml/2006/main" xmlns:r="http://schemas.openxmlformats.org/officeDocument/2006/relationships" xmlns:p="http://schemas.openxmlformats.org/presentationml/2006/main">
-  <p:cSld>
-    <p:spTree>
-      <p:nvGrpSpPr>
-        <p:cNvPr id="1" name=""/>
-        <p:cNvGrpSpPr/>
-        <p:nvPr/>
-      </p:nvGrpSpPr>
-      <p:grpSpPr>
-        <a:xfrm>
-          <a:off x="0" y="0"/>
-          <a:ext cx="0" cy="0"/>
-          <a:chOff x="0" y="0"/>
-          <a:chExt cx="0" cy="0"/>
-        </a:xfrm>
-      </p:grpSpPr>
-      <p:sp>
-        <p:nvSpPr>
-          <p:cNvPr id="2" name="Slide Image Placeholder 1"/>
-          <p:cNvSpPr>
-            <a:spLocks noGrp="1" noRot="1" noChangeAspect="1"/>
-          </p:cNvSpPr>
-          <p:nvPr>
-            <p:ph type="sldImg"/>
-          </p:nvPr>
-        </p:nvSpPr>
-        <p:spPr/>
-      </p:sp>
-      <p:sp>
-        <p:nvSpPr>
-          <p:cNvPr id="3" name="Notes Placeholder 2"/>
-          <p:cNvSpPr>
-            <a:spLocks noGrp="1"/>
-          </p:cNvSpPr>
-          <p:nvPr>
-            <p:ph type="body" idx="1"/>
-          </p:nvPr>
-        </p:nvSpPr>
-        <p:spPr/>
-        <p:txBody>
-          <a:bodyPr/>
-          <a:lstStyle/>
-          <a:p>
-            <a:r>
-              <a:t>İlginiz ve katkılarınız için teşekkür ederim. Sorularınızı ve görüşlerinizi almaktan memnuniyet duyarım.</a:t>
-            </a:r>
-          </a:p>
-        </p:txBody>
-      </p:sp>
-      <p:sp>
-        <p:nvSpPr>
-          <p:cNvPr id="4" name="Slide Number Placeholder 3"/>
-          <p:cNvSpPr>
-            <a:spLocks noGrp="1"/>
-          </p:cNvSpPr>
-          <p:nvPr>
-            <p:ph type="sldNum" sz="quarter" idx="10"/>
-          </p:nvPr>
-        </p:nvSpPr>
-        <p:spPr/>
-        <p:txBody>
-          <a:bodyPr/>
-          <a:lstStyle/>
-          <a:p>
-            <a:fld id="{F7021451-1387-4CA6-816F-3879F97B5CBC}" type="slidenum">
-              <a:rPr lang="en-US"/>
-              <a:t>27</a:t>
             </a:fld>
             <a:endParaRPr lang="en-US"/>
           </a:p>
@@ -2383,12 +2368,226 @@
           <a:lstStyle/>
           <a:p>
             <a:r>
-              <a:t>Solda makalenin ilk sayfasını görüyorsunuz. Makale Türkiye Aile Hekimleri Uzmanlık Derneği'nin yayın organı olan Turkish Journal of Family Practice'te 2026 yılında yayımlanmıştır.</a:t>
-            </a:r>
-          </a:p>
-          <a:p>
-            <a:r>
-              <a:t>Çalışma retrospektif, kesitsel bir araştırmadır. Veriler Samsun Eğitim ve Araştırma Hastanesi Sigara Bırakma Polikliniği'nden elde edilmiştir.</a:t>
+              <a:rPr dirty="0"/>
+              <a:t>Solda </a:t>
+            </a:r>
+            <a:r>
+              <a:rPr dirty="0" err="1"/>
+              <a:t>makalenin</a:t>
+            </a:r>
+            <a:r>
+              <a:rPr dirty="0"/>
+              <a:t> ilk </a:t>
+            </a:r>
+            <a:r>
+              <a:rPr dirty="0" err="1"/>
+              <a:t>sayfasını</a:t>
+            </a:r>
+            <a:r>
+              <a:rPr dirty="0"/>
+              <a:t> </a:t>
+            </a:r>
+            <a:r>
+              <a:rPr dirty="0" err="1"/>
+              <a:t>görüyorsunuz</a:t>
+            </a:r>
+            <a:r>
+              <a:rPr dirty="0"/>
+              <a:t>. Makale Türkiye Aile </a:t>
+            </a:r>
+            <a:r>
+              <a:rPr dirty="0" err="1"/>
+              <a:t>Hekimleri</a:t>
+            </a:r>
+            <a:r>
+              <a:rPr dirty="0"/>
+              <a:t> </a:t>
+            </a:r>
+            <a:r>
+              <a:rPr dirty="0" err="1"/>
+              <a:t>Uzmanlık</a:t>
+            </a:r>
+            <a:r>
+              <a:rPr dirty="0"/>
+              <a:t> </a:t>
+            </a:r>
+            <a:r>
+              <a:rPr dirty="0" err="1"/>
+              <a:t>Derneği'nin</a:t>
+            </a:r>
+            <a:r>
+              <a:rPr dirty="0"/>
+              <a:t> </a:t>
+            </a:r>
+            <a:r>
+              <a:rPr dirty="0" err="1"/>
+              <a:t>yayın</a:t>
+            </a:r>
+            <a:r>
+              <a:rPr dirty="0"/>
+              <a:t> </a:t>
+            </a:r>
+            <a:r>
+              <a:rPr dirty="0" err="1"/>
+              <a:t>organı</a:t>
+            </a:r>
+            <a:r>
+              <a:rPr dirty="0"/>
+              <a:t> </a:t>
+            </a:r>
+            <a:r>
+              <a:rPr dirty="0" err="1"/>
+              <a:t>olan</a:t>
+            </a:r>
+            <a:r>
+              <a:rPr dirty="0"/>
+              <a:t> Turkish Journal of Family </a:t>
+            </a:r>
+            <a:r>
+              <a:rPr dirty="0" err="1"/>
+              <a:t>Practice'te</a:t>
+            </a:r>
+            <a:r>
+              <a:rPr dirty="0"/>
+              <a:t> 2026 </a:t>
+            </a:r>
+            <a:r>
+              <a:rPr dirty="0" err="1"/>
+              <a:t>yılında</a:t>
+            </a:r>
+            <a:r>
+              <a:rPr dirty="0"/>
+              <a:t> </a:t>
+            </a:r>
+            <a:r>
+              <a:rPr dirty="0" err="1"/>
+              <a:t>yayımlanmıştır</a:t>
+            </a:r>
+            <a:r>
+              <a:rPr dirty="0"/>
+              <a:t>.</a:t>
+            </a:r>
+          </a:p>
+          <a:p>
+            <a:r>
+              <a:rPr dirty="0" err="1"/>
+              <a:t>Çalışma</a:t>
+            </a:r>
+            <a:r>
+              <a:rPr dirty="0"/>
+              <a:t> </a:t>
+            </a:r>
+            <a:r>
+              <a:rPr dirty="0" err="1"/>
+              <a:t>retrospektif</a:t>
+            </a:r>
+            <a:r>
+              <a:rPr dirty="0"/>
+              <a:t>, </a:t>
+            </a:r>
+            <a:r>
+              <a:rPr dirty="0" err="1"/>
+              <a:t>kesitsel</a:t>
+            </a:r>
+            <a:r>
+              <a:rPr dirty="0"/>
+              <a:t> </a:t>
+            </a:r>
+            <a:r>
+              <a:rPr dirty="0" err="1"/>
+              <a:t>bir</a:t>
+            </a:r>
+            <a:r>
+              <a:rPr dirty="0"/>
+              <a:t> </a:t>
+            </a:r>
+            <a:r>
+              <a:rPr dirty="0" err="1"/>
+              <a:t>araştırmadır</a:t>
+            </a:r>
+            <a:r>
+              <a:rPr dirty="0"/>
+              <a:t>. </a:t>
+            </a:r>
+            <a:r>
+              <a:rPr dirty="0" err="1"/>
+              <a:t>Veriler</a:t>
+            </a:r>
+            <a:r>
+              <a:rPr dirty="0"/>
+              <a:t> Samsun </a:t>
+            </a:r>
+            <a:r>
+              <a:rPr dirty="0" err="1"/>
+              <a:t>Eğitim</a:t>
+            </a:r>
+            <a:r>
+              <a:rPr dirty="0"/>
+              <a:t> </a:t>
+            </a:r>
+            <a:r>
+              <a:rPr dirty="0" err="1"/>
+              <a:t>ve</a:t>
+            </a:r>
+            <a:r>
+              <a:rPr dirty="0"/>
+              <a:t> </a:t>
+            </a:r>
+            <a:r>
+              <a:rPr dirty="0" err="1"/>
+              <a:t>Araştırma</a:t>
+            </a:r>
+            <a:r>
+              <a:rPr dirty="0"/>
+              <a:t> </a:t>
+            </a:r>
+            <a:r>
+              <a:rPr dirty="0" err="1"/>
+              <a:t>Hastanesi</a:t>
+            </a:r>
+            <a:r>
+              <a:rPr dirty="0"/>
+              <a:t> </a:t>
+            </a:r>
+            <a:r>
+              <a:rPr dirty="0" err="1"/>
+              <a:t>Sigara</a:t>
+            </a:r>
+            <a:r>
+              <a:rPr dirty="0"/>
+              <a:t> </a:t>
+            </a:r>
+            <a:r>
+              <a:rPr dirty="0" err="1"/>
+              <a:t>Bırakma</a:t>
+            </a:r>
+            <a:r>
+              <a:rPr dirty="0"/>
+              <a:t> </a:t>
+            </a:r>
+            <a:r>
+              <a:rPr dirty="0" err="1"/>
+              <a:t>Polikliniği'nden</a:t>
+            </a:r>
+            <a:r>
+              <a:rPr dirty="0"/>
+              <a:t> </a:t>
+            </a:r>
+            <a:r>
+              <a:rPr dirty="0" err="1"/>
+              <a:t>elde</a:t>
+            </a:r>
+            <a:r>
+              <a:rPr dirty="0"/>
+              <a:t> </a:t>
+            </a:r>
+            <a:r>
+              <a:rPr dirty="0" err="1"/>
+              <a:t>edilmiştir</a:t>
+            </a:r>
+            <a:r>
+              <a:rPr dirty="0"/>
+              <a:t>.</a:t>
             </a:r>
           </a:p>
         </p:txBody>
@@ -3127,7 +3326,7 @@
           </a:prstGeom>
           <a:extLst>
             <a:ext uri="{C572A759-6A51-4108-AA02-DFA0A04FC94B}">
-              <ma14:wrappingTextBoxFlag xmlns:ma14="http://schemas.microsoft.com/office/mac/drawingml/2011/main" xmlns="" val="0"/>
+              <ma14:wrappingTextBoxFlag xmlns="" xmlns:ma14="http://schemas.microsoft.com/office/mac/drawingml/2011/main" val="0"/>
             </a:ext>
           </a:extLst>
         </p:spPr>
@@ -3246,7 +3445,7 @@
           </a:prstGeom>
           <a:extLst>
             <a:ext uri="{C572A759-6A51-4108-AA02-DFA0A04FC94B}">
-              <ma14:wrappingTextBoxFlag xmlns:ma14="http://schemas.microsoft.com/office/mac/drawingml/2011/main" xmlns="" val="0"/>
+              <ma14:wrappingTextBoxFlag xmlns="" xmlns:ma14="http://schemas.microsoft.com/office/mac/drawingml/2011/main" val="0"/>
             </a:ext>
           </a:extLst>
         </p:spPr>
@@ -3365,7 +3564,7 @@
           </a:prstGeom>
           <a:extLst>
             <a:ext uri="{C572A759-6A51-4108-AA02-DFA0A04FC94B}">
-              <ma14:wrappingTextBoxFlag xmlns:ma14="http://schemas.microsoft.com/office/mac/drawingml/2011/main" xmlns="" val="0"/>
+              <ma14:wrappingTextBoxFlag xmlns="" xmlns:ma14="http://schemas.microsoft.com/office/mac/drawingml/2011/main" val="0"/>
             </a:ext>
           </a:extLst>
         </p:spPr>
@@ -3440,7 +3639,7 @@
           </a:prstGeom>
           <a:extLst>
             <a:ext uri="{C572A759-6A51-4108-AA02-DFA0A04FC94B}">
-              <ma14:wrappingTextBoxFlag xmlns:ma14="http://schemas.microsoft.com/office/mac/drawingml/2011/main" xmlns="" val="0"/>
+              <ma14:wrappingTextBoxFlag xmlns="" xmlns:ma14="http://schemas.microsoft.com/office/mac/drawingml/2011/main" val="0"/>
             </a:ext>
           </a:extLst>
         </p:spPr>
@@ -3932,7 +4131,7 @@
                   <a:schemeClr val="bg2"/>
                 </a:solidFill>
               </a:rPr>
-              <a:t>	Danışman	:Prof. Dr. Onur ÖZTÜRK</a:t>
+              <a:t>	Danışman	: Prof. Dr. Onur ÖZTÜRK</a:t>
             </a:r>
             <a:endParaRPr lang="en-US" sz="2000" dirty="0"/>
           </a:p>
@@ -3958,7 +4157,7 @@
           </a:prstGeom>
           <a:extLst>
             <a:ext uri="{C572A759-6A51-4108-AA02-DFA0A04FC94B}">
-              <ma14:wrappingTextBoxFlag xmlns:ma14="http://schemas.microsoft.com/office/mac/drawingml/2011/main" xmlns="" val="0"/>
+              <ma14:wrappingTextBoxFlag xmlns="" xmlns:ma14="http://schemas.microsoft.com/office/mac/drawingml/2011/main" val="0"/>
             </a:ext>
           </a:extLst>
         </p:spPr>
@@ -5049,7 +5248,7 @@
           </a:prstGeom>
           <a:extLst>
             <a:ext uri="{C572A759-6A51-4108-AA02-DFA0A04FC94B}">
-              <ma14:wrappingTextBoxFlag xmlns:ma14="http://schemas.microsoft.com/office/mac/drawingml/2011/main" xmlns="" val="0"/>
+              <ma14:wrappingTextBoxFlag xmlns="" xmlns:ma14="http://schemas.microsoft.com/office/mac/drawingml/2011/main" val="0"/>
             </a:ext>
           </a:extLst>
         </p:spPr>
@@ -5789,7 +5988,7 @@
           </a:prstGeom>
           <a:extLst>
             <a:ext uri="{C572A759-6A51-4108-AA02-DFA0A04FC94B}">
-              <ma14:wrappingTextBoxFlag xmlns:ma14="http://schemas.microsoft.com/office/mac/drawingml/2011/main" xmlns="" val="0"/>
+              <ma14:wrappingTextBoxFlag xmlns="" xmlns:ma14="http://schemas.microsoft.com/office/mac/drawingml/2011/main" val="0"/>
             </a:ext>
           </a:extLst>
         </p:spPr>
@@ -6535,7 +6734,7 @@
           </a:prstGeom>
           <a:extLst>
             <a:ext uri="{C572A759-6A51-4108-AA02-DFA0A04FC94B}">
-              <ma14:wrappingTextBoxFlag xmlns:ma14="http://schemas.microsoft.com/office/mac/drawingml/2011/main" xmlns="" val="0"/>
+              <ma14:wrappingTextBoxFlag xmlns="" xmlns:ma14="http://schemas.microsoft.com/office/mac/drawingml/2011/main" val="0"/>
             </a:ext>
           </a:extLst>
         </p:spPr>
@@ -6900,7 +7099,7 @@
           </a:prstGeom>
           <a:extLst>
             <a:ext uri="{C572A759-6A51-4108-AA02-DFA0A04FC94B}">
-              <ma14:wrappingTextBoxFlag xmlns:ma14="http://schemas.microsoft.com/office/mac/drawingml/2011/main" xmlns="" val="0"/>
+              <ma14:wrappingTextBoxFlag xmlns="" xmlns:ma14="http://schemas.microsoft.com/office/mac/drawingml/2011/main" val="0"/>
             </a:ext>
           </a:extLst>
         </p:spPr>
@@ -7175,7 +7374,7 @@
           </a:prstGeom>
           <a:extLst>
             <a:ext uri="{C572A759-6A51-4108-AA02-DFA0A04FC94B}">
-              <ma14:wrappingTextBoxFlag xmlns:ma14="http://schemas.microsoft.com/office/mac/drawingml/2011/main" xmlns="" val="0"/>
+              <ma14:wrappingTextBoxFlag xmlns="" xmlns:ma14="http://schemas.microsoft.com/office/mac/drawingml/2011/main" val="0"/>
             </a:ext>
           </a:extLst>
         </p:spPr>
@@ -7481,7 +7680,7 @@
           </a:prstGeom>
           <a:extLst>
             <a:ext uri="{C572A759-6A51-4108-AA02-DFA0A04FC94B}">
-              <ma14:wrappingTextBoxFlag xmlns:ma14="http://schemas.microsoft.com/office/mac/drawingml/2011/main" xmlns="" val="0"/>
+              <ma14:wrappingTextBoxFlag xmlns="" xmlns:ma14="http://schemas.microsoft.com/office/mac/drawingml/2011/main" val="0"/>
             </a:ext>
           </a:extLst>
         </p:spPr>
@@ -7784,7 +7983,7 @@
           </a:prstGeom>
           <a:extLst>
             <a:ext uri="{C572A759-6A51-4108-AA02-DFA0A04FC94B}">
-              <ma14:wrappingTextBoxFlag xmlns:ma14="http://schemas.microsoft.com/office/mac/drawingml/2011/main" xmlns="" val="0"/>
+              <ma14:wrappingTextBoxFlag xmlns="" xmlns:ma14="http://schemas.microsoft.com/office/mac/drawingml/2011/main" val="0"/>
             </a:ext>
           </a:extLst>
         </p:spPr>
@@ -8252,7 +8451,7 @@
           </a:prstGeom>
           <a:extLst>
             <a:ext uri="{C572A759-6A51-4108-AA02-DFA0A04FC94B}">
-              <ma14:wrappingTextBoxFlag xmlns:ma14="http://schemas.microsoft.com/office/mac/drawingml/2011/main" xmlns="" val="0"/>
+              <ma14:wrappingTextBoxFlag xmlns="" xmlns:ma14="http://schemas.microsoft.com/office/mac/drawingml/2011/main" val="0"/>
             </a:ext>
           </a:extLst>
         </p:spPr>
@@ -8368,7 +8567,10 @@
         </p:spPr>
         <p:txBody>
           <a:bodyPr/>
-          <a:p/>
+          <a:lstStyle/>
+          <a:p>
+            <a:endParaRPr/>
+          </a:p>
         </p:txBody>
       </p:sp>
       <p:pic>
@@ -8423,7 +8625,10 @@
         </p:spPr>
         <p:txBody>
           <a:bodyPr/>
-          <a:p/>
+          <a:lstStyle/>
+          <a:p>
+            <a:endParaRPr/>
+          </a:p>
         </p:txBody>
       </p:sp>
       <p:sp>
@@ -8504,7 +8709,10 @@
         </p:spPr>
         <p:txBody>
           <a:bodyPr/>
-          <a:p/>
+          <a:lstStyle/>
+          <a:p>
+            <a:endParaRPr/>
+          </a:p>
         </p:txBody>
       </p:sp>
       <p:sp>
@@ -8585,7 +8793,10 @@
         </p:spPr>
         <p:txBody>
           <a:bodyPr/>
-          <a:p/>
+          <a:lstStyle/>
+          <a:p>
+            <a:endParaRPr/>
+          </a:p>
         </p:txBody>
       </p:sp>
       <p:sp>
@@ -8694,7 +8905,7 @@
           </a:prstGeom>
           <a:extLst>
             <a:ext uri="{C572A759-6A51-4108-AA02-DFA0A04FC94B}">
-              <ma14:wrappingTextBoxFlag xmlns:ma14="http://schemas.microsoft.com/office/mac/drawingml/2011/main" xmlns="" val="0"/>
+              <ma14:wrappingTextBoxFlag xmlns="" xmlns:ma14="http://schemas.microsoft.com/office/mac/drawingml/2011/main" val="0"/>
             </a:ext>
           </a:extLst>
         </p:spPr>
@@ -9045,7 +9256,7 @@
           </a:prstGeom>
           <a:extLst>
             <a:ext uri="{C572A759-6A51-4108-AA02-DFA0A04FC94B}">
-              <ma14:wrappingTextBoxFlag xmlns:ma14="http://schemas.microsoft.com/office/mac/drawingml/2011/main" xmlns="" val="0"/>
+              <ma14:wrappingTextBoxFlag xmlns="" xmlns:ma14="http://schemas.microsoft.com/office/mac/drawingml/2011/main" val="0"/>
             </a:ext>
           </a:extLst>
         </p:spPr>
@@ -9163,7 +9374,10 @@
         </p:spPr>
         <p:txBody>
           <a:bodyPr/>
-          <a:p/>
+          <a:lstStyle/>
+          <a:p>
+            <a:endParaRPr/>
+          </a:p>
         </p:txBody>
       </p:sp>
       <p:sp>
@@ -9192,7 +9406,10 @@
         </p:spPr>
         <p:txBody>
           <a:bodyPr/>
-          <a:p/>
+          <a:lstStyle/>
+          <a:p>
+            <a:endParaRPr/>
+          </a:p>
         </p:txBody>
       </p:sp>
       <p:sp>
@@ -9295,7 +9512,10 @@
         </p:spPr>
         <p:txBody>
           <a:bodyPr/>
-          <a:p/>
+          <a:lstStyle/>
+          <a:p>
+            <a:endParaRPr/>
+          </a:p>
         </p:txBody>
       </p:sp>
       <p:sp>
@@ -9324,7 +9544,10 @@
         </p:spPr>
         <p:txBody>
           <a:bodyPr/>
-          <a:p/>
+          <a:lstStyle/>
+          <a:p>
+            <a:endParaRPr/>
+          </a:p>
         </p:txBody>
       </p:sp>
       <p:sp>
@@ -9427,7 +9650,10 @@
         </p:spPr>
         <p:txBody>
           <a:bodyPr/>
-          <a:p/>
+          <a:lstStyle/>
+          <a:p>
+            <a:endParaRPr/>
+          </a:p>
         </p:txBody>
       </p:sp>
       <p:sp>
@@ -9456,7 +9682,10 @@
         </p:spPr>
         <p:txBody>
           <a:bodyPr/>
-          <a:p/>
+          <a:lstStyle/>
+          <a:p>
+            <a:endParaRPr/>
+          </a:p>
         </p:txBody>
       </p:sp>
       <p:sp>
@@ -9559,7 +9788,10 @@
         </p:spPr>
         <p:txBody>
           <a:bodyPr/>
-          <a:p/>
+          <a:lstStyle/>
+          <a:p>
+            <a:endParaRPr/>
+          </a:p>
         </p:txBody>
       </p:sp>
       <p:sp>
@@ -9588,7 +9820,10 @@
         </p:spPr>
         <p:txBody>
           <a:bodyPr/>
-          <a:p/>
+          <a:lstStyle/>
+          <a:p>
+            <a:endParaRPr/>
+          </a:p>
         </p:txBody>
       </p:sp>
       <p:sp>
@@ -9691,7 +9926,10 @@
         </p:spPr>
         <p:txBody>
           <a:bodyPr/>
-          <a:p/>
+          <a:lstStyle/>
+          <a:p>
+            <a:endParaRPr/>
+          </a:p>
         </p:txBody>
       </p:sp>
       <p:sp>
@@ -9720,7 +9958,10 @@
         </p:spPr>
         <p:txBody>
           <a:bodyPr/>
-          <a:p/>
+          <a:lstStyle/>
+          <a:p>
+            <a:endParaRPr/>
+          </a:p>
         </p:txBody>
       </p:sp>
       <p:sp>
@@ -9815,7 +10056,7 @@
           </a:prstGeom>
           <a:extLst>
             <a:ext uri="{C572A759-6A51-4108-AA02-DFA0A04FC94B}">
-              <ma14:wrappingTextBoxFlag xmlns:ma14="http://schemas.microsoft.com/office/mac/drawingml/2011/main" xmlns="" val="0"/>
+              <ma14:wrappingTextBoxFlag xmlns="" xmlns:ma14="http://schemas.microsoft.com/office/mac/drawingml/2011/main" val="0"/>
             </a:ext>
           </a:extLst>
         </p:spPr>
@@ -9837,138 +10078,6 @@
               <a:t>2</a:t>
             </a:fld>
             <a:endParaRPr lang="en-US"/>
-          </a:p>
-        </p:txBody>
-      </p:sp>
-      <p:sp>
-        <p:nvSpPr>
-          <p:cNvPr id="24" name="Kart"/>
-          <p:cNvSpPr/>
-          <p:nvPr/>
-        </p:nvSpPr>
-        <p:spPr>
-          <a:xfrm>
-            <a:off x="6172200" y="4572000"/>
-            <a:ext cx="5440680" cy="1280160"/>
-          </a:xfrm>
-          <a:prstGeom prst="roundRect">
-            <a:avLst>
-              <a:gd name="adj" fmla="val 8571"/>
-            </a:avLst>
-          </a:prstGeom>
-          <a:solidFill>
-            <a:schemeClr val="bg2"/>
-          </a:solidFill>
-          <a:ln w="12700">
-            <a:solidFill>
-              <a:schemeClr val="bg2"/>
-            </a:solidFill>
-            <a:prstDash val="solid"/>
-          </a:ln>
-        </p:spPr>
-        <p:txBody>
-          <a:bodyPr/>
-          <a:p/>
-        </p:txBody>
-      </p:sp>
-      <p:sp>
-        <p:nvSpPr>
-          <p:cNvPr id="25" name="Sıra"/>
-          <p:cNvSpPr/>
-          <p:nvPr/>
-        </p:nvSpPr>
-        <p:spPr>
-          <a:xfrm>
-            <a:off x="6446520" y="4818888"/>
-            <a:ext cx="786384" cy="786384"/>
-          </a:xfrm>
-          <a:prstGeom prst="ellipse">
-            <a:avLst/>
-          </a:prstGeom>
-          <a:solidFill>
-            <a:schemeClr val="accent2"/>
-          </a:solidFill>
-          <a:ln w="12700">
-            <a:solidFill>
-              <a:schemeClr val="accent2"/>
-            </a:solidFill>
-            <a:prstDash val="solid"/>
-          </a:ln>
-        </p:spPr>
-        <p:txBody>
-          <a:bodyPr/>
-          <a:p/>
-        </p:txBody>
-      </p:sp>
-      <p:sp>
-        <p:nvSpPr>
-          <p:cNvPr id="26" name="Text 15"/>
-          <p:cNvSpPr txBox="1"/>
-          <p:nvPr/>
-        </p:nvSpPr>
-        <p:spPr>
-          <a:xfrm>
-            <a:off x="6446520" y="4818888"/>
-            <a:ext cx="786384" cy="786384"/>
-          </a:xfrm>
-          <a:prstGeom prst="rect">
-            <a:avLst/>
-          </a:prstGeom>
-          <a:noFill/>
-          <a:ln/>
-        </p:spPr>
-        <p:txBody>
-          <a:bodyPr wrap="square" lIns="0" tIns="0" rIns="0" bIns="0" rtlCol="0" anchor="ctr"/>
-          <a:lstStyle/>
-          <a:p>
-            <a:pPr marL="0" indent="0" algn="ctr">
-              <a:buNone/>
-            </a:pPr>
-            <a:r>
-              <a:rPr lang="en-US" sz="2800" b="1" dirty="0">
-                <a:solidFill>
-                  <a:schemeClr val="bg1"/>
-                </a:solidFill>
-              </a:rPr>
-              <a:t>6</a:t>
-            </a:r>
-            <a:endParaRPr lang="en-US" sz="2800" dirty="0"/>
-          </a:p>
-        </p:txBody>
-      </p:sp>
-      <p:sp>
-        <p:nvSpPr>
-          <p:cNvPr id="27" name="Text 16"/>
-          <p:cNvSpPr txBox="1"/>
-          <p:nvPr/>
-        </p:nvSpPr>
-        <p:spPr>
-          <a:xfrm>
-            <a:off x="7498080" y="4572000"/>
-            <a:ext cx="3931920" cy="1280160"/>
-          </a:xfrm>
-          <a:prstGeom prst="rect">
-            <a:avLst/>
-          </a:prstGeom>
-          <a:noFill/>
-          <a:ln/>
-        </p:spPr>
-        <p:txBody>
-          <a:bodyPr wrap="square" lIns="0" tIns="0" rIns="0" bIns="0" rtlCol="0" anchor="ctr"/>
-          <a:lstStyle/>
-          <a:p>
-            <a:pPr marL="0" indent="0">
-              <a:buNone/>
-            </a:pPr>
-            <a:r>
-              <a:rPr lang="en-US" sz="2600" dirty="0">
-                <a:solidFill>
-                  <a:schemeClr val="accent1"/>
-                </a:solidFill>
-              </a:rPr>
-              <a:t>Olgu ve özet</a:t>
-            </a:r>
-            <a:endParaRPr lang="en-US" sz="2600" dirty="0"/>
           </a:p>
         </p:txBody>
       </p:sp>
@@ -10063,7 +10172,10 @@
         </p:spPr>
         <p:txBody>
           <a:bodyPr/>
-          <a:p/>
+          <a:lstStyle/>
+          <a:p>
+            <a:endParaRPr/>
+          </a:p>
         </p:txBody>
       </p:sp>
       <p:pic>
@@ -10196,7 +10308,10 @@
         </p:spPr>
         <p:txBody>
           <a:bodyPr/>
-          <a:p/>
+          <a:lstStyle/>
+          <a:p>
+            <a:endParaRPr/>
+          </a:p>
         </p:txBody>
       </p:sp>
       <p:pic>
@@ -10329,7 +10444,10 @@
         </p:spPr>
         <p:txBody>
           <a:bodyPr/>
-          <a:p/>
+          <a:lstStyle/>
+          <a:p>
+            <a:endParaRPr/>
+          </a:p>
         </p:txBody>
       </p:sp>
       <p:pic>
@@ -10462,7 +10580,10 @@
         </p:spPr>
         <p:txBody>
           <a:bodyPr/>
-          <a:p/>
+          <a:lstStyle/>
+          <a:p>
+            <a:endParaRPr/>
+          </a:p>
         </p:txBody>
       </p:sp>
       <p:pic>
@@ -10625,7 +10746,7 @@
           </a:prstGeom>
           <a:extLst>
             <a:ext uri="{C572A759-6A51-4108-AA02-DFA0A04FC94B}">
-              <ma14:wrappingTextBoxFlag xmlns:ma14="http://schemas.microsoft.com/office/mac/drawingml/2011/main" xmlns="" val="0"/>
+              <ma14:wrappingTextBoxFlag xmlns="" xmlns:ma14="http://schemas.microsoft.com/office/mac/drawingml/2011/main" val="0"/>
             </a:ext>
           </a:extLst>
         </p:spPr>
@@ -10741,7 +10862,10 @@
         </p:spPr>
         <p:txBody>
           <a:bodyPr/>
-          <a:p/>
+          <a:lstStyle/>
+          <a:p>
+            <a:endParaRPr/>
+          </a:p>
         </p:txBody>
       </p:sp>
       <p:pic>
@@ -10866,7 +10990,10 @@
         </p:spPr>
         <p:txBody>
           <a:bodyPr/>
-          <a:p/>
+          <a:lstStyle/>
+          <a:p>
+            <a:endParaRPr/>
+          </a:p>
         </p:txBody>
       </p:sp>
       <p:pic>
@@ -10999,7 +11126,10 @@
         </p:spPr>
         <p:txBody>
           <a:bodyPr/>
-          <a:p/>
+          <a:lstStyle/>
+          <a:p>
+            <a:endParaRPr/>
+          </a:p>
         </p:txBody>
       </p:sp>
       <p:pic>
@@ -11132,7 +11262,10 @@
         </p:spPr>
         <p:txBody>
           <a:bodyPr/>
-          <a:p/>
+          <a:lstStyle/>
+          <a:p>
+            <a:endParaRPr/>
+          </a:p>
         </p:txBody>
       </p:sp>
       <p:pic>
@@ -11247,7 +11380,7 @@
         </p:nvSpPr>
         <p:spPr>
           <a:xfrm>
-            <a:off x="548640" y="6382512"/>
+            <a:off x="548640" y="6394869"/>
             <a:ext cx="10424160" cy="292608"/>
           </a:xfrm>
           <a:prstGeom prst="rect">
@@ -11295,7 +11428,7 @@
           </a:prstGeom>
           <a:extLst>
             <a:ext uri="{C572A759-6A51-4108-AA02-DFA0A04FC94B}">
-              <ma14:wrappingTextBoxFlag xmlns:ma14="http://schemas.microsoft.com/office/mac/drawingml/2011/main" xmlns="" val="0"/>
+              <ma14:wrappingTextBoxFlag xmlns="" xmlns:ma14="http://schemas.microsoft.com/office/mac/drawingml/2011/main" val="0"/>
             </a:ext>
           </a:extLst>
         </p:spPr>
@@ -11799,7 +11932,7 @@
           </a:prstGeom>
           <a:extLst>
             <a:ext uri="{C572A759-6A51-4108-AA02-DFA0A04FC94B}">
-              <ma14:wrappingTextBoxFlag xmlns:ma14="http://schemas.microsoft.com/office/mac/drawingml/2011/main" xmlns="" val="0"/>
+              <ma14:wrappingTextBoxFlag xmlns="" xmlns:ma14="http://schemas.microsoft.com/office/mac/drawingml/2011/main" val="0"/>
             </a:ext>
           </a:extLst>
         </p:spPr>
@@ -12278,7 +12411,7 @@
           </a:prstGeom>
           <a:extLst>
             <a:ext uri="{C572A759-6A51-4108-AA02-DFA0A04FC94B}">
-              <ma14:wrappingTextBoxFlag xmlns:ma14="http://schemas.microsoft.com/office/mac/drawingml/2011/main" xmlns="" val="0"/>
+              <ma14:wrappingTextBoxFlag xmlns="" xmlns:ma14="http://schemas.microsoft.com/office/mac/drawingml/2011/main" val="0"/>
             </a:ext>
           </a:extLst>
         </p:spPr>
@@ -12312,510 +12445,6 @@
 </file>
 
 <file path=ppt/slides/slide24.xml><?xml version="1.0" encoding="utf-8"?>
-<p:sld xmlns:a="http://schemas.openxmlformats.org/drawingml/2006/main" xmlns:r="http://schemas.openxmlformats.org/officeDocument/2006/relationships" xmlns:p="http://schemas.openxmlformats.org/presentationml/2006/main">
-  <p:cSld name="Slide 25">
-    <p:spTree>
-      <p:nvGrpSpPr>
-        <p:cNvPr id="1" name=""/>
-        <p:cNvGrpSpPr/>
-        <p:nvPr/>
-      </p:nvGrpSpPr>
-      <p:grpSpPr>
-        <a:xfrm>
-          <a:off x="0" y="0"/>
-          <a:ext cx="0" cy="0"/>
-          <a:chOff x="0" y="0"/>
-          <a:chExt cx="0" cy="0"/>
-        </a:xfrm>
-      </p:grpSpPr>
-      <p:sp>
-        <p:nvSpPr>
-          <p:cNvPr id="3" name="Text 0"/>
-          <p:cNvSpPr>
-            <a:spLocks noGrp="1"/>
-          </p:cNvSpPr>
-          <p:nvPr>
-            <p:ph type="title" idx="100" hasCustomPrompt="1"/>
-          </p:nvPr>
-        </p:nvSpPr>
-        <p:spPr>
-          <a:xfrm>
-            <a:off x="548640" y="320040"/>
-            <a:ext cx="10607040" cy="868680"/>
-          </a:xfrm>
-          <a:prstGeom prst="rect">
-            <a:avLst/>
-          </a:prstGeom>
-          <a:noFill/>
-          <a:ln/>
-        </p:spPr>
-        <p:txBody>
-          <a:bodyPr wrap="square" lIns="0" tIns="0" rIns="0" bIns="0" rtlCol="0" anchor="ctr"/>
-          <a:lstStyle/>
-          <a:p>
-            <a:pPr marL="0" indent="0" algn="l">
-              <a:buNone/>
-            </a:pPr>
-            <a:r>
-              <a:rPr lang="en-US" sz="3600" b="1" dirty="0">
-                <a:solidFill>
-                  <a:schemeClr val="accent1"/>
-                </a:solidFill>
-              </a:rPr>
-              <a:t>Olgu: Siz ne yapardınız?</a:t>
-            </a:r>
-            <a:endParaRPr lang="en-US" sz="3600" dirty="0"/>
-          </a:p>
-        </p:txBody>
-      </p:sp>
-      <p:sp>
-        <p:nvSpPr>
-          <p:cNvPr id="4" name="Kart"/>
-          <p:cNvSpPr/>
-          <p:nvPr/>
-        </p:nvSpPr>
-        <p:spPr>
-          <a:xfrm>
-            <a:off x="548640" y="1371600"/>
-            <a:ext cx="5760720" cy="4572000"/>
-          </a:xfrm>
-          <a:prstGeom prst="roundRect">
-            <a:avLst>
-              <a:gd name="adj" fmla="val 2400"/>
-            </a:avLst>
-          </a:prstGeom>
-          <a:solidFill>
-            <a:schemeClr val="bg2"/>
-          </a:solidFill>
-          <a:ln w="12700">
-            <a:solidFill>
-              <a:schemeClr val="bg2"/>
-            </a:solidFill>
-            <a:prstDash val="solid"/>
-          </a:ln>
-        </p:spPr>
-      </p:sp>
-      <p:sp>
-        <p:nvSpPr>
-          <p:cNvPr id="5" name="Ikon zemini"/>
-          <p:cNvSpPr/>
-          <p:nvPr/>
-        </p:nvSpPr>
-        <p:spPr>
-          <a:xfrm>
-            <a:off x="822960" y="1600200"/>
-            <a:ext cx="822960" cy="822960"/>
-          </a:xfrm>
-          <a:prstGeom prst="ellipse">
-            <a:avLst/>
-          </a:prstGeom>
-          <a:solidFill>
-            <a:schemeClr val="accent2"/>
-          </a:solidFill>
-          <a:ln w="12700">
-            <a:solidFill>
-              <a:schemeClr val="accent2"/>
-            </a:solidFill>
-            <a:prstDash val="solid"/>
-          </a:ln>
-        </p:spPr>
-      </p:sp>
-      <p:pic>
-        <p:nvPicPr>
-          <p:cNvPr id="6" name="Ikon" descr="FaUserMd"/>
-          <p:cNvPicPr>
-            <a:picLocks noChangeAspect="1"/>
-          </p:cNvPicPr>
-          <p:nvPr/>
-        </p:nvPicPr>
-        <p:blipFill>
-          <a:blip r:embed="rId3"/>
-          <a:stretch>
-            <a:fillRect/>
-          </a:stretch>
-        </p:blipFill>
-        <p:spPr>
-          <a:xfrm>
-            <a:off x="1036930" y="1814170"/>
-            <a:ext cx="395021" cy="395021"/>
-          </a:xfrm>
-          <a:prstGeom prst="rect">
-            <a:avLst/>
-          </a:prstGeom>
-        </p:spPr>
-      </p:pic>
-      <p:sp>
-        <p:nvSpPr>
-          <p:cNvPr id="7" name="Text 3"/>
-          <p:cNvSpPr txBox="1"/>
-          <p:nvPr/>
-        </p:nvSpPr>
-        <p:spPr>
-          <a:xfrm>
-            <a:off x="1828800" y="1600200"/>
-            <a:ext cx="4297680" cy="822960"/>
-          </a:xfrm>
-          <a:prstGeom prst="rect">
-            <a:avLst/>
-          </a:prstGeom>
-          <a:noFill/>
-          <a:ln/>
-        </p:spPr>
-        <p:txBody>
-          <a:bodyPr wrap="square" lIns="0" tIns="0" rIns="0" bIns="0" rtlCol="0" anchor="ctr"/>
-          <a:lstStyle/>
-          <a:p>
-            <a:pPr marL="0" indent="0">
-              <a:buNone/>
-            </a:pPr>
-            <a:r>
-              <a:rPr lang="en-US" sz="2600" b="1" dirty="0">
-                <a:solidFill>
-                  <a:schemeClr val="accent1"/>
-                </a:solidFill>
-              </a:rPr>
-              <a:t>52 yaşında erkek hasta</a:t>
-            </a:r>
-            <a:endParaRPr lang="en-US" sz="2600" dirty="0"/>
-          </a:p>
-        </p:txBody>
-      </p:sp>
-      <p:sp>
-        <p:nvSpPr>
-          <p:cNvPr id="8" name="Text 4"/>
-          <p:cNvSpPr txBox="1"/>
-          <p:nvPr/>
-        </p:nvSpPr>
-        <p:spPr>
-          <a:xfrm>
-            <a:off x="914400" y="2697480"/>
-            <a:ext cx="5120640" cy="3017520"/>
-          </a:xfrm>
-          <a:prstGeom prst="rect">
-            <a:avLst/>
-          </a:prstGeom>
-          <a:noFill/>
-          <a:ln/>
-        </p:spPr>
-        <p:txBody>
-          <a:bodyPr wrap="square" lIns="0" tIns="0" rIns="0" bIns="0" rtlCol="0" anchor="t"/>
-          <a:lstStyle/>
-          <a:p>
-            <a:pPr marL="279400" indent="-279400" algn="just">
-              <a:spcAft>
-                <a:spcPts val="1400"/>
-              </a:spcAft>
-              <a:buSzPct val="100000"/>
-              <a:buChar char="•"/>
-            </a:pPr>
-            <a:r>
-              <a:rPr lang="en-US" sz="2200" dirty="0">
-                <a:solidFill>
-                  <a:schemeClr val="accent1"/>
-                </a:solidFill>
-              </a:rPr>
-              <a:t>Günde 25 sigara, 30 paket-yıl</a:t>
-            </a:r>
-            <a:endParaRPr lang="en-US" sz="2200" dirty="0"/>
-          </a:p>
-          <a:p>
-            <a:pPr marL="279400" indent="-279400" algn="just">
-              <a:spcAft>
-                <a:spcPts val="1400"/>
-              </a:spcAft>
-              <a:buSzPct val="100000"/>
-              <a:buChar char="•"/>
-            </a:pPr>
-            <a:r>
-              <a:rPr lang="en-US" sz="2200" dirty="0">
-                <a:solidFill>
-                  <a:schemeClr val="accent1"/>
-                </a:solidFill>
-              </a:rPr>
-              <a:t>FNBT: 8 (yüksek bağımlılık)</a:t>
-            </a:r>
-            <a:endParaRPr lang="en-US" sz="2200" dirty="0"/>
-          </a:p>
-          <a:p>
-            <a:pPr marL="279400" indent="-279400" algn="just">
-              <a:spcAft>
-                <a:spcPts val="1400"/>
-              </a:spcAft>
-              <a:buSzPct val="100000"/>
-              <a:buChar char="•"/>
-            </a:pPr>
-            <a:r>
-              <a:rPr lang="en-US" sz="2200" dirty="0">
-                <a:solidFill>
-                  <a:schemeClr val="accent1"/>
-                </a:solidFill>
-              </a:rPr>
-              <a:t>Bupropion ile başarısız deneme</a:t>
-            </a:r>
-            <a:endParaRPr lang="en-US" sz="2200" dirty="0"/>
-          </a:p>
-          <a:p>
-            <a:pPr marL="279400" indent="-279400" algn="just">
-              <a:spcAft>
-                <a:spcPts val="1400"/>
-              </a:spcAft>
-              <a:buSzPct val="100000"/>
-              <a:buChar char="•"/>
-            </a:pPr>
-            <a:r>
-              <a:rPr lang="en-US" sz="2200" dirty="0">
-                <a:solidFill>
-                  <a:schemeClr val="accent1"/>
-                </a:solidFill>
-              </a:rPr>
-              <a:t>Eşi de sigara içiyor</a:t>
-            </a:r>
-            <a:endParaRPr lang="en-US" sz="2200" dirty="0"/>
-          </a:p>
-        </p:txBody>
-      </p:sp>
-      <p:sp>
-        <p:nvSpPr>
-          <p:cNvPr id="9" name="Kart"/>
-          <p:cNvSpPr/>
-          <p:nvPr/>
-        </p:nvSpPr>
-        <p:spPr>
-          <a:xfrm>
-            <a:off x="6583680" y="1371600"/>
-            <a:ext cx="5029200" cy="4572000"/>
-          </a:xfrm>
-          <a:prstGeom prst="roundRect">
-            <a:avLst>
-              <a:gd name="adj" fmla="val 2400"/>
-            </a:avLst>
-          </a:prstGeom>
-          <a:solidFill>
-            <a:schemeClr val="accent1"/>
-          </a:solidFill>
-          <a:ln w="12700">
-            <a:solidFill>
-              <a:schemeClr val="accent1"/>
-            </a:solidFill>
-            <a:prstDash val="solid"/>
-          </a:ln>
-        </p:spPr>
-      </p:sp>
-      <p:sp>
-        <p:nvSpPr>
-          <p:cNvPr id="10" name="Ikon zemini"/>
-          <p:cNvSpPr/>
-          <p:nvPr/>
-        </p:nvSpPr>
-        <p:spPr>
-          <a:xfrm>
-            <a:off x="6858000" y="1600200"/>
-            <a:ext cx="822960" cy="822960"/>
-          </a:xfrm>
-          <a:prstGeom prst="ellipse">
-            <a:avLst/>
-          </a:prstGeom>
-          <a:solidFill>
-            <a:schemeClr val="accent2"/>
-          </a:solidFill>
-          <a:ln w="12700">
-            <a:solidFill>
-              <a:schemeClr val="accent2"/>
-            </a:solidFill>
-            <a:prstDash val="solid"/>
-          </a:ln>
-        </p:spPr>
-      </p:sp>
-      <p:pic>
-        <p:nvPicPr>
-          <p:cNvPr id="11" name="Ikon" descr="FaQuestion"/>
-          <p:cNvPicPr>
-            <a:picLocks noChangeAspect="1"/>
-          </p:cNvPicPr>
-          <p:nvPr/>
-        </p:nvPicPr>
-        <p:blipFill>
-          <a:blip r:embed="rId4"/>
-          <a:stretch>
-            <a:fillRect/>
-          </a:stretch>
-        </p:blipFill>
-        <p:spPr>
-          <a:xfrm>
-            <a:off x="7071970" y="1814170"/>
-            <a:ext cx="395021" cy="395021"/>
-          </a:xfrm>
-          <a:prstGeom prst="rect">
-            <a:avLst/>
-          </a:prstGeom>
-        </p:spPr>
-      </p:pic>
-      <p:sp>
-        <p:nvSpPr>
-          <p:cNvPr id="12" name="Text 7"/>
-          <p:cNvSpPr txBox="1"/>
-          <p:nvPr/>
-        </p:nvSpPr>
-        <p:spPr>
-          <a:xfrm>
-            <a:off x="7863840" y="1600200"/>
-            <a:ext cx="3566160" cy="822960"/>
-          </a:xfrm>
-          <a:prstGeom prst="rect">
-            <a:avLst/>
-          </a:prstGeom>
-          <a:noFill/>
-          <a:ln/>
-        </p:spPr>
-        <p:txBody>
-          <a:bodyPr wrap="square" lIns="0" tIns="0" rIns="0" bIns="0" rtlCol="0" anchor="ctr"/>
-          <a:lstStyle/>
-          <a:p>
-            <a:pPr marL="0" indent="0">
-              <a:buNone/>
-            </a:pPr>
-            <a:r>
-              <a:rPr lang="en-US" sz="2600" b="1" dirty="0">
-                <a:solidFill>
-                  <a:schemeClr val="bg1"/>
-                </a:solidFill>
-              </a:rPr>
-              <a:t>Tartışalım</a:t>
-            </a:r>
-            <a:endParaRPr lang="en-US" sz="2600" dirty="0"/>
-          </a:p>
-        </p:txBody>
-      </p:sp>
-      <p:sp>
-        <p:nvSpPr>
-          <p:cNvPr id="13" name="Text 8"/>
-          <p:cNvSpPr txBox="1"/>
-          <p:nvPr/>
-        </p:nvSpPr>
-        <p:spPr>
-          <a:xfrm>
-            <a:off x="6949440" y="2697480"/>
-            <a:ext cx="4389120" cy="3017520"/>
-          </a:xfrm>
-          <a:prstGeom prst="rect">
-            <a:avLst/>
-          </a:prstGeom>
-          <a:noFill/>
-          <a:ln/>
-        </p:spPr>
-        <p:txBody>
-          <a:bodyPr wrap="square" lIns="0" tIns="0" rIns="0" bIns="0" rtlCol="0" anchor="t"/>
-          <a:lstStyle/>
-          <a:p>
-            <a:pPr marL="279400" indent="-279400" algn="just">
-              <a:spcAft>
-                <a:spcPts val="1800"/>
-              </a:spcAft>
-              <a:buSzPct val="100000"/>
-              <a:buChar char="•"/>
-            </a:pPr>
-            <a:r>
-              <a:rPr lang="en-US" sz="2200" dirty="0">
-                <a:solidFill>
-                  <a:schemeClr val="bg1"/>
-                </a:solidFill>
-              </a:rPr>
-              <a:t>Hangi tedaviyi seçerdiniz?</a:t>
-            </a:r>
-            <a:endParaRPr lang="en-US" sz="2200" dirty="0"/>
-          </a:p>
-          <a:p>
-            <a:pPr marL="279400" indent="-279400" algn="just">
-              <a:spcAft>
-                <a:spcPts val="1800"/>
-              </a:spcAft>
-              <a:buSzPct val="100000"/>
-              <a:buChar char="•"/>
-            </a:pPr>
-            <a:r>
-              <a:rPr lang="en-US" sz="2200" dirty="0">
-                <a:solidFill>
-                  <a:schemeClr val="bg1"/>
-                </a:solidFill>
-              </a:rPr>
-              <a:t>Takibi nasıl planlardınız?</a:t>
-            </a:r>
-            <a:endParaRPr lang="en-US" sz="2200" dirty="0"/>
-          </a:p>
-          <a:p>
-            <a:pPr marL="279400" indent="-279400" algn="just">
-              <a:spcAft>
-                <a:spcPts val="1800"/>
-              </a:spcAft>
-              <a:buSzPct val="100000"/>
-              <a:buChar char="•"/>
-            </a:pPr>
-            <a:r>
-              <a:rPr lang="en-US" sz="2200" dirty="0">
-                <a:solidFill>
-                  <a:schemeClr val="bg1"/>
-                </a:solidFill>
-              </a:rPr>
-              <a:t>Eşi sürece nasıl katılmalı?</a:t>
-            </a:r>
-            <a:endParaRPr lang="en-US" sz="2200" dirty="0"/>
-          </a:p>
-        </p:txBody>
-      </p:sp>
-      <p:sp>
-        <p:nvSpPr>
-          <p:cNvPr id="25" name="Slide Number Placeholder 0"/>
-          <p:cNvSpPr>
-            <a:spLocks noGrp="1"/>
-          </p:cNvSpPr>
-          <p:nvPr>
-            <p:ph type="sldNum" sz="quarter" idx="4294967295"/>
-          </p:nvPr>
-        </p:nvSpPr>
-        <p:spPr>
-          <a:xfrm>
-            <a:off x="11201400" y="6382512"/>
-            <a:ext cx="548640" cy="292608"/>
-          </a:xfrm>
-          <a:prstGeom prst="rect">
-            <a:avLst/>
-          </a:prstGeom>
-          <a:extLst>
-            <a:ext uri="{C572A759-6A51-4108-AA02-DFA0A04FC94B}">
-              <ma14:wrappingTextBoxFlag xmlns:ma14="http://schemas.microsoft.com/office/mac/drawingml/2011/main" xmlns="" val="0"/>
-            </a:ext>
-          </a:extLst>
-        </p:spPr>
-        <p:txBody>
-          <a:bodyPr/>
-          <a:lstStyle>
-            <a:lvl1pPr>
-              <a:defRPr sz="1400">
-                <a:solidFill>
-                  <a:srgbClr val="7A8C94"/>
-                </a:solidFill>
-              </a:defRPr>
-            </a:lvl1pPr>
-          </a:lstStyle>
-          <a:p>
-            <a:pPr algn="r"/>
-            <a:fld id="{F7021451-1387-4CA6-816F-3879F97B5CBC}" type="slidenum">
-              <a:rPr lang="en-US" b="0"/>
-              <a:t>24</a:t>
-            </a:fld>
-            <a:endParaRPr lang="en-US"/>
-          </a:p>
-        </p:txBody>
-      </p:sp>
-    </p:spTree>
-  </p:cSld>
-  <p:clrMapOvr>
-    <a:masterClrMapping/>
-  </p:clrMapOvr>
-</p:sld>
-</file>
-
-<file path=ppt/slides/slide25.xml><?xml version="1.0" encoding="utf-8"?>
 <p:sld xmlns:a="http://schemas.openxmlformats.org/drawingml/2006/main" xmlns:r="http://schemas.openxmlformats.org/officeDocument/2006/relationships" xmlns:p="http://schemas.openxmlformats.org/presentationml/2006/main">
   <p:cSld name="Slide 26">
     <p:spTree>
@@ -12898,7 +12527,10 @@
         </p:spPr>
         <p:txBody>
           <a:bodyPr/>
-          <a:p/>
+          <a:lstStyle/>
+          <a:p>
+            <a:endParaRPr/>
+          </a:p>
         </p:txBody>
       </p:sp>
       <p:pic>
@@ -12987,7 +12619,10 @@
         </p:spPr>
         <p:txBody>
           <a:bodyPr/>
-          <a:p/>
+          <a:lstStyle/>
+          <a:p>
+            <a:endParaRPr/>
+          </a:p>
         </p:txBody>
       </p:sp>
       <p:pic>
@@ -13076,7 +12711,10 @@
         </p:spPr>
         <p:txBody>
           <a:bodyPr/>
-          <a:p/>
+          <a:lstStyle/>
+          <a:p>
+            <a:endParaRPr/>
+          </a:p>
         </p:txBody>
       </p:sp>
       <p:pic>
@@ -13165,7 +12803,10 @@
         </p:spPr>
         <p:txBody>
           <a:bodyPr/>
-          <a:p/>
+          <a:lstStyle/>
+          <a:p>
+            <a:endParaRPr/>
+          </a:p>
         </p:txBody>
       </p:sp>
       <p:pic>
@@ -13254,7 +12895,10 @@
         </p:spPr>
         <p:txBody>
           <a:bodyPr/>
-          <a:p/>
+          <a:lstStyle/>
+          <a:p>
+            <a:endParaRPr/>
+          </a:p>
         </p:txBody>
       </p:sp>
       <p:pic>
@@ -13373,7 +13017,7 @@
           </a:prstGeom>
           <a:extLst>
             <a:ext uri="{C572A759-6A51-4108-AA02-DFA0A04FC94B}">
-              <ma14:wrappingTextBoxFlag xmlns:ma14="http://schemas.microsoft.com/office/mac/drawingml/2011/main" xmlns="" val="0"/>
+              <ma14:wrappingTextBoxFlag xmlns="" xmlns:ma14="http://schemas.microsoft.com/office/mac/drawingml/2011/main" val="0"/>
             </a:ext>
           </a:extLst>
         </p:spPr>
@@ -13392,7 +13036,7 @@
             <a:pPr algn="r"/>
             <a:fld id="{F7021451-1387-4CA6-816F-3879F97B5CBC}" type="slidenum">
               <a:rPr lang="en-US" b="0"/>
-              <a:t>25</a:t>
+              <a:t>24</a:t>
             </a:fld>
             <a:endParaRPr lang="en-US"/>
           </a:p>
@@ -13406,7 +13050,7 @@
 </p:sld>
 </file>
 
-<file path=ppt/slides/slide26.xml><?xml version="1.0" encoding="utf-8"?>
+<file path=ppt/slides/slide25.xml><?xml version="1.0" encoding="utf-8"?>
 <p:sld xmlns:a="http://schemas.openxmlformats.org/drawingml/2006/main" xmlns:r="http://schemas.openxmlformats.org/officeDocument/2006/relationships" xmlns:p="http://schemas.openxmlformats.org/presentationml/2006/main">
   <p:cSld name="Slide 27">
     <p:spTree>
@@ -13831,7 +13475,7 @@
           </a:prstGeom>
           <a:extLst>
             <a:ext uri="{C572A759-6A51-4108-AA02-DFA0A04FC94B}">
-              <ma14:wrappingTextBoxFlag xmlns:ma14="http://schemas.microsoft.com/office/mac/drawingml/2011/main" xmlns="" val="0"/>
+              <ma14:wrappingTextBoxFlag xmlns="" xmlns:ma14="http://schemas.microsoft.com/office/mac/drawingml/2011/main" val="0"/>
             </a:ext>
           </a:extLst>
         </p:spPr>
@@ -13850,7 +13494,7 @@
             <a:pPr algn="r"/>
             <a:fld id="{F7021451-1387-4CA6-816F-3879F97B5CBC}" type="slidenum">
               <a:rPr lang="en-US" b="0"/>
-              <a:t>26</a:t>
+              <a:t>25</a:t>
             </a:fld>
             <a:endParaRPr lang="en-US"/>
           </a:p>
@@ -13864,7 +13508,7 @@
 </p:sld>
 </file>
 
-<file path=ppt/slides/slide27.xml><?xml version="1.0" encoding="utf-8"?>
+<file path=ppt/slides/slide26.xml><?xml version="1.0" encoding="utf-8"?>
 <p:sld xmlns:a="http://schemas.openxmlformats.org/drawingml/2006/main" xmlns:r="http://schemas.openxmlformats.org/officeDocument/2006/relationships" xmlns:p="http://schemas.openxmlformats.org/presentationml/2006/main">
   <p:cSld name="Slide 28">
     <p:spTree>
@@ -13946,20 +13590,6 @@
               <a:buNone/>
             </a:pPr>
             <a:r>
-              <a:rPr lang="en-US" sz="2600" b="1" dirty="0">
-                <a:solidFill>
-                  <a:schemeClr val="bg2"/>
-                </a:solidFill>
-              </a:rPr>
-              <a:t>Sorular ve tartışma</a:t>
-            </a:r>
-            <a:endParaRPr lang="en-US" sz="2600" dirty="0"/>
-          </a:p>
-          <a:p>
-            <a:pPr marL="0" indent="0">
-              <a:buNone/>
-            </a:pPr>
-            <a:r>
               <a:rPr lang="en-US" sz="1200" dirty="0">
                 <a:solidFill>
                   <a:schemeClr val="bg2"/>
@@ -14011,7 +13641,10 @@
         </p:spPr>
         <p:txBody>
           <a:bodyPr/>
-          <a:p/>
+          <a:lstStyle/>
+          <a:p>
+            <a:endParaRPr/>
+          </a:p>
         </p:txBody>
       </p:sp>
       <p:pic>
@@ -14094,7 +13727,7 @@
           </a:prstGeom>
           <a:extLst>
             <a:ext uri="{C572A759-6A51-4108-AA02-DFA0A04FC94B}">
-              <ma14:wrappingTextBoxFlag xmlns:ma14="http://schemas.microsoft.com/office/mac/drawingml/2011/main" xmlns="" val="0"/>
+              <ma14:wrappingTextBoxFlag xmlns="" xmlns:ma14="http://schemas.microsoft.com/office/mac/drawingml/2011/main" val="0"/>
             </a:ext>
           </a:extLst>
         </p:spPr>
@@ -14113,7 +13746,7 @@
             <a:pPr algn="r"/>
             <a:fld id="{F7021451-1387-4CA6-816F-3879F97B5CBC}" type="slidenum">
               <a:rPr lang="en-US" b="0"/>
-              <a:t>27</a:t>
+              <a:t>26</a:t>
             </a:fld>
             <a:endParaRPr lang="en-US"/>
           </a:p>
@@ -14404,7 +14037,7 @@
         </p:nvSpPr>
         <p:spPr>
           <a:xfrm>
-            <a:off x="5259012" y="3776472"/>
+            <a:off x="5259012" y="2962656"/>
             <a:ext cx="1508760" cy="640080"/>
           </a:xfrm>
           <a:prstGeom prst="rect">
@@ -14440,7 +14073,7 @@
         </p:nvSpPr>
         <p:spPr>
           <a:xfrm>
-            <a:off x="6813492" y="3776472"/>
+            <a:off x="6813492" y="2962656"/>
             <a:ext cx="4826820" cy="640080"/>
           </a:xfrm>
           <a:prstGeom prst="rect">
@@ -14478,7 +14111,7 @@
         </p:nvSpPr>
         <p:spPr>
           <a:xfrm>
-            <a:off x="5259012" y="4562856"/>
+            <a:off x="5259012" y="3749040"/>
             <a:ext cx="1508760" cy="640080"/>
           </a:xfrm>
           <a:prstGeom prst="rect">
@@ -14514,7 +14147,7 @@
         </p:nvSpPr>
         <p:spPr>
           <a:xfrm>
-            <a:off x="6813492" y="4562856"/>
+            <a:off x="6813492" y="3749040"/>
             <a:ext cx="4826820" cy="640080"/>
           </a:xfrm>
           <a:prstGeom prst="rect">
@@ -14552,7 +14185,7 @@
         </p:nvSpPr>
         <p:spPr>
           <a:xfrm>
-            <a:off x="5259012" y="5349240"/>
+            <a:off x="5259012" y="4535424"/>
             <a:ext cx="1508760" cy="640080"/>
           </a:xfrm>
           <a:prstGeom prst="rect">
@@ -14588,7 +14221,7 @@
         </p:nvSpPr>
         <p:spPr>
           <a:xfrm>
-            <a:off x="6813492" y="5349240"/>
+            <a:off x="6813492" y="4535424"/>
             <a:ext cx="4826820" cy="640080"/>
           </a:xfrm>
           <a:prstGeom prst="rect">
@@ -14674,7 +14307,7 @@
           </a:prstGeom>
           <a:extLst>
             <a:ext uri="{C572A759-6A51-4108-AA02-DFA0A04FC94B}">
-              <ma14:wrappingTextBoxFlag xmlns:ma14="http://schemas.microsoft.com/office/mac/drawingml/2011/main" xmlns="" val="0"/>
+              <ma14:wrappingTextBoxFlag xmlns="" xmlns:ma14="http://schemas.microsoft.com/office/mac/drawingml/2011/main" val="0"/>
             </a:ext>
           </a:extLst>
         </p:spPr>
@@ -15412,7 +15045,7 @@
           </a:prstGeom>
           <a:extLst>
             <a:ext uri="{C572A759-6A51-4108-AA02-DFA0A04FC94B}">
-              <ma14:wrappingTextBoxFlag xmlns:ma14="http://schemas.microsoft.com/office/mac/drawingml/2011/main" xmlns="" val="0"/>
+              <ma14:wrappingTextBoxFlag xmlns="" xmlns:ma14="http://schemas.microsoft.com/office/mac/drawingml/2011/main" val="0"/>
             </a:ext>
           </a:extLst>
         </p:spPr>
@@ -15530,7 +15163,10 @@
         </p:spPr>
         <p:txBody>
           <a:bodyPr/>
-          <a:p/>
+          <a:lstStyle/>
+          <a:p>
+            <a:endParaRPr/>
+          </a:p>
         </p:txBody>
       </p:sp>
       <p:sp>
@@ -15559,7 +15195,10 @@
         </p:spPr>
         <p:txBody>
           <a:bodyPr/>
-          <a:p/>
+          <a:lstStyle/>
+          <a:p>
+            <a:endParaRPr/>
+          </a:p>
         </p:txBody>
       </p:sp>
       <p:pic>
@@ -15762,7 +15401,10 @@
         </p:spPr>
         <p:txBody>
           <a:bodyPr/>
-          <a:p/>
+          <a:lstStyle/>
+          <a:p>
+            <a:endParaRPr/>
+          </a:p>
         </p:txBody>
       </p:sp>
       <p:sp>
@@ -15791,7 +15433,10 @@
         </p:spPr>
         <p:txBody>
           <a:bodyPr/>
-          <a:p/>
+          <a:lstStyle/>
+          <a:p>
+            <a:endParaRPr/>
+          </a:p>
         </p:txBody>
       </p:sp>
       <p:pic>
@@ -16040,7 +15685,7 @@
           </a:prstGeom>
           <a:extLst>
             <a:ext uri="{C572A759-6A51-4108-AA02-DFA0A04FC94B}">
-              <ma14:wrappingTextBoxFlag xmlns:ma14="http://schemas.microsoft.com/office/mac/drawingml/2011/main" xmlns="" val="0"/>
+              <ma14:wrappingTextBoxFlag xmlns="" xmlns:ma14="http://schemas.microsoft.com/office/mac/drawingml/2011/main" val="0"/>
             </a:ext>
           </a:extLst>
         </p:spPr>
@@ -16320,7 +15965,7 @@
           </a:prstGeom>
           <a:extLst>
             <a:ext uri="{C572A759-6A51-4108-AA02-DFA0A04FC94B}">
-              <ma14:wrappingTextBoxFlag xmlns:ma14="http://schemas.microsoft.com/office/mac/drawingml/2011/main" xmlns="" val="0"/>
+              <ma14:wrappingTextBoxFlag xmlns="" xmlns:ma14="http://schemas.microsoft.com/office/mac/drawingml/2011/main" val="0"/>
             </a:ext>
           </a:extLst>
         </p:spPr>
@@ -17020,7 +16665,7 @@
           </a:prstGeom>
           <a:extLst>
             <a:ext uri="{C572A759-6A51-4108-AA02-DFA0A04FC94B}">
-              <ma14:wrappingTextBoxFlag xmlns:ma14="http://schemas.microsoft.com/office/mac/drawingml/2011/main" xmlns="" val="0"/>
+              <ma14:wrappingTextBoxFlag xmlns="" xmlns:ma14="http://schemas.microsoft.com/office/mac/drawingml/2011/main" val="0"/>
             </a:ext>
           </a:extLst>
         </p:spPr>
@@ -17877,7 +17522,7 @@
           </a:prstGeom>
           <a:extLst>
             <a:ext uri="{C572A759-6A51-4108-AA02-DFA0A04FC94B}">
-              <ma14:wrappingTextBoxFlag xmlns:ma14="http://schemas.microsoft.com/office/mac/drawingml/2011/main" xmlns="" val="0"/>
+              <ma14:wrappingTextBoxFlag xmlns="" xmlns:ma14="http://schemas.microsoft.com/office/mac/drawingml/2011/main" val="0"/>
             </a:ext>
           </a:extLst>
         </p:spPr>
@@ -18525,7 +18170,7 @@
           </a:prstGeom>
           <a:extLst>
             <a:ext uri="{C572A759-6A51-4108-AA02-DFA0A04FC94B}">
-              <ma14:wrappingTextBoxFlag xmlns:ma14="http://schemas.microsoft.com/office/mac/drawingml/2011/main" xmlns="" val="0"/>
+              <ma14:wrappingTextBoxFlag xmlns="" xmlns:ma14="http://schemas.microsoft.com/office/mac/drawingml/2011/main" val="0"/>
             </a:ext>
           </a:extLst>
         </p:spPr>

--- a/Sunumlar/Makale_Sunumu_Sigara_Birakma.pptx
+++ b/Sunumlar/Makale_Sunumu_Sigara_Birakma.pptx
@@ -9,8 +9,8 @@
   </p:notesMasterIdLst>
   <p:sldIdLst>
     <p:sldId id="256" r:id="rId2"/>
-    <p:sldId id="257" r:id="rId3"/>
-    <p:sldId id="259" r:id="rId4"/>
+    <p:sldId id="284" r:id="rId3"/>
+    <p:sldId id="257" r:id="rId4"/>
     <p:sldId id="260" r:id="rId5"/>
     <p:sldId id="261" r:id="rId6"/>
     <p:sldId id="262" r:id="rId7"/>
@@ -135,8 +135,8 @@
         <p14:section name="Giriş" id="{CBD3B5D9-2F93-2580-60F6-41F54A367A1E}">
           <p14:sldIdLst>
             <p14:sldId id="256"/>
+            <p14:sldId id="284"/>
             <p14:sldId id="257"/>
-            <p14:sldId id="259"/>
             <p14:sldId id="260"/>
             <p14:sldId id="261"/>
             <p14:sldId id="262"/>
@@ -185,282 +185,6 @@
     </p:ext>
   </p:extLst>
 </p:presentation>
-</file>
-
-<file path=ppt/changesInfos/changesInfo1.xml><?xml version="1.0" encoding="utf-8"?>
-<pc:chgInfo xmlns:a="http://schemas.openxmlformats.org/drawingml/2006/main" xmlns:r="http://schemas.openxmlformats.org/officeDocument/2006/relationships" xmlns:ac="http://schemas.microsoft.com/office/drawing/2013/main/command" xmlns:pc="http://schemas.microsoft.com/office/powerpoint/2013/main/command">
-  <pc:docChgLst>
-    <pc:chgData name="Ahmet Kıran" userId="79d1f92f95b4ea5f" providerId="LiveId" clId="{731B8B29-0491-457A-988D-17AFD8C29442}"/>
-    <pc:docChg chg="undo redo custSel delSld modSld modSection">
-      <pc:chgData name="Ahmet Kıran" userId="79d1f92f95b4ea5f" providerId="LiveId" clId="{731B8B29-0491-457A-988D-17AFD8C29442}" dt="2026-10-14T22:18:28.756" v="226" actId="6549"/>
-      <pc:docMkLst>
-        <pc:docMk/>
-      </pc:docMkLst>
-      <pc:sldChg chg="modSp mod">
-        <pc:chgData name="Ahmet Kıran" userId="79d1f92f95b4ea5f" providerId="LiveId" clId="{731B8B29-0491-457A-988D-17AFD8C29442}" dt="2026-10-14T21:46:20.291" v="137" actId="20577"/>
-        <pc:sldMkLst>
-          <pc:docMk/>
-          <pc:sldMk cId="0" sldId="256"/>
-        </pc:sldMkLst>
-        <pc:spChg chg="mod">
-          <ac:chgData name="Ahmet Kıran" userId="79d1f92f95b4ea5f" providerId="LiveId" clId="{731B8B29-0491-457A-988D-17AFD8C29442}" dt="2026-10-14T18:31:35.752" v="134" actId="20577"/>
-          <ac:spMkLst>
-            <pc:docMk/>
-            <pc:sldMk cId="0" sldId="256"/>
-            <ac:spMk id="3" creationId="{00000000-0000-0000-0000-000000000000}"/>
-          </ac:spMkLst>
-        </pc:spChg>
-        <pc:spChg chg="mod">
-          <ac:chgData name="Ahmet Kıran" userId="79d1f92f95b4ea5f" providerId="LiveId" clId="{731B8B29-0491-457A-988D-17AFD8C29442}" dt="2026-10-14T21:46:20.291" v="137" actId="20577"/>
-          <ac:spMkLst>
-            <pc:docMk/>
-            <pc:sldMk cId="0" sldId="256"/>
-            <ac:spMk id="5" creationId="{00000000-0000-0000-0000-000000000000}"/>
-          </ac:spMkLst>
-        </pc:spChg>
-      </pc:sldChg>
-      <pc:sldChg chg="delSp modSp mod modNotesTx">
-        <pc:chgData name="Ahmet Kıran" userId="79d1f92f95b4ea5f" providerId="LiveId" clId="{731B8B29-0491-457A-988D-17AFD8C29442}" dt="2026-10-14T22:15:37.093" v="221" actId="20577"/>
-        <pc:sldMkLst>
-          <pc:docMk/>
-          <pc:sldMk cId="0" sldId="257"/>
-        </pc:sldMkLst>
-        <pc:spChg chg="del">
-          <ac:chgData name="Ahmet Kıran" userId="79d1f92f95b4ea5f" providerId="LiveId" clId="{731B8B29-0491-457A-988D-17AFD8C29442}" dt="2026-10-14T22:15:12.732" v="153" actId="478"/>
-          <ac:spMkLst>
-            <pc:docMk/>
-            <pc:sldMk cId="0" sldId="257"/>
-            <ac:spMk id="24" creationId="{00000000-0000-0000-0000-000000000000}"/>
-          </ac:spMkLst>
-        </pc:spChg>
-        <pc:spChg chg="del">
-          <ac:chgData name="Ahmet Kıran" userId="79d1f92f95b4ea5f" providerId="LiveId" clId="{731B8B29-0491-457A-988D-17AFD8C29442}" dt="2026-10-14T22:15:19.318" v="156" actId="478"/>
-          <ac:spMkLst>
-            <pc:docMk/>
-            <pc:sldMk cId="0" sldId="257"/>
-            <ac:spMk id="25" creationId="{00000000-0000-0000-0000-000000000000}"/>
-          </ac:spMkLst>
-        </pc:spChg>
-        <pc:spChg chg="del">
-          <ac:chgData name="Ahmet Kıran" userId="79d1f92f95b4ea5f" providerId="LiveId" clId="{731B8B29-0491-457A-988D-17AFD8C29442}" dt="2026-10-14T22:15:17.319" v="155" actId="478"/>
-          <ac:spMkLst>
-            <pc:docMk/>
-            <pc:sldMk cId="0" sldId="257"/>
-            <ac:spMk id="26" creationId="{00000000-0000-0000-0000-000000000000}"/>
-          </ac:spMkLst>
-        </pc:spChg>
-        <pc:spChg chg="del mod">
-          <ac:chgData name="Ahmet Kıran" userId="79d1f92f95b4ea5f" providerId="LiveId" clId="{731B8B29-0491-457A-988D-17AFD8C29442}" dt="2026-10-14T22:15:15.211" v="154" actId="478"/>
-          <ac:spMkLst>
-            <pc:docMk/>
-            <pc:sldMk cId="0" sldId="257"/>
-            <ac:spMk id="27" creationId="{00000000-0000-0000-0000-000000000000}"/>
-          </ac:spMkLst>
-        </pc:spChg>
-      </pc:sldChg>
-      <pc:sldChg chg="addSp delSp del mod">
-        <pc:chgData name="Ahmet Kıran" userId="79d1f92f95b4ea5f" providerId="LiveId" clId="{731B8B29-0491-457A-988D-17AFD8C29442}" dt="2026-10-14T18:35:30.027" v="135" actId="2696"/>
-        <pc:sldMkLst>
-          <pc:docMk/>
-          <pc:sldMk cId="0" sldId="258"/>
-        </pc:sldMkLst>
-        <pc:spChg chg="del">
-          <ac:chgData name="Ahmet Kıran" userId="79d1f92f95b4ea5f" providerId="LiveId" clId="{731B8B29-0491-457A-988D-17AFD8C29442}" dt="2026-10-14T18:05:01.802" v="101" actId="478"/>
-          <ac:spMkLst>
-            <pc:docMk/>
-            <pc:sldMk cId="0" sldId="258"/>
-            <ac:spMk id="12" creationId="{00000000-0000-0000-0000-000000000000}"/>
-          </ac:spMkLst>
-        </pc:spChg>
-        <pc:spChg chg="del">
-          <ac:chgData name="Ahmet Kıran" userId="79d1f92f95b4ea5f" providerId="LiveId" clId="{731B8B29-0491-457A-988D-17AFD8C29442}" dt="2026-10-14T18:05:05.042" v="102" actId="478"/>
-          <ac:spMkLst>
-            <pc:docMk/>
-            <pc:sldMk cId="0" sldId="258"/>
-            <ac:spMk id="14" creationId="{00000000-0000-0000-0000-000000000000}"/>
-          </ac:spMkLst>
-        </pc:spChg>
-        <pc:spChg chg="add del">
-          <ac:chgData name="Ahmet Kıran" userId="79d1f92f95b4ea5f" providerId="LiveId" clId="{731B8B29-0491-457A-988D-17AFD8C29442}" dt="2026-10-14T18:28:00.627" v="124" actId="478"/>
-          <ac:spMkLst>
-            <pc:docMk/>
-            <pc:sldMk cId="0" sldId="258"/>
-            <ac:spMk id="15" creationId="{00000000-0000-0000-0000-000000000000}"/>
-          </ac:spMkLst>
-        </pc:spChg>
-        <pc:picChg chg="del">
-          <ac:chgData name="Ahmet Kıran" userId="79d1f92f95b4ea5f" providerId="LiveId" clId="{731B8B29-0491-457A-988D-17AFD8C29442}" dt="2026-10-14T18:04:59.822" v="100" actId="478"/>
-          <ac:picMkLst>
-            <pc:docMk/>
-            <pc:sldMk cId="0" sldId="258"/>
-            <ac:picMk id="13" creationId="{00000000-0000-0000-0000-000000000000}"/>
-          </ac:picMkLst>
-        </pc:picChg>
-      </pc:sldChg>
-      <pc:sldChg chg="addSp delSp modSp mod">
-        <pc:chgData name="Ahmet Kıran" userId="79d1f92f95b4ea5f" providerId="LiveId" clId="{731B8B29-0491-457A-988D-17AFD8C29442}" dt="2026-10-14T22:16:27.902" v="224" actId="1076"/>
-        <pc:sldMkLst>
-          <pc:docMk/>
-          <pc:sldMk cId="0" sldId="259"/>
-        </pc:sldMkLst>
-        <pc:spChg chg="mod">
-          <ac:chgData name="Ahmet Kıran" userId="79d1f92f95b4ea5f" providerId="LiveId" clId="{731B8B29-0491-457A-988D-17AFD8C29442}" dt="2026-10-14T18:27:54.157" v="122"/>
-          <ac:spMkLst>
-            <pc:docMk/>
-            <pc:sldMk cId="0" sldId="259"/>
-            <ac:spMk id="7" creationId="{00000000-0000-0000-0000-000000000000}"/>
-          </ac:spMkLst>
-        </pc:spChg>
-        <pc:spChg chg="add del">
-          <ac:chgData name="Ahmet Kıran" userId="79d1f92f95b4ea5f" providerId="LiveId" clId="{731B8B29-0491-457A-988D-17AFD8C29442}" dt="2026-10-14T18:28:07.667" v="125" actId="478"/>
-          <ac:spMkLst>
-            <pc:docMk/>
-            <pc:sldMk cId="0" sldId="259"/>
-            <ac:spMk id="10" creationId="{00000000-0000-0000-0000-000000000000}"/>
-          </ac:spMkLst>
-        </pc:spChg>
-        <pc:spChg chg="add del">
-          <ac:chgData name="Ahmet Kıran" userId="79d1f92f95b4ea5f" providerId="LiveId" clId="{731B8B29-0491-457A-988D-17AFD8C29442}" dt="2026-10-14T18:28:10.708" v="126" actId="478"/>
-          <ac:spMkLst>
-            <pc:docMk/>
-            <pc:sldMk cId="0" sldId="259"/>
-            <ac:spMk id="11" creationId="{00000000-0000-0000-0000-000000000000}"/>
-          </ac:spMkLst>
-        </pc:spChg>
-        <pc:spChg chg="mod">
-          <ac:chgData name="Ahmet Kıran" userId="79d1f92f95b4ea5f" providerId="LiveId" clId="{731B8B29-0491-457A-988D-17AFD8C29442}" dt="2026-10-14T22:16:27.902" v="224" actId="1076"/>
-          <ac:spMkLst>
-            <pc:docMk/>
-            <pc:sldMk cId="0" sldId="259"/>
-            <ac:spMk id="12" creationId="{00000000-0000-0000-0000-000000000000}"/>
-          </ac:spMkLst>
-        </pc:spChg>
-        <pc:spChg chg="mod">
-          <ac:chgData name="Ahmet Kıran" userId="79d1f92f95b4ea5f" providerId="LiveId" clId="{731B8B29-0491-457A-988D-17AFD8C29442}" dt="2026-10-14T22:16:27.902" v="224" actId="1076"/>
-          <ac:spMkLst>
-            <pc:docMk/>
-            <pc:sldMk cId="0" sldId="259"/>
-            <ac:spMk id="13" creationId="{00000000-0000-0000-0000-000000000000}"/>
-          </ac:spMkLst>
-        </pc:spChg>
-        <pc:spChg chg="mod">
-          <ac:chgData name="Ahmet Kıran" userId="79d1f92f95b4ea5f" providerId="LiveId" clId="{731B8B29-0491-457A-988D-17AFD8C29442}" dt="2026-10-14T22:16:27.902" v="224" actId="1076"/>
-          <ac:spMkLst>
-            <pc:docMk/>
-            <pc:sldMk cId="0" sldId="259"/>
-            <ac:spMk id="14" creationId="{00000000-0000-0000-0000-000000000000}"/>
-          </ac:spMkLst>
-        </pc:spChg>
-        <pc:spChg chg="mod">
-          <ac:chgData name="Ahmet Kıran" userId="79d1f92f95b4ea5f" providerId="LiveId" clId="{731B8B29-0491-457A-988D-17AFD8C29442}" dt="2026-10-14T22:16:27.902" v="224" actId="1076"/>
-          <ac:spMkLst>
-            <pc:docMk/>
-            <pc:sldMk cId="0" sldId="259"/>
-            <ac:spMk id="15" creationId="{00000000-0000-0000-0000-000000000000}"/>
-          </ac:spMkLst>
-        </pc:spChg>
-        <pc:spChg chg="mod">
-          <ac:chgData name="Ahmet Kıran" userId="79d1f92f95b4ea5f" providerId="LiveId" clId="{731B8B29-0491-457A-988D-17AFD8C29442}" dt="2026-10-14T22:16:27.902" v="224" actId="1076"/>
-          <ac:spMkLst>
-            <pc:docMk/>
-            <pc:sldMk cId="0" sldId="259"/>
-            <ac:spMk id="16" creationId="{00000000-0000-0000-0000-000000000000}"/>
-          </ac:spMkLst>
-        </pc:spChg>
-        <pc:spChg chg="mod">
-          <ac:chgData name="Ahmet Kıran" userId="79d1f92f95b4ea5f" providerId="LiveId" clId="{731B8B29-0491-457A-988D-17AFD8C29442}" dt="2026-10-14T22:16:27.902" v="224" actId="1076"/>
-          <ac:spMkLst>
-            <pc:docMk/>
-            <pc:sldMk cId="0" sldId="259"/>
-            <ac:spMk id="17" creationId="{00000000-0000-0000-0000-000000000000}"/>
-          </ac:spMkLst>
-        </pc:spChg>
-      </pc:sldChg>
-      <pc:sldChg chg="modSp mod">
-        <pc:chgData name="Ahmet Kıran" userId="79d1f92f95b4ea5f" providerId="LiveId" clId="{731B8B29-0491-457A-988D-17AFD8C29442}" dt="2026-10-14T19:04:15.953" v="136" actId="6549"/>
-        <pc:sldMkLst>
-          <pc:docMk/>
-          <pc:sldMk cId="0" sldId="261"/>
-        </pc:sldMkLst>
-        <pc:spChg chg="mod">
-          <ac:chgData name="Ahmet Kıran" userId="79d1f92f95b4ea5f" providerId="LiveId" clId="{731B8B29-0491-457A-988D-17AFD8C29442}" dt="2026-10-14T19:04:15.953" v="136" actId="6549"/>
-          <ac:spMkLst>
-            <pc:docMk/>
-            <pc:sldMk cId="0" sldId="261"/>
-            <ac:spMk id="13" creationId="{00000000-0000-0000-0000-000000000000}"/>
-          </ac:spMkLst>
-        </pc:spChg>
-      </pc:sldChg>
-      <pc:sldChg chg="modSp mod">
-        <pc:chgData name="Ahmet Kıran" userId="79d1f92f95b4ea5f" providerId="LiveId" clId="{731B8B29-0491-457A-988D-17AFD8C29442}" dt="2026-10-13T18:42:58.784" v="8" actId="1036"/>
-        <pc:sldMkLst>
-          <pc:docMk/>
-          <pc:sldMk cId="0" sldId="274"/>
-        </pc:sldMkLst>
-        <pc:spChg chg="mod">
-          <ac:chgData name="Ahmet Kıran" userId="79d1f92f95b4ea5f" providerId="LiveId" clId="{731B8B29-0491-457A-988D-17AFD8C29442}" dt="2026-10-13T18:42:41.582" v="7" actId="20577"/>
-          <ac:spMkLst>
-            <pc:docMk/>
-            <pc:sldMk cId="0" sldId="274"/>
-            <ac:spMk id="7" creationId="{00000000-0000-0000-0000-000000000000}"/>
-          </ac:spMkLst>
-        </pc:spChg>
-        <pc:spChg chg="mod">
-          <ac:chgData name="Ahmet Kıran" userId="79d1f92f95b4ea5f" providerId="LiveId" clId="{731B8B29-0491-457A-988D-17AFD8C29442}" dt="2026-10-13T18:42:58.784" v="8" actId="1036"/>
-          <ac:spMkLst>
-            <pc:docMk/>
-            <pc:sldMk cId="0" sldId="274"/>
-            <ac:spMk id="9" creationId="{00000000-0000-0000-0000-000000000000}"/>
-          </ac:spMkLst>
-        </pc:spChg>
-      </pc:sldChg>
-      <pc:sldChg chg="modSp mod">
-        <pc:chgData name="Ahmet Kıran" userId="79d1f92f95b4ea5f" providerId="LiveId" clId="{731B8B29-0491-457A-988D-17AFD8C29442}" dt="2026-10-14T22:09:47.944" v="138" actId="1036"/>
-        <pc:sldMkLst>
-          <pc:docMk/>
-          <pc:sldMk cId="0" sldId="277"/>
-        </pc:sldMkLst>
-        <pc:spChg chg="mod">
-          <ac:chgData name="Ahmet Kıran" userId="79d1f92f95b4ea5f" providerId="LiveId" clId="{731B8B29-0491-457A-988D-17AFD8C29442}" dt="2026-10-14T22:09:47.944" v="138" actId="1036"/>
-          <ac:spMkLst>
-            <pc:docMk/>
-            <pc:sldMk cId="0" sldId="277"/>
-            <ac:spMk id="20" creationId="{00000000-0000-0000-0000-000000000000}"/>
-          </ac:spMkLst>
-        </pc:spChg>
-      </pc:sldChg>
-      <pc:sldChg chg="del">
-        <pc:chgData name="Ahmet Kıran" userId="79d1f92f95b4ea5f" providerId="LiveId" clId="{731B8B29-0491-457A-988D-17AFD8C29442}" dt="2026-10-14T22:11:10.644" v="139" actId="2696"/>
-        <pc:sldMkLst>
-          <pc:docMk/>
-          <pc:sldMk cId="0" sldId="280"/>
-        </pc:sldMkLst>
-      </pc:sldChg>
-      <pc:sldChg chg="modNotesTx">
-        <pc:chgData name="Ahmet Kıran" userId="79d1f92f95b4ea5f" providerId="LiveId" clId="{731B8B29-0491-457A-988D-17AFD8C29442}" dt="2026-10-14T22:18:28.756" v="226" actId="6549"/>
-        <pc:sldMkLst>
-          <pc:docMk/>
-          <pc:sldMk cId="0" sldId="282"/>
-        </pc:sldMkLst>
-      </pc:sldChg>
-      <pc:sldChg chg="modSp mod modNotesTx">
-        <pc:chgData name="Ahmet Kıran" userId="79d1f92f95b4ea5f" providerId="LiveId" clId="{731B8B29-0491-457A-988D-17AFD8C29442}" dt="2026-10-14T22:18:13.900" v="225" actId="6549"/>
-        <pc:sldMkLst>
-          <pc:docMk/>
-          <pc:sldMk cId="0" sldId="283"/>
-        </pc:sldMkLst>
-        <pc:spChg chg="mod">
-          <ac:chgData name="Ahmet Kıran" userId="79d1f92f95b4ea5f" providerId="LiveId" clId="{731B8B29-0491-457A-988D-17AFD8C29442}" dt="2026-10-14T22:11:28.430" v="140" actId="6549"/>
-          <ac:spMkLst>
-            <pc:docMk/>
-            <pc:sldMk cId="0" sldId="283"/>
-            <ac:spMk id="4" creationId="{00000000-0000-0000-0000-000000000000}"/>
-          </ac:spMkLst>
-        </pc:spChg>
-      </pc:sldChg>
-    </pc:docChg>
-  </pc:docChgLst>
-</pc:chgInfo>
 </file>
 
 <file path=ppt/notesMasters/notesMaster1.xml><?xml version="1.0" encoding="utf-8"?>
@@ -633,12 +357,286 @@
           <a:lstStyle/>
           <a:p>
             <a:r>
-              <a:t>Günaydın hocalarım, değerli arkadaşlarım. Ben Asistan Dr. Ahmet Kıran.</a:t>
-            </a:r>
-          </a:p>
-          <a:p>
-            <a:r>
-              <a:t>Bugün sizlere Turkish Journal of Family Practice dergisinin 2026 yılı 30. cilt 2. sayısında yayımlanan, Uzm. Dr. Emre Cenberlitaş ve hocalarımızdan Aksanur ve Onur hocamızın “Bir üniversite hastanesine bağlı sigara bırakma polikliniğine başvuran hastaların demografik ve klinik özellikleri ile sigara bırakma durumlarını etkileyen faktörler” başlıklı makalesini sunacağım.</a:t>
+              <a:rPr lang="tr-TR" dirty="0"/>
+              <a:t>değerli</a:t>
+            </a:r>
+            <a:r>
+              <a:rPr dirty="0"/>
+              <a:t> </a:t>
+            </a:r>
+            <a:r>
+              <a:rPr dirty="0" err="1"/>
+              <a:t>hocalarım</a:t>
+            </a:r>
+            <a:r>
+              <a:rPr dirty="0"/>
+              <a:t>, </a:t>
+            </a:r>
+            <a:r>
+              <a:rPr dirty="0" err="1"/>
+              <a:t>değerli</a:t>
+            </a:r>
+            <a:r>
+              <a:rPr dirty="0"/>
+              <a:t> </a:t>
+            </a:r>
+            <a:r>
+              <a:rPr dirty="0" err="1"/>
+              <a:t>arkadaşlarım</a:t>
+            </a:r>
+            <a:r>
+              <a:rPr dirty="0"/>
+              <a:t>. Ben </a:t>
+            </a:r>
+            <a:r>
+              <a:rPr dirty="0" err="1"/>
+              <a:t>Asistan</a:t>
+            </a:r>
+            <a:r>
+              <a:rPr dirty="0"/>
+              <a:t> Dr. Ahmet Kıran.</a:t>
+            </a:r>
+          </a:p>
+          <a:p>
+            <a:r>
+              <a:rPr dirty="0" err="1"/>
+              <a:t>Bugün</a:t>
+            </a:r>
+            <a:r>
+              <a:rPr dirty="0"/>
+              <a:t> </a:t>
+            </a:r>
+            <a:r>
+              <a:rPr dirty="0" err="1"/>
+              <a:t>sizlere</a:t>
+            </a:r>
+            <a:r>
+              <a:rPr dirty="0"/>
+              <a:t> </a:t>
+            </a:r>
+            <a:r>
+              <a:rPr dirty="0" err="1"/>
+              <a:t>Uzm</a:t>
+            </a:r>
+            <a:r>
+              <a:rPr dirty="0"/>
+              <a:t>. Dr. Emre </a:t>
+            </a:r>
+            <a:r>
+              <a:rPr dirty="0" err="1"/>
+              <a:t>Cenberlitaş</a:t>
+            </a:r>
+            <a:r>
+              <a:rPr dirty="0"/>
+              <a:t> </a:t>
+            </a:r>
+            <a:r>
+              <a:rPr dirty="0" err="1"/>
+              <a:t>ve</a:t>
+            </a:r>
+            <a:r>
+              <a:rPr dirty="0"/>
+              <a:t> </a:t>
+            </a:r>
+            <a:r>
+              <a:rPr dirty="0" err="1"/>
+              <a:t>hocalarımızdan</a:t>
+            </a:r>
+            <a:r>
+              <a:rPr dirty="0"/>
+              <a:t> </a:t>
+            </a:r>
+            <a:r>
+              <a:rPr dirty="0" err="1"/>
+              <a:t>Aksanur</a:t>
+            </a:r>
+            <a:r>
+              <a:rPr dirty="0"/>
+              <a:t> </a:t>
+            </a:r>
+            <a:r>
+              <a:rPr dirty="0" err="1"/>
+              <a:t>ve</a:t>
+            </a:r>
+            <a:r>
+              <a:rPr dirty="0"/>
+              <a:t> Onur </a:t>
+            </a:r>
+            <a:r>
+              <a:rPr dirty="0" err="1"/>
+              <a:t>hocamızın</a:t>
+            </a:r>
+            <a:r>
+              <a:rPr dirty="0"/>
+              <a:t> “Bir </a:t>
+            </a:r>
+            <a:r>
+              <a:rPr dirty="0" err="1"/>
+              <a:t>üniversite</a:t>
+            </a:r>
+            <a:r>
+              <a:rPr dirty="0"/>
+              <a:t> </a:t>
+            </a:r>
+            <a:r>
+              <a:rPr dirty="0" err="1"/>
+              <a:t>hastanesine</a:t>
+            </a:r>
+            <a:r>
+              <a:rPr dirty="0"/>
+              <a:t> </a:t>
+            </a:r>
+            <a:r>
+              <a:rPr dirty="0" err="1"/>
+              <a:t>bağlı</a:t>
+            </a:r>
+            <a:r>
+              <a:rPr dirty="0"/>
+              <a:t> </a:t>
+            </a:r>
+            <a:r>
+              <a:rPr dirty="0" err="1"/>
+              <a:t>sigara</a:t>
+            </a:r>
+            <a:r>
+              <a:rPr dirty="0"/>
+              <a:t> </a:t>
+            </a:r>
+            <a:r>
+              <a:rPr dirty="0" err="1"/>
+              <a:t>bırakma</a:t>
+            </a:r>
+            <a:r>
+              <a:rPr dirty="0"/>
+              <a:t> </a:t>
+            </a:r>
+            <a:r>
+              <a:rPr dirty="0" err="1"/>
+              <a:t>polikliniğine</a:t>
+            </a:r>
+            <a:r>
+              <a:rPr dirty="0"/>
+              <a:t> </a:t>
+            </a:r>
+            <a:r>
+              <a:rPr dirty="0" err="1"/>
+              <a:t>başvuran</a:t>
+            </a:r>
+            <a:r>
+              <a:rPr dirty="0"/>
+              <a:t> </a:t>
+            </a:r>
+            <a:r>
+              <a:rPr dirty="0" err="1"/>
+              <a:t>hastaların</a:t>
+            </a:r>
+            <a:r>
+              <a:rPr dirty="0"/>
+              <a:t> </a:t>
+            </a:r>
+            <a:r>
+              <a:rPr dirty="0" err="1"/>
+              <a:t>demografik</a:t>
+            </a:r>
+            <a:r>
+              <a:rPr dirty="0"/>
+              <a:t> </a:t>
+            </a:r>
+            <a:r>
+              <a:rPr dirty="0" err="1"/>
+              <a:t>ve</a:t>
+            </a:r>
+            <a:r>
+              <a:rPr dirty="0"/>
+              <a:t> </a:t>
+            </a:r>
+            <a:r>
+              <a:rPr dirty="0" err="1"/>
+              <a:t>klinik</a:t>
+            </a:r>
+            <a:r>
+              <a:rPr dirty="0"/>
+              <a:t> </a:t>
+            </a:r>
+            <a:r>
+              <a:rPr dirty="0" err="1"/>
+              <a:t>özellikleri</a:t>
+            </a:r>
+            <a:r>
+              <a:rPr dirty="0"/>
+              <a:t> </a:t>
+            </a:r>
+            <a:r>
+              <a:rPr dirty="0" err="1"/>
+              <a:t>ile</a:t>
+            </a:r>
+            <a:r>
+              <a:rPr dirty="0"/>
+              <a:t> </a:t>
+            </a:r>
+            <a:r>
+              <a:rPr dirty="0" err="1"/>
+              <a:t>sigara</a:t>
+            </a:r>
+            <a:r>
+              <a:rPr dirty="0"/>
+              <a:t> </a:t>
+            </a:r>
+            <a:r>
+              <a:rPr dirty="0" err="1"/>
+              <a:t>bırakma</a:t>
+            </a:r>
+            <a:r>
+              <a:rPr dirty="0"/>
+              <a:t> </a:t>
+            </a:r>
+            <a:r>
+              <a:rPr dirty="0" err="1"/>
+              <a:t>durumlarını</a:t>
+            </a:r>
+            <a:r>
+              <a:rPr dirty="0"/>
+              <a:t> </a:t>
+            </a:r>
+            <a:r>
+              <a:rPr dirty="0" err="1"/>
+              <a:t>etkileyen</a:t>
+            </a:r>
+            <a:r>
+              <a:rPr dirty="0"/>
+              <a:t> </a:t>
+            </a:r>
+            <a:r>
+              <a:rPr dirty="0" err="1"/>
+              <a:t>faktörler</a:t>
+            </a:r>
+            <a:r>
+              <a:rPr dirty="0"/>
+              <a:t>” </a:t>
+            </a:r>
+            <a:r>
+              <a:rPr dirty="0" err="1"/>
+              <a:t>başlıklı</a:t>
+            </a:r>
+            <a:r>
+              <a:rPr dirty="0"/>
+              <a:t> </a:t>
+            </a:r>
+            <a:r>
+              <a:rPr dirty="0" err="1"/>
+              <a:t>makalesini</a:t>
+            </a:r>
+            <a:r>
+              <a:rPr dirty="0"/>
+              <a:t> </a:t>
+            </a:r>
+            <a:r>
+              <a:rPr dirty="0" err="1"/>
+              <a:t>sunacağım</a:t>
+            </a:r>
+            <a:r>
+              <a:rPr dirty="0"/>
+              <a:t>.</a:t>
             </a:r>
           </a:p>
         </p:txBody>
@@ -820,12 +818,278 @@
           <a:lstStyle/>
           <a:p>
             <a:r>
-              <a:t>Bulgulara geçiyorum. Analize 399 hasta alınmıştır. Yaş ortalaması 44,7 yıldır ve hastaların yüzde 63,7'si erkektir.</a:t>
-            </a:r>
-          </a:p>
-          <a:p>
-            <a:r>
-              <a:t>Ortalama FNBT puanı 5,66, ortalama tüketim 27,4 paket-yıl, hasta başına ortalama görüşme sayısı 2,21'dir. Hastaların yüzde 34,1'i, yani yaklaşık üçte biri sigarayı bırakmıştır.</a:t>
+              <a:rPr dirty="0" err="1"/>
+              <a:t>Bulgulara</a:t>
+            </a:r>
+            <a:r>
+              <a:rPr dirty="0"/>
+              <a:t> </a:t>
+            </a:r>
+            <a:r>
+              <a:rPr dirty="0" err="1"/>
+              <a:t>geçiyorum</a:t>
+            </a:r>
+            <a:r>
+              <a:rPr dirty="0"/>
+              <a:t>. Analize 399 hasta </a:t>
+            </a:r>
+            <a:r>
+              <a:rPr dirty="0" err="1"/>
+              <a:t>alınmıştır</a:t>
+            </a:r>
+            <a:r>
+              <a:rPr dirty="0"/>
+              <a:t>. </a:t>
+            </a:r>
+            <a:r>
+              <a:rPr dirty="0" err="1"/>
+              <a:t>Yaş</a:t>
+            </a:r>
+            <a:r>
+              <a:rPr dirty="0"/>
+              <a:t> </a:t>
+            </a:r>
+            <a:r>
+              <a:rPr dirty="0" err="1"/>
+              <a:t>ortalaması</a:t>
+            </a:r>
+            <a:r>
+              <a:rPr dirty="0"/>
+              <a:t> 44,</a:t>
+            </a:r>
+            <a:r>
+              <a:rPr lang="tr-TR" dirty="0"/>
+              <a:t>69</a:t>
+            </a:r>
+            <a:r>
+              <a:rPr dirty="0"/>
+              <a:t> </a:t>
+            </a:r>
+            <a:r>
+              <a:rPr dirty="0" err="1"/>
+              <a:t>yıldır</a:t>
+            </a:r>
+            <a:r>
+              <a:rPr dirty="0"/>
+              <a:t> </a:t>
+            </a:r>
+            <a:r>
+              <a:rPr dirty="0" err="1"/>
+              <a:t>ve</a:t>
+            </a:r>
+            <a:r>
+              <a:rPr dirty="0"/>
+              <a:t> </a:t>
+            </a:r>
+            <a:r>
+              <a:rPr dirty="0" err="1"/>
+              <a:t>hastaların</a:t>
+            </a:r>
+            <a:r>
+              <a:rPr dirty="0"/>
+              <a:t> </a:t>
+            </a:r>
+            <a:r>
+              <a:rPr dirty="0" err="1"/>
+              <a:t>yüzde</a:t>
+            </a:r>
+            <a:r>
+              <a:rPr dirty="0"/>
+              <a:t> 63,</a:t>
+            </a:r>
+            <a:r>
+              <a:rPr lang="tr-TR" dirty="0"/>
+              <a:t>66</a:t>
+            </a:r>
+            <a:r>
+              <a:rPr dirty="0"/>
+              <a:t>'</a:t>
+            </a:r>
+            <a:r>
+              <a:rPr dirty="0" err="1"/>
+              <a:t>si</a:t>
+            </a:r>
+            <a:r>
+              <a:rPr dirty="0"/>
+              <a:t> </a:t>
+            </a:r>
+            <a:r>
+              <a:rPr dirty="0" err="1"/>
+              <a:t>erkektir</a:t>
+            </a:r>
+            <a:r>
+              <a:rPr dirty="0"/>
+              <a:t>.</a:t>
+            </a:r>
+          </a:p>
+          <a:p>
+            <a:r>
+              <a:rPr dirty="0" err="1"/>
+              <a:t>Ortalama</a:t>
+            </a:r>
+            <a:r>
+              <a:rPr dirty="0"/>
+              <a:t> FNBT</a:t>
+            </a:r>
+            <a:r>
+              <a:rPr lang="tr-TR" dirty="0"/>
+              <a:t> (</a:t>
+            </a:r>
+            <a:r>
+              <a:rPr lang="tr-TR" dirty="0" err="1"/>
+              <a:t>Fagerström</a:t>
+            </a:r>
+            <a:r>
+              <a:rPr lang="tr-TR" dirty="0"/>
+              <a:t> Nikotin Bağımlılık Testi )</a:t>
+            </a:r>
+            <a:r>
+              <a:rPr dirty="0"/>
+              <a:t> </a:t>
+            </a:r>
+            <a:r>
+              <a:rPr dirty="0" err="1"/>
+              <a:t>puanı</a:t>
+            </a:r>
+            <a:r>
+              <a:rPr dirty="0"/>
+              <a:t> 5,66, </a:t>
+            </a:r>
+            <a:r>
+              <a:rPr dirty="0" err="1"/>
+              <a:t>ortalama</a:t>
+            </a:r>
+            <a:r>
+              <a:rPr dirty="0"/>
+              <a:t> </a:t>
+            </a:r>
+            <a:r>
+              <a:rPr dirty="0" err="1"/>
+              <a:t>tüketim</a:t>
+            </a:r>
+            <a:r>
+              <a:rPr dirty="0"/>
+              <a:t> 27,</a:t>
+            </a:r>
+            <a:r>
+              <a:rPr lang="tr-TR" dirty="0"/>
+              <a:t>38</a:t>
+            </a:r>
+            <a:r>
+              <a:rPr dirty="0"/>
+              <a:t> </a:t>
+            </a:r>
+            <a:r>
+              <a:rPr dirty="0" err="1"/>
+              <a:t>paket-yıl</a:t>
+            </a:r>
+            <a:r>
+              <a:rPr dirty="0"/>
+              <a:t>, hasta </a:t>
+            </a:r>
+            <a:r>
+              <a:rPr dirty="0" err="1"/>
+              <a:t>başına</a:t>
+            </a:r>
+            <a:r>
+              <a:rPr dirty="0"/>
+              <a:t> </a:t>
+            </a:r>
+            <a:r>
+              <a:rPr dirty="0" err="1"/>
+              <a:t>ortalama</a:t>
+            </a:r>
+            <a:r>
+              <a:rPr dirty="0"/>
+              <a:t> </a:t>
+            </a:r>
+            <a:r>
+              <a:rPr dirty="0" err="1"/>
+              <a:t>görüşme</a:t>
+            </a:r>
+            <a:r>
+              <a:rPr dirty="0"/>
+              <a:t> </a:t>
+            </a:r>
+            <a:r>
+              <a:rPr dirty="0" err="1"/>
+              <a:t>sayısı</a:t>
+            </a:r>
+            <a:r>
+              <a:rPr dirty="0"/>
+              <a:t> 2,21'dir. </a:t>
+            </a:r>
+            <a:r>
+              <a:rPr dirty="0" err="1"/>
+              <a:t>Hastaların</a:t>
+            </a:r>
+            <a:r>
+              <a:rPr dirty="0"/>
+              <a:t> </a:t>
+            </a:r>
+            <a:r>
+              <a:rPr dirty="0" err="1"/>
+              <a:t>yüzde</a:t>
+            </a:r>
+            <a:r>
+              <a:rPr dirty="0"/>
+              <a:t> 34,</a:t>
+            </a:r>
+            <a:r>
+              <a:rPr lang="tr-TR" dirty="0"/>
+              <a:t>0,9u</a:t>
+            </a:r>
+            <a:r>
+              <a:rPr dirty="0"/>
+              <a:t>, </a:t>
+            </a:r>
+            <a:r>
+              <a:rPr dirty="0" err="1"/>
+              <a:t>yani</a:t>
+            </a:r>
+            <a:r>
+              <a:rPr dirty="0"/>
+              <a:t> </a:t>
+            </a:r>
+            <a:r>
+              <a:rPr dirty="0" err="1"/>
+              <a:t>yaklaşık</a:t>
+            </a:r>
+            <a:r>
+              <a:rPr dirty="0"/>
+              <a:t> </a:t>
+            </a:r>
+            <a:r>
+              <a:rPr dirty="0" err="1"/>
+              <a:t>üçte</a:t>
+            </a:r>
+            <a:r>
+              <a:rPr dirty="0"/>
+              <a:t> </a:t>
+            </a:r>
+            <a:r>
+              <a:rPr dirty="0" err="1"/>
+              <a:t>biri</a:t>
+            </a:r>
+            <a:r>
+              <a:rPr dirty="0"/>
+              <a:t> </a:t>
+            </a:r>
+            <a:r>
+              <a:rPr dirty="0" err="1"/>
+              <a:t>sigarayı</a:t>
+            </a:r>
+            <a:r>
+              <a:rPr dirty="0"/>
+              <a:t> </a:t>
+            </a:r>
+            <a:r>
+              <a:rPr dirty="0" err="1"/>
+              <a:t>bırakmıştır</a:t>
+            </a:r>
+            <a:r>
+              <a:rPr dirty="0"/>
+              <a:t>.</a:t>
             </a:r>
           </a:p>
         </p:txBody>
@@ -911,12 +1175,370 @@
           <a:lstStyle/>
           <a:p>
             <a:r>
-              <a:t>FNBT puanlarına göre hastaların yüzde 13,2'si düşük, yüzde 61,3'ü orta, yüzde 25,5'i yüksek bağımlılık düzeyindedir.</a:t>
-            </a:r>
-          </a:p>
-          <a:p>
-            <a:r>
-              <a:t>Hastaların yüzde 75,7'si daha önce sigarayı bırakmayı denemiş ve bunların yaklaşık yarısı bu denemede profesyonel destek almıştır. Yüzde 7,2'si sigara dışında elektronik sigara, nargile veya puro gibi tütün ürünleri kullanmaktadır.</a:t>
+              <a:rPr dirty="0"/>
+              <a:t>FNBT</a:t>
+            </a:r>
+            <a:r>
+              <a:rPr lang="tr-TR" dirty="0"/>
+              <a:t>(</a:t>
+            </a:r>
+            <a:r>
+              <a:rPr lang="tr-TR" dirty="0" err="1"/>
+              <a:t>Fagerström</a:t>
+            </a:r>
+            <a:r>
+              <a:rPr lang="tr-TR" dirty="0"/>
+              <a:t> Nikotin Bağımlılık Testi )</a:t>
+            </a:r>
+            <a:r>
+              <a:rPr dirty="0"/>
+              <a:t> </a:t>
+            </a:r>
+            <a:r>
+              <a:rPr dirty="0" err="1"/>
+              <a:t>puanlarına</a:t>
+            </a:r>
+            <a:r>
+              <a:rPr dirty="0"/>
+              <a:t> </a:t>
+            </a:r>
+            <a:r>
+              <a:rPr dirty="0" err="1"/>
+              <a:t>göre</a:t>
+            </a:r>
+            <a:r>
+              <a:rPr dirty="0"/>
+              <a:t> </a:t>
+            </a:r>
+            <a:r>
+              <a:rPr dirty="0" err="1"/>
+              <a:t>hastaların</a:t>
+            </a:r>
+            <a:r>
+              <a:rPr dirty="0"/>
+              <a:t> </a:t>
+            </a:r>
+            <a:r>
+              <a:rPr dirty="0" err="1"/>
+              <a:t>yüzde</a:t>
+            </a:r>
+            <a:r>
+              <a:rPr dirty="0"/>
+              <a:t> 13,</a:t>
+            </a:r>
+            <a:r>
+              <a:rPr lang="tr-TR" dirty="0"/>
+              <a:t>19u</a:t>
+            </a:r>
+            <a:r>
+              <a:rPr dirty="0"/>
+              <a:t> </a:t>
+            </a:r>
+            <a:r>
+              <a:rPr dirty="0" err="1"/>
+              <a:t>düşük</a:t>
+            </a:r>
+            <a:r>
+              <a:rPr dirty="0"/>
+              <a:t>, </a:t>
+            </a:r>
+            <a:r>
+              <a:rPr dirty="0" err="1"/>
+              <a:t>yüzde</a:t>
+            </a:r>
+            <a:r>
+              <a:rPr dirty="0"/>
+              <a:t> 61,3</a:t>
+            </a:r>
+            <a:r>
+              <a:rPr lang="tr-TR" dirty="0"/>
+              <a:t>4</a:t>
+            </a:r>
+            <a:r>
+              <a:rPr dirty="0"/>
+              <a:t>'ü </a:t>
+            </a:r>
+            <a:r>
+              <a:rPr dirty="0" err="1"/>
+              <a:t>orta</a:t>
+            </a:r>
+            <a:r>
+              <a:rPr dirty="0"/>
+              <a:t>, </a:t>
+            </a:r>
+            <a:r>
+              <a:rPr dirty="0" err="1"/>
+              <a:t>yüzde</a:t>
+            </a:r>
+            <a:r>
+              <a:rPr dirty="0"/>
+              <a:t> 25,</a:t>
+            </a:r>
+            <a:r>
+              <a:rPr lang="tr-TR" dirty="0"/>
+              <a:t>46sı</a:t>
+            </a:r>
+            <a:r>
+              <a:rPr dirty="0"/>
+              <a:t> </a:t>
+            </a:r>
+            <a:r>
+              <a:rPr dirty="0" err="1"/>
+              <a:t>yüksek</a:t>
+            </a:r>
+            <a:r>
+              <a:rPr dirty="0"/>
+              <a:t> </a:t>
+            </a:r>
+            <a:r>
+              <a:rPr dirty="0" err="1"/>
+              <a:t>bağımlılık</a:t>
+            </a:r>
+            <a:r>
+              <a:rPr dirty="0"/>
+              <a:t> </a:t>
+            </a:r>
+            <a:r>
+              <a:rPr dirty="0" err="1"/>
+              <a:t>düzeyindedir</a:t>
+            </a:r>
+            <a:r>
+              <a:rPr dirty="0"/>
+              <a:t>.</a:t>
+            </a:r>
+          </a:p>
+          <a:p>
+            <a:r>
+              <a:rPr dirty="0" err="1"/>
+              <a:t>Hastaların</a:t>
+            </a:r>
+            <a:r>
+              <a:rPr dirty="0"/>
+              <a:t> </a:t>
+            </a:r>
+            <a:r>
+              <a:rPr dirty="0" err="1"/>
+              <a:t>yüzde</a:t>
+            </a:r>
+            <a:r>
+              <a:rPr dirty="0"/>
+              <a:t> 75,</a:t>
+            </a:r>
+            <a:r>
+              <a:rPr lang="tr-TR" dirty="0"/>
+              <a:t>69u</a:t>
+            </a:r>
+            <a:r>
+              <a:rPr dirty="0"/>
+              <a:t> </a:t>
+            </a:r>
+            <a:r>
+              <a:rPr dirty="0" err="1"/>
+              <a:t>daha</a:t>
+            </a:r>
+            <a:r>
+              <a:rPr dirty="0"/>
+              <a:t> </a:t>
+            </a:r>
+            <a:r>
+              <a:rPr dirty="0" err="1"/>
+              <a:t>önce</a:t>
+            </a:r>
+            <a:r>
+              <a:rPr dirty="0"/>
+              <a:t> </a:t>
+            </a:r>
+            <a:r>
+              <a:rPr dirty="0" err="1"/>
+              <a:t>sigarayı</a:t>
+            </a:r>
+            <a:r>
+              <a:rPr dirty="0"/>
+              <a:t> </a:t>
+            </a:r>
+            <a:r>
+              <a:rPr dirty="0" err="1"/>
+              <a:t>bırakmayı</a:t>
+            </a:r>
+            <a:r>
+              <a:rPr dirty="0"/>
+              <a:t> </a:t>
+            </a:r>
+            <a:r>
+              <a:rPr dirty="0" err="1"/>
+              <a:t>denemiş</a:t>
+            </a:r>
+            <a:r>
+              <a:rPr dirty="0"/>
+              <a:t> </a:t>
+            </a:r>
+            <a:r>
+              <a:rPr dirty="0" err="1"/>
+              <a:t>ve</a:t>
+            </a:r>
+            <a:r>
+              <a:rPr dirty="0"/>
+              <a:t> </a:t>
+            </a:r>
+            <a:r>
+              <a:rPr dirty="0" err="1"/>
+              <a:t>bunların</a:t>
+            </a:r>
+            <a:r>
+              <a:rPr dirty="0"/>
+              <a:t> </a:t>
+            </a:r>
+            <a:r>
+              <a:rPr dirty="0" err="1"/>
+              <a:t>yaklaşık</a:t>
+            </a:r>
+            <a:r>
+              <a:rPr dirty="0"/>
+              <a:t> </a:t>
+            </a:r>
+            <a:r>
+              <a:rPr dirty="0" err="1"/>
+              <a:t>yarısı</a:t>
+            </a:r>
+            <a:r>
+              <a:rPr dirty="0"/>
+              <a:t> </a:t>
+            </a:r>
+            <a:r>
+              <a:rPr dirty="0" err="1"/>
+              <a:t>bu</a:t>
+            </a:r>
+            <a:r>
+              <a:rPr dirty="0"/>
+              <a:t> </a:t>
+            </a:r>
+            <a:r>
+              <a:rPr dirty="0" err="1"/>
+              <a:t>denemede</a:t>
+            </a:r>
+            <a:r>
+              <a:rPr dirty="0"/>
+              <a:t> </a:t>
+            </a:r>
+            <a:r>
+              <a:rPr dirty="0" err="1"/>
+              <a:t>profesyonel</a:t>
+            </a:r>
+            <a:r>
+              <a:rPr dirty="0"/>
+              <a:t> </a:t>
+            </a:r>
+            <a:r>
+              <a:rPr dirty="0" err="1"/>
+              <a:t>destek</a:t>
+            </a:r>
+            <a:r>
+              <a:rPr dirty="0"/>
+              <a:t> </a:t>
+            </a:r>
+            <a:r>
+              <a:rPr dirty="0" err="1"/>
+              <a:t>almıştır</a:t>
+            </a:r>
+            <a:r>
+              <a:rPr dirty="0"/>
+              <a:t>. </a:t>
+            </a:r>
+            <a:r>
+              <a:rPr dirty="0" err="1"/>
+              <a:t>Yüzde</a:t>
+            </a:r>
+            <a:r>
+              <a:rPr dirty="0"/>
+              <a:t> 7,</a:t>
+            </a:r>
+            <a:r>
+              <a:rPr lang="tr-TR" dirty="0"/>
+              <a:t>19u</a:t>
+            </a:r>
+            <a:r>
+              <a:rPr dirty="0"/>
+              <a:t> </a:t>
+            </a:r>
+            <a:r>
+              <a:rPr dirty="0" err="1"/>
+              <a:t>sigara</a:t>
+            </a:r>
+            <a:r>
+              <a:rPr dirty="0"/>
+              <a:t> </a:t>
+            </a:r>
+            <a:r>
+              <a:rPr dirty="0" err="1"/>
+              <a:t>dışında</a:t>
+            </a:r>
+            <a:r>
+              <a:rPr dirty="0"/>
+              <a:t> </a:t>
+            </a:r>
+            <a:r>
+              <a:rPr dirty="0" err="1"/>
+              <a:t>elektronik</a:t>
+            </a:r>
+            <a:r>
+              <a:rPr dirty="0"/>
+              <a:t> </a:t>
+            </a:r>
+            <a:r>
+              <a:rPr dirty="0" err="1"/>
+              <a:t>sigara</a:t>
+            </a:r>
+            <a:r>
+              <a:rPr dirty="0"/>
+              <a:t>, </a:t>
+            </a:r>
+            <a:r>
+              <a:rPr dirty="0" err="1"/>
+              <a:t>nargile</a:t>
+            </a:r>
+            <a:r>
+              <a:rPr dirty="0"/>
+              <a:t> </a:t>
+            </a:r>
+            <a:r>
+              <a:rPr dirty="0" err="1"/>
+              <a:t>veya</a:t>
+            </a:r>
+            <a:r>
+              <a:rPr dirty="0"/>
+              <a:t> puro </a:t>
+            </a:r>
+            <a:r>
+              <a:rPr dirty="0" err="1"/>
+              <a:t>gibi</a:t>
+            </a:r>
+            <a:r>
+              <a:rPr dirty="0"/>
+              <a:t> </a:t>
+            </a:r>
+            <a:r>
+              <a:rPr dirty="0" err="1"/>
+              <a:t>tütün</a:t>
+            </a:r>
+            <a:r>
+              <a:rPr dirty="0"/>
+              <a:t> </a:t>
+            </a:r>
+            <a:r>
+              <a:rPr dirty="0" err="1"/>
+              <a:t>ürünleri</a:t>
+            </a:r>
+            <a:r>
+              <a:rPr dirty="0"/>
+              <a:t> </a:t>
+            </a:r>
+            <a:r>
+              <a:rPr dirty="0" err="1"/>
+              <a:t>kullanmaktadır</a:t>
+            </a:r>
+            <a:r>
+              <a:rPr dirty="0"/>
+              <a:t>.</a:t>
             </a:r>
           </a:p>
         </p:txBody>
@@ -1002,12 +1624,266 @@
           <a:lstStyle/>
           <a:p>
             <a:r>
-              <a:t>Tablo 1'de katılımcıların sosyodemografik özellikleri yer almaktadır. En kalabalık yaş grubu yüzde 45,6 ile 26–44 yaş grubudur. Hastaların yüzde 82'si evlidir ve yüzde 43'ü yükseköğretim mezunudur.</a:t>
-            </a:r>
-          </a:p>
-          <a:p>
-            <a:r>
-              <a:t>Hastaların yüzde 86'sı il merkezinde yaşamaktadır. Yüzde 39,6'sının hanesinde sigara içen başka biri bulunmaktadır.</a:t>
+              <a:rPr dirty="0"/>
+              <a:t>Tablo </a:t>
+            </a:r>
+            <a:r>
+              <a:rPr lang="tr-TR" dirty="0"/>
+              <a:t>da</a:t>
+            </a:r>
+            <a:r>
+              <a:rPr dirty="0"/>
+              <a:t> </a:t>
+            </a:r>
+            <a:r>
+              <a:rPr dirty="0" err="1"/>
+              <a:t>katılımcıların</a:t>
+            </a:r>
+            <a:r>
+              <a:rPr dirty="0"/>
+              <a:t> </a:t>
+            </a:r>
+            <a:r>
+              <a:rPr dirty="0" err="1"/>
+              <a:t>sosyodemografik</a:t>
+            </a:r>
+            <a:r>
+              <a:rPr dirty="0"/>
+              <a:t> </a:t>
+            </a:r>
+            <a:r>
+              <a:rPr dirty="0" err="1"/>
+              <a:t>özellikleri</a:t>
+            </a:r>
+            <a:r>
+              <a:rPr dirty="0"/>
+              <a:t> </a:t>
+            </a:r>
+            <a:r>
+              <a:rPr dirty="0" err="1"/>
+              <a:t>yer</a:t>
+            </a:r>
+            <a:r>
+              <a:rPr dirty="0"/>
+              <a:t> </a:t>
+            </a:r>
+            <a:r>
+              <a:rPr dirty="0" err="1"/>
+              <a:t>almaktadır</a:t>
+            </a:r>
+            <a:r>
+              <a:rPr dirty="0"/>
+              <a:t>. En </a:t>
+            </a:r>
+            <a:r>
+              <a:rPr dirty="0" err="1"/>
+              <a:t>kalabalık</a:t>
+            </a:r>
+            <a:r>
+              <a:rPr dirty="0"/>
+              <a:t> </a:t>
+            </a:r>
+            <a:r>
+              <a:rPr dirty="0" err="1"/>
+              <a:t>yaş</a:t>
+            </a:r>
+            <a:r>
+              <a:rPr dirty="0"/>
+              <a:t> </a:t>
+            </a:r>
+            <a:r>
+              <a:rPr dirty="0" err="1"/>
+              <a:t>grubu</a:t>
+            </a:r>
+            <a:r>
+              <a:rPr dirty="0"/>
+              <a:t> </a:t>
+            </a:r>
+            <a:r>
+              <a:rPr dirty="0" err="1"/>
+              <a:t>yüzde</a:t>
+            </a:r>
+            <a:r>
+              <a:rPr dirty="0"/>
+              <a:t> 45,6</a:t>
+            </a:r>
+            <a:r>
+              <a:rPr lang="tr-TR" dirty="0"/>
+              <a:t>1</a:t>
+            </a:r>
+            <a:r>
+              <a:rPr dirty="0"/>
+              <a:t> </a:t>
+            </a:r>
+            <a:r>
+              <a:rPr dirty="0" err="1"/>
+              <a:t>ile</a:t>
+            </a:r>
+            <a:r>
+              <a:rPr dirty="0"/>
+              <a:t> 26–44 </a:t>
+            </a:r>
+            <a:r>
+              <a:rPr dirty="0" err="1"/>
+              <a:t>yaş</a:t>
+            </a:r>
+            <a:r>
+              <a:rPr dirty="0"/>
+              <a:t> </a:t>
+            </a:r>
+            <a:r>
+              <a:rPr dirty="0" err="1"/>
+              <a:t>grubudur</a:t>
+            </a:r>
+            <a:r>
+              <a:rPr dirty="0"/>
+              <a:t>. </a:t>
+            </a:r>
+            <a:r>
+              <a:rPr dirty="0" err="1"/>
+              <a:t>Hastaların</a:t>
+            </a:r>
+            <a:r>
+              <a:rPr dirty="0"/>
+              <a:t> </a:t>
+            </a:r>
+            <a:r>
+              <a:rPr dirty="0" err="1"/>
+              <a:t>yüzde</a:t>
+            </a:r>
+            <a:r>
+              <a:rPr dirty="0"/>
+              <a:t> 82'si </a:t>
+            </a:r>
+            <a:r>
+              <a:rPr dirty="0" err="1"/>
+              <a:t>evlidir</a:t>
+            </a:r>
+            <a:r>
+              <a:rPr dirty="0"/>
+              <a:t> </a:t>
+            </a:r>
+            <a:r>
+              <a:rPr dirty="0" err="1"/>
+              <a:t>ve</a:t>
+            </a:r>
+            <a:r>
+              <a:rPr dirty="0"/>
+              <a:t> </a:t>
+            </a:r>
+            <a:r>
+              <a:rPr dirty="0" err="1"/>
+              <a:t>yüzde</a:t>
+            </a:r>
+            <a:r>
+              <a:rPr dirty="0"/>
+              <a:t> 43'ü </a:t>
+            </a:r>
+            <a:r>
+              <a:rPr dirty="0" err="1"/>
+              <a:t>yükseköğretim</a:t>
+            </a:r>
+            <a:r>
+              <a:rPr dirty="0"/>
+              <a:t> </a:t>
+            </a:r>
+            <a:r>
+              <a:rPr dirty="0" err="1"/>
+              <a:t>mezunudur</a:t>
+            </a:r>
+            <a:r>
+              <a:rPr dirty="0"/>
+              <a:t>.</a:t>
+            </a:r>
+          </a:p>
+          <a:p>
+            <a:r>
+              <a:rPr dirty="0" err="1"/>
+              <a:t>Hastaların</a:t>
+            </a:r>
+            <a:r>
+              <a:rPr dirty="0"/>
+              <a:t> </a:t>
+            </a:r>
+            <a:r>
+              <a:rPr dirty="0" err="1"/>
+              <a:t>yüzde</a:t>
+            </a:r>
+            <a:r>
+              <a:rPr dirty="0"/>
+              <a:t> 86'sı il </a:t>
+            </a:r>
+            <a:r>
+              <a:rPr dirty="0" err="1"/>
+              <a:t>merkezinde</a:t>
+            </a:r>
+            <a:r>
+              <a:rPr dirty="0"/>
+              <a:t> </a:t>
+            </a:r>
+            <a:r>
+              <a:rPr dirty="0" err="1"/>
+              <a:t>yaşamaktadır</a:t>
+            </a:r>
+            <a:r>
+              <a:rPr dirty="0"/>
+              <a:t>. </a:t>
+            </a:r>
+            <a:r>
+              <a:rPr dirty="0" err="1"/>
+              <a:t>Yüzde</a:t>
+            </a:r>
+            <a:r>
+              <a:rPr dirty="0"/>
+              <a:t> 39,6'sının </a:t>
+            </a:r>
+            <a:r>
+              <a:rPr dirty="0" err="1"/>
+              <a:t>hanesinde</a:t>
+            </a:r>
+            <a:r>
+              <a:rPr dirty="0"/>
+              <a:t> </a:t>
+            </a:r>
+            <a:r>
+              <a:rPr dirty="0" err="1"/>
+              <a:t>sigara</a:t>
+            </a:r>
+            <a:r>
+              <a:rPr dirty="0"/>
+              <a:t> </a:t>
+            </a:r>
+            <a:r>
+              <a:rPr dirty="0" err="1"/>
+              <a:t>içen</a:t>
+            </a:r>
+            <a:r>
+              <a:rPr dirty="0"/>
+              <a:t> </a:t>
+            </a:r>
+            <a:r>
+              <a:rPr dirty="0" err="1"/>
+              <a:t>başka</a:t>
+            </a:r>
+            <a:r>
+              <a:rPr dirty="0"/>
+              <a:t> </a:t>
+            </a:r>
+            <a:r>
+              <a:rPr dirty="0" err="1"/>
+              <a:t>biri</a:t>
+            </a:r>
+            <a:r>
+              <a:rPr dirty="0"/>
+              <a:t> </a:t>
+            </a:r>
+            <a:r>
+              <a:rPr dirty="0" err="1"/>
+              <a:t>bulunmaktadır</a:t>
+            </a:r>
+            <a:r>
+              <a:rPr dirty="0"/>
+              <a:t>.</a:t>
             </a:r>
           </a:p>
         </p:txBody>
@@ -1093,12 +1969,302 @@
           <a:lstStyle/>
           <a:p>
             <a:r>
-              <a:t>Tablo 2'de sosyodemografik özelliklere göre bırakma durumu karşılaştırılmıştır. Bu tablo aslında uzun bir tablo ikiye böldüm yarısı diğer slaytta. Tablonun ilk bölümünde cinsiyet, yaş grubu, medeni durum ve eğitim durumu yer almaktadır.</a:t>
-            </a:r>
-          </a:p>
-          <a:p>
-            <a:r>
-              <a:t>Bu değişkenlerin hiçbirinde başarılı ve başarısız gruplar arasında anlamlı fark bulunmamıştır.</a:t>
+              <a:rPr lang="tr-TR" dirty="0"/>
+              <a:t>Bu tabloda da </a:t>
+            </a:r>
+            <a:r>
+              <a:rPr dirty="0" err="1"/>
+              <a:t>sosyodemografik</a:t>
+            </a:r>
+            <a:r>
+              <a:rPr dirty="0"/>
+              <a:t> </a:t>
+            </a:r>
+            <a:r>
+              <a:rPr dirty="0" err="1"/>
+              <a:t>özelliklere</a:t>
+            </a:r>
+            <a:r>
+              <a:rPr dirty="0"/>
+              <a:t> </a:t>
+            </a:r>
+            <a:r>
+              <a:rPr dirty="0" err="1"/>
+              <a:t>göre</a:t>
+            </a:r>
+            <a:r>
+              <a:rPr dirty="0"/>
+              <a:t> </a:t>
+            </a:r>
+            <a:r>
+              <a:rPr dirty="0" err="1"/>
+              <a:t>bırakma</a:t>
+            </a:r>
+            <a:r>
+              <a:rPr dirty="0"/>
+              <a:t> </a:t>
+            </a:r>
+            <a:r>
+              <a:rPr dirty="0" err="1"/>
+              <a:t>durumu</a:t>
+            </a:r>
+            <a:r>
+              <a:rPr dirty="0"/>
+              <a:t> </a:t>
+            </a:r>
+            <a:r>
+              <a:rPr dirty="0" err="1"/>
+              <a:t>karşılaştırılmıştır</a:t>
+            </a:r>
+            <a:r>
+              <a:rPr dirty="0"/>
+              <a:t>. Bu </a:t>
+            </a:r>
+            <a:r>
+              <a:rPr dirty="0" err="1"/>
+              <a:t>tablo</a:t>
+            </a:r>
+            <a:r>
+              <a:rPr dirty="0"/>
+              <a:t> </a:t>
+            </a:r>
+            <a:r>
+              <a:rPr dirty="0" err="1"/>
+              <a:t>aslında</a:t>
+            </a:r>
+            <a:r>
+              <a:rPr dirty="0"/>
+              <a:t> </a:t>
+            </a:r>
+            <a:r>
+              <a:rPr dirty="0" err="1"/>
+              <a:t>uzun</a:t>
+            </a:r>
+            <a:r>
+              <a:rPr dirty="0"/>
+              <a:t> </a:t>
+            </a:r>
+            <a:r>
+              <a:rPr dirty="0" err="1"/>
+              <a:t>bir</a:t>
+            </a:r>
+            <a:r>
+              <a:rPr dirty="0"/>
+              <a:t> </a:t>
+            </a:r>
+            <a:r>
+              <a:rPr dirty="0" err="1"/>
+              <a:t>tablo</a:t>
+            </a:r>
+            <a:r>
+              <a:rPr dirty="0"/>
+              <a:t> </a:t>
+            </a:r>
+            <a:r>
+              <a:rPr dirty="0" err="1"/>
+              <a:t>ikiye</a:t>
+            </a:r>
+            <a:r>
+              <a:rPr dirty="0"/>
+              <a:t> </a:t>
+            </a:r>
+            <a:r>
+              <a:rPr dirty="0" err="1"/>
+              <a:t>böldüm</a:t>
+            </a:r>
+            <a:r>
+              <a:rPr dirty="0"/>
+              <a:t> </a:t>
+            </a:r>
+            <a:r>
+              <a:rPr dirty="0" err="1"/>
+              <a:t>yarısı</a:t>
+            </a:r>
+            <a:r>
+              <a:rPr dirty="0"/>
+              <a:t> </a:t>
+            </a:r>
+            <a:r>
+              <a:rPr dirty="0" err="1"/>
+              <a:t>diğer</a:t>
+            </a:r>
+            <a:r>
+              <a:rPr dirty="0"/>
+              <a:t> </a:t>
+            </a:r>
+            <a:r>
+              <a:rPr dirty="0" err="1"/>
+              <a:t>slaytta</a:t>
+            </a:r>
+            <a:r>
+              <a:rPr dirty="0"/>
+              <a:t>. </a:t>
+            </a:r>
+            <a:r>
+              <a:rPr dirty="0" err="1"/>
+              <a:t>Tablonun</a:t>
+            </a:r>
+            <a:r>
+              <a:rPr dirty="0"/>
+              <a:t> ilk </a:t>
+            </a:r>
+            <a:r>
+              <a:rPr dirty="0" err="1"/>
+              <a:t>bölümünde</a:t>
+            </a:r>
+            <a:r>
+              <a:rPr dirty="0"/>
+              <a:t> </a:t>
+            </a:r>
+            <a:r>
+              <a:rPr dirty="0" err="1"/>
+              <a:t>cinsiyet</a:t>
+            </a:r>
+            <a:r>
+              <a:rPr dirty="0"/>
+              <a:t>, </a:t>
+            </a:r>
+            <a:r>
+              <a:rPr dirty="0" err="1"/>
+              <a:t>yaş</a:t>
+            </a:r>
+            <a:r>
+              <a:rPr dirty="0"/>
+              <a:t> </a:t>
+            </a:r>
+            <a:r>
+              <a:rPr dirty="0" err="1"/>
+              <a:t>grubu</a:t>
+            </a:r>
+            <a:r>
+              <a:rPr dirty="0"/>
+              <a:t>, </a:t>
+            </a:r>
+            <a:r>
+              <a:rPr dirty="0" err="1"/>
+              <a:t>medeni</a:t>
+            </a:r>
+            <a:r>
+              <a:rPr dirty="0"/>
+              <a:t> durum </a:t>
+            </a:r>
+            <a:r>
+              <a:rPr dirty="0" err="1"/>
+              <a:t>ve</a:t>
+            </a:r>
+            <a:r>
+              <a:rPr dirty="0"/>
+              <a:t> </a:t>
+            </a:r>
+            <a:r>
+              <a:rPr dirty="0" err="1"/>
+              <a:t>eğitim</a:t>
+            </a:r>
+            <a:r>
+              <a:rPr dirty="0"/>
+              <a:t> </a:t>
+            </a:r>
+            <a:r>
+              <a:rPr dirty="0" err="1"/>
+              <a:t>durumu</a:t>
+            </a:r>
+            <a:r>
+              <a:rPr dirty="0"/>
+              <a:t> </a:t>
+            </a:r>
+            <a:r>
+              <a:rPr dirty="0" err="1"/>
+              <a:t>yer</a:t>
+            </a:r>
+            <a:r>
+              <a:rPr dirty="0"/>
+              <a:t> </a:t>
+            </a:r>
+            <a:r>
+              <a:rPr dirty="0" err="1"/>
+              <a:t>almaktadır</a:t>
+            </a:r>
+            <a:r>
+              <a:rPr dirty="0"/>
+              <a:t>.</a:t>
+            </a:r>
+          </a:p>
+          <a:p>
+            <a:r>
+              <a:rPr dirty="0"/>
+              <a:t>Bu </a:t>
+            </a:r>
+            <a:r>
+              <a:rPr dirty="0" err="1"/>
+              <a:t>değişkenlerin</a:t>
+            </a:r>
+            <a:r>
+              <a:rPr dirty="0"/>
+              <a:t> </a:t>
+            </a:r>
+            <a:r>
+              <a:rPr dirty="0" err="1"/>
+              <a:t>hiçbirinde</a:t>
+            </a:r>
+            <a:r>
+              <a:rPr dirty="0"/>
+              <a:t> </a:t>
+            </a:r>
+            <a:r>
+              <a:rPr dirty="0" err="1"/>
+              <a:t>başarılı</a:t>
+            </a:r>
+            <a:r>
+              <a:rPr dirty="0"/>
+              <a:t> </a:t>
+            </a:r>
+            <a:r>
+              <a:rPr dirty="0" err="1"/>
+              <a:t>ve</a:t>
+            </a:r>
+            <a:r>
+              <a:rPr dirty="0"/>
+              <a:t> </a:t>
+            </a:r>
+            <a:r>
+              <a:rPr dirty="0" err="1"/>
+              <a:t>başarısız</a:t>
+            </a:r>
+            <a:r>
+              <a:rPr dirty="0"/>
+              <a:t> </a:t>
+            </a:r>
+            <a:r>
+              <a:rPr dirty="0" err="1"/>
+              <a:t>gruplar</a:t>
+            </a:r>
+            <a:r>
+              <a:rPr dirty="0"/>
+              <a:t> </a:t>
+            </a:r>
+            <a:r>
+              <a:rPr dirty="0" err="1"/>
+              <a:t>arasında</a:t>
+            </a:r>
+            <a:r>
+              <a:rPr dirty="0"/>
+              <a:t> </a:t>
+            </a:r>
+            <a:r>
+              <a:rPr dirty="0" err="1"/>
+              <a:t>anlamlı</a:t>
+            </a:r>
+            <a:r>
+              <a:rPr dirty="0"/>
+              <a:t> fark </a:t>
+            </a:r>
+            <a:r>
+              <a:rPr dirty="0" err="1"/>
+              <a:t>bulunmamıştır</a:t>
+            </a:r>
+            <a:r>
+              <a:rPr dirty="0"/>
+              <a:t>.</a:t>
             </a:r>
           </a:p>
         </p:txBody>
@@ -1184,12 +2350,290 @@
           <a:lstStyle/>
           <a:p>
             <a:r>
-              <a:t>Tablonun ikinci bölümünde yerleşim yeri, çalışma durumu, hanede başka sigara içen varlığı ve alkol kullanımı yer almaktadır.</a:t>
-            </a:r>
-          </a:p>
-          <a:p>
-            <a:r>
-              <a:t>Anlamlı fark yalnızca hanede başka sigara içen varlığında bulunmuştur. Hanesinde sigara içen olmayanların yüzde 39,8'i, olanların yüzde 25,3'ü sigarayı bırakmıştır; p değeri 0,003'tür.</a:t>
+              <a:rPr dirty="0" err="1"/>
+              <a:t>Tablonun</a:t>
+            </a:r>
+            <a:r>
+              <a:rPr dirty="0"/>
+              <a:t> </a:t>
+            </a:r>
+            <a:r>
+              <a:rPr dirty="0" err="1"/>
+              <a:t>ikinci</a:t>
+            </a:r>
+            <a:r>
+              <a:rPr dirty="0"/>
+              <a:t> </a:t>
+            </a:r>
+            <a:r>
+              <a:rPr dirty="0" err="1"/>
+              <a:t>bölümünde</a:t>
+            </a:r>
+            <a:r>
+              <a:rPr dirty="0"/>
+              <a:t> </a:t>
+            </a:r>
+            <a:r>
+              <a:rPr dirty="0" err="1"/>
+              <a:t>yerleşim</a:t>
+            </a:r>
+            <a:r>
+              <a:rPr dirty="0"/>
+              <a:t> </a:t>
+            </a:r>
+            <a:r>
+              <a:rPr dirty="0" err="1"/>
+              <a:t>yeri</a:t>
+            </a:r>
+            <a:r>
+              <a:rPr dirty="0"/>
+              <a:t>, </a:t>
+            </a:r>
+            <a:r>
+              <a:rPr dirty="0" err="1"/>
+              <a:t>çalışma</a:t>
+            </a:r>
+            <a:r>
+              <a:rPr dirty="0"/>
+              <a:t> </a:t>
+            </a:r>
+            <a:r>
+              <a:rPr dirty="0" err="1"/>
+              <a:t>durumu</a:t>
+            </a:r>
+            <a:r>
+              <a:rPr dirty="0"/>
+              <a:t>, </a:t>
+            </a:r>
+            <a:r>
+              <a:rPr dirty="0" err="1"/>
+              <a:t>hanede</a:t>
+            </a:r>
+            <a:r>
+              <a:rPr dirty="0"/>
+              <a:t> </a:t>
+            </a:r>
+            <a:r>
+              <a:rPr dirty="0" err="1"/>
+              <a:t>başka</a:t>
+            </a:r>
+            <a:r>
+              <a:rPr dirty="0"/>
+              <a:t> </a:t>
+            </a:r>
+            <a:r>
+              <a:rPr dirty="0" err="1"/>
+              <a:t>sigara</a:t>
+            </a:r>
+            <a:r>
+              <a:rPr dirty="0"/>
+              <a:t> </a:t>
+            </a:r>
+            <a:r>
+              <a:rPr dirty="0" err="1"/>
+              <a:t>içen</a:t>
+            </a:r>
+            <a:r>
+              <a:rPr dirty="0"/>
+              <a:t> </a:t>
+            </a:r>
+            <a:r>
+              <a:rPr dirty="0" err="1"/>
+              <a:t>varlığı</a:t>
+            </a:r>
+            <a:r>
+              <a:rPr dirty="0"/>
+              <a:t> </a:t>
+            </a:r>
+            <a:r>
+              <a:rPr dirty="0" err="1"/>
+              <a:t>ve</a:t>
+            </a:r>
+            <a:r>
+              <a:rPr dirty="0"/>
+              <a:t> </a:t>
+            </a:r>
+            <a:r>
+              <a:rPr dirty="0" err="1"/>
+              <a:t>alkol</a:t>
+            </a:r>
+            <a:r>
+              <a:rPr dirty="0"/>
+              <a:t> </a:t>
+            </a:r>
+            <a:r>
+              <a:rPr dirty="0" err="1"/>
+              <a:t>kullanımı</a:t>
+            </a:r>
+            <a:r>
+              <a:rPr dirty="0"/>
+              <a:t> </a:t>
+            </a:r>
+            <a:r>
+              <a:rPr dirty="0" err="1"/>
+              <a:t>yer</a:t>
+            </a:r>
+            <a:r>
+              <a:rPr dirty="0"/>
+              <a:t> </a:t>
+            </a:r>
+            <a:r>
+              <a:rPr dirty="0" err="1"/>
+              <a:t>almaktadır</a:t>
+            </a:r>
+            <a:r>
+              <a:rPr dirty="0"/>
+              <a:t>.</a:t>
+            </a:r>
+          </a:p>
+          <a:p>
+            <a:r>
+              <a:rPr dirty="0" err="1"/>
+              <a:t>Anlamlı</a:t>
+            </a:r>
+            <a:r>
+              <a:rPr dirty="0"/>
+              <a:t> fark </a:t>
+            </a:r>
+            <a:r>
+              <a:rPr dirty="0" err="1"/>
+              <a:t>yalnızca</a:t>
+            </a:r>
+            <a:r>
+              <a:rPr dirty="0"/>
+              <a:t> </a:t>
+            </a:r>
+            <a:r>
+              <a:rPr dirty="0" err="1"/>
+              <a:t>hanede</a:t>
+            </a:r>
+            <a:r>
+              <a:rPr dirty="0"/>
+              <a:t> </a:t>
+            </a:r>
+            <a:r>
+              <a:rPr dirty="0" err="1"/>
+              <a:t>başka</a:t>
+            </a:r>
+            <a:r>
+              <a:rPr dirty="0"/>
+              <a:t> </a:t>
+            </a:r>
+            <a:r>
+              <a:rPr dirty="0" err="1"/>
+              <a:t>sigara</a:t>
+            </a:r>
+            <a:r>
+              <a:rPr dirty="0"/>
+              <a:t> </a:t>
+            </a:r>
+            <a:r>
+              <a:rPr dirty="0" err="1"/>
+              <a:t>içen</a:t>
+            </a:r>
+            <a:r>
+              <a:rPr dirty="0"/>
+              <a:t> </a:t>
+            </a:r>
+            <a:r>
+              <a:rPr dirty="0" err="1"/>
+              <a:t>varlığında</a:t>
+            </a:r>
+            <a:r>
+              <a:rPr dirty="0"/>
+              <a:t> </a:t>
+            </a:r>
+            <a:r>
+              <a:rPr dirty="0" err="1"/>
+              <a:t>bulunmuştur</a:t>
+            </a:r>
+            <a:r>
+              <a:rPr dirty="0"/>
+              <a:t>. </a:t>
+            </a:r>
+            <a:r>
+              <a:rPr dirty="0" err="1"/>
+              <a:t>Hanesinde</a:t>
+            </a:r>
+            <a:r>
+              <a:rPr dirty="0"/>
+              <a:t> </a:t>
+            </a:r>
+            <a:r>
+              <a:rPr dirty="0" err="1"/>
+              <a:t>sigara</a:t>
+            </a:r>
+            <a:r>
+              <a:rPr dirty="0"/>
+              <a:t> </a:t>
+            </a:r>
+            <a:r>
+              <a:rPr dirty="0" err="1"/>
+              <a:t>içen</a:t>
+            </a:r>
+            <a:r>
+              <a:rPr lang="tr-TR" dirty="0"/>
+              <a:t> biri</a:t>
+            </a:r>
+            <a:r>
+              <a:rPr dirty="0"/>
+              <a:t> </a:t>
+            </a:r>
+            <a:r>
+              <a:rPr dirty="0" err="1"/>
+              <a:t>olmayanların</a:t>
+            </a:r>
+            <a:r>
+              <a:rPr dirty="0"/>
+              <a:t> </a:t>
+            </a:r>
+            <a:r>
+              <a:rPr dirty="0" err="1"/>
+              <a:t>yüzde</a:t>
+            </a:r>
+            <a:r>
+              <a:rPr dirty="0"/>
+              <a:t> 39,8'i, </a:t>
+            </a:r>
+            <a:r>
+              <a:rPr dirty="0" err="1"/>
+              <a:t>olanların</a:t>
+            </a:r>
+            <a:r>
+              <a:rPr dirty="0"/>
+              <a:t> </a:t>
+            </a:r>
+            <a:r>
+              <a:rPr dirty="0" err="1"/>
+              <a:t>yüzde</a:t>
+            </a:r>
+            <a:r>
+              <a:rPr dirty="0"/>
+              <a:t> 25,3'ü </a:t>
+            </a:r>
+            <a:r>
+              <a:rPr dirty="0" err="1"/>
+              <a:t>sigarayı</a:t>
+            </a:r>
+            <a:r>
+              <a:rPr dirty="0"/>
+              <a:t> </a:t>
+            </a:r>
+            <a:r>
+              <a:rPr dirty="0" err="1"/>
+              <a:t>bırakmıştır</a:t>
+            </a:r>
+            <a:r>
+              <a:rPr dirty="0"/>
+              <a:t>; p </a:t>
+            </a:r>
+            <a:r>
+              <a:rPr dirty="0" err="1"/>
+              <a:t>değeri</a:t>
+            </a:r>
+            <a:r>
+              <a:rPr dirty="0"/>
+              <a:t> 0,003'tür.</a:t>
             </a:r>
           </a:p>
         </p:txBody>
@@ -1275,12 +2719,290 @@
           <a:lstStyle/>
           <a:p>
             <a:r>
-              <a:t>Tablo 3'te uygulanan tedaviler görülmektedir. En sık uygulanan yöntem 141 hasta ile kombine tedavidir. Bunu 109 hasta ile bupropion ve 80 hasta ile NRT monoterapisi izlemektedir.</a:t>
-            </a:r>
-          </a:p>
-          <a:p>
-            <a:r>
-              <a:t>Kombine tedavi alan hastaların 125'i bupropion ile NRT almıştır. Vareniklin 18, sitizin 34 hastada tek başına kullanılmış; 17 hastaya yalnızca farmakolojik olmayan tedavi uygulanmıştır.</a:t>
+              <a:rPr lang="tr-TR" dirty="0"/>
+              <a:t>tabloda</a:t>
+            </a:r>
+            <a:r>
+              <a:rPr dirty="0"/>
+              <a:t> </a:t>
+            </a:r>
+            <a:r>
+              <a:rPr dirty="0" err="1"/>
+              <a:t>uygulanan</a:t>
+            </a:r>
+            <a:r>
+              <a:rPr dirty="0"/>
+              <a:t> </a:t>
+            </a:r>
+            <a:r>
+              <a:rPr dirty="0" err="1"/>
+              <a:t>tedaviler</a:t>
+            </a:r>
+            <a:r>
+              <a:rPr dirty="0"/>
+              <a:t> </a:t>
+            </a:r>
+            <a:r>
+              <a:rPr dirty="0" err="1"/>
+              <a:t>görülmektedir</a:t>
+            </a:r>
+            <a:r>
+              <a:rPr dirty="0"/>
+              <a:t>. En </a:t>
+            </a:r>
+            <a:r>
+              <a:rPr dirty="0" err="1"/>
+              <a:t>sık</a:t>
+            </a:r>
+            <a:r>
+              <a:rPr dirty="0"/>
+              <a:t> </a:t>
+            </a:r>
+            <a:r>
+              <a:rPr dirty="0" err="1"/>
+              <a:t>uygulanan</a:t>
+            </a:r>
+            <a:r>
+              <a:rPr dirty="0"/>
+              <a:t> </a:t>
+            </a:r>
+            <a:r>
+              <a:rPr dirty="0" err="1"/>
+              <a:t>yöntem</a:t>
+            </a:r>
+            <a:r>
+              <a:rPr dirty="0"/>
+              <a:t> 141 hasta </a:t>
+            </a:r>
+            <a:r>
+              <a:rPr dirty="0" err="1"/>
+              <a:t>ile</a:t>
+            </a:r>
+            <a:r>
+              <a:rPr dirty="0"/>
+              <a:t> </a:t>
+            </a:r>
+            <a:r>
+              <a:rPr dirty="0" err="1"/>
+              <a:t>kombine</a:t>
+            </a:r>
+            <a:r>
+              <a:rPr dirty="0"/>
+              <a:t> </a:t>
+            </a:r>
+            <a:r>
+              <a:rPr dirty="0" err="1"/>
+              <a:t>tedavidir</a:t>
+            </a:r>
+            <a:r>
+              <a:rPr dirty="0"/>
+              <a:t>. </a:t>
+            </a:r>
+            <a:r>
+              <a:rPr dirty="0" err="1"/>
+              <a:t>Bunu</a:t>
+            </a:r>
+            <a:r>
+              <a:rPr dirty="0"/>
+              <a:t> 109 hasta </a:t>
+            </a:r>
+            <a:r>
+              <a:rPr dirty="0" err="1"/>
+              <a:t>ile</a:t>
+            </a:r>
+            <a:r>
+              <a:rPr dirty="0"/>
+              <a:t> bupropion </a:t>
+            </a:r>
+            <a:r>
+              <a:rPr dirty="0" err="1"/>
+              <a:t>ve</a:t>
+            </a:r>
+            <a:r>
+              <a:rPr dirty="0"/>
+              <a:t> 80 hasta </a:t>
+            </a:r>
+            <a:r>
+              <a:rPr dirty="0" err="1"/>
+              <a:t>ile</a:t>
+            </a:r>
+            <a:r>
+              <a:rPr dirty="0"/>
+              <a:t> NRT </a:t>
+            </a:r>
+            <a:r>
+              <a:rPr dirty="0" err="1"/>
+              <a:t>monoterapisi</a:t>
+            </a:r>
+            <a:r>
+              <a:rPr dirty="0"/>
+              <a:t> </a:t>
+            </a:r>
+            <a:r>
+              <a:rPr dirty="0" err="1"/>
+              <a:t>izlemektedir</a:t>
+            </a:r>
+            <a:r>
+              <a:rPr dirty="0"/>
+              <a:t>.</a:t>
+            </a:r>
+          </a:p>
+          <a:p>
+            <a:r>
+              <a:rPr dirty="0" err="1"/>
+              <a:t>Kombine</a:t>
+            </a:r>
+            <a:r>
+              <a:rPr dirty="0"/>
+              <a:t> </a:t>
+            </a:r>
+            <a:r>
+              <a:rPr dirty="0" err="1"/>
+              <a:t>tedavi</a:t>
+            </a:r>
+            <a:r>
+              <a:rPr dirty="0"/>
+              <a:t> </a:t>
+            </a:r>
+            <a:r>
+              <a:rPr dirty="0" err="1"/>
+              <a:t>alan</a:t>
+            </a:r>
+            <a:r>
+              <a:rPr dirty="0"/>
+              <a:t> </a:t>
+            </a:r>
+            <a:r>
+              <a:rPr dirty="0" err="1"/>
+              <a:t>hastaların</a:t>
+            </a:r>
+            <a:r>
+              <a:rPr dirty="0"/>
+              <a:t> 125'i bupropion </a:t>
+            </a:r>
+            <a:r>
+              <a:rPr dirty="0" err="1"/>
+              <a:t>ile</a:t>
+            </a:r>
+            <a:r>
+              <a:rPr dirty="0"/>
+              <a:t> NRT </a:t>
+            </a:r>
+            <a:r>
+              <a:rPr dirty="0" err="1"/>
+              <a:t>almıştır</a:t>
+            </a:r>
+            <a:r>
+              <a:rPr dirty="0"/>
+              <a:t>. </a:t>
+            </a:r>
+            <a:r>
+              <a:rPr dirty="0" err="1"/>
+              <a:t>Vareniklin</a:t>
+            </a:r>
+            <a:r>
+              <a:rPr dirty="0"/>
+              <a:t> 18, </a:t>
+            </a:r>
+            <a:r>
+              <a:rPr dirty="0" err="1"/>
+              <a:t>sitizin</a:t>
+            </a:r>
+            <a:r>
+              <a:rPr dirty="0"/>
+              <a:t> 34 </a:t>
+            </a:r>
+            <a:r>
+              <a:rPr dirty="0" err="1"/>
+              <a:t>hastada</a:t>
+            </a:r>
+            <a:r>
+              <a:rPr dirty="0"/>
+              <a:t> </a:t>
+            </a:r>
+            <a:r>
+              <a:rPr dirty="0" err="1"/>
+              <a:t>tek</a:t>
+            </a:r>
+            <a:r>
+              <a:rPr dirty="0"/>
+              <a:t> </a:t>
+            </a:r>
+            <a:r>
+              <a:rPr dirty="0" err="1"/>
+              <a:t>başına</a:t>
+            </a:r>
+            <a:r>
+              <a:rPr dirty="0"/>
+              <a:t> </a:t>
+            </a:r>
+            <a:r>
+              <a:rPr dirty="0" err="1"/>
+              <a:t>kullanılmış</a:t>
+            </a:r>
+            <a:r>
+              <a:rPr dirty="0"/>
+              <a:t>; 17 </a:t>
+            </a:r>
+            <a:r>
+              <a:rPr dirty="0" err="1"/>
+              <a:t>hastaya</a:t>
+            </a:r>
+            <a:r>
+              <a:rPr dirty="0"/>
+              <a:t> </a:t>
+            </a:r>
+            <a:r>
+              <a:rPr dirty="0" err="1"/>
+              <a:t>yalnızca</a:t>
+            </a:r>
+            <a:r>
+              <a:rPr lang="tr-TR" dirty="0"/>
+              <a:t> –</a:t>
+            </a:r>
+            <a:r>
+              <a:rPr lang="tr-TR" dirty="0" err="1"/>
+              <a:t>nonfarmakolojik</a:t>
+            </a:r>
+            <a:r>
+              <a:rPr lang="tr-TR" dirty="0"/>
+              <a:t> (davranışsal)-</a:t>
+            </a:r>
+            <a:r>
+              <a:rPr dirty="0"/>
+              <a:t> </a:t>
+            </a:r>
+            <a:r>
+              <a:rPr dirty="0" err="1"/>
+              <a:t>farmakolojik</a:t>
+            </a:r>
+            <a:r>
+              <a:rPr dirty="0"/>
+              <a:t> </a:t>
+            </a:r>
+            <a:r>
+              <a:rPr dirty="0" err="1"/>
+              <a:t>olmayan</a:t>
+            </a:r>
+            <a:r>
+              <a:rPr dirty="0"/>
+              <a:t> </a:t>
+            </a:r>
+            <a:r>
+              <a:rPr dirty="0" err="1"/>
+              <a:t>tedavi</a:t>
+            </a:r>
+            <a:r>
+              <a:rPr dirty="0"/>
+              <a:t> </a:t>
+            </a:r>
+            <a:r>
+              <a:rPr dirty="0" err="1"/>
+              <a:t>uygulanmıştır</a:t>
+            </a:r>
+            <a:r>
+              <a:rPr dirty="0"/>
+              <a:t>.</a:t>
             </a:r>
           </a:p>
         </p:txBody>
@@ -1366,12 +3088,213 @@
           <a:lstStyle/>
           <a:p>
             <a:r>
-              <a:t>Tablo 4'te sürekli değişkenler bırakma durumuna göre karşılaştırılmıştır. Sigarayı bırakanlar ortalama 2,83 kez, bırakamayanlar 1,96 kez görüşmeye gelmiştir; fark anlamlıdır, p&lt;0,001.</a:t>
-            </a:r>
-          </a:p>
-          <a:p>
-            <a:r>
-              <a:t>Bırakanların FNBT puanı daha düşüktür: 5,26'ya karşı 5,85; p değeri 0,024'tür. Paket-yıl açısından iki grup arasında anlamlı fark bulunmamıştır.</a:t>
+              <a:rPr lang="tr-TR" dirty="0"/>
+              <a:t>Bu tabloda Sigara içme ve tedaviye ilişkin belirli parametreler sigara bırakma durumu ile karşılaştırılmış </a:t>
+            </a:r>
+            <a:r>
+              <a:rPr dirty="0"/>
+              <a:t>. </a:t>
+            </a:r>
+            <a:r>
+              <a:rPr dirty="0" err="1"/>
+              <a:t>Sigarayı</a:t>
+            </a:r>
+            <a:r>
+              <a:rPr dirty="0"/>
+              <a:t> </a:t>
+            </a:r>
+            <a:r>
+              <a:rPr dirty="0" err="1"/>
+              <a:t>bırakanlar</a:t>
+            </a:r>
+            <a:r>
+              <a:rPr dirty="0"/>
+              <a:t> </a:t>
+            </a:r>
+            <a:r>
+              <a:rPr dirty="0" err="1"/>
+              <a:t>ortalama</a:t>
+            </a:r>
+            <a:r>
+              <a:rPr dirty="0"/>
+              <a:t> 2,83 </a:t>
+            </a:r>
+            <a:r>
+              <a:rPr dirty="0" err="1"/>
+              <a:t>kez</a:t>
+            </a:r>
+            <a:r>
+              <a:rPr dirty="0"/>
+              <a:t>, </a:t>
+            </a:r>
+            <a:r>
+              <a:rPr dirty="0" err="1"/>
+              <a:t>bırakamayanlar</a:t>
+            </a:r>
+            <a:r>
+              <a:rPr dirty="0"/>
+              <a:t> 1,96 </a:t>
+            </a:r>
+            <a:r>
+              <a:rPr dirty="0" err="1"/>
+              <a:t>kez</a:t>
+            </a:r>
+            <a:r>
+              <a:rPr dirty="0"/>
+              <a:t> </a:t>
+            </a:r>
+            <a:r>
+              <a:rPr dirty="0" err="1"/>
+              <a:t>görüşmeye</a:t>
+            </a:r>
+            <a:r>
+              <a:rPr dirty="0"/>
+              <a:t> </a:t>
+            </a:r>
+            <a:r>
+              <a:rPr dirty="0" err="1"/>
+              <a:t>gelmiştir</a:t>
+            </a:r>
+            <a:r>
+              <a:rPr dirty="0"/>
+              <a:t>; fark </a:t>
+            </a:r>
+            <a:r>
+              <a:rPr dirty="0" err="1"/>
+              <a:t>anlamlıdır</a:t>
+            </a:r>
+            <a:r>
+              <a:rPr dirty="0"/>
+              <a:t>, p&lt;0,001.</a:t>
+            </a:r>
+          </a:p>
+          <a:p>
+            <a:r>
+              <a:rPr dirty="0" err="1"/>
+              <a:t>Bırakanların</a:t>
+            </a:r>
+            <a:r>
+              <a:rPr dirty="0"/>
+              <a:t> FNBT</a:t>
+            </a:r>
+            <a:r>
+              <a:rPr lang="tr-TR" dirty="0"/>
+              <a:t>(</a:t>
+            </a:r>
+            <a:r>
+              <a:rPr lang="tr-TR" dirty="0" err="1"/>
+              <a:t>Fagerström</a:t>
+            </a:r>
+            <a:r>
+              <a:rPr lang="tr-TR" dirty="0"/>
+              <a:t> Nikotin Bağımlılık Testi )</a:t>
+            </a:r>
+            <a:r>
+              <a:rPr dirty="0"/>
+              <a:t> </a:t>
+            </a:r>
+            <a:r>
+              <a:rPr dirty="0" err="1"/>
+              <a:t>puanı</a:t>
+            </a:r>
+            <a:r>
+              <a:rPr dirty="0"/>
+              <a:t> </a:t>
+            </a:r>
+            <a:r>
+              <a:rPr dirty="0" err="1"/>
+              <a:t>daha</a:t>
+            </a:r>
+            <a:r>
+              <a:rPr dirty="0"/>
+              <a:t> </a:t>
+            </a:r>
+            <a:r>
+              <a:rPr dirty="0" err="1"/>
+              <a:t>düşüktür</a:t>
+            </a:r>
+            <a:r>
+              <a:rPr dirty="0"/>
+              <a:t>: 5,26'ya </a:t>
+            </a:r>
+            <a:r>
+              <a:rPr dirty="0" err="1"/>
+              <a:t>karşı</a:t>
+            </a:r>
+            <a:r>
+              <a:rPr dirty="0"/>
+              <a:t> 5,85; p </a:t>
+            </a:r>
+            <a:r>
+              <a:rPr dirty="0" err="1"/>
+              <a:t>değeri</a:t>
+            </a:r>
+            <a:r>
+              <a:rPr dirty="0"/>
+              <a:t> 0,024'tür. </a:t>
+            </a:r>
+            <a:endParaRPr lang="tr-TR" dirty="0"/>
+          </a:p>
+          <a:p>
+            <a:r>
+              <a:rPr dirty="0"/>
+              <a:t>Paket-</a:t>
+            </a:r>
+            <a:r>
+              <a:rPr dirty="0" err="1"/>
+              <a:t>yıl</a:t>
+            </a:r>
+            <a:r>
+              <a:rPr dirty="0"/>
+              <a:t> </a:t>
+            </a:r>
+            <a:r>
+              <a:rPr dirty="0" err="1"/>
+              <a:t>açısından</a:t>
+            </a:r>
+            <a:r>
+              <a:rPr dirty="0"/>
+              <a:t> </a:t>
+            </a:r>
+            <a:r>
+              <a:rPr dirty="0" err="1"/>
+              <a:t>iki</a:t>
+            </a:r>
+            <a:r>
+              <a:rPr dirty="0"/>
+              <a:t> </a:t>
+            </a:r>
+            <a:r>
+              <a:rPr dirty="0" err="1"/>
+              <a:t>grup</a:t>
+            </a:r>
+            <a:r>
+              <a:rPr dirty="0"/>
+              <a:t> </a:t>
+            </a:r>
+            <a:r>
+              <a:rPr dirty="0" err="1"/>
+              <a:t>arasında</a:t>
+            </a:r>
+            <a:r>
+              <a:rPr dirty="0"/>
+              <a:t> </a:t>
+            </a:r>
+            <a:r>
+              <a:rPr dirty="0" err="1"/>
+              <a:t>anlamlı</a:t>
+            </a:r>
+            <a:r>
+              <a:rPr dirty="0"/>
+              <a:t> fark </a:t>
+            </a:r>
+            <a:r>
+              <a:rPr dirty="0" err="1"/>
+              <a:t>bulunmamıştır</a:t>
+            </a:r>
+            <a:r>
+              <a:rPr dirty="0"/>
+              <a:t>.</a:t>
             </a:r>
           </a:p>
         </p:txBody>
@@ -1457,12 +3380,418 @@
           <a:lstStyle/>
           <a:p>
             <a:r>
-              <a:t>Tablo 5'te tedavi yöntemlerine göre bırakma oranları yer almaktadır. Makalede en yüksek bırakma oranının yüzde 44,0 ile kombine tedavi grubunda olduğu ve kombine tedavinin diğer tüm seçeneklerden anlamlı derecede üstün olduğu bildirilmektedir.</a:t>
-            </a:r>
-          </a:p>
-          <a:p>
-            <a:r>
-              <a:t>NRT grubunda oran yüzde 37,5, sitizin ve yalnızca davranışsal tedavi gruplarında yüzde 35,3'tür. En düşük oran yüzde 16,5 ile bupropion monoterapisindedir. Gruplar arasındaki fark anlamlıdır, p&lt;0,001.</a:t>
+              <a:rPr dirty="0" err="1"/>
+              <a:t>tedavi</a:t>
+            </a:r>
+            <a:r>
+              <a:rPr dirty="0"/>
+              <a:t> </a:t>
+            </a:r>
+            <a:r>
+              <a:rPr dirty="0" err="1"/>
+              <a:t>yöntemlerine</a:t>
+            </a:r>
+            <a:r>
+              <a:rPr dirty="0"/>
+              <a:t> </a:t>
+            </a:r>
+            <a:r>
+              <a:rPr dirty="0" err="1"/>
+              <a:t>göre</a:t>
+            </a:r>
+            <a:r>
+              <a:rPr dirty="0"/>
+              <a:t> </a:t>
+            </a:r>
+            <a:r>
+              <a:rPr dirty="0" err="1"/>
+              <a:t>bırakma</a:t>
+            </a:r>
+            <a:r>
+              <a:rPr dirty="0"/>
+              <a:t> </a:t>
+            </a:r>
+            <a:r>
+              <a:rPr dirty="0" err="1"/>
+              <a:t>oranları</a:t>
+            </a:r>
+            <a:r>
+              <a:rPr lang="tr-TR" dirty="0" err="1"/>
+              <a:t>nın</a:t>
+            </a:r>
+            <a:r>
+              <a:rPr dirty="0"/>
+              <a:t> </a:t>
+            </a:r>
+            <a:r>
+              <a:rPr dirty="0" err="1"/>
+              <a:t>yer</a:t>
+            </a:r>
+            <a:r>
+              <a:rPr dirty="0"/>
+              <a:t> al</a:t>
+            </a:r>
+            <a:r>
+              <a:rPr lang="tr-TR" dirty="0" err="1"/>
+              <a:t>dığı</a:t>
+            </a:r>
+            <a:r>
+              <a:rPr lang="tr-TR" dirty="0"/>
+              <a:t> bir tablo</a:t>
+            </a:r>
+            <a:r>
+              <a:rPr dirty="0"/>
+              <a:t>. </a:t>
+            </a:r>
+            <a:r>
+              <a:rPr dirty="0" err="1"/>
+              <a:t>Makalede</a:t>
+            </a:r>
+            <a:r>
+              <a:rPr dirty="0"/>
+              <a:t> </a:t>
+            </a:r>
+            <a:r>
+              <a:rPr dirty="0" err="1"/>
+              <a:t>en</a:t>
+            </a:r>
+            <a:r>
+              <a:rPr dirty="0"/>
+              <a:t> </a:t>
+            </a:r>
+            <a:r>
+              <a:rPr dirty="0" err="1"/>
+              <a:t>yüksek</a:t>
+            </a:r>
+            <a:r>
+              <a:rPr dirty="0"/>
+              <a:t> </a:t>
+            </a:r>
+            <a:r>
+              <a:rPr dirty="0" err="1"/>
+              <a:t>bırakma</a:t>
+            </a:r>
+            <a:r>
+              <a:rPr dirty="0"/>
+              <a:t> </a:t>
+            </a:r>
+            <a:r>
+              <a:rPr dirty="0" err="1"/>
+              <a:t>oranının</a:t>
+            </a:r>
+            <a:r>
+              <a:rPr dirty="0"/>
+              <a:t> </a:t>
+            </a:r>
+            <a:r>
+              <a:rPr dirty="0" err="1"/>
+              <a:t>yüzde</a:t>
+            </a:r>
+            <a:r>
+              <a:rPr dirty="0"/>
+              <a:t> 4</a:t>
+            </a:r>
+            <a:r>
+              <a:rPr lang="tr-TR" dirty="0"/>
+              <a:t>3</a:t>
+            </a:r>
+            <a:r>
+              <a:rPr dirty="0"/>
+              <a:t>,</a:t>
+            </a:r>
+            <a:r>
+              <a:rPr lang="tr-TR" dirty="0"/>
+              <a:t>98</a:t>
+            </a:r>
+            <a:r>
+              <a:rPr dirty="0"/>
+              <a:t> </a:t>
+            </a:r>
+            <a:r>
+              <a:rPr dirty="0" err="1"/>
+              <a:t>ile</a:t>
+            </a:r>
+            <a:r>
+              <a:rPr dirty="0"/>
+              <a:t> </a:t>
+            </a:r>
+            <a:r>
+              <a:rPr dirty="0" err="1"/>
+              <a:t>kombine</a:t>
+            </a:r>
+            <a:r>
+              <a:rPr dirty="0"/>
+              <a:t> </a:t>
+            </a:r>
+            <a:r>
+              <a:rPr dirty="0" err="1"/>
+              <a:t>tedavi</a:t>
+            </a:r>
+            <a:r>
+              <a:rPr dirty="0"/>
+              <a:t> </a:t>
+            </a:r>
+            <a:r>
+              <a:rPr dirty="0" err="1"/>
+              <a:t>grubunda</a:t>
+            </a:r>
+            <a:r>
+              <a:rPr dirty="0"/>
+              <a:t> </a:t>
+            </a:r>
+            <a:r>
+              <a:rPr dirty="0" err="1"/>
+              <a:t>olduğu</a:t>
+            </a:r>
+            <a:r>
+              <a:rPr dirty="0"/>
+              <a:t> </a:t>
+            </a:r>
+            <a:r>
+              <a:rPr dirty="0" err="1"/>
+              <a:t>ve</a:t>
+            </a:r>
+            <a:r>
+              <a:rPr dirty="0"/>
+              <a:t> </a:t>
+            </a:r>
+            <a:r>
+              <a:rPr dirty="0" err="1"/>
+              <a:t>kombine</a:t>
+            </a:r>
+            <a:r>
+              <a:rPr dirty="0"/>
+              <a:t> </a:t>
+            </a:r>
+            <a:r>
+              <a:rPr dirty="0" err="1"/>
+              <a:t>tedavinin</a:t>
+            </a:r>
+            <a:r>
+              <a:rPr dirty="0"/>
+              <a:t> </a:t>
+            </a:r>
+            <a:r>
+              <a:rPr dirty="0" err="1"/>
+              <a:t>diğer</a:t>
+            </a:r>
+            <a:r>
+              <a:rPr dirty="0"/>
+              <a:t> </a:t>
+            </a:r>
+            <a:r>
+              <a:rPr dirty="0" err="1"/>
+              <a:t>tüm</a:t>
+            </a:r>
+            <a:r>
+              <a:rPr dirty="0"/>
+              <a:t> </a:t>
+            </a:r>
+            <a:r>
+              <a:rPr dirty="0" err="1"/>
+              <a:t>seçeneklerden</a:t>
+            </a:r>
+            <a:r>
+              <a:rPr dirty="0"/>
+              <a:t> </a:t>
+            </a:r>
+            <a:r>
+              <a:rPr dirty="0" err="1"/>
+              <a:t>anlamlı</a:t>
+            </a:r>
+            <a:r>
+              <a:rPr dirty="0"/>
+              <a:t> </a:t>
+            </a:r>
+            <a:r>
+              <a:rPr dirty="0" err="1"/>
+              <a:t>derecede</a:t>
+            </a:r>
+            <a:r>
+              <a:rPr dirty="0"/>
+              <a:t> </a:t>
+            </a:r>
+            <a:r>
+              <a:rPr dirty="0" err="1"/>
+              <a:t>üstün</a:t>
+            </a:r>
+            <a:r>
+              <a:rPr dirty="0"/>
+              <a:t> </a:t>
+            </a:r>
+            <a:r>
+              <a:rPr dirty="0" err="1"/>
+              <a:t>olduğu</a:t>
+            </a:r>
+            <a:r>
+              <a:rPr dirty="0"/>
+              <a:t> </a:t>
+            </a:r>
+            <a:r>
+              <a:rPr dirty="0" err="1"/>
+              <a:t>bildirilmektedir</a:t>
+            </a:r>
+            <a:r>
+              <a:rPr dirty="0"/>
+              <a:t>.</a:t>
+            </a:r>
+          </a:p>
+          <a:p>
+            <a:r>
+              <a:rPr dirty="0"/>
+              <a:t>NRT </a:t>
+            </a:r>
+            <a:r>
+              <a:rPr dirty="0" err="1"/>
+              <a:t>grubunda</a:t>
+            </a:r>
+            <a:r>
+              <a:rPr dirty="0"/>
+              <a:t> </a:t>
+            </a:r>
+            <a:r>
+              <a:rPr dirty="0" err="1"/>
+              <a:t>oran</a:t>
+            </a:r>
+            <a:r>
+              <a:rPr dirty="0"/>
+              <a:t> </a:t>
+            </a:r>
+            <a:r>
+              <a:rPr dirty="0" err="1"/>
+              <a:t>yüzde</a:t>
+            </a:r>
+            <a:r>
+              <a:rPr dirty="0"/>
+              <a:t> 37,5, </a:t>
+            </a:r>
+            <a:r>
+              <a:rPr dirty="0" err="1"/>
+              <a:t>sitizin</a:t>
+            </a:r>
+            <a:r>
+              <a:rPr dirty="0"/>
+              <a:t> </a:t>
+            </a:r>
+            <a:r>
+              <a:rPr dirty="0" err="1"/>
+              <a:t>ve</a:t>
+            </a:r>
+            <a:r>
+              <a:rPr dirty="0"/>
+              <a:t> </a:t>
+            </a:r>
+            <a:r>
+              <a:rPr dirty="0" err="1"/>
+              <a:t>yalnızca</a:t>
+            </a:r>
+            <a:r>
+              <a:rPr dirty="0"/>
+              <a:t> </a:t>
+            </a:r>
+            <a:r>
+              <a:rPr dirty="0" err="1"/>
+              <a:t>davranışsal</a:t>
+            </a:r>
+            <a:r>
+              <a:rPr dirty="0"/>
+              <a:t> </a:t>
+            </a:r>
+            <a:r>
+              <a:rPr dirty="0" err="1"/>
+              <a:t>tedavi</a:t>
+            </a:r>
+            <a:r>
+              <a:rPr dirty="0"/>
+              <a:t> </a:t>
+            </a:r>
+            <a:r>
+              <a:rPr dirty="0" err="1"/>
+              <a:t>gruplarında</a:t>
+            </a:r>
+            <a:r>
+              <a:rPr dirty="0"/>
+              <a:t> </a:t>
+            </a:r>
+            <a:r>
+              <a:rPr dirty="0" err="1"/>
+              <a:t>yüzde</a:t>
+            </a:r>
+            <a:r>
+              <a:rPr dirty="0"/>
+              <a:t> 35,3'tür. En </a:t>
+            </a:r>
+            <a:r>
+              <a:rPr dirty="0" err="1"/>
+              <a:t>düşük</a:t>
+            </a:r>
+            <a:r>
+              <a:rPr dirty="0"/>
+              <a:t> </a:t>
+            </a:r>
+            <a:r>
+              <a:rPr dirty="0" err="1"/>
+              <a:t>oran</a:t>
+            </a:r>
+            <a:r>
+              <a:rPr dirty="0"/>
+              <a:t> </a:t>
+            </a:r>
+            <a:r>
+              <a:rPr dirty="0" err="1"/>
+              <a:t>yüzde</a:t>
+            </a:r>
+            <a:r>
+              <a:rPr dirty="0"/>
+              <a:t> 16,5</a:t>
+            </a:r>
+            <a:r>
+              <a:rPr lang="tr-TR" dirty="0"/>
+              <a:t>2</a:t>
+            </a:r>
+            <a:r>
+              <a:rPr dirty="0"/>
+              <a:t> </a:t>
+            </a:r>
+            <a:r>
+              <a:rPr dirty="0" err="1"/>
+              <a:t>ile</a:t>
+            </a:r>
+            <a:r>
+              <a:rPr dirty="0"/>
+              <a:t> bupropion </a:t>
+            </a:r>
+            <a:r>
+              <a:rPr dirty="0" err="1"/>
+              <a:t>monoterapisindedir</a:t>
+            </a:r>
+            <a:r>
+              <a:rPr dirty="0"/>
+              <a:t>. </a:t>
+            </a:r>
+            <a:r>
+              <a:rPr dirty="0" err="1"/>
+              <a:t>Gruplar</a:t>
+            </a:r>
+            <a:r>
+              <a:rPr dirty="0"/>
+              <a:t> </a:t>
+            </a:r>
+            <a:r>
+              <a:rPr dirty="0" err="1"/>
+              <a:t>arasındaki</a:t>
+            </a:r>
+            <a:r>
+              <a:rPr dirty="0"/>
+              <a:t> fark </a:t>
+            </a:r>
+            <a:r>
+              <a:rPr dirty="0" err="1"/>
+              <a:t>anlamlıdır</a:t>
+            </a:r>
+            <a:r>
+              <a:rPr dirty="0"/>
+              <a:t>, p&lt;0,001.</a:t>
             </a:r>
           </a:p>
         </p:txBody>
@@ -1548,17 +3877,356 @@
           <a:lstStyle/>
           <a:p>
             <a:r>
-              <a:t>Tablo 6'da lojistik regresyon sonuçları görülmektedir. Referans grup bupropion monoterapisidir ve Exp(B) sütunu odds oranını vermektedir.</a:t>
-            </a:r>
-          </a:p>
-          <a:p>
-            <a:r>
-              <a:t>Bupropiona göre bırakma olasılığı vareniklinde 4,0, kombine tedavide 4,0, NRT'de 3,0, sitizinde 2,8 kat yüksektir. Farmakolojik tedavi almayanlarda görülen 2,8 katlık fark anlamlı değildir.</a:t>
-            </a:r>
-          </a:p>
-          <a:p>
-            <a:r>
-              <a:t>Hanede sigara içen olmaması bırakma olasılığını yaklaşık iki katına, sigaraya bağlı yakınma olmaması 1,6 katına çıkarmaktadır. Ayrıca FNBT puanının bırakma başarısının negatif bir öngörücüsü olduğu bildirilmektedir.</a:t>
+              <a:rPr lang="tr-TR" dirty="0"/>
+              <a:t>Burada </a:t>
+            </a:r>
+            <a:r>
+              <a:rPr dirty="0" err="1"/>
+              <a:t>lojistik</a:t>
+            </a:r>
+            <a:r>
+              <a:rPr dirty="0"/>
+              <a:t> </a:t>
+            </a:r>
+            <a:r>
+              <a:rPr dirty="0" err="1"/>
+              <a:t>regresyon</a:t>
+            </a:r>
+            <a:r>
+              <a:rPr dirty="0"/>
+              <a:t> </a:t>
+            </a:r>
+            <a:r>
+              <a:rPr dirty="0" err="1"/>
+              <a:t>sonuçları</a:t>
+            </a:r>
+            <a:r>
+              <a:rPr dirty="0"/>
+              <a:t> </a:t>
+            </a:r>
+            <a:r>
+              <a:rPr dirty="0" err="1"/>
+              <a:t>görülmektedir</a:t>
+            </a:r>
+            <a:r>
+              <a:rPr dirty="0"/>
+              <a:t>. </a:t>
+            </a:r>
+            <a:r>
+              <a:rPr dirty="0" err="1"/>
+              <a:t>Referans</a:t>
+            </a:r>
+            <a:r>
+              <a:rPr dirty="0"/>
+              <a:t> </a:t>
+            </a:r>
+            <a:r>
+              <a:rPr dirty="0" err="1"/>
+              <a:t>grup</a:t>
+            </a:r>
+            <a:r>
+              <a:rPr dirty="0"/>
+              <a:t> bupropion </a:t>
+            </a:r>
+            <a:r>
+              <a:rPr dirty="0" err="1"/>
+              <a:t>monoterapisidir</a:t>
+            </a:r>
+            <a:r>
+              <a:rPr dirty="0"/>
+              <a:t> </a:t>
+            </a:r>
+            <a:r>
+              <a:rPr dirty="0" err="1"/>
+              <a:t>ve</a:t>
+            </a:r>
+            <a:r>
+              <a:rPr dirty="0"/>
+              <a:t> Exp(B) </a:t>
+            </a:r>
+            <a:r>
+              <a:rPr dirty="0" err="1"/>
+              <a:t>sütunu</a:t>
+            </a:r>
+            <a:r>
+              <a:rPr dirty="0"/>
+              <a:t> odds </a:t>
+            </a:r>
+            <a:r>
+              <a:rPr dirty="0" err="1"/>
+              <a:t>oranını</a:t>
+            </a:r>
+            <a:r>
+              <a:rPr dirty="0"/>
+              <a:t> </a:t>
+            </a:r>
+            <a:r>
+              <a:rPr dirty="0" err="1"/>
+              <a:t>vermektedir</a:t>
+            </a:r>
+            <a:r>
+              <a:rPr dirty="0"/>
+              <a:t>.</a:t>
+            </a:r>
+          </a:p>
+          <a:p>
+            <a:r>
+              <a:rPr dirty="0" err="1"/>
+              <a:t>Bupropiona</a:t>
+            </a:r>
+            <a:r>
+              <a:rPr dirty="0"/>
+              <a:t> </a:t>
+            </a:r>
+            <a:r>
+              <a:rPr dirty="0" err="1"/>
+              <a:t>göre</a:t>
+            </a:r>
+            <a:r>
+              <a:rPr dirty="0"/>
+              <a:t> </a:t>
+            </a:r>
+            <a:r>
+              <a:rPr dirty="0" err="1"/>
+              <a:t>bırakma</a:t>
+            </a:r>
+            <a:r>
+              <a:rPr dirty="0"/>
+              <a:t> </a:t>
+            </a:r>
+            <a:r>
+              <a:rPr dirty="0" err="1"/>
+              <a:t>olasılığı</a:t>
+            </a:r>
+            <a:r>
+              <a:rPr dirty="0"/>
+              <a:t> </a:t>
+            </a:r>
+            <a:r>
+              <a:rPr dirty="0" err="1"/>
+              <a:t>vareniklinde</a:t>
+            </a:r>
+            <a:r>
+              <a:rPr dirty="0"/>
+              <a:t> 4,0, </a:t>
+            </a:r>
+            <a:r>
+              <a:rPr dirty="0" err="1"/>
+              <a:t>kombine</a:t>
+            </a:r>
+            <a:r>
+              <a:rPr dirty="0"/>
+              <a:t> </a:t>
+            </a:r>
+            <a:r>
+              <a:rPr dirty="0" err="1"/>
+              <a:t>tedavide</a:t>
+            </a:r>
+            <a:r>
+              <a:rPr dirty="0"/>
+              <a:t> 4,0, </a:t>
+            </a:r>
+            <a:r>
+              <a:rPr dirty="0" err="1"/>
+              <a:t>NRT'de</a:t>
+            </a:r>
+            <a:r>
+              <a:rPr dirty="0"/>
+              <a:t> 3,0, </a:t>
+            </a:r>
+            <a:r>
+              <a:rPr dirty="0" err="1"/>
+              <a:t>sitizinde</a:t>
+            </a:r>
+            <a:r>
+              <a:rPr dirty="0"/>
+              <a:t> 2,8 kat </a:t>
+            </a:r>
+            <a:r>
+              <a:rPr dirty="0" err="1"/>
+              <a:t>yüksektir</a:t>
+            </a:r>
+            <a:r>
+              <a:rPr dirty="0"/>
+              <a:t>. </a:t>
+            </a:r>
+            <a:r>
+              <a:rPr dirty="0" err="1"/>
+              <a:t>Farmakolojik</a:t>
+            </a:r>
+            <a:r>
+              <a:rPr dirty="0"/>
+              <a:t> </a:t>
+            </a:r>
+            <a:r>
+              <a:rPr dirty="0" err="1"/>
+              <a:t>tedavi</a:t>
+            </a:r>
+            <a:r>
+              <a:rPr dirty="0"/>
+              <a:t> </a:t>
+            </a:r>
+            <a:r>
+              <a:rPr dirty="0" err="1"/>
+              <a:t>almayanlarda</a:t>
+            </a:r>
+            <a:r>
+              <a:rPr dirty="0"/>
+              <a:t> </a:t>
+            </a:r>
+            <a:r>
+              <a:rPr dirty="0" err="1"/>
+              <a:t>görülen</a:t>
+            </a:r>
+            <a:r>
+              <a:rPr dirty="0"/>
+              <a:t> 2,8 </a:t>
+            </a:r>
+            <a:r>
+              <a:rPr dirty="0" err="1"/>
+              <a:t>katlık</a:t>
+            </a:r>
+            <a:r>
+              <a:rPr dirty="0"/>
+              <a:t> fark </a:t>
+            </a:r>
+            <a:r>
+              <a:rPr dirty="0" err="1"/>
+              <a:t>anlamlı</a:t>
+            </a:r>
+            <a:r>
+              <a:rPr dirty="0"/>
+              <a:t> </a:t>
+            </a:r>
+            <a:r>
+              <a:rPr dirty="0" err="1"/>
+              <a:t>değildir</a:t>
+            </a:r>
+            <a:r>
+              <a:rPr dirty="0"/>
+              <a:t>.</a:t>
+            </a:r>
+          </a:p>
+          <a:p>
+            <a:r>
+              <a:rPr dirty="0" err="1"/>
+              <a:t>Hanede</a:t>
+            </a:r>
+            <a:r>
+              <a:rPr dirty="0"/>
+              <a:t> </a:t>
+            </a:r>
+            <a:r>
+              <a:rPr dirty="0" err="1"/>
+              <a:t>sigara</a:t>
+            </a:r>
+            <a:r>
+              <a:rPr dirty="0"/>
+              <a:t> </a:t>
+            </a:r>
+            <a:r>
+              <a:rPr dirty="0" err="1"/>
+              <a:t>içen</a:t>
+            </a:r>
+            <a:r>
+              <a:rPr dirty="0"/>
+              <a:t> </a:t>
+            </a:r>
+            <a:r>
+              <a:rPr dirty="0" err="1"/>
+              <a:t>olmaması</a:t>
+            </a:r>
+            <a:r>
+              <a:rPr dirty="0"/>
+              <a:t> </a:t>
+            </a:r>
+            <a:r>
+              <a:rPr dirty="0" err="1"/>
+              <a:t>bırakma</a:t>
+            </a:r>
+            <a:r>
+              <a:rPr dirty="0"/>
+              <a:t> </a:t>
+            </a:r>
+            <a:r>
+              <a:rPr dirty="0" err="1"/>
+              <a:t>olasılığını</a:t>
+            </a:r>
+            <a:r>
+              <a:rPr dirty="0"/>
+              <a:t> </a:t>
+            </a:r>
+            <a:r>
+              <a:rPr dirty="0" err="1"/>
+              <a:t>yaklaşık</a:t>
+            </a:r>
+            <a:r>
+              <a:rPr dirty="0"/>
+              <a:t> </a:t>
+            </a:r>
+            <a:r>
+              <a:rPr dirty="0" err="1"/>
+              <a:t>iki</a:t>
+            </a:r>
+            <a:r>
+              <a:rPr dirty="0"/>
+              <a:t> </a:t>
+            </a:r>
+            <a:r>
+              <a:rPr dirty="0" err="1"/>
+              <a:t>katına</a:t>
+            </a:r>
+            <a:r>
+              <a:rPr dirty="0"/>
+              <a:t>, </a:t>
+            </a:r>
+            <a:r>
+              <a:rPr dirty="0" err="1"/>
+              <a:t>sigaraya</a:t>
+            </a:r>
+            <a:r>
+              <a:rPr dirty="0"/>
+              <a:t> </a:t>
+            </a:r>
+            <a:r>
+              <a:rPr dirty="0" err="1"/>
+              <a:t>bağlı</a:t>
+            </a:r>
+            <a:r>
+              <a:rPr dirty="0"/>
+              <a:t> </a:t>
+            </a:r>
+            <a:r>
+              <a:rPr dirty="0" err="1"/>
+              <a:t>yakınma</a:t>
+            </a:r>
+            <a:r>
+              <a:rPr dirty="0"/>
+              <a:t> </a:t>
+            </a:r>
+            <a:r>
+              <a:rPr dirty="0" err="1"/>
+              <a:t>olmaması</a:t>
+            </a:r>
+            <a:r>
+              <a:rPr dirty="0"/>
+              <a:t> 1,6 </a:t>
+            </a:r>
+            <a:r>
+              <a:rPr dirty="0" err="1"/>
+              <a:t>katına</a:t>
+            </a:r>
+            <a:r>
+              <a:rPr dirty="0"/>
+              <a:t> </a:t>
+            </a:r>
+            <a:r>
+              <a:rPr dirty="0" err="1"/>
+              <a:t>çıkarmaktadır</a:t>
+            </a:r>
+            <a:r>
+              <a:rPr dirty="0"/>
+              <a:t>.</a:t>
             </a:r>
           </a:p>
         </p:txBody>
@@ -1618,7 +4286,7 @@
       </p:grpSpPr>
       <p:sp>
         <p:nvSpPr>
-          <p:cNvPr id="2" name="Slide Image Placeholder 1"/>
+          <p:cNvPr id="2" name="Slayt Resmi Yer Tutucusu 1"/>
           <p:cNvSpPr>
             <a:spLocks noGrp="1" noRot="1" noChangeAspect="1"/>
           </p:cNvSpPr>
@@ -1626,11 +4294,25 @@
             <p:ph type="sldImg"/>
           </p:nvPr>
         </p:nvSpPr>
-        <p:spPr/>
-      </p:sp>
-      <p:sp>
-        <p:nvSpPr>
-          <p:cNvPr id="3" name="Notes Placeholder 2"/>
+        <p:spPr>
+          <a:xfrm>
+            <a:off x="-228600" y="1524000"/>
+            <a:ext cx="7315200" cy="4114800"/>
+          </a:xfrm>
+          <a:prstGeom prst="rect">
+            <a:avLst/>
+          </a:prstGeom>
+          <a:noFill/>
+          <a:ln w="12700">
+            <a:solidFill>
+              <a:prstClr val="black"/>
+            </a:solidFill>
+          </a:ln>
+        </p:spPr>
+      </p:sp>
+      <p:sp>
+        <p:nvSpPr>
+          <p:cNvPr id="3" name="Not Yer Tutucusu 2"/>
           <p:cNvSpPr>
             <a:spLocks noGrp="1"/>
           </p:cNvSpPr>
@@ -1638,49 +4320,71 @@
             <p:ph type="body" idx="1"/>
           </p:nvPr>
         </p:nvSpPr>
-        <p:spPr/>
+        <p:spPr>
+          <a:xfrm>
+            <a:off x="685800" y="5867400"/>
+            <a:ext cx="5486400" cy="4800600"/>
+          </a:xfrm>
+          <a:prstGeom prst="rect">
+            <a:avLst/>
+          </a:prstGeom>
+        </p:spPr>
         <p:txBody>
           <a:bodyPr/>
           <a:lstStyle/>
           <a:p>
             <a:r>
-              <a:t>Sunum 26 slayttan oluşmakta ve yaklaşık yirmi dk sürecektir.</a:t>
-            </a:r>
-          </a:p>
-          <a:p>
-            <a:r>
-              <a:t>Makalenin künyesi ve giriş bölümüyle başlayıp gereç ve yöntemi aktaracağım. Bulgular bölümünde makaledeki tabloyu özgün halleriyle göstereceğim. Ardından hocalarımızın tartışma ve sonuçlarını aktaracağım.</a:t>
-            </a:r>
-          </a:p>
-        </p:txBody>
-      </p:sp>
-      <p:sp>
-        <p:nvSpPr>
-          <p:cNvPr id="4" name="Slide Number Placeholder 3"/>
-          <p:cNvSpPr>
-            <a:spLocks noGrp="1"/>
-          </p:cNvSpPr>
-          <p:nvPr>
-            <p:ph type="sldNum" sz="quarter" idx="10"/>
-          </p:nvPr>
-        </p:nvSpPr>
-        <p:spPr/>
-        <p:txBody>
-          <a:bodyPr/>
-          <a:lstStyle/>
-          <a:p>
-            <a:fld id="{F7021451-1387-4CA6-816F-3879F97B5CBC}" type="slidenum">
-              <a:rPr lang="en-US"/>
-              <a:t>2</a:t>
-            </a:fld>
-            <a:endParaRPr lang="en-US"/>
+              <a:rPr lang="tr-TR" dirty="0"/>
+              <a:t>makalenin ilk sayfasını görüyorsunuz. Makale Türkiye Aile Hekimleri Uzmanlık Derneği'nin yayın organı olan </a:t>
+            </a:r>
+            <a:r>
+              <a:rPr lang="tr-TR" dirty="0" err="1"/>
+              <a:t>Turkish</a:t>
+            </a:r>
+            <a:r>
+              <a:rPr lang="tr-TR" dirty="0"/>
+              <a:t> </a:t>
+            </a:r>
+            <a:r>
+              <a:rPr lang="tr-TR" dirty="0" err="1"/>
+              <a:t>Journal</a:t>
+            </a:r>
+            <a:r>
+              <a:rPr lang="tr-TR" dirty="0"/>
+              <a:t> of </a:t>
+            </a:r>
+            <a:r>
+              <a:rPr lang="tr-TR" dirty="0" err="1"/>
+              <a:t>Family</a:t>
+            </a:r>
+            <a:r>
+              <a:rPr lang="tr-TR" dirty="0"/>
+              <a:t> </a:t>
+            </a:r>
+            <a:r>
+              <a:rPr lang="tr-TR" dirty="0" err="1"/>
+              <a:t>Practice'te</a:t>
+            </a:r>
+            <a:r>
+              <a:rPr lang="tr-TR" dirty="0"/>
+              <a:t> 2026 yılında yayımlanmıştır.</a:t>
+            </a:r>
+          </a:p>
+          <a:p>
+            <a:r>
+              <a:rPr lang="tr-TR" dirty="0"/>
+              <a:t>Çalışma retrospektif, kesitsel bir araştırmadır. Veriler Samsun Eğitim ve Araştırma Hastanesi Sigara Bırakma Polikliniği'nden elde edilmiştir.</a:t>
+            </a:r>
+          </a:p>
+          <a:p>
+            <a:endParaRPr lang="tr-TR" dirty="0"/>
           </a:p>
         </p:txBody>
       </p:sp>
     </p:spTree>
     <p:extLst>
       <p:ext uri="{BB962C8B-B14F-4D97-AF65-F5344CB8AC3E}">
-        <p14:creationId xmlns:p14="http://schemas.microsoft.com/office/powerpoint/2010/main" val="1024086991"/>
+        <p14:creationId xmlns:p14="http://schemas.microsoft.com/office/powerpoint/2010/main" val="591752269"/>
       </p:ext>
     </p:extLst>
   </p:cSld>
@@ -1735,17 +4439,495 @@
           <a:lstStyle/>
           <a:p>
             <a:r>
-              <a:t>Makalede bulgular literatürle karşılaştırılmaktadır. Vareniklinin bupropiona üstünlüğü büyük ölçekli meta-analizler ve randomize kontrollü çalışmalarla uyumludur. Bu üstünlüğün, vareniklinin α4β2 nikotinik reseptördeki parsiyel agonist etkisiyle ilişkili olduğu düşünülmektedir.</a:t>
-            </a:r>
-          </a:p>
-          <a:p>
-            <a:r>
-              <a:t>Sitizin vareniklinle benzer mekanizmaya sahip, maliyet-etkin bir seçenektir; plaseboya üstün ve NRT ile benzer etkinlikte bulunmuştur. Kombine tedavinin üstünlüğü, monoterapi yetersiz kaldığında kombinasyon öneren kılavuzlarla uyumludur.</a:t>
-            </a:r>
-          </a:p>
-          <a:p>
-            <a:r>
-              <a:t>Benli ve arkadaşlarının çalışmasında da vareniklin ilk altı ayda bupropiondan daha yüksek bırakma oranı sağlamıştır.</a:t>
+              <a:rPr dirty="0" err="1"/>
+              <a:t>Makalede</a:t>
+            </a:r>
+            <a:r>
+              <a:rPr dirty="0"/>
+              <a:t> </a:t>
+            </a:r>
+            <a:r>
+              <a:rPr dirty="0" err="1"/>
+              <a:t>bulgular</a:t>
+            </a:r>
+            <a:r>
+              <a:rPr dirty="0"/>
+              <a:t> </a:t>
+            </a:r>
+            <a:r>
+              <a:rPr dirty="0" err="1"/>
+              <a:t>literatürle</a:t>
+            </a:r>
+            <a:r>
+              <a:rPr dirty="0"/>
+              <a:t> </a:t>
+            </a:r>
+            <a:r>
+              <a:rPr dirty="0" err="1"/>
+              <a:t>karşılaştırılmaktadır</a:t>
+            </a:r>
+            <a:r>
+              <a:rPr dirty="0"/>
+              <a:t>. </a:t>
+            </a:r>
+            <a:r>
+              <a:rPr dirty="0" err="1"/>
+              <a:t>Vareniklinin</a:t>
+            </a:r>
+            <a:r>
+              <a:rPr dirty="0"/>
+              <a:t> </a:t>
+            </a:r>
+            <a:r>
+              <a:rPr dirty="0" err="1"/>
+              <a:t>bupropiona</a:t>
+            </a:r>
+            <a:r>
+              <a:rPr dirty="0"/>
+              <a:t> </a:t>
+            </a:r>
+            <a:r>
+              <a:rPr dirty="0" err="1"/>
+              <a:t>üstünlüğü</a:t>
+            </a:r>
+            <a:r>
+              <a:rPr dirty="0"/>
+              <a:t> </a:t>
+            </a:r>
+            <a:r>
+              <a:rPr dirty="0" err="1"/>
+              <a:t>büyük</a:t>
+            </a:r>
+            <a:r>
+              <a:rPr dirty="0"/>
+              <a:t> </a:t>
+            </a:r>
+            <a:r>
+              <a:rPr dirty="0" err="1"/>
+              <a:t>ölçekli</a:t>
+            </a:r>
+            <a:r>
+              <a:rPr dirty="0"/>
+              <a:t> meta-</a:t>
+            </a:r>
+            <a:r>
+              <a:rPr dirty="0" err="1"/>
+              <a:t>analizler</a:t>
+            </a:r>
+            <a:r>
+              <a:rPr dirty="0"/>
+              <a:t> </a:t>
+            </a:r>
+            <a:r>
+              <a:rPr dirty="0" err="1"/>
+              <a:t>ve</a:t>
+            </a:r>
+            <a:r>
+              <a:rPr dirty="0"/>
+              <a:t> randomize </a:t>
+            </a:r>
+            <a:r>
+              <a:rPr dirty="0" err="1"/>
+              <a:t>kontrollü</a:t>
+            </a:r>
+            <a:r>
+              <a:rPr dirty="0"/>
+              <a:t> </a:t>
+            </a:r>
+            <a:r>
+              <a:rPr dirty="0" err="1"/>
+              <a:t>çalışmalarla</a:t>
+            </a:r>
+            <a:r>
+              <a:rPr dirty="0"/>
+              <a:t> </a:t>
+            </a:r>
+            <a:r>
+              <a:rPr dirty="0" err="1"/>
+              <a:t>uyumludur</a:t>
+            </a:r>
+            <a:r>
+              <a:rPr dirty="0"/>
+              <a:t>. Bu </a:t>
+            </a:r>
+            <a:r>
+              <a:rPr dirty="0" err="1"/>
+              <a:t>üstünlüğün</a:t>
+            </a:r>
+            <a:r>
+              <a:rPr dirty="0"/>
+              <a:t>, </a:t>
+            </a:r>
+            <a:r>
+              <a:rPr dirty="0" err="1"/>
+              <a:t>vareniklinin</a:t>
+            </a:r>
+            <a:r>
+              <a:rPr dirty="0"/>
+              <a:t> α4β2 </a:t>
+            </a:r>
+            <a:r>
+              <a:rPr dirty="0" err="1"/>
+              <a:t>nikotinik</a:t>
+            </a:r>
+            <a:r>
+              <a:rPr dirty="0"/>
+              <a:t> </a:t>
+            </a:r>
+            <a:r>
+              <a:rPr dirty="0" err="1"/>
+              <a:t>reseptördeki</a:t>
+            </a:r>
+            <a:r>
+              <a:rPr dirty="0"/>
+              <a:t> </a:t>
+            </a:r>
+            <a:r>
+              <a:rPr dirty="0" err="1"/>
+              <a:t>parsiyel</a:t>
+            </a:r>
+            <a:r>
+              <a:rPr dirty="0"/>
+              <a:t> agonist </a:t>
+            </a:r>
+            <a:r>
+              <a:rPr dirty="0" err="1"/>
+              <a:t>etkisiyle</a:t>
+            </a:r>
+            <a:r>
+              <a:rPr dirty="0"/>
+              <a:t> </a:t>
+            </a:r>
+            <a:r>
+              <a:rPr dirty="0" err="1"/>
+              <a:t>ilişkili</a:t>
+            </a:r>
+            <a:r>
+              <a:rPr dirty="0"/>
+              <a:t> </a:t>
+            </a:r>
+            <a:r>
+              <a:rPr dirty="0" err="1"/>
+              <a:t>olduğu</a:t>
+            </a:r>
+            <a:r>
+              <a:rPr dirty="0"/>
+              <a:t> </a:t>
+            </a:r>
+            <a:r>
+              <a:rPr dirty="0" err="1"/>
+              <a:t>düşünülmektedir</a:t>
+            </a:r>
+            <a:r>
+              <a:rPr dirty="0"/>
+              <a:t>.</a:t>
+            </a:r>
+          </a:p>
+          <a:p>
+            <a:r>
+              <a:rPr dirty="0" err="1"/>
+              <a:t>Sitizin</a:t>
+            </a:r>
+            <a:r>
+              <a:rPr dirty="0"/>
+              <a:t> </a:t>
+            </a:r>
+            <a:r>
+              <a:rPr dirty="0" err="1"/>
+              <a:t>vareniklinle</a:t>
+            </a:r>
+            <a:r>
+              <a:rPr dirty="0"/>
+              <a:t> </a:t>
+            </a:r>
+            <a:r>
+              <a:rPr dirty="0" err="1"/>
+              <a:t>benzer</a:t>
+            </a:r>
+            <a:r>
+              <a:rPr dirty="0"/>
+              <a:t> </a:t>
+            </a:r>
+            <a:r>
+              <a:rPr dirty="0" err="1"/>
+              <a:t>mekanizmaya</a:t>
+            </a:r>
+            <a:r>
+              <a:rPr dirty="0"/>
+              <a:t> </a:t>
+            </a:r>
+            <a:r>
+              <a:rPr dirty="0" err="1"/>
+              <a:t>sahip</a:t>
+            </a:r>
+            <a:r>
+              <a:rPr dirty="0"/>
+              <a:t>, </a:t>
+            </a:r>
+            <a:r>
+              <a:rPr dirty="0" err="1"/>
+              <a:t>maliyet-etkin</a:t>
+            </a:r>
+            <a:r>
+              <a:rPr dirty="0"/>
+              <a:t> </a:t>
+            </a:r>
+            <a:r>
+              <a:rPr dirty="0" err="1"/>
+              <a:t>bir</a:t>
+            </a:r>
+            <a:r>
+              <a:rPr dirty="0"/>
+              <a:t> </a:t>
+            </a:r>
+            <a:r>
+              <a:rPr dirty="0" err="1"/>
+              <a:t>seçenektir</a:t>
+            </a:r>
+            <a:r>
+              <a:rPr dirty="0"/>
+              <a:t>; </a:t>
+            </a:r>
+            <a:r>
+              <a:rPr dirty="0" err="1"/>
+              <a:t>plaseboya</a:t>
+            </a:r>
+            <a:r>
+              <a:rPr dirty="0"/>
+              <a:t> </a:t>
+            </a:r>
+            <a:r>
+              <a:rPr dirty="0" err="1"/>
+              <a:t>üstün</a:t>
+            </a:r>
+            <a:r>
+              <a:rPr dirty="0"/>
+              <a:t> </a:t>
+            </a:r>
+            <a:r>
+              <a:rPr dirty="0" err="1"/>
+              <a:t>ve</a:t>
+            </a:r>
+            <a:r>
+              <a:rPr dirty="0"/>
+              <a:t> NRT </a:t>
+            </a:r>
+            <a:r>
+              <a:rPr dirty="0" err="1"/>
+              <a:t>ile</a:t>
+            </a:r>
+            <a:r>
+              <a:rPr dirty="0"/>
+              <a:t> </a:t>
+            </a:r>
+            <a:r>
+              <a:rPr dirty="0" err="1"/>
+              <a:t>benzer</a:t>
+            </a:r>
+            <a:r>
+              <a:rPr dirty="0"/>
+              <a:t> </a:t>
+            </a:r>
+            <a:r>
+              <a:rPr dirty="0" err="1"/>
+              <a:t>etkinlikte</a:t>
+            </a:r>
+            <a:r>
+              <a:rPr dirty="0"/>
+              <a:t> </a:t>
+            </a:r>
+            <a:r>
+              <a:rPr dirty="0" err="1"/>
+              <a:t>bulunmuştur</a:t>
+            </a:r>
+            <a:r>
+              <a:rPr dirty="0"/>
+              <a:t>. </a:t>
+            </a:r>
+            <a:endParaRPr lang="tr-TR" dirty="0"/>
+          </a:p>
+          <a:p>
+            <a:r>
+              <a:rPr dirty="0" err="1"/>
+              <a:t>Kombine</a:t>
+            </a:r>
+            <a:r>
+              <a:rPr dirty="0"/>
+              <a:t> </a:t>
+            </a:r>
+            <a:r>
+              <a:rPr dirty="0" err="1"/>
+              <a:t>tedavinin</a:t>
+            </a:r>
+            <a:r>
+              <a:rPr dirty="0"/>
+              <a:t> </a:t>
+            </a:r>
+            <a:r>
+              <a:rPr dirty="0" err="1"/>
+              <a:t>üstünlüğü</a:t>
+            </a:r>
+            <a:r>
+              <a:rPr dirty="0"/>
+              <a:t>, </a:t>
+            </a:r>
+            <a:r>
+              <a:rPr dirty="0" err="1"/>
+              <a:t>monoterapi</a:t>
+            </a:r>
+            <a:r>
+              <a:rPr dirty="0"/>
+              <a:t> </a:t>
+            </a:r>
+            <a:r>
+              <a:rPr dirty="0" err="1"/>
+              <a:t>yetersiz</a:t>
+            </a:r>
+            <a:r>
+              <a:rPr dirty="0"/>
+              <a:t> </a:t>
+            </a:r>
+            <a:r>
+              <a:rPr dirty="0" err="1"/>
+              <a:t>kaldığında</a:t>
+            </a:r>
+            <a:r>
+              <a:rPr dirty="0"/>
+              <a:t> </a:t>
+            </a:r>
+            <a:r>
+              <a:rPr dirty="0" err="1"/>
+              <a:t>kombinasyon</a:t>
+            </a:r>
+            <a:r>
+              <a:rPr dirty="0"/>
+              <a:t> </a:t>
+            </a:r>
+            <a:r>
+              <a:rPr dirty="0" err="1"/>
+              <a:t>öneren</a:t>
+            </a:r>
+            <a:r>
+              <a:rPr dirty="0"/>
+              <a:t> </a:t>
+            </a:r>
+            <a:r>
+              <a:rPr dirty="0" err="1"/>
+              <a:t>kılavuzlarla</a:t>
+            </a:r>
+            <a:r>
+              <a:rPr dirty="0"/>
+              <a:t> </a:t>
+            </a:r>
+            <a:r>
+              <a:rPr dirty="0" err="1"/>
+              <a:t>uyumludur</a:t>
+            </a:r>
+            <a:r>
+              <a:rPr dirty="0"/>
+              <a:t>.</a:t>
+            </a:r>
+          </a:p>
+          <a:p>
+            <a:r>
+              <a:rPr dirty="0"/>
+              <a:t>Benli </a:t>
+            </a:r>
+            <a:r>
+              <a:rPr dirty="0" err="1"/>
+              <a:t>ve</a:t>
+            </a:r>
+            <a:r>
+              <a:rPr dirty="0"/>
+              <a:t> </a:t>
+            </a:r>
+            <a:r>
+              <a:rPr dirty="0" err="1"/>
+              <a:t>arkadaşlarının</a:t>
+            </a:r>
+            <a:r>
+              <a:rPr dirty="0"/>
+              <a:t> </a:t>
+            </a:r>
+            <a:r>
+              <a:rPr dirty="0" err="1"/>
+              <a:t>çalışmasında</a:t>
+            </a:r>
+            <a:r>
+              <a:rPr dirty="0"/>
+              <a:t> da </a:t>
+            </a:r>
+            <a:r>
+              <a:rPr dirty="0" err="1"/>
+              <a:t>vareniklin</a:t>
+            </a:r>
+            <a:r>
+              <a:rPr dirty="0"/>
+              <a:t> ilk </a:t>
+            </a:r>
+            <a:r>
+              <a:rPr dirty="0" err="1"/>
+              <a:t>altı</a:t>
+            </a:r>
+            <a:r>
+              <a:rPr dirty="0"/>
+              <a:t> </a:t>
+            </a:r>
+            <a:r>
+              <a:rPr dirty="0" err="1"/>
+              <a:t>ayda</a:t>
+            </a:r>
+            <a:r>
+              <a:rPr dirty="0"/>
+              <a:t> </a:t>
+            </a:r>
+            <a:r>
+              <a:rPr dirty="0" err="1"/>
+              <a:t>bupropiondan</a:t>
+            </a:r>
+            <a:r>
+              <a:rPr dirty="0"/>
+              <a:t> </a:t>
+            </a:r>
+            <a:r>
+              <a:rPr dirty="0" err="1"/>
+              <a:t>daha</a:t>
+            </a:r>
+            <a:r>
+              <a:rPr dirty="0"/>
+              <a:t> </a:t>
+            </a:r>
+            <a:r>
+              <a:rPr dirty="0" err="1"/>
+              <a:t>yüksek</a:t>
+            </a:r>
+            <a:r>
+              <a:rPr dirty="0"/>
+              <a:t> </a:t>
+            </a:r>
+            <a:r>
+              <a:rPr dirty="0" err="1"/>
+              <a:t>bırakma</a:t>
+            </a:r>
+            <a:r>
+              <a:rPr dirty="0"/>
+              <a:t> </a:t>
+            </a:r>
+            <a:r>
+              <a:rPr dirty="0" err="1"/>
+              <a:t>oranı</a:t>
+            </a:r>
+            <a:r>
+              <a:rPr dirty="0"/>
+              <a:t> </a:t>
+            </a:r>
+            <a:r>
+              <a:rPr dirty="0" err="1"/>
+              <a:t>sağlamıştır</a:t>
+            </a:r>
+            <a:r>
+              <a:rPr dirty="0"/>
+              <a:t>.</a:t>
             </a:r>
           </a:p>
         </p:txBody>
@@ -1831,17 +5013,763 @@
           <a:lstStyle/>
           <a:p>
             <a:r>
-              <a:t>Makalede davranışsal desteğin önemi vurgulanmaktadır: Daha fazla görüşmeye gelen hastalarda bırakma oranı daha yüksektir.</a:t>
-            </a:r>
-          </a:p>
-          <a:p>
-            <a:r>
-              <a:t>Hanede sigara içen olmaması bırakma olasılığını neredeyse iki katına çıkarmaktadır. Literatürde eşin veya aile bireylerinin sigara içmesi hem tetikleyici hem de motivasyon engeli olarak tanımlanmaktadır.</a:t>
-            </a:r>
-          </a:p>
-          <a:p>
-            <a:r>
-              <a:t>Hastaların ortalama FNBT puanı, tedavi arayan sigara içicilerinde bildirilen yaklaşık 5 puanla uyumludur ve yüksek puan düşük başarıyla ilişkilidir. Yakınması olmayan hastalarda başarının daha yüksek olması uzun vadeli sağlığı korumaya yönelik içsel motivasyonla açıklanmaktadır. İkinci bir olasılık olarak, kronik hastalığı veya semptomu olan bireylerin sigarayı bir baş etme aracı olarak kullanıyor olabileceği ve bunun bırakmayı zorlaştırabileceği belirtilmektedir.</a:t>
+              <a:rPr dirty="0" err="1"/>
+              <a:t>Makalede</a:t>
+            </a:r>
+            <a:r>
+              <a:rPr dirty="0"/>
+              <a:t> </a:t>
+            </a:r>
+            <a:r>
+              <a:rPr dirty="0" err="1"/>
+              <a:t>davranışsal</a:t>
+            </a:r>
+            <a:r>
+              <a:rPr dirty="0"/>
+              <a:t> </a:t>
+            </a:r>
+            <a:r>
+              <a:rPr dirty="0" err="1"/>
+              <a:t>desteğin</a:t>
+            </a:r>
+            <a:r>
+              <a:rPr dirty="0"/>
+              <a:t> </a:t>
+            </a:r>
+            <a:r>
+              <a:rPr dirty="0" err="1"/>
+              <a:t>önemi</a:t>
+            </a:r>
+            <a:r>
+              <a:rPr dirty="0"/>
+              <a:t> </a:t>
+            </a:r>
+            <a:r>
+              <a:rPr dirty="0" err="1"/>
+              <a:t>vurgulanmaktadır</a:t>
+            </a:r>
+            <a:r>
+              <a:rPr dirty="0"/>
+              <a:t>: Daha </a:t>
+            </a:r>
+            <a:r>
+              <a:rPr dirty="0" err="1"/>
+              <a:t>fazla</a:t>
+            </a:r>
+            <a:r>
+              <a:rPr dirty="0"/>
+              <a:t> </a:t>
+            </a:r>
+            <a:r>
+              <a:rPr dirty="0" err="1"/>
+              <a:t>görüşmeye</a:t>
+            </a:r>
+            <a:r>
+              <a:rPr dirty="0"/>
+              <a:t> </a:t>
+            </a:r>
+            <a:r>
+              <a:rPr dirty="0" err="1"/>
+              <a:t>gelen</a:t>
+            </a:r>
+            <a:r>
+              <a:rPr dirty="0"/>
+              <a:t> </a:t>
+            </a:r>
+            <a:r>
+              <a:rPr dirty="0" err="1"/>
+              <a:t>hastalarda</a:t>
+            </a:r>
+            <a:r>
+              <a:rPr dirty="0"/>
+              <a:t> </a:t>
+            </a:r>
+            <a:r>
+              <a:rPr dirty="0" err="1"/>
+              <a:t>bırakma</a:t>
+            </a:r>
+            <a:r>
+              <a:rPr dirty="0"/>
+              <a:t> </a:t>
+            </a:r>
+            <a:r>
+              <a:rPr dirty="0" err="1"/>
+              <a:t>oranı</a:t>
+            </a:r>
+            <a:r>
+              <a:rPr dirty="0"/>
+              <a:t> </a:t>
+            </a:r>
+            <a:r>
+              <a:rPr dirty="0" err="1"/>
+              <a:t>daha</a:t>
+            </a:r>
+            <a:r>
+              <a:rPr dirty="0"/>
+              <a:t> </a:t>
+            </a:r>
+            <a:r>
+              <a:rPr dirty="0" err="1"/>
+              <a:t>yüksektir</a:t>
+            </a:r>
+            <a:r>
+              <a:rPr dirty="0"/>
+              <a:t>.</a:t>
+            </a:r>
+          </a:p>
+          <a:p>
+            <a:r>
+              <a:rPr dirty="0" err="1"/>
+              <a:t>Hanede</a:t>
+            </a:r>
+            <a:r>
+              <a:rPr dirty="0"/>
+              <a:t> </a:t>
+            </a:r>
+            <a:r>
+              <a:rPr dirty="0" err="1"/>
+              <a:t>sigara</a:t>
+            </a:r>
+            <a:r>
+              <a:rPr dirty="0"/>
+              <a:t> </a:t>
+            </a:r>
+            <a:r>
+              <a:rPr dirty="0" err="1"/>
+              <a:t>içen</a:t>
+            </a:r>
+            <a:r>
+              <a:rPr dirty="0"/>
+              <a:t> </a:t>
+            </a:r>
+            <a:r>
+              <a:rPr dirty="0" err="1"/>
+              <a:t>olmaması</a:t>
+            </a:r>
+            <a:r>
+              <a:rPr dirty="0"/>
+              <a:t> </a:t>
+            </a:r>
+            <a:r>
+              <a:rPr dirty="0" err="1"/>
+              <a:t>bırakma</a:t>
+            </a:r>
+            <a:r>
+              <a:rPr dirty="0"/>
+              <a:t> </a:t>
+            </a:r>
+            <a:r>
+              <a:rPr dirty="0" err="1"/>
+              <a:t>olasılığını</a:t>
+            </a:r>
+            <a:r>
+              <a:rPr dirty="0"/>
+              <a:t> </a:t>
+            </a:r>
+            <a:r>
+              <a:rPr dirty="0" err="1"/>
+              <a:t>neredeyse</a:t>
+            </a:r>
+            <a:r>
+              <a:rPr dirty="0"/>
+              <a:t> </a:t>
+            </a:r>
+            <a:r>
+              <a:rPr dirty="0" err="1"/>
+              <a:t>iki</a:t>
+            </a:r>
+            <a:r>
+              <a:rPr dirty="0"/>
+              <a:t> </a:t>
+            </a:r>
+            <a:r>
+              <a:rPr dirty="0" err="1"/>
+              <a:t>katına</a:t>
+            </a:r>
+            <a:r>
+              <a:rPr dirty="0"/>
+              <a:t> </a:t>
+            </a:r>
+            <a:r>
+              <a:rPr dirty="0" err="1"/>
+              <a:t>çıkarmaktadır</a:t>
+            </a:r>
+            <a:r>
+              <a:rPr dirty="0"/>
+              <a:t>. </a:t>
+            </a:r>
+            <a:r>
+              <a:rPr dirty="0" err="1"/>
+              <a:t>Literatürde</a:t>
+            </a:r>
+            <a:r>
+              <a:rPr dirty="0"/>
+              <a:t> </a:t>
+            </a:r>
+            <a:r>
+              <a:rPr dirty="0" err="1"/>
+              <a:t>eşin</a:t>
+            </a:r>
+            <a:r>
+              <a:rPr dirty="0"/>
+              <a:t> </a:t>
+            </a:r>
+            <a:r>
+              <a:rPr dirty="0" err="1"/>
+              <a:t>veya</a:t>
+            </a:r>
+            <a:r>
+              <a:rPr dirty="0"/>
+              <a:t> </a:t>
+            </a:r>
+            <a:r>
+              <a:rPr dirty="0" err="1"/>
+              <a:t>aile</a:t>
+            </a:r>
+            <a:r>
+              <a:rPr dirty="0"/>
+              <a:t> </a:t>
+            </a:r>
+            <a:r>
+              <a:rPr dirty="0" err="1"/>
+              <a:t>bireylerinin</a:t>
+            </a:r>
+            <a:r>
+              <a:rPr dirty="0"/>
+              <a:t> </a:t>
+            </a:r>
+            <a:r>
+              <a:rPr dirty="0" err="1"/>
+              <a:t>sigara</a:t>
+            </a:r>
+            <a:r>
+              <a:rPr dirty="0"/>
+              <a:t> </a:t>
+            </a:r>
+            <a:r>
+              <a:rPr dirty="0" err="1"/>
+              <a:t>içmesi</a:t>
+            </a:r>
+            <a:r>
+              <a:rPr dirty="0"/>
+              <a:t> hem </a:t>
+            </a:r>
+            <a:r>
+              <a:rPr dirty="0" err="1"/>
+              <a:t>tetikleyici</a:t>
+            </a:r>
+            <a:r>
+              <a:rPr dirty="0"/>
+              <a:t> hem de </a:t>
+            </a:r>
+            <a:r>
+              <a:rPr dirty="0" err="1"/>
+              <a:t>motivasyon</a:t>
+            </a:r>
+            <a:r>
+              <a:rPr dirty="0"/>
+              <a:t> </a:t>
+            </a:r>
+            <a:r>
+              <a:rPr dirty="0" err="1"/>
+              <a:t>engeli</a:t>
+            </a:r>
+            <a:r>
+              <a:rPr dirty="0"/>
+              <a:t> </a:t>
+            </a:r>
+            <a:r>
+              <a:rPr dirty="0" err="1"/>
+              <a:t>olarak</a:t>
+            </a:r>
+            <a:r>
+              <a:rPr dirty="0"/>
+              <a:t> </a:t>
+            </a:r>
+            <a:r>
+              <a:rPr dirty="0" err="1"/>
+              <a:t>tanımlanmaktadır</a:t>
+            </a:r>
+            <a:r>
+              <a:rPr dirty="0"/>
+              <a:t>.</a:t>
+            </a:r>
+          </a:p>
+          <a:p>
+            <a:r>
+              <a:rPr dirty="0" err="1"/>
+              <a:t>Hastaların</a:t>
+            </a:r>
+            <a:r>
+              <a:rPr dirty="0"/>
+              <a:t> </a:t>
+            </a:r>
+            <a:r>
+              <a:rPr dirty="0" err="1"/>
+              <a:t>ortalama</a:t>
+            </a:r>
+            <a:r>
+              <a:rPr dirty="0"/>
+              <a:t> FNBT</a:t>
+            </a:r>
+            <a:r>
+              <a:rPr lang="tr-TR" dirty="0"/>
+              <a:t>(</a:t>
+            </a:r>
+            <a:r>
+              <a:rPr lang="tr-TR" dirty="0" err="1"/>
+              <a:t>Fagerström</a:t>
+            </a:r>
+            <a:r>
+              <a:rPr lang="tr-TR" dirty="0"/>
+              <a:t> Nikotin Bağımlılık Testi )</a:t>
+            </a:r>
+            <a:r>
+              <a:rPr dirty="0"/>
+              <a:t> </a:t>
+            </a:r>
+            <a:r>
+              <a:rPr dirty="0" err="1"/>
+              <a:t>puanı</a:t>
+            </a:r>
+            <a:r>
+              <a:rPr dirty="0"/>
+              <a:t>, </a:t>
+            </a:r>
+            <a:r>
+              <a:rPr dirty="0" err="1"/>
+              <a:t>tedavi</a:t>
+            </a:r>
+            <a:r>
+              <a:rPr dirty="0"/>
+              <a:t> </a:t>
+            </a:r>
+            <a:r>
+              <a:rPr dirty="0" err="1"/>
+              <a:t>arayan</a:t>
+            </a:r>
+            <a:r>
+              <a:rPr dirty="0"/>
+              <a:t> </a:t>
+            </a:r>
+            <a:r>
+              <a:rPr dirty="0" err="1"/>
+              <a:t>sigara</a:t>
+            </a:r>
+            <a:r>
+              <a:rPr dirty="0"/>
+              <a:t> </a:t>
+            </a:r>
+            <a:r>
+              <a:rPr dirty="0" err="1"/>
+              <a:t>içicilerinde</a:t>
+            </a:r>
+            <a:r>
+              <a:rPr dirty="0"/>
+              <a:t> </a:t>
+            </a:r>
+            <a:r>
+              <a:rPr dirty="0" err="1"/>
+              <a:t>bildirilen</a:t>
+            </a:r>
+            <a:r>
+              <a:rPr dirty="0"/>
+              <a:t> </a:t>
+            </a:r>
+            <a:r>
+              <a:rPr dirty="0" err="1"/>
+              <a:t>yaklaşık</a:t>
+            </a:r>
+            <a:r>
+              <a:rPr dirty="0"/>
+              <a:t> 5 </a:t>
+            </a:r>
+            <a:r>
+              <a:rPr dirty="0" err="1"/>
+              <a:t>puanla</a:t>
+            </a:r>
+            <a:r>
+              <a:rPr dirty="0"/>
+              <a:t> </a:t>
+            </a:r>
+            <a:r>
+              <a:rPr dirty="0" err="1"/>
+              <a:t>uyumludur</a:t>
+            </a:r>
+            <a:r>
+              <a:rPr dirty="0"/>
+              <a:t> </a:t>
+            </a:r>
+            <a:r>
+              <a:rPr dirty="0" err="1"/>
+              <a:t>ve</a:t>
+            </a:r>
+            <a:r>
+              <a:rPr dirty="0"/>
+              <a:t> </a:t>
+            </a:r>
+            <a:r>
+              <a:rPr dirty="0" err="1"/>
+              <a:t>yüksek</a:t>
+            </a:r>
+            <a:r>
+              <a:rPr dirty="0"/>
+              <a:t> </a:t>
+            </a:r>
+            <a:r>
+              <a:rPr dirty="0" err="1"/>
+              <a:t>puan</a:t>
+            </a:r>
+            <a:r>
+              <a:rPr dirty="0"/>
+              <a:t> </a:t>
+            </a:r>
+            <a:r>
+              <a:rPr dirty="0" err="1"/>
+              <a:t>düşük</a:t>
+            </a:r>
+            <a:r>
+              <a:rPr dirty="0"/>
+              <a:t> </a:t>
+            </a:r>
+            <a:r>
+              <a:rPr dirty="0" err="1"/>
+              <a:t>başarıyla</a:t>
+            </a:r>
+            <a:r>
+              <a:rPr dirty="0"/>
+              <a:t> </a:t>
+            </a:r>
+            <a:r>
+              <a:rPr dirty="0" err="1"/>
+              <a:t>ilişkilidir</a:t>
+            </a:r>
+            <a:r>
+              <a:rPr dirty="0"/>
+              <a:t>. </a:t>
+            </a:r>
+            <a:endParaRPr lang="tr-TR" dirty="0"/>
+          </a:p>
+          <a:p>
+            <a:r>
+              <a:rPr dirty="0" err="1"/>
+              <a:t>Yakınması</a:t>
+            </a:r>
+            <a:r>
+              <a:rPr dirty="0"/>
+              <a:t> </a:t>
+            </a:r>
+            <a:r>
+              <a:rPr dirty="0" err="1"/>
+              <a:t>olmayan</a:t>
+            </a:r>
+            <a:r>
+              <a:rPr dirty="0"/>
+              <a:t> </a:t>
+            </a:r>
+            <a:r>
+              <a:rPr dirty="0" err="1"/>
+              <a:t>hastalarda</a:t>
+            </a:r>
+            <a:r>
+              <a:rPr dirty="0"/>
+              <a:t> </a:t>
+            </a:r>
+            <a:r>
+              <a:rPr dirty="0" err="1"/>
+              <a:t>başarının</a:t>
+            </a:r>
+            <a:r>
+              <a:rPr dirty="0"/>
+              <a:t> </a:t>
+            </a:r>
+            <a:r>
+              <a:rPr dirty="0" err="1"/>
+              <a:t>daha</a:t>
+            </a:r>
+            <a:r>
+              <a:rPr dirty="0"/>
+              <a:t> </a:t>
+            </a:r>
+            <a:r>
+              <a:rPr dirty="0" err="1"/>
+              <a:t>yüksek</a:t>
+            </a:r>
+            <a:r>
+              <a:rPr dirty="0"/>
+              <a:t> </a:t>
+            </a:r>
+            <a:r>
+              <a:rPr dirty="0" err="1"/>
+              <a:t>olması</a:t>
+            </a:r>
+            <a:r>
+              <a:rPr dirty="0"/>
+              <a:t> </a:t>
+            </a:r>
+            <a:r>
+              <a:rPr dirty="0" err="1"/>
+              <a:t>uzun</a:t>
+            </a:r>
+            <a:r>
+              <a:rPr dirty="0"/>
+              <a:t> </a:t>
+            </a:r>
+            <a:r>
+              <a:rPr dirty="0" err="1"/>
+              <a:t>vadeli</a:t>
+            </a:r>
+            <a:r>
+              <a:rPr dirty="0"/>
+              <a:t> </a:t>
+            </a:r>
+            <a:r>
+              <a:rPr dirty="0" err="1"/>
+              <a:t>sağlığı</a:t>
+            </a:r>
+            <a:r>
+              <a:rPr dirty="0"/>
+              <a:t> </a:t>
+            </a:r>
+            <a:r>
+              <a:rPr dirty="0" err="1"/>
+              <a:t>korumaya</a:t>
+            </a:r>
+            <a:r>
+              <a:rPr dirty="0"/>
+              <a:t> </a:t>
+            </a:r>
+            <a:r>
+              <a:rPr dirty="0" err="1"/>
+              <a:t>yönelik</a:t>
+            </a:r>
+            <a:r>
+              <a:rPr dirty="0"/>
+              <a:t> </a:t>
+            </a:r>
+            <a:r>
+              <a:rPr dirty="0" err="1"/>
+              <a:t>içsel</a:t>
+            </a:r>
+            <a:r>
+              <a:rPr dirty="0"/>
+              <a:t> </a:t>
+            </a:r>
+            <a:r>
+              <a:rPr dirty="0" err="1"/>
+              <a:t>motivasyonla</a:t>
+            </a:r>
+            <a:r>
+              <a:rPr dirty="0"/>
+              <a:t> </a:t>
+            </a:r>
+            <a:r>
+              <a:rPr dirty="0" err="1"/>
+              <a:t>açıklanmaktadır</a:t>
+            </a:r>
+            <a:r>
+              <a:rPr dirty="0"/>
+              <a:t>.</a:t>
+            </a:r>
+            <a:r>
+              <a:rPr lang="tr-TR" dirty="0"/>
+              <a:t>-anlık tepkisel korkudan ziyade uzun vadeli sağlığı koruma </a:t>
+            </a:r>
+            <a:r>
+              <a:rPr lang="tr-TR" dirty="0" err="1"/>
+              <a:t>amacıylaiçsel</a:t>
+            </a:r>
+            <a:r>
+              <a:rPr lang="tr-TR" dirty="0"/>
+              <a:t> bir bırakma motivasyonu-</a:t>
+            </a:r>
+            <a:r>
+              <a:rPr dirty="0"/>
+              <a:t> </a:t>
+            </a:r>
+            <a:r>
+              <a:rPr dirty="0" err="1"/>
+              <a:t>İkinci</a:t>
+            </a:r>
+            <a:r>
+              <a:rPr dirty="0"/>
+              <a:t> </a:t>
+            </a:r>
+            <a:r>
+              <a:rPr dirty="0" err="1"/>
+              <a:t>bir</a:t>
+            </a:r>
+            <a:r>
+              <a:rPr dirty="0"/>
+              <a:t> </a:t>
+            </a:r>
+            <a:r>
+              <a:rPr dirty="0" err="1"/>
+              <a:t>olasılık</a:t>
+            </a:r>
+            <a:r>
+              <a:rPr dirty="0"/>
+              <a:t> </a:t>
+            </a:r>
+            <a:r>
+              <a:rPr dirty="0" err="1"/>
+              <a:t>olarak</a:t>
+            </a:r>
+            <a:r>
+              <a:rPr dirty="0"/>
+              <a:t>, </a:t>
+            </a:r>
+            <a:r>
+              <a:rPr dirty="0" err="1"/>
+              <a:t>kronik</a:t>
+            </a:r>
+            <a:r>
+              <a:rPr dirty="0"/>
+              <a:t> </a:t>
+            </a:r>
+            <a:r>
+              <a:rPr dirty="0" err="1"/>
+              <a:t>hastalığı</a:t>
+            </a:r>
+            <a:r>
+              <a:rPr dirty="0"/>
+              <a:t> </a:t>
+            </a:r>
+            <a:r>
+              <a:rPr dirty="0" err="1"/>
+              <a:t>veya</a:t>
+            </a:r>
+            <a:r>
+              <a:rPr dirty="0"/>
+              <a:t> </a:t>
+            </a:r>
+            <a:r>
+              <a:rPr dirty="0" err="1"/>
+              <a:t>semptomu</a:t>
+            </a:r>
+            <a:r>
+              <a:rPr dirty="0"/>
+              <a:t> </a:t>
+            </a:r>
+            <a:r>
+              <a:rPr dirty="0" err="1"/>
+              <a:t>olan</a:t>
+            </a:r>
+            <a:r>
+              <a:rPr dirty="0"/>
+              <a:t> </a:t>
+            </a:r>
+            <a:r>
+              <a:rPr dirty="0" err="1"/>
+              <a:t>bireylerin</a:t>
+            </a:r>
+            <a:r>
+              <a:rPr dirty="0"/>
+              <a:t> </a:t>
+            </a:r>
+            <a:r>
+              <a:rPr dirty="0" err="1"/>
+              <a:t>sigarayı</a:t>
+            </a:r>
+            <a:r>
+              <a:rPr dirty="0"/>
+              <a:t> </a:t>
+            </a:r>
+            <a:r>
+              <a:rPr dirty="0" err="1"/>
+              <a:t>bir</a:t>
+            </a:r>
+            <a:r>
+              <a:rPr dirty="0"/>
+              <a:t> </a:t>
+            </a:r>
+            <a:r>
+              <a:rPr dirty="0" err="1"/>
+              <a:t>baş</a:t>
+            </a:r>
+            <a:r>
+              <a:rPr dirty="0"/>
+              <a:t> </a:t>
+            </a:r>
+            <a:r>
+              <a:rPr dirty="0" err="1"/>
+              <a:t>etme</a:t>
+            </a:r>
+            <a:r>
+              <a:rPr dirty="0"/>
+              <a:t> </a:t>
+            </a:r>
+            <a:r>
+              <a:rPr dirty="0" err="1"/>
+              <a:t>aracı</a:t>
+            </a:r>
+            <a:r>
+              <a:rPr dirty="0"/>
+              <a:t> </a:t>
+            </a:r>
+            <a:r>
+              <a:rPr dirty="0" err="1"/>
+              <a:t>olarak</a:t>
+            </a:r>
+            <a:r>
+              <a:rPr dirty="0"/>
+              <a:t> </a:t>
+            </a:r>
+            <a:r>
+              <a:rPr dirty="0" err="1"/>
+              <a:t>kullanıyor</a:t>
+            </a:r>
+            <a:r>
+              <a:rPr dirty="0"/>
+              <a:t> </a:t>
+            </a:r>
+            <a:r>
+              <a:rPr dirty="0" err="1"/>
+              <a:t>olabileceği</a:t>
+            </a:r>
+            <a:r>
+              <a:rPr dirty="0"/>
+              <a:t> </a:t>
+            </a:r>
+            <a:r>
+              <a:rPr dirty="0" err="1"/>
+              <a:t>ve</a:t>
+            </a:r>
+            <a:r>
+              <a:rPr dirty="0"/>
+              <a:t> </a:t>
+            </a:r>
+            <a:r>
+              <a:rPr dirty="0" err="1"/>
+              <a:t>bunun</a:t>
+            </a:r>
+            <a:r>
+              <a:rPr dirty="0"/>
+              <a:t> </a:t>
+            </a:r>
+            <a:r>
+              <a:rPr dirty="0" err="1"/>
+              <a:t>bırakmayı</a:t>
+            </a:r>
+            <a:r>
+              <a:rPr dirty="0"/>
+              <a:t> </a:t>
+            </a:r>
+            <a:r>
+              <a:rPr dirty="0" err="1"/>
+              <a:t>zorlaştırabileceği</a:t>
+            </a:r>
+            <a:r>
+              <a:rPr dirty="0"/>
+              <a:t> </a:t>
+            </a:r>
+            <a:r>
+              <a:rPr dirty="0" err="1"/>
+              <a:t>belirtilmektedir</a:t>
+            </a:r>
+            <a:r>
+              <a:rPr dirty="0"/>
+              <a:t>.</a:t>
             </a:r>
           </a:p>
         </p:txBody>
@@ -2368,100 +6296,56 @@
           <a:lstStyle/>
           <a:p>
             <a:r>
-              <a:rPr dirty="0"/>
-              <a:t>Solda </a:t>
-            </a:r>
-            <a:r>
-              <a:rPr dirty="0" err="1"/>
-              <a:t>makalenin</a:t>
-            </a:r>
-            <a:r>
-              <a:rPr dirty="0"/>
-              <a:t> ilk </a:t>
-            </a:r>
-            <a:r>
-              <a:rPr dirty="0" err="1"/>
-              <a:t>sayfasını</a:t>
-            </a:r>
-            <a:r>
-              <a:rPr dirty="0"/>
-              <a:t> </a:t>
-            </a:r>
-            <a:r>
-              <a:rPr dirty="0" err="1"/>
-              <a:t>görüyorsunuz</a:t>
-            </a:r>
-            <a:r>
-              <a:rPr dirty="0"/>
-              <a:t>. Makale Türkiye Aile </a:t>
-            </a:r>
-            <a:r>
-              <a:rPr dirty="0" err="1"/>
-              <a:t>Hekimleri</a:t>
-            </a:r>
-            <a:r>
-              <a:rPr dirty="0"/>
-              <a:t> </a:t>
-            </a:r>
-            <a:r>
-              <a:rPr dirty="0" err="1"/>
-              <a:t>Uzmanlık</a:t>
-            </a:r>
-            <a:r>
-              <a:rPr dirty="0"/>
-              <a:t> </a:t>
-            </a:r>
-            <a:r>
-              <a:rPr dirty="0" err="1"/>
-              <a:t>Derneği'nin</a:t>
-            </a:r>
-            <a:r>
-              <a:rPr dirty="0"/>
-              <a:t> </a:t>
-            </a:r>
-            <a:r>
-              <a:rPr dirty="0" err="1"/>
-              <a:t>yayın</a:t>
-            </a:r>
-            <a:r>
-              <a:rPr dirty="0"/>
-              <a:t> </a:t>
-            </a:r>
-            <a:r>
-              <a:rPr dirty="0" err="1"/>
-              <a:t>organı</a:t>
-            </a:r>
-            <a:r>
-              <a:rPr dirty="0"/>
-              <a:t> </a:t>
-            </a:r>
-            <a:r>
-              <a:rPr dirty="0" err="1"/>
-              <a:t>olan</a:t>
-            </a:r>
-            <a:r>
-              <a:rPr dirty="0"/>
-              <a:t> Turkish Journal of Family </a:t>
-            </a:r>
-            <a:r>
-              <a:rPr dirty="0" err="1"/>
-              <a:t>Practice'te</a:t>
-            </a:r>
-            <a:r>
-              <a:rPr dirty="0"/>
-              <a:t> 2026 </a:t>
-            </a:r>
-            <a:r>
-              <a:rPr dirty="0" err="1"/>
-              <a:t>yılında</a:t>
-            </a:r>
-            <a:r>
-              <a:rPr dirty="0"/>
-              <a:t> </a:t>
-            </a:r>
-            <a:r>
-              <a:rPr dirty="0" err="1"/>
-              <a:t>yayımlanmıştır</a:t>
+              <a:rPr dirty="0" err="1"/>
+              <a:t>Sunum</a:t>
+            </a:r>
+            <a:r>
+              <a:rPr dirty="0"/>
+              <a:t> 26 </a:t>
+            </a:r>
+            <a:r>
+              <a:rPr dirty="0" err="1"/>
+              <a:t>slayttan</a:t>
+            </a:r>
+            <a:r>
+              <a:rPr dirty="0"/>
+              <a:t> </a:t>
+            </a:r>
+            <a:r>
+              <a:rPr dirty="0" err="1"/>
+              <a:t>oluşmakta</a:t>
+            </a:r>
+            <a:r>
+              <a:rPr dirty="0"/>
+              <a:t> </a:t>
+            </a:r>
+            <a:r>
+              <a:rPr dirty="0" err="1"/>
+              <a:t>ve</a:t>
+            </a:r>
+            <a:r>
+              <a:rPr dirty="0"/>
+              <a:t> </a:t>
+            </a:r>
+            <a:r>
+              <a:rPr dirty="0" err="1"/>
+              <a:t>yaklaşık</a:t>
+            </a:r>
+            <a:r>
+              <a:rPr dirty="0"/>
+              <a:t> </a:t>
+            </a:r>
+            <a:r>
+              <a:rPr dirty="0" err="1"/>
+              <a:t>yirmi</a:t>
+            </a:r>
+            <a:r>
+              <a:rPr dirty="0"/>
+              <a:t> dk </a:t>
+            </a:r>
+            <a:r>
+              <a:rPr dirty="0" err="1"/>
+              <a:t>sürecektir</a:t>
             </a:r>
             <a:r>
               <a:rPr dirty="0"/>
@@ -2471,39 +6355,55 @@
           <a:p>
             <a:r>
               <a:rPr dirty="0" err="1"/>
-              <a:t>Çalışma</a:t>
-            </a:r>
-            <a:r>
-              <a:rPr dirty="0"/>
-              <a:t> </a:t>
-            </a:r>
-            <a:r>
-              <a:rPr dirty="0" err="1"/>
-              <a:t>retrospektif</a:t>
-            </a:r>
-            <a:r>
-              <a:rPr dirty="0"/>
-              <a:t>, </a:t>
-            </a:r>
-            <a:r>
-              <a:rPr dirty="0" err="1"/>
-              <a:t>kesitsel</a:t>
-            </a:r>
-            <a:r>
-              <a:rPr dirty="0"/>
-              <a:t> </a:t>
-            </a:r>
-            <a:r>
-              <a:rPr dirty="0" err="1"/>
-              <a:t>bir</a:t>
-            </a:r>
-            <a:r>
-              <a:rPr dirty="0"/>
-              <a:t> </a:t>
-            </a:r>
-            <a:r>
-              <a:rPr dirty="0" err="1"/>
-              <a:t>araştırmadır</a:t>
+              <a:t>giriş</a:t>
+            </a:r>
+            <a:r>
+              <a:rPr dirty="0"/>
+              <a:t> </a:t>
+            </a:r>
+            <a:r>
+              <a:rPr dirty="0" err="1"/>
+              <a:t>bölümüyle</a:t>
+            </a:r>
+            <a:r>
+              <a:rPr dirty="0"/>
+              <a:t> </a:t>
+            </a:r>
+            <a:r>
+              <a:rPr dirty="0" err="1"/>
+              <a:t>başlayıp</a:t>
+            </a:r>
+            <a:r>
+              <a:rPr dirty="0"/>
+              <a:t> </a:t>
+            </a:r>
+            <a:r>
+              <a:rPr dirty="0" err="1"/>
+              <a:t>gereç</a:t>
+            </a:r>
+            <a:r>
+              <a:rPr dirty="0"/>
+              <a:t> </a:t>
+            </a:r>
+            <a:r>
+              <a:rPr dirty="0" err="1"/>
+              <a:t>ve</a:t>
+            </a:r>
+            <a:r>
+              <a:rPr dirty="0"/>
+              <a:t> </a:t>
+            </a:r>
+            <a:r>
+              <a:rPr dirty="0" err="1"/>
+              <a:t>yöntemi</a:t>
+            </a:r>
+            <a:r>
+              <a:rPr dirty="0"/>
+              <a:t> </a:t>
+            </a:r>
+            <a:r>
+              <a:rPr dirty="0" err="1"/>
+              <a:t>aktaracağım</a:t>
             </a:r>
             <a:r>
               <a:rPr dirty="0"/>
@@ -2511,15 +6411,75 @@
             </a:r>
             <a:r>
               <a:rPr dirty="0" err="1"/>
-              <a:t>Veriler</a:t>
-            </a:r>
-            <a:r>
-              <a:rPr dirty="0"/>
-              <a:t> Samsun </a:t>
-            </a:r>
-            <a:r>
-              <a:rPr dirty="0" err="1"/>
-              <a:t>Eğitim</a:t>
+              <a:t>Bulgular</a:t>
+            </a:r>
+            <a:r>
+              <a:rPr dirty="0"/>
+              <a:t> </a:t>
+            </a:r>
+            <a:r>
+              <a:rPr dirty="0" err="1"/>
+              <a:t>bölümünde</a:t>
+            </a:r>
+            <a:r>
+              <a:rPr dirty="0"/>
+              <a:t> </a:t>
+            </a:r>
+            <a:r>
+              <a:rPr dirty="0" err="1"/>
+              <a:t>makaledeki</a:t>
+            </a:r>
+            <a:r>
+              <a:rPr dirty="0"/>
+              <a:t> </a:t>
+            </a:r>
+            <a:r>
+              <a:rPr dirty="0" err="1"/>
+              <a:t>tablo</a:t>
+            </a:r>
+            <a:r>
+              <a:rPr lang="tr-TR" dirty="0" err="1"/>
+              <a:t>ları</a:t>
+            </a:r>
+            <a:r>
+              <a:rPr dirty="0"/>
+              <a:t> </a:t>
+            </a:r>
+            <a:r>
+              <a:rPr dirty="0" err="1"/>
+              <a:t>özgün</a:t>
+            </a:r>
+            <a:r>
+              <a:rPr dirty="0"/>
+              <a:t> </a:t>
+            </a:r>
+            <a:r>
+              <a:rPr dirty="0" err="1"/>
+              <a:t>halleriyle</a:t>
+            </a:r>
+            <a:r>
+              <a:rPr dirty="0"/>
+              <a:t> </a:t>
+            </a:r>
+            <a:r>
+              <a:rPr dirty="0" err="1"/>
+              <a:t>göstereceğim</a:t>
+            </a:r>
+            <a:r>
+              <a:rPr dirty="0"/>
+              <a:t>. </a:t>
+            </a:r>
+            <a:r>
+              <a:rPr dirty="0" err="1"/>
+              <a:t>Ardından</a:t>
+            </a:r>
+            <a:r>
+              <a:rPr dirty="0"/>
+              <a:t> </a:t>
+            </a:r>
+            <a:r>
+              <a:rPr dirty="0" err="1"/>
+              <a:t>tartışma</a:t>
             </a:r>
             <a:r>
               <a:rPr dirty="0"/>
@@ -2535,55 +6495,15 @@
             </a:r>
             <a:r>
               <a:rPr dirty="0" err="1"/>
-              <a:t>Araştırma</a:t>
-            </a:r>
-            <a:r>
-              <a:rPr dirty="0"/>
-              <a:t> </a:t>
-            </a:r>
-            <a:r>
-              <a:rPr dirty="0" err="1"/>
-              <a:t>Hastanesi</a:t>
-            </a:r>
-            <a:r>
-              <a:rPr dirty="0"/>
-              <a:t> </a:t>
-            </a:r>
-            <a:r>
-              <a:rPr dirty="0" err="1"/>
-              <a:t>Sigara</a:t>
-            </a:r>
-            <a:r>
-              <a:rPr dirty="0"/>
-              <a:t> </a:t>
-            </a:r>
-            <a:r>
-              <a:rPr dirty="0" err="1"/>
-              <a:t>Bırakma</a:t>
-            </a:r>
-            <a:r>
-              <a:rPr dirty="0"/>
-              <a:t> </a:t>
-            </a:r>
-            <a:r>
-              <a:rPr dirty="0" err="1"/>
-              <a:t>Polikliniği'nden</a:t>
-            </a:r>
-            <a:r>
-              <a:rPr dirty="0"/>
-              <a:t> </a:t>
-            </a:r>
-            <a:r>
-              <a:rPr dirty="0" err="1"/>
-              <a:t>elde</a:t>
-            </a:r>
-            <a:r>
-              <a:rPr dirty="0"/>
-              <a:t> </a:t>
-            </a:r>
-            <a:r>
-              <a:rPr dirty="0" err="1"/>
-              <a:t>edilmiştir</a:t>
+              <a:t>sonuçları</a:t>
+            </a:r>
+            <a:r>
+              <a:rPr lang="tr-TR" dirty="0"/>
+              <a:t> </a:t>
+            </a:r>
+            <a:r>
+              <a:rPr dirty="0" err="1"/>
+              <a:t>aktaracağım</a:t>
             </a:r>
             <a:r>
               <a:rPr dirty="0"/>
@@ -2673,12 +6593,334 @@
           <a:lstStyle/>
           <a:p>
             <a:r>
-              <a:t>Giriş bölümünde tütün bağımlılığının önlenebilir ölüm nedenlerinin başında geldiği vurgulanmaktadır. Küresel Yetişkin Tütün Araştırması 2016 verilerine göre Türkiye'de sigara içme sıklığı erkeklerde yüzde 44,1, kadınlarda yüzde 19,2'dir.</a:t>
-            </a:r>
-          </a:p>
-          <a:p>
-            <a:r>
-              <a:t>Ülkemizde 500'ün üzerinde sigara bırakma polikliniği bulunmakta, bu polikliniklere 2,5 milyondan fazla kişi başvurmuş bulunmaktadır. Polikliniklerde bırakma oranları yüzde 20 ile 50 arasında değişmektedir.</a:t>
+              <a:rPr dirty="0" err="1"/>
+              <a:t>tütün</a:t>
+            </a:r>
+            <a:r>
+              <a:rPr dirty="0"/>
+              <a:t> </a:t>
+            </a:r>
+            <a:r>
+              <a:rPr dirty="0" err="1"/>
+              <a:t>bağımlılığı</a:t>
+            </a:r>
+            <a:r>
+              <a:rPr dirty="0"/>
+              <a:t> </a:t>
+            </a:r>
+            <a:r>
+              <a:rPr dirty="0" err="1"/>
+              <a:t>önlenebilir</a:t>
+            </a:r>
+            <a:r>
+              <a:rPr dirty="0"/>
+              <a:t> </a:t>
+            </a:r>
+            <a:r>
+              <a:rPr dirty="0" err="1"/>
+              <a:t>ölüm</a:t>
+            </a:r>
+            <a:r>
+              <a:rPr dirty="0"/>
+              <a:t> </a:t>
+            </a:r>
+            <a:r>
+              <a:rPr dirty="0" err="1"/>
+              <a:t>nedenlerinin</a:t>
+            </a:r>
+            <a:r>
+              <a:rPr dirty="0"/>
+              <a:t> </a:t>
+            </a:r>
+            <a:r>
+              <a:rPr dirty="0" err="1"/>
+              <a:t>başında</a:t>
+            </a:r>
+            <a:r>
+              <a:rPr dirty="0"/>
+              <a:t> gel</a:t>
+            </a:r>
+            <a:r>
+              <a:rPr lang="tr-TR" dirty="0" err="1"/>
+              <a:t>mektedir</a:t>
+            </a:r>
+            <a:r>
+              <a:rPr dirty="0"/>
+              <a:t>. </a:t>
+            </a:r>
+            <a:r>
+              <a:rPr dirty="0" err="1"/>
+              <a:t>Küresel</a:t>
+            </a:r>
+            <a:r>
+              <a:rPr dirty="0"/>
+              <a:t> </a:t>
+            </a:r>
+            <a:r>
+              <a:rPr dirty="0" err="1"/>
+              <a:t>Yetişkin</a:t>
+            </a:r>
+            <a:r>
+              <a:rPr dirty="0"/>
+              <a:t> </a:t>
+            </a:r>
+            <a:r>
+              <a:rPr dirty="0" err="1"/>
+              <a:t>Tütün</a:t>
+            </a:r>
+            <a:r>
+              <a:rPr dirty="0"/>
+              <a:t> </a:t>
+            </a:r>
+            <a:r>
+              <a:rPr dirty="0" err="1"/>
+              <a:t>Araştırması</a:t>
+            </a:r>
+            <a:r>
+              <a:rPr dirty="0"/>
+              <a:t> 2016 </a:t>
+            </a:r>
+            <a:r>
+              <a:rPr dirty="0" err="1"/>
+              <a:t>verilerine</a:t>
+            </a:r>
+            <a:r>
+              <a:rPr dirty="0"/>
+              <a:t> </a:t>
+            </a:r>
+            <a:r>
+              <a:rPr dirty="0" err="1"/>
+              <a:t>göre</a:t>
+            </a:r>
+            <a:r>
+              <a:rPr dirty="0"/>
+              <a:t> </a:t>
+            </a:r>
+            <a:r>
+              <a:rPr dirty="0" err="1"/>
+              <a:t>Türkiye'de</a:t>
+            </a:r>
+            <a:r>
+              <a:rPr dirty="0"/>
+              <a:t> </a:t>
+            </a:r>
+            <a:r>
+              <a:rPr dirty="0" err="1"/>
+              <a:t>sigara</a:t>
+            </a:r>
+            <a:r>
+              <a:rPr dirty="0"/>
+              <a:t> </a:t>
+            </a:r>
+            <a:r>
+              <a:rPr dirty="0" err="1"/>
+              <a:t>içme</a:t>
+            </a:r>
+            <a:r>
+              <a:rPr dirty="0"/>
+              <a:t> </a:t>
+            </a:r>
+            <a:r>
+              <a:rPr dirty="0" err="1"/>
+              <a:t>sıklığı</a:t>
+            </a:r>
+            <a:r>
+              <a:rPr dirty="0"/>
+              <a:t> </a:t>
+            </a:r>
+            <a:r>
+              <a:rPr dirty="0" err="1"/>
+              <a:t>erkeklerde</a:t>
+            </a:r>
+            <a:r>
+              <a:rPr dirty="0"/>
+              <a:t> </a:t>
+            </a:r>
+            <a:r>
+              <a:rPr dirty="0" err="1"/>
+              <a:t>yüzde</a:t>
+            </a:r>
+            <a:r>
+              <a:rPr dirty="0"/>
+              <a:t> 44,1, </a:t>
+            </a:r>
+            <a:r>
+              <a:rPr dirty="0" err="1"/>
+              <a:t>kadınlarda</a:t>
+            </a:r>
+            <a:r>
+              <a:rPr dirty="0"/>
+              <a:t> </a:t>
+            </a:r>
+            <a:r>
+              <a:rPr dirty="0" err="1"/>
+              <a:t>yüzde</a:t>
+            </a:r>
+            <a:r>
+              <a:rPr dirty="0"/>
+              <a:t> 19,2'dir.</a:t>
+            </a:r>
+          </a:p>
+          <a:p>
+            <a:r>
+              <a:rPr dirty="0" err="1"/>
+              <a:t>Ülkemizde</a:t>
+            </a:r>
+            <a:r>
+              <a:rPr dirty="0"/>
+              <a:t> 500'ün </a:t>
+            </a:r>
+            <a:r>
+              <a:rPr dirty="0" err="1"/>
+              <a:t>üzerinde</a:t>
+            </a:r>
+            <a:r>
+              <a:rPr dirty="0"/>
+              <a:t> </a:t>
+            </a:r>
+            <a:r>
+              <a:rPr dirty="0" err="1"/>
+              <a:t>sigara</a:t>
+            </a:r>
+            <a:r>
+              <a:rPr dirty="0"/>
+              <a:t> </a:t>
+            </a:r>
+            <a:r>
+              <a:rPr dirty="0" err="1"/>
+              <a:t>bırakma</a:t>
+            </a:r>
+            <a:r>
+              <a:rPr dirty="0"/>
+              <a:t> </a:t>
+            </a:r>
+            <a:r>
+              <a:rPr dirty="0" err="1"/>
+              <a:t>polikliniği</a:t>
+            </a:r>
+            <a:r>
+              <a:rPr dirty="0"/>
+              <a:t> </a:t>
+            </a:r>
+            <a:r>
+              <a:rPr dirty="0" err="1"/>
+              <a:t>bulunmakta</a:t>
+            </a:r>
+            <a:r>
+              <a:rPr dirty="0"/>
+              <a:t>, </a:t>
+            </a:r>
+            <a:r>
+              <a:rPr dirty="0" err="1"/>
+              <a:t>bu</a:t>
+            </a:r>
+            <a:r>
+              <a:rPr dirty="0"/>
+              <a:t> </a:t>
+            </a:r>
+            <a:r>
+              <a:rPr dirty="0" err="1"/>
+              <a:t>polikliniklere</a:t>
+            </a:r>
+            <a:r>
+              <a:rPr dirty="0"/>
+              <a:t> 2,5 </a:t>
+            </a:r>
+            <a:r>
+              <a:rPr dirty="0" err="1"/>
+              <a:t>milyondan</a:t>
+            </a:r>
+            <a:r>
+              <a:rPr dirty="0"/>
+              <a:t> </a:t>
+            </a:r>
+            <a:r>
+              <a:rPr dirty="0" err="1"/>
+              <a:t>fazla</a:t>
+            </a:r>
+            <a:r>
+              <a:rPr dirty="0"/>
+              <a:t> </a:t>
+            </a:r>
+            <a:r>
+              <a:rPr dirty="0" err="1"/>
+              <a:t>kişi</a:t>
+            </a:r>
+            <a:r>
+              <a:rPr dirty="0"/>
+              <a:t> </a:t>
+            </a:r>
+            <a:r>
+              <a:rPr dirty="0" err="1"/>
+              <a:t>başvurmuş</a:t>
+            </a:r>
+            <a:r>
+              <a:rPr dirty="0"/>
+              <a:t> </a:t>
+            </a:r>
+            <a:r>
+              <a:rPr dirty="0" err="1"/>
+              <a:t>bulunmaktadır</a:t>
+            </a:r>
+            <a:r>
+              <a:rPr dirty="0"/>
+              <a:t>. </a:t>
+            </a:r>
+            <a:r>
+              <a:rPr dirty="0" err="1"/>
+              <a:t>Polikliniklerde</a:t>
+            </a:r>
+            <a:r>
+              <a:rPr dirty="0"/>
+              <a:t> </a:t>
+            </a:r>
+            <a:r>
+              <a:rPr dirty="0" err="1"/>
+              <a:t>bırakma</a:t>
+            </a:r>
+            <a:r>
+              <a:rPr dirty="0"/>
+              <a:t> </a:t>
+            </a:r>
+            <a:r>
+              <a:rPr dirty="0" err="1"/>
+              <a:t>oranları</a:t>
+            </a:r>
+            <a:r>
+              <a:rPr dirty="0"/>
+              <a:t> </a:t>
+            </a:r>
+            <a:r>
+              <a:rPr dirty="0" err="1"/>
+              <a:t>yüzde</a:t>
+            </a:r>
+            <a:r>
+              <a:rPr dirty="0"/>
+              <a:t> 20 </a:t>
+            </a:r>
+            <a:r>
+              <a:rPr dirty="0" err="1"/>
+              <a:t>ile</a:t>
+            </a:r>
+            <a:r>
+              <a:rPr dirty="0"/>
+              <a:t> 50 </a:t>
+            </a:r>
+            <a:r>
+              <a:rPr dirty="0" err="1"/>
+              <a:t>arasında</a:t>
+            </a:r>
+            <a:r>
+              <a:rPr dirty="0"/>
+              <a:t> </a:t>
+            </a:r>
+            <a:r>
+              <a:rPr dirty="0" err="1"/>
+              <a:t>değişmektedir</a:t>
+            </a:r>
+            <a:r>
+              <a:rPr dirty="0"/>
+              <a:t>.</a:t>
             </a:r>
           </a:p>
         </p:txBody>
@@ -3032,12 +7274,338 @@
           <a:lstStyle/>
           <a:p>
             <a:r>
-              <a:t>Hasta dosyalarından yaş, cinsiyet, meslek, alkol kullanımı, kronik hastalık, sigara öyküsü ve uygulanan tedaviler kaydedilmiştir.</a:t>
-            </a:r>
-          </a:p>
-          <a:p>
-            <a:r>
-              <a:t>Nikotin bağımlılığı ilk vizitte Fagerström Nikotin Bağımlılık Testi ile değerlendirilmiştir. 0–2 puan düşük, 3–7 puan orta, 8–10 puan yüksek bağımlılık olarak sınıflanmıştır. Testin Türkçe geçerlik ve güvenilirlik çalışması 2004 yılında Uysal ve arkadaşları tarafından yapılmıştır.</a:t>
+              <a:rPr dirty="0"/>
+              <a:t>Hasta </a:t>
+            </a:r>
+            <a:r>
+              <a:rPr dirty="0" err="1"/>
+              <a:t>dosyalarından</a:t>
+            </a:r>
+            <a:r>
+              <a:rPr dirty="0"/>
+              <a:t> </a:t>
+            </a:r>
+            <a:r>
+              <a:rPr dirty="0" err="1"/>
+              <a:t>yaş</a:t>
+            </a:r>
+            <a:r>
+              <a:rPr dirty="0"/>
+              <a:t>, </a:t>
+            </a:r>
+            <a:r>
+              <a:rPr dirty="0" err="1"/>
+              <a:t>cinsiyet</a:t>
+            </a:r>
+            <a:r>
+              <a:rPr dirty="0"/>
+              <a:t>, </a:t>
+            </a:r>
+            <a:r>
+              <a:rPr dirty="0" err="1"/>
+              <a:t>meslek</a:t>
+            </a:r>
+            <a:r>
+              <a:rPr dirty="0"/>
+              <a:t>, </a:t>
+            </a:r>
+            <a:r>
+              <a:rPr dirty="0" err="1"/>
+              <a:t>alkol</a:t>
+            </a:r>
+            <a:r>
+              <a:rPr dirty="0"/>
+              <a:t> </a:t>
+            </a:r>
+            <a:r>
+              <a:rPr dirty="0" err="1"/>
+              <a:t>kullanımı</a:t>
+            </a:r>
+            <a:r>
+              <a:rPr dirty="0"/>
+              <a:t>, </a:t>
+            </a:r>
+            <a:r>
+              <a:rPr dirty="0" err="1"/>
+              <a:t>kronik</a:t>
+            </a:r>
+            <a:r>
+              <a:rPr dirty="0"/>
+              <a:t> </a:t>
+            </a:r>
+            <a:r>
+              <a:rPr dirty="0" err="1"/>
+              <a:t>hastalık</a:t>
+            </a:r>
+            <a:r>
+              <a:rPr dirty="0"/>
+              <a:t>, </a:t>
+            </a:r>
+            <a:r>
+              <a:rPr dirty="0" err="1"/>
+              <a:t>sigara</a:t>
+            </a:r>
+            <a:r>
+              <a:rPr dirty="0"/>
+              <a:t> </a:t>
+            </a:r>
+            <a:r>
+              <a:rPr dirty="0" err="1"/>
+              <a:t>öyküsü</a:t>
+            </a:r>
+            <a:r>
+              <a:rPr dirty="0"/>
+              <a:t> </a:t>
+            </a:r>
+            <a:r>
+              <a:rPr dirty="0" err="1"/>
+              <a:t>ve</a:t>
+            </a:r>
+            <a:r>
+              <a:rPr dirty="0"/>
+              <a:t> </a:t>
+            </a:r>
+            <a:r>
+              <a:rPr dirty="0" err="1"/>
+              <a:t>uygulanan</a:t>
+            </a:r>
+            <a:r>
+              <a:rPr dirty="0"/>
+              <a:t> </a:t>
+            </a:r>
+            <a:r>
+              <a:rPr dirty="0" err="1"/>
+              <a:t>tedaviler</a:t>
+            </a:r>
+            <a:r>
+              <a:rPr dirty="0"/>
+              <a:t> </a:t>
+            </a:r>
+            <a:r>
+              <a:rPr dirty="0" err="1"/>
+              <a:t>kaydedilmiştir</a:t>
+            </a:r>
+            <a:r>
+              <a:rPr dirty="0"/>
+              <a:t>.</a:t>
+            </a:r>
+          </a:p>
+          <a:p>
+            <a:r>
+              <a:rPr dirty="0" err="1"/>
+              <a:t>Nikotin</a:t>
+            </a:r>
+            <a:r>
+              <a:rPr dirty="0"/>
+              <a:t> </a:t>
+            </a:r>
+            <a:r>
+              <a:rPr dirty="0" err="1"/>
+              <a:t>bağımlılığı</a:t>
+            </a:r>
+            <a:r>
+              <a:rPr dirty="0"/>
+              <a:t> ilk </a:t>
+            </a:r>
+            <a:r>
+              <a:rPr dirty="0" err="1"/>
+              <a:t>vizitte</a:t>
+            </a:r>
+            <a:r>
+              <a:rPr dirty="0"/>
+              <a:t> Fagerström </a:t>
+            </a:r>
+            <a:r>
+              <a:rPr dirty="0" err="1"/>
+              <a:t>Nikotin</a:t>
+            </a:r>
+            <a:r>
+              <a:rPr dirty="0"/>
+              <a:t> </a:t>
+            </a:r>
+            <a:r>
+              <a:rPr dirty="0" err="1"/>
+              <a:t>Bağımlılık</a:t>
+            </a:r>
+            <a:r>
+              <a:rPr dirty="0"/>
+              <a:t> Testi </a:t>
+            </a:r>
+            <a:r>
+              <a:rPr dirty="0" err="1"/>
+              <a:t>ile</a:t>
+            </a:r>
+            <a:r>
+              <a:rPr dirty="0"/>
+              <a:t> </a:t>
+            </a:r>
+            <a:r>
+              <a:rPr dirty="0" err="1"/>
+              <a:t>değerlendirilmiştir</a:t>
+            </a:r>
+            <a:r>
+              <a:rPr dirty="0"/>
+              <a:t>. 0–2 </a:t>
+            </a:r>
+            <a:r>
+              <a:rPr dirty="0" err="1"/>
+              <a:t>puan</a:t>
+            </a:r>
+            <a:r>
+              <a:rPr dirty="0"/>
+              <a:t> </a:t>
+            </a:r>
+            <a:r>
+              <a:rPr dirty="0" err="1"/>
+              <a:t>düşük</a:t>
+            </a:r>
+            <a:r>
+              <a:rPr dirty="0"/>
+              <a:t>, 3–7 </a:t>
+            </a:r>
+            <a:r>
+              <a:rPr dirty="0" err="1"/>
+              <a:t>puan</a:t>
+            </a:r>
+            <a:r>
+              <a:rPr dirty="0"/>
+              <a:t> </a:t>
+            </a:r>
+            <a:r>
+              <a:rPr dirty="0" err="1"/>
+              <a:t>orta</a:t>
+            </a:r>
+            <a:r>
+              <a:rPr dirty="0"/>
+              <a:t>, 8–10 </a:t>
+            </a:r>
+            <a:r>
+              <a:rPr dirty="0" err="1"/>
+              <a:t>puan</a:t>
+            </a:r>
+            <a:r>
+              <a:rPr dirty="0"/>
+              <a:t> </a:t>
+            </a:r>
+            <a:r>
+              <a:rPr dirty="0" err="1"/>
+              <a:t>yüksek</a:t>
+            </a:r>
+            <a:r>
+              <a:rPr dirty="0"/>
+              <a:t> </a:t>
+            </a:r>
+            <a:r>
+              <a:rPr dirty="0" err="1"/>
+              <a:t>bağımlılık</a:t>
+            </a:r>
+            <a:r>
+              <a:rPr dirty="0"/>
+              <a:t> </a:t>
+            </a:r>
+            <a:r>
+              <a:rPr dirty="0" err="1"/>
+              <a:t>olarak</a:t>
+            </a:r>
+            <a:r>
+              <a:rPr dirty="0"/>
+              <a:t> </a:t>
+            </a:r>
+            <a:r>
+              <a:rPr dirty="0" err="1"/>
+              <a:t>sınıflanmıştır</a:t>
+            </a:r>
+            <a:r>
+              <a:rPr dirty="0"/>
+              <a:t>. Testin </a:t>
+            </a:r>
+            <a:r>
+              <a:rPr dirty="0" err="1"/>
+              <a:t>Türkçe</a:t>
+            </a:r>
+            <a:r>
+              <a:rPr dirty="0"/>
+              <a:t> </a:t>
+            </a:r>
+            <a:r>
+              <a:rPr dirty="0" err="1"/>
+              <a:t>geçerlik</a:t>
+            </a:r>
+            <a:r>
+              <a:rPr dirty="0"/>
+              <a:t> </a:t>
+            </a:r>
+            <a:r>
+              <a:rPr dirty="0" err="1"/>
+              <a:t>ve</a:t>
+            </a:r>
+            <a:r>
+              <a:rPr dirty="0"/>
+              <a:t> </a:t>
+            </a:r>
+            <a:r>
+              <a:rPr dirty="0" err="1"/>
+              <a:t>güvenilirlik</a:t>
+            </a:r>
+            <a:r>
+              <a:rPr dirty="0"/>
+              <a:t> </a:t>
+            </a:r>
+            <a:r>
+              <a:rPr dirty="0" err="1"/>
+              <a:t>çalışması</a:t>
+            </a:r>
+            <a:r>
+              <a:rPr dirty="0"/>
+              <a:t> 2004 </a:t>
+            </a:r>
+            <a:r>
+              <a:rPr dirty="0" err="1"/>
+              <a:t>yılında</a:t>
+            </a:r>
+            <a:r>
+              <a:rPr dirty="0"/>
+              <a:t> Uysal </a:t>
+            </a:r>
+            <a:r>
+              <a:rPr dirty="0" err="1"/>
+              <a:t>ve</a:t>
+            </a:r>
+            <a:r>
+              <a:rPr dirty="0"/>
+              <a:t> </a:t>
+            </a:r>
+            <a:r>
+              <a:rPr dirty="0" err="1"/>
+              <a:t>arkadaşları</a:t>
+            </a:r>
+            <a:r>
+              <a:rPr dirty="0"/>
+              <a:t> </a:t>
+            </a:r>
+            <a:r>
+              <a:rPr dirty="0" err="1"/>
+              <a:t>tarafından</a:t>
+            </a:r>
+            <a:r>
+              <a:rPr dirty="0"/>
+              <a:t> </a:t>
+            </a:r>
+            <a:r>
+              <a:rPr dirty="0" err="1"/>
+              <a:t>yapıl</a:t>
+            </a:r>
+            <a:r>
+              <a:rPr lang="tr-TR" dirty="0" err="1"/>
+              <a:t>dığı</a:t>
+            </a:r>
+            <a:r>
+              <a:rPr lang="tr-TR" dirty="0"/>
+              <a:t> da gene makalede belirtilmiştir</a:t>
+            </a:r>
+            <a:r>
+              <a:rPr dirty="0"/>
+              <a:t>.</a:t>
             </a:r>
           </a:p>
         </p:txBody>
@@ -3123,12 +7691,350 @@
           <a:lstStyle/>
           <a:p>
             <a:r>
-              <a:t>Tedavi FNBT puanı, kronik hastalıklar, kullanılan ilaçlar, kontrendikasyonlar ve hasta uyumuna göre bireyselleştirilmiştir.</a:t>
-            </a:r>
-          </a:p>
-          <a:p>
-            <a:r>
-              <a:t>Hastalara yalnızca davranışsal tedavi, monoterapi ya da kombine tedavi uygulanmıştır. Kombine tedavi seçenekleri bupropion ile NRT, vareniklin ile NRT, sitizin ile NRT ve üçlü tedavidir. Sağlık Bakanlığı politikaları doğrultusunda NRT ve sitizin belirli dönemlerde ücretsiz sağlanmıştır.</a:t>
+              <a:rPr dirty="0" err="1"/>
+              <a:t>Tedavi</a:t>
+            </a:r>
+            <a:r>
+              <a:rPr dirty="0"/>
+              <a:t> FNBT</a:t>
+            </a:r>
+            <a:r>
+              <a:rPr lang="tr-TR" dirty="0"/>
+              <a:t>(</a:t>
+            </a:r>
+            <a:r>
+              <a:rPr lang="tr-TR" dirty="0" err="1"/>
+              <a:t>Fagerström</a:t>
+            </a:r>
+            <a:r>
+              <a:rPr lang="tr-TR" dirty="0"/>
+              <a:t> Nikotin Bağımlılık Testi )</a:t>
+            </a:r>
+            <a:r>
+              <a:rPr dirty="0"/>
+              <a:t> </a:t>
+            </a:r>
+            <a:r>
+              <a:rPr dirty="0" err="1"/>
+              <a:t>puanı</a:t>
+            </a:r>
+            <a:r>
+              <a:rPr dirty="0"/>
+              <a:t>, </a:t>
+            </a:r>
+            <a:r>
+              <a:rPr dirty="0" err="1"/>
+              <a:t>kronik</a:t>
+            </a:r>
+            <a:r>
+              <a:rPr dirty="0"/>
+              <a:t> </a:t>
+            </a:r>
+            <a:r>
+              <a:rPr dirty="0" err="1"/>
+              <a:t>hastalıklar</a:t>
+            </a:r>
+            <a:r>
+              <a:rPr dirty="0"/>
+              <a:t>, </a:t>
+            </a:r>
+            <a:r>
+              <a:rPr dirty="0" err="1"/>
+              <a:t>kullanılan</a:t>
+            </a:r>
+            <a:r>
+              <a:rPr dirty="0"/>
+              <a:t> </a:t>
+            </a:r>
+            <a:r>
+              <a:rPr dirty="0" err="1"/>
+              <a:t>ilaçlar</a:t>
+            </a:r>
+            <a:r>
+              <a:rPr dirty="0"/>
+              <a:t>, </a:t>
+            </a:r>
+            <a:r>
+              <a:rPr dirty="0" err="1"/>
+              <a:t>kontrendikasyonlar</a:t>
+            </a:r>
+            <a:r>
+              <a:rPr dirty="0"/>
+              <a:t> </a:t>
+            </a:r>
+            <a:r>
+              <a:rPr dirty="0" err="1"/>
+              <a:t>ve</a:t>
+            </a:r>
+            <a:r>
+              <a:rPr dirty="0"/>
+              <a:t> hasta </a:t>
+            </a:r>
+            <a:r>
+              <a:rPr dirty="0" err="1"/>
+              <a:t>uyumuna</a:t>
+            </a:r>
+            <a:r>
+              <a:rPr dirty="0"/>
+              <a:t> </a:t>
+            </a:r>
+            <a:r>
+              <a:rPr dirty="0" err="1"/>
+              <a:t>göre</a:t>
+            </a:r>
+            <a:r>
+              <a:rPr dirty="0"/>
+              <a:t> </a:t>
+            </a:r>
+            <a:r>
+              <a:rPr dirty="0" err="1"/>
+              <a:t>bireyselleştirilmiştir</a:t>
+            </a:r>
+            <a:r>
+              <a:rPr dirty="0"/>
+              <a:t>.</a:t>
+            </a:r>
+          </a:p>
+          <a:p>
+            <a:r>
+              <a:rPr dirty="0" err="1"/>
+              <a:t>Hastalara</a:t>
+            </a:r>
+            <a:r>
+              <a:rPr dirty="0"/>
+              <a:t> </a:t>
+            </a:r>
+            <a:r>
+              <a:rPr dirty="0" err="1"/>
+              <a:t>yalnızca</a:t>
+            </a:r>
+            <a:r>
+              <a:rPr dirty="0"/>
+              <a:t> </a:t>
+            </a:r>
+            <a:r>
+              <a:rPr dirty="0" err="1"/>
+              <a:t>davranışsal</a:t>
+            </a:r>
+            <a:r>
+              <a:rPr dirty="0"/>
+              <a:t> </a:t>
+            </a:r>
+            <a:r>
+              <a:rPr dirty="0" err="1"/>
+              <a:t>tedavi</a:t>
+            </a:r>
+            <a:r>
+              <a:rPr dirty="0"/>
+              <a:t>, </a:t>
+            </a:r>
+            <a:r>
+              <a:rPr dirty="0" err="1"/>
+              <a:t>monoterapi</a:t>
+            </a:r>
+            <a:r>
+              <a:rPr dirty="0"/>
+              <a:t> </a:t>
+            </a:r>
+            <a:r>
+              <a:rPr dirty="0" err="1"/>
+              <a:t>ya</a:t>
+            </a:r>
+            <a:r>
+              <a:rPr dirty="0"/>
+              <a:t> da </a:t>
+            </a:r>
+            <a:r>
+              <a:rPr dirty="0" err="1"/>
+              <a:t>kombine</a:t>
+            </a:r>
+            <a:r>
+              <a:rPr dirty="0"/>
+              <a:t> </a:t>
+            </a:r>
+            <a:r>
+              <a:rPr dirty="0" err="1"/>
+              <a:t>tedavi</a:t>
+            </a:r>
+            <a:r>
+              <a:rPr dirty="0"/>
+              <a:t> </a:t>
+            </a:r>
+            <a:r>
+              <a:rPr dirty="0" err="1"/>
+              <a:t>uygulanmıştır</a:t>
+            </a:r>
+            <a:r>
+              <a:rPr dirty="0"/>
+              <a:t>. </a:t>
+            </a:r>
+            <a:r>
+              <a:rPr dirty="0" err="1"/>
+              <a:t>Kombine</a:t>
+            </a:r>
+            <a:r>
+              <a:rPr dirty="0"/>
+              <a:t> </a:t>
+            </a:r>
+            <a:r>
+              <a:rPr dirty="0" err="1"/>
+              <a:t>tedavi</a:t>
+            </a:r>
+            <a:r>
+              <a:rPr dirty="0"/>
+              <a:t> </a:t>
+            </a:r>
+            <a:r>
+              <a:rPr dirty="0" err="1"/>
+              <a:t>seçenekleri</a:t>
+            </a:r>
+            <a:r>
+              <a:rPr dirty="0"/>
+              <a:t> bupropion </a:t>
+            </a:r>
+            <a:r>
+              <a:rPr dirty="0" err="1"/>
+              <a:t>ile</a:t>
+            </a:r>
+            <a:r>
+              <a:rPr dirty="0"/>
+              <a:t> NRT, </a:t>
+            </a:r>
+            <a:r>
+              <a:rPr dirty="0" err="1"/>
+              <a:t>vareniklin</a:t>
+            </a:r>
+            <a:r>
+              <a:rPr dirty="0"/>
+              <a:t> </a:t>
+            </a:r>
+            <a:r>
+              <a:rPr dirty="0" err="1"/>
+              <a:t>ile</a:t>
+            </a:r>
+            <a:r>
+              <a:rPr dirty="0"/>
+              <a:t> NRT, </a:t>
+            </a:r>
+            <a:r>
+              <a:rPr dirty="0" err="1"/>
+              <a:t>sitizin</a:t>
+            </a:r>
+            <a:r>
+              <a:rPr dirty="0"/>
+              <a:t> </a:t>
+            </a:r>
+            <a:r>
+              <a:rPr dirty="0" err="1"/>
+              <a:t>ile</a:t>
+            </a:r>
+            <a:r>
+              <a:rPr dirty="0"/>
+              <a:t> NRT </a:t>
+            </a:r>
+            <a:r>
+              <a:rPr dirty="0" err="1"/>
+              <a:t>ve</a:t>
+            </a:r>
+            <a:r>
+              <a:rPr dirty="0"/>
+              <a:t> </a:t>
+            </a:r>
+            <a:r>
+              <a:rPr dirty="0" err="1"/>
+              <a:t>üçlü</a:t>
+            </a:r>
+            <a:r>
+              <a:rPr dirty="0"/>
+              <a:t> </a:t>
+            </a:r>
+            <a:r>
+              <a:rPr dirty="0" err="1"/>
+              <a:t>tedavidir</a:t>
+            </a:r>
+            <a:r>
+              <a:rPr dirty="0"/>
+              <a:t>. </a:t>
+            </a:r>
+            <a:r>
+              <a:rPr dirty="0" err="1"/>
+              <a:t>Sağlık</a:t>
+            </a:r>
+            <a:r>
+              <a:rPr dirty="0"/>
+              <a:t> </a:t>
+            </a:r>
+            <a:r>
+              <a:rPr dirty="0" err="1"/>
+              <a:t>Bakanlığı</a:t>
+            </a:r>
+            <a:r>
+              <a:rPr dirty="0"/>
+              <a:t> </a:t>
+            </a:r>
+            <a:r>
+              <a:rPr dirty="0" err="1"/>
+              <a:t>politikaları</a:t>
+            </a:r>
+            <a:r>
+              <a:rPr dirty="0"/>
+              <a:t> </a:t>
+            </a:r>
+            <a:r>
+              <a:rPr dirty="0" err="1"/>
+              <a:t>doğrultusunda</a:t>
+            </a:r>
+            <a:r>
+              <a:rPr dirty="0"/>
+              <a:t> NRT </a:t>
+            </a:r>
+            <a:r>
+              <a:rPr dirty="0" err="1"/>
+              <a:t>ve</a:t>
+            </a:r>
+            <a:r>
+              <a:rPr dirty="0"/>
+              <a:t> </a:t>
+            </a:r>
+            <a:r>
+              <a:rPr dirty="0" err="1"/>
+              <a:t>sitizin</a:t>
+            </a:r>
+            <a:r>
+              <a:rPr dirty="0"/>
+              <a:t> </a:t>
+            </a:r>
+            <a:r>
+              <a:rPr dirty="0" err="1"/>
+              <a:t>belirli</a:t>
+            </a:r>
+            <a:r>
+              <a:rPr dirty="0"/>
+              <a:t> </a:t>
+            </a:r>
+            <a:r>
+              <a:rPr dirty="0" err="1"/>
+              <a:t>dönemlerde</a:t>
+            </a:r>
+            <a:r>
+              <a:rPr dirty="0"/>
+              <a:t> </a:t>
+            </a:r>
+            <a:r>
+              <a:rPr dirty="0" err="1"/>
+              <a:t>ücretsiz</a:t>
+            </a:r>
+            <a:r>
+              <a:rPr dirty="0"/>
+              <a:t> </a:t>
+            </a:r>
+            <a:r>
+              <a:rPr dirty="0" err="1"/>
+              <a:t>sağlanmıştır</a:t>
+            </a:r>
+            <a:r>
+              <a:rPr dirty="0"/>
+              <a:t>.</a:t>
             </a:r>
           </a:p>
         </p:txBody>
@@ -4051,12 +8957,12 @@
               <a:buNone/>
             </a:pPr>
             <a:r>
-              <a:rPr lang="en-US" sz="2000" dirty="0">
+              <a:rPr lang="en-US" sz="1000" dirty="0">
                 <a:solidFill>
                   <a:schemeClr val="bg2"/>
                 </a:solidFill>
               </a:rPr>
-              <a:t>Cenberlitaş E, Gökçe A, Öztürk O. Turk J Fam Pract. 2026;30(2):97-106</a:t>
+              <a:t> </a:t>
             </a:r>
             <a:endParaRPr lang="en-US" sz="2000" dirty="0"/>
           </a:p>
@@ -4065,26 +8971,28 @@
               <a:buNone/>
             </a:pPr>
             <a:r>
-              <a:rPr lang="en-US" sz="1000" dirty="0">
+              <a:rPr lang="tr-TR" sz="2000" b="1" dirty="0">
                 <a:solidFill>
                   <a:schemeClr val="bg2"/>
                 </a:solidFill>
               </a:rPr>
-              <a:t> </a:t>
-            </a:r>
-            <a:endParaRPr lang="en-US" sz="2000" dirty="0"/>
-          </a:p>
-          <a:p>
-            <a:pPr marL="0" indent="0" algn="l">
-              <a:buNone/>
-            </a:pPr>
+              <a:t>	</a:t>
+            </a:r>
+            <a:r>
+              <a:rPr lang="en-US" sz="2000" b="1" dirty="0">
+                <a:solidFill>
+                  <a:schemeClr val="bg2"/>
+                </a:solidFill>
+              </a:rPr>
+              <a:t>Suna</a:t>
+            </a:r>
             <a:r>
               <a:rPr lang="tr-TR" sz="2000" b="1" dirty="0">
                 <a:solidFill>
                   <a:schemeClr val="bg2"/>
                 </a:solidFill>
               </a:rPr>
-              <a:t>	</a:t>
+              <a:t>n		</a:t>
             </a:r>
             <a:r>
               <a:rPr lang="en-US" sz="2000" b="1" dirty="0">
@@ -4092,7 +9000,15 @@
                   <a:schemeClr val="bg2"/>
                 </a:solidFill>
               </a:rPr>
-              <a:t>Suna</a:t>
+              <a:t>: </a:t>
+            </a:r>
+            <a:r>
+              <a:rPr lang="tr-TR" sz="2000" b="1" dirty="0" err="1">
+                <a:solidFill>
+                  <a:schemeClr val="bg2"/>
+                </a:solidFill>
+              </a:rPr>
+              <a:t>Asst</a:t>
             </a:r>
             <a:r>
               <a:rPr lang="tr-TR" sz="2000" b="1" dirty="0">
@@ -4100,7 +9016,7 @@
                   <a:schemeClr val="bg2"/>
                 </a:solidFill>
               </a:rPr>
-              <a:t>n		</a:t>
+              <a:t>. </a:t>
             </a:r>
             <a:r>
               <a:rPr lang="en-US" sz="2000" b="1" dirty="0">
@@ -4108,7 +9024,7 @@
                   <a:schemeClr val="bg2"/>
                 </a:solidFill>
               </a:rPr>
-              <a:t>: Dr. </a:t>
+              <a:t>Dr. </a:t>
             </a:r>
             <a:r>
               <a:rPr lang="tr-TR" sz="2000" b="1" dirty="0">
@@ -4131,7 +9047,7 @@
                   <a:schemeClr val="bg2"/>
                 </a:solidFill>
               </a:rPr>
-              <a:t>	Danışman	: Prof. Dr. Onur ÖZTÜRK</a:t>
+              <a:t>	Danışman 	: Prof. Dr. Onur ÖZTÜRK</a:t>
             </a:r>
             <a:endParaRPr lang="en-US" sz="2000" dirty="0"/>
           </a:p>
@@ -5194,42 +10110,6 @@
       </p:graphicFrame>
       <p:sp>
         <p:nvSpPr>
-          <p:cNvPr id="5" name="Kaynak"/>
-          <p:cNvSpPr txBox="1"/>
-          <p:nvPr/>
-        </p:nvSpPr>
-        <p:spPr>
-          <a:xfrm>
-            <a:off x="548640" y="6382512"/>
-            <a:ext cx="10424160" cy="292608"/>
-          </a:xfrm>
-          <a:prstGeom prst="rect">
-            <a:avLst/>
-          </a:prstGeom>
-          <a:noFill/>
-          <a:ln/>
-        </p:spPr>
-        <p:txBody>
-          <a:bodyPr wrap="square" lIns="0" tIns="0" rIns="0" bIns="0" rtlCol="0" anchor="ctr"/>
-          <a:lstStyle/>
-          <a:p>
-            <a:pPr marL="0" indent="0">
-              <a:buNone/>
-            </a:pPr>
-            <a:r>
-              <a:rPr lang="en-US" sz="1200" i="1" dirty="0">
-                <a:solidFill>
-                  <a:schemeClr val="accent3"/>
-                </a:solidFill>
-              </a:rPr>
-              <a:t>Kaynak: Cenberlitaş E, Gökçe A, Öztürk O. Turk J Fam Pract. 2026;30(2):97-106.</a:t>
-            </a:r>
-            <a:endParaRPr lang="en-US" sz="1200" dirty="0"/>
-          </a:p>
-        </p:txBody>
-      </p:sp>
-      <p:sp>
-        <p:nvSpPr>
           <p:cNvPr id="25" name="Slide Number Placeholder 0"/>
           <p:cNvSpPr>
             <a:spLocks noGrp="1"/>
@@ -5494,7 +10374,31 @@
                   <a:schemeClr val="accent2"/>
                 </a:solidFill>
               </a:rPr>
-              <a:t>44,7 ± 12,1</a:t>
+              <a:t>44,</a:t>
+            </a:r>
+            <a:r>
+              <a:rPr lang="tr-TR" sz="3600" b="1" dirty="0">
+                <a:solidFill>
+                  <a:schemeClr val="accent2"/>
+                </a:solidFill>
+              </a:rPr>
+              <a:t>69</a:t>
+            </a:r>
+            <a:r>
+              <a:rPr lang="en-US" sz="3600" b="1" dirty="0">
+                <a:solidFill>
+                  <a:schemeClr val="accent2"/>
+                </a:solidFill>
+              </a:rPr>
+              <a:t> ± 12,</a:t>
+            </a:r>
+            <a:r>
+              <a:rPr lang="tr-TR" sz="3600" b="1" dirty="0">
+                <a:solidFill>
+                  <a:schemeClr val="accent2"/>
+                </a:solidFill>
+              </a:rPr>
+              <a:t>05</a:t>
             </a:r>
             <a:endParaRPr lang="en-US" sz="3600" dirty="0"/>
           </a:p>
@@ -5593,7 +10497,15 @@
                   <a:schemeClr val="accent1"/>
                 </a:solidFill>
               </a:rPr>
-              <a:t>%63,7</a:t>
+              <a:t>%63,</a:t>
+            </a:r>
+            <a:r>
+              <a:rPr lang="tr-TR" sz="3600" b="1" dirty="0">
+                <a:solidFill>
+                  <a:schemeClr val="accent1"/>
+                </a:solidFill>
+              </a:rPr>
+              <a:t>66</a:t>
             </a:r>
             <a:endParaRPr lang="en-US" sz="3600" dirty="0"/>
           </a:p>
@@ -5791,7 +10703,31 @@
                   <a:schemeClr val="accent2"/>
                 </a:solidFill>
               </a:rPr>
-              <a:t>27,4 ± 16,6</a:t>
+              <a:t>27,</a:t>
+            </a:r>
+            <a:r>
+              <a:rPr lang="tr-TR" sz="3600" b="1" dirty="0">
+                <a:solidFill>
+                  <a:schemeClr val="accent2"/>
+                </a:solidFill>
+              </a:rPr>
+              <a:t>38</a:t>
+            </a:r>
+            <a:r>
+              <a:rPr lang="en-US" sz="3600" b="1" dirty="0">
+                <a:solidFill>
+                  <a:schemeClr val="accent2"/>
+                </a:solidFill>
+              </a:rPr>
+              <a:t> ± 16,</a:t>
+            </a:r>
+            <a:r>
+              <a:rPr lang="tr-TR" sz="3600" b="1" dirty="0">
+                <a:solidFill>
+                  <a:schemeClr val="accent2"/>
+                </a:solidFill>
+              </a:rPr>
+              <a:t>57</a:t>
             </a:r>
             <a:endParaRPr lang="en-US" sz="3600" dirty="0"/>
           </a:p>
@@ -5890,7 +10826,15 @@
                   <a:schemeClr val="bg1"/>
                 </a:solidFill>
               </a:rPr>
-              <a:t>%34,1</a:t>
+              <a:t>%34,</a:t>
+            </a:r>
+            <a:r>
+              <a:rPr lang="tr-TR" sz="3600" b="1" dirty="0">
+                <a:solidFill>
+                  <a:schemeClr val="bg1"/>
+                </a:solidFill>
+              </a:rPr>
+              <a:t>09</a:t>
             </a:r>
             <a:endParaRPr lang="en-US" sz="3600" dirty="0"/>
           </a:p>
@@ -5929,42 +10873,6 @@
               <a:t>sigarayı bırakan</a:t>
             </a:r>
             <a:endParaRPr lang="en-US" sz="2200" dirty="0"/>
-          </a:p>
-        </p:txBody>
-      </p:sp>
-      <p:sp>
-        <p:nvSpPr>
-          <p:cNvPr id="22" name="Kaynak"/>
-          <p:cNvSpPr txBox="1"/>
-          <p:nvPr/>
-        </p:nvSpPr>
-        <p:spPr>
-          <a:xfrm>
-            <a:off x="548640" y="6382512"/>
-            <a:ext cx="10424160" cy="292608"/>
-          </a:xfrm>
-          <a:prstGeom prst="rect">
-            <a:avLst/>
-          </a:prstGeom>
-          <a:noFill/>
-          <a:ln/>
-        </p:spPr>
-        <p:txBody>
-          <a:bodyPr wrap="square" lIns="0" tIns="0" rIns="0" bIns="0" rtlCol="0" anchor="ctr"/>
-          <a:lstStyle/>
-          <a:p>
-            <a:pPr marL="0" indent="0">
-              <a:buNone/>
-            </a:pPr>
-            <a:r>
-              <a:rPr lang="en-US" sz="1200" i="1" dirty="0">
-                <a:solidFill>
-                  <a:schemeClr val="accent3"/>
-                </a:solidFill>
-              </a:rPr>
-              <a:t>Kaynak: Cenberlitaş E, Gökçe A, Öztürk O. Turk J Fam Pract. 2026;30(2):97-106. Ortalama ± standart sapma.</a:t>
-            </a:r>
-            <a:endParaRPr lang="en-US" sz="1200" dirty="0"/>
           </a:p>
         </p:txBody>
       </p:sp>
@@ -6171,7 +11079,15 @@
                   <a:schemeClr val="accent1"/>
                 </a:solidFill>
               </a:rPr>
-              <a:t>%13,2</a:t>
+              <a:t>%13,</a:t>
+            </a:r>
+            <a:r>
+              <a:rPr lang="tr-TR" sz="4000" b="1" dirty="0">
+                <a:solidFill>
+                  <a:schemeClr val="accent1"/>
+                </a:solidFill>
+              </a:rPr>
+              <a:t>19</a:t>
             </a:r>
             <a:endParaRPr lang="en-US" sz="4000" dirty="0"/>
           </a:p>
@@ -6250,6 +11166,14 @@
               </a:rPr>
               <a:t>%61,3</a:t>
             </a:r>
+            <a:r>
+              <a:rPr lang="tr-TR" sz="4000" b="1" dirty="0">
+                <a:solidFill>
+                  <a:schemeClr val="bg1"/>
+                </a:solidFill>
+              </a:rPr>
+              <a:t>4</a:t>
+            </a:r>
             <a:endParaRPr lang="en-US" sz="4000" dirty="0"/>
           </a:p>
           <a:p>
@@ -6325,7 +11249,15 @@
                   <a:schemeClr val="bg1"/>
                 </a:solidFill>
               </a:rPr>
-              <a:t>%25,5</a:t>
+              <a:t>%25,</a:t>
+            </a:r>
+            <a:r>
+              <a:rPr lang="tr-TR" sz="4000" b="1" dirty="0">
+                <a:solidFill>
+                  <a:schemeClr val="bg1"/>
+                </a:solidFill>
+              </a:rPr>
+              <a:t>46</a:t>
             </a:r>
             <a:endParaRPr lang="en-US" sz="4000" dirty="0"/>
           </a:p>
@@ -6438,7 +11370,15 @@
                   <a:schemeClr val="accent1"/>
                 </a:solidFill>
               </a:rPr>
-              <a:t>%75,7</a:t>
+              <a:t>%75,</a:t>
+            </a:r>
+            <a:r>
+              <a:rPr lang="tr-TR" sz="3200" b="1" dirty="0">
+                <a:solidFill>
+                  <a:schemeClr val="accent1"/>
+                </a:solidFill>
+              </a:rPr>
+              <a:t>69</a:t>
             </a:r>
             <a:endParaRPr lang="en-US" sz="3200" dirty="0"/>
           </a:p>
@@ -6537,7 +11477,15 @@
                   <a:schemeClr val="accent1"/>
                 </a:solidFill>
               </a:rPr>
-              <a:t>%49,9</a:t>
+              <a:t>%49,</a:t>
+            </a:r>
+            <a:r>
+              <a:rPr lang="tr-TR" sz="3200" b="1" dirty="0">
+                <a:solidFill>
+                  <a:schemeClr val="accent1"/>
+                </a:solidFill>
+              </a:rPr>
+              <a:t>85</a:t>
             </a:r>
             <a:endParaRPr lang="en-US" sz="3200" dirty="0"/>
           </a:p>
@@ -6636,7 +11584,15 @@
                   <a:schemeClr val="accent1"/>
                 </a:solidFill>
               </a:rPr>
-              <a:t>%7,2</a:t>
+              <a:t>%7,</a:t>
+            </a:r>
+            <a:r>
+              <a:rPr lang="tr-TR" sz="3200" b="1" dirty="0">
+                <a:solidFill>
+                  <a:schemeClr val="accent1"/>
+                </a:solidFill>
+              </a:rPr>
+              <a:t>19</a:t>
             </a:r>
             <a:endParaRPr lang="en-US" sz="3200" dirty="0"/>
           </a:p>
@@ -6675,42 +11631,6 @@
               <a:t>sigara dışı tütün ürünü kullanıyor</a:t>
             </a:r>
             <a:endParaRPr lang="en-US" sz="1800" dirty="0"/>
-          </a:p>
-        </p:txBody>
-      </p:sp>
-      <p:sp>
-        <p:nvSpPr>
-          <p:cNvPr id="21" name="Kaynak"/>
-          <p:cNvSpPr txBox="1"/>
-          <p:nvPr/>
-        </p:nvSpPr>
-        <p:spPr>
-          <a:xfrm>
-            <a:off x="548640" y="6382512"/>
-            <a:ext cx="10424160" cy="292608"/>
-          </a:xfrm>
-          <a:prstGeom prst="rect">
-            <a:avLst/>
-          </a:prstGeom>
-          <a:noFill/>
-          <a:ln/>
-        </p:spPr>
-        <p:txBody>
-          <a:bodyPr wrap="square" lIns="0" tIns="0" rIns="0" bIns="0" rtlCol="0" anchor="ctr"/>
-          <a:lstStyle/>
-          <a:p>
-            <a:pPr marL="0" indent="0">
-              <a:buNone/>
-            </a:pPr>
-            <a:r>
-              <a:rPr lang="en-US" sz="1200" i="1" dirty="0">
-                <a:solidFill>
-                  <a:schemeClr val="accent3"/>
-                </a:solidFill>
-              </a:rPr>
-              <a:t>Kaynak: Cenberlitaş E, Gökçe A, Öztürk O. Turk J Fam Pract. 2026;30(2):97-106.</a:t>
-            </a:r>
-            <a:endParaRPr lang="en-US" sz="1200" dirty="0"/>
           </a:p>
         </p:txBody>
       </p:sp>
@@ -6813,12 +11733,20 @@
               <a:buNone/>
             </a:pPr>
             <a:r>
+              <a:rPr lang="en-US" sz="3600" b="1" dirty="0" err="1">
+                <a:solidFill>
+                  <a:schemeClr val="accent1"/>
+                </a:solidFill>
+              </a:rPr>
+              <a:t>Sosyodemografik</a:t>
+            </a:r>
+            <a:r>
               <a:rPr lang="en-US" sz="3600" b="1" dirty="0">
                 <a:solidFill>
                   <a:schemeClr val="accent1"/>
                 </a:solidFill>
               </a:rPr>
-              <a:t>Tablo 1: Sosyodemografik özellikler</a:t>
+              <a:t> özellikler</a:t>
             </a:r>
             <a:endParaRPr lang="en-US" sz="3600" dirty="0"/>
           </a:p>
@@ -6930,7 +11858,15 @@
                   <a:schemeClr val="bg1"/>
                 </a:solidFill>
               </a:rPr>
-              <a:t>%63,7</a:t>
+              <a:t>%63,</a:t>
+            </a:r>
+            <a:r>
+              <a:rPr lang="tr-TR" sz="3000" b="1" dirty="0">
+                <a:solidFill>
+                  <a:schemeClr val="bg1"/>
+                </a:solidFill>
+              </a:rPr>
+              <a:t>66</a:t>
             </a:r>
             <a:endParaRPr lang="en-US" sz="3000" dirty="0"/>
           </a:p>
@@ -6961,7 +11897,31 @@
                   <a:schemeClr val="bg1"/>
                 </a:solidFill>
               </a:rPr>
-              <a:t>%82,0</a:t>
+              <a:t>%8</a:t>
+            </a:r>
+            <a:r>
+              <a:rPr lang="tr-TR" sz="3000" b="1" dirty="0">
+                <a:solidFill>
+                  <a:schemeClr val="bg1"/>
+                </a:solidFill>
+              </a:rPr>
+              <a:t>1</a:t>
+            </a:r>
+            <a:r>
+              <a:rPr lang="en-US" sz="3000" b="1" dirty="0">
+                <a:solidFill>
+                  <a:schemeClr val="bg1"/>
+                </a:solidFill>
+              </a:rPr>
+              <a:t>,</a:t>
+            </a:r>
+            <a:r>
+              <a:rPr lang="tr-TR" sz="3000" b="1" dirty="0">
+                <a:solidFill>
+                  <a:schemeClr val="bg1"/>
+                </a:solidFill>
+              </a:rPr>
+              <a:t>96</a:t>
             </a:r>
             <a:endParaRPr lang="en-US" sz="3000" dirty="0"/>
           </a:p>
@@ -6992,7 +11952,15 @@
                   <a:schemeClr val="bg1"/>
                 </a:solidFill>
               </a:rPr>
-              <a:t>%43,4</a:t>
+              <a:t>%43,</a:t>
+            </a:r>
+            <a:r>
+              <a:rPr lang="tr-TR" sz="3000" b="1" dirty="0">
+                <a:solidFill>
+                  <a:schemeClr val="bg1"/>
+                </a:solidFill>
+              </a:rPr>
+              <a:t>36</a:t>
             </a:r>
             <a:endParaRPr lang="en-US" sz="3000" dirty="0"/>
           </a:p>
@@ -7040,42 +12008,6 @@
               <a:t>hanesinde sigara içen var</a:t>
             </a:r>
             <a:endParaRPr lang="en-US" sz="3000" dirty="0"/>
-          </a:p>
-        </p:txBody>
-      </p:sp>
-      <p:sp>
-        <p:nvSpPr>
-          <p:cNvPr id="8" name="Kaynak"/>
-          <p:cNvSpPr txBox="1"/>
-          <p:nvPr/>
-        </p:nvSpPr>
-        <p:spPr>
-          <a:xfrm>
-            <a:off x="548640" y="6382512"/>
-            <a:ext cx="10424160" cy="292608"/>
-          </a:xfrm>
-          <a:prstGeom prst="rect">
-            <a:avLst/>
-          </a:prstGeom>
-          <a:noFill/>
-          <a:ln/>
-        </p:spPr>
-        <p:txBody>
-          <a:bodyPr wrap="square" lIns="0" tIns="0" rIns="0" bIns="0" rtlCol="0" anchor="ctr"/>
-          <a:lstStyle/>
-          <a:p>
-            <a:pPr marL="0" indent="0">
-              <a:buNone/>
-            </a:pPr>
-            <a:r>
-              <a:rPr lang="en-US" sz="1200" i="1" dirty="0">
-                <a:solidFill>
-                  <a:schemeClr val="accent3"/>
-                </a:solidFill>
-              </a:rPr>
-              <a:t>Görsel: Cenberlitaş E, Gökçe A, Öztürk O. Turk J Fam Pract. 2026;30(2):97-106, Tablo 1.</a:t>
-            </a:r>
-            <a:endParaRPr lang="en-US" sz="1200" dirty="0"/>
           </a:p>
         </p:txBody>
       </p:sp>
@@ -7162,7 +12094,7 @@
         <p:spPr>
           <a:xfrm>
             <a:off x="548640" y="320040"/>
-            <a:ext cx="10607040" cy="868680"/>
+            <a:ext cx="11201400" cy="868680"/>
           </a:xfrm>
           <a:prstGeom prst="rect">
             <a:avLst/>
@@ -7178,12 +12110,52 @@
               <a:buNone/>
             </a:pPr>
             <a:r>
+              <a:rPr lang="en-US" sz="3600" b="1" dirty="0" err="1">
+                <a:solidFill>
+                  <a:schemeClr val="accent1"/>
+                </a:solidFill>
+              </a:rPr>
+              <a:t>Sosyodemografik</a:t>
+            </a:r>
+            <a:r>
               <a:rPr lang="en-US" sz="3600" b="1" dirty="0">
                 <a:solidFill>
                   <a:schemeClr val="accent1"/>
                 </a:solidFill>
               </a:rPr>
-              <a:t>Tablo 2: Sosyodemografik özellikler ve bırakma</a:t>
+              <a:t> </a:t>
+            </a:r>
+            <a:r>
+              <a:rPr lang="en-US" sz="3600" b="1" dirty="0" err="1">
+                <a:solidFill>
+                  <a:schemeClr val="accent1"/>
+                </a:solidFill>
+              </a:rPr>
+              <a:t>özellikler</a:t>
+            </a:r>
+            <a:r>
+              <a:rPr lang="tr-TR" sz="3600" b="1" dirty="0">
+                <a:solidFill>
+                  <a:schemeClr val="accent1"/>
+                </a:solidFill>
+              </a:rPr>
+              <a:t>e göre sigara </a:t>
+            </a:r>
+            <a:r>
+              <a:rPr lang="en-US" sz="3600" b="1" dirty="0" err="1">
+                <a:solidFill>
+                  <a:schemeClr val="accent1"/>
+                </a:solidFill>
+              </a:rPr>
+              <a:t>bırakma</a:t>
+            </a:r>
+            <a:r>
+              <a:rPr lang="tr-TR" sz="3600" b="1" dirty="0">
+                <a:solidFill>
+                  <a:schemeClr val="accent1"/>
+                </a:solidFill>
+              </a:rPr>
+              <a:t> sonuçları</a:t>
             </a:r>
             <a:endParaRPr lang="en-US" sz="3600" dirty="0"/>
           </a:p>
@@ -7315,42 +12287,6 @@
               <a:t>Cinsiyet, yaş grubu, medeni durum ve eğitim durumu</a:t>
             </a:r>
             <a:endParaRPr lang="en-US" sz="2000" dirty="0"/>
-          </a:p>
-        </p:txBody>
-      </p:sp>
-      <p:sp>
-        <p:nvSpPr>
-          <p:cNvPr id="8" name="Kaynak"/>
-          <p:cNvSpPr txBox="1"/>
-          <p:nvPr/>
-        </p:nvSpPr>
-        <p:spPr>
-          <a:xfrm>
-            <a:off x="548640" y="6382512"/>
-            <a:ext cx="10424160" cy="292608"/>
-          </a:xfrm>
-          <a:prstGeom prst="rect">
-            <a:avLst/>
-          </a:prstGeom>
-          <a:noFill/>
-          <a:ln/>
-        </p:spPr>
-        <p:txBody>
-          <a:bodyPr wrap="square" lIns="0" tIns="0" rIns="0" bIns="0" rtlCol="0" anchor="ctr"/>
-          <a:lstStyle/>
-          <a:p>
-            <a:pPr marL="0" indent="0">
-              <a:buNone/>
-            </a:pPr>
-            <a:r>
-              <a:rPr lang="en-US" sz="1200" i="1" dirty="0">
-                <a:solidFill>
-                  <a:schemeClr val="accent3"/>
-                </a:solidFill>
-              </a:rPr>
-              <a:t>Görsel: Cenberlitaş E, Gökçe A, Öztürk O. Turk J Fam Pract. 2026;30(2):97-106, Tablo 2.</a:t>
-            </a:r>
-            <a:endParaRPr lang="en-US" sz="1200" dirty="0"/>
           </a:p>
         </p:txBody>
       </p:sp>
@@ -7437,7 +12373,7 @@
         <p:spPr>
           <a:xfrm>
             <a:off x="548640" y="320040"/>
-            <a:ext cx="10607040" cy="868680"/>
+            <a:ext cx="10863072" cy="868680"/>
           </a:xfrm>
           <a:prstGeom prst="rect">
             <a:avLst/>
@@ -7449,16 +12385,37 @@
           <a:bodyPr wrap="square" lIns="0" tIns="0" rIns="0" bIns="0" rtlCol="0" anchor="ctr"/>
           <a:lstStyle/>
           <a:p>
-            <a:pPr marL="0" indent="0" algn="l">
-              <a:buNone/>
-            </a:pPr>
+            <a:r>
+              <a:rPr lang="en-US" dirty="0" err="1"/>
+              <a:t>Sosyodemografik</a:t>
+            </a:r>
+            <a:r>
+              <a:rPr lang="en-US" dirty="0"/>
+              <a:t> </a:t>
+            </a:r>
+            <a:r>
+              <a:rPr lang="en-US" dirty="0" err="1"/>
+              <a:t>özellikler</a:t>
+            </a:r>
+            <a:r>
+              <a:rPr lang="tr-TR" dirty="0"/>
+              <a:t>e göre sigara </a:t>
+            </a:r>
+            <a:r>
+              <a:rPr lang="en-US" dirty="0" err="1"/>
+              <a:t>bırakma</a:t>
+            </a:r>
+            <a:r>
+              <a:rPr lang="tr-TR" dirty="0"/>
+              <a:t> </a:t>
+            </a:r>
             <a:r>
               <a:rPr lang="en-US" sz="3600" b="1" dirty="0">
                 <a:solidFill>
                   <a:schemeClr val="accent1"/>
                 </a:solidFill>
               </a:rPr>
-              <a:t>Tablo 2 (devam)</a:t>
+              <a:t>(devam)</a:t>
             </a:r>
             <a:endParaRPr lang="en-US" sz="3600" dirty="0"/>
           </a:p>
@@ -7621,42 +12578,6 @@
               <a:t>Bırakma: %39,8 ve %25,3</a:t>
             </a:r>
             <a:endParaRPr lang="en-US" sz="2000" dirty="0"/>
-          </a:p>
-        </p:txBody>
-      </p:sp>
-      <p:sp>
-        <p:nvSpPr>
-          <p:cNvPr id="8" name="Kaynak"/>
-          <p:cNvSpPr txBox="1"/>
-          <p:nvPr/>
-        </p:nvSpPr>
-        <p:spPr>
-          <a:xfrm>
-            <a:off x="548640" y="6382512"/>
-            <a:ext cx="10424160" cy="292608"/>
-          </a:xfrm>
-          <a:prstGeom prst="rect">
-            <a:avLst/>
-          </a:prstGeom>
-          <a:noFill/>
-          <a:ln/>
-        </p:spPr>
-        <p:txBody>
-          <a:bodyPr wrap="square" lIns="0" tIns="0" rIns="0" bIns="0" rtlCol="0" anchor="ctr"/>
-          <a:lstStyle/>
-          <a:p>
-            <a:pPr marL="0" indent="0">
-              <a:buNone/>
-            </a:pPr>
-            <a:r>
-              <a:rPr lang="en-US" sz="1200" i="1" dirty="0">
-                <a:solidFill>
-                  <a:schemeClr val="accent3"/>
-                </a:solidFill>
-              </a:rPr>
-              <a:t>Görsel: Cenberlitaş E, Gökçe A, Öztürk O. Turk J Fam Pract. 2026;30(2):97-106, Tablo 2.</a:t>
-            </a:r>
-            <a:endParaRPr lang="en-US" sz="1200" dirty="0"/>
           </a:p>
         </p:txBody>
       </p:sp>
@@ -7759,12 +12680,24 @@
               <a:buNone/>
             </a:pPr>
             <a:r>
-              <a:rPr lang="en-US" sz="3600" b="1" dirty="0">
+              <a:rPr lang="tr-TR" dirty="0"/>
+              <a:t>Katılımcıların kullandığı </a:t>
+            </a:r>
+            <a:r>
+              <a:rPr lang="en-US" sz="3600" b="1" dirty="0" err="1">
                 <a:solidFill>
                   <a:schemeClr val="accent1"/>
                 </a:solidFill>
               </a:rPr>
-              <a:t>Tablo 3: Uygulanan tedaviler</a:t>
+              <a:t>tedavi</a:t>
+            </a:r>
+            <a:r>
+              <a:rPr lang="tr-TR" sz="3600" b="1" dirty="0">
+                <a:solidFill>
+                  <a:schemeClr val="accent1"/>
+                </a:solidFill>
+              </a:rPr>
+              <a:t> seçenekleri</a:t>
             </a:r>
             <a:endParaRPr lang="en-US" sz="3600" dirty="0"/>
           </a:p>
@@ -7924,42 +12857,6 @@
               <a:t>bupropion + NRT</a:t>
             </a:r>
             <a:endParaRPr lang="en-US" sz="3000" dirty="0"/>
-          </a:p>
-        </p:txBody>
-      </p:sp>
-      <p:sp>
-        <p:nvSpPr>
-          <p:cNvPr id="8" name="Kaynak"/>
-          <p:cNvSpPr txBox="1"/>
-          <p:nvPr/>
-        </p:nvSpPr>
-        <p:spPr>
-          <a:xfrm>
-            <a:off x="548640" y="6382512"/>
-            <a:ext cx="10424160" cy="292608"/>
-          </a:xfrm>
-          <a:prstGeom prst="rect">
-            <a:avLst/>
-          </a:prstGeom>
-          <a:noFill/>
-          <a:ln/>
-        </p:spPr>
-        <p:txBody>
-          <a:bodyPr wrap="square" lIns="0" tIns="0" rIns="0" bIns="0" rtlCol="0" anchor="ctr"/>
-          <a:lstStyle/>
-          <a:p>
-            <a:pPr marL="0" indent="0">
-              <a:buNone/>
-            </a:pPr>
-            <a:r>
-              <a:rPr lang="en-US" sz="1200" i="1" dirty="0">
-                <a:solidFill>
-                  <a:schemeClr val="accent3"/>
-                </a:solidFill>
-              </a:rPr>
-              <a:t>Görsel: Cenberlitaş E, Gökçe A, Öztürk O. Turk J Fam Pract. 2026;30(2):97-106, Tablo 3.</a:t>
-            </a:r>
-            <a:endParaRPr lang="en-US" sz="1200" dirty="0"/>
           </a:p>
         </p:txBody>
       </p:sp>
@@ -8062,12 +12959,20 @@
               <a:buNone/>
             </a:pPr>
             <a:r>
+              <a:rPr lang="en-US" sz="3600" b="1" dirty="0" err="1">
+                <a:solidFill>
+                  <a:schemeClr val="accent1"/>
+                </a:solidFill>
+              </a:rPr>
+              <a:t>Görüşme</a:t>
+            </a:r>
+            <a:r>
               <a:rPr lang="en-US" sz="3600" b="1" dirty="0">
                 <a:solidFill>
                   <a:schemeClr val="accent1"/>
                 </a:solidFill>
               </a:rPr>
-              <a:t>Tablo 4: Görüşme sayısı, FNBT ve paket-yıl</a:t>
+              <a:t> sayısı, FNBT ve paket-yıl</a:t>
             </a:r>
             <a:endParaRPr lang="en-US" sz="3600" dirty="0"/>
           </a:p>
@@ -8392,42 +13297,6 @@
               <a:t>İki grup benzer</a:t>
             </a:r>
             <a:endParaRPr lang="en-US" sz="2000" dirty="0"/>
-          </a:p>
-        </p:txBody>
-      </p:sp>
-      <p:sp>
-        <p:nvSpPr>
-          <p:cNvPr id="12" name="Kaynak"/>
-          <p:cNvSpPr txBox="1"/>
-          <p:nvPr/>
-        </p:nvSpPr>
-        <p:spPr>
-          <a:xfrm>
-            <a:off x="548640" y="6382512"/>
-            <a:ext cx="10424160" cy="292608"/>
-          </a:xfrm>
-          <a:prstGeom prst="rect">
-            <a:avLst/>
-          </a:prstGeom>
-          <a:noFill/>
-          <a:ln/>
-        </p:spPr>
-        <p:txBody>
-          <a:bodyPr wrap="square" lIns="0" tIns="0" rIns="0" bIns="0" rtlCol="0" anchor="ctr"/>
-          <a:lstStyle/>
-          <a:p>
-            <a:pPr marL="0" indent="0">
-              <a:buNone/>
-            </a:pPr>
-            <a:r>
-              <a:rPr lang="en-US" sz="1200" i="1" dirty="0">
-                <a:solidFill>
-                  <a:schemeClr val="accent3"/>
-                </a:solidFill>
-              </a:rPr>
-              <a:t>Görsel: Cenberlitaş E, Gökçe A, Öztürk O. Turk J Fam Pract. 2026;30(2):97-106, Tablo 4.</a:t>
-            </a:r>
-            <a:endParaRPr lang="en-US" sz="1200" dirty="0"/>
           </a:p>
         </p:txBody>
       </p:sp>
@@ -8513,8 +13382,8 @@
         </p:nvSpPr>
         <p:spPr>
           <a:xfrm>
-            <a:off x="548640" y="320040"/>
-            <a:ext cx="10607040" cy="868680"/>
+            <a:off x="548639" y="320040"/>
+            <a:ext cx="11643361" cy="868680"/>
           </a:xfrm>
           <a:prstGeom prst="rect">
             <a:avLst/>
@@ -8526,18 +13395,11 @@
           <a:bodyPr wrap="square" lIns="0" tIns="0" rIns="0" bIns="0" rtlCol="0" anchor="ctr"/>
           <a:lstStyle/>
           <a:p>
-            <a:pPr marL="0" indent="0" algn="l">
-              <a:buNone/>
-            </a:pPr>
-            <a:r>
-              <a:rPr lang="en-US" sz="3600" b="1" dirty="0">
-                <a:solidFill>
-                  <a:schemeClr val="accent1"/>
-                </a:solidFill>
-              </a:rPr>
-              <a:t>Tablo 5: Tedavi yöntemine göre bırakma</a:t>
-            </a:r>
-            <a:endParaRPr lang="en-US" sz="3600" dirty="0"/>
+            <a:r>
+              <a:rPr lang="tr-TR" sz="3200" dirty="0"/>
+              <a:t>Tedavi yöntemlerinin sigara bırakma durumu ile karşılaştırılması</a:t>
+            </a:r>
+            <a:endParaRPr lang="en-US" sz="3200" dirty="0"/>
           </a:p>
         </p:txBody>
       </p:sp>
@@ -8675,7 +13537,31 @@
                   <a:schemeClr val="accent1"/>
                 </a:solidFill>
               </a:rPr>
-              <a:t>Kombine tedavi %44,0</a:t>
+              <a:t>Kombine tedavi %4</a:t>
+            </a:r>
+            <a:r>
+              <a:rPr lang="tr-TR" sz="2200" dirty="0">
+                <a:solidFill>
+                  <a:schemeClr val="accent1"/>
+                </a:solidFill>
+              </a:rPr>
+              <a:t>3</a:t>
+            </a:r>
+            <a:r>
+              <a:rPr lang="en-US" sz="2200" dirty="0">
+                <a:solidFill>
+                  <a:schemeClr val="accent1"/>
+                </a:solidFill>
+              </a:rPr>
+              <a:t>,</a:t>
+            </a:r>
+            <a:r>
+              <a:rPr lang="tr-TR" sz="2200" dirty="0">
+                <a:solidFill>
+                  <a:schemeClr val="accent1"/>
+                </a:solidFill>
+              </a:rPr>
+              <a:t>98</a:t>
             </a:r>
             <a:endParaRPr lang="en-US" sz="2000" dirty="0"/>
           </a:p>
@@ -8761,6 +13647,14 @@
               </a:rPr>
               <a:t>Bupropion %16,5</a:t>
             </a:r>
+            <a:r>
+              <a:rPr lang="tr-TR" sz="2200" dirty="0">
+                <a:solidFill>
+                  <a:schemeClr val="bg1"/>
+                </a:solidFill>
+              </a:rPr>
+              <a:t>2</a:t>
+            </a:r>
             <a:endParaRPr lang="en-US" sz="2000" dirty="0"/>
           </a:p>
         </p:txBody>
@@ -8846,42 +13740,6 @@
               <a:t>p &lt; 0,001</a:t>
             </a:r>
             <a:endParaRPr lang="en-US" sz="2000" dirty="0"/>
-          </a:p>
-        </p:txBody>
-      </p:sp>
-      <p:sp>
-        <p:nvSpPr>
-          <p:cNvPr id="12" name="Kaynak"/>
-          <p:cNvSpPr txBox="1"/>
-          <p:nvPr/>
-        </p:nvSpPr>
-        <p:spPr>
-          <a:xfrm>
-            <a:off x="548640" y="6382512"/>
-            <a:ext cx="10424160" cy="292608"/>
-          </a:xfrm>
-          <a:prstGeom prst="rect">
-            <a:avLst/>
-          </a:prstGeom>
-          <a:noFill/>
-          <a:ln/>
-        </p:spPr>
-        <p:txBody>
-          <a:bodyPr wrap="square" lIns="0" tIns="0" rIns="0" bIns="0" rtlCol="0" anchor="ctr"/>
-          <a:lstStyle/>
-          <a:p>
-            <a:pPr marL="0" indent="0">
-              <a:buNone/>
-            </a:pPr>
-            <a:r>
-              <a:rPr lang="en-US" sz="1200" i="1" dirty="0">
-                <a:solidFill>
-                  <a:schemeClr val="accent3"/>
-                </a:solidFill>
-              </a:rPr>
-              <a:t>Görsel: Cenberlitaş E, Gökçe A, Öztürk O. Turk J Fam Pract. 2026;30(2):97-106, Tablo 5.</a:t>
-            </a:r>
-            <a:endParaRPr lang="en-US" sz="1200" dirty="0"/>
           </a:p>
         </p:txBody>
       </p:sp>
@@ -8980,16 +13838,9 @@
           <a:bodyPr wrap="square" lIns="0" tIns="0" rIns="0" bIns="0" rtlCol="0" anchor="ctr"/>
           <a:lstStyle/>
           <a:p>
-            <a:pPr marL="0" indent="0" algn="l">
-              <a:buNone/>
-            </a:pPr>
-            <a:r>
-              <a:rPr lang="en-US" sz="3600" b="1" dirty="0">
-                <a:solidFill>
-                  <a:schemeClr val="accent1"/>
-                </a:solidFill>
-              </a:rPr>
-              <a:t>Tablo 6: Lojistik regresyon</a:t>
+            <a:r>
+              <a:rPr lang="tr-TR" dirty="0"/>
+              <a:t>Sigara bırakma durumunu öngören tedavi yöntemleri ve ilişkili özelliklerin ileri analizi (lojistik regresyon)</a:t>
             </a:r>
             <a:endParaRPr lang="en-US" sz="3600" dirty="0"/>
           </a:p>
@@ -9197,42 +14048,6 @@
               <a:t>yakınma yok</a:t>
             </a:r>
             <a:endParaRPr lang="en-US" sz="1800" dirty="0"/>
-          </a:p>
-        </p:txBody>
-      </p:sp>
-      <p:sp>
-        <p:nvSpPr>
-          <p:cNvPr id="8" name="Kaynak"/>
-          <p:cNvSpPr txBox="1"/>
-          <p:nvPr/>
-        </p:nvSpPr>
-        <p:spPr>
-          <a:xfrm>
-            <a:off x="548640" y="6382512"/>
-            <a:ext cx="10424160" cy="292608"/>
-          </a:xfrm>
-          <a:prstGeom prst="rect">
-            <a:avLst/>
-          </a:prstGeom>
-          <a:noFill/>
-          <a:ln/>
-        </p:spPr>
-        <p:txBody>
-          <a:bodyPr wrap="square" lIns="0" tIns="0" rIns="0" bIns="0" rtlCol="0" anchor="ctr"/>
-          <a:lstStyle/>
-          <a:p>
-            <a:pPr marL="0" indent="0">
-              <a:buNone/>
-            </a:pPr>
-            <a:r>
-              <a:rPr lang="en-US" sz="1200" i="1" dirty="0">
-                <a:solidFill>
-                  <a:schemeClr val="accent3"/>
-                </a:solidFill>
-              </a:rPr>
-              <a:t>Görsel: Cenberlitaş E, Gökçe A, Öztürk O. Turk J Fam Pract. 2026;30(2):97-106, Tablo 6.</a:t>
-            </a:r>
-            <a:endParaRPr lang="en-US" sz="1200" dirty="0"/>
           </a:p>
         </p:txBody>
       </p:sp>
@@ -9291,7 +14106,7 @@
 
 <file path=ppt/slides/slide2.xml><?xml version="1.0" encoding="utf-8"?>
 <p:sld xmlns:a="http://schemas.openxmlformats.org/drawingml/2006/main" xmlns:r="http://schemas.openxmlformats.org/officeDocument/2006/relationships" xmlns:p="http://schemas.openxmlformats.org/presentationml/2006/main">
-  <p:cSld name="Slide 2">
+  <p:cSld>
     <p:spTree>
       <p:nvGrpSpPr>
         <p:cNvPr id="1" name=""/>
@@ -9306,782 +14121,42 @@
           <a:chExt cx="0" cy="0"/>
         </a:xfrm>
       </p:grpSpPr>
-      <p:sp>
-        <p:nvSpPr>
-          <p:cNvPr id="3" name="Text 0"/>
-          <p:cNvSpPr>
-            <a:spLocks noGrp="1"/>
-          </p:cNvSpPr>
-          <p:nvPr>
-            <p:ph type="title" idx="100" hasCustomPrompt="1"/>
-          </p:nvPr>
-        </p:nvSpPr>
-        <p:spPr>
-          <a:xfrm>
-            <a:off x="548640" y="320040"/>
-            <a:ext cx="10607040" cy="868680"/>
-          </a:xfrm>
-          <a:prstGeom prst="rect">
-            <a:avLst/>
-          </a:prstGeom>
-          <a:noFill/>
-          <a:ln/>
-        </p:spPr>
-        <p:txBody>
-          <a:bodyPr wrap="square" lIns="0" tIns="0" rIns="0" bIns="0" rtlCol="0" anchor="ctr"/>
-          <a:lstStyle/>
-          <a:p>
-            <a:pPr marL="0" indent="0" algn="l">
-              <a:buNone/>
-            </a:pPr>
-            <a:r>
-              <a:rPr lang="en-US" sz="3600" b="1" dirty="0">
-                <a:solidFill>
-                  <a:schemeClr val="accent1"/>
-                </a:solidFill>
-              </a:rPr>
-              <a:t>İçerik</a:t>
-            </a:r>
-            <a:endParaRPr lang="en-US" sz="3600" dirty="0"/>
-          </a:p>
-        </p:txBody>
-      </p:sp>
-      <p:sp>
-        <p:nvSpPr>
-          <p:cNvPr id="4" name="Kart"/>
-          <p:cNvSpPr/>
-          <p:nvPr/>
-        </p:nvSpPr>
-        <p:spPr>
-          <a:xfrm>
-            <a:off x="548640" y="1463040"/>
-            <a:ext cx="5440680" cy="1280160"/>
-          </a:xfrm>
-          <a:prstGeom prst="roundRect">
-            <a:avLst>
-              <a:gd name="adj" fmla="val 8571"/>
-            </a:avLst>
-          </a:prstGeom>
-          <a:solidFill>
-            <a:schemeClr val="bg2"/>
-          </a:solidFill>
-          <a:ln w="12700">
-            <a:solidFill>
-              <a:schemeClr val="bg2"/>
-            </a:solidFill>
-            <a:prstDash val="solid"/>
-          </a:ln>
-        </p:spPr>
-        <p:txBody>
-          <a:bodyPr/>
-          <a:lstStyle/>
-          <a:p>
-            <a:endParaRPr/>
-          </a:p>
-        </p:txBody>
-      </p:sp>
-      <p:sp>
-        <p:nvSpPr>
-          <p:cNvPr id="5" name="Sıra"/>
-          <p:cNvSpPr/>
-          <p:nvPr/>
-        </p:nvSpPr>
-        <p:spPr>
-          <a:xfrm>
-            <a:off x="822960" y="1709928"/>
-            <a:ext cx="786384" cy="786384"/>
-          </a:xfrm>
-          <a:prstGeom prst="ellipse">
-            <a:avLst/>
-          </a:prstGeom>
-          <a:solidFill>
-            <a:schemeClr val="accent1"/>
-          </a:solidFill>
-          <a:ln w="12700">
-            <a:solidFill>
-              <a:schemeClr val="accent1"/>
-            </a:solidFill>
-            <a:prstDash val="solid"/>
-          </a:ln>
-        </p:spPr>
-        <p:txBody>
-          <a:bodyPr/>
-          <a:lstStyle/>
-          <a:p>
-            <a:endParaRPr/>
-          </a:p>
-        </p:txBody>
-      </p:sp>
-      <p:sp>
-        <p:nvSpPr>
-          <p:cNvPr id="6" name="Text 3"/>
-          <p:cNvSpPr txBox="1"/>
-          <p:nvPr/>
-        </p:nvSpPr>
-        <p:spPr>
-          <a:xfrm>
-            <a:off x="822960" y="1709928"/>
-            <a:ext cx="786384" cy="786384"/>
-          </a:xfrm>
-          <a:prstGeom prst="rect">
-            <a:avLst/>
-          </a:prstGeom>
-          <a:noFill/>
-          <a:ln/>
-        </p:spPr>
-        <p:txBody>
-          <a:bodyPr wrap="square" lIns="0" tIns="0" rIns="0" bIns="0" rtlCol="0" anchor="ctr"/>
-          <a:lstStyle/>
-          <a:p>
-            <a:pPr marL="0" indent="0" algn="ctr">
-              <a:buNone/>
-            </a:pPr>
-            <a:r>
-              <a:rPr lang="en-US" sz="2800" b="1" dirty="0">
-                <a:solidFill>
-                  <a:schemeClr val="bg1"/>
-                </a:solidFill>
-              </a:rPr>
-              <a:t>1</a:t>
-            </a:r>
-            <a:endParaRPr lang="en-US" sz="2800" dirty="0"/>
-          </a:p>
-        </p:txBody>
-      </p:sp>
-      <p:sp>
-        <p:nvSpPr>
-          <p:cNvPr id="7" name="Text 4"/>
-          <p:cNvSpPr txBox="1"/>
-          <p:nvPr/>
-        </p:nvSpPr>
-        <p:spPr>
-          <a:xfrm>
-            <a:off x="1874520" y="1463040"/>
-            <a:ext cx="3931920" cy="1280160"/>
-          </a:xfrm>
-          <a:prstGeom prst="rect">
-            <a:avLst/>
-          </a:prstGeom>
-          <a:noFill/>
-          <a:ln/>
-        </p:spPr>
-        <p:txBody>
-          <a:bodyPr wrap="square" lIns="0" tIns="0" rIns="0" bIns="0" rtlCol="0" anchor="ctr"/>
-          <a:lstStyle/>
-          <a:p>
-            <a:pPr marL="0" indent="0">
-              <a:buNone/>
-            </a:pPr>
-            <a:r>
-              <a:rPr lang="en-US" sz="2600" dirty="0">
-                <a:solidFill>
-                  <a:schemeClr val="accent1"/>
-                </a:solidFill>
-              </a:rPr>
-              <a:t>Künye ve giriş</a:t>
-            </a:r>
-            <a:endParaRPr lang="en-US" sz="2600" dirty="0"/>
-          </a:p>
-        </p:txBody>
-      </p:sp>
-      <p:sp>
-        <p:nvSpPr>
-          <p:cNvPr id="8" name="Kart"/>
-          <p:cNvSpPr/>
-          <p:nvPr/>
-        </p:nvSpPr>
-        <p:spPr>
-          <a:xfrm>
-            <a:off x="6172200" y="1463040"/>
-            <a:ext cx="5440680" cy="1280160"/>
-          </a:xfrm>
-          <a:prstGeom prst="roundRect">
-            <a:avLst>
-              <a:gd name="adj" fmla="val 8571"/>
-            </a:avLst>
-          </a:prstGeom>
-          <a:solidFill>
-            <a:schemeClr val="bg2"/>
-          </a:solidFill>
-          <a:ln w="12700">
-            <a:solidFill>
-              <a:schemeClr val="bg2"/>
-            </a:solidFill>
-            <a:prstDash val="solid"/>
-          </a:ln>
-        </p:spPr>
-        <p:txBody>
-          <a:bodyPr/>
-          <a:lstStyle/>
-          <a:p>
-            <a:endParaRPr/>
-          </a:p>
-        </p:txBody>
-      </p:sp>
-      <p:sp>
-        <p:nvSpPr>
-          <p:cNvPr id="9" name="Sıra"/>
-          <p:cNvSpPr/>
-          <p:nvPr/>
-        </p:nvSpPr>
-        <p:spPr>
-          <a:xfrm>
-            <a:off x="6446520" y="1709928"/>
-            <a:ext cx="786384" cy="786384"/>
-          </a:xfrm>
-          <a:prstGeom prst="ellipse">
-            <a:avLst/>
-          </a:prstGeom>
-          <a:solidFill>
-            <a:schemeClr val="accent2"/>
-          </a:solidFill>
-          <a:ln w="12700">
-            <a:solidFill>
-              <a:schemeClr val="accent2"/>
-            </a:solidFill>
-            <a:prstDash val="solid"/>
-          </a:ln>
-        </p:spPr>
-        <p:txBody>
-          <a:bodyPr/>
-          <a:lstStyle/>
-          <a:p>
-            <a:endParaRPr/>
-          </a:p>
-        </p:txBody>
-      </p:sp>
-      <p:sp>
-        <p:nvSpPr>
-          <p:cNvPr id="10" name="Text 7"/>
-          <p:cNvSpPr txBox="1"/>
-          <p:nvPr/>
-        </p:nvSpPr>
-        <p:spPr>
-          <a:xfrm>
-            <a:off x="6446520" y="1709928"/>
-            <a:ext cx="786384" cy="786384"/>
-          </a:xfrm>
-          <a:prstGeom prst="rect">
-            <a:avLst/>
-          </a:prstGeom>
-          <a:noFill/>
-          <a:ln/>
-        </p:spPr>
-        <p:txBody>
-          <a:bodyPr wrap="square" lIns="0" tIns="0" rIns="0" bIns="0" rtlCol="0" anchor="ctr"/>
-          <a:lstStyle/>
-          <a:p>
-            <a:pPr marL="0" indent="0" algn="ctr">
-              <a:buNone/>
-            </a:pPr>
-            <a:r>
-              <a:rPr lang="en-US" sz="2800" b="1" dirty="0">
-                <a:solidFill>
-                  <a:schemeClr val="bg1"/>
-                </a:solidFill>
-              </a:rPr>
-              <a:t>2</a:t>
-            </a:r>
-            <a:endParaRPr lang="en-US" sz="2800" dirty="0"/>
-          </a:p>
-        </p:txBody>
-      </p:sp>
-      <p:sp>
-        <p:nvSpPr>
-          <p:cNvPr id="11" name="Text 8"/>
-          <p:cNvSpPr txBox="1"/>
-          <p:nvPr/>
-        </p:nvSpPr>
-        <p:spPr>
-          <a:xfrm>
-            <a:off x="7498080" y="1463040"/>
-            <a:ext cx="3931920" cy="1280160"/>
-          </a:xfrm>
-          <a:prstGeom prst="rect">
-            <a:avLst/>
-          </a:prstGeom>
-          <a:noFill/>
-          <a:ln/>
-        </p:spPr>
-        <p:txBody>
-          <a:bodyPr wrap="square" lIns="0" tIns="0" rIns="0" bIns="0" rtlCol="0" anchor="ctr"/>
-          <a:lstStyle/>
-          <a:p>
-            <a:pPr marL="0" indent="0">
-              <a:buNone/>
-            </a:pPr>
-            <a:r>
-              <a:rPr lang="en-US" sz="2600" dirty="0">
-                <a:solidFill>
-                  <a:schemeClr val="accent1"/>
-                </a:solidFill>
-              </a:rPr>
-              <a:t>Gereç ve yöntem</a:t>
-            </a:r>
-            <a:endParaRPr lang="en-US" sz="2600" dirty="0"/>
-          </a:p>
-        </p:txBody>
-      </p:sp>
-      <p:sp>
-        <p:nvSpPr>
-          <p:cNvPr id="12" name="Kart"/>
-          <p:cNvSpPr/>
-          <p:nvPr/>
-        </p:nvSpPr>
-        <p:spPr>
-          <a:xfrm>
-            <a:off x="548640" y="3017520"/>
-            <a:ext cx="5440680" cy="1280160"/>
-          </a:xfrm>
-          <a:prstGeom prst="roundRect">
-            <a:avLst>
-              <a:gd name="adj" fmla="val 8571"/>
-            </a:avLst>
-          </a:prstGeom>
-          <a:solidFill>
-            <a:schemeClr val="bg2"/>
-          </a:solidFill>
-          <a:ln w="12700">
-            <a:solidFill>
-              <a:schemeClr val="bg2"/>
-            </a:solidFill>
-            <a:prstDash val="solid"/>
-          </a:ln>
-        </p:spPr>
-        <p:txBody>
-          <a:bodyPr/>
-          <a:lstStyle/>
-          <a:p>
-            <a:endParaRPr/>
-          </a:p>
-        </p:txBody>
-      </p:sp>
-      <p:sp>
-        <p:nvSpPr>
-          <p:cNvPr id="13" name="Sıra"/>
-          <p:cNvSpPr/>
-          <p:nvPr/>
-        </p:nvSpPr>
-        <p:spPr>
-          <a:xfrm>
-            <a:off x="822960" y="3264408"/>
-            <a:ext cx="786384" cy="786384"/>
-          </a:xfrm>
-          <a:prstGeom prst="ellipse">
-            <a:avLst/>
-          </a:prstGeom>
-          <a:solidFill>
-            <a:schemeClr val="accent1"/>
-          </a:solidFill>
-          <a:ln w="12700">
-            <a:solidFill>
-              <a:schemeClr val="accent1"/>
-            </a:solidFill>
-            <a:prstDash val="solid"/>
-          </a:ln>
-        </p:spPr>
-        <p:txBody>
-          <a:bodyPr/>
-          <a:lstStyle/>
-          <a:p>
-            <a:endParaRPr/>
-          </a:p>
-        </p:txBody>
-      </p:sp>
-      <p:sp>
-        <p:nvSpPr>
-          <p:cNvPr id="14" name="Text 11"/>
-          <p:cNvSpPr txBox="1"/>
-          <p:nvPr/>
-        </p:nvSpPr>
-        <p:spPr>
-          <a:xfrm>
-            <a:off x="822960" y="3264408"/>
-            <a:ext cx="786384" cy="786384"/>
-          </a:xfrm>
-          <a:prstGeom prst="rect">
-            <a:avLst/>
-          </a:prstGeom>
-          <a:noFill/>
-          <a:ln/>
-        </p:spPr>
-        <p:txBody>
-          <a:bodyPr wrap="square" lIns="0" tIns="0" rIns="0" bIns="0" rtlCol="0" anchor="ctr"/>
-          <a:lstStyle/>
-          <a:p>
-            <a:pPr marL="0" indent="0" algn="ctr">
-              <a:buNone/>
-            </a:pPr>
-            <a:r>
-              <a:rPr lang="en-US" sz="2800" b="1" dirty="0">
-                <a:solidFill>
-                  <a:schemeClr val="bg1"/>
-                </a:solidFill>
-              </a:rPr>
-              <a:t>3</a:t>
-            </a:r>
-            <a:endParaRPr lang="en-US" sz="2800" dirty="0"/>
-          </a:p>
-        </p:txBody>
-      </p:sp>
-      <p:sp>
-        <p:nvSpPr>
-          <p:cNvPr id="15" name="Text 12"/>
-          <p:cNvSpPr txBox="1"/>
-          <p:nvPr/>
-        </p:nvSpPr>
-        <p:spPr>
-          <a:xfrm>
-            <a:off x="1874520" y="3017520"/>
-            <a:ext cx="3931920" cy="1280160"/>
-          </a:xfrm>
-          <a:prstGeom prst="rect">
-            <a:avLst/>
-          </a:prstGeom>
-          <a:noFill/>
-          <a:ln/>
-        </p:spPr>
-        <p:txBody>
-          <a:bodyPr wrap="square" lIns="0" tIns="0" rIns="0" bIns="0" rtlCol="0" anchor="ctr"/>
-          <a:lstStyle/>
-          <a:p>
-            <a:pPr marL="0" indent="0">
-              <a:buNone/>
-            </a:pPr>
-            <a:r>
-              <a:rPr lang="en-US" sz="2600" dirty="0">
-                <a:solidFill>
-                  <a:schemeClr val="accent1"/>
-                </a:solidFill>
-              </a:rPr>
-              <a:t>Bulgular</a:t>
-            </a:r>
-            <a:endParaRPr lang="en-US" sz="2600" dirty="0"/>
-          </a:p>
-        </p:txBody>
-      </p:sp>
-      <p:sp>
-        <p:nvSpPr>
-          <p:cNvPr id="16" name="Kart"/>
-          <p:cNvSpPr/>
-          <p:nvPr/>
-        </p:nvSpPr>
-        <p:spPr>
-          <a:xfrm>
-            <a:off x="6172200" y="3017520"/>
-            <a:ext cx="5440680" cy="1280160"/>
-          </a:xfrm>
-          <a:prstGeom prst="roundRect">
-            <a:avLst>
-              <a:gd name="adj" fmla="val 8571"/>
-            </a:avLst>
-          </a:prstGeom>
-          <a:solidFill>
-            <a:schemeClr val="bg2"/>
-          </a:solidFill>
-          <a:ln w="12700">
-            <a:solidFill>
-              <a:schemeClr val="bg2"/>
-            </a:solidFill>
-            <a:prstDash val="solid"/>
-          </a:ln>
-        </p:spPr>
-        <p:txBody>
-          <a:bodyPr/>
-          <a:lstStyle/>
-          <a:p>
-            <a:endParaRPr/>
-          </a:p>
-        </p:txBody>
-      </p:sp>
-      <p:sp>
-        <p:nvSpPr>
-          <p:cNvPr id="17" name="Sıra"/>
-          <p:cNvSpPr/>
-          <p:nvPr/>
-        </p:nvSpPr>
-        <p:spPr>
-          <a:xfrm>
-            <a:off x="6446520" y="3264408"/>
-            <a:ext cx="786384" cy="786384"/>
-          </a:xfrm>
-          <a:prstGeom prst="ellipse">
-            <a:avLst/>
-          </a:prstGeom>
-          <a:solidFill>
-            <a:schemeClr val="accent2"/>
-          </a:solidFill>
-          <a:ln w="12700">
-            <a:solidFill>
-              <a:schemeClr val="accent2"/>
-            </a:solidFill>
-            <a:prstDash val="solid"/>
-          </a:ln>
-        </p:spPr>
-        <p:txBody>
-          <a:bodyPr/>
-          <a:lstStyle/>
-          <a:p>
-            <a:endParaRPr/>
-          </a:p>
-        </p:txBody>
-      </p:sp>
-      <p:sp>
-        <p:nvSpPr>
-          <p:cNvPr id="18" name="Text 15"/>
-          <p:cNvSpPr txBox="1"/>
-          <p:nvPr/>
-        </p:nvSpPr>
-        <p:spPr>
-          <a:xfrm>
-            <a:off x="6446520" y="3264408"/>
-            <a:ext cx="786384" cy="786384"/>
-          </a:xfrm>
-          <a:prstGeom prst="rect">
-            <a:avLst/>
-          </a:prstGeom>
-          <a:noFill/>
-          <a:ln/>
-        </p:spPr>
-        <p:txBody>
-          <a:bodyPr wrap="square" lIns="0" tIns="0" rIns="0" bIns="0" rtlCol="0" anchor="ctr"/>
-          <a:lstStyle/>
-          <a:p>
-            <a:pPr marL="0" indent="0" algn="ctr">
-              <a:buNone/>
-            </a:pPr>
-            <a:r>
-              <a:rPr lang="en-US" sz="2800" b="1" dirty="0">
-                <a:solidFill>
-                  <a:schemeClr val="bg1"/>
-                </a:solidFill>
-              </a:rPr>
-              <a:t>4</a:t>
-            </a:r>
-            <a:endParaRPr lang="en-US" sz="2800" dirty="0"/>
-          </a:p>
-        </p:txBody>
-      </p:sp>
-      <p:sp>
-        <p:nvSpPr>
-          <p:cNvPr id="19" name="Text 16"/>
-          <p:cNvSpPr txBox="1"/>
-          <p:nvPr/>
-        </p:nvSpPr>
-        <p:spPr>
-          <a:xfrm>
-            <a:off x="7498080" y="3017520"/>
-            <a:ext cx="3931920" cy="1280160"/>
-          </a:xfrm>
-          <a:prstGeom prst="rect">
-            <a:avLst/>
-          </a:prstGeom>
-          <a:noFill/>
-          <a:ln/>
-        </p:spPr>
-        <p:txBody>
-          <a:bodyPr wrap="square" lIns="0" tIns="0" rIns="0" bIns="0" rtlCol="0" anchor="ctr"/>
-          <a:lstStyle/>
-          <a:p>
-            <a:pPr marL="0" indent="0">
-              <a:buNone/>
-            </a:pPr>
-            <a:r>
-              <a:rPr lang="en-US" sz="2600" dirty="0">
-                <a:solidFill>
-                  <a:schemeClr val="accent1"/>
-                </a:solidFill>
-              </a:rPr>
-              <a:t>Tartışma</a:t>
-            </a:r>
-            <a:endParaRPr lang="en-US" sz="2600" dirty="0"/>
-          </a:p>
-        </p:txBody>
-      </p:sp>
-      <p:sp>
-        <p:nvSpPr>
-          <p:cNvPr id="20" name="Kart"/>
-          <p:cNvSpPr/>
-          <p:nvPr/>
-        </p:nvSpPr>
-        <p:spPr>
-          <a:xfrm>
-            <a:off x="548640" y="4572000"/>
-            <a:ext cx="5440680" cy="1280160"/>
-          </a:xfrm>
-          <a:prstGeom prst="roundRect">
-            <a:avLst>
-              <a:gd name="adj" fmla="val 8571"/>
-            </a:avLst>
-          </a:prstGeom>
-          <a:solidFill>
-            <a:schemeClr val="bg2"/>
-          </a:solidFill>
-          <a:ln w="12700">
-            <a:solidFill>
-              <a:schemeClr val="bg2"/>
-            </a:solidFill>
-            <a:prstDash val="solid"/>
-          </a:ln>
-        </p:spPr>
-        <p:txBody>
-          <a:bodyPr/>
-          <a:lstStyle/>
-          <a:p>
-            <a:endParaRPr/>
-          </a:p>
-        </p:txBody>
-      </p:sp>
-      <p:sp>
-        <p:nvSpPr>
-          <p:cNvPr id="21" name="Sıra"/>
-          <p:cNvSpPr/>
-          <p:nvPr/>
-        </p:nvSpPr>
-        <p:spPr>
-          <a:xfrm>
-            <a:off x="822960" y="4818888"/>
-            <a:ext cx="786384" cy="786384"/>
-          </a:xfrm>
-          <a:prstGeom prst="ellipse">
-            <a:avLst/>
-          </a:prstGeom>
-          <a:solidFill>
-            <a:schemeClr val="accent1"/>
-          </a:solidFill>
-          <a:ln w="12700">
-            <a:solidFill>
-              <a:schemeClr val="accent1"/>
-            </a:solidFill>
-            <a:prstDash val="solid"/>
-          </a:ln>
-        </p:spPr>
-        <p:txBody>
-          <a:bodyPr/>
-          <a:lstStyle/>
-          <a:p>
-            <a:endParaRPr/>
-          </a:p>
-        </p:txBody>
-      </p:sp>
-      <p:sp>
-        <p:nvSpPr>
-          <p:cNvPr id="22" name="Text 19"/>
-          <p:cNvSpPr txBox="1"/>
-          <p:nvPr/>
-        </p:nvSpPr>
-        <p:spPr>
-          <a:xfrm>
-            <a:off x="822960" y="4818888"/>
-            <a:ext cx="786384" cy="786384"/>
-          </a:xfrm>
-          <a:prstGeom prst="rect">
-            <a:avLst/>
-          </a:prstGeom>
-          <a:noFill/>
-          <a:ln/>
-        </p:spPr>
-        <p:txBody>
-          <a:bodyPr wrap="square" lIns="0" tIns="0" rIns="0" bIns="0" rtlCol="0" anchor="ctr"/>
-          <a:lstStyle/>
-          <a:p>
-            <a:pPr marL="0" indent="0" algn="ctr">
-              <a:buNone/>
-            </a:pPr>
-            <a:r>
-              <a:rPr lang="en-US" sz="2800" b="1" dirty="0">
-                <a:solidFill>
-                  <a:schemeClr val="bg1"/>
-                </a:solidFill>
-              </a:rPr>
-              <a:t>5</a:t>
-            </a:r>
-            <a:endParaRPr lang="en-US" sz="2800" dirty="0"/>
-          </a:p>
-        </p:txBody>
-      </p:sp>
-      <p:sp>
-        <p:nvSpPr>
-          <p:cNvPr id="23" name="Text 20"/>
-          <p:cNvSpPr txBox="1"/>
-          <p:nvPr/>
-        </p:nvSpPr>
-        <p:spPr>
-          <a:xfrm>
-            <a:off x="1874520" y="4572000"/>
-            <a:ext cx="3931920" cy="1280160"/>
-          </a:xfrm>
-          <a:prstGeom prst="rect">
-            <a:avLst/>
-          </a:prstGeom>
-          <a:noFill/>
-          <a:ln/>
-        </p:spPr>
-        <p:txBody>
-          <a:bodyPr wrap="square" lIns="0" tIns="0" rIns="0" bIns="0" rtlCol="0" anchor="ctr"/>
-          <a:lstStyle/>
-          <a:p>
-            <a:pPr marL="0" indent="0">
-              <a:buNone/>
-            </a:pPr>
-            <a:r>
-              <a:rPr lang="en-US" sz="2600" dirty="0">
-                <a:solidFill>
-                  <a:schemeClr val="accent1"/>
-                </a:solidFill>
-              </a:rPr>
-              <a:t>Sonuç ve öneriler</a:t>
-            </a:r>
-            <a:endParaRPr lang="en-US" sz="2600" dirty="0"/>
-          </a:p>
-        </p:txBody>
-      </p:sp>
-      <p:sp>
-        <p:nvSpPr>
-          <p:cNvPr id="2" name="Slide Number Placeholder 0"/>
-          <p:cNvSpPr>
-            <a:spLocks noGrp="1"/>
-          </p:cNvSpPr>
-          <p:nvPr>
-            <p:ph type="sldNum" sz="quarter" idx="4294967295"/>
-          </p:nvPr>
-        </p:nvSpPr>
-        <p:spPr>
-          <a:xfrm>
-            <a:off x="11201400" y="6382512"/>
-            <a:ext cx="548640" cy="292608"/>
-          </a:xfrm>
-          <a:prstGeom prst="rect">
-            <a:avLst/>
-          </a:prstGeom>
-          <a:extLst>
-            <a:ext uri="{C572A759-6A51-4108-AA02-DFA0A04FC94B}">
-              <ma14:wrappingTextBoxFlag xmlns="" xmlns:ma14="http://schemas.microsoft.com/office/mac/drawingml/2011/main" val="0"/>
-            </a:ext>
-          </a:extLst>
-        </p:spPr>
-        <p:txBody>
-          <a:bodyPr/>
-          <a:lstStyle>
-            <a:lvl1pPr>
-              <a:defRPr sz="1400">
-                <a:solidFill>
-                  <a:srgbClr val="7A8C94"/>
-                </a:solidFill>
-              </a:defRPr>
-            </a:lvl1pPr>
-          </a:lstStyle>
-          <a:p>
-            <a:pPr algn="r"/>
-            <a:fld id="{F7021451-1387-4CA6-816F-3879F97B5CBC}" type="slidenum">
-              <a:rPr lang="en-US" b="0"/>
-              <a:t>2</a:t>
-            </a:fld>
-            <a:endParaRPr lang="en-US"/>
-          </a:p>
-        </p:txBody>
-      </p:sp>
+      <p:pic>
+        <p:nvPicPr>
+          <p:cNvPr id="5" name="Resim 4">
+            <a:extLst>
+              <a:ext uri="{FF2B5EF4-FFF2-40B4-BE49-F238E27FC236}">
+                <a16:creationId xmlns:a16="http://schemas.microsoft.com/office/drawing/2014/main" id="{183704E6-FD9C-7986-775D-810B8BBD1BBF}"/>
+              </a:ext>
+            </a:extLst>
+          </p:cNvPr>
+          <p:cNvPicPr>
+            <a:picLocks noChangeAspect="1"/>
+          </p:cNvPicPr>
+          <p:nvPr/>
+        </p:nvPicPr>
+        <p:blipFill>
+          <a:blip r:embed="rId3"/>
+          <a:stretch>
+            <a:fillRect/>
+          </a:stretch>
+        </p:blipFill>
+        <p:spPr>
+          <a:xfrm>
+            <a:off x="3144253" y="-37033"/>
+            <a:ext cx="5903494" cy="6932067"/>
+          </a:xfrm>
+          <a:prstGeom prst="rect">
+            <a:avLst/>
+          </a:prstGeom>
+        </p:spPr>
+      </p:pic>
     </p:spTree>
+    <p:extLst>
+      <p:ext uri="{BB962C8B-B14F-4D97-AF65-F5344CB8AC3E}">
+        <p14:creationId xmlns:p14="http://schemas.microsoft.com/office/powerpoint/2010/main" val="3079792512"/>
+      </p:ext>
+    </p:extLst>
   </p:cSld>
   <p:clrMapOvr>
     <a:masterClrMapping/>
@@ -10404,7 +14479,63 @@
                   <a:schemeClr val="accent1"/>
                 </a:solidFill>
               </a:rPr>
-              <a:t>Plaseboya üstün; NRT ve vareniklinle benzer</a:t>
+              <a:t>Plaseboya üstün; NRT </a:t>
+            </a:r>
+            <a:r>
+              <a:rPr lang="tr-TR" sz="2200" dirty="0">
+                <a:solidFill>
+                  <a:schemeClr val="accent1"/>
+                </a:solidFill>
+              </a:rPr>
+              <a:t>ile benzer etkinlik </a:t>
+            </a:r>
+            <a:r>
+              <a:rPr lang="en-US" sz="2200" dirty="0" err="1">
+                <a:solidFill>
+                  <a:schemeClr val="accent1"/>
+                </a:solidFill>
+              </a:rPr>
+              <a:t>ve</a:t>
+            </a:r>
+            <a:r>
+              <a:rPr lang="en-US" sz="2200" dirty="0">
+                <a:solidFill>
+                  <a:schemeClr val="accent1"/>
+                </a:solidFill>
+              </a:rPr>
+              <a:t> </a:t>
+            </a:r>
+            <a:r>
+              <a:rPr lang="en-US" sz="2200" dirty="0" err="1">
+                <a:solidFill>
+                  <a:schemeClr val="accent1"/>
+                </a:solidFill>
+              </a:rPr>
+              <a:t>vareniklinle</a:t>
+            </a:r>
+            <a:r>
+              <a:rPr lang="en-US" sz="2200" dirty="0">
+                <a:solidFill>
+                  <a:schemeClr val="accent1"/>
+                </a:solidFill>
+              </a:rPr>
+              <a:t> </a:t>
+            </a:r>
+            <a:r>
+              <a:rPr lang="en-US" sz="2200" dirty="0" err="1">
+                <a:solidFill>
+                  <a:schemeClr val="accent1"/>
+                </a:solidFill>
+              </a:rPr>
+              <a:t>benzer</a:t>
+            </a:r>
+            <a:r>
+              <a:rPr lang="tr-TR" sz="2200" dirty="0">
+                <a:solidFill>
+                  <a:schemeClr val="accent1"/>
+                </a:solidFill>
+              </a:rPr>
+              <a:t> etki mekanizması</a:t>
             </a:r>
             <a:r>
               <a:rPr lang="en-US" sz="1800" dirty="0">
@@ -10687,42 +14818,6 @@
               <a:t>  [13]</a:t>
             </a:r>
             <a:endParaRPr lang="en-US" sz="2200" dirty="0"/>
-          </a:p>
-        </p:txBody>
-      </p:sp>
-      <p:sp>
-        <p:nvSpPr>
-          <p:cNvPr id="20" name="Kaynak"/>
-          <p:cNvSpPr txBox="1"/>
-          <p:nvPr/>
-        </p:nvSpPr>
-        <p:spPr>
-          <a:xfrm>
-            <a:off x="548640" y="6382512"/>
-            <a:ext cx="10424160" cy="292608"/>
-          </a:xfrm>
-          <a:prstGeom prst="rect">
-            <a:avLst/>
-          </a:prstGeom>
-          <a:noFill/>
-          <a:ln/>
-        </p:spPr>
-        <p:txBody>
-          <a:bodyPr wrap="square" lIns="0" tIns="0" rIns="0" bIns="0" rtlCol="0" anchor="ctr"/>
-          <a:lstStyle/>
-          <a:p>
-            <a:pPr marL="0" indent="0">
-              <a:buNone/>
-            </a:pPr>
-            <a:r>
-              <a:rPr lang="en-US" sz="1200" i="1" dirty="0">
-                <a:solidFill>
-                  <a:schemeClr val="accent3"/>
-                </a:solidFill>
-              </a:rPr>
-              <a:t>Kaynak: 1, 8–13</a:t>
-            </a:r>
-            <a:endParaRPr lang="en-US" sz="1200" dirty="0"/>
           </a:p>
         </p:txBody>
       </p:sp>
@@ -11374,42 +15469,6 @@
       </p:sp>
       <p:sp>
         <p:nvSpPr>
-          <p:cNvPr id="20" name="Kaynak"/>
-          <p:cNvSpPr txBox="1"/>
-          <p:nvPr/>
-        </p:nvSpPr>
-        <p:spPr>
-          <a:xfrm>
-            <a:off x="548640" y="6394869"/>
-            <a:ext cx="10424160" cy="292608"/>
-          </a:xfrm>
-          <a:prstGeom prst="rect">
-            <a:avLst/>
-          </a:prstGeom>
-          <a:noFill/>
-          <a:ln/>
-        </p:spPr>
-        <p:txBody>
-          <a:bodyPr wrap="square" lIns="0" tIns="0" rIns="0" bIns="0" rtlCol="0" anchor="ctr"/>
-          <a:lstStyle/>
-          <a:p>
-            <a:pPr marL="0" indent="0">
-              <a:buNone/>
-            </a:pPr>
-            <a:r>
-              <a:rPr lang="en-US" sz="1200" i="1" dirty="0">
-                <a:solidFill>
-                  <a:schemeClr val="accent3"/>
-                </a:solidFill>
-              </a:rPr>
-              <a:t>Kaynak: 1, 14–16</a:t>
-            </a:r>
-            <a:endParaRPr lang="en-US" sz="1200" dirty="0"/>
-          </a:p>
-        </p:txBody>
-      </p:sp>
-      <p:sp>
-        <p:nvSpPr>
           <p:cNvPr id="25" name="Slide Number Placeholder 0"/>
           <p:cNvSpPr>
             <a:spLocks noGrp="1"/>
@@ -11878,42 +15937,6 @@
       </p:sp>
       <p:sp>
         <p:nvSpPr>
-          <p:cNvPr id="14" name="Kaynak"/>
-          <p:cNvSpPr txBox="1"/>
-          <p:nvPr/>
-        </p:nvSpPr>
-        <p:spPr>
-          <a:xfrm>
-            <a:off x="548640" y="6382512"/>
-            <a:ext cx="10424160" cy="292608"/>
-          </a:xfrm>
-          <a:prstGeom prst="rect">
-            <a:avLst/>
-          </a:prstGeom>
-          <a:noFill/>
-          <a:ln/>
-        </p:spPr>
-        <p:txBody>
-          <a:bodyPr wrap="square" lIns="0" tIns="0" rIns="0" bIns="0" rtlCol="0" anchor="ctr"/>
-          <a:lstStyle/>
-          <a:p>
-            <a:pPr marL="0" indent="0">
-              <a:buNone/>
-            </a:pPr>
-            <a:r>
-              <a:rPr lang="en-US" sz="1200" i="1" dirty="0">
-                <a:solidFill>
-                  <a:schemeClr val="accent3"/>
-                </a:solidFill>
-              </a:rPr>
-              <a:t>Kaynak: Cenberlitaş E, Gökçe A, Öztürk O. Turk J Fam Pract. 2026;30(2):97-106.</a:t>
-            </a:r>
-            <a:endParaRPr lang="en-US" sz="1200" dirty="0"/>
-          </a:p>
-        </p:txBody>
-      </p:sp>
-      <p:sp>
-        <p:nvSpPr>
           <p:cNvPr id="25" name="Slide Number Placeholder 0"/>
           <p:cNvSpPr>
             <a:spLocks noGrp="1"/>
@@ -12357,42 +16380,6 @@
       </p:sp>
       <p:sp>
         <p:nvSpPr>
-          <p:cNvPr id="14" name="Kaynak"/>
-          <p:cNvSpPr txBox="1"/>
-          <p:nvPr/>
-        </p:nvSpPr>
-        <p:spPr>
-          <a:xfrm>
-            <a:off x="548640" y="6382512"/>
-            <a:ext cx="10424160" cy="292608"/>
-          </a:xfrm>
-          <a:prstGeom prst="rect">
-            <a:avLst/>
-          </a:prstGeom>
-          <a:noFill/>
-          <a:ln/>
-        </p:spPr>
-        <p:txBody>
-          <a:bodyPr wrap="square" lIns="0" tIns="0" rIns="0" bIns="0" rtlCol="0" anchor="ctr"/>
-          <a:lstStyle/>
-          <a:p>
-            <a:pPr marL="0" indent="0">
-              <a:buNone/>
-            </a:pPr>
-            <a:r>
-              <a:rPr lang="en-US" sz="1200" i="1" dirty="0">
-                <a:solidFill>
-                  <a:schemeClr val="accent3"/>
-                </a:solidFill>
-              </a:rPr>
-              <a:t>Kaynak: Cenberlitaş E, Gökçe A, Öztürk O. Turk J Fam Pract. 2026;30(2):97-106.</a:t>
-            </a:r>
-            <a:endParaRPr lang="en-US" sz="1200" dirty="0"/>
-          </a:p>
-        </p:txBody>
-      </p:sp>
-      <p:sp>
-        <p:nvSpPr>
           <p:cNvPr id="25" name="Slide Number Placeholder 0"/>
           <p:cNvSpPr>
             <a:spLocks noGrp="1"/>
@@ -12963,42 +16950,6 @@
       </p:sp>
       <p:sp>
         <p:nvSpPr>
-          <p:cNvPr id="19" name="Kaynak"/>
-          <p:cNvSpPr txBox="1"/>
-          <p:nvPr/>
-        </p:nvSpPr>
-        <p:spPr>
-          <a:xfrm>
-            <a:off x="548640" y="6382512"/>
-            <a:ext cx="10424160" cy="292608"/>
-          </a:xfrm>
-          <a:prstGeom prst="rect">
-            <a:avLst/>
-          </a:prstGeom>
-          <a:noFill/>
-          <a:ln/>
-        </p:spPr>
-        <p:txBody>
-          <a:bodyPr wrap="square" lIns="0" tIns="0" rIns="0" bIns="0" rtlCol="0" anchor="ctr"/>
-          <a:lstStyle/>
-          <a:p>
-            <a:pPr marL="0" indent="0">
-              <a:buNone/>
-            </a:pPr>
-            <a:r>
-              <a:rPr lang="en-US" sz="1200" i="1" dirty="0">
-                <a:solidFill>
-                  <a:schemeClr val="accent3"/>
-                </a:solidFill>
-              </a:rPr>
-              <a:t>Kaynak: Cenberlitaş E, Gökçe A, Öztürk O. Turk J Fam Pract. 2026;30(2):97-106.</a:t>
-            </a:r>
-            <a:endParaRPr lang="en-US" sz="1200" dirty="0"/>
-          </a:p>
-        </p:txBody>
-      </p:sp>
-      <p:sp>
-        <p:nvSpPr>
           <p:cNvPr id="25" name="Slide Number Placeholder 0"/>
           <p:cNvSpPr>
             <a:spLocks noGrp="1"/>
@@ -13573,7 +17524,7 @@
         </p:nvSpPr>
         <p:spPr>
           <a:xfrm>
-            <a:off x="731520" y="3383280"/>
+            <a:off x="731520" y="4344202"/>
             <a:ext cx="6766560" cy="2377440"/>
           </a:xfrm>
           <a:prstGeom prst="rect">
@@ -13609,7 +17560,25 @@
                   <a:schemeClr val="bg2"/>
                 </a:solidFill>
               </a:rPr>
-              <a:t>Dr. Ahmet KIRAN</a:t>
+              <a:t>Asst. Dr. Ahmet KIRAN</a:t>
+            </a:r>
+            <a:endParaRPr lang="tr-TR" sz="2200" dirty="0">
+              <a:solidFill>
+                <a:schemeClr val="bg2"/>
+              </a:solidFill>
+            </a:endParaRPr>
+          </a:p>
+          <a:p>
+            <a:pPr marL="0" indent="0">
+              <a:buNone/>
+            </a:pPr>
+            <a:r>
+              <a:rPr lang="tr-TR" sz="2200" dirty="0">
+                <a:solidFill>
+                  <a:schemeClr val="bg2"/>
+                </a:solidFill>
+              </a:rPr>
+              <a:t>Mail: kiranahmet@gmail.com</a:t>
             </a:r>
             <a:endParaRPr lang="en-US" sz="2600" dirty="0"/>
           </a:p>
@@ -13762,7 +17731,7 @@
 
 <file path=ppt/slides/slide3.xml><?xml version="1.0" encoding="utf-8"?>
 <p:sld xmlns:a="http://schemas.openxmlformats.org/drawingml/2006/main" xmlns:r="http://schemas.openxmlformats.org/officeDocument/2006/relationships" xmlns:p="http://schemas.openxmlformats.org/presentationml/2006/main">
-  <p:cSld name="Slide 4">
+  <p:cSld name="Slide 2">
     <p:spTree>
       <p:nvGrpSpPr>
         <p:cNvPr id="1" name=""/>
@@ -13811,7 +17780,7 @@
                   <a:schemeClr val="accent1"/>
                 </a:solidFill>
               </a:rPr>
-              <a:t>Makale künyesi</a:t>
+              <a:t>İçerik</a:t>
             </a:r>
             <a:endParaRPr lang="en-US" sz="3600" dirty="0"/>
           </a:p>
@@ -13819,70 +17788,116 @@
       </p:sp>
       <p:sp>
         <p:nvSpPr>
-          <p:cNvPr id="4" name="Görsel çerçeve"/>
+          <p:cNvPr id="4" name="Kart"/>
           <p:cNvSpPr/>
           <p:nvPr/>
         </p:nvSpPr>
         <p:spPr>
           <a:xfrm>
-            <a:off x="548640" y="1371600"/>
-            <a:ext cx="4161732" cy="4892040"/>
-          </a:xfrm>
-          <a:prstGeom prst="rect">
-            <a:avLst/>
+            <a:off x="548640" y="1463040"/>
+            <a:ext cx="5440680" cy="1280160"/>
+          </a:xfrm>
+          <a:prstGeom prst="roundRect">
+            <a:avLst>
+              <a:gd name="adj" fmla="val 8571"/>
+            </a:avLst>
           </a:prstGeom>
           <a:solidFill>
-            <a:schemeClr val="bg1"/>
+            <a:schemeClr val="bg2"/>
           </a:solidFill>
           <a:ln w="12700">
             <a:solidFill>
-              <a:srgbClr val="C9DCDF"/>
+              <a:schemeClr val="bg2"/>
             </a:solidFill>
             <a:prstDash val="solid"/>
           </a:ln>
-          <a:effectLst>
-            <a:outerShdw blurRad="76200" dist="25400" dir="5400000" algn="bl" rotWithShape="0">
-              <a:srgbClr val="000000">
-                <a:alpha val="18000"/>
-              </a:srgbClr>
-            </a:outerShdw>
-          </a:effectLst>
-        </p:spPr>
-      </p:sp>
-      <p:pic>
-        <p:nvPicPr>
-          <p:cNvPr id="5" name="Makale ilk sayfa" descr="Makalenin ilk sayfası"/>
-          <p:cNvPicPr>
-            <a:picLocks noChangeAspect="1"/>
-          </p:cNvPicPr>
-          <p:nvPr/>
-        </p:nvPicPr>
-        <p:blipFill>
-          <a:blip r:embed="rId3"/>
-          <a:stretch>
-            <a:fillRect/>
-          </a:stretch>
-        </p:blipFill>
-        <p:spPr>
-          <a:xfrm>
-            <a:off x="548640" y="1371600"/>
-            <a:ext cx="4161732" cy="4892040"/>
-          </a:xfrm>
-          <a:prstGeom prst="rect">
-            <a:avLst/>
-          </a:prstGeom>
-        </p:spPr>
-      </p:pic>
-      <p:sp>
-        <p:nvSpPr>
-          <p:cNvPr id="6" name="Text 2"/>
+        </p:spPr>
+        <p:txBody>
+          <a:bodyPr/>
+          <a:lstStyle/>
+          <a:p>
+            <a:endParaRPr/>
+          </a:p>
+        </p:txBody>
+      </p:sp>
+      <p:sp>
+        <p:nvSpPr>
+          <p:cNvPr id="5" name="Sıra"/>
+          <p:cNvSpPr/>
+          <p:nvPr/>
+        </p:nvSpPr>
+        <p:spPr>
+          <a:xfrm>
+            <a:off x="822960" y="1709928"/>
+            <a:ext cx="786384" cy="786384"/>
+          </a:xfrm>
+          <a:prstGeom prst="ellipse">
+            <a:avLst/>
+          </a:prstGeom>
+          <a:solidFill>
+            <a:schemeClr val="accent1"/>
+          </a:solidFill>
+          <a:ln w="12700">
+            <a:solidFill>
+              <a:schemeClr val="accent1"/>
+            </a:solidFill>
+            <a:prstDash val="solid"/>
+          </a:ln>
+        </p:spPr>
+        <p:txBody>
+          <a:bodyPr/>
+          <a:lstStyle/>
+          <a:p>
+            <a:endParaRPr/>
+          </a:p>
+        </p:txBody>
+      </p:sp>
+      <p:sp>
+        <p:nvSpPr>
+          <p:cNvPr id="6" name="Text 3"/>
           <p:cNvSpPr txBox="1"/>
           <p:nvPr/>
         </p:nvSpPr>
         <p:spPr>
           <a:xfrm>
-            <a:off x="5259012" y="1417320"/>
-            <a:ext cx="1508760" cy="640080"/>
+            <a:off x="822960" y="1709928"/>
+            <a:ext cx="786384" cy="786384"/>
+          </a:xfrm>
+          <a:prstGeom prst="rect">
+            <a:avLst/>
+          </a:prstGeom>
+          <a:noFill/>
+          <a:ln/>
+        </p:spPr>
+        <p:txBody>
+          <a:bodyPr wrap="square" lIns="0" tIns="0" rIns="0" bIns="0" rtlCol="0" anchor="ctr"/>
+          <a:lstStyle/>
+          <a:p>
+            <a:pPr marL="0" indent="0" algn="ctr">
+              <a:buNone/>
+            </a:pPr>
+            <a:r>
+              <a:rPr lang="en-US" sz="2800" b="1" dirty="0">
+                <a:solidFill>
+                  <a:schemeClr val="bg1"/>
+                </a:solidFill>
+              </a:rPr>
+              <a:t>1</a:t>
+            </a:r>
+            <a:endParaRPr lang="en-US" sz="2800" dirty="0"/>
+          </a:p>
+        </p:txBody>
+      </p:sp>
+      <p:sp>
+        <p:nvSpPr>
+          <p:cNvPr id="7" name="Text 4"/>
+          <p:cNvSpPr txBox="1"/>
+          <p:nvPr/>
+        </p:nvSpPr>
+        <p:spPr>
+          <a:xfrm>
+            <a:off x="1874520" y="1463040"/>
+            <a:ext cx="3931920" cy="1280160"/>
           </a:xfrm>
           <a:prstGeom prst="rect">
             <a:avLst/>
@@ -13898,27 +17913,101 @@
               <a:buNone/>
             </a:pPr>
             <a:r>
-              <a:rPr lang="en-US" sz="2200" b="1" dirty="0">
-                <a:solidFill>
-                  <a:schemeClr val="accent2"/>
-                </a:solidFill>
-              </a:rPr>
-              <a:t>Dergi</a:t>
-            </a:r>
-            <a:endParaRPr lang="en-US" sz="2200" dirty="0"/>
-          </a:p>
-        </p:txBody>
-      </p:sp>
-      <p:sp>
-        <p:nvSpPr>
-          <p:cNvPr id="7" name="Text 3"/>
+              <a:rPr lang="tr-TR" sz="2600" dirty="0">
+                <a:solidFill>
+                  <a:schemeClr val="accent1"/>
+                </a:solidFill>
+              </a:rPr>
+              <a:t>G</a:t>
+            </a:r>
+            <a:r>
+              <a:rPr lang="en-US" sz="2600" dirty="0" err="1">
+                <a:solidFill>
+                  <a:schemeClr val="accent1"/>
+                </a:solidFill>
+              </a:rPr>
+              <a:t>iriş</a:t>
+            </a:r>
+            <a:endParaRPr lang="en-US" sz="2600" dirty="0"/>
+          </a:p>
+        </p:txBody>
+      </p:sp>
+      <p:sp>
+        <p:nvSpPr>
+          <p:cNvPr id="8" name="Kart"/>
+          <p:cNvSpPr/>
+          <p:nvPr/>
+        </p:nvSpPr>
+        <p:spPr>
+          <a:xfrm>
+            <a:off x="6172200" y="1463040"/>
+            <a:ext cx="5440680" cy="1280160"/>
+          </a:xfrm>
+          <a:prstGeom prst="roundRect">
+            <a:avLst>
+              <a:gd name="adj" fmla="val 8571"/>
+            </a:avLst>
+          </a:prstGeom>
+          <a:solidFill>
+            <a:schemeClr val="bg2"/>
+          </a:solidFill>
+          <a:ln w="12700">
+            <a:solidFill>
+              <a:schemeClr val="bg2"/>
+            </a:solidFill>
+            <a:prstDash val="solid"/>
+          </a:ln>
+        </p:spPr>
+        <p:txBody>
+          <a:bodyPr/>
+          <a:lstStyle/>
+          <a:p>
+            <a:endParaRPr/>
+          </a:p>
+        </p:txBody>
+      </p:sp>
+      <p:sp>
+        <p:nvSpPr>
+          <p:cNvPr id="9" name="Sıra"/>
+          <p:cNvSpPr/>
+          <p:nvPr/>
+        </p:nvSpPr>
+        <p:spPr>
+          <a:xfrm>
+            <a:off x="6446520" y="1709928"/>
+            <a:ext cx="786384" cy="786384"/>
+          </a:xfrm>
+          <a:prstGeom prst="ellipse">
+            <a:avLst/>
+          </a:prstGeom>
+          <a:solidFill>
+            <a:schemeClr val="accent2"/>
+          </a:solidFill>
+          <a:ln w="12700">
+            <a:solidFill>
+              <a:schemeClr val="accent2"/>
+            </a:solidFill>
+            <a:prstDash val="solid"/>
+          </a:ln>
+        </p:spPr>
+        <p:txBody>
+          <a:bodyPr/>
+          <a:lstStyle/>
+          <a:p>
+            <a:endParaRPr/>
+          </a:p>
+        </p:txBody>
+      </p:sp>
+      <p:sp>
+        <p:nvSpPr>
+          <p:cNvPr id="10" name="Text 7"/>
           <p:cNvSpPr txBox="1"/>
           <p:nvPr/>
         </p:nvSpPr>
         <p:spPr>
           <a:xfrm>
-            <a:off x="6813492" y="1417320"/>
-            <a:ext cx="4826820" cy="640080"/>
+            <a:off x="6446520" y="1709928"/>
+            <a:ext cx="786384" cy="786384"/>
           </a:xfrm>
           <a:prstGeom prst="rect">
             <a:avLst/>
@@ -13927,44 +18016,172 @@
           <a:ln/>
         </p:spPr>
         <p:txBody>
-          <a:bodyPr wrap="square" lIns="0" tIns="0" rIns="0" bIns="0" rtlCol="0" anchor="ctr">
-            <a:normAutofit/>
-          </a:bodyPr>
+          <a:bodyPr wrap="square" lIns="0" tIns="0" rIns="0" bIns="0" rtlCol="0" anchor="ctr"/>
+          <a:lstStyle/>
+          <a:p>
+            <a:pPr marL="0" indent="0" algn="ctr">
+              <a:buNone/>
+            </a:pPr>
+            <a:r>
+              <a:rPr lang="en-US" sz="2800" b="1" dirty="0">
+                <a:solidFill>
+                  <a:schemeClr val="bg1"/>
+                </a:solidFill>
+              </a:rPr>
+              <a:t>2</a:t>
+            </a:r>
+            <a:endParaRPr lang="en-US" sz="2800" dirty="0"/>
+          </a:p>
+        </p:txBody>
+      </p:sp>
+      <p:sp>
+        <p:nvSpPr>
+          <p:cNvPr id="11" name="Text 8"/>
+          <p:cNvSpPr txBox="1"/>
+          <p:nvPr/>
+        </p:nvSpPr>
+        <p:spPr>
+          <a:xfrm>
+            <a:off x="7498080" y="1463040"/>
+            <a:ext cx="3931920" cy="1280160"/>
+          </a:xfrm>
+          <a:prstGeom prst="rect">
+            <a:avLst/>
+          </a:prstGeom>
+          <a:noFill/>
+          <a:ln/>
+        </p:spPr>
+        <p:txBody>
+          <a:bodyPr wrap="square" lIns="0" tIns="0" rIns="0" bIns="0" rtlCol="0" anchor="ctr"/>
           <a:lstStyle/>
           <a:p>
             <a:pPr marL="0" indent="0">
               <a:buNone/>
             </a:pPr>
             <a:r>
-              <a:rPr lang="en-US" sz="2200" dirty="0">
+              <a:rPr lang="en-US" sz="2600" dirty="0">
                 <a:solidFill>
                   <a:schemeClr val="accent1"/>
                 </a:solidFill>
               </a:rPr>
-              <a:t>Turk J Fam </a:t>
-            </a:r>
-            <a:r>
-              <a:rPr lang="en-US" sz="2200" dirty="0" err="1">
-                <a:solidFill>
-                  <a:schemeClr val="accent1"/>
-                </a:solidFill>
-              </a:rPr>
-              <a:t>Pract</a:t>
-            </a:r>
-            <a:endParaRPr lang="en-US" sz="2200" dirty="0"/>
-          </a:p>
-        </p:txBody>
-      </p:sp>
-      <p:sp>
-        <p:nvSpPr>
-          <p:cNvPr id="8" name="Text 4"/>
+              <a:t>Gereç ve yöntem</a:t>
+            </a:r>
+            <a:endParaRPr lang="en-US" sz="2600" dirty="0"/>
+          </a:p>
+        </p:txBody>
+      </p:sp>
+      <p:sp>
+        <p:nvSpPr>
+          <p:cNvPr id="12" name="Kart"/>
+          <p:cNvSpPr/>
+          <p:nvPr/>
+        </p:nvSpPr>
+        <p:spPr>
+          <a:xfrm>
+            <a:off x="548640" y="3017520"/>
+            <a:ext cx="5440680" cy="1280160"/>
+          </a:xfrm>
+          <a:prstGeom prst="roundRect">
+            <a:avLst>
+              <a:gd name="adj" fmla="val 8571"/>
+            </a:avLst>
+          </a:prstGeom>
+          <a:solidFill>
+            <a:schemeClr val="bg2"/>
+          </a:solidFill>
+          <a:ln w="12700">
+            <a:solidFill>
+              <a:schemeClr val="bg2"/>
+            </a:solidFill>
+            <a:prstDash val="solid"/>
+          </a:ln>
+        </p:spPr>
+        <p:txBody>
+          <a:bodyPr/>
+          <a:lstStyle/>
+          <a:p>
+            <a:endParaRPr/>
+          </a:p>
+        </p:txBody>
+      </p:sp>
+      <p:sp>
+        <p:nvSpPr>
+          <p:cNvPr id="13" name="Sıra"/>
+          <p:cNvSpPr/>
+          <p:nvPr/>
+        </p:nvSpPr>
+        <p:spPr>
+          <a:xfrm>
+            <a:off x="822960" y="3264408"/>
+            <a:ext cx="786384" cy="786384"/>
+          </a:xfrm>
+          <a:prstGeom prst="ellipse">
+            <a:avLst/>
+          </a:prstGeom>
+          <a:solidFill>
+            <a:schemeClr val="accent1"/>
+          </a:solidFill>
+          <a:ln w="12700">
+            <a:solidFill>
+              <a:schemeClr val="accent1"/>
+            </a:solidFill>
+            <a:prstDash val="solid"/>
+          </a:ln>
+        </p:spPr>
+        <p:txBody>
+          <a:bodyPr/>
+          <a:lstStyle/>
+          <a:p>
+            <a:endParaRPr/>
+          </a:p>
+        </p:txBody>
+      </p:sp>
+      <p:sp>
+        <p:nvSpPr>
+          <p:cNvPr id="14" name="Text 11"/>
           <p:cNvSpPr txBox="1"/>
           <p:nvPr/>
         </p:nvSpPr>
         <p:spPr>
           <a:xfrm>
-            <a:off x="5259012" y="2203704"/>
-            <a:ext cx="1508760" cy="640080"/>
+            <a:off x="822960" y="3264408"/>
+            <a:ext cx="786384" cy="786384"/>
+          </a:xfrm>
+          <a:prstGeom prst="rect">
+            <a:avLst/>
+          </a:prstGeom>
+          <a:noFill/>
+          <a:ln/>
+        </p:spPr>
+        <p:txBody>
+          <a:bodyPr wrap="square" lIns="0" tIns="0" rIns="0" bIns="0" rtlCol="0" anchor="ctr"/>
+          <a:lstStyle/>
+          <a:p>
+            <a:pPr marL="0" indent="0" algn="ctr">
+              <a:buNone/>
+            </a:pPr>
+            <a:r>
+              <a:rPr lang="en-US" sz="2800" b="1" dirty="0">
+                <a:solidFill>
+                  <a:schemeClr val="bg1"/>
+                </a:solidFill>
+              </a:rPr>
+              <a:t>3</a:t>
+            </a:r>
+            <a:endParaRPr lang="en-US" sz="2800" dirty="0"/>
+          </a:p>
+        </p:txBody>
+      </p:sp>
+      <p:sp>
+        <p:nvSpPr>
+          <p:cNvPr id="15" name="Text 12"/>
+          <p:cNvSpPr txBox="1"/>
+          <p:nvPr/>
+        </p:nvSpPr>
+        <p:spPr>
+          <a:xfrm>
+            <a:off x="1874520" y="3017520"/>
+            <a:ext cx="3931920" cy="1280160"/>
           </a:xfrm>
           <a:prstGeom prst="rect">
             <a:avLst/>
@@ -13980,27 +18197,93 @@
               <a:buNone/>
             </a:pPr>
             <a:r>
-              <a:rPr lang="en-US" sz="2200" b="1" dirty="0">
-                <a:solidFill>
-                  <a:schemeClr val="accent2"/>
-                </a:solidFill>
-              </a:rPr>
-              <a:t>Künye</a:t>
-            </a:r>
-            <a:endParaRPr lang="en-US" sz="2200" dirty="0"/>
-          </a:p>
-        </p:txBody>
-      </p:sp>
-      <p:sp>
-        <p:nvSpPr>
-          <p:cNvPr id="9" name="Text 5"/>
+              <a:rPr lang="en-US" sz="2600" dirty="0">
+                <a:solidFill>
+                  <a:schemeClr val="accent1"/>
+                </a:solidFill>
+              </a:rPr>
+              <a:t>Bulgular</a:t>
+            </a:r>
+            <a:endParaRPr lang="en-US" sz="2600" dirty="0"/>
+          </a:p>
+        </p:txBody>
+      </p:sp>
+      <p:sp>
+        <p:nvSpPr>
+          <p:cNvPr id="16" name="Kart"/>
+          <p:cNvSpPr/>
+          <p:nvPr/>
+        </p:nvSpPr>
+        <p:spPr>
+          <a:xfrm>
+            <a:off x="6172200" y="3017520"/>
+            <a:ext cx="5440680" cy="1280160"/>
+          </a:xfrm>
+          <a:prstGeom prst="roundRect">
+            <a:avLst>
+              <a:gd name="adj" fmla="val 8571"/>
+            </a:avLst>
+          </a:prstGeom>
+          <a:solidFill>
+            <a:schemeClr val="bg2"/>
+          </a:solidFill>
+          <a:ln w="12700">
+            <a:solidFill>
+              <a:schemeClr val="bg2"/>
+            </a:solidFill>
+            <a:prstDash val="solid"/>
+          </a:ln>
+        </p:spPr>
+        <p:txBody>
+          <a:bodyPr/>
+          <a:lstStyle/>
+          <a:p>
+            <a:endParaRPr/>
+          </a:p>
+        </p:txBody>
+      </p:sp>
+      <p:sp>
+        <p:nvSpPr>
+          <p:cNvPr id="17" name="Sıra"/>
+          <p:cNvSpPr/>
+          <p:nvPr/>
+        </p:nvSpPr>
+        <p:spPr>
+          <a:xfrm>
+            <a:off x="6446520" y="3264408"/>
+            <a:ext cx="786384" cy="786384"/>
+          </a:xfrm>
+          <a:prstGeom prst="ellipse">
+            <a:avLst/>
+          </a:prstGeom>
+          <a:solidFill>
+            <a:schemeClr val="accent2"/>
+          </a:solidFill>
+          <a:ln w="12700">
+            <a:solidFill>
+              <a:schemeClr val="accent2"/>
+            </a:solidFill>
+            <a:prstDash val="solid"/>
+          </a:ln>
+        </p:spPr>
+        <p:txBody>
+          <a:bodyPr/>
+          <a:lstStyle/>
+          <a:p>
+            <a:endParaRPr/>
+          </a:p>
+        </p:txBody>
+      </p:sp>
+      <p:sp>
+        <p:nvSpPr>
+          <p:cNvPr id="18" name="Text 15"/>
           <p:cNvSpPr txBox="1"/>
           <p:nvPr/>
         </p:nvSpPr>
         <p:spPr>
           <a:xfrm>
-            <a:off x="6813492" y="2203704"/>
-            <a:ext cx="4826820" cy="640080"/>
+            <a:off x="6446520" y="3264408"/>
+            <a:ext cx="786384" cy="786384"/>
           </a:xfrm>
           <a:prstGeom prst="rect">
             <a:avLst/>
@@ -14009,36 +18292,172 @@
           <a:ln/>
         </p:spPr>
         <p:txBody>
-          <a:bodyPr wrap="square" lIns="0" tIns="0" rIns="0" bIns="0" rtlCol="0" anchor="ctr">
-            <a:normAutofit/>
-          </a:bodyPr>
+          <a:bodyPr wrap="square" lIns="0" tIns="0" rIns="0" bIns="0" rtlCol="0" anchor="ctr"/>
+          <a:lstStyle/>
+          <a:p>
+            <a:pPr marL="0" indent="0" algn="ctr">
+              <a:buNone/>
+            </a:pPr>
+            <a:r>
+              <a:rPr lang="en-US" sz="2800" b="1" dirty="0">
+                <a:solidFill>
+                  <a:schemeClr val="bg1"/>
+                </a:solidFill>
+              </a:rPr>
+              <a:t>4</a:t>
+            </a:r>
+            <a:endParaRPr lang="en-US" sz="2800" dirty="0"/>
+          </a:p>
+        </p:txBody>
+      </p:sp>
+      <p:sp>
+        <p:nvSpPr>
+          <p:cNvPr id="19" name="Text 16"/>
+          <p:cNvSpPr txBox="1"/>
+          <p:nvPr/>
+        </p:nvSpPr>
+        <p:spPr>
+          <a:xfrm>
+            <a:off x="7498080" y="3017520"/>
+            <a:ext cx="3931920" cy="1280160"/>
+          </a:xfrm>
+          <a:prstGeom prst="rect">
+            <a:avLst/>
+          </a:prstGeom>
+          <a:noFill/>
+          <a:ln/>
+        </p:spPr>
+        <p:txBody>
+          <a:bodyPr wrap="square" lIns="0" tIns="0" rIns="0" bIns="0" rtlCol="0" anchor="ctr"/>
           <a:lstStyle/>
           <a:p>
             <a:pPr marL="0" indent="0">
               <a:buNone/>
             </a:pPr>
             <a:r>
-              <a:rPr lang="en-US" sz="2200" dirty="0">
+              <a:rPr lang="en-US" sz="2600" dirty="0">
                 <a:solidFill>
                   <a:schemeClr val="accent1"/>
                 </a:solidFill>
               </a:rPr>
-              <a:t>2026;30(2):97-106</a:t>
-            </a:r>
-            <a:endParaRPr lang="en-US" sz="2200" dirty="0"/>
-          </a:p>
-        </p:txBody>
-      </p:sp>
-      <p:sp>
-        <p:nvSpPr>
-          <p:cNvPr id="12" name="Text 8"/>
+              <a:t>Tartışma</a:t>
+            </a:r>
+            <a:endParaRPr lang="en-US" sz="2600" dirty="0"/>
+          </a:p>
+        </p:txBody>
+      </p:sp>
+      <p:sp>
+        <p:nvSpPr>
+          <p:cNvPr id="20" name="Kart"/>
+          <p:cNvSpPr/>
+          <p:nvPr/>
+        </p:nvSpPr>
+        <p:spPr>
+          <a:xfrm>
+            <a:off x="548640" y="4572000"/>
+            <a:ext cx="5440680" cy="1280160"/>
+          </a:xfrm>
+          <a:prstGeom prst="roundRect">
+            <a:avLst>
+              <a:gd name="adj" fmla="val 8571"/>
+            </a:avLst>
+          </a:prstGeom>
+          <a:solidFill>
+            <a:schemeClr val="bg2"/>
+          </a:solidFill>
+          <a:ln w="12700">
+            <a:solidFill>
+              <a:schemeClr val="bg2"/>
+            </a:solidFill>
+            <a:prstDash val="solid"/>
+          </a:ln>
+        </p:spPr>
+        <p:txBody>
+          <a:bodyPr/>
+          <a:lstStyle/>
+          <a:p>
+            <a:endParaRPr/>
+          </a:p>
+        </p:txBody>
+      </p:sp>
+      <p:sp>
+        <p:nvSpPr>
+          <p:cNvPr id="21" name="Sıra"/>
+          <p:cNvSpPr/>
+          <p:nvPr/>
+        </p:nvSpPr>
+        <p:spPr>
+          <a:xfrm>
+            <a:off x="822960" y="4818888"/>
+            <a:ext cx="786384" cy="786384"/>
+          </a:xfrm>
+          <a:prstGeom prst="ellipse">
+            <a:avLst/>
+          </a:prstGeom>
+          <a:solidFill>
+            <a:schemeClr val="accent1"/>
+          </a:solidFill>
+          <a:ln w="12700">
+            <a:solidFill>
+              <a:schemeClr val="accent1"/>
+            </a:solidFill>
+            <a:prstDash val="solid"/>
+          </a:ln>
+        </p:spPr>
+        <p:txBody>
+          <a:bodyPr/>
+          <a:lstStyle/>
+          <a:p>
+            <a:endParaRPr/>
+          </a:p>
+        </p:txBody>
+      </p:sp>
+      <p:sp>
+        <p:nvSpPr>
+          <p:cNvPr id="22" name="Text 19"/>
           <p:cNvSpPr txBox="1"/>
           <p:nvPr/>
         </p:nvSpPr>
         <p:spPr>
           <a:xfrm>
-            <a:off x="5259012" y="2962656"/>
-            <a:ext cx="1508760" cy="640080"/>
+            <a:off x="822960" y="4818888"/>
+            <a:ext cx="786384" cy="786384"/>
+          </a:xfrm>
+          <a:prstGeom prst="rect">
+            <a:avLst/>
+          </a:prstGeom>
+          <a:noFill/>
+          <a:ln/>
+        </p:spPr>
+        <p:txBody>
+          <a:bodyPr wrap="square" lIns="0" tIns="0" rIns="0" bIns="0" rtlCol="0" anchor="ctr"/>
+          <a:lstStyle/>
+          <a:p>
+            <a:pPr marL="0" indent="0" algn="ctr">
+              <a:buNone/>
+            </a:pPr>
+            <a:r>
+              <a:rPr lang="en-US" sz="2800" b="1" dirty="0">
+                <a:solidFill>
+                  <a:schemeClr val="bg1"/>
+                </a:solidFill>
+              </a:rPr>
+              <a:t>5</a:t>
+            </a:r>
+            <a:endParaRPr lang="en-US" sz="2800" dirty="0"/>
+          </a:p>
+        </p:txBody>
+      </p:sp>
+      <p:sp>
+        <p:nvSpPr>
+          <p:cNvPr id="23" name="Text 20"/>
+          <p:cNvSpPr txBox="1"/>
+          <p:nvPr/>
+        </p:nvSpPr>
+        <p:spPr>
+          <a:xfrm>
+            <a:off x="1874520" y="4572000"/>
+            <a:ext cx="3931920" cy="1280160"/>
           </a:xfrm>
           <a:prstGeom prst="rect">
             <a:avLst/>
@@ -14054,242 +18473,20 @@
               <a:buNone/>
             </a:pPr>
             <a:r>
-              <a:rPr lang="en-US" sz="2200" b="1" dirty="0">
-                <a:solidFill>
-                  <a:schemeClr val="accent2"/>
-                </a:solidFill>
-              </a:rPr>
-              <a:t>Tasarım</a:t>
-            </a:r>
-            <a:endParaRPr lang="en-US" sz="2200" dirty="0"/>
-          </a:p>
-        </p:txBody>
-      </p:sp>
-      <p:sp>
-        <p:nvSpPr>
-          <p:cNvPr id="13" name="Text 9"/>
-          <p:cNvSpPr txBox="1"/>
-          <p:nvPr/>
-        </p:nvSpPr>
-        <p:spPr>
-          <a:xfrm>
-            <a:off x="6813492" y="2962656"/>
-            <a:ext cx="4826820" cy="640080"/>
-          </a:xfrm>
-          <a:prstGeom prst="rect">
-            <a:avLst/>
-          </a:prstGeom>
-          <a:noFill/>
-          <a:ln/>
-        </p:spPr>
-        <p:txBody>
-          <a:bodyPr wrap="square" lIns="0" tIns="0" rIns="0" bIns="0" rtlCol="0" anchor="ctr">
-            <a:normAutofit/>
-          </a:bodyPr>
-          <a:lstStyle/>
-          <a:p>
-            <a:pPr marL="0" indent="0">
-              <a:buNone/>
-            </a:pPr>
-            <a:r>
-              <a:rPr lang="en-US" sz="2200" dirty="0">
+              <a:rPr lang="en-US" sz="2600" dirty="0">
                 <a:solidFill>
                   <a:schemeClr val="accent1"/>
                 </a:solidFill>
               </a:rPr>
-              <a:t>Retrospektif, kesitsel</a:t>
-            </a:r>
-            <a:endParaRPr lang="en-US" sz="2200" dirty="0"/>
-          </a:p>
-        </p:txBody>
-      </p:sp>
-      <p:sp>
-        <p:nvSpPr>
-          <p:cNvPr id="14" name="Text 10"/>
-          <p:cNvSpPr txBox="1"/>
-          <p:nvPr/>
-        </p:nvSpPr>
-        <p:spPr>
-          <a:xfrm>
-            <a:off x="5259012" y="3749040"/>
-            <a:ext cx="1508760" cy="640080"/>
-          </a:xfrm>
-          <a:prstGeom prst="rect">
-            <a:avLst/>
-          </a:prstGeom>
-          <a:noFill/>
-          <a:ln/>
-        </p:spPr>
-        <p:txBody>
-          <a:bodyPr wrap="square" lIns="0" tIns="0" rIns="0" bIns="0" rtlCol="0" anchor="ctr"/>
-          <a:lstStyle/>
-          <a:p>
-            <a:pPr marL="0" indent="0">
-              <a:buNone/>
-            </a:pPr>
-            <a:r>
-              <a:rPr lang="en-US" sz="2200" b="1" dirty="0">
-                <a:solidFill>
-                  <a:schemeClr val="accent2"/>
-                </a:solidFill>
-              </a:rPr>
-              <a:t>Merkez</a:t>
-            </a:r>
-            <a:endParaRPr lang="en-US" sz="2200" dirty="0"/>
-          </a:p>
-        </p:txBody>
-      </p:sp>
-      <p:sp>
-        <p:nvSpPr>
-          <p:cNvPr id="15" name="Text 11"/>
-          <p:cNvSpPr txBox="1"/>
-          <p:nvPr/>
-        </p:nvSpPr>
-        <p:spPr>
-          <a:xfrm>
-            <a:off x="6813492" y="3749040"/>
-            <a:ext cx="4826820" cy="640080"/>
-          </a:xfrm>
-          <a:prstGeom prst="rect">
-            <a:avLst/>
-          </a:prstGeom>
-          <a:noFill/>
-          <a:ln/>
-        </p:spPr>
-        <p:txBody>
-          <a:bodyPr wrap="square" lIns="0" tIns="0" rIns="0" bIns="0" rtlCol="0" anchor="ctr">
-            <a:normAutofit/>
-          </a:bodyPr>
-          <a:lstStyle/>
-          <a:p>
-            <a:pPr marL="0" indent="0">
-              <a:buNone/>
-            </a:pPr>
-            <a:r>
-              <a:rPr lang="en-US" sz="2200" dirty="0">
-                <a:solidFill>
-                  <a:schemeClr val="accent1"/>
-                </a:solidFill>
-              </a:rPr>
-              <a:t>Samsun EAH Sigara Bırakma Polikliniği</a:t>
-            </a:r>
-            <a:endParaRPr lang="en-US" sz="2200" dirty="0"/>
-          </a:p>
-        </p:txBody>
-      </p:sp>
-      <p:sp>
-        <p:nvSpPr>
-          <p:cNvPr id="16" name="Text 12"/>
-          <p:cNvSpPr txBox="1"/>
-          <p:nvPr/>
-        </p:nvSpPr>
-        <p:spPr>
-          <a:xfrm>
-            <a:off x="5259012" y="4535424"/>
-            <a:ext cx="1508760" cy="640080"/>
-          </a:xfrm>
-          <a:prstGeom prst="rect">
-            <a:avLst/>
-          </a:prstGeom>
-          <a:noFill/>
-          <a:ln/>
-        </p:spPr>
-        <p:txBody>
-          <a:bodyPr wrap="square" lIns="0" tIns="0" rIns="0" bIns="0" rtlCol="0" anchor="ctr"/>
-          <a:lstStyle/>
-          <a:p>
-            <a:pPr marL="0" indent="0">
-              <a:buNone/>
-            </a:pPr>
-            <a:r>
-              <a:rPr lang="en-US" sz="2200" b="1" dirty="0">
-                <a:solidFill>
-                  <a:schemeClr val="accent2"/>
-                </a:solidFill>
-              </a:rPr>
-              <a:t>DOI</a:t>
-            </a:r>
-            <a:endParaRPr lang="en-US" sz="2200" dirty="0"/>
-          </a:p>
-        </p:txBody>
-      </p:sp>
-      <p:sp>
-        <p:nvSpPr>
-          <p:cNvPr id="17" name="Text 13"/>
-          <p:cNvSpPr txBox="1"/>
-          <p:nvPr/>
-        </p:nvSpPr>
-        <p:spPr>
-          <a:xfrm>
-            <a:off x="6813492" y="4535424"/>
-            <a:ext cx="4826820" cy="640080"/>
-          </a:xfrm>
-          <a:prstGeom prst="rect">
-            <a:avLst/>
-          </a:prstGeom>
-          <a:noFill/>
-          <a:ln/>
-        </p:spPr>
-        <p:txBody>
-          <a:bodyPr wrap="square" lIns="0" tIns="0" rIns="0" bIns="0" rtlCol="0" anchor="ctr">
-            <a:normAutofit/>
-          </a:bodyPr>
-          <a:lstStyle/>
-          <a:p>
-            <a:pPr marL="0" indent="0">
-              <a:buNone/>
-            </a:pPr>
-            <a:r>
-              <a:rPr lang="en-US" sz="2200" dirty="0">
-                <a:solidFill>
-                  <a:schemeClr val="accent1"/>
-                </a:solidFill>
-              </a:rPr>
-              <a:t>10.54308/TJFP.2026.912</a:t>
-            </a:r>
-            <a:endParaRPr lang="en-US" sz="2200" dirty="0"/>
-          </a:p>
-        </p:txBody>
-      </p:sp>
-      <p:sp>
-        <p:nvSpPr>
-          <p:cNvPr id="18" name="Kaynak"/>
-          <p:cNvSpPr txBox="1"/>
-          <p:nvPr/>
-        </p:nvSpPr>
-        <p:spPr>
-          <a:xfrm>
-            <a:off x="548640" y="6382512"/>
-            <a:ext cx="10424160" cy="292608"/>
-          </a:xfrm>
-          <a:prstGeom prst="rect">
-            <a:avLst/>
-          </a:prstGeom>
-          <a:noFill/>
-          <a:ln/>
-        </p:spPr>
-        <p:txBody>
-          <a:bodyPr wrap="square" lIns="0" tIns="0" rIns="0" bIns="0" rtlCol="0" anchor="ctr"/>
-          <a:lstStyle/>
-          <a:p>
-            <a:pPr marL="0" indent="0">
-              <a:buNone/>
-            </a:pPr>
-            <a:r>
-              <a:rPr lang="en-US" sz="1200" i="1" dirty="0">
-                <a:solidFill>
-                  <a:schemeClr val="accent3"/>
-                </a:solidFill>
-              </a:rPr>
-              <a:t>Görsel: Cenberlitaş E, Gökçe A, Öztürk O. Turk J Fam Pract. 2026;30(2):97-106. (CC BY)</a:t>
-            </a:r>
-            <a:endParaRPr lang="en-US" sz="1200" dirty="0"/>
-          </a:p>
-        </p:txBody>
-      </p:sp>
-      <p:sp>
-        <p:nvSpPr>
-          <p:cNvPr id="25" name="Slide Number Placeholder 0"/>
+              <a:t>Sonuç ve öneriler</a:t>
+            </a:r>
+            <a:endParaRPr lang="en-US" sz="2600" dirty="0"/>
+          </a:p>
+        </p:txBody>
+      </p:sp>
+      <p:sp>
+        <p:nvSpPr>
+          <p:cNvPr id="2" name="Slide Number Placeholder 0"/>
           <p:cNvSpPr>
             <a:spLocks noGrp="1"/>
           </p:cNvSpPr>
@@ -14991,42 +19188,6 @@
       </p:sp>
       <p:sp>
         <p:nvSpPr>
-          <p:cNvPr id="24" name="Kaynak"/>
-          <p:cNvSpPr txBox="1"/>
-          <p:nvPr/>
-        </p:nvSpPr>
-        <p:spPr>
-          <a:xfrm>
-            <a:off x="548640" y="6382512"/>
-            <a:ext cx="10424160" cy="292608"/>
-          </a:xfrm>
-          <a:prstGeom prst="rect">
-            <a:avLst/>
-          </a:prstGeom>
-          <a:noFill/>
-          <a:ln/>
-        </p:spPr>
-        <p:txBody>
-          <a:bodyPr wrap="square" lIns="0" tIns="0" rIns="0" bIns="0" rtlCol="0" anchor="ctr"/>
-          <a:lstStyle/>
-          <a:p>
-            <a:pPr marL="0" indent="0">
-              <a:buNone/>
-            </a:pPr>
-            <a:r>
-              <a:rPr lang="en-US" sz="1200" i="1" dirty="0">
-                <a:solidFill>
-                  <a:schemeClr val="accent3"/>
-                </a:solidFill>
-              </a:rPr>
-              <a:t>Kaynak: 2, 3, 4 (Küresel Yetişkin Tütün Araştırması Türkiye 2016 verisi)</a:t>
-            </a:r>
-            <a:endParaRPr lang="en-US" sz="1200" dirty="0"/>
-          </a:p>
-        </p:txBody>
-      </p:sp>
-      <p:sp>
-        <p:nvSpPr>
           <p:cNvPr id="25" name="Slide Number Placeholder 0"/>
           <p:cNvSpPr>
             <a:spLocks noGrp="1"/>
@@ -15533,7 +19694,71 @@
                   <a:schemeClr val="accent1"/>
                 </a:solidFill>
               </a:rPr>
-              <a:t>NRT (nikotin replasman)</a:t>
+              <a:t>NRT (</a:t>
+            </a:r>
+            <a:r>
+              <a:rPr lang="en-US" sz="2000" dirty="0" err="1">
+                <a:solidFill>
+                  <a:schemeClr val="accent1"/>
+                </a:solidFill>
+              </a:rPr>
+              <a:t>nikotin</a:t>
+            </a:r>
+            <a:r>
+              <a:rPr lang="en-US" sz="2000" dirty="0">
+                <a:solidFill>
+                  <a:schemeClr val="accent1"/>
+                </a:solidFill>
+              </a:rPr>
+              <a:t> </a:t>
+            </a:r>
+            <a:r>
+              <a:rPr lang="en-US" sz="2000" dirty="0" err="1">
+                <a:solidFill>
+                  <a:schemeClr val="accent1"/>
+                </a:solidFill>
+              </a:rPr>
+              <a:t>yerine</a:t>
+            </a:r>
+            <a:r>
+              <a:rPr lang="en-US" sz="2000" dirty="0">
+                <a:solidFill>
+                  <a:schemeClr val="accent1"/>
+                </a:solidFill>
+              </a:rPr>
+              <a:t> </a:t>
+            </a:r>
+            <a:r>
+              <a:rPr lang="en-US" sz="2000" dirty="0" err="1">
+                <a:solidFill>
+                  <a:schemeClr val="accent1"/>
+                </a:solidFill>
+              </a:rPr>
+              <a:t>koyma</a:t>
+            </a:r>
+            <a:r>
+              <a:rPr lang="en-US" sz="2000" dirty="0">
+                <a:solidFill>
+                  <a:schemeClr val="accent1"/>
+                </a:solidFill>
+              </a:rPr>
+              <a:t> </a:t>
+            </a:r>
+            <a:r>
+              <a:rPr lang="en-US" sz="2000" dirty="0" err="1">
+                <a:solidFill>
+                  <a:schemeClr val="accent1"/>
+                </a:solidFill>
+              </a:rPr>
+              <a:t>tedavisi</a:t>
+            </a:r>
+            <a:r>
+              <a:rPr lang="en-US" sz="2000" dirty="0">
+                <a:solidFill>
+                  <a:schemeClr val="accent1"/>
+                </a:solidFill>
+              </a:rPr>
+              <a:t>)</a:t>
             </a:r>
             <a:endParaRPr lang="en-US" sz="2200" dirty="0"/>
           </a:p>
@@ -15626,42 +19851,6 @@
               <a:t>Farmakoterapi davranışsal destekle birlikte önerilmektedir.</a:t>
             </a:r>
             <a:endParaRPr lang="en-US" sz="2200" dirty="0"/>
-          </a:p>
-        </p:txBody>
-      </p:sp>
-      <p:sp>
-        <p:nvSpPr>
-          <p:cNvPr id="15" name="Kaynak"/>
-          <p:cNvSpPr txBox="1"/>
-          <p:nvPr/>
-        </p:nvSpPr>
-        <p:spPr>
-          <a:xfrm>
-            <a:off x="548640" y="6382512"/>
-            <a:ext cx="10424160" cy="292608"/>
-          </a:xfrm>
-          <a:prstGeom prst="rect">
-            <a:avLst/>
-          </a:prstGeom>
-          <a:noFill/>
-          <a:ln/>
-        </p:spPr>
-        <p:txBody>
-          <a:bodyPr wrap="square" lIns="0" tIns="0" rIns="0" bIns="0" rtlCol="0" anchor="ctr"/>
-          <a:lstStyle/>
-          <a:p>
-            <a:pPr marL="0" indent="0">
-              <a:buNone/>
-            </a:pPr>
-            <a:r>
-              <a:rPr lang="en-US" sz="1200" i="1" dirty="0">
-                <a:solidFill>
-                  <a:schemeClr val="accent3"/>
-                </a:solidFill>
-              </a:rPr>
-              <a:t>Kaynak: 1, 5</a:t>
-            </a:r>
-            <a:endParaRPr lang="en-US" sz="1200" dirty="0"/>
           </a:p>
         </p:txBody>
       </p:sp>
@@ -15911,42 +20100,6 @@
       </p:sp>
       <p:sp>
         <p:nvSpPr>
-          <p:cNvPr id="8" name="Kaynak"/>
-          <p:cNvSpPr txBox="1"/>
-          <p:nvPr/>
-        </p:nvSpPr>
-        <p:spPr>
-          <a:xfrm>
-            <a:off x="548640" y="6382512"/>
-            <a:ext cx="10424160" cy="292608"/>
-          </a:xfrm>
-          <a:prstGeom prst="rect">
-            <a:avLst/>
-          </a:prstGeom>
-          <a:noFill/>
-          <a:ln/>
-        </p:spPr>
-        <p:txBody>
-          <a:bodyPr wrap="square" lIns="0" tIns="0" rIns="0" bIns="0" rtlCol="0" anchor="ctr"/>
-          <a:lstStyle/>
-          <a:p>
-            <a:pPr marL="0" indent="0">
-              <a:buNone/>
-            </a:pPr>
-            <a:r>
-              <a:rPr lang="en-US" sz="1200" i="1" dirty="0">
-                <a:solidFill>
-                  <a:schemeClr val="accent3"/>
-                </a:solidFill>
-              </a:rPr>
-              <a:t>Kaynak: Cenberlitaş E, Gökçe A, Öztürk O. Turk J Fam Pract. 2026;30(2):97-106.</a:t>
-            </a:r>
-            <a:endParaRPr lang="en-US" sz="1200" dirty="0"/>
-          </a:p>
-        </p:txBody>
-      </p:sp>
-      <p:sp>
-        <p:nvSpPr>
           <p:cNvPr id="25" name="Slide Number Placeholder 0"/>
           <p:cNvSpPr>
             <a:spLocks noGrp="1"/>
@@ -16611,42 +20764,6 @@
       </p:sp>
       <p:sp>
         <p:nvSpPr>
-          <p:cNvPr id="22" name="Kaynak"/>
-          <p:cNvSpPr txBox="1"/>
-          <p:nvPr/>
-        </p:nvSpPr>
-        <p:spPr>
-          <a:xfrm>
-            <a:off x="548640" y="6382512"/>
-            <a:ext cx="10424160" cy="292608"/>
-          </a:xfrm>
-          <a:prstGeom prst="rect">
-            <a:avLst/>
-          </a:prstGeom>
-          <a:noFill/>
-          <a:ln/>
-        </p:spPr>
-        <p:txBody>
-          <a:bodyPr wrap="square" lIns="0" tIns="0" rIns="0" bIns="0" rtlCol="0" anchor="ctr"/>
-          <a:lstStyle/>
-          <a:p>
-            <a:pPr marL="0" indent="0">
-              <a:buNone/>
-            </a:pPr>
-            <a:r>
-              <a:rPr lang="en-US" sz="1200" i="1" dirty="0">
-                <a:solidFill>
-                  <a:schemeClr val="accent3"/>
-                </a:solidFill>
-              </a:rPr>
-              <a:t>Kaynak: Cenberlitaş E, Gökçe A, Öztürk O. Turk J Fam Pract. 2026;30(2):97-106.</a:t>
-            </a:r>
-            <a:endParaRPr lang="en-US" sz="1200" dirty="0"/>
-          </a:p>
-        </p:txBody>
-      </p:sp>
-      <p:sp>
-        <p:nvSpPr>
           <p:cNvPr id="25" name="Slide Number Placeholder 0"/>
           <p:cNvSpPr>
             <a:spLocks noGrp="1"/>
@@ -17468,42 +21585,6 @@
       </p:sp>
       <p:sp>
         <p:nvSpPr>
-          <p:cNvPr id="25" name="Kaynak"/>
-          <p:cNvSpPr txBox="1"/>
-          <p:nvPr/>
-        </p:nvSpPr>
-        <p:spPr>
-          <a:xfrm>
-            <a:off x="548640" y="6382512"/>
-            <a:ext cx="10424160" cy="292608"/>
-          </a:xfrm>
-          <a:prstGeom prst="rect">
-            <a:avLst/>
-          </a:prstGeom>
-          <a:noFill/>
-          <a:ln/>
-        </p:spPr>
-        <p:txBody>
-          <a:bodyPr wrap="square" lIns="0" tIns="0" rIns="0" bIns="0" rtlCol="0" anchor="ctr"/>
-          <a:lstStyle/>
-          <a:p>
-            <a:pPr marL="0" indent="0">
-              <a:buNone/>
-            </a:pPr>
-            <a:r>
-              <a:rPr lang="en-US" sz="1200" i="1" dirty="0">
-                <a:solidFill>
-                  <a:schemeClr val="accent3"/>
-                </a:solidFill>
-              </a:rPr>
-              <a:t>Kaynak: 1, 6, 7</a:t>
-            </a:r>
-            <a:endParaRPr lang="en-US" sz="1200" dirty="0"/>
-          </a:p>
-        </p:txBody>
-      </p:sp>
-      <p:sp>
-        <p:nvSpPr>
           <p:cNvPr id="2" name="Slide Number Placeholder 0"/>
           <p:cNvSpPr>
             <a:spLocks noGrp="1"/>
@@ -18111,42 +22192,6 @@
               <a:t>NRT ve sitizin dönemsel olarak ücretsiz sağlanmıştır</a:t>
             </a:r>
             <a:endParaRPr lang="en-US" sz="2200" dirty="0"/>
-          </a:p>
-        </p:txBody>
-      </p:sp>
-      <p:sp>
-        <p:nvSpPr>
-          <p:cNvPr id="20" name="Kaynak"/>
-          <p:cNvSpPr txBox="1"/>
-          <p:nvPr/>
-        </p:nvSpPr>
-        <p:spPr>
-          <a:xfrm>
-            <a:off x="548640" y="6382512"/>
-            <a:ext cx="10424160" cy="292608"/>
-          </a:xfrm>
-          <a:prstGeom prst="rect">
-            <a:avLst/>
-          </a:prstGeom>
-          <a:noFill/>
-          <a:ln/>
-        </p:spPr>
-        <p:txBody>
-          <a:bodyPr wrap="square" lIns="0" tIns="0" rIns="0" bIns="0" rtlCol="0" anchor="ctr"/>
-          <a:lstStyle/>
-          <a:p>
-            <a:pPr marL="0" indent="0">
-              <a:buNone/>
-            </a:pPr>
-            <a:r>
-              <a:rPr lang="en-US" sz="1200" i="1" dirty="0">
-                <a:solidFill>
-                  <a:schemeClr val="accent3"/>
-                </a:solidFill>
-              </a:rPr>
-              <a:t>Kaynak: Cenberlitaş E, Gökçe A, Öztürk O. Turk J Fam Pract. 2026;30(2):97-106.</a:t>
-            </a:r>
-            <a:endParaRPr lang="en-US" sz="1200" dirty="0"/>
           </a:p>
         </p:txBody>
       </p:sp>

--- a/Sunumlar/Makale_Sunumu_Sigara_Birakma.pptx
+++ b/Sunumlar/Makale_Sunumu_Sigara_Birakma.pptx
@@ -373,8 +373,8 @@
               <a:t>, </a:t>
             </a:r>
             <a:r>
-              <a:rPr dirty="0" err="1"/>
-              <a:t>değerli</a:t>
+              <a:rPr lang="tr-TR" dirty="0"/>
+              <a:t>asistan</a:t>
             </a:r>
             <a:r>
               <a:rPr dirty="0"/>
@@ -722,17 +722,292 @@
           <a:lstStyle/>
           <a:p>
             <a:r>
-              <a:t>Analizler SPSS 25 ile yapılmıştır. Normallik histogram ve Kolmogorov–Smirnov testiyle değerlendirilmiştir.</a:t>
-            </a:r>
-          </a:p>
-          <a:p>
-            <a:r>
-              <a:t>Kategorik değişkenler ki-kare testiyle, iki grup karşılaştırmaları Mann–Whitney U, ikiden fazla grup karşılaştırmaları Kruskal–Wallis testiyle yapılmıştır. Post-hoc karşılaştırmalarda Duncan testi kullanılmıştır.</a:t>
-            </a:r>
-          </a:p>
-          <a:p>
-            <a:r>
-              <a:t>Tedavi yöntemlerinin bırakma üzerindeki etkisi ikili lojistik regresyonla değerlendirilmiş ve Bonferroni düzeltmesi uygulanmıştır.</a:t>
+              <a:rPr lang="tr-TR" dirty="0"/>
+              <a:t>Bu slaytı geçelim. </a:t>
+            </a:r>
+            <a:r>
+              <a:rPr dirty="0" err="1"/>
+              <a:t>Analizler</a:t>
+            </a:r>
+            <a:r>
+              <a:rPr dirty="0"/>
+              <a:t> SPSS 25 </a:t>
+            </a:r>
+            <a:r>
+              <a:rPr dirty="0" err="1"/>
+              <a:t>ile</a:t>
+            </a:r>
+            <a:r>
+              <a:rPr dirty="0"/>
+              <a:t> </a:t>
+            </a:r>
+            <a:r>
+              <a:rPr dirty="0" err="1"/>
+              <a:t>yapılmıştır</a:t>
+            </a:r>
+            <a:r>
+              <a:rPr dirty="0"/>
+              <a:t>. </a:t>
+            </a:r>
+            <a:r>
+              <a:rPr dirty="0" err="1"/>
+              <a:t>Normallik</a:t>
+            </a:r>
+            <a:r>
+              <a:rPr dirty="0"/>
+              <a:t> histogram </a:t>
+            </a:r>
+            <a:r>
+              <a:rPr dirty="0" err="1"/>
+              <a:t>ve</a:t>
+            </a:r>
+            <a:r>
+              <a:rPr dirty="0"/>
+              <a:t> Kolmogorov–Smirnov </a:t>
+            </a:r>
+            <a:r>
+              <a:rPr dirty="0" err="1"/>
+              <a:t>testiyle</a:t>
+            </a:r>
+            <a:r>
+              <a:rPr dirty="0"/>
+              <a:t> </a:t>
+            </a:r>
+            <a:r>
+              <a:rPr dirty="0" err="1"/>
+              <a:t>değerlendirilmiştir</a:t>
+            </a:r>
+            <a:r>
+              <a:rPr dirty="0"/>
+              <a:t>.</a:t>
+            </a:r>
+          </a:p>
+          <a:p>
+            <a:r>
+              <a:rPr dirty="0" err="1"/>
+              <a:t>Kategorik</a:t>
+            </a:r>
+            <a:r>
+              <a:rPr dirty="0"/>
+              <a:t> </a:t>
+            </a:r>
+            <a:r>
+              <a:rPr dirty="0" err="1"/>
+              <a:t>değişkenler</a:t>
+            </a:r>
+            <a:r>
+              <a:rPr dirty="0"/>
+              <a:t> ki-</a:t>
+            </a:r>
+            <a:r>
+              <a:rPr dirty="0" err="1"/>
+              <a:t>kare</a:t>
+            </a:r>
+            <a:r>
+              <a:rPr dirty="0"/>
+              <a:t> </a:t>
+            </a:r>
+            <a:r>
+              <a:rPr dirty="0" err="1"/>
+              <a:t>testiyle</a:t>
+            </a:r>
+            <a:r>
+              <a:rPr dirty="0"/>
+              <a:t>, </a:t>
+            </a:r>
+            <a:r>
+              <a:rPr dirty="0" err="1"/>
+              <a:t>iki</a:t>
+            </a:r>
+            <a:r>
+              <a:rPr dirty="0"/>
+              <a:t> </a:t>
+            </a:r>
+            <a:r>
+              <a:rPr dirty="0" err="1"/>
+              <a:t>grup</a:t>
+            </a:r>
+            <a:r>
+              <a:rPr dirty="0"/>
+              <a:t> </a:t>
+            </a:r>
+            <a:r>
+              <a:rPr dirty="0" err="1"/>
+              <a:t>karşılaştırmaları</a:t>
+            </a:r>
+            <a:r>
+              <a:rPr dirty="0"/>
+              <a:t> Mann–Whitney U, </a:t>
+            </a:r>
+            <a:r>
+              <a:rPr dirty="0" err="1"/>
+              <a:t>ikiden</a:t>
+            </a:r>
+            <a:r>
+              <a:rPr dirty="0"/>
+              <a:t> </a:t>
+            </a:r>
+            <a:r>
+              <a:rPr dirty="0" err="1"/>
+              <a:t>fazla</a:t>
+            </a:r>
+            <a:r>
+              <a:rPr dirty="0"/>
+              <a:t> </a:t>
+            </a:r>
+            <a:r>
+              <a:rPr dirty="0" err="1"/>
+              <a:t>grup</a:t>
+            </a:r>
+            <a:r>
+              <a:rPr dirty="0"/>
+              <a:t> </a:t>
+            </a:r>
+            <a:r>
+              <a:rPr dirty="0" err="1"/>
+              <a:t>karşılaştırmaları</a:t>
+            </a:r>
+            <a:r>
+              <a:rPr dirty="0"/>
+              <a:t> Kruskal–Wallis </a:t>
+            </a:r>
+            <a:r>
+              <a:rPr dirty="0" err="1"/>
+              <a:t>testiyle</a:t>
+            </a:r>
+            <a:r>
+              <a:rPr dirty="0"/>
+              <a:t> </a:t>
+            </a:r>
+            <a:r>
+              <a:rPr dirty="0" err="1"/>
+              <a:t>yapılmıştır</a:t>
+            </a:r>
+            <a:r>
+              <a:rPr dirty="0"/>
+              <a:t>. Post-hoc </a:t>
+            </a:r>
+            <a:r>
+              <a:rPr dirty="0" err="1"/>
+              <a:t>karşılaştırmalarda</a:t>
+            </a:r>
+            <a:r>
+              <a:rPr dirty="0"/>
+              <a:t> Duncan </a:t>
+            </a:r>
+            <a:r>
+              <a:rPr dirty="0" err="1"/>
+              <a:t>testi</a:t>
+            </a:r>
+            <a:r>
+              <a:rPr dirty="0"/>
+              <a:t> </a:t>
+            </a:r>
+            <a:r>
+              <a:rPr dirty="0" err="1"/>
+              <a:t>kullanılmıştır</a:t>
+            </a:r>
+            <a:r>
+              <a:rPr dirty="0"/>
+              <a:t>.</a:t>
+            </a:r>
+          </a:p>
+          <a:p>
+            <a:r>
+              <a:rPr dirty="0" err="1"/>
+              <a:t>Tedavi</a:t>
+            </a:r>
+            <a:r>
+              <a:rPr dirty="0"/>
+              <a:t> </a:t>
+            </a:r>
+            <a:r>
+              <a:rPr dirty="0" err="1"/>
+              <a:t>yöntemlerinin</a:t>
+            </a:r>
+            <a:r>
+              <a:rPr dirty="0"/>
+              <a:t> </a:t>
+            </a:r>
+            <a:r>
+              <a:rPr dirty="0" err="1"/>
+              <a:t>bırakma</a:t>
+            </a:r>
+            <a:r>
+              <a:rPr dirty="0"/>
+              <a:t> </a:t>
+            </a:r>
+            <a:r>
+              <a:rPr dirty="0" err="1"/>
+              <a:t>üzerindeki</a:t>
+            </a:r>
+            <a:r>
+              <a:rPr dirty="0"/>
+              <a:t> </a:t>
+            </a:r>
+            <a:r>
+              <a:rPr dirty="0" err="1"/>
+              <a:t>etkisi</a:t>
+            </a:r>
+            <a:r>
+              <a:rPr dirty="0"/>
+              <a:t> </a:t>
+            </a:r>
+            <a:r>
+              <a:rPr dirty="0" err="1"/>
+              <a:t>ikili</a:t>
+            </a:r>
+            <a:r>
+              <a:rPr dirty="0"/>
+              <a:t> </a:t>
+            </a:r>
+            <a:r>
+              <a:rPr dirty="0" err="1"/>
+              <a:t>lojistik</a:t>
+            </a:r>
+            <a:r>
+              <a:rPr dirty="0"/>
+              <a:t> </a:t>
+            </a:r>
+            <a:r>
+              <a:rPr dirty="0" err="1"/>
+              <a:t>regresyonla</a:t>
+            </a:r>
+            <a:r>
+              <a:rPr dirty="0"/>
+              <a:t> </a:t>
+            </a:r>
+            <a:r>
+              <a:rPr dirty="0" err="1"/>
+              <a:t>değerlendirilmiş</a:t>
+            </a:r>
+            <a:r>
+              <a:rPr dirty="0"/>
+              <a:t> </a:t>
+            </a:r>
+            <a:r>
+              <a:rPr dirty="0" err="1"/>
+              <a:t>ve</a:t>
+            </a:r>
+            <a:r>
+              <a:rPr dirty="0"/>
+              <a:t> Bonferroni </a:t>
+            </a:r>
+            <a:r>
+              <a:rPr dirty="0" err="1"/>
+              <a:t>düzeltmesi</a:t>
+            </a:r>
+            <a:r>
+              <a:rPr dirty="0"/>
+              <a:t> </a:t>
+            </a:r>
+            <a:r>
+              <a:rPr dirty="0" err="1"/>
+              <a:t>uygulanmıştır</a:t>
+            </a:r>
+            <a:r>
+              <a:rPr dirty="0"/>
+              <a:t>.</a:t>
             </a:r>
           </a:p>
         </p:txBody>
@@ -1037,7 +1312,7 @@
             </a:r>
             <a:r>
               <a:rPr lang="tr-TR" dirty="0"/>
-              <a:t>0,9u</a:t>
+              <a:t>09u</a:t>
             </a:r>
             <a:r>
               <a:rPr dirty="0"/>
@@ -3088,8 +3363,12 @@
           <a:lstStyle/>
           <a:p>
             <a:r>
+              <a:rPr lang="tr-TR" dirty="0" err="1"/>
+              <a:t>Burda</a:t>
+            </a:r>
+            <a:r>
               <a:rPr lang="tr-TR" dirty="0"/>
-              <a:t>Bu tabloda Sigara içme ve tedaviye ilişkin belirli parametreler sigara bırakma durumu ile karşılaştırılmış </a:t>
+              <a:t> da Sigara içme ve tedaviye ilişkin belirli parametreler sigara bırakma durumu ile karşılaştırılmış </a:t>
             </a:r>
             <a:r>
               <a:rPr dirty="0"/>
@@ -4335,7 +4614,7 @@
           <a:p>
             <a:r>
               <a:rPr lang="tr-TR" dirty="0"/>
-              <a:t>makalenin ilk sayfasını görüyorsunuz. Makale Türkiye Aile Hekimleri Uzmanlık Derneği'nin yayın organı olan </a:t>
+              <a:t>makalenin ilk sayfasını görüyorsunuz. Makale </a:t>
             </a:r>
             <a:r>
               <a:rPr lang="tr-TR" dirty="0" err="1"/>
@@ -8232,7 +8511,7 @@
           </a:prstGeom>
           <a:extLst>
             <a:ext uri="{C572A759-6A51-4108-AA02-DFA0A04FC94B}">
-              <ma14:wrappingTextBoxFlag xmlns="" xmlns:ma14="http://schemas.microsoft.com/office/mac/drawingml/2011/main" val="0"/>
+              <ma14:wrappingTextBoxFlag xmlns:ma14="http://schemas.microsoft.com/office/mac/drawingml/2011/main" xmlns="" val="0"/>
             </a:ext>
           </a:extLst>
         </p:spPr>
@@ -8351,7 +8630,7 @@
           </a:prstGeom>
           <a:extLst>
             <a:ext uri="{C572A759-6A51-4108-AA02-DFA0A04FC94B}">
-              <ma14:wrappingTextBoxFlag xmlns="" xmlns:ma14="http://schemas.microsoft.com/office/mac/drawingml/2011/main" val="0"/>
+              <ma14:wrappingTextBoxFlag xmlns:ma14="http://schemas.microsoft.com/office/mac/drawingml/2011/main" xmlns="" val="0"/>
             </a:ext>
           </a:extLst>
         </p:spPr>
@@ -8470,7 +8749,7 @@
           </a:prstGeom>
           <a:extLst>
             <a:ext uri="{C572A759-6A51-4108-AA02-DFA0A04FC94B}">
-              <ma14:wrappingTextBoxFlag xmlns="" xmlns:ma14="http://schemas.microsoft.com/office/mac/drawingml/2011/main" val="0"/>
+              <ma14:wrappingTextBoxFlag xmlns:ma14="http://schemas.microsoft.com/office/mac/drawingml/2011/main" xmlns="" val="0"/>
             </a:ext>
           </a:extLst>
         </p:spPr>
@@ -8545,7 +8824,7 @@
           </a:prstGeom>
           <a:extLst>
             <a:ext uri="{C572A759-6A51-4108-AA02-DFA0A04FC94B}">
-              <ma14:wrappingTextBoxFlag xmlns="" xmlns:ma14="http://schemas.microsoft.com/office/mac/drawingml/2011/main" val="0"/>
+              <ma14:wrappingTextBoxFlag xmlns:ma14="http://schemas.microsoft.com/office/mac/drawingml/2011/main" xmlns="" val="0"/>
             </a:ext>
           </a:extLst>
         </p:spPr>
@@ -9073,7 +9352,7 @@
           </a:prstGeom>
           <a:extLst>
             <a:ext uri="{C572A759-6A51-4108-AA02-DFA0A04FC94B}">
-              <ma14:wrappingTextBoxFlag xmlns="" xmlns:ma14="http://schemas.microsoft.com/office/mac/drawingml/2011/main" val="0"/>
+              <ma14:wrappingTextBoxFlag xmlns:ma14="http://schemas.microsoft.com/office/mac/drawingml/2011/main" xmlns="" val="0"/>
             </a:ext>
           </a:extLst>
         </p:spPr>
@@ -10128,7 +10407,7 @@
           </a:prstGeom>
           <a:extLst>
             <a:ext uri="{C572A759-6A51-4108-AA02-DFA0A04FC94B}">
-              <ma14:wrappingTextBoxFlag xmlns="" xmlns:ma14="http://schemas.microsoft.com/office/mac/drawingml/2011/main" val="0"/>
+              <ma14:wrappingTextBoxFlag xmlns:ma14="http://schemas.microsoft.com/office/mac/drawingml/2011/main" xmlns="" val="0"/>
             </a:ext>
           </a:extLst>
         </p:spPr>
@@ -10896,7 +11175,7 @@
           </a:prstGeom>
           <a:extLst>
             <a:ext uri="{C572A759-6A51-4108-AA02-DFA0A04FC94B}">
-              <ma14:wrappingTextBoxFlag xmlns="" xmlns:ma14="http://schemas.microsoft.com/office/mac/drawingml/2011/main" val="0"/>
+              <ma14:wrappingTextBoxFlag xmlns:ma14="http://schemas.microsoft.com/office/mac/drawingml/2011/main" xmlns="" val="0"/>
             </a:ext>
           </a:extLst>
         </p:spPr>
@@ -11654,7 +11933,7 @@
           </a:prstGeom>
           <a:extLst>
             <a:ext uri="{C572A759-6A51-4108-AA02-DFA0A04FC94B}">
-              <ma14:wrappingTextBoxFlag xmlns="" xmlns:ma14="http://schemas.microsoft.com/office/mac/drawingml/2011/main" val="0"/>
+              <ma14:wrappingTextBoxFlag xmlns:ma14="http://schemas.microsoft.com/office/mac/drawingml/2011/main" xmlns="" val="0"/>
             </a:ext>
           </a:extLst>
         </p:spPr>
@@ -12031,7 +12310,7 @@
           </a:prstGeom>
           <a:extLst>
             <a:ext uri="{C572A759-6A51-4108-AA02-DFA0A04FC94B}">
-              <ma14:wrappingTextBoxFlag xmlns="" xmlns:ma14="http://schemas.microsoft.com/office/mac/drawingml/2011/main" val="0"/>
+              <ma14:wrappingTextBoxFlag xmlns:ma14="http://schemas.microsoft.com/office/mac/drawingml/2011/main" xmlns="" val="0"/>
             </a:ext>
           </a:extLst>
         </p:spPr>
@@ -12310,7 +12589,7 @@
           </a:prstGeom>
           <a:extLst>
             <a:ext uri="{C572A759-6A51-4108-AA02-DFA0A04FC94B}">
-              <ma14:wrappingTextBoxFlag xmlns="" xmlns:ma14="http://schemas.microsoft.com/office/mac/drawingml/2011/main" val="0"/>
+              <ma14:wrappingTextBoxFlag xmlns:ma14="http://schemas.microsoft.com/office/mac/drawingml/2011/main" xmlns="" val="0"/>
             </a:ext>
           </a:extLst>
         </p:spPr>
@@ -12601,7 +12880,7 @@
           </a:prstGeom>
           <a:extLst>
             <a:ext uri="{C572A759-6A51-4108-AA02-DFA0A04FC94B}">
-              <ma14:wrappingTextBoxFlag xmlns="" xmlns:ma14="http://schemas.microsoft.com/office/mac/drawingml/2011/main" val="0"/>
+              <ma14:wrappingTextBoxFlag xmlns:ma14="http://schemas.microsoft.com/office/mac/drawingml/2011/main" xmlns="" val="0"/>
             </a:ext>
           </a:extLst>
         </p:spPr>
@@ -12880,7 +13159,7 @@
           </a:prstGeom>
           <a:extLst>
             <a:ext uri="{C572A759-6A51-4108-AA02-DFA0A04FC94B}">
-              <ma14:wrappingTextBoxFlag xmlns="" xmlns:ma14="http://schemas.microsoft.com/office/mac/drawingml/2011/main" val="0"/>
+              <ma14:wrappingTextBoxFlag xmlns:ma14="http://schemas.microsoft.com/office/mac/drawingml/2011/main" xmlns="" val="0"/>
             </a:ext>
           </a:extLst>
         </p:spPr>
@@ -13320,7 +13599,7 @@
           </a:prstGeom>
           <a:extLst>
             <a:ext uri="{C572A759-6A51-4108-AA02-DFA0A04FC94B}">
-              <ma14:wrappingTextBoxFlag xmlns="" xmlns:ma14="http://schemas.microsoft.com/office/mac/drawingml/2011/main" val="0"/>
+              <ma14:wrappingTextBoxFlag xmlns:ma14="http://schemas.microsoft.com/office/mac/drawingml/2011/main" xmlns="" val="0"/>
             </a:ext>
           </a:extLst>
         </p:spPr>
@@ -13763,7 +14042,7 @@
           </a:prstGeom>
           <a:extLst>
             <a:ext uri="{C572A759-6A51-4108-AA02-DFA0A04FC94B}">
-              <ma14:wrappingTextBoxFlag xmlns="" xmlns:ma14="http://schemas.microsoft.com/office/mac/drawingml/2011/main" val="0"/>
+              <ma14:wrappingTextBoxFlag xmlns:ma14="http://schemas.microsoft.com/office/mac/drawingml/2011/main" xmlns="" val="0"/>
             </a:ext>
           </a:extLst>
         </p:spPr>
@@ -14071,7 +14350,7 @@
           </a:prstGeom>
           <a:extLst>
             <a:ext uri="{C572A759-6A51-4108-AA02-DFA0A04FC94B}">
-              <ma14:wrappingTextBoxFlag xmlns="" xmlns:ma14="http://schemas.microsoft.com/office/mac/drawingml/2011/main" val="0"/>
+              <ma14:wrappingTextBoxFlag xmlns:ma14="http://schemas.microsoft.com/office/mac/drawingml/2011/main" xmlns="" val="0"/>
             </a:ext>
           </a:extLst>
         </p:spPr>
@@ -14841,7 +15120,7 @@
           </a:prstGeom>
           <a:extLst>
             <a:ext uri="{C572A759-6A51-4108-AA02-DFA0A04FC94B}">
-              <ma14:wrappingTextBoxFlag xmlns="" xmlns:ma14="http://schemas.microsoft.com/office/mac/drawingml/2011/main" val="0"/>
+              <ma14:wrappingTextBoxFlag xmlns:ma14="http://schemas.microsoft.com/office/mac/drawingml/2011/main" xmlns="" val="0"/>
             </a:ext>
           </a:extLst>
         </p:spPr>
@@ -15487,7 +15766,7 @@
           </a:prstGeom>
           <a:extLst>
             <a:ext uri="{C572A759-6A51-4108-AA02-DFA0A04FC94B}">
-              <ma14:wrappingTextBoxFlag xmlns="" xmlns:ma14="http://schemas.microsoft.com/office/mac/drawingml/2011/main" val="0"/>
+              <ma14:wrappingTextBoxFlag xmlns:ma14="http://schemas.microsoft.com/office/mac/drawingml/2011/main" xmlns="" val="0"/>
             </a:ext>
           </a:extLst>
         </p:spPr>
@@ -15955,7 +16234,7 @@
           </a:prstGeom>
           <a:extLst>
             <a:ext uri="{C572A759-6A51-4108-AA02-DFA0A04FC94B}">
-              <ma14:wrappingTextBoxFlag xmlns="" xmlns:ma14="http://schemas.microsoft.com/office/mac/drawingml/2011/main" val="0"/>
+              <ma14:wrappingTextBoxFlag xmlns:ma14="http://schemas.microsoft.com/office/mac/drawingml/2011/main" xmlns="" val="0"/>
             </a:ext>
           </a:extLst>
         </p:spPr>
@@ -16398,7 +16677,7 @@
           </a:prstGeom>
           <a:extLst>
             <a:ext uri="{C572A759-6A51-4108-AA02-DFA0A04FC94B}">
-              <ma14:wrappingTextBoxFlag xmlns="" xmlns:ma14="http://schemas.microsoft.com/office/mac/drawingml/2011/main" val="0"/>
+              <ma14:wrappingTextBoxFlag xmlns:ma14="http://schemas.microsoft.com/office/mac/drawingml/2011/main" xmlns="" val="0"/>
             </a:ext>
           </a:extLst>
         </p:spPr>
@@ -16968,7 +17247,7 @@
           </a:prstGeom>
           <a:extLst>
             <a:ext uri="{C572A759-6A51-4108-AA02-DFA0A04FC94B}">
-              <ma14:wrappingTextBoxFlag xmlns="" xmlns:ma14="http://schemas.microsoft.com/office/mac/drawingml/2011/main" val="0"/>
+              <ma14:wrappingTextBoxFlag xmlns:ma14="http://schemas.microsoft.com/office/mac/drawingml/2011/main" xmlns="" val="0"/>
             </a:ext>
           </a:extLst>
         </p:spPr>
@@ -17426,7 +17705,7 @@
           </a:prstGeom>
           <a:extLst>
             <a:ext uri="{C572A759-6A51-4108-AA02-DFA0A04FC94B}">
-              <ma14:wrappingTextBoxFlag xmlns="" xmlns:ma14="http://schemas.microsoft.com/office/mac/drawingml/2011/main" val="0"/>
+              <ma14:wrappingTextBoxFlag xmlns:ma14="http://schemas.microsoft.com/office/mac/drawingml/2011/main" xmlns="" val="0"/>
             </a:ext>
           </a:extLst>
         </p:spPr>
@@ -17696,7 +17975,7 @@
           </a:prstGeom>
           <a:extLst>
             <a:ext uri="{C572A759-6A51-4108-AA02-DFA0A04FC94B}">
-              <ma14:wrappingTextBoxFlag xmlns="" xmlns:ma14="http://schemas.microsoft.com/office/mac/drawingml/2011/main" val="0"/>
+              <ma14:wrappingTextBoxFlag xmlns:ma14="http://schemas.microsoft.com/office/mac/drawingml/2011/main" xmlns="" val="0"/>
             </a:ext>
           </a:extLst>
         </p:spPr>
@@ -18504,7 +18783,7 @@
           </a:prstGeom>
           <a:extLst>
             <a:ext uri="{C572A759-6A51-4108-AA02-DFA0A04FC94B}">
-              <ma14:wrappingTextBoxFlag xmlns="" xmlns:ma14="http://schemas.microsoft.com/office/mac/drawingml/2011/main" val="0"/>
+              <ma14:wrappingTextBoxFlag xmlns:ma14="http://schemas.microsoft.com/office/mac/drawingml/2011/main" xmlns="" val="0"/>
             </a:ext>
           </a:extLst>
         </p:spPr>
@@ -19206,7 +19485,7 @@
           </a:prstGeom>
           <a:extLst>
             <a:ext uri="{C572A759-6A51-4108-AA02-DFA0A04FC94B}">
-              <ma14:wrappingTextBoxFlag xmlns="" xmlns:ma14="http://schemas.microsoft.com/office/mac/drawingml/2011/main" val="0"/>
+              <ma14:wrappingTextBoxFlag xmlns:ma14="http://schemas.microsoft.com/office/mac/drawingml/2011/main" xmlns="" val="0"/>
             </a:ext>
           </a:extLst>
         </p:spPr>
@@ -19874,7 +20153,7 @@
           </a:prstGeom>
           <a:extLst>
             <a:ext uri="{C572A759-6A51-4108-AA02-DFA0A04FC94B}">
-              <ma14:wrappingTextBoxFlag xmlns="" xmlns:ma14="http://schemas.microsoft.com/office/mac/drawingml/2011/main" val="0"/>
+              <ma14:wrappingTextBoxFlag xmlns:ma14="http://schemas.microsoft.com/office/mac/drawingml/2011/main" xmlns="" val="0"/>
             </a:ext>
           </a:extLst>
         </p:spPr>
@@ -20118,7 +20397,7 @@
           </a:prstGeom>
           <a:extLst>
             <a:ext uri="{C572A759-6A51-4108-AA02-DFA0A04FC94B}">
-              <ma14:wrappingTextBoxFlag xmlns="" xmlns:ma14="http://schemas.microsoft.com/office/mac/drawingml/2011/main" val="0"/>
+              <ma14:wrappingTextBoxFlag xmlns:ma14="http://schemas.microsoft.com/office/mac/drawingml/2011/main" xmlns="" val="0"/>
             </a:ext>
           </a:extLst>
         </p:spPr>
@@ -20782,7 +21061,7 @@
           </a:prstGeom>
           <a:extLst>
             <a:ext uri="{C572A759-6A51-4108-AA02-DFA0A04FC94B}">
-              <ma14:wrappingTextBoxFlag xmlns="" xmlns:ma14="http://schemas.microsoft.com/office/mac/drawingml/2011/main" val="0"/>
+              <ma14:wrappingTextBoxFlag xmlns:ma14="http://schemas.microsoft.com/office/mac/drawingml/2011/main" xmlns="" val="0"/>
             </a:ext>
           </a:extLst>
         </p:spPr>
@@ -21603,7 +21882,7 @@
           </a:prstGeom>
           <a:extLst>
             <a:ext uri="{C572A759-6A51-4108-AA02-DFA0A04FC94B}">
-              <ma14:wrappingTextBoxFlag xmlns="" xmlns:ma14="http://schemas.microsoft.com/office/mac/drawingml/2011/main" val="0"/>
+              <ma14:wrappingTextBoxFlag xmlns:ma14="http://schemas.microsoft.com/office/mac/drawingml/2011/main" xmlns="" val="0"/>
             </a:ext>
           </a:extLst>
         </p:spPr>
@@ -22215,7 +22494,7 @@
           </a:prstGeom>
           <a:extLst>
             <a:ext uri="{C572A759-6A51-4108-AA02-DFA0A04FC94B}">
-              <ma14:wrappingTextBoxFlag xmlns="" xmlns:ma14="http://schemas.microsoft.com/office/mac/drawingml/2011/main" val="0"/>
+              <ma14:wrappingTextBoxFlag xmlns:ma14="http://schemas.microsoft.com/office/mac/drawingml/2011/main" xmlns="" val="0"/>
             </a:ext>
           </a:extLst>
         </p:spPr>
